--- a/АК/presentation-travelplus-interview.pptx
+++ b/АК/presentation-travelplus-interview.pptx
@@ -15,6 +15,7 @@
     <p:sldId id="263" r:id="rId14"/>
     <p:sldId id="264" r:id="rId15"/>
     <p:sldId id="265" r:id="rId16"/>
+    <p:sldId id="266" r:id="rId17"/>
   </p:sldIdLst>
   <p:sldSz cx="12191695" cy="6858000" type="screen4x3"/>
   <p:notesSz cx="6858000" cy="9144000"/>
@@ -3112,7 +3113,7 @@
             <a:avLst/>
           </a:prstGeom>
           <a:solidFill>
-            <a:srgbClr val="FFFFFF"/>
+            <a:srgbClr val="F7F9FB"/>
           </a:solidFill>
           <a:ln>
             <a:noFill/>
@@ -3155,7 +3156,7 @@
             <a:avLst/>
           </a:prstGeom>
           <a:solidFill>
-            <a:srgbClr val="1B2A4A"/>
+            <a:srgbClr val="1F6B5C"/>
           </a:solidFill>
           <a:ln>
             <a:noFill/>
@@ -3185,57 +3186,14 @@
       </p:sp>
       <p:sp>
         <p:nvSpPr>
-          <p:cNvPr id="4" name="Rectangle 3"/>
-          <p:cNvSpPr/>
-          <p:nvPr/>
-        </p:nvSpPr>
-        <p:spPr>
-          <a:xfrm>
-            <a:off x="502920" y="1828800"/>
-            <a:ext cx="2011680" cy="54864"/>
-          </a:xfrm>
-          <a:prstGeom prst="rect">
-            <a:avLst/>
-          </a:prstGeom>
-          <a:solidFill>
-            <a:srgbClr val="2F6F6A"/>
-          </a:solidFill>
-          <a:ln>
-            <a:noFill/>
-          </a:ln>
-        </p:spPr>
-        <p:style>
-          <a:lnRef idx="1">
-            <a:schemeClr val="accent1"/>
-          </a:lnRef>
-          <a:fillRef idx="3">
-            <a:schemeClr val="accent1"/>
-          </a:fillRef>
-          <a:effectRef idx="2">
-            <a:schemeClr val="accent1"/>
-          </a:effectRef>
-          <a:fontRef idx="minor">
-            <a:schemeClr val="lt1"/>
-          </a:fontRef>
-        </p:style>
-        <p:txBody>
-          <a:bodyPr rtlCol="0" anchor="ctr"/>
-          <a:lstStyle/>
-          <a:p>
-            <a:pPr algn="ctr"/>
-          </a:p>
-        </p:txBody>
-      </p:sp>
-      <p:sp>
-        <p:nvSpPr>
-          <p:cNvPr id="5" name="TextBox 4"/>
+          <p:cNvPr id="4" name="TextBox 3"/>
           <p:cNvSpPr txBox="1"/>
           <p:nvPr/>
         </p:nvSpPr>
         <p:spPr>
           <a:xfrm>
-            <a:off x="502920" y="2011680"/>
-            <a:ext cx="10972800" cy="914400"/>
+            <a:off x="502920" y="1828800"/>
+            <a:ext cx="11155680" cy="640080"/>
           </a:xfrm>
           <a:prstGeom prst="rect">
             <a:avLst/>
@@ -3248,15 +3206,13 @@
           </a:bodyPr>
           <a:lstStyle/>
           <a:p>
-            <a:pPr>
-              <a:defRPr sz="3600" b="1">
-                <a:solidFill>
-                  <a:srgbClr val="1B2A4A"/>
-                </a:solidFill>
-                <a:latin typeface="Calibri"/>
-              </a:defRPr>
-            </a:pPr>
-            <a:r>
+            <a:r>
+              <a:rPr sz="2800" b="1">
+                <a:solidFill>
+                  <a:srgbClr val="1A2A2E"/>
+                </a:solidFill>
+                <a:latin typeface="Calibri"/>
+              </a:rPr>
               <a:t>Павел Биджиев</a:t>
             </a:r>
           </a:p>
@@ -3264,14 +3220,14 @@
       </p:sp>
       <p:sp>
         <p:nvSpPr>
-          <p:cNvPr id="6" name="TextBox 5"/>
+          <p:cNvPr id="5" name="TextBox 4"/>
           <p:cNvSpPr txBox="1"/>
           <p:nvPr/>
         </p:nvSpPr>
         <p:spPr>
           <a:xfrm>
-            <a:off x="502920" y="2834640"/>
-            <a:ext cx="10972800" cy="457200"/>
+            <a:off x="502920" y="2560320"/>
+            <a:ext cx="11155680" cy="5303520"/>
           </a:xfrm>
           <a:prstGeom prst="rect">
             <a:avLst/>
@@ -3279,35 +3235,118 @@
           <a:noFill/>
         </p:spPr>
         <p:txBody>
-          <a:bodyPr wrap="none">
+          <a:bodyPr wrap="square">
             <a:spAutoFit/>
           </a:bodyPr>
           <a:lstStyle/>
           <a:p>
             <a:pPr>
-              <a:defRPr sz="1800" b="0">
-                <a:solidFill>
-                  <a:srgbClr val="555555"/>
-                </a:solidFill>
-                <a:latin typeface="Calibri"/>
-              </a:defRPr>
-            </a:pPr>
-            <a:r>
-              <a:t>Продакт-менеджер  ·  физические товары  ·  косметика / HoReCa</a:t>
-            </a:r>
-          </a:p>
-        </p:txBody>
-      </p:sp>
-      <p:sp>
-        <p:nvSpPr>
-          <p:cNvPr id="7" name="TextBox 6"/>
+              <a:spcAft>
+                <a:spcPts val="600"/>
+              </a:spcAft>
+            </a:pPr>
+            <a:r>
+              <a:rPr sz="2000" b="0">
+                <a:solidFill>
+                  <a:srgbClr val="2C3A3F"/>
+                </a:solidFill>
+                <a:latin typeface="Calibri"/>
+              </a:rPr>
+              <a:t>Продакт / бренд-логика · физические товары · HoReCa amenities</a:t>
+            </a:r>
+          </a:p>
+          <a:p>
+            <a:pPr>
+              <a:spcAft>
+                <a:spcPts val="600"/>
+              </a:spcAft>
+            </a:pPr>
+            <a:r>
+              <a:rPr sz="2000" b="0">
+                <a:solidFill>
+                  <a:srgbClr val="2C3A3F"/>
+                </a:solidFill>
+                <a:latin typeface="Calibri"/>
+              </a:rPr>
+              <a:t/>
+            </a:r>
+          </a:p>
+          <a:p>
+            <a:pPr>
+              <a:spcAft>
+                <a:spcPts val="600"/>
+              </a:spcAft>
+            </a:pPr>
+            <a:r>
+              <a:rPr sz="2000" b="0">
+                <a:solidFill>
+                  <a:srgbClr val="2C3A3F"/>
+                </a:solidFill>
+                <a:latin typeface="Calibri"/>
+              </a:rPr>
+              <a:t>Travel+ Natural: своя натуральная линейка — от рамки до пилота</a:t>
+            </a:r>
+          </a:p>
+          <a:p>
+            <a:pPr>
+              <a:spcAft>
+                <a:spcPts val="600"/>
+              </a:spcAft>
+            </a:pPr>
+            <a:r>
+              <a:rPr sz="2000" b="0">
+                <a:solidFill>
+                  <a:srgbClr val="2C3A3F"/>
+                </a:solidFill>
+                <a:latin typeface="Calibri"/>
+              </a:rPr>
+              <a:t/>
+            </a:r>
+          </a:p>
+          <a:p>
+            <a:pPr>
+              <a:spcAft>
+                <a:spcPts val="600"/>
+              </a:spcAft>
+            </a:pPr>
+            <a:r>
+              <a:rPr sz="2000" b="0">
+                <a:solidFill>
+                  <a:srgbClr val="2C3A3F"/>
+                </a:solidFill>
+                <a:latin typeface="Calibri"/>
+              </a:rPr>
+              <a:t>Подготовка к вакансии · АК-Сервис / Travel+ · Кириши</a:t>
+            </a:r>
+          </a:p>
+          <a:p>
+            <a:pPr>
+              <a:spcAft>
+                <a:spcPts val="600"/>
+              </a:spcAft>
+            </a:pPr>
+            <a:r>
+              <a:rPr sz="2000" b="0">
+                <a:solidFill>
+                  <a:srgbClr val="2C3A3F"/>
+                </a:solidFill>
+                <a:latin typeface="Calibri"/>
+              </a:rPr>
+              <a:t>Опора: пульт бренда v1.10 · StoryBrand · ДНК</a:t>
+            </a:r>
+          </a:p>
+        </p:txBody>
+      </p:sp>
+      <p:sp>
+        <p:nvSpPr>
+          <p:cNvPr id="6" name="TextBox 5"/>
           <p:cNvSpPr txBox="1"/>
           <p:nvPr/>
         </p:nvSpPr>
         <p:spPr>
           <a:xfrm>
-            <a:off x="502920" y="3657600"/>
-            <a:ext cx="10972800" cy="1097280"/>
+            <a:off x="502920" y="6446520"/>
+            <a:ext cx="11155680" cy="320040"/>
           </a:xfrm>
           <a:prstGeom prst="rect">
             <a:avLst/>
@@ -3315,70 +3354,19 @@
           <a:noFill/>
         </p:spPr>
         <p:txBody>
-          <a:bodyPr wrap="square">
-            <a:spAutoFit/>
-          </a:bodyPr>
-          <a:lstStyle/>
-          <a:p>
-            <a:pPr>
-              <a:defRPr sz="2400" b="1">
-                <a:solidFill>
-                  <a:srgbClr val="222222"/>
-                </a:solidFill>
-                <a:latin typeface="Calibri"/>
-              </a:defRPr>
-            </a:pPr>
-            <a:r>
-              <a:t>Развитие ассортимента Travel+:</a:t>
-            </a:r>
-          </a:p>
-          <a:p>
-            <a:pPr>
-              <a:defRPr sz="2400" b="0">
-                <a:solidFill>
-                  <a:srgbClr val="222222"/>
-                </a:solidFill>
-                <a:latin typeface="Calibri"/>
-              </a:defRPr>
-            </a:pPr>
-            <a:r>
-              <a:t>своя Natural-линейка, поставки и экономика</a:t>
-            </a:r>
-          </a:p>
-        </p:txBody>
-      </p:sp>
-      <p:sp>
-        <p:nvSpPr>
-          <p:cNvPr id="8" name="TextBox 7"/>
-          <p:cNvSpPr txBox="1"/>
-          <p:nvPr/>
-        </p:nvSpPr>
-        <p:spPr>
-          <a:xfrm>
-            <a:off x="502920" y="5943600"/>
-            <a:ext cx="10972800" cy="365760"/>
-          </a:xfrm>
-          <a:prstGeom prst="rect">
-            <a:avLst/>
-          </a:prstGeom>
-          <a:noFill/>
-        </p:spPr>
-        <p:txBody>
           <a:bodyPr wrap="none">
             <a:spAutoFit/>
           </a:bodyPr>
           <a:lstStyle/>
           <a:p>
-            <a:pPr>
-              <a:defRPr sz="1400" b="0">
-                <a:solidFill>
-                  <a:srgbClr val="555555"/>
-                </a:solidFill>
-                <a:latin typeface="Calibri"/>
-              </a:defRPr>
-            </a:pPr>
-            <a:r>
-              <a:t>Собеседование  ·  группа АК-Сервис / Travel+  ·  Кириши</a:t>
+            <a:r>
+              <a:rPr sz="1100" b="0">
+                <a:solidFill>
+                  <a:srgbClr val="5A6A70"/>
+                </a:solidFill>
+                <a:latin typeface="Calibri"/>
+              </a:rPr>
+              <a:t>Travel+ Natural · пульт v1.10 · собес · не оферта</a:t>
             </a:r>
           </a:p>
         </p:txBody>
@@ -3416,7 +3404,7 @@
             <a:avLst/>
           </a:prstGeom>
           <a:solidFill>
-            <a:srgbClr val="FFFFFF"/>
+            <a:srgbClr val="F7F9FB"/>
           </a:solidFill>
           <a:ln>
             <a:noFill/>
@@ -3459,7 +3447,7 @@
             <a:avLst/>
           </a:prstGeom>
           <a:solidFill>
-            <a:srgbClr val="1B2A4A"/>
+            <a:srgbClr val="1F6B5C"/>
           </a:solidFill>
           <a:ln>
             <a:noFill/>
@@ -3496,7 +3484,7 @@
         <p:spPr>
           <a:xfrm>
             <a:off x="502920" y="320040"/>
-            <a:ext cx="10972800" cy="640080"/>
+            <a:ext cx="11155680" cy="640080"/>
           </a:xfrm>
           <a:prstGeom prst="rect">
             <a:avLst/>
@@ -3504,21 +3492,19 @@
           <a:noFill/>
         </p:spPr>
         <p:txBody>
-          <a:bodyPr wrap="square">
+          <a:bodyPr wrap="none">
             <a:spAutoFit/>
           </a:bodyPr>
           <a:lstStyle/>
           <a:p>
-            <a:pPr>
-              <a:defRPr sz="2800" b="1">
-                <a:solidFill>
-                  <a:srgbClr val="1B2A4A"/>
-                </a:solidFill>
-                <a:latin typeface="Calibri"/>
-              </a:defRPr>
-            </a:pPr>
-            <a:r>
-              <a:t>Готов к работе · вопросы вам</a:t>
+            <a:r>
+              <a:rPr sz="2800" b="1">
+                <a:solidFill>
+                  <a:srgbClr val="1A2A2E"/>
+                </a:solidFill>
+                <a:latin typeface="Calibri"/>
+              </a:rPr>
+              <a:t>Поставки и экономика</a:t>
             </a:r>
           </a:p>
         </p:txBody>
@@ -3531,8 +3517,8 @@
         </p:nvSpPr>
         <p:spPr>
           <a:xfrm>
-            <a:off x="640080" y="1051560"/>
-            <a:ext cx="10789920" cy="4937760"/>
+            <a:off x="502920" y="1097280"/>
+            <a:ext cx="11155680" cy="5303520"/>
           </a:xfrm>
           <a:prstGeom prst="rect">
             <a:avLst/>
@@ -3547,126 +3533,81 @@
           <a:p>
             <a:pPr>
               <a:spcAft>
-                <a:spcPts val="800"/>
-              </a:spcAft>
-              <a:defRPr sz="1800">
-                <a:solidFill>
-                  <a:srgbClr val="222222"/>
-                </a:solidFill>
-                <a:latin typeface="Calibri"/>
-              </a:defRPr>
-            </a:pPr>
-            <a:r>
-              <a:t>Готов работать в Киришах на площадке.</a:t>
-            </a:r>
-          </a:p>
-          <a:p>
-            <a:pPr>
-              <a:spcAft>
-                <a:spcPts val="800"/>
-              </a:spcAft>
-              <a:defRPr sz="1800">
-                <a:solidFill>
-                  <a:srgbClr val="222222"/>
-                </a:solidFill>
-                <a:latin typeface="Calibri"/>
-              </a:defRPr>
-            </a:pPr>
-            <a:r>
-              <a:t>Фокус: ассортимент, новинки, поставщики, экономика.</a:t>
-            </a:r>
-          </a:p>
-          <a:p>
-            <a:pPr>
-              <a:spcAft>
-                <a:spcPts val="800"/>
-              </a:spcAft>
-              <a:defRPr sz="1800">
-                <a:solidFill>
-                  <a:srgbClr val="222222"/>
-                </a:solidFill>
-                <a:latin typeface="Calibri"/>
-              </a:defRPr>
-            </a:pPr>
-          </a:p>
-          <a:p>
-            <a:pPr>
-              <a:spcAft>
-                <a:spcPts val="800"/>
-              </a:spcAft>
-              <a:defRPr sz="1800">
-                <a:solidFill>
-                  <a:srgbClr val="222222"/>
-                </a:solidFill>
-                <a:latin typeface="Calibri"/>
-              </a:defRPr>
-            </a:pPr>
-            <a:r>
-              <a:t>1. Новый продукт чаще своё производство или Китай?</a:t>
-            </a:r>
-          </a:p>
-          <a:p>
-            <a:pPr>
-              <a:spcAft>
-                <a:spcPts val="800"/>
-              </a:spcAft>
-              <a:defRPr sz="1800">
-                <a:solidFill>
-                  <a:srgbClr val="222222"/>
-                </a:solidFill>
-                <a:latin typeface="Calibri"/>
-              </a:defRPr>
-            </a:pPr>
-            <a:r>
-              <a:t>2. Цикл идея → образец → серия — кто утверждает?</a:t>
-            </a:r>
-          </a:p>
-          <a:p>
-            <a:pPr>
-              <a:spcAft>
-                <a:spcPts val="800"/>
-              </a:spcAft>
-              <a:defRPr sz="1800">
-                <a:solidFill>
-                  <a:srgbClr val="222222"/>
-                </a:solidFill>
-                <a:latin typeface="Calibri"/>
-              </a:defRPr>
-            </a:pPr>
-            <a:r>
-              <a:t>3. Какие цифры на испытательном сроке?</a:t>
-            </a:r>
-          </a:p>
-          <a:p>
-            <a:pPr>
-              <a:spcAft>
-                <a:spcPts val="800"/>
-              </a:spcAft>
-              <a:defRPr sz="1800">
-                <a:solidFill>
-                  <a:srgbClr val="222222"/>
-                </a:solidFill>
-                <a:latin typeface="Calibri"/>
-              </a:defRPr>
-            </a:pPr>
-            <a:r>
-              <a:t>4. С кем в связке каждый день?</a:t>
-            </a:r>
-          </a:p>
-          <a:p>
-            <a:pPr>
-              <a:spcAft>
-                <a:spcPts val="800"/>
-              </a:spcAft>
-              <a:defRPr sz="1800">
-                <a:solidFill>
-                  <a:srgbClr val="222222"/>
-                </a:solidFill>
-                <a:latin typeface="Calibri"/>
-              </a:defRPr>
-            </a:pPr>
-            <a:r>
-              <a:t>5. Почему открыли вакансию — что сейчас болит?</a:t>
+                <a:spcPts val="600"/>
+              </a:spcAft>
+            </a:pPr>
+            <a:r>
+              <a:rPr sz="1800" b="0">
+                <a:solidFill>
+                  <a:srgbClr val="2C3A3F"/>
+                </a:solidFill>
+                <a:latin typeface="Calibri"/>
+              </a:rPr>
+              <a:t>Прайс — после COGS. Ориентир: выше HL, рядом с ЕТС, ниже NS.</a:t>
+            </a:r>
+          </a:p>
+          <a:p>
+            <a:pPr>
+              <a:spcAft>
+                <a:spcPts val="600"/>
+              </a:spcAft>
+            </a:pPr>
+            <a:r>
+              <a:rPr sz="1800" b="0">
+                <a:solidFill>
+                  <a:srgbClr val="2C3A3F"/>
+                </a:solidFill>
+                <a:latin typeface="Calibri"/>
+              </a:rPr>
+              <a:t>Не война копейкой с ЕТС — пакет и ощущение натуральности.</a:t>
+            </a:r>
+          </a:p>
+          <a:p>
+            <a:pPr>
+              <a:spcAft>
+                <a:spcPts val="600"/>
+              </a:spcAft>
+            </a:pPr>
+            <a:r>
+              <a:rPr sz="1800" b="0">
+                <a:solidFill>
+                  <a:srgbClr val="2C3A3F"/>
+                </a:solidFill>
+                <a:latin typeface="Calibri"/>
+              </a:rPr>
+              <a:t/>
+            </a:r>
+          </a:p>
+          <a:p>
+            <a:pPr>
+              <a:spcAft>
+                <a:spcPts val="600"/>
+              </a:spcAft>
+            </a:pPr>
+            <a:r>
+              <a:rPr sz="1800" b="0">
+                <a:solidFill>
+                  <a:srgbClr val="2C3A3F"/>
+                </a:solidFill>
+                <a:latin typeface="Calibri"/>
+              </a:rPr>
+              <a:t>Китай / свой завод / гибрид — открытый вопрос в DoD.</a:t>
+            </a:r>
+          </a:p>
+          <a:p>
+            <a:pPr>
+              <a:spcAft>
+                <a:spcPts val="600"/>
+              </a:spcAft>
+            </a:pPr>
+            <a:r>
+              <a:rPr sz="1800" b="0">
+                <a:solidFill>
+                  <a:srgbClr val="2C3A3F"/>
+                </a:solidFill>
+                <a:latin typeface="Calibri"/>
+              </a:rPr>
+              <a:t>До фиксации origin не обещаем «российское производство».</a:t>
             </a:r>
           </a:p>
         </p:txBody>
@@ -3679,8 +3620,8 @@
         </p:nvSpPr>
         <p:spPr>
           <a:xfrm>
-            <a:off x="457200" y="6446520"/>
-            <a:ext cx="10972800" cy="274320"/>
+            <a:off x="502920" y="6446520"/>
+            <a:ext cx="11155680" cy="320040"/>
           </a:xfrm>
           <a:prstGeom prst="rect">
             <a:avLst/>
@@ -3693,16 +3634,353 @@
           </a:bodyPr>
           <a:lstStyle/>
           <a:p>
-            <a:pPr>
-              <a:defRPr sz="1000">
-                <a:solidFill>
-                  <a:srgbClr val="555555"/>
-                </a:solidFill>
-                <a:latin typeface="Calibri"/>
-              </a:defRPr>
-            </a:pPr>
-            <a:r>
-              <a:t>Павел Биджиев  ·  Travel+ / АК-Сервис  ·  10/10</a:t>
+            <a:r>
+              <a:rPr sz="1100" b="0">
+                <a:solidFill>
+                  <a:srgbClr val="5A6A70"/>
+                </a:solidFill>
+                <a:latin typeface="Calibri"/>
+              </a:rPr>
+              <a:t>Travel+ Natural · пульт v1.10 · собес · не оферта</a:t>
+            </a:r>
+          </a:p>
+        </p:txBody>
+      </p:sp>
+    </p:spTree>
+  </p:cSld>
+  <p:clrMapOvr>
+    <a:masterClrMapping/>
+  </p:clrMapOvr>
+</p:sld>
+</file>
+
+<file path=ppt/slides/slide11.xml><?xml version="1.0" encoding="utf-8"?>
+<p:sld xmlns:a="http://schemas.openxmlformats.org/drawingml/2006/main" xmlns:p="http://schemas.openxmlformats.org/presentationml/2006/main" xmlns:r="http://schemas.openxmlformats.org/officeDocument/2006/relationships">
+  <p:cSld>
+    <p:spTree>
+      <p:nvGrpSpPr>
+        <p:cNvPr id="1" name=""/>
+        <p:cNvGrpSpPr/>
+        <p:nvPr/>
+      </p:nvGrpSpPr>
+      <p:grpSpPr/>
+      <p:sp>
+        <p:nvSpPr>
+          <p:cNvPr id="2" name="Rectangle 1"/>
+          <p:cNvSpPr/>
+          <p:nvPr/>
+        </p:nvSpPr>
+        <p:spPr>
+          <a:xfrm>
+            <a:off x="0" y="0"/>
+            <a:ext cx="12191695" cy="6858000"/>
+          </a:xfrm>
+          <a:prstGeom prst="rect">
+            <a:avLst/>
+          </a:prstGeom>
+          <a:solidFill>
+            <a:srgbClr val="F7F9FB"/>
+          </a:solidFill>
+          <a:ln>
+            <a:noFill/>
+          </a:ln>
+        </p:spPr>
+        <p:style>
+          <a:lnRef idx="1">
+            <a:schemeClr val="accent1"/>
+          </a:lnRef>
+          <a:fillRef idx="3">
+            <a:schemeClr val="accent1"/>
+          </a:fillRef>
+          <a:effectRef idx="2">
+            <a:schemeClr val="accent1"/>
+          </a:effectRef>
+          <a:fontRef idx="minor">
+            <a:schemeClr val="lt1"/>
+          </a:fontRef>
+        </p:style>
+        <p:txBody>
+          <a:bodyPr rtlCol="0" anchor="ctr"/>
+          <a:lstStyle/>
+          <a:p>
+            <a:pPr algn="ctr"/>
+          </a:p>
+        </p:txBody>
+      </p:sp>
+      <p:sp>
+        <p:nvSpPr>
+          <p:cNvPr id="3" name="Rectangle 2"/>
+          <p:cNvSpPr/>
+          <p:nvPr/>
+        </p:nvSpPr>
+        <p:spPr>
+          <a:xfrm>
+            <a:off x="0" y="0"/>
+            <a:ext cx="109728" cy="6858000"/>
+          </a:xfrm>
+          <a:prstGeom prst="rect">
+            <a:avLst/>
+          </a:prstGeom>
+          <a:solidFill>
+            <a:srgbClr val="1F6B5C"/>
+          </a:solidFill>
+          <a:ln>
+            <a:noFill/>
+          </a:ln>
+        </p:spPr>
+        <p:style>
+          <a:lnRef idx="1">
+            <a:schemeClr val="accent1"/>
+          </a:lnRef>
+          <a:fillRef idx="3">
+            <a:schemeClr val="accent1"/>
+          </a:fillRef>
+          <a:effectRef idx="2">
+            <a:schemeClr val="accent1"/>
+          </a:effectRef>
+          <a:fontRef idx="minor">
+            <a:schemeClr val="lt1"/>
+          </a:fontRef>
+        </p:style>
+        <p:txBody>
+          <a:bodyPr rtlCol="0" anchor="ctr"/>
+          <a:lstStyle/>
+          <a:p>
+            <a:pPr algn="ctr"/>
+          </a:p>
+        </p:txBody>
+      </p:sp>
+      <p:sp>
+        <p:nvSpPr>
+          <p:cNvPr id="4" name="TextBox 3"/>
+          <p:cNvSpPr txBox="1"/>
+          <p:nvPr/>
+        </p:nvSpPr>
+        <p:spPr>
+          <a:xfrm>
+            <a:off x="502920" y="320040"/>
+            <a:ext cx="11155680" cy="640080"/>
+          </a:xfrm>
+          <a:prstGeom prst="rect">
+            <a:avLst/>
+          </a:prstGeom>
+          <a:noFill/>
+        </p:spPr>
+        <p:txBody>
+          <a:bodyPr wrap="none">
+            <a:spAutoFit/>
+          </a:bodyPr>
+          <a:lstStyle/>
+          <a:p>
+            <a:r>
+              <a:rPr sz="2800" b="1">
+                <a:solidFill>
+                  <a:srgbClr val="1A2A2E"/>
+                </a:solidFill>
+                <a:latin typeface="Calibri"/>
+              </a:rPr>
+              <a:t>Итог и следующий шаг</a:t>
+            </a:r>
+          </a:p>
+        </p:txBody>
+      </p:sp>
+      <p:sp>
+        <p:nvSpPr>
+          <p:cNvPr id="5" name="TextBox 4"/>
+          <p:cNvSpPr txBox="1"/>
+          <p:nvPr/>
+        </p:nvSpPr>
+        <p:spPr>
+          <a:xfrm>
+            <a:off x="502920" y="1097280"/>
+            <a:ext cx="11155680" cy="5303520"/>
+          </a:xfrm>
+          <a:prstGeom prst="rect">
+            <a:avLst/>
+          </a:prstGeom>
+          <a:noFill/>
+        </p:spPr>
+        <p:txBody>
+          <a:bodyPr wrap="square">
+            <a:spAutoFit/>
+          </a:bodyPr>
+          <a:lstStyle/>
+          <a:p>
+            <a:pPr>
+              <a:spcAft>
+                <a:spcPts val="600"/>
+              </a:spcAft>
+            </a:pPr>
+            <a:r>
+              <a:rPr sz="1800" b="0">
+                <a:solidFill>
+                  <a:srgbClr val="2C3A3F"/>
+                </a:solidFill>
+                <a:latin typeface="Calibri"/>
+              </a:rPr>
+              <a:t>Собрал: ДНК + StoryBrand + DoD + полевая защита</a:t>
+            </a:r>
+          </a:p>
+          <a:p>
+            <a:pPr>
+              <a:spcAft>
+                <a:spcPts val="600"/>
+              </a:spcAft>
+            </a:pPr>
+            <a:r>
+              <a:rPr sz="1800" b="0">
+                <a:solidFill>
+                  <a:srgbClr val="2C3A3F"/>
+                </a:solidFill>
+                <a:latin typeface="Calibri"/>
+              </a:rPr>
+              <a:t/>
+            </a:r>
+          </a:p>
+          <a:p>
+            <a:pPr>
+              <a:spcAft>
+                <a:spcPts val="600"/>
+              </a:spcAft>
+            </a:pPr>
+            <a:r>
+              <a:rPr sz="1800" b="0">
+                <a:solidFill>
+                  <a:srgbClr val="2C3A3F"/>
+                </a:solidFill>
+                <a:latin typeface="Calibri"/>
+              </a:rPr>
+              <a:t>Готов обсудить:</a:t>
+            </a:r>
+          </a:p>
+          <a:p>
+            <a:pPr>
+              <a:spcAft>
+                <a:spcPts val="600"/>
+              </a:spcAft>
+            </a:pPr>
+            <a:r>
+              <a:rPr sz="1800" b="0">
+                <a:solidFill>
+                  <a:srgbClr val="2C3A3F"/>
+                </a:solidFill>
+                <a:latin typeface="Calibri"/>
+              </a:rPr>
+              <a:t>1) приоритет блокеров этапа 2 с технологом</a:t>
+            </a:r>
+          </a:p>
+          <a:p>
+            <a:pPr>
+              <a:spcAft>
+                <a:spcPts val="600"/>
+              </a:spcAft>
+            </a:pPr>
+            <a:r>
+              <a:rPr sz="1800" b="0">
+                <a:solidFill>
+                  <a:srgbClr val="2C3A3F"/>
+                </a:solidFill>
+                <a:latin typeface="Calibri"/>
+              </a:rPr>
+              <a:t>2) пилотный сегмент eco / wellness</a:t>
+            </a:r>
+          </a:p>
+          <a:p>
+            <a:pPr>
+              <a:spcAft>
+                <a:spcPts val="600"/>
+              </a:spcAft>
+            </a:pPr>
+            <a:r>
+              <a:rPr sz="1800" b="0">
+                <a:solidFill>
+                  <a:srgbClr val="2C3A3F"/>
+                </a:solidFill>
+                <a:latin typeface="Calibri"/>
+              </a:rPr>
+              <a:t>3) встраивание в продажи без каннибализации Hotel Line</a:t>
+            </a:r>
+          </a:p>
+          <a:p>
+            <a:pPr>
+              <a:spcAft>
+                <a:spcPts val="600"/>
+              </a:spcAft>
+            </a:pPr>
+            <a:r>
+              <a:rPr sz="1800" b="0">
+                <a:solidFill>
+                  <a:srgbClr val="2C3A3F"/>
+                </a:solidFill>
+                <a:latin typeface="Calibri"/>
+              </a:rPr>
+              <a:t/>
+            </a:r>
+          </a:p>
+          <a:p>
+            <a:pPr>
+              <a:spcAft>
+                <a:spcPts val="600"/>
+              </a:spcAft>
+            </a:pPr>
+            <a:r>
+              <a:rPr sz="1800" b="0">
+                <a:solidFill>
+                  <a:srgbClr val="2C3A3F"/>
+                </a:solidFill>
+                <a:latin typeface="Calibri"/>
+              </a:rPr>
+              <a:t>v2.0 пульта — когда завод даст %, пакет и образец.</a:t>
+            </a:r>
+          </a:p>
+          <a:p>
+            <a:pPr>
+              <a:spcAft>
+                <a:spcPts val="600"/>
+              </a:spcAft>
+            </a:pPr>
+            <a:r>
+              <a:rPr sz="1800" b="0">
+                <a:solidFill>
+                  <a:srgbClr val="2C3A3F"/>
+                </a:solidFill>
+                <a:latin typeface="Calibri"/>
+              </a:rPr>
+              <a:t>Спасибо. Вопросы.</a:t>
+            </a:r>
+          </a:p>
+        </p:txBody>
+      </p:sp>
+      <p:sp>
+        <p:nvSpPr>
+          <p:cNvPr id="6" name="TextBox 5"/>
+          <p:cNvSpPr txBox="1"/>
+          <p:nvPr/>
+        </p:nvSpPr>
+        <p:spPr>
+          <a:xfrm>
+            <a:off x="502920" y="6446520"/>
+            <a:ext cx="11155680" cy="320040"/>
+          </a:xfrm>
+          <a:prstGeom prst="rect">
+            <a:avLst/>
+          </a:prstGeom>
+          <a:noFill/>
+        </p:spPr>
+        <p:txBody>
+          <a:bodyPr wrap="none">
+            <a:spAutoFit/>
+          </a:bodyPr>
+          <a:lstStyle/>
+          <a:p>
+            <a:r>
+              <a:rPr sz="1100" b="0">
+                <a:solidFill>
+                  <a:srgbClr val="5A6A70"/>
+                </a:solidFill>
+                <a:latin typeface="Calibri"/>
+              </a:rPr>
+              <a:t>Travel+ Natural · пульт v1.10 · собес · не оферта</a:t>
             </a:r>
           </a:p>
         </p:txBody>
@@ -3740,7 +4018,7 @@
             <a:avLst/>
           </a:prstGeom>
           <a:solidFill>
-            <a:srgbClr val="FFFFFF"/>
+            <a:srgbClr val="F7F9FB"/>
           </a:solidFill>
           <a:ln>
             <a:noFill/>
@@ -3783,7 +4061,7 @@
             <a:avLst/>
           </a:prstGeom>
           <a:solidFill>
-            <a:srgbClr val="1B2A4A"/>
+            <a:srgbClr val="1F6B5C"/>
           </a:solidFill>
           <a:ln>
             <a:noFill/>
@@ -3820,7 +4098,7 @@
         <p:spPr>
           <a:xfrm>
             <a:off x="502920" y="320040"/>
-            <a:ext cx="10972800" cy="640080"/>
+            <a:ext cx="11155680" cy="640080"/>
           </a:xfrm>
           <a:prstGeom prst="rect">
             <a:avLst/>
@@ -3828,21 +4106,19 @@
           <a:noFill/>
         </p:spPr>
         <p:txBody>
-          <a:bodyPr wrap="square">
+          <a:bodyPr wrap="none">
             <a:spAutoFit/>
           </a:bodyPr>
           <a:lstStyle/>
           <a:p>
-            <a:pPr>
-              <a:defRPr sz="2800" b="1">
-                <a:solidFill>
-                  <a:srgbClr val="1B2A4A"/>
-                </a:solidFill>
-                <a:latin typeface="Calibri"/>
-              </a:defRPr>
-            </a:pPr>
-            <a:r>
-              <a:t>Как понял компанию и роль</a:t>
+            <a:r>
+              <a:rPr sz="2800" b="1">
+                <a:solidFill>
+                  <a:srgbClr val="1A2A2E"/>
+                </a:solidFill>
+                <a:latin typeface="Calibri"/>
+              </a:rPr>
+              <a:t>Как понял роль</a:t>
             </a:r>
           </a:p>
         </p:txBody>
@@ -3855,8 +4131,8 @@
         </p:nvSpPr>
         <p:spPr>
           <a:xfrm>
-            <a:off x="640080" y="1051560"/>
-            <a:ext cx="10789920" cy="4937760"/>
+            <a:off x="502920" y="1097280"/>
+            <a:ext cx="11155680" cy="5303520"/>
           </a:xfrm>
           <a:prstGeom prst="rect">
             <a:avLst/>
@@ -3871,142 +4147,129 @@
           <a:p>
             <a:pPr>
               <a:spcAft>
-                <a:spcPts val="800"/>
-              </a:spcAft>
-              <a:defRPr sz="1800">
-                <a:solidFill>
-                  <a:srgbClr val="222222"/>
-                </a:solidFill>
-                <a:latin typeface="Calibri"/>
-              </a:defRPr>
-            </a:pPr>
-            <a:r>
-              <a:t>Travel+ — производство в Киришах: косметика, тапочки, наборы для номера</a:t>
-            </a:r>
-          </a:p>
-          <a:p>
-            <a:pPr>
-              <a:spcAft>
-                <a:spcPts val="800"/>
-              </a:spcAft>
-              <a:defRPr sz="1800">
-                <a:solidFill>
-                  <a:srgbClr val="222222"/>
-                </a:solidFill>
-                <a:latin typeface="Calibri"/>
-              </a:defRPr>
-            </a:pPr>
-            <a:r>
-              <a:t>Отель может закрыть номер у одного поставщика</a:t>
-            </a:r>
-          </a:p>
-          <a:p>
-            <a:pPr>
-              <a:spcAft>
-                <a:spcPts val="800"/>
-              </a:spcAft>
-              <a:defRPr sz="1800">
-                <a:solidFill>
-                  <a:srgbClr val="222222"/>
-                </a:solidFill>
-                <a:latin typeface="Calibri"/>
-              </a:defRPr>
-            </a:pPr>
-          </a:p>
-          <a:p>
-            <a:pPr>
-              <a:spcAft>
-                <a:spcPts val="800"/>
-              </a:spcAft>
-              <a:defRPr sz="1800">
-                <a:solidFill>
-                  <a:srgbClr val="222222"/>
-                </a:solidFill>
-                <a:latin typeface="Calibri"/>
-              </a:defRPr>
-            </a:pPr>
-            <a:r>
-              <a:t>Роль продакта здесь:</a:t>
-            </a:r>
-          </a:p>
-          <a:p>
-            <a:pPr>
-              <a:spcAft>
-                <a:spcPts val="800"/>
-              </a:spcAft>
-              <a:defRPr sz="1800">
-                <a:solidFill>
-                  <a:srgbClr val="222222"/>
-                </a:solidFill>
-                <a:latin typeface="Calibri"/>
-              </a:defRPr>
-            </a:pPr>
-            <a:r>
-              <a:t>• ассортимент и новинки</a:t>
-            </a:r>
-          </a:p>
-          <a:p>
-            <a:pPr>
-              <a:spcAft>
-                <a:spcPts val="800"/>
-              </a:spcAft>
-              <a:defRPr sz="1800">
-                <a:solidFill>
-                  <a:srgbClr val="222222"/>
-                </a:solidFill>
-                <a:latin typeface="Calibri"/>
-              </a:defRPr>
-            </a:pPr>
-            <a:r>
-              <a:t>• рынок и цена</a:t>
-            </a:r>
-          </a:p>
-          <a:p>
-            <a:pPr>
-              <a:spcAft>
-                <a:spcPts val="800"/>
-              </a:spcAft>
-              <a:defRPr sz="1800">
-                <a:solidFill>
-                  <a:srgbClr val="222222"/>
-                </a:solidFill>
-                <a:latin typeface="Calibri"/>
-              </a:defRPr>
-            </a:pPr>
-            <a:r>
-              <a:t>• поставщики, в том числе Китай</a:t>
-            </a:r>
-          </a:p>
-          <a:p>
-            <a:pPr>
-              <a:spcAft>
-                <a:spcPts val="800"/>
-              </a:spcAft>
-              <a:defRPr sz="1800">
-                <a:solidFill>
-                  <a:srgbClr val="222222"/>
-                </a:solidFill>
-                <a:latin typeface="Calibri"/>
-              </a:defRPr>
-            </a:pPr>
-            <a:r>
-              <a:t>• ТЗ → образцы → серия</a:t>
-            </a:r>
-          </a:p>
-          <a:p>
-            <a:pPr>
-              <a:spcAft>
-                <a:spcPts val="800"/>
-              </a:spcAft>
-              <a:defRPr sz="1800">
-                <a:solidFill>
-                  <a:srgbClr val="222222"/>
-                </a:solidFill>
-                <a:latin typeface="Calibri"/>
-              </a:defRPr>
-            </a:pPr>
-            <a:r>
-              <a:t>• связка производства, закупок, продаж и экономики</a:t>
+                <a:spcPts val="600"/>
+              </a:spcAft>
+            </a:pPr>
+            <a:r>
+              <a:rPr sz="1800" b="0">
+                <a:solidFill>
+                  <a:srgbClr val="2C3A3F"/>
+                </a:solidFill>
+                <a:latin typeface="Calibri"/>
+              </a:rPr>
+              <a:t>Travel+ — производство и one-stop для номера: косметика, тапочки, наборы</a:t>
+            </a:r>
+          </a:p>
+          <a:p>
+            <a:pPr>
+              <a:spcAft>
+                <a:spcPts val="600"/>
+              </a:spcAft>
+            </a:pPr>
+            <a:r>
+              <a:rPr sz="1800" b="0">
+                <a:solidFill>
+                  <a:srgbClr val="2C3A3F"/>
+                </a:solidFill>
+                <a:latin typeface="Calibri"/>
+              </a:rPr>
+              <a:t/>
+            </a:r>
+          </a:p>
+          <a:p>
+            <a:pPr>
+              <a:spcAft>
+                <a:spcPts val="600"/>
+              </a:spcAft>
+            </a:pPr>
+            <a:r>
+              <a:rPr sz="1800" b="0">
+                <a:solidFill>
+                  <a:srgbClr val="2C3A3F"/>
+                </a:solidFill>
+                <a:latin typeface="Calibri"/>
+              </a:rPr>
+              <a:t>· ассортимент и новинки</a:t>
+            </a:r>
+          </a:p>
+          <a:p>
+            <a:pPr>
+              <a:spcAft>
+                <a:spcPts val="600"/>
+              </a:spcAft>
+            </a:pPr>
+            <a:r>
+              <a:rPr sz="1800" b="0">
+                <a:solidFill>
+                  <a:srgbClr val="2C3A3F"/>
+                </a:solidFill>
+                <a:latin typeface="Calibri"/>
+              </a:rPr>
+              <a:t>· позиция линейки в доме брендов</a:t>
+            </a:r>
+          </a:p>
+          <a:p>
+            <a:pPr>
+              <a:spcAft>
+                <a:spcPts val="600"/>
+              </a:spcAft>
+            </a:pPr>
+            <a:r>
+              <a:rPr sz="1800" b="0">
+                <a:solidFill>
+                  <a:srgbClr val="2C3A3F"/>
+                </a:solidFill>
+                <a:latin typeface="Calibri"/>
+              </a:rPr>
+              <a:t>· продукт и доказательства до витрины</a:t>
+            </a:r>
+          </a:p>
+          <a:p>
+            <a:pPr>
+              <a:spcAft>
+                <a:spcPts val="600"/>
+              </a:spcAft>
+            </a:pPr>
+            <a:r>
+              <a:rPr sz="1800" b="0">
+                <a:solidFill>
+                  <a:srgbClr val="2C3A3F"/>
+                </a:solidFill>
+                <a:latin typeface="Calibri"/>
+              </a:rPr>
+              <a:t>· связка технолог → продажи → экономика</a:t>
+            </a:r>
+          </a:p>
+          <a:p>
+            <a:pPr>
+              <a:spcAft>
+                <a:spcPts val="600"/>
+              </a:spcAft>
+            </a:pPr>
+            <a:r>
+              <a:rPr sz="1800" b="0">
+                <a:solidFill>
+                  <a:srgbClr val="2C3A3F"/>
+                </a:solidFill>
+                <a:latin typeface="Calibri"/>
+              </a:rPr>
+              <a:t/>
+            </a:r>
+          </a:p>
+          <a:p>
+            <a:pPr>
+              <a:spcAft>
+                <a:spcPts val="600"/>
+              </a:spcAft>
+            </a:pPr>
+            <a:r>
+              <a:rPr sz="1800" b="0">
+                <a:solidFill>
+                  <a:srgbClr val="2C3A3F"/>
+                </a:solidFill>
+                <a:latin typeface="Calibri"/>
+              </a:rPr>
+              <a:t>Не IT-roadmap. Товар от идеи до полки номера и маржи.</a:t>
             </a:r>
           </a:p>
         </p:txBody>
@@ -4019,8 +4282,8 @@
         </p:nvSpPr>
         <p:spPr>
           <a:xfrm>
-            <a:off x="457200" y="6446520"/>
-            <a:ext cx="10972800" cy="274320"/>
+            <a:off x="502920" y="6446520"/>
+            <a:ext cx="11155680" cy="320040"/>
           </a:xfrm>
           <a:prstGeom prst="rect">
             <a:avLst/>
@@ -4033,16 +4296,14 @@
           </a:bodyPr>
           <a:lstStyle/>
           <a:p>
-            <a:pPr>
-              <a:defRPr sz="1000">
-                <a:solidFill>
-                  <a:srgbClr val="555555"/>
-                </a:solidFill>
-                <a:latin typeface="Calibri"/>
-              </a:defRPr>
-            </a:pPr>
-            <a:r>
-              <a:t>Павел Биджиев  ·  Travel+ / АК-Сервис  ·  2/10</a:t>
+            <a:r>
+              <a:rPr sz="1100" b="0">
+                <a:solidFill>
+                  <a:srgbClr val="5A6A70"/>
+                </a:solidFill>
+                <a:latin typeface="Calibri"/>
+              </a:rPr>
+              <a:t>Travel+ Natural · пульт v1.10 · собес · не оферта</a:t>
             </a:r>
           </a:p>
         </p:txBody>
@@ -4080,7 +4341,7 @@
             <a:avLst/>
           </a:prstGeom>
           <a:solidFill>
-            <a:srgbClr val="FFFFFF"/>
+            <a:srgbClr val="F7F9FB"/>
           </a:solidFill>
           <a:ln>
             <a:noFill/>
@@ -4123,7 +4384,7 @@
             <a:avLst/>
           </a:prstGeom>
           <a:solidFill>
-            <a:srgbClr val="1B2A4A"/>
+            <a:srgbClr val="1F6B5C"/>
           </a:solidFill>
           <a:ln>
             <a:noFill/>
@@ -4160,7 +4421,7 @@
         <p:spPr>
           <a:xfrm>
             <a:off x="502920" y="320040"/>
-            <a:ext cx="10972800" cy="640080"/>
+            <a:ext cx="11155680" cy="640080"/>
           </a:xfrm>
           <a:prstGeom prst="rect">
             <a:avLst/>
@@ -4168,21 +4429,19 @@
           <a:noFill/>
         </p:spPr>
         <p:txBody>
-          <a:bodyPr wrap="square">
+          <a:bodyPr wrap="none">
             <a:spAutoFit/>
           </a:bodyPr>
           <a:lstStyle/>
           <a:p>
-            <a:pPr>
-              <a:defRPr sz="2800" b="1">
-                <a:solidFill>
-                  <a:srgbClr val="1B2A4A"/>
-                </a:solidFill>
-                <a:latin typeface="Calibri"/>
-              </a:defRPr>
-            </a:pPr>
-            <a:r>
-              <a:t>Рынок и конкуренты</a:t>
+            <a:r>
+              <a:rPr sz="2800" b="1">
+                <a:solidFill>
+                  <a:srgbClr val="1A2A2E"/>
+                </a:solidFill>
+                <a:latin typeface="Calibri"/>
+              </a:rPr>
+              <a:t>Дыра на витрине</a:t>
             </a:r>
           </a:p>
         </p:txBody>
@@ -4195,8 +4454,8 @@
         </p:nvSpPr>
         <p:spPr>
           <a:xfrm>
-            <a:off x="640080" y="1051560"/>
-            <a:ext cx="10789920" cy="4937760"/>
+            <a:off x="502920" y="1097280"/>
+            <a:ext cx="11155680" cy="5303520"/>
           </a:xfrm>
           <a:prstGeom prst="rect">
             <a:avLst/>
@@ -4211,126 +4470,113 @@
           <a:p>
             <a:pPr>
               <a:spcAft>
-                <a:spcPts val="800"/>
-              </a:spcAft>
-              <a:defRPr sz="1700">
-                <a:solidFill>
-                  <a:srgbClr val="222222"/>
-                </a:solidFill>
-                <a:latin typeface="Calibri"/>
-              </a:defRPr>
-            </a:pPr>
-            <a:r>
-              <a:t>ЕТС Natural — сильная eco-витрина и цены</a:t>
-            </a:r>
-          </a:p>
-          <a:p>
-            <a:pPr>
-              <a:spcAft>
-                <a:spcPts val="800"/>
-              </a:spcAft>
-              <a:defRPr sz="1700">
-                <a:solidFill>
-                  <a:srgbClr val="222222"/>
-                </a:solidFill>
-                <a:latin typeface="Calibri"/>
-              </a:defRPr>
-            </a:pPr>
-            <a:r>
-              <a:t>MEZO, Трейд-Комфорт — похожая модель «всё для номера»</a:t>
-            </a:r>
-          </a:p>
-          <a:p>
-            <a:pPr>
-              <a:spcAft>
-                <a:spcPts val="800"/>
-              </a:spcAft>
-              <a:defRPr sz="1700">
-                <a:solidFill>
-                  <a:srgbClr val="222222"/>
-                </a:solidFill>
-                <a:latin typeface="Calibri"/>
-              </a:defRPr>
-            </a:pPr>
-            <a:r>
-              <a:t>COSMI / Гранд Комфорт — широкий опт и чужие бренды</a:t>
-            </a:r>
-          </a:p>
-          <a:p>
-            <a:pPr>
-              <a:spcAft>
-                <a:spcPts val="800"/>
-              </a:spcAft>
-              <a:defRPr sz="1700">
-                <a:solidFill>
-                  <a:srgbClr val="222222"/>
-                </a:solidFill>
-                <a:latin typeface="Calibri"/>
-              </a:defRPr>
-            </a:pPr>
-            <a:r>
-              <a:t>Natura Siberica — premium в каталоге, бренд не ваш</a:t>
-            </a:r>
-          </a:p>
-          <a:p>
-            <a:pPr>
-              <a:spcAft>
-                <a:spcPts val="800"/>
-              </a:spcAft>
-              <a:defRPr sz="1700">
-                <a:solidFill>
-                  <a:srgbClr val="222222"/>
-                </a:solidFill>
-                <a:latin typeface="Calibri"/>
-              </a:defRPr>
-            </a:pPr>
-            <a:r>
-              <a:t>Контрактные заводы и дешёвый импорт — давление снизу</a:t>
-            </a:r>
-          </a:p>
-          <a:p>
-            <a:pPr>
-              <a:spcAft>
-                <a:spcPts val="800"/>
-              </a:spcAft>
-              <a:defRPr sz="1700">
-                <a:solidFill>
-                  <a:srgbClr val="222222"/>
-                </a:solidFill>
-                <a:latin typeface="Calibri"/>
-              </a:defRPr>
-            </a:pPr>
-          </a:p>
-          <a:p>
-            <a:pPr>
-              <a:spcAft>
-                <a:spcPts val="800"/>
-              </a:spcAft>
-              <a:defRPr sz="1700">
-                <a:solidFill>
-                  <a:srgbClr val="222222"/>
-                </a:solidFill>
-                <a:latin typeface="Calibri"/>
-              </a:defRPr>
-            </a:pPr>
-            <a:r>
-              <a:t>Вывод: сильный масс/мидл. Слабое место витрины — своя Natural с документами.</a:t>
-            </a:r>
-          </a:p>
-          <a:p>
-            <a:pPr>
-              <a:spcAft>
-                <a:spcPts val="800"/>
-              </a:spcAft>
-              <a:defRPr sz="1700">
-                <a:solidFill>
-                  <a:srgbClr val="222222"/>
-                </a:solidFill>
-                <a:latin typeface="Calibri"/>
-              </a:defRPr>
-            </a:pPr>
-            <a:r>
-              <a:t>Ориентир цен (витрина): Hotel Line ~12–15 ₽/30 мл · ЕТС Natural ~18 ₽/25 мл · NS выше</a:t>
+                <a:spcPts val="600"/>
+              </a:spcAft>
+            </a:pPr>
+            <a:r>
+              <a:rPr sz="1800" b="0">
+                <a:solidFill>
+                  <a:srgbClr val="2C3A3F"/>
+                </a:solidFill>
+                <a:latin typeface="Calibri"/>
+              </a:rPr>
+              <a:t>Конкуренты: ЕТС Natural · MEZO · Natura Siberica (чужой premium в каталоге)</a:t>
+            </a:r>
+          </a:p>
+          <a:p>
+            <a:pPr>
+              <a:spcAft>
+                <a:spcPts val="600"/>
+              </a:spcAft>
+            </a:pPr>
+            <a:r>
+              <a:rPr sz="1800" b="0">
+                <a:solidFill>
+                  <a:srgbClr val="2C3A3F"/>
+                </a:solidFill>
+                <a:latin typeface="Calibri"/>
+              </a:rPr>
+              <a:t/>
+            </a:r>
+          </a:p>
+          <a:p>
+            <a:pPr>
+              <a:spcAft>
+                <a:spcPts val="600"/>
+              </a:spcAft>
+            </a:pPr>
+            <a:r>
+              <a:rPr sz="1800" b="0">
+                <a:solidFill>
+                  <a:srgbClr val="2C3A3F"/>
+                </a:solidFill>
+                <a:latin typeface="Calibri"/>
+              </a:rPr>
+              <a:t>Travel+ силён в масс и среднем.</a:t>
+            </a:r>
+          </a:p>
+          <a:p>
+            <a:pPr>
+              <a:spcAft>
+                <a:spcPts val="600"/>
+              </a:spcAft>
+            </a:pPr>
+            <a:r>
+              <a:rPr sz="1800" b="0">
+                <a:solidFill>
+                  <a:srgbClr val="2C3A3F"/>
+                </a:solidFill>
+                <a:latin typeface="Calibri"/>
+              </a:rPr>
+              <a:t>Слабое место: своя понятная Natural с документами.</a:t>
+            </a:r>
+          </a:p>
+          <a:p>
+            <a:pPr>
+              <a:spcAft>
+                <a:spcPts val="600"/>
+              </a:spcAft>
+            </a:pPr>
+            <a:r>
+              <a:rPr sz="1800" b="0">
+                <a:solidFill>
+                  <a:srgbClr val="2C3A3F"/>
+                </a:solidFill>
+                <a:latin typeface="Calibri"/>
+              </a:rPr>
+              <a:t/>
+            </a:r>
+          </a:p>
+          <a:p>
+            <a:pPr>
+              <a:spcAft>
+                <a:spcPts val="600"/>
+              </a:spcAft>
+            </a:pPr>
+            <a:r>
+              <a:rPr sz="1800" b="0">
+                <a:solidFill>
+                  <a:srgbClr val="2C3A3F"/>
+                </a:solidFill>
+                <a:latin typeface="Calibri"/>
+              </a:rPr>
+              <a:t>Ориентир цен (витрина, не оферта):</a:t>
+            </a:r>
+          </a:p>
+          <a:p>
+            <a:pPr>
+              <a:spcAft>
+                <a:spcPts val="600"/>
+              </a:spcAft>
+            </a:pPr>
+            <a:r>
+              <a:rPr sz="1800" b="0">
+                <a:solidFill>
+                  <a:srgbClr val="2C3A3F"/>
+                </a:solidFill>
+                <a:latin typeface="Calibri"/>
+              </a:rPr>
+              <a:t>Hotel Line ~12–15 ₽ · ЕТС Natural ~18 ₽ / 25 мл · NS выше</a:t>
             </a:r>
           </a:p>
         </p:txBody>
@@ -4343,8 +4589,8 @@
         </p:nvSpPr>
         <p:spPr>
           <a:xfrm>
-            <a:off x="457200" y="6446520"/>
-            <a:ext cx="10972800" cy="274320"/>
+            <a:off x="502920" y="6446520"/>
+            <a:ext cx="11155680" cy="320040"/>
           </a:xfrm>
           <a:prstGeom prst="rect">
             <a:avLst/>
@@ -4357,16 +4603,14 @@
           </a:bodyPr>
           <a:lstStyle/>
           <a:p>
-            <a:pPr>
-              <a:defRPr sz="1000">
-                <a:solidFill>
-                  <a:srgbClr val="555555"/>
-                </a:solidFill>
-                <a:latin typeface="Calibri"/>
-              </a:defRPr>
-            </a:pPr>
-            <a:r>
-              <a:t>Павел Биджиев  ·  Travel+ / АК-Сервис  ·  3/10</a:t>
+            <a:r>
+              <a:rPr sz="1100" b="0">
+                <a:solidFill>
+                  <a:srgbClr val="5A6A70"/>
+                </a:solidFill>
+                <a:latin typeface="Calibri"/>
+              </a:rPr>
+              <a:t>Travel+ Natural · пульт v1.10 · собес · не оферта</a:t>
             </a:r>
           </a:p>
         </p:txBody>
@@ -4404,7 +4648,7 @@
             <a:avLst/>
           </a:prstGeom>
           <a:solidFill>
-            <a:srgbClr val="FFFFFF"/>
+            <a:srgbClr val="F7F9FB"/>
           </a:solidFill>
           <a:ln>
             <a:noFill/>
@@ -4447,7 +4691,7 @@
             <a:avLst/>
           </a:prstGeom>
           <a:solidFill>
-            <a:srgbClr val="2F6F6A"/>
+            <a:srgbClr val="1F6B5C"/>
           </a:solidFill>
           <a:ln>
             <a:noFill/>
@@ -4484,7 +4728,7 @@
         <p:spPr>
           <a:xfrm>
             <a:off x="502920" y="320040"/>
-            <a:ext cx="10972800" cy="640080"/>
+            <a:ext cx="11155680" cy="640080"/>
           </a:xfrm>
           <a:prstGeom prst="rect">
             <a:avLst/>
@@ -4492,21 +4736,19 @@
           <a:noFill/>
         </p:spPr>
         <p:txBody>
-          <a:bodyPr wrap="square">
+          <a:bodyPr wrap="none">
             <a:spAutoFit/>
           </a:bodyPr>
           <a:lstStyle/>
           <a:p>
-            <a:pPr>
-              <a:defRPr sz="2800" b="1">
-                <a:solidFill>
-                  <a:srgbClr val="2F6F6A"/>
-                </a:solidFill>
-                <a:latin typeface="Calibri"/>
-              </a:defRPr>
-            </a:pPr>
-            <a:r>
-              <a:t>Возможность: Travel+ Natural</a:t>
+            <a:r>
+              <a:rPr sz="2800" b="1">
+                <a:solidFill>
+                  <a:srgbClr val="1A2A2E"/>
+                </a:solidFill>
+                <a:latin typeface="Calibri"/>
+              </a:rPr>
+              <a:t>Дом линеек</a:t>
             </a:r>
           </a:p>
         </p:txBody>
@@ -4519,8 +4761,8 @@
         </p:nvSpPr>
         <p:spPr>
           <a:xfrm>
-            <a:off x="640080" y="1051560"/>
-            <a:ext cx="10789920" cy="4937760"/>
+            <a:off x="502920" y="1097280"/>
+            <a:ext cx="11155680" cy="5303520"/>
           </a:xfrm>
           <a:prstGeom prst="rect">
             <a:avLst/>
@@ -4535,94 +4777,129 @@
           <a:p>
             <a:pPr>
               <a:spcAft>
-                <a:spcPts val="800"/>
-              </a:spcAft>
-              <a:defRPr sz="1800">
-                <a:solidFill>
-                  <a:srgbClr val="222222"/>
-                </a:solidFill>
-                <a:latin typeface="Calibri"/>
-              </a:defRPr>
-            </a:pPr>
-            <a:r>
-              <a:t>Дом линеек: Hotel Line → дизайн-линейки → Natural → NS (чужой premium)</a:t>
-            </a:r>
-          </a:p>
-          <a:p>
-            <a:pPr>
-              <a:spcAft>
-                <a:spcPts val="800"/>
-              </a:spcAft>
-              <a:defRPr sz="1800">
-                <a:solidFill>
-                  <a:srgbClr val="222222"/>
-                </a:solidFill>
-                <a:latin typeface="Calibri"/>
-              </a:defRPr>
-            </a:pPr>
-          </a:p>
-          <a:p>
-            <a:pPr>
-              <a:spcAft>
-                <a:spcPts val="800"/>
-              </a:spcAft>
-              <a:defRPr sz="1800">
-                <a:solidFill>
-                  <a:srgbClr val="222222"/>
-                </a:solidFill>
-                <a:latin typeface="Calibri"/>
-              </a:defRPr>
-            </a:pPr>
-            <a:r>
-              <a:t>Зачем своя Natural:</a:t>
-            </a:r>
-          </a:p>
-          <a:p>
-            <a:pPr>
-              <a:spcAft>
-                <a:spcPts val="800"/>
-              </a:spcAft>
-              <a:defRPr sz="1800">
-                <a:solidFill>
-                  <a:srgbClr val="222222"/>
-                </a:solidFill>
-                <a:latin typeface="Calibri"/>
-              </a:defRPr>
-            </a:pPr>
-            <a:r>
-              <a:t>• не отдавать eco/wellness только конкурентам и чужому бренду</a:t>
-            </a:r>
-          </a:p>
-          <a:p>
-            <a:pPr>
-              <a:spcAft>
-                <a:spcPts val="800"/>
-              </a:spcAft>
-              <a:defRPr sz="1800">
-                <a:solidFill>
-                  <a:srgbClr val="222222"/>
-                </a:solidFill>
-                <a:latin typeface="Calibri"/>
-              </a:defRPr>
-            </a:pPr>
-            <a:r>
-              <a:t>• своя формула, своя маржа, свои доказательства</a:t>
-            </a:r>
-          </a:p>
-          <a:p>
-            <a:pPr>
-              <a:spcAft>
-                <a:spcPts val="800"/>
-              </a:spcAft>
-              <a:defRPr sz="1800">
-                <a:solidFill>
-                  <a:srgbClr val="222222"/>
-                </a:solidFill>
-                <a:latin typeface="Calibri"/>
-              </a:defRPr>
-            </a:pPr>
-            <a:r>
-              <a:t>• можно продавать пакетом с тапочками и наборами</a:t>
+                <a:spcPts val="600"/>
+              </a:spcAft>
+            </a:pPr>
+            <a:r>
+              <a:rPr sz="1800" b="0">
+                <a:solidFill>
+                  <a:srgbClr val="2C3A3F"/>
+                </a:solidFill>
+                <a:latin typeface="Calibri"/>
+              </a:rPr>
+              <a:t>Hotel Line → цена</a:t>
+            </a:r>
+          </a:p>
+          <a:p>
+            <a:pPr>
+              <a:spcAft>
+                <a:spcPts val="600"/>
+              </a:spcAft>
+            </a:pPr>
+            <a:r>
+              <a:rPr sz="1800" b="0">
+                <a:solidFill>
+                  <a:srgbClr val="2C3A3F"/>
+                </a:solidFill>
+                <a:latin typeface="Calibri"/>
+              </a:rPr>
+              <a:t>Fleur / Aquatique / La Nuit → дизайн и аромат</a:t>
+            </a:r>
+          </a:p>
+          <a:p>
+            <a:pPr>
+              <a:spcAft>
+                <a:spcPts val="600"/>
+              </a:spcAft>
+            </a:pPr>
+            <a:r>
+              <a:rPr sz="1800" b="0">
+                <a:solidFill>
+                  <a:srgbClr val="2C3A3F"/>
+                </a:solidFill>
+                <a:latin typeface="Calibri"/>
+              </a:rPr>
+              <a:t>Natural → натуральность + документы</a:t>
+            </a:r>
+          </a:p>
+          <a:p>
+            <a:pPr>
+              <a:spcAft>
+                <a:spcPts val="600"/>
+              </a:spcAft>
+            </a:pPr>
+            <a:r>
+              <a:rPr sz="1800" b="0">
+                <a:solidFill>
+                  <a:srgbClr val="2C3A3F"/>
+                </a:solidFill>
+                <a:latin typeface="Calibri"/>
+              </a:rPr>
+              <a:t>Natura Siberica → чужой premium</a:t>
+            </a:r>
+          </a:p>
+          <a:p>
+            <a:pPr>
+              <a:spcAft>
+                <a:spcPts val="600"/>
+              </a:spcAft>
+            </a:pPr>
+            <a:r>
+              <a:rPr sz="1800" b="0">
+                <a:solidFill>
+                  <a:srgbClr val="2C3A3F"/>
+                </a:solidFill>
+                <a:latin typeface="Calibri"/>
+              </a:rPr>
+              <a:t>СТМ → отдельный проект</a:t>
+            </a:r>
+          </a:p>
+          <a:p>
+            <a:pPr>
+              <a:spcAft>
+                <a:spcPts val="600"/>
+              </a:spcAft>
+            </a:pPr>
+            <a:r>
+              <a:rPr sz="1800" b="0">
+                <a:solidFill>
+                  <a:srgbClr val="2C3A3F"/>
+                </a:solidFill>
+                <a:latin typeface="Calibri"/>
+              </a:rPr>
+              <a:t/>
+            </a:r>
+          </a:p>
+          <a:p>
+            <a:pPr>
+              <a:spcAft>
+                <a:spcPts val="600"/>
+              </a:spcAft>
+            </a:pPr>
+            <a:r>
+              <a:rPr sz="1800" b="0">
+                <a:solidFill>
+                  <a:srgbClr val="2C3A3F"/>
+                </a:solidFill>
+                <a:latin typeface="Calibri"/>
+              </a:rPr>
+              <a:t>Мостик: дизайн и аромат — Fleur; запрос на натуральность и бумаги — Natural.</a:t>
+            </a:r>
+          </a:p>
+          <a:p>
+            <a:pPr>
+              <a:spcAft>
+                <a:spcPts val="600"/>
+              </a:spcAft>
+            </a:pPr>
+            <a:r>
+              <a:rPr sz="1800" b="0">
+                <a:solidFill>
+                  <a:srgbClr val="2C3A3F"/>
+                </a:solidFill>
+                <a:latin typeface="Calibri"/>
+              </a:rPr>
+              <a:t>Не конкурируют. Могут жить на разных этажах.</a:t>
             </a:r>
           </a:p>
         </p:txBody>
@@ -4635,8 +4912,8 @@
         </p:nvSpPr>
         <p:spPr>
           <a:xfrm>
-            <a:off x="457200" y="6446520"/>
-            <a:ext cx="10972800" cy="274320"/>
+            <a:off x="502920" y="6446520"/>
+            <a:ext cx="11155680" cy="320040"/>
           </a:xfrm>
           <a:prstGeom prst="rect">
             <a:avLst/>
@@ -4649,16 +4926,14 @@
           </a:bodyPr>
           <a:lstStyle/>
           <a:p>
-            <a:pPr>
-              <a:defRPr sz="1000">
-                <a:solidFill>
-                  <a:srgbClr val="555555"/>
-                </a:solidFill>
-                <a:latin typeface="Calibri"/>
-              </a:defRPr>
-            </a:pPr>
-            <a:r>
-              <a:t>Павел Биджиев  ·  Travel+ / АК-Сервис  ·  4/10</a:t>
+            <a:r>
+              <a:rPr sz="1100" b="0">
+                <a:solidFill>
+                  <a:srgbClr val="5A6A70"/>
+                </a:solidFill>
+                <a:latin typeface="Calibri"/>
+              </a:rPr>
+              <a:t>Travel+ Natural · пульт v1.10 · собес · не оферта</a:t>
             </a:r>
           </a:p>
         </p:txBody>
@@ -4696,7 +4971,7 @@
             <a:avLst/>
           </a:prstGeom>
           <a:solidFill>
-            <a:srgbClr val="FFFFFF"/>
+            <a:srgbClr val="F7F9FB"/>
           </a:solidFill>
           <a:ln>
             <a:noFill/>
@@ -4739,7 +5014,7 @@
             <a:avLst/>
           </a:prstGeom>
           <a:solidFill>
-            <a:srgbClr val="2F6F6A"/>
+            <a:srgbClr val="1F6B5C"/>
           </a:solidFill>
           <a:ln>
             <a:noFill/>
@@ -4776,7 +5051,7 @@
         <p:spPr>
           <a:xfrm>
             <a:off x="502920" y="320040"/>
-            <a:ext cx="10972800" cy="640080"/>
+            <a:ext cx="11155680" cy="640080"/>
           </a:xfrm>
           <a:prstGeom prst="rect">
             <a:avLst/>
@@ -4784,21 +5059,19 @@
           <a:noFill/>
         </p:spPr>
         <p:txBody>
-          <a:bodyPr wrap="square">
+          <a:bodyPr wrap="none">
             <a:spAutoFit/>
           </a:bodyPr>
           <a:lstStyle/>
           <a:p>
-            <a:pPr>
-              <a:defRPr sz="2800" b="1">
-                <a:solidFill>
-                  <a:srgbClr val="2F6F6A"/>
-                </a:solidFill>
-                <a:latin typeface="Calibri"/>
-              </a:defRPr>
-            </a:pPr>
-            <a:r>
-              <a:t>Обещание и отличие</a:t>
+            <a:r>
+              <a:rPr sz="2800" b="1">
+                <a:solidFill>
+                  <a:srgbClr val="1A2A2E"/>
+                </a:solidFill>
+                <a:latin typeface="Calibri"/>
+              </a:rPr>
+              <a:t>Обещание + StoryBrand</a:t>
             </a:r>
           </a:p>
         </p:txBody>
@@ -4811,8 +5084,8 @@
         </p:nvSpPr>
         <p:spPr>
           <a:xfrm>
-            <a:off x="640080" y="1051560"/>
-            <a:ext cx="10789920" cy="4937760"/>
+            <a:off x="502920" y="1097280"/>
+            <a:ext cx="11155680" cy="5303520"/>
           </a:xfrm>
           <a:prstGeom prst="rect">
             <a:avLst/>
@@ -4827,107 +5100,129 @@
           <a:p>
             <a:pPr>
               <a:spcAft>
-                <a:spcPts val="800"/>
-              </a:spcAft>
-              <a:defRPr sz="1800">
-                <a:solidFill>
-                  <a:srgbClr val="222222"/>
-                </a:solidFill>
-                <a:latin typeface="Calibri"/>
-              </a:defRPr>
-            </a:pPr>
-            <a:r>
+                <a:spcPts val="600"/>
+              </a:spcAft>
+            </a:pPr>
+            <a:r>
+              <a:rPr sz="1800" b="0">
+                <a:solidFill>
+                  <a:srgbClr val="2C3A3F"/>
+                </a:solidFill>
+                <a:latin typeface="Calibri"/>
+              </a:rPr>
               <a:t>Обещание: мягкий уход с понятной натуральностью —</a:t>
             </a:r>
           </a:p>
           <a:p>
             <a:pPr>
               <a:spcAft>
-                <a:spcPts val="800"/>
-              </a:spcAft>
-              <a:defRPr sz="1800">
-                <a:solidFill>
-                  <a:srgbClr val="222222"/>
-                </a:solidFill>
-                <a:latin typeface="Calibri"/>
-              </a:defRPr>
-            </a:pPr>
-            <a:r>
+                <a:spcPts val="600"/>
+              </a:spcAft>
+            </a:pPr>
+            <a:r>
+              <a:rPr sz="1800" b="0">
+                <a:solidFill>
+                  <a:srgbClr val="2C3A3F"/>
+                </a:solidFill>
+                <a:latin typeface="Calibri"/>
+              </a:rPr>
               <a:t>для отеля, которому важны и гость, и документы.</a:t>
             </a:r>
           </a:p>
           <a:p>
             <a:pPr>
               <a:spcAft>
-                <a:spcPts val="800"/>
-              </a:spcAft>
-              <a:defRPr sz="1800">
-                <a:solidFill>
-                  <a:srgbClr val="222222"/>
-                </a:solidFill>
-                <a:latin typeface="Calibri"/>
-              </a:defRPr>
-            </a:pPr>
-          </a:p>
-          <a:p>
-            <a:pPr>
-              <a:spcAft>
-                <a:spcPts val="800"/>
-              </a:spcAft>
-              <a:defRPr sz="1800">
-                <a:solidFill>
-                  <a:srgbClr val="222222"/>
-                </a:solidFill>
-                <a:latin typeface="Calibri"/>
-              </a:defRPr>
-            </a:pPr>
-            <a:r>
-              <a:t>Мы: честный состав · документы · мягкий опыт в номере · один поставщик</a:t>
-            </a:r>
-          </a:p>
-          <a:p>
-            <a:pPr>
-              <a:spcAft>
-                <a:spcPts val="800"/>
-              </a:spcAft>
-              <a:defRPr sz="1800">
-                <a:solidFill>
-                  <a:srgbClr val="222222"/>
-                </a:solidFill>
-                <a:latin typeface="Calibri"/>
-              </a:defRPr>
-            </a:pPr>
-            <a:r>
-              <a:t>Не мы: самый дешёвый · fake-organic · «как NS, только дешевле»</a:t>
-            </a:r>
-          </a:p>
-          <a:p>
-            <a:pPr>
-              <a:spcAft>
-                <a:spcPts val="800"/>
-              </a:spcAft>
-              <a:defRPr sz="1800">
-                <a:solidFill>
-                  <a:srgbClr val="222222"/>
-                </a:solidFill>
-                <a:latin typeface="Calibri"/>
-              </a:defRPr>
-            </a:pPr>
-          </a:p>
-          <a:p>
-            <a:pPr>
-              <a:spcAft>
-                <a:spcPts val="800"/>
-              </a:spcAft>
-              <a:defRPr sz="1800">
-                <a:solidFill>
-                  <a:srgbClr val="222222"/>
-                </a:solidFill>
-                <a:latin typeface="Calibri"/>
-              </a:defRPr>
-            </a:pPr>
-            <a:r>
-              <a:t>Пилот: шампунь 30 мл · гель 30 мл · мыло</a:t>
+                <a:spcPts val="600"/>
+              </a:spcAft>
+            </a:pPr>
+            <a:r>
+              <a:rPr sz="1800" b="0">
+                <a:solidFill>
+                  <a:srgbClr val="2C3A3F"/>
+                </a:solidFill>
+                <a:latin typeface="Calibri"/>
+              </a:rPr>
+              <a:t/>
+            </a:r>
+          </a:p>
+          <a:p>
+            <a:pPr>
+              <a:spcAft>
+                <a:spcPts val="600"/>
+              </a:spcAft>
+            </a:pPr>
+            <a:r>
+              <a:rPr sz="1800" b="0">
+                <a:solidFill>
+                  <a:srgbClr val="2C3A3F"/>
+                </a:solidFill>
+                <a:latin typeface="Calibri"/>
+              </a:rPr>
+              <a:t>Герой: закупщик eco / wellness</a:t>
+            </a:r>
+          </a:p>
+          <a:p>
+            <a:pPr>
+              <a:spcAft>
+                <a:spcPts val="600"/>
+              </a:spcAft>
+            </a:pPr>
+            <a:r>
+              <a:rPr sz="1800" b="0">
+                <a:solidFill>
+                  <a:srgbClr val="2C3A3F"/>
+                </a:solidFill>
+                <a:latin typeface="Calibri"/>
+              </a:rPr>
+              <a:t>Проводник: Travel+ Natural</a:t>
+            </a:r>
+          </a:p>
+          <a:p>
+            <a:pPr>
+              <a:spcAft>
+                <a:spcPts val="600"/>
+              </a:spcAft>
+            </a:pPr>
+            <a:r>
+              <a:rPr sz="1800" b="0">
+                <a:solidFill>
+                  <a:srgbClr val="2C3A3F"/>
+                </a:solidFill>
+                <a:latin typeface="Calibri"/>
+              </a:rPr>
+              <a:t>План: сегмент → образец + документы → пилот</a:t>
+            </a:r>
+          </a:p>
+          <a:p>
+            <a:pPr>
+              <a:spcAft>
+                <a:spcPts val="600"/>
+              </a:spcAft>
+            </a:pPr>
+            <a:r>
+              <a:rPr sz="1800" b="0">
+                <a:solidFill>
+                  <a:srgbClr val="2C3A3F"/>
+                </a:solidFill>
+                <a:latin typeface="Calibri"/>
+              </a:rPr>
+              <a:t/>
+            </a:r>
+          </a:p>
+          <a:p>
+            <a:pPr>
+              <a:spcAft>
+                <a:spcPts val="600"/>
+              </a:spcAft>
+            </a:pPr>
+            <a:r>
+              <a:rPr sz="1800" b="0">
+                <a:solidFill>
+                  <a:srgbClr val="2C3A3F"/>
+                </a:solidFill>
+                <a:latin typeface="Calibri"/>
+              </a:rPr>
+              <a:t>Доказательства: состав · пакет Travel+ · ощущение в номере · one-stop · «простыми словами»</a:t>
             </a:r>
           </a:p>
         </p:txBody>
@@ -4940,8 +5235,8 @@
         </p:nvSpPr>
         <p:spPr>
           <a:xfrm>
-            <a:off x="457200" y="6446520"/>
-            <a:ext cx="10972800" cy="274320"/>
+            <a:off x="502920" y="6446520"/>
+            <a:ext cx="11155680" cy="320040"/>
           </a:xfrm>
           <a:prstGeom prst="rect">
             <a:avLst/>
@@ -4954,16 +5249,14 @@
           </a:bodyPr>
           <a:lstStyle/>
           <a:p>
-            <a:pPr>
-              <a:defRPr sz="1000">
-                <a:solidFill>
-                  <a:srgbClr val="555555"/>
-                </a:solidFill>
-                <a:latin typeface="Calibri"/>
-              </a:defRPr>
-            </a:pPr>
-            <a:r>
-              <a:t>Павел Биджиев  ·  Travel+ / АК-Сервис  ·  5/10</a:t>
+            <a:r>
+              <a:rPr sz="1100" b="0">
+                <a:solidFill>
+                  <a:srgbClr val="5A6A70"/>
+                </a:solidFill>
+                <a:latin typeface="Calibri"/>
+              </a:rPr>
+              <a:t>Travel+ Natural · пульт v1.10 · собес · не оферта</a:t>
             </a:r>
           </a:p>
         </p:txBody>
@@ -5001,7 +5294,7 @@
             <a:avLst/>
           </a:prstGeom>
           <a:solidFill>
-            <a:srgbClr val="FFFFFF"/>
+            <a:srgbClr val="F7F9FB"/>
           </a:solidFill>
           <a:ln>
             <a:noFill/>
@@ -5044,7 +5337,7 @@
             <a:avLst/>
           </a:prstGeom>
           <a:solidFill>
-            <a:srgbClr val="1B2A4A"/>
+            <a:srgbClr val="1F6B5C"/>
           </a:solidFill>
           <a:ln>
             <a:noFill/>
@@ -5081,7 +5374,7 @@
         <p:spPr>
           <a:xfrm>
             <a:off x="502920" y="320040"/>
-            <a:ext cx="10972800" cy="640080"/>
+            <a:ext cx="11155680" cy="640080"/>
           </a:xfrm>
           <a:prstGeom prst="rect">
             <a:avLst/>
@@ -5089,21 +5382,19 @@
           <a:noFill/>
         </p:spPr>
         <p:txBody>
-          <a:bodyPr wrap="square">
+          <a:bodyPr wrap="none">
             <a:spAutoFit/>
           </a:bodyPr>
           <a:lstStyle/>
           <a:p>
-            <a:pPr>
-              <a:defRPr sz="2800" b="1">
-                <a:solidFill>
-                  <a:srgbClr val="1B2A4A"/>
-                </a:solidFill>
-                <a:latin typeface="Calibri"/>
-              </a:defRPr>
-            </a:pPr>
-            <a:r>
-              <a:t>Рядом: СТМ сетей и диспенсер</a:t>
+            <a:r>
+              <a:rPr sz="2800" b="1">
+                <a:solidFill>
+                  <a:srgbClr val="1A2A2E"/>
+                </a:solidFill>
+                <a:latin typeface="Calibri"/>
+              </a:rPr>
+              <a:t>Границы до рынка — DoD этапа 2</a:t>
             </a:r>
           </a:p>
         </p:txBody>
@@ -5116,8 +5407,8 @@
         </p:nvSpPr>
         <p:spPr>
           <a:xfrm>
-            <a:off x="640080" y="1051560"/>
-            <a:ext cx="10789920" cy="4937760"/>
+            <a:off x="502920" y="1097280"/>
+            <a:ext cx="11155680" cy="5303520"/>
           </a:xfrm>
           <a:prstGeom prst="rect">
             <a:avLst/>
@@ -5132,110 +5423,161 @@
           <a:p>
             <a:pPr>
               <a:spcAft>
-                <a:spcPts val="800"/>
-              </a:spcAft>
-              <a:defRPr sz="1800">
-                <a:solidFill>
-                  <a:srgbClr val="222222"/>
-                </a:solidFill>
-                <a:latin typeface="Calibri"/>
-              </a:defRPr>
-            </a:pPr>
-            <a:r>
-              <a:t>СТМ для сетей:</a:t>
-            </a:r>
-          </a:p>
-          <a:p>
-            <a:pPr>
-              <a:spcAft>
-                <a:spcPts val="800"/>
-              </a:spcAft>
-              <a:defRPr sz="1800">
-                <a:solidFill>
-                  <a:srgbClr val="222222"/>
-                </a:solidFill>
-                <a:latin typeface="Calibri"/>
-              </a:defRPr>
-            </a:pPr>
-            <a:r>
-              <a:t>наша формула + логотип отеля + тапочки и наборы в одном договоре</a:t>
-            </a:r>
-          </a:p>
-          <a:p>
-            <a:pPr>
-              <a:spcAft>
-                <a:spcPts val="800"/>
-              </a:spcAft>
-              <a:defRPr sz="1800">
-                <a:solidFill>
-                  <a:srgbClr val="222222"/>
-                </a:solidFill>
-                <a:latin typeface="Calibri"/>
-              </a:defRPr>
-            </a:pPr>
-            <a:r>
-              <a:t>→ защита от ухода на чужой контрактный завод</a:t>
-            </a:r>
-          </a:p>
-          <a:p>
-            <a:pPr>
-              <a:spcAft>
-                <a:spcPts val="800"/>
-              </a:spcAft>
-              <a:defRPr sz="1800">
-                <a:solidFill>
-                  <a:srgbClr val="222222"/>
-                </a:solidFill>
-                <a:latin typeface="Calibri"/>
-              </a:defRPr>
-            </a:pPr>
-          </a:p>
-          <a:p>
-            <a:pPr>
-              <a:spcAft>
-                <a:spcPts val="800"/>
-              </a:spcAft>
-              <a:defRPr sz="1800">
-                <a:solidFill>
-                  <a:srgbClr val="222222"/>
-                </a:solidFill>
-                <a:latin typeface="Calibri"/>
-              </a:defRPr>
-            </a:pPr>
-            <a:r>
-              <a:t>Диспенсер 300 мл:</a:t>
-            </a:r>
-          </a:p>
-          <a:p>
-            <a:pPr>
-              <a:spcAft>
-                <a:spcPts val="800"/>
-              </a:spcAft>
-              <a:defRPr sz="1800">
-                <a:solidFill>
-                  <a:srgbClr val="222222"/>
-                </a:solidFill>
-                <a:latin typeface="Calibri"/>
-              </a:defRPr>
-            </a:pPr>
-            <a:r>
-              <a:t>меньше мелкого пластика · расход ниже вдолгую · тренд сетей</a:t>
-            </a:r>
-          </a:p>
-          <a:p>
-            <a:pPr>
-              <a:spcAft>
-                <a:spcPts val="800"/>
-              </a:spcAft>
-              <a:defRPr sz="1800">
-                <a:solidFill>
-                  <a:srgbClr val="222222"/>
-                </a:solidFill>
-                <a:latin typeface="Calibri"/>
-              </a:defRPr>
-            </a:pPr>
-            <a:r>
-              <a:t>у NS формат уже есть — у своих линеек зона роста</a:t>
+                <a:spcPts val="600"/>
+              </a:spcAft>
+            </a:pPr>
+            <a:r>
+              <a:rPr sz="1700" b="0">
+                <a:solidFill>
+                  <a:srgbClr val="2C3A3F"/>
+                </a:solidFill>
+                <a:latin typeface="Calibri"/>
+              </a:rPr>
+              <a:t>Пока не закрыто — витрину не открываем:</a:t>
+            </a:r>
+          </a:p>
+          <a:p>
+            <a:pPr>
+              <a:spcAft>
+                <a:spcPts val="600"/>
+              </a:spcAft>
+            </a:pPr>
+            <a:r>
+              <a:rPr sz="1700" b="0">
+                <a:solidFill>
+                  <a:srgbClr val="2C3A3F"/>
+                </a:solidFill>
+                <a:latin typeface="Calibri"/>
+              </a:rPr>
+              <a:t/>
+            </a:r>
+          </a:p>
+          <a:p>
+            <a:pPr>
+              <a:spcAft>
+                <a:spcPts val="600"/>
+              </a:spcAft>
+            </a:pPr>
+            <a:r>
+              <a:rPr sz="1700" b="0">
+                <a:solidFill>
+                  <a:srgbClr val="2C3A3F"/>
+                </a:solidFill>
+                <a:latin typeface="Calibri"/>
+              </a:rPr>
+              <a:t>□ Метод + % натуральности</a:t>
+            </a:r>
+          </a:p>
+          <a:p>
+            <a:pPr>
+              <a:spcAft>
+                <a:spcPts val="600"/>
+              </a:spcAft>
+            </a:pPr>
+            <a:r>
+              <a:rPr sz="1700" b="0">
+                <a:solidFill>
+                  <a:srgbClr val="2C3A3F"/>
+                </a:solidFill>
+                <a:latin typeface="Calibri"/>
+              </a:rPr>
+              <a:t>□ Пакет как на HL/Fleur + лист Natural</a:t>
+            </a:r>
+          </a:p>
+          <a:p>
+            <a:pPr>
+              <a:spcAft>
+                <a:spcPts val="600"/>
+              </a:spcAft>
+            </a:pPr>
+            <a:r>
+              <a:rPr sz="1700" b="0">
+                <a:solidFill>
+                  <a:srgbClr val="2C3A3F"/>
+                </a:solidFill>
+                <a:latin typeface="Calibri"/>
+              </a:rPr>
+              <a:t>□ Origin зафиксирован (без выдуманного «RU»)</a:t>
+            </a:r>
+          </a:p>
+          <a:p>
+            <a:pPr>
+              <a:spcAft>
+                <a:spcPts val="600"/>
+              </a:spcAft>
+            </a:pPr>
+            <a:r>
+              <a:rPr sz="1700" b="0">
+                <a:solidFill>
+                  <a:srgbClr val="2C3A3F"/>
+                </a:solidFill>
+                <a:latin typeface="Calibri"/>
+              </a:rPr>
+              <a:t>□ Слепой тест запаха с гостями</a:t>
+            </a:r>
+          </a:p>
+          <a:p>
+            <a:pPr>
+              <a:spcAft>
+                <a:spcPts val="600"/>
+              </a:spcAft>
+            </a:pPr>
+            <a:r>
+              <a:rPr sz="1700" b="0">
+                <a:solidFill>
+                  <a:srgbClr val="2C3A3F"/>
+                </a:solidFill>
+                <a:latin typeface="Calibri"/>
+              </a:rPr>
+              <a:t>□ Этикетка «простыми словами»</a:t>
+            </a:r>
+          </a:p>
+          <a:p>
+            <a:pPr>
+              <a:spcAft>
+                <a:spcPts val="600"/>
+              </a:spcAft>
+            </a:pPr>
+            <a:r>
+              <a:rPr sz="1700" b="0">
+                <a:solidFill>
+                  <a:srgbClr val="2C3A3F"/>
+                </a:solidFill>
+                <a:latin typeface="Calibri"/>
+              </a:rPr>
+              <a:t>□ COGS / коридор цены · Lead time / MOQ</a:t>
+            </a:r>
+          </a:p>
+          <a:p>
+            <a:pPr>
+              <a:spcAft>
+                <a:spcPts val="600"/>
+              </a:spcAft>
+            </a:pPr>
+            <a:r>
+              <a:rPr sz="1700" b="0">
+                <a:solidFill>
+                  <a:srgbClr val="2C3A3F"/>
+                </a:solidFill>
+                <a:latin typeface="Calibri"/>
+              </a:rPr>
+              <a:t/>
+            </a:r>
+          </a:p>
+          <a:p>
+            <a:pPr>
+              <a:spcAft>
+                <a:spcPts val="600"/>
+              </a:spcAft>
+            </a:pPr>
+            <a:r>
+              <a:rPr sz="1700" b="0">
+                <a:solidFill>
+                  <a:srgbClr val="2C3A3F"/>
+                </a:solidFill>
+                <a:latin typeface="Calibri"/>
+              </a:rPr>
+              <a:t>На старте: без COSMOS, если знака нет — честно.</a:t>
             </a:r>
           </a:p>
         </p:txBody>
@@ -5248,8 +5590,8 @@
         </p:nvSpPr>
         <p:spPr>
           <a:xfrm>
-            <a:off x="457200" y="6446520"/>
-            <a:ext cx="10972800" cy="274320"/>
+            <a:off x="502920" y="6446520"/>
+            <a:ext cx="11155680" cy="320040"/>
           </a:xfrm>
           <a:prstGeom prst="rect">
             <a:avLst/>
@@ -5262,16 +5604,14 @@
           </a:bodyPr>
           <a:lstStyle/>
           <a:p>
-            <a:pPr>
-              <a:defRPr sz="1000">
-                <a:solidFill>
-                  <a:srgbClr val="555555"/>
-                </a:solidFill>
-                <a:latin typeface="Calibri"/>
-              </a:defRPr>
-            </a:pPr>
-            <a:r>
-              <a:t>Павел Биджиев  ·  Travel+ / АК-Сервис  ·  6/10</a:t>
+            <a:r>
+              <a:rPr sz="1100" b="0">
+                <a:solidFill>
+                  <a:srgbClr val="5A6A70"/>
+                </a:solidFill>
+                <a:latin typeface="Calibri"/>
+              </a:rPr>
+              <a:t>Travel+ Natural · пульт v1.10 · собес · не оферта</a:t>
             </a:r>
           </a:p>
         </p:txBody>
@@ -5309,7 +5649,7 @@
             <a:avLst/>
           </a:prstGeom>
           <a:solidFill>
-            <a:srgbClr val="FFFFFF"/>
+            <a:srgbClr val="F7F9FB"/>
           </a:solidFill>
           <a:ln>
             <a:noFill/>
@@ -5352,7 +5692,7 @@
             <a:avLst/>
           </a:prstGeom>
           <a:solidFill>
-            <a:srgbClr val="1B2A4A"/>
+            <a:srgbClr val="1F6B5C"/>
           </a:solidFill>
           <a:ln>
             <a:noFill/>
@@ -5389,7 +5729,7 @@
         <p:spPr>
           <a:xfrm>
             <a:off x="502920" y="320040"/>
-            <a:ext cx="10972800" cy="640080"/>
+            <a:ext cx="11155680" cy="640080"/>
           </a:xfrm>
           <a:prstGeom prst="rect">
             <a:avLst/>
@@ -5397,21 +5737,19 @@
           <a:noFill/>
         </p:spPr>
         <p:txBody>
-          <a:bodyPr wrap="square">
+          <a:bodyPr wrap="none">
             <a:spAutoFit/>
           </a:bodyPr>
           <a:lstStyle/>
           <a:p>
-            <a:pPr>
-              <a:defRPr sz="2800" b="1">
-                <a:solidFill>
-                  <a:srgbClr val="1B2A4A"/>
-                </a:solidFill>
-                <a:latin typeface="Calibri"/>
-              </a:defRPr>
-            </a:pPr>
-            <a:r>
-              <a:t>Как выведу продукт · первые 90 дней</a:t>
+            <a:r>
+              <a:rPr sz="2800" b="1">
+                <a:solidFill>
+                  <a:srgbClr val="1A2A2E"/>
+                </a:solidFill>
+                <a:latin typeface="Calibri"/>
+              </a:rPr>
+              <a:t>Питч закупщику (30 секунд)</a:t>
             </a:r>
           </a:p>
         </p:txBody>
@@ -5424,8 +5762,8 @@
         </p:nvSpPr>
         <p:spPr>
           <a:xfrm>
-            <a:off x="640080" y="1051560"/>
-            <a:ext cx="10789920" cy="4937760"/>
+            <a:off x="502920" y="1097280"/>
+            <a:ext cx="11155680" cy="5303520"/>
           </a:xfrm>
           <a:prstGeom prst="rect">
             <a:avLst/>
@@ -5440,78 +5778,129 @@
           <a:p>
             <a:pPr>
               <a:spcAft>
-                <a:spcPts val="800"/>
-              </a:spcAft>
-              <a:defRPr sz="1800">
-                <a:solidFill>
-                  <a:srgbClr val="222222"/>
-                </a:solidFill>
-                <a:latin typeface="Calibri"/>
-              </a:defRPr>
-            </a:pPr>
-            <a:r>
-              <a:t>Вывод: клиент и задача → цель → экономика → ТЗ → образцы → тест → серия → разбор</a:t>
-            </a:r>
-          </a:p>
-          <a:p>
-            <a:pPr>
-              <a:spcAft>
-                <a:spcPts val="800"/>
-              </a:spcAft>
-              <a:defRPr sz="1800">
-                <a:solidFill>
-                  <a:srgbClr val="222222"/>
-                </a:solidFill>
-                <a:latin typeface="Calibri"/>
-              </a:defRPr>
-            </a:pPr>
-          </a:p>
-          <a:p>
-            <a:pPr>
-              <a:spcAft>
-                <a:spcPts val="800"/>
-              </a:spcAft>
-              <a:defRPr sz="1800">
-                <a:solidFill>
-                  <a:srgbClr val="222222"/>
-                </a:solidFill>
-                <a:latin typeface="Calibri"/>
-              </a:defRPr>
-            </a:pPr>
-            <a:r>
-              <a:t>1–30 дней: ассортимент, маржа, sales / технологи / закупки, конкуренты</a:t>
-            </a:r>
-          </a:p>
-          <a:p>
-            <a:pPr>
-              <a:spcAft>
-                <a:spcPts val="800"/>
-              </a:spcAft>
-              <a:defRPr sz="1800">
-                <a:solidFill>
-                  <a:srgbClr val="222222"/>
-                </a:solidFill>
-                <a:latin typeface="Calibri"/>
-              </a:defRPr>
-            </a:pPr>
-            <a:r>
-              <a:t>31–60 дней: пилот Natural в приоритете, ТЗ, образцы</a:t>
-            </a:r>
-          </a:p>
-          <a:p>
-            <a:pPr>
-              <a:spcAft>
-                <a:spcPts val="800"/>
-              </a:spcAft>
-              <a:defRPr sz="1800">
-                <a:solidFill>
-                  <a:srgbClr val="222222"/>
-                </a:solidFill>
-                <a:latin typeface="Calibri"/>
-              </a:defRPr>
-            </a:pPr>
-            <a:r>
-              <a:t>61–90 дней: экономика, тест у 1–2 клиентов, решение go / no-go</a:t>
+                <a:spcPts val="600"/>
+              </a:spcAft>
+            </a:pPr>
+            <a:r>
+              <a:rPr sz="1700" b="0">
+                <a:solidFill>
+                  <a:srgbClr val="2C3A3F"/>
+                </a:solidFill>
+                <a:latin typeface="Calibri"/>
+              </a:rPr>
+              <a:t>«Вам нужно выглядеть зеленее — и спокойно пройти и гостя, и документы.</a:t>
+            </a:r>
+          </a:p>
+          <a:p>
+            <a:pPr>
+              <a:spcAft>
+                <a:spcPts val="600"/>
+              </a:spcAft>
+            </a:pPr>
+            <a:r>
+              <a:rPr sz="1700" b="0">
+                <a:solidFill>
+                  <a:srgbClr val="2C3A3F"/>
+                </a:solidFill>
+                <a:latin typeface="Calibri"/>
+              </a:rPr>
+              <a:t>Travel+ Natural: пакет как на Hotel Line и Fleur</a:t>
+            </a:r>
+          </a:p>
+          <a:p>
+            <a:pPr>
+              <a:spcAft>
+                <a:spcPts val="600"/>
+              </a:spcAft>
+            </a:pPr>
+            <a:r>
+              <a:rPr sz="1700" b="0">
+                <a:solidFill>
+                  <a:srgbClr val="2C3A3F"/>
+                </a:solidFill>
+                <a:latin typeface="Calibri"/>
+              </a:rPr>
+              <a:t>(декларация / СГР, INCI, протоколы по запросу),</a:t>
+            </a:r>
+          </a:p>
+          <a:p>
+            <a:pPr>
+              <a:spcAft>
+                <a:spcPts val="600"/>
+              </a:spcAft>
+            </a:pPr>
+            <a:r>
+              <a:rPr sz="1700" b="0">
+                <a:solidFill>
+                  <a:srgbClr val="2C3A3F"/>
+                </a:solidFill>
+                <a:latin typeface="Calibri"/>
+              </a:rPr>
+              <a:t>прозрачный состав с „простыми словами“, один договор на номер.</a:t>
+            </a:r>
+          </a:p>
+          <a:p>
+            <a:pPr>
+              <a:spcAft>
+                <a:spcPts val="600"/>
+              </a:spcAft>
+            </a:pPr>
+            <a:r>
+              <a:rPr sz="1700" b="0">
+                <a:solidFill>
+                  <a:srgbClr val="2C3A3F"/>
+                </a:solidFill>
+                <a:latin typeface="Calibri"/>
+              </a:rPr>
+              <a:t>Три шага: eco / wellness → образец → пилот.»</a:t>
+            </a:r>
+          </a:p>
+          <a:p>
+            <a:pPr>
+              <a:spcAft>
+                <a:spcPts val="600"/>
+              </a:spcAft>
+            </a:pPr>
+            <a:r>
+              <a:rPr sz="1700" b="0">
+                <a:solidFill>
+                  <a:srgbClr val="2C3A3F"/>
+                </a:solidFill>
+                <a:latin typeface="Calibri"/>
+              </a:rPr>
+              <a:t/>
+            </a:r>
+          </a:p>
+          <a:p>
+            <a:pPr>
+              <a:spcAft>
+                <a:spcPts val="600"/>
+              </a:spcAft>
+            </a:pPr>
+            <a:r>
+              <a:rPr sz="1700" b="0">
+                <a:solidFill>
+                  <a:srgbClr val="2C3A3F"/>
+                </a:solidFill>
+                <a:latin typeface="Calibri"/>
+              </a:rPr>
+              <a:t>Отрицания (COSMOS, origin, цена HL) — только в возражениях.</a:t>
+            </a:r>
+          </a:p>
+          <a:p>
+            <a:pPr>
+              <a:spcAft>
+                <a:spcPts val="600"/>
+              </a:spcAft>
+            </a:pPr>
+            <a:r>
+              <a:rPr sz="1700" b="0">
+                <a:solidFill>
+                  <a:srgbClr val="2C3A3F"/>
+                </a:solidFill>
+                <a:latin typeface="Calibri"/>
+              </a:rPr>
+              <a:t>Гостю: мягкий натуральный уход — не «без химии».</a:t>
             </a:r>
           </a:p>
         </p:txBody>
@@ -5524,8 +5913,8 @@
         </p:nvSpPr>
         <p:spPr>
           <a:xfrm>
-            <a:off x="457200" y="6446520"/>
-            <a:ext cx="10972800" cy="274320"/>
+            <a:off x="502920" y="6446520"/>
+            <a:ext cx="11155680" cy="320040"/>
           </a:xfrm>
           <a:prstGeom prst="rect">
             <a:avLst/>
@@ -5538,16 +5927,14 @@
           </a:bodyPr>
           <a:lstStyle/>
           <a:p>
-            <a:pPr>
-              <a:defRPr sz="1000">
-                <a:solidFill>
-                  <a:srgbClr val="555555"/>
-                </a:solidFill>
-                <a:latin typeface="Calibri"/>
-              </a:defRPr>
-            </a:pPr>
-            <a:r>
-              <a:t>Павел Биджиев  ·  Travel+ / АК-Сервис  ·  7/10</a:t>
+            <a:r>
+              <a:rPr sz="1100" b="0">
+                <a:solidFill>
+                  <a:srgbClr val="5A6A70"/>
+                </a:solidFill>
+                <a:latin typeface="Calibri"/>
+              </a:rPr>
+              <a:t>Travel+ Natural · пульт v1.10 · собес · не оферта</a:t>
             </a:r>
           </a:p>
         </p:txBody>
@@ -5585,7 +5972,7 @@
             <a:avLst/>
           </a:prstGeom>
           <a:solidFill>
-            <a:srgbClr val="FFFFFF"/>
+            <a:srgbClr val="F7F9FB"/>
           </a:solidFill>
           <a:ln>
             <a:noFill/>
@@ -5628,7 +6015,7 @@
             <a:avLst/>
           </a:prstGeom>
           <a:solidFill>
-            <a:srgbClr val="1B2A4A"/>
+            <a:srgbClr val="1F6B5C"/>
           </a:solidFill>
           <a:ln>
             <a:noFill/>
@@ -5665,7 +6052,7 @@
         <p:spPr>
           <a:xfrm>
             <a:off x="502920" y="320040"/>
-            <a:ext cx="10972800" cy="640080"/>
+            <a:ext cx="11155680" cy="640080"/>
           </a:xfrm>
           <a:prstGeom prst="rect">
             <a:avLst/>
@@ -5673,21 +6060,19 @@
           <a:noFill/>
         </p:spPr>
         <p:txBody>
-          <a:bodyPr wrap="square">
+          <a:bodyPr wrap="none">
             <a:spAutoFit/>
           </a:bodyPr>
           <a:lstStyle/>
           <a:p>
-            <a:pPr>
-              <a:defRPr sz="2800" b="1">
-                <a:solidFill>
-                  <a:srgbClr val="1B2A4A"/>
-                </a:solidFill>
-                <a:latin typeface="Calibri"/>
-              </a:defRPr>
-            </a:pPr>
-            <a:r>
-              <a:t>Логистика: образцы → 10 000 флаконов</a:t>
+            <a:r>
+              <a:rPr sz="2800" b="1">
+                <a:solidFill>
+                  <a:srgbClr val="1A2A2E"/>
+                </a:solidFill>
+                <a:latin typeface="Calibri"/>
+              </a:rPr>
+              <a:t>Поле: возражения и риски</a:t>
             </a:r>
           </a:p>
         </p:txBody>
@@ -5700,8 +6085,8 @@
         </p:nvSpPr>
         <p:spPr>
           <a:xfrm>
-            <a:off x="640080" y="1051560"/>
-            <a:ext cx="10789920" cy="4937760"/>
+            <a:off x="502920" y="1097280"/>
+            <a:ext cx="11155680" cy="5303520"/>
           </a:xfrm>
           <a:prstGeom prst="rect">
             <a:avLst/>
@@ -5716,123 +6101,97 @@
           <a:p>
             <a:pPr>
               <a:spcAft>
-                <a:spcPts val="800"/>
-              </a:spcAft>
-              <a:defRPr sz="1700">
-                <a:solidFill>
-                  <a:srgbClr val="222222"/>
-                </a:solidFill>
-                <a:latin typeface="Calibri"/>
-              </a:defRPr>
-            </a:pPr>
-            <a:r>
-              <a:t>Правило: в серию без утверждённого образца не идём</a:t>
-            </a:r>
-          </a:p>
-          <a:p>
-            <a:pPr>
-              <a:spcAft>
-                <a:spcPts val="800"/>
-              </a:spcAft>
-              <a:defRPr sz="1700">
-                <a:solidFill>
-                  <a:srgbClr val="222222"/>
-                </a:solidFill>
-                <a:latin typeface="Calibri"/>
-              </a:defRPr>
-            </a:pPr>
-          </a:p>
-          <a:p>
-            <a:pPr>
-              <a:spcAft>
-                <a:spcPts val="800"/>
-              </a:spcAft>
-              <a:defRPr sz="1700">
-                <a:solidFill>
-                  <a:srgbClr val="222222"/>
-                </a:solidFill>
-                <a:latin typeface="Calibri"/>
-              </a:defRPr>
-            </a:pPr>
-            <a:r>
-              <a:t>Образцы 20–50 шт. → авиа / курьер → тест → правки</a:t>
-            </a:r>
-          </a:p>
-          <a:p>
-            <a:pPr>
-              <a:spcAft>
-                <a:spcPts val="800"/>
-              </a:spcAft>
-              <a:defRPr sz="1700">
-                <a:solidFill>
-                  <a:srgbClr val="222222"/>
-                </a:solidFill>
-                <a:latin typeface="Calibri"/>
-              </a:defRPr>
-            </a:pPr>
-            <a:r>
-              <a:t>10 000 шт. → производство (оплата 30/70)</a:t>
-            </a:r>
-          </a:p>
-          <a:p>
-            <a:pPr>
-              <a:spcAft>
-                <a:spcPts val="800"/>
-              </a:spcAft>
-              <a:defRPr sz="1700">
-                <a:solidFill>
-                  <a:srgbClr val="222222"/>
-                </a:solidFill>
-                <a:latin typeface="Calibri"/>
-              </a:defRPr>
-            </a:pPr>
-            <a:r>
-              <a:t>Серия → море LCL или ж/д → таможня → склад Кириши / СПб</a:t>
-            </a:r>
-          </a:p>
-          <a:p>
-            <a:pPr>
-              <a:spcAft>
-                <a:spcPts val="800"/>
-              </a:spcAft>
-              <a:defRPr sz="1700">
-                <a:solidFill>
-                  <a:srgbClr val="222222"/>
-                </a:solidFill>
-                <a:latin typeface="Calibri"/>
-              </a:defRPr>
-            </a:pPr>
-          </a:p>
-          <a:p>
-            <a:pPr>
-              <a:spcAft>
-                <a:spcPts val="800"/>
-              </a:spcAft>
-              <a:defRPr sz="1700">
-                <a:solidFill>
-                  <a:srgbClr val="222222"/>
-                </a:solidFill>
-                <a:latin typeface="Calibri"/>
-              </a:defRPr>
-            </a:pPr>
-            <a:r>
-              <a:t>С заводом — FOB. До склада — дорога, таможня, брокер, довоз отдельно.</a:t>
-            </a:r>
-          </a:p>
-          <a:p>
-            <a:pPr>
-              <a:spcAft>
-                <a:spcPts val="800"/>
-              </a:spcAft>
-              <a:defRPr sz="1700">
-                <a:solidFill>
-                  <a:srgbClr val="222222"/>
-                </a:solidFill>
-                <a:latin typeface="Calibri"/>
-              </a:defRPr>
-            </a:pPr>
-            <a:r>
-              <a:t>Ориентир цикла: ~3,5–5 месяцев. Китай: опыт через посредника, контакт живой.</a:t>
+                <a:spcPts val="600"/>
+              </a:spcAft>
+            </a:pPr>
+            <a:r>
+              <a:rPr sz="1800" b="0">
+                <a:solidFill>
+                  <a:srgbClr val="2C3A3F"/>
+                </a:solidFill>
+                <a:latin typeface="Calibri"/>
+              </a:rPr>
+              <a:t>· COSMOS обязателен → Natural в это КП не ставим</a:t>
+            </a:r>
+          </a:p>
+          <a:p>
+            <a:pPr>
+              <a:spcAft>
+                <a:spcPts val="600"/>
+              </a:spcAft>
+            </a:pPr>
+            <a:r>
+              <a:rPr sz="1800" b="0">
+                <a:solidFill>
+                  <a:srgbClr val="2C3A3F"/>
+                </a:solidFill>
+                <a:latin typeface="Calibri"/>
+              </a:rPr>
+              <a:t>· «Natural по цене HL» → нет</a:t>
+            </a:r>
+          </a:p>
+          <a:p>
+            <a:pPr>
+              <a:spcAft>
+                <a:spcPts val="600"/>
+              </a:spcAft>
+            </a:pPr>
+            <a:r>
+              <a:rPr sz="1800" b="0">
+                <a:solidFill>
+                  <a:srgbClr val="2C3A3F"/>
+                </a:solidFill>
+                <a:latin typeface="Calibri"/>
+              </a:rPr>
+              <a:t>· СТМ / наш лого → отдельный проект, не Natural с другим лого</a:t>
+            </a:r>
+          </a:p>
+          <a:p>
+            <a:pPr>
+              <a:spcAft>
+                <a:spcPts val="600"/>
+              </a:spcAft>
+            </a:pPr>
+            <a:r>
+              <a:rPr sz="1800" b="0">
+                <a:solidFill>
+                  <a:srgbClr val="2C3A3F"/>
+                </a:solidFill>
+                <a:latin typeface="Calibri"/>
+              </a:rPr>
+              <a:t>· «Где произведено?» → только зафиксированный origin</a:t>
+            </a:r>
+          </a:p>
+          <a:p>
+            <a:pPr>
+              <a:spcAft>
+                <a:spcPts val="600"/>
+              </a:spcAft>
+            </a:pPr>
+            <a:r>
+              <a:rPr sz="1800" b="0">
+                <a:solidFill>
+                  <a:srgbClr val="2C3A3F"/>
+                </a:solidFill>
+                <a:latin typeface="Calibri"/>
+              </a:rPr>
+              <a:t/>
+            </a:r>
+          </a:p>
+          <a:p>
+            <a:pPr>
+              <a:spcAft>
+                <a:spcPts val="600"/>
+              </a:spcAft>
+            </a:pPr>
+            <a:r>
+              <a:rPr sz="1800" b="0">
+                <a:solidFill>
+                  <a:srgbClr val="2C3A3F"/>
+                </a:solidFill>
+                <a:latin typeface="Calibri"/>
+              </a:rPr>
+              <a:t>Сводный реестр рисков — один лист для продаж (в пульте).</a:t>
             </a:r>
           </a:p>
         </p:txBody>
@@ -5845,8 +6204,8 @@
         </p:nvSpPr>
         <p:spPr>
           <a:xfrm>
-            <a:off x="457200" y="6446520"/>
-            <a:ext cx="10972800" cy="274320"/>
+            <a:off x="502920" y="6446520"/>
+            <a:ext cx="11155680" cy="320040"/>
           </a:xfrm>
           <a:prstGeom prst="rect">
             <a:avLst/>
@@ -5859,16 +6218,14 @@
           </a:bodyPr>
           <a:lstStyle/>
           <a:p>
-            <a:pPr>
-              <a:defRPr sz="1000">
-                <a:solidFill>
-                  <a:srgbClr val="555555"/>
-                </a:solidFill>
-                <a:latin typeface="Calibri"/>
-              </a:defRPr>
-            </a:pPr>
-            <a:r>
-              <a:t>Павел Биджиев  ·  Travel+ / АК-Сервис  ·  8/10</a:t>
+            <a:r>
+              <a:rPr sz="1100" b="0">
+                <a:solidFill>
+                  <a:srgbClr val="5A6A70"/>
+                </a:solidFill>
+                <a:latin typeface="Calibri"/>
+              </a:rPr>
+              <a:t>Travel+ Natural · пульт v1.10 · собес · не оферта</a:t>
             </a:r>
           </a:p>
         </p:txBody>
@@ -5906,7 +6263,7 @@
             <a:avLst/>
           </a:prstGeom>
           <a:solidFill>
-            <a:srgbClr val="FFFFFF"/>
+            <a:srgbClr val="F7F9FB"/>
           </a:solidFill>
           <a:ln>
             <a:noFill/>
@@ -5949,7 +6306,7 @@
             <a:avLst/>
           </a:prstGeom>
           <a:solidFill>
-            <a:srgbClr val="1B2A4A"/>
+            <a:srgbClr val="1F6B5C"/>
           </a:solidFill>
           <a:ln>
             <a:noFill/>
@@ -5986,7 +6343,7 @@
         <p:spPr>
           <a:xfrm>
             <a:off x="502920" y="320040"/>
-            <a:ext cx="10972800" cy="640080"/>
+            <a:ext cx="11155680" cy="640080"/>
           </a:xfrm>
           <a:prstGeom prst="rect">
             <a:avLst/>
@@ -5994,21 +6351,19 @@
           <a:noFill/>
         </p:spPr>
         <p:txBody>
-          <a:bodyPr wrap="square">
+          <a:bodyPr wrap="none">
             <a:spAutoFit/>
           </a:bodyPr>
           <a:lstStyle/>
           <a:p>
-            <a:pPr>
-              <a:defRPr sz="2800" b="1">
-                <a:solidFill>
-                  <a:srgbClr val="1B2A4A"/>
-                </a:solidFill>
-                <a:latin typeface="Calibri"/>
-              </a:defRPr>
-            </a:pPr>
-            <a:r>
-              <a:t>Экономика: цена на складе</a:t>
+            <a:r>
+              <a:rPr sz="2800" b="1">
+                <a:solidFill>
+                  <a:srgbClr val="1A2A2E"/>
+                </a:solidFill>
+                <a:latin typeface="Calibri"/>
+              </a:rPr>
+              <a:t>Пилот: успех, провал, выход</a:t>
             </a:r>
           </a:p>
         </p:txBody>
@@ -6021,8 +6376,8 @@
         </p:nvSpPr>
         <p:spPr>
           <a:xfrm>
-            <a:off x="640080" y="1051560"/>
-            <a:ext cx="10789920" cy="4937760"/>
+            <a:off x="502920" y="1097280"/>
+            <a:ext cx="11155680" cy="5303520"/>
           </a:xfrm>
           <a:prstGeom prst="rect">
             <a:avLst/>
@@ -6037,155 +6392,129 @@
           <a:p>
             <a:pPr>
               <a:spcAft>
-                <a:spcPts val="800"/>
-              </a:spcAft>
-              <a:defRPr sz="1700">
-                <a:solidFill>
-                  <a:srgbClr val="222222"/>
-                </a:solidFill>
-                <a:latin typeface="Calibri"/>
-              </a:defRPr>
-            </a:pPr>
-            <a:r>
-              <a:t>Цена на складе = FOB + дорога + страховка + таможня + брокер</a:t>
-            </a:r>
-          </a:p>
-          <a:p>
-            <a:pPr>
-              <a:spcAft>
-                <a:spcPts val="800"/>
-              </a:spcAft>
-              <a:defRPr sz="1700">
-                <a:solidFill>
-                  <a:srgbClr val="222222"/>
-                </a:solidFill>
-                <a:latin typeface="Calibri"/>
-              </a:defRPr>
-            </a:pPr>
-            <a:r>
-              <a:t>+ довоз + этикетка/короб + запас на брак</a:t>
-            </a:r>
-          </a:p>
-          <a:p>
-            <a:pPr>
-              <a:spcAft>
-                <a:spcPts val="800"/>
-              </a:spcAft>
-              <a:defRPr sz="1700">
-                <a:solidFill>
-                  <a:srgbClr val="222222"/>
-                </a:solidFill>
-                <a:latin typeface="Calibri"/>
-              </a:defRPr>
-            </a:pPr>
-          </a:p>
-          <a:p>
-            <a:pPr>
-              <a:spcAft>
-                <a:spcPts val="800"/>
-              </a:spcAft>
-              <a:defRPr sz="1700">
-                <a:solidFill>
-                  <a:srgbClr val="222222"/>
-                </a:solidFill>
-                <a:latin typeface="Calibri"/>
-              </a:defRPr>
-            </a:pPr>
-            <a:r>
-              <a:t>Ориентир полки (витрина, не оферта):</a:t>
-            </a:r>
-          </a:p>
-          <a:p>
-            <a:pPr>
-              <a:spcAft>
-                <a:spcPts val="800"/>
-              </a:spcAft>
-              <a:defRPr sz="1700">
-                <a:solidFill>
-                  <a:srgbClr val="222222"/>
-                </a:solidFill>
-                <a:latin typeface="Calibri"/>
-              </a:defRPr>
-            </a:pPr>
-            <a:r>
-              <a:t>• Hotel Line ~12–15 ₽</a:t>
-            </a:r>
-          </a:p>
-          <a:p>
-            <a:pPr>
-              <a:spcAft>
-                <a:spcPts val="800"/>
-              </a:spcAft>
-              <a:defRPr sz="1700">
-                <a:solidFill>
-                  <a:srgbClr val="222222"/>
-                </a:solidFill>
-                <a:latin typeface="Calibri"/>
-              </a:defRPr>
-            </a:pPr>
-            <a:r>
-              <a:t>• ЕТС Natural ~18 ₽ / 25 мл</a:t>
-            </a:r>
-          </a:p>
-          <a:p>
-            <a:pPr>
-              <a:spcAft>
-                <a:spcPts val="800"/>
-              </a:spcAft>
-              <a:defRPr sz="1700">
-                <a:solidFill>
-                  <a:srgbClr val="222222"/>
-                </a:solidFill>
-                <a:latin typeface="Calibri"/>
-              </a:defRPr>
-            </a:pPr>
-            <a:r>
-              <a:t>• наша Natural — между базой и NS</a:t>
-            </a:r>
-          </a:p>
-          <a:p>
-            <a:pPr>
-              <a:spcAft>
-                <a:spcPts val="800"/>
-              </a:spcAft>
-              <a:defRPr sz="1700">
-                <a:solidFill>
-                  <a:srgbClr val="222222"/>
-                </a:solidFill>
-                <a:latin typeface="Calibri"/>
-              </a:defRPr>
-            </a:pPr>
-          </a:p>
-          <a:p>
-            <a:pPr>
-              <a:spcAft>
-                <a:spcPts val="800"/>
-              </a:spcAft>
-              <a:defRPr sz="1700">
-                <a:solidFill>
-                  <a:srgbClr val="222222"/>
-                </a:solidFill>
-                <a:latin typeface="Calibri"/>
-              </a:defRPr>
-            </a:pPr>
-            <a:r>
-              <a:t>Цель пилота: маржа не хуже Hotel Line</a:t>
-            </a:r>
-          </a:p>
-          <a:p>
-            <a:pPr>
-              <a:spcAft>
-                <a:spcPts val="800"/>
-              </a:spcAft>
-              <a:defRPr sz="1700">
-                <a:solidFill>
-                  <a:srgbClr val="222222"/>
-                </a:solidFill>
-                <a:latin typeface="Calibri"/>
-              </a:defRPr>
-            </a:pPr>
-            <a:r>
-              <a:t>(точные цифры — после образцов с финансами и технологами)</a:t>
+                <a:spcPts val="600"/>
+              </a:spcAft>
+            </a:pPr>
+            <a:r>
+              <a:rPr sz="1700" b="0">
+                <a:solidFill>
+                  <a:srgbClr val="2C3A3F"/>
+                </a:solidFill>
+                <a:latin typeface="Calibri"/>
+              </a:rPr>
+              <a:t>Успех: 3 клиента · повтор ≥2/3 · мягкость и ощущение натуральности ≥70% · HL цел</a:t>
+            </a:r>
+          </a:p>
+          <a:p>
+            <a:pPr>
+              <a:spcAft>
+                <a:spcPts val="600"/>
+              </a:spcAft>
+            </a:pPr>
+            <a:r>
+              <a:rPr sz="1700" b="0">
+                <a:solidFill>
+                  <a:srgbClr val="2C3A3F"/>
+                </a:solidFill>
+                <a:latin typeface="Calibri"/>
+              </a:rPr>
+              <a:t/>
+            </a:r>
+          </a:p>
+          <a:p>
+            <a:pPr>
+              <a:spcAft>
+                <a:spcPts val="600"/>
+              </a:spcAft>
+            </a:pPr>
+            <a:r>
+              <a:rPr sz="1700" b="0">
+                <a:solidFill>
+                  <a:srgbClr val="2C3A3F"/>
+                </a:solidFill>
+                <a:latin typeface="Calibri"/>
+              </a:rPr>
+              <a:t>Провал: повтор &lt;2/3 или метрики &lt;60% → стоп масштаб</a:t>
+            </a:r>
+          </a:p>
+          <a:p>
+            <a:pPr>
+              <a:spcAft>
+                <a:spcPts val="600"/>
+              </a:spcAft>
+            </a:pPr>
+            <a:r>
+              <a:rPr sz="1700" b="0">
+                <a:solidFill>
+                  <a:srgbClr val="2C3A3F"/>
+                </a:solidFill>
+                <a:latin typeface="Calibri"/>
+              </a:rPr>
+              <a:t>Возврат: диагноз за 2 недели → сенсорика / бумаги / этикетка / коммерция</a:t>
+            </a:r>
+          </a:p>
+          <a:p>
+            <a:pPr>
+              <a:spcAft>
+                <a:spcPts val="600"/>
+              </a:spcAft>
+            </a:pPr>
+            <a:r>
+              <a:rPr sz="1700" b="0">
+                <a:solidFill>
+                  <a:srgbClr val="2C3A3F"/>
+                </a:solidFill>
+                <a:latin typeface="Calibri"/>
+              </a:rPr>
+              <a:t/>
+            </a:r>
+          </a:p>
+          <a:p>
+            <a:pPr>
+              <a:spcAft>
+                <a:spcPts val="600"/>
+              </a:spcAft>
+            </a:pPr>
+            <a:r>
+              <a:rPr sz="1700" b="0">
+                <a:solidFill>
+                  <a:srgbClr val="2C3A3F"/>
+                </a:solidFill>
+                <a:latin typeface="Calibri"/>
+              </a:rPr>
+              <a:t>Второй круг снова провален → линейку закрываем (бренд + Human)</a:t>
+            </a:r>
+          </a:p>
+          <a:p>
+            <a:pPr>
+              <a:spcAft>
+                <a:spcPts val="600"/>
+              </a:spcAft>
+            </a:pPr>
+            <a:r>
+              <a:rPr sz="1700" b="0">
+                <a:solidFill>
+                  <a:srgbClr val="2C3A3F"/>
+                </a:solidFill>
+                <a:latin typeface="Calibri"/>
+              </a:rPr>
+              <a:t/>
+            </a:r>
+          </a:p>
+          <a:p>
+            <a:pPr>
+              <a:spcAft>
+                <a:spcPts val="600"/>
+              </a:spcAft>
+            </a:pPr>
+            <a:r>
+              <a:rPr sz="1700" b="0">
+                <a:solidFill>
+                  <a:srgbClr val="2C3A3F"/>
+                </a:solidFill>
+                <a:latin typeface="Calibri"/>
+              </a:rPr>
+              <a:t>Все цифры сценария — учебный пример, не отчёт завода.</a:t>
             </a:r>
           </a:p>
         </p:txBody>
@@ -6198,8 +6527,8 @@
         </p:nvSpPr>
         <p:spPr>
           <a:xfrm>
-            <a:off x="457200" y="6446520"/>
-            <a:ext cx="10972800" cy="274320"/>
+            <a:off x="502920" y="6446520"/>
+            <a:ext cx="11155680" cy="320040"/>
           </a:xfrm>
           <a:prstGeom prst="rect">
             <a:avLst/>
@@ -6212,16 +6541,14 @@
           </a:bodyPr>
           <a:lstStyle/>
           <a:p>
-            <a:pPr>
-              <a:defRPr sz="1000">
-                <a:solidFill>
-                  <a:srgbClr val="555555"/>
-                </a:solidFill>
-                <a:latin typeface="Calibri"/>
-              </a:defRPr>
-            </a:pPr>
-            <a:r>
-              <a:t>Павел Биджиев  ·  Travel+ / АК-Сервис  ·  9/10</a:t>
+            <a:r>
+              <a:rPr sz="1100" b="0">
+                <a:solidFill>
+                  <a:srgbClr val="5A6A70"/>
+                </a:solidFill>
+                <a:latin typeface="Calibri"/>
+              </a:rPr>
+              <a:t>Travel+ Natural · пульт v1.10 · собес · не оферта</a:t>
             </a:r>
           </a:p>
         </p:txBody>

--- a/АК/presentation-travelplus-interview.pptx
+++ b/АК/presentation-travelplus-interview.pptx
@@ -16,6 +16,7 @@
     <p:sldId id="264" r:id="rId15"/>
     <p:sldId id="265" r:id="rId16"/>
     <p:sldId id="266" r:id="rId17"/>
+    <p:sldId id="267" r:id="rId18"/>
   </p:sldIdLst>
   <p:sldSz cx="12191695" cy="6858000" type="screen4x3"/>
   <p:notesSz cx="6858000" cy="9144000"/>
@@ -3113,7 +3114,7 @@
             <a:avLst/>
           </a:prstGeom>
           <a:solidFill>
-            <a:srgbClr val="F7F9FB"/>
+            <a:srgbClr val="F7F5F2"/>
           </a:solidFill>
           <a:ln>
             <a:noFill/>
@@ -3156,7 +3157,7 @@
             <a:avLst/>
           </a:prstGeom>
           <a:solidFill>
-            <a:srgbClr val="1F6B5C"/>
+            <a:srgbClr val="2F5D50"/>
           </a:solidFill>
           <a:ln>
             <a:noFill/>
@@ -3186,35 +3187,44 @@
       </p:sp>
       <p:sp>
         <p:nvSpPr>
-          <p:cNvPr id="4" name="TextBox 3"/>
-          <p:cNvSpPr txBox="1"/>
-          <p:nvPr/>
-        </p:nvSpPr>
-        <p:spPr>
-          <a:xfrm>
-            <a:off x="502920" y="1828800"/>
-            <a:ext cx="11155680" cy="640080"/>
+          <p:cNvPr id="4" name="Rectangle 3"/>
+          <p:cNvSpPr/>
+          <p:nvPr/>
+        </p:nvSpPr>
+        <p:spPr>
+          <a:xfrm>
+            <a:off x="0" y="0"/>
+            <a:ext cx="4754880" cy="6858000"/>
           </a:xfrm>
           <a:prstGeom prst="rect">
             <a:avLst/>
           </a:prstGeom>
-          <a:noFill/>
-        </p:spPr>
-        <p:txBody>
-          <a:bodyPr wrap="none">
-            <a:spAutoFit/>
-          </a:bodyPr>
-          <a:lstStyle/>
-          <a:p>
-            <a:r>
-              <a:rPr sz="2800" b="1">
-                <a:solidFill>
-                  <a:srgbClr val="1A2A2E"/>
-                </a:solidFill>
-                <a:latin typeface="Calibri"/>
-              </a:rPr>
-              <a:t>Павел Биджиев</a:t>
-            </a:r>
+          <a:solidFill>
+            <a:srgbClr val="2F5D50"/>
+          </a:solidFill>
+          <a:ln>
+            <a:noFill/>
+          </a:ln>
+        </p:spPr>
+        <p:style>
+          <a:lnRef idx="1">
+            <a:schemeClr val="accent1"/>
+          </a:lnRef>
+          <a:fillRef idx="3">
+            <a:schemeClr val="accent1"/>
+          </a:fillRef>
+          <a:effectRef idx="2">
+            <a:schemeClr val="accent1"/>
+          </a:effectRef>
+          <a:fontRef idx="minor">
+            <a:schemeClr val="lt1"/>
+          </a:fontRef>
+        </p:style>
+        <p:txBody>
+          <a:bodyPr rtlCol="0" anchor="ctr"/>
+          <a:lstStyle/>
+          <a:p>
+            <a:pPr algn="ctr"/>
           </a:p>
         </p:txBody>
       </p:sp>
@@ -3226,8 +3236,8 @@
         </p:nvSpPr>
         <p:spPr>
           <a:xfrm>
-            <a:off x="502920" y="2560320"/>
-            <a:ext cx="11155680" cy="5303520"/>
+            <a:off x="502920" y="1828800"/>
+            <a:ext cx="3931920" cy="3200400"/>
           </a:xfrm>
           <a:prstGeom prst="rect">
             <a:avLst/>
@@ -3242,97 +3252,49 @@
           <a:p>
             <a:pPr>
               <a:spcAft>
-                <a:spcPts val="600"/>
-              </a:spcAft>
-            </a:pPr>
-            <a:r>
-              <a:rPr sz="2000" b="0">
-                <a:solidFill>
-                  <a:srgbClr val="2C3A3F"/>
-                </a:solidFill>
-                <a:latin typeface="Calibri"/>
-              </a:rPr>
-              <a:t>Продакт / бренд-логика · физические товары · HoReCa amenities</a:t>
-            </a:r>
-          </a:p>
-          <a:p>
-            <a:pPr>
-              <a:spcAft>
-                <a:spcPts val="600"/>
-              </a:spcAft>
-            </a:pPr>
-            <a:r>
-              <a:rPr sz="2000" b="0">
-                <a:solidFill>
-                  <a:srgbClr val="2C3A3F"/>
-                </a:solidFill>
-                <a:latin typeface="Calibri"/>
-              </a:rPr>
-              <a:t/>
-            </a:r>
-          </a:p>
-          <a:p>
-            <a:pPr>
-              <a:spcAft>
-                <a:spcPts val="600"/>
-              </a:spcAft>
-            </a:pPr>
-            <a:r>
-              <a:rPr sz="2000" b="0">
-                <a:solidFill>
-                  <a:srgbClr val="2C3A3F"/>
-                </a:solidFill>
-                <a:latin typeface="Calibri"/>
-              </a:rPr>
-              <a:t>Travel+ Natural: своя натуральная линейка — от рамки до пилота</a:t>
-            </a:r>
-          </a:p>
-          <a:p>
-            <a:pPr>
-              <a:spcAft>
-                <a:spcPts val="600"/>
-              </a:spcAft>
-            </a:pPr>
-            <a:r>
-              <a:rPr sz="2000" b="0">
-                <a:solidFill>
-                  <a:srgbClr val="2C3A3F"/>
-                </a:solidFill>
-                <a:latin typeface="Calibri"/>
-              </a:rPr>
-              <a:t/>
-            </a:r>
-          </a:p>
-          <a:p>
-            <a:pPr>
-              <a:spcAft>
-                <a:spcPts val="600"/>
-              </a:spcAft>
-            </a:pPr>
-            <a:r>
-              <a:rPr sz="2000" b="0">
-                <a:solidFill>
-                  <a:srgbClr val="2C3A3F"/>
-                </a:solidFill>
-                <a:latin typeface="Calibri"/>
-              </a:rPr>
-              <a:t>Подготовка к вакансии · АК-Сервис / Travel+ · Кириши</a:t>
-            </a:r>
-          </a:p>
-          <a:p>
-            <a:pPr>
-              <a:spcAft>
-                <a:spcPts val="600"/>
-              </a:spcAft>
-            </a:pPr>
-            <a:r>
-              <a:rPr sz="2000" b="0">
-                <a:solidFill>
-                  <a:srgbClr val="2C3A3F"/>
-                </a:solidFill>
-                <a:latin typeface="Calibri"/>
-              </a:rPr>
-              <a:t>Опора: пульт бренда v1.10 · StoryBrand · ДНК</a:t>
+                <a:spcPts val="1200"/>
+              </a:spcAft>
+            </a:pPr>
+            <a:r>
+              <a:rPr sz="3200" b="1">
+                <a:solidFill>
+                  <a:srgbClr val="FFFFFF"/>
+                </a:solidFill>
+                <a:latin typeface="Calibri"/>
+              </a:rPr>
+              <a:t>Павел Биджиев</a:t>
+            </a:r>
+          </a:p>
+          <a:p>
+            <a:pPr>
+              <a:spcAft>
+                <a:spcPts val="800"/>
+              </a:spcAft>
+            </a:pPr>
+            <a:r>
+              <a:rPr sz="1800" b="0">
+                <a:solidFill>
+                  <a:srgbClr val="FFFFFF"/>
+                </a:solidFill>
+                <a:latin typeface="Calibri"/>
+              </a:rPr>
+              <a:t>Продакт / бренд-логика</a:t>
+            </a:r>
+          </a:p>
+          <a:p>
+            <a:pPr>
+              <a:spcAft>
+                <a:spcPts val="0"/>
+              </a:spcAft>
+            </a:pPr>
+            <a:r>
+              <a:rPr sz="1500" b="0">
+                <a:solidFill>
+                  <a:srgbClr val="D0E4DC"/>
+                </a:solidFill>
+                <a:latin typeface="Calibri"/>
+              </a:rPr>
+              <a:t>Физические товары · HoReCa amenities</a:t>
             </a:r>
           </a:p>
         </p:txBody>
@@ -3345,8 +3307,8 @@
         </p:nvSpPr>
         <p:spPr>
           <a:xfrm>
-            <a:off x="502920" y="6446520"/>
-            <a:ext cx="11155680" cy="320040"/>
+            <a:off x="5303520" y="1828800"/>
+            <a:ext cx="6217920" cy="3474720"/>
           </a:xfrm>
           <a:prstGeom prst="rect">
             <a:avLst/>
@@ -3354,19 +3316,127 @@
           <a:noFill/>
         </p:spPr>
         <p:txBody>
-          <a:bodyPr wrap="none">
+          <a:bodyPr wrap="square">
             <a:spAutoFit/>
           </a:bodyPr>
           <a:lstStyle/>
           <a:p>
-            <a:r>
-              <a:rPr sz="1100" b="0">
-                <a:solidFill>
-                  <a:srgbClr val="5A6A70"/>
-                </a:solidFill>
-                <a:latin typeface="Calibri"/>
-              </a:rPr>
-              <a:t>Travel+ Natural · пульт v1.10 · собес · не оферта</a:t>
+            <a:pPr>
+              <a:spcAft>
+                <a:spcPts val="1000"/>
+              </a:spcAft>
+            </a:pPr>
+            <a:r>
+              <a:rPr sz="3400" b="1">
+                <a:solidFill>
+                  <a:srgbClr val="2F5D50"/>
+                </a:solidFill>
+                <a:latin typeface="Calibri"/>
+              </a:rPr>
+              <a:t>Travel+ Natural</a:t>
+            </a:r>
+          </a:p>
+          <a:p>
+            <a:pPr>
+              <a:spcAft>
+                <a:spcPts val="400"/>
+              </a:spcAft>
+            </a:pPr>
+            <a:r>
+              <a:rPr sz="2000" b="0">
+                <a:solidFill>
+                  <a:srgbClr val="1C1C1C"/>
+                </a:solidFill>
+                <a:latin typeface="Calibri"/>
+              </a:rPr>
+              <a:t>Своя натуральная линейка:</a:t>
+            </a:r>
+          </a:p>
+          <a:p>
+            <a:pPr>
+              <a:spcAft>
+                <a:spcPts val="1800"/>
+              </a:spcAft>
+            </a:pPr>
+            <a:r>
+              <a:rPr sz="2000" b="0">
+                <a:solidFill>
+                  <a:srgbClr val="1C1C1C"/>
+                </a:solidFill>
+                <a:latin typeface="Calibri"/>
+              </a:rPr>
+              <a:t>от рамки до пилота</a:t>
+            </a:r>
+          </a:p>
+          <a:p>
+            <a:pPr>
+              <a:spcAft>
+                <a:spcPts val="400"/>
+              </a:spcAft>
+            </a:pPr>
+            <a:r>
+              <a:rPr sz="1400" b="0">
+                <a:solidFill>
+                  <a:srgbClr val="5A5A5A"/>
+                </a:solidFill>
+                <a:latin typeface="Calibri"/>
+              </a:rPr>
+              <a:t>Подготовка · АК-Сервис / Travel+ · Кириши</a:t>
+            </a:r>
+          </a:p>
+          <a:p>
+            <a:pPr>
+              <a:spcAft>
+                <a:spcPts val="0"/>
+              </a:spcAft>
+            </a:pPr>
+            <a:r>
+              <a:rPr sz="1400" b="0">
+                <a:solidFill>
+                  <a:srgbClr val="5A5A5A"/>
+                </a:solidFill>
+                <a:latin typeface="Calibri"/>
+              </a:rPr>
+              <a:t>Пульт бренда v1.14 · не оферта</a:t>
+            </a:r>
+          </a:p>
+        </p:txBody>
+      </p:sp>
+      <p:sp>
+        <p:nvSpPr>
+          <p:cNvPr id="7" name="TextBox 6"/>
+          <p:cNvSpPr txBox="1"/>
+          <p:nvPr/>
+        </p:nvSpPr>
+        <p:spPr>
+          <a:xfrm>
+            <a:off x="5303520" y="6035040"/>
+            <a:ext cx="6217920" cy="365760"/>
+          </a:xfrm>
+          <a:prstGeom prst="rect">
+            <a:avLst/>
+          </a:prstGeom>
+          <a:noFill/>
+        </p:spPr>
+        <p:txBody>
+          <a:bodyPr wrap="square">
+            <a:spAutoFit/>
+          </a:bodyPr>
+          <a:lstStyle/>
+          <a:p>
+            <a:pPr>
+              <a:spcAft>
+                <a:spcPts val="600"/>
+              </a:spcAft>
+            </a:pPr>
+            <a:r>
+              <a:rPr sz="1200" b="0">
+                <a:solidFill>
+                  <a:srgbClr val="5A5A5A"/>
+                </a:solidFill>
+                <a:latin typeface="Calibri"/>
+              </a:rPr>
+              <a:t>Горизонтальный формат 16:9 · 12 слайдов</a:t>
             </a:r>
           </a:p>
         </p:txBody>
@@ -3404,7 +3474,7 @@
             <a:avLst/>
           </a:prstGeom>
           <a:solidFill>
-            <a:srgbClr val="F7F9FB"/>
+            <a:srgbClr val="F7F5F2"/>
           </a:solidFill>
           <a:ln>
             <a:noFill/>
@@ -3447,7 +3517,7 @@
             <a:avLst/>
           </a:prstGeom>
           <a:solidFill>
-            <a:srgbClr val="1F6B5C"/>
+            <a:srgbClr val="2F5D50"/>
           </a:solidFill>
           <a:ln>
             <a:noFill/>
@@ -3483,8 +3553,8 @@
         </p:nvSpPr>
         <p:spPr>
           <a:xfrm>
-            <a:off x="502920" y="320040"/>
-            <a:ext cx="11155680" cy="640080"/>
+            <a:off x="502920" y="256032"/>
+            <a:ext cx="11155680" cy="502920"/>
           </a:xfrm>
           <a:prstGeom prst="rect">
             <a:avLst/>
@@ -3500,25 +3570,231 @@
             <a:r>
               <a:rPr sz="2800" b="1">
                 <a:solidFill>
-                  <a:srgbClr val="1A2A2E"/>
-                </a:solidFill>
-                <a:latin typeface="Calibri"/>
-              </a:rPr>
-              <a:t>Поставки и экономика</a:t>
-            </a:r>
-          </a:p>
-        </p:txBody>
-      </p:sp>
-      <p:sp>
-        <p:nvSpPr>
-          <p:cNvPr id="5" name="TextBox 4"/>
+                  <a:srgbClr val="2F5D50"/>
+                </a:solidFill>
+                <a:latin typeface="Calibri"/>
+              </a:rPr>
+              <a:t>Поставки и экономика (Китай)</a:t>
+            </a:r>
+          </a:p>
+        </p:txBody>
+      </p:sp>
+      <p:sp>
+        <p:nvSpPr>
+          <p:cNvPr id="5" name="Rectangle 4"/>
+          <p:cNvSpPr/>
+          <p:nvPr/>
+        </p:nvSpPr>
+        <p:spPr>
+          <a:xfrm>
+            <a:off x="502920" y="777240"/>
+            <a:ext cx="11155680" cy="22860"/>
+          </a:xfrm>
+          <a:prstGeom prst="rect">
+            <a:avLst/>
+          </a:prstGeom>
+          <a:solidFill>
+            <a:srgbClr val="D8D2C8"/>
+          </a:solidFill>
+          <a:ln>
+            <a:noFill/>
+          </a:ln>
+        </p:spPr>
+        <p:style>
+          <a:lnRef idx="1">
+            <a:schemeClr val="accent1"/>
+          </a:lnRef>
+          <a:fillRef idx="3">
+            <a:schemeClr val="accent1"/>
+          </a:fillRef>
+          <a:effectRef idx="2">
+            <a:schemeClr val="accent1"/>
+          </a:effectRef>
+          <a:fontRef idx="minor">
+            <a:schemeClr val="lt1"/>
+          </a:fontRef>
+        </p:style>
+        <p:txBody>
+          <a:bodyPr rtlCol="0" anchor="ctr"/>
+          <a:lstStyle/>
+          <a:p>
+            <a:pPr algn="ctr"/>
+          </a:p>
+        </p:txBody>
+      </p:sp>
+      <p:sp>
+        <p:nvSpPr>
+          <p:cNvPr id="6" name="TextBox 5"/>
           <p:cNvSpPr txBox="1"/>
           <p:nvPr/>
         </p:nvSpPr>
         <p:spPr>
           <a:xfrm>
-            <a:off x="502920" y="1097280"/>
-            <a:ext cx="11155680" cy="5303520"/>
+            <a:off x="502920" y="6446520"/>
+            <a:ext cx="9601200" cy="320040"/>
+          </a:xfrm>
+          <a:prstGeom prst="rect">
+            <a:avLst/>
+          </a:prstGeom>
+          <a:noFill/>
+        </p:spPr>
+        <p:txBody>
+          <a:bodyPr wrap="none">
+            <a:spAutoFit/>
+          </a:bodyPr>
+          <a:lstStyle/>
+          <a:p>
+            <a:r>
+              <a:rPr sz="1100" b="0">
+                <a:solidFill>
+                  <a:srgbClr val="5A5A5A"/>
+                </a:solidFill>
+                <a:latin typeface="Calibri"/>
+              </a:rPr>
+              <a:t>Travel+ Natural · пульт v1.14 · собес · не оферта</a:t>
+            </a:r>
+          </a:p>
+        </p:txBody>
+      </p:sp>
+      <p:sp>
+        <p:nvSpPr>
+          <p:cNvPr id="7" name="TextBox 6"/>
+          <p:cNvSpPr txBox="1"/>
+          <p:nvPr/>
+        </p:nvSpPr>
+        <p:spPr>
+          <a:xfrm>
+            <a:off x="10607040" y="6446520"/>
+            <a:ext cx="1188720" cy="320040"/>
+          </a:xfrm>
+          <a:prstGeom prst="rect">
+            <a:avLst/>
+          </a:prstGeom>
+          <a:noFill/>
+        </p:spPr>
+        <p:txBody>
+          <a:bodyPr wrap="none">
+            <a:spAutoFit/>
+          </a:bodyPr>
+          <a:lstStyle/>
+          <a:p>
+            <a:pPr algn="r"/>
+            <a:r>
+              <a:rPr sz="1100" b="0">
+                <a:solidFill>
+                  <a:srgbClr val="5A5A5A"/>
+                </a:solidFill>
+                <a:latin typeface="Calibri"/>
+              </a:rPr>
+              <a:t>10/12</a:t>
+            </a:r>
+          </a:p>
+        </p:txBody>
+      </p:sp>
+      <p:sp>
+        <p:nvSpPr>
+          <p:cNvPr id="8" name="Rounded Rectangle 7"/>
+          <p:cNvSpPr/>
+          <p:nvPr/>
+        </p:nvSpPr>
+        <p:spPr>
+          <a:xfrm>
+            <a:off x="502920" y="1051560"/>
+            <a:ext cx="5349240" cy="5029200"/>
+          </a:xfrm>
+          <a:prstGeom prst="roundRect">
+            <a:avLst>
+              <a:gd name="adj" fmla="val 8000"/>
+            </a:avLst>
+          </a:prstGeom>
+          <a:solidFill>
+            <a:srgbClr val="FFFFFF"/>
+          </a:solidFill>
+          <a:ln w="12700">
+            <a:solidFill>
+              <a:srgbClr val="D8D2C8"/>
+            </a:solidFill>
+          </a:ln>
+        </p:spPr>
+        <p:style>
+          <a:lnRef idx="1">
+            <a:schemeClr val="accent1"/>
+          </a:lnRef>
+          <a:fillRef idx="3">
+            <a:schemeClr val="accent1"/>
+          </a:fillRef>
+          <a:effectRef idx="2">
+            <a:schemeClr val="accent1"/>
+          </a:effectRef>
+          <a:fontRef idx="minor">
+            <a:schemeClr val="lt1"/>
+          </a:fontRef>
+        </p:style>
+        <p:txBody>
+          <a:bodyPr rtlCol="0" anchor="ctr"/>
+          <a:lstStyle/>
+          <a:p>
+            <a:pPr algn="ctr"/>
+          </a:p>
+        </p:txBody>
+      </p:sp>
+      <p:sp>
+        <p:nvSpPr>
+          <p:cNvPr id="9" name="Rounded Rectangle 8"/>
+          <p:cNvSpPr/>
+          <p:nvPr/>
+        </p:nvSpPr>
+        <p:spPr>
+          <a:xfrm>
+            <a:off x="6126480" y="1051560"/>
+            <a:ext cx="5440680" cy="5029200"/>
+          </a:xfrm>
+          <a:prstGeom prst="roundRect">
+            <a:avLst>
+              <a:gd name="adj" fmla="val 8000"/>
+            </a:avLst>
+          </a:prstGeom>
+          <a:solidFill>
+            <a:srgbClr val="FFFFFF"/>
+          </a:solidFill>
+          <a:ln w="12700">
+            <a:solidFill>
+              <a:srgbClr val="D8D2C8"/>
+            </a:solidFill>
+          </a:ln>
+        </p:spPr>
+        <p:style>
+          <a:lnRef idx="1">
+            <a:schemeClr val="accent1"/>
+          </a:lnRef>
+          <a:fillRef idx="3">
+            <a:schemeClr val="accent1"/>
+          </a:fillRef>
+          <a:effectRef idx="2">
+            <a:schemeClr val="accent1"/>
+          </a:effectRef>
+          <a:fontRef idx="minor">
+            <a:schemeClr val="lt1"/>
+          </a:fontRef>
+        </p:style>
+        <p:txBody>
+          <a:bodyPr rtlCol="0" anchor="ctr"/>
+          <a:lstStyle/>
+          <a:p>
+            <a:pPr algn="ctr"/>
+          </a:p>
+        </p:txBody>
+      </p:sp>
+      <p:sp>
+        <p:nvSpPr>
+          <p:cNvPr id="10" name="TextBox 9"/>
+          <p:cNvSpPr txBox="1"/>
+          <p:nvPr/>
+        </p:nvSpPr>
+        <p:spPr>
+          <a:xfrm>
+            <a:off x="777240" y="1234440"/>
+            <a:ext cx="4846320" cy="4663440"/>
           </a:xfrm>
           <a:prstGeom prst="rect">
             <a:avLst/>
@@ -3533,95 +3809,95 @@
           <a:p>
             <a:pPr>
               <a:spcAft>
-                <a:spcPts val="600"/>
-              </a:spcAft>
-            </a:pPr>
-            <a:r>
-              <a:rPr sz="1800" b="0">
-                <a:solidFill>
-                  <a:srgbClr val="2C3A3F"/>
-                </a:solidFill>
-                <a:latin typeface="Calibri"/>
-              </a:rPr>
-              <a:t>Прайс — после COGS. Ориентир: выше HL, рядом с ЕТС, ниже NS.</a:t>
-            </a:r>
-          </a:p>
-          <a:p>
-            <a:pPr>
-              <a:spcAft>
-                <a:spcPts val="600"/>
-              </a:spcAft>
-            </a:pPr>
-            <a:r>
-              <a:rPr sz="1800" b="0">
-                <a:solidFill>
-                  <a:srgbClr val="2C3A3F"/>
-                </a:solidFill>
-                <a:latin typeface="Calibri"/>
-              </a:rPr>
-              <a:t>Не война копейкой с ЕТС — пакет и ощущение натуральности.</a:t>
-            </a:r>
-          </a:p>
-          <a:p>
-            <a:pPr>
-              <a:spcAft>
-                <a:spcPts val="600"/>
-              </a:spcAft>
-            </a:pPr>
-            <a:r>
-              <a:rPr sz="1800" b="0">
-                <a:solidFill>
-                  <a:srgbClr val="2C3A3F"/>
-                </a:solidFill>
-                <a:latin typeface="Calibri"/>
-              </a:rPr>
-              <a:t/>
-            </a:r>
-          </a:p>
-          <a:p>
-            <a:pPr>
-              <a:spcAft>
-                <a:spcPts val="600"/>
-              </a:spcAft>
-            </a:pPr>
-            <a:r>
-              <a:rPr sz="1800" b="0">
-                <a:solidFill>
-                  <a:srgbClr val="2C3A3F"/>
-                </a:solidFill>
-                <a:latin typeface="Calibri"/>
-              </a:rPr>
-              <a:t>Китай / свой завод / гибрид — открытый вопрос в DoD.</a:t>
-            </a:r>
-          </a:p>
-          <a:p>
-            <a:pPr>
-              <a:spcAft>
-                <a:spcPts val="600"/>
-              </a:spcAft>
-            </a:pPr>
-            <a:r>
-              <a:rPr sz="1800" b="0">
-                <a:solidFill>
-                  <a:srgbClr val="2C3A3F"/>
-                </a:solidFill>
-                <a:latin typeface="Calibri"/>
-              </a:rPr>
-              <a:t>До фиксации origin не обещаем «российское производство».</a:t>
-            </a:r>
-          </a:p>
-        </p:txBody>
-      </p:sp>
-      <p:sp>
-        <p:nvSpPr>
-          <p:cNvPr id="6" name="TextBox 5"/>
+                <a:spcPts val="1200"/>
+              </a:spcAft>
+            </a:pPr>
+            <a:r>
+              <a:rPr sz="2000" b="1">
+                <a:solidFill>
+                  <a:srgbClr val="2F5D50"/>
+                </a:solidFill>
+                <a:latin typeface="Calibri"/>
+              </a:rPr>
+              <a:t>Экономика</a:t>
+            </a:r>
+          </a:p>
+          <a:p>
+            <a:pPr>
+              <a:spcAft>
+                <a:spcPts val="800"/>
+              </a:spcAft>
+            </a:pPr>
+            <a:r>
+              <a:rPr sz="1500" b="0">
+                <a:solidFill>
+                  <a:srgbClr val="1C1C1C"/>
+                </a:solidFill>
+                <a:latin typeface="Calibri"/>
+              </a:rPr>
+              <a:t>Прайс - после COGS (цена на складе).</a:t>
+            </a:r>
+          </a:p>
+          <a:p>
+            <a:pPr>
+              <a:spcAft>
+                <a:spcPts val="800"/>
+              </a:spcAft>
+            </a:pPr>
+            <a:r>
+              <a:rPr sz="1500" b="0">
+                <a:solidFill>
+                  <a:srgbClr val="1C1C1C"/>
+                </a:solidFill>
+                <a:latin typeface="Calibri"/>
+              </a:rPr>
+              <a:t>Ориентир: выше HL · рядом с ЕТС · ниже NS.</a:t>
+            </a:r>
+          </a:p>
+          <a:p>
+            <a:pPr>
+              <a:spcAft>
+                <a:spcPts val="400"/>
+              </a:spcAft>
+            </a:pPr>
+            <a:r>
+              <a:rPr sz="1500" b="0">
+                <a:solidFill>
+                  <a:srgbClr val="1C1C1C"/>
+                </a:solidFill>
+                <a:latin typeface="Calibri"/>
+              </a:rPr>
+              <a:t>Не война копейкой -</a:t>
+            </a:r>
+          </a:p>
+          <a:p>
+            <a:pPr>
+              <a:spcAft>
+                <a:spcPts val="0"/>
+              </a:spcAft>
+            </a:pPr>
+            <a:r>
+              <a:rPr sz="1500" b="1">
+                <a:solidFill>
+                  <a:srgbClr val="1C1C1C"/>
+                </a:solidFill>
+                <a:latin typeface="Calibri"/>
+              </a:rPr>
+              <a:t>пакет и ощущение натуральности.</a:t>
+            </a:r>
+          </a:p>
+        </p:txBody>
+      </p:sp>
+      <p:sp>
+        <p:nvSpPr>
+          <p:cNvPr id="11" name="TextBox 10"/>
           <p:cNvSpPr txBox="1"/>
           <p:nvPr/>
         </p:nvSpPr>
         <p:spPr>
           <a:xfrm>
-            <a:off x="502920" y="6446520"/>
-            <a:ext cx="11155680" cy="320040"/>
+            <a:off x="6400800" y="1234440"/>
+            <a:ext cx="4937760" cy="4663440"/>
           </a:xfrm>
           <a:prstGeom prst="rect">
             <a:avLst/>
@@ -3629,19 +3905,104 @@
           <a:noFill/>
         </p:spPr>
         <p:txBody>
-          <a:bodyPr wrap="none">
+          <a:bodyPr wrap="square">
             <a:spAutoFit/>
           </a:bodyPr>
           <a:lstStyle/>
           <a:p>
-            <a:r>
-              <a:rPr sz="1100" b="0">
-                <a:solidFill>
-                  <a:srgbClr val="5A6A70"/>
-                </a:solidFill>
-                <a:latin typeface="Calibri"/>
-              </a:rPr>
-              <a:t>Travel+ Natural · пульт v1.10 · собес · не оферта</a:t>
+            <a:pPr>
+              <a:spcAft>
+                <a:spcPts val="1200"/>
+              </a:spcAft>
+            </a:pPr>
+            <a:r>
+              <a:rPr sz="2000" b="1">
+                <a:solidFill>
+                  <a:srgbClr val="2F5D50"/>
+                </a:solidFill>
+                <a:latin typeface="Calibri"/>
+              </a:rPr>
+              <a:t>Если Китай / гибрид</a:t>
+            </a:r>
+          </a:p>
+          <a:p>
+            <a:pPr>
+              <a:spcAft>
+                <a:spcPts val="600"/>
+              </a:spcAft>
+            </a:pPr>
+            <a:r>
+              <a:rPr sz="1500" b="0">
+                <a:solidFill>
+                  <a:srgbClr val="1C1C1C"/>
+                </a:solidFill>
+                <a:latin typeface="Calibri"/>
+              </a:rPr>
+              <a:t>Сравниваем заводы в FOB</a:t>
+            </a:r>
+          </a:p>
+          <a:p>
+            <a:pPr>
+              <a:spcAft>
+                <a:spcPts val="600"/>
+              </a:spcAft>
+            </a:pPr>
+            <a:r>
+              <a:rPr sz="1500" b="0">
+                <a:solidFill>
+                  <a:srgbClr val="1C1C1C"/>
+                </a:solidFill>
+                <a:latin typeface="Calibri"/>
+              </a:rPr>
+              <a:t>Логистика до Кириши - отдельной строкой</a:t>
+            </a:r>
+          </a:p>
+          <a:p>
+            <a:pPr>
+              <a:spcAft>
+                <a:spcPts val="600"/>
+              </a:spcAft>
+            </a:pPr>
+            <a:r>
+              <a:rPr sz="1400" b="0">
+                <a:solidFill>
+                  <a:srgbClr val="1C1C1C"/>
+                </a:solidFill>
+                <a:latin typeface="Calibri"/>
+              </a:rPr>
+              <a:t>Landed cost = FOB + фрахт + таможня + довоз</a:t>
+            </a:r>
+          </a:p>
+          <a:p>
+            <a:pPr>
+              <a:spcAft>
+                <a:spcPts val="600"/>
+              </a:spcAft>
+            </a:pPr>
+            <a:r>
+              <a:rPr sz="1500" b="1">
+                <a:solidFill>
+                  <a:srgbClr val="1C1C1C"/>
+                </a:solidFill>
+                <a:latin typeface="Calibri"/>
+              </a:rPr>
+              <a:t>Срок пилота = «на складе»</a:t>
+            </a:r>
+          </a:p>
+          <a:p>
+            <a:pPr>
+              <a:spcAft>
+                <a:spcPts val="0"/>
+              </a:spcAft>
+            </a:pPr>
+            <a:r>
+              <a:rPr sz="1400" b="0">
+                <a:solidFill>
+                  <a:srgbClr val="1C1C1C"/>
+                </a:solidFill>
+                <a:latin typeface="Calibri"/>
+              </a:rPr>
+              <a:t>Origin не ясен → не говорим «российское»</a:t>
             </a:r>
           </a:p>
         </p:txBody>
@@ -3679,7 +4040,7 @@
             <a:avLst/>
           </a:prstGeom>
           <a:solidFill>
-            <a:srgbClr val="F7F9FB"/>
+            <a:srgbClr val="F7F5F2"/>
           </a:solidFill>
           <a:ln>
             <a:noFill/>
@@ -3722,7 +4083,7 @@
             <a:avLst/>
           </a:prstGeom>
           <a:solidFill>
-            <a:srgbClr val="1F6B5C"/>
+            <a:srgbClr val="2F5D50"/>
           </a:solidFill>
           <a:ln>
             <a:noFill/>
@@ -3758,8 +4119,8 @@
         </p:nvSpPr>
         <p:spPr>
           <a:xfrm>
-            <a:off x="502920" y="320040"/>
-            <a:ext cx="11155680" cy="640080"/>
+            <a:off x="502920" y="256032"/>
+            <a:ext cx="11155680" cy="502920"/>
           </a:xfrm>
           <a:prstGeom prst="rect">
             <a:avLst/>
@@ -3775,25 +4136,231 @@
             <a:r>
               <a:rPr sz="2800" b="1">
                 <a:solidFill>
-                  <a:srgbClr val="1A2A2E"/>
-                </a:solidFill>
-                <a:latin typeface="Calibri"/>
-              </a:rPr>
-              <a:t>Итог и следующий шаг</a:t>
-            </a:r>
-          </a:p>
-        </p:txBody>
-      </p:sp>
-      <p:sp>
-        <p:nvSpPr>
-          <p:cNvPr id="5" name="TextBox 4"/>
+                  <a:srgbClr val="2F5D50"/>
+                </a:solidFill>
+                <a:latin typeface="Calibri"/>
+              </a:rPr>
+              <a:t>Что в пульте уже есть</a:t>
+            </a:r>
+          </a:p>
+        </p:txBody>
+      </p:sp>
+      <p:sp>
+        <p:nvSpPr>
+          <p:cNvPr id="5" name="Rectangle 4"/>
+          <p:cNvSpPr/>
+          <p:nvPr/>
+        </p:nvSpPr>
+        <p:spPr>
+          <a:xfrm>
+            <a:off x="502920" y="777240"/>
+            <a:ext cx="11155680" cy="22860"/>
+          </a:xfrm>
+          <a:prstGeom prst="rect">
+            <a:avLst/>
+          </a:prstGeom>
+          <a:solidFill>
+            <a:srgbClr val="D8D2C8"/>
+          </a:solidFill>
+          <a:ln>
+            <a:noFill/>
+          </a:ln>
+        </p:spPr>
+        <p:style>
+          <a:lnRef idx="1">
+            <a:schemeClr val="accent1"/>
+          </a:lnRef>
+          <a:fillRef idx="3">
+            <a:schemeClr val="accent1"/>
+          </a:fillRef>
+          <a:effectRef idx="2">
+            <a:schemeClr val="accent1"/>
+          </a:effectRef>
+          <a:fontRef idx="minor">
+            <a:schemeClr val="lt1"/>
+          </a:fontRef>
+        </p:style>
+        <p:txBody>
+          <a:bodyPr rtlCol="0" anchor="ctr"/>
+          <a:lstStyle/>
+          <a:p>
+            <a:pPr algn="ctr"/>
+          </a:p>
+        </p:txBody>
+      </p:sp>
+      <p:sp>
+        <p:nvSpPr>
+          <p:cNvPr id="6" name="TextBox 5"/>
           <p:cNvSpPr txBox="1"/>
           <p:nvPr/>
         </p:nvSpPr>
         <p:spPr>
           <a:xfrm>
-            <a:off x="502920" y="1097280"/>
-            <a:ext cx="11155680" cy="5303520"/>
+            <a:off x="502920" y="6446520"/>
+            <a:ext cx="9601200" cy="320040"/>
+          </a:xfrm>
+          <a:prstGeom prst="rect">
+            <a:avLst/>
+          </a:prstGeom>
+          <a:noFill/>
+        </p:spPr>
+        <p:txBody>
+          <a:bodyPr wrap="none">
+            <a:spAutoFit/>
+          </a:bodyPr>
+          <a:lstStyle/>
+          <a:p>
+            <a:r>
+              <a:rPr sz="1100" b="0">
+                <a:solidFill>
+                  <a:srgbClr val="5A5A5A"/>
+                </a:solidFill>
+                <a:latin typeface="Calibri"/>
+              </a:rPr>
+              <a:t>Travel+ Natural · пульт v1.14 · собес · не оферта</a:t>
+            </a:r>
+          </a:p>
+        </p:txBody>
+      </p:sp>
+      <p:sp>
+        <p:nvSpPr>
+          <p:cNvPr id="7" name="TextBox 6"/>
+          <p:cNvSpPr txBox="1"/>
+          <p:nvPr/>
+        </p:nvSpPr>
+        <p:spPr>
+          <a:xfrm>
+            <a:off x="10607040" y="6446520"/>
+            <a:ext cx="1188720" cy="320040"/>
+          </a:xfrm>
+          <a:prstGeom prst="rect">
+            <a:avLst/>
+          </a:prstGeom>
+          <a:noFill/>
+        </p:spPr>
+        <p:txBody>
+          <a:bodyPr wrap="none">
+            <a:spAutoFit/>
+          </a:bodyPr>
+          <a:lstStyle/>
+          <a:p>
+            <a:pPr algn="r"/>
+            <a:r>
+              <a:rPr sz="1100" b="0">
+                <a:solidFill>
+                  <a:srgbClr val="5A5A5A"/>
+                </a:solidFill>
+                <a:latin typeface="Calibri"/>
+              </a:rPr>
+              <a:t>11/12</a:t>
+            </a:r>
+          </a:p>
+        </p:txBody>
+      </p:sp>
+      <p:sp>
+        <p:nvSpPr>
+          <p:cNvPr id="8" name="Rounded Rectangle 7"/>
+          <p:cNvSpPr/>
+          <p:nvPr/>
+        </p:nvSpPr>
+        <p:spPr>
+          <a:xfrm>
+            <a:off x="502920" y="1051560"/>
+            <a:ext cx="5349240" cy="5029200"/>
+          </a:xfrm>
+          <a:prstGeom prst="roundRect">
+            <a:avLst>
+              <a:gd name="adj" fmla="val 8000"/>
+            </a:avLst>
+          </a:prstGeom>
+          <a:solidFill>
+            <a:srgbClr val="FFFFFF"/>
+          </a:solidFill>
+          <a:ln w="12700">
+            <a:solidFill>
+              <a:srgbClr val="D8D2C8"/>
+            </a:solidFill>
+          </a:ln>
+        </p:spPr>
+        <p:style>
+          <a:lnRef idx="1">
+            <a:schemeClr val="accent1"/>
+          </a:lnRef>
+          <a:fillRef idx="3">
+            <a:schemeClr val="accent1"/>
+          </a:fillRef>
+          <a:effectRef idx="2">
+            <a:schemeClr val="accent1"/>
+          </a:effectRef>
+          <a:fontRef idx="minor">
+            <a:schemeClr val="lt1"/>
+          </a:fontRef>
+        </p:style>
+        <p:txBody>
+          <a:bodyPr rtlCol="0" anchor="ctr"/>
+          <a:lstStyle/>
+          <a:p>
+            <a:pPr algn="ctr"/>
+          </a:p>
+        </p:txBody>
+      </p:sp>
+      <p:sp>
+        <p:nvSpPr>
+          <p:cNvPr id="9" name="Rounded Rectangle 8"/>
+          <p:cNvSpPr/>
+          <p:nvPr/>
+        </p:nvSpPr>
+        <p:spPr>
+          <a:xfrm>
+            <a:off x="6126480" y="1051560"/>
+            <a:ext cx="5440680" cy="5029200"/>
+          </a:xfrm>
+          <a:prstGeom prst="roundRect">
+            <a:avLst>
+              <a:gd name="adj" fmla="val 8000"/>
+            </a:avLst>
+          </a:prstGeom>
+          <a:solidFill>
+            <a:srgbClr val="FFFFFF"/>
+          </a:solidFill>
+          <a:ln w="12700">
+            <a:solidFill>
+              <a:srgbClr val="D8D2C8"/>
+            </a:solidFill>
+          </a:ln>
+        </p:spPr>
+        <p:style>
+          <a:lnRef idx="1">
+            <a:schemeClr val="accent1"/>
+          </a:lnRef>
+          <a:fillRef idx="3">
+            <a:schemeClr val="accent1"/>
+          </a:fillRef>
+          <a:effectRef idx="2">
+            <a:schemeClr val="accent1"/>
+          </a:effectRef>
+          <a:fontRef idx="minor">
+            <a:schemeClr val="lt1"/>
+          </a:fontRef>
+        </p:style>
+        <p:txBody>
+          <a:bodyPr rtlCol="0" anchor="ctr"/>
+          <a:lstStyle/>
+          <a:p>
+            <a:pPr algn="ctr"/>
+          </a:p>
+        </p:txBody>
+      </p:sp>
+      <p:sp>
+        <p:nvSpPr>
+          <p:cNvPr id="10" name="TextBox 9"/>
+          <p:cNvSpPr txBox="1"/>
+          <p:nvPr/>
+        </p:nvSpPr>
+        <p:spPr>
+          <a:xfrm>
+            <a:off x="777240" y="1234440"/>
+            <a:ext cx="4846320" cy="4663440"/>
           </a:xfrm>
           <a:prstGeom prst="rect">
             <a:avLst/>
@@ -3808,17 +4375,33 @@
           <a:p>
             <a:pPr>
               <a:spcAft>
+                <a:spcPts val="1200"/>
+              </a:spcAft>
+            </a:pPr>
+            <a:r>
+              <a:rPr sz="2000" b="1">
+                <a:solidFill>
+                  <a:srgbClr val="2F5D50"/>
+                </a:solidFill>
+                <a:latin typeface="Calibri"/>
+              </a:rPr>
+              <a:t>Содержание</a:t>
+            </a:r>
+          </a:p>
+          <a:p>
+            <a:pPr>
+              <a:spcAft>
                 <a:spcPts val="600"/>
               </a:spcAft>
             </a:pPr>
             <a:r>
-              <a:rPr sz="1800" b="0">
-                <a:solidFill>
-                  <a:srgbClr val="2C3A3F"/>
-                </a:solidFill>
-                <a:latin typeface="Calibri"/>
-              </a:rPr>
-              <a:t>Собрал: ДНК + StoryBrand + DoD + полевая защита</a:t>
+              <a:rPr sz="1500" b="0">
+                <a:solidFill>
+                  <a:srgbClr val="1C1C1C"/>
+                </a:solidFill>
+                <a:latin typeface="Calibri"/>
+              </a:rPr>
+              <a:t>Этапы 0-2 - разведка и правила</a:t>
             </a:r>
           </a:p>
           <a:p>
@@ -3828,13 +4411,13 @@
               </a:spcAft>
             </a:pPr>
             <a:r>
-              <a:rPr sz="1800" b="0">
-                <a:solidFill>
-                  <a:srgbClr val="2C3A3F"/>
-                </a:solidFill>
-                <a:latin typeface="Calibri"/>
-              </a:rPr>
-              <a:t/>
+              <a:rPr sz="1500" b="0">
+                <a:solidFill>
+                  <a:srgbClr val="1C1C1C"/>
+                </a:solidFill>
+                <a:latin typeface="Calibri"/>
+              </a:rPr>
+              <a:t>Этапы 3-6 - сценарий «как вести дело»</a:t>
             </a:r>
           </a:p>
           <a:p>
@@ -3844,13 +4427,68 @@
               </a:spcAft>
             </a:pPr>
             <a:r>
-              <a:rPr sz="1800" b="0">
-                <a:solidFill>
-                  <a:srgbClr val="2C3A3F"/>
-                </a:solidFill>
-                <a:latin typeface="Calibri"/>
-              </a:rPr>
-              <a:t>Готов обсудить:</a:t>
+              <a:rPr sz="1500" b="0">
+                <a:solidFill>
+                  <a:srgbClr val="1C1C1C"/>
+                </a:solidFill>
+                <a:latin typeface="Calibri"/>
+              </a:rPr>
+              <a:t>StoryBrand · DoD · риски · возврат</a:t>
+            </a:r>
+          </a:p>
+          <a:p>
+            <a:pPr>
+              <a:spcAft>
+                <a:spcPts val="0"/>
+              </a:spcAft>
+            </a:pPr>
+            <a:r>
+              <a:rPr sz="1500" b="0">
+                <a:solidFill>
+                  <a:srgbClr val="1C1C1C"/>
+                </a:solidFill>
+                <a:latin typeface="Calibri"/>
+              </a:rPr>
+              <a:t>Мостик портфеля Travel+</a:t>
+            </a:r>
+          </a:p>
+        </p:txBody>
+      </p:sp>
+      <p:sp>
+        <p:nvSpPr>
+          <p:cNvPr id="11" name="TextBox 10"/>
+          <p:cNvSpPr txBox="1"/>
+          <p:nvPr/>
+        </p:nvSpPr>
+        <p:spPr>
+          <a:xfrm>
+            <a:off x="6400800" y="1234440"/>
+            <a:ext cx="4937760" cy="4663440"/>
+          </a:xfrm>
+          <a:prstGeom prst="rect">
+            <a:avLst/>
+          </a:prstGeom>
+          <a:noFill/>
+        </p:spPr>
+        <p:txBody>
+          <a:bodyPr wrap="square">
+            <a:spAutoFit/>
+          </a:bodyPr>
+          <a:lstStyle/>
+          <a:p>
+            <a:pPr>
+              <a:spcAft>
+                <a:spcPts val="1200"/>
+              </a:spcAft>
+            </a:pPr>
+            <a:r>
+              <a:rPr sz="2000" b="1">
+                <a:solidFill>
+                  <a:srgbClr val="2F5D50"/>
+                </a:solidFill>
+                <a:latin typeface="Calibri"/>
+              </a:rPr>
+              <a:t>Справочники</a:t>
             </a:r>
           </a:p>
           <a:p>
@@ -3860,13 +4498,29 @@
               </a:spcAft>
             </a:pPr>
             <a:r>
-              <a:rPr sz="1800" b="0">
-                <a:solidFill>
-                  <a:srgbClr val="2C3A3F"/>
-                </a:solidFill>
-                <a:latin typeface="Calibri"/>
-              </a:rPr>
-              <a:t>1) приоритет блокеров этапа 2 с технологом</a:t>
+              <a:rPr sz="1500" b="0">
+                <a:solidFill>
+                  <a:srgbClr val="1C1C1C"/>
+                </a:solidFill>
+                <a:latin typeface="Calibri"/>
+              </a:rPr>
+              <a:t>Глоссарий бренда + глоссарий ВЭД</a:t>
+            </a:r>
+          </a:p>
+          <a:p>
+            <a:pPr>
+              <a:spcAft>
+                <a:spcPts val="1400"/>
+              </a:spcAft>
+            </a:pPr>
+            <a:r>
+              <a:rPr sz="1500" b="0">
+                <a:solidFill>
+                  <a:srgbClr val="1C1C1C"/>
+                </a:solidFill>
+                <a:latin typeface="Calibri"/>
+              </a:rPr>
+              <a:t>Раздел L: путь · Incoterms · RFQ</a:t>
             </a:r>
           </a:p>
           <a:p>
@@ -3876,91 +4530,147 @@
               </a:spcAft>
             </a:pPr>
             <a:r>
-              <a:rPr sz="1800" b="0">
-                <a:solidFill>
-                  <a:srgbClr val="2C3A3F"/>
-                </a:solidFill>
-                <a:latin typeface="Calibri"/>
-              </a:rPr>
-              <a:t>2) пилотный сегмент eco / wellness</a:t>
-            </a:r>
-          </a:p>
-          <a:p>
-            <a:pPr>
-              <a:spcAft>
-                <a:spcPts val="600"/>
-              </a:spcAft>
-            </a:pPr>
-            <a:r>
-              <a:rPr sz="1800" b="0">
-                <a:solidFill>
-                  <a:srgbClr val="2C3A3F"/>
-                </a:solidFill>
-                <a:latin typeface="Calibri"/>
-              </a:rPr>
-              <a:t>3) встраивание в продажи без каннибализации Hotel Line</a:t>
-            </a:r>
-          </a:p>
-          <a:p>
-            <a:pPr>
-              <a:spcAft>
-                <a:spcPts val="600"/>
-              </a:spcAft>
-            </a:pPr>
-            <a:r>
-              <a:rPr sz="1800" b="0">
-                <a:solidFill>
-                  <a:srgbClr val="2C3A3F"/>
-                </a:solidFill>
-                <a:latin typeface="Calibri"/>
-              </a:rPr>
-              <a:t/>
-            </a:r>
-          </a:p>
-          <a:p>
-            <a:pPr>
-              <a:spcAft>
-                <a:spcPts val="600"/>
-              </a:spcAft>
-            </a:pPr>
-            <a:r>
-              <a:rPr sz="1800" b="0">
-                <a:solidFill>
-                  <a:srgbClr val="2C3A3F"/>
-                </a:solidFill>
-                <a:latin typeface="Calibri"/>
-              </a:rPr>
-              <a:t>v2.0 пульта — когда завод даст %, пакет и образец.</a:t>
-            </a:r>
-          </a:p>
-          <a:p>
-            <a:pPr>
-              <a:spcAft>
-                <a:spcPts val="600"/>
-              </a:spcAft>
-            </a:pPr>
-            <a:r>
-              <a:rPr sz="1800" b="0">
-                <a:solidFill>
-                  <a:srgbClr val="2C3A3F"/>
-                </a:solidFill>
-                <a:latin typeface="Calibri"/>
-              </a:rPr>
-              <a:t>Спасибо. Вопросы.</a:t>
-            </a:r>
-          </a:p>
-        </p:txBody>
-      </p:sp>
-      <p:sp>
-        <p:nvSpPr>
-          <p:cNvPr id="6" name="TextBox 5"/>
+              <a:rPr sz="1500" b="0">
+                <a:solidFill>
+                  <a:srgbClr val="1C1C1C"/>
+                </a:solidFill>
+                <a:latin typeface="Calibri"/>
+              </a:rPr>
+              <a:t>Статус: рамка для поля / собеса.</a:t>
+            </a:r>
+          </a:p>
+          <a:p>
+            <a:pPr>
+              <a:spcAft>
+                <a:spcPts val="0"/>
+              </a:spcAft>
+            </a:pPr>
+            <a:r>
+              <a:rPr sz="1500" b="1">
+                <a:solidFill>
+                  <a:srgbClr val="1C1C1C"/>
+                </a:solidFill>
+                <a:latin typeface="Calibri"/>
+              </a:rPr>
+              <a:t>v2.0 - когда технолог даст цифры.</a:t>
+            </a:r>
+          </a:p>
+        </p:txBody>
+      </p:sp>
+    </p:spTree>
+  </p:cSld>
+  <p:clrMapOvr>
+    <a:masterClrMapping/>
+  </p:clrMapOvr>
+</p:sld>
+</file>
+
+<file path=ppt/slides/slide12.xml><?xml version="1.0" encoding="utf-8"?>
+<p:sld xmlns:a="http://schemas.openxmlformats.org/drawingml/2006/main" xmlns:p="http://schemas.openxmlformats.org/presentationml/2006/main" xmlns:r="http://schemas.openxmlformats.org/officeDocument/2006/relationships">
+  <p:cSld>
+    <p:spTree>
+      <p:nvGrpSpPr>
+        <p:cNvPr id="1" name=""/>
+        <p:cNvGrpSpPr/>
+        <p:nvPr/>
+      </p:nvGrpSpPr>
+      <p:grpSpPr/>
+      <p:sp>
+        <p:nvSpPr>
+          <p:cNvPr id="2" name="Rectangle 1"/>
+          <p:cNvSpPr/>
+          <p:nvPr/>
+        </p:nvSpPr>
+        <p:spPr>
+          <a:xfrm>
+            <a:off x="0" y="0"/>
+            <a:ext cx="12191695" cy="6858000"/>
+          </a:xfrm>
+          <a:prstGeom prst="rect">
+            <a:avLst/>
+          </a:prstGeom>
+          <a:solidFill>
+            <a:srgbClr val="F7F5F2"/>
+          </a:solidFill>
+          <a:ln>
+            <a:noFill/>
+          </a:ln>
+        </p:spPr>
+        <p:style>
+          <a:lnRef idx="1">
+            <a:schemeClr val="accent1"/>
+          </a:lnRef>
+          <a:fillRef idx="3">
+            <a:schemeClr val="accent1"/>
+          </a:fillRef>
+          <a:effectRef idx="2">
+            <a:schemeClr val="accent1"/>
+          </a:effectRef>
+          <a:fontRef idx="minor">
+            <a:schemeClr val="lt1"/>
+          </a:fontRef>
+        </p:style>
+        <p:txBody>
+          <a:bodyPr rtlCol="0" anchor="ctr"/>
+          <a:lstStyle/>
+          <a:p>
+            <a:pPr algn="ctr"/>
+          </a:p>
+        </p:txBody>
+      </p:sp>
+      <p:sp>
+        <p:nvSpPr>
+          <p:cNvPr id="3" name="Rectangle 2"/>
+          <p:cNvSpPr/>
+          <p:nvPr/>
+        </p:nvSpPr>
+        <p:spPr>
+          <a:xfrm>
+            <a:off x="0" y="0"/>
+            <a:ext cx="109728" cy="6858000"/>
+          </a:xfrm>
+          <a:prstGeom prst="rect">
+            <a:avLst/>
+          </a:prstGeom>
+          <a:solidFill>
+            <a:srgbClr val="2F5D50"/>
+          </a:solidFill>
+          <a:ln>
+            <a:noFill/>
+          </a:ln>
+        </p:spPr>
+        <p:style>
+          <a:lnRef idx="1">
+            <a:schemeClr val="accent1"/>
+          </a:lnRef>
+          <a:fillRef idx="3">
+            <a:schemeClr val="accent1"/>
+          </a:fillRef>
+          <a:effectRef idx="2">
+            <a:schemeClr val="accent1"/>
+          </a:effectRef>
+          <a:fontRef idx="minor">
+            <a:schemeClr val="lt1"/>
+          </a:fontRef>
+        </p:style>
+        <p:txBody>
+          <a:bodyPr rtlCol="0" anchor="ctr"/>
+          <a:lstStyle/>
+          <a:p>
+            <a:pPr algn="ctr"/>
+          </a:p>
+        </p:txBody>
+      </p:sp>
+      <p:sp>
+        <p:nvSpPr>
+          <p:cNvPr id="4" name="TextBox 3"/>
           <p:cNvSpPr txBox="1"/>
           <p:nvPr/>
         </p:nvSpPr>
         <p:spPr>
           <a:xfrm>
-            <a:off x="502920" y="6446520"/>
-            <a:ext cx="11155680" cy="320040"/>
+            <a:off x="502920" y="256032"/>
+            <a:ext cx="11155680" cy="502920"/>
           </a:xfrm>
           <a:prstGeom prst="rect">
             <a:avLst/>
@@ -3974,13 +4684,425 @@
           <a:lstStyle/>
           <a:p>
             <a:r>
+              <a:rPr sz="2800" b="1">
+                <a:solidFill>
+                  <a:srgbClr val="2F5D50"/>
+                </a:solidFill>
+                <a:latin typeface="Calibri"/>
+              </a:rPr>
+              <a:t>Итог и следующий шаг</a:t>
+            </a:r>
+          </a:p>
+        </p:txBody>
+      </p:sp>
+      <p:sp>
+        <p:nvSpPr>
+          <p:cNvPr id="5" name="Rectangle 4"/>
+          <p:cNvSpPr/>
+          <p:nvPr/>
+        </p:nvSpPr>
+        <p:spPr>
+          <a:xfrm>
+            <a:off x="502920" y="777240"/>
+            <a:ext cx="11155680" cy="22860"/>
+          </a:xfrm>
+          <a:prstGeom prst="rect">
+            <a:avLst/>
+          </a:prstGeom>
+          <a:solidFill>
+            <a:srgbClr val="D8D2C8"/>
+          </a:solidFill>
+          <a:ln>
+            <a:noFill/>
+          </a:ln>
+        </p:spPr>
+        <p:style>
+          <a:lnRef idx="1">
+            <a:schemeClr val="accent1"/>
+          </a:lnRef>
+          <a:fillRef idx="3">
+            <a:schemeClr val="accent1"/>
+          </a:fillRef>
+          <a:effectRef idx="2">
+            <a:schemeClr val="accent1"/>
+          </a:effectRef>
+          <a:fontRef idx="minor">
+            <a:schemeClr val="lt1"/>
+          </a:fontRef>
+        </p:style>
+        <p:txBody>
+          <a:bodyPr rtlCol="0" anchor="ctr"/>
+          <a:lstStyle/>
+          <a:p>
+            <a:pPr algn="ctr"/>
+          </a:p>
+        </p:txBody>
+      </p:sp>
+      <p:sp>
+        <p:nvSpPr>
+          <p:cNvPr id="6" name="TextBox 5"/>
+          <p:cNvSpPr txBox="1"/>
+          <p:nvPr/>
+        </p:nvSpPr>
+        <p:spPr>
+          <a:xfrm>
+            <a:off x="502920" y="6446520"/>
+            <a:ext cx="9601200" cy="320040"/>
+          </a:xfrm>
+          <a:prstGeom prst="rect">
+            <a:avLst/>
+          </a:prstGeom>
+          <a:noFill/>
+        </p:spPr>
+        <p:txBody>
+          <a:bodyPr wrap="none">
+            <a:spAutoFit/>
+          </a:bodyPr>
+          <a:lstStyle/>
+          <a:p>
+            <a:r>
               <a:rPr sz="1100" b="0">
                 <a:solidFill>
-                  <a:srgbClr val="5A6A70"/>
-                </a:solidFill>
-                <a:latin typeface="Calibri"/>
-              </a:rPr>
-              <a:t>Travel+ Natural · пульт v1.10 · собес · не оферта</a:t>
+                  <a:srgbClr val="5A5A5A"/>
+                </a:solidFill>
+                <a:latin typeface="Calibri"/>
+              </a:rPr>
+              <a:t>Travel+ Natural · пульт v1.14 · собес · не оферта</a:t>
+            </a:r>
+          </a:p>
+        </p:txBody>
+      </p:sp>
+      <p:sp>
+        <p:nvSpPr>
+          <p:cNvPr id="7" name="TextBox 6"/>
+          <p:cNvSpPr txBox="1"/>
+          <p:nvPr/>
+        </p:nvSpPr>
+        <p:spPr>
+          <a:xfrm>
+            <a:off x="10607040" y="6446520"/>
+            <a:ext cx="1188720" cy="320040"/>
+          </a:xfrm>
+          <a:prstGeom prst="rect">
+            <a:avLst/>
+          </a:prstGeom>
+          <a:noFill/>
+        </p:spPr>
+        <p:txBody>
+          <a:bodyPr wrap="none">
+            <a:spAutoFit/>
+          </a:bodyPr>
+          <a:lstStyle/>
+          <a:p>
+            <a:pPr algn="r"/>
+            <a:r>
+              <a:rPr sz="1100" b="0">
+                <a:solidFill>
+                  <a:srgbClr val="5A5A5A"/>
+                </a:solidFill>
+                <a:latin typeface="Calibri"/>
+              </a:rPr>
+              <a:t>12/12</a:t>
+            </a:r>
+          </a:p>
+        </p:txBody>
+      </p:sp>
+      <p:sp>
+        <p:nvSpPr>
+          <p:cNvPr id="8" name="Rounded Rectangle 7"/>
+          <p:cNvSpPr/>
+          <p:nvPr/>
+        </p:nvSpPr>
+        <p:spPr>
+          <a:xfrm>
+            <a:off x="502920" y="1051560"/>
+            <a:ext cx="5349240" cy="5029200"/>
+          </a:xfrm>
+          <a:prstGeom prst="roundRect">
+            <a:avLst>
+              <a:gd name="adj" fmla="val 8000"/>
+            </a:avLst>
+          </a:prstGeom>
+          <a:solidFill>
+            <a:srgbClr val="FFFFFF"/>
+          </a:solidFill>
+          <a:ln w="12700">
+            <a:solidFill>
+              <a:srgbClr val="D8D2C8"/>
+            </a:solidFill>
+          </a:ln>
+        </p:spPr>
+        <p:style>
+          <a:lnRef idx="1">
+            <a:schemeClr val="accent1"/>
+          </a:lnRef>
+          <a:fillRef idx="3">
+            <a:schemeClr val="accent1"/>
+          </a:fillRef>
+          <a:effectRef idx="2">
+            <a:schemeClr val="accent1"/>
+          </a:effectRef>
+          <a:fontRef idx="minor">
+            <a:schemeClr val="lt1"/>
+          </a:fontRef>
+        </p:style>
+        <p:txBody>
+          <a:bodyPr rtlCol="0" anchor="ctr"/>
+          <a:lstStyle/>
+          <a:p>
+            <a:pPr algn="ctr"/>
+          </a:p>
+        </p:txBody>
+      </p:sp>
+      <p:sp>
+        <p:nvSpPr>
+          <p:cNvPr id="9" name="Rounded Rectangle 8"/>
+          <p:cNvSpPr/>
+          <p:nvPr/>
+        </p:nvSpPr>
+        <p:spPr>
+          <a:xfrm>
+            <a:off x="6126480" y="1051560"/>
+            <a:ext cx="5440680" cy="5029200"/>
+          </a:xfrm>
+          <a:prstGeom prst="roundRect">
+            <a:avLst>
+              <a:gd name="adj" fmla="val 8000"/>
+            </a:avLst>
+          </a:prstGeom>
+          <a:solidFill>
+            <a:srgbClr val="FFFFFF"/>
+          </a:solidFill>
+          <a:ln w="12700">
+            <a:solidFill>
+              <a:srgbClr val="D8D2C8"/>
+            </a:solidFill>
+          </a:ln>
+        </p:spPr>
+        <p:style>
+          <a:lnRef idx="1">
+            <a:schemeClr val="accent1"/>
+          </a:lnRef>
+          <a:fillRef idx="3">
+            <a:schemeClr val="accent1"/>
+          </a:fillRef>
+          <a:effectRef idx="2">
+            <a:schemeClr val="accent1"/>
+          </a:effectRef>
+          <a:fontRef idx="minor">
+            <a:schemeClr val="lt1"/>
+          </a:fontRef>
+        </p:style>
+        <p:txBody>
+          <a:bodyPr rtlCol="0" anchor="ctr"/>
+          <a:lstStyle/>
+          <a:p>
+            <a:pPr algn="ctr"/>
+          </a:p>
+        </p:txBody>
+      </p:sp>
+      <p:sp>
+        <p:nvSpPr>
+          <p:cNvPr id="10" name="TextBox 9"/>
+          <p:cNvSpPr txBox="1"/>
+          <p:nvPr/>
+        </p:nvSpPr>
+        <p:spPr>
+          <a:xfrm>
+            <a:off x="777240" y="1234440"/>
+            <a:ext cx="4846320" cy="4663440"/>
+          </a:xfrm>
+          <a:prstGeom prst="rect">
+            <a:avLst/>
+          </a:prstGeom>
+          <a:noFill/>
+        </p:spPr>
+        <p:txBody>
+          <a:bodyPr wrap="square">
+            <a:spAutoFit/>
+          </a:bodyPr>
+          <a:lstStyle/>
+          <a:p>
+            <a:pPr>
+              <a:spcAft>
+                <a:spcPts val="1200"/>
+              </a:spcAft>
+            </a:pPr>
+            <a:r>
+              <a:rPr sz="2000" b="1">
+                <a:solidFill>
+                  <a:srgbClr val="2F5D50"/>
+                </a:solidFill>
+                <a:latin typeface="Calibri"/>
+              </a:rPr>
+              <a:t>Собрал</a:t>
+            </a:r>
+          </a:p>
+          <a:p>
+            <a:pPr>
+              <a:spcAft>
+                <a:spcPts val="800"/>
+              </a:spcAft>
+            </a:pPr>
+            <a:r>
+              <a:rPr sz="1600" b="0">
+                <a:solidFill>
+                  <a:srgbClr val="1C1C1C"/>
+                </a:solidFill>
+                <a:latin typeface="Calibri"/>
+              </a:rPr>
+              <a:t>ДНК + StoryBrand + DoD</a:t>
+            </a:r>
+          </a:p>
+          <a:p>
+            <a:pPr>
+              <a:spcAft>
+                <a:spcPts val="800"/>
+              </a:spcAft>
+            </a:pPr>
+            <a:r>
+              <a:rPr sz="1600" b="0">
+                <a:solidFill>
+                  <a:srgbClr val="1C1C1C"/>
+                </a:solidFill>
+                <a:latin typeface="Calibri"/>
+              </a:rPr>
+              <a:t>полевая защита</a:t>
+            </a:r>
+          </a:p>
+          <a:p>
+            <a:pPr>
+              <a:spcAft>
+                <a:spcPts val="1600"/>
+              </a:spcAft>
+            </a:pPr>
+            <a:r>
+              <a:rPr sz="1600" b="0">
+                <a:solidFill>
+                  <a:srgbClr val="1C1C1C"/>
+                </a:solidFill>
+                <a:latin typeface="Calibri"/>
+              </a:rPr>
+              <a:t>China checklist (раздел L)</a:t>
+            </a:r>
+          </a:p>
+          <a:p>
+            <a:pPr>
+              <a:spcAft>
+                <a:spcPts val="0"/>
+              </a:spcAft>
+            </a:pPr>
+            <a:r>
+              <a:rPr sz="1400" b="0">
+                <a:solidFill>
+                  <a:srgbClr val="5A5A5A"/>
+                </a:solidFill>
+                <a:latin typeface="Calibri"/>
+              </a:rPr>
+              <a:t>Не прайс завода. Не КП.</a:t>
+            </a:r>
+          </a:p>
+        </p:txBody>
+      </p:sp>
+      <p:sp>
+        <p:nvSpPr>
+          <p:cNvPr id="11" name="TextBox 10"/>
+          <p:cNvSpPr txBox="1"/>
+          <p:nvPr/>
+        </p:nvSpPr>
+        <p:spPr>
+          <a:xfrm>
+            <a:off x="6400800" y="1234440"/>
+            <a:ext cx="4937760" cy="4663440"/>
+          </a:xfrm>
+          <a:prstGeom prst="rect">
+            <a:avLst/>
+          </a:prstGeom>
+          <a:noFill/>
+        </p:spPr>
+        <p:txBody>
+          <a:bodyPr wrap="square">
+            <a:spAutoFit/>
+          </a:bodyPr>
+          <a:lstStyle/>
+          <a:p>
+            <a:pPr>
+              <a:spcAft>
+                <a:spcPts val="1200"/>
+              </a:spcAft>
+            </a:pPr>
+            <a:r>
+              <a:rPr sz="2000" b="1">
+                <a:solidFill>
+                  <a:srgbClr val="2F5D50"/>
+                </a:solidFill>
+                <a:latin typeface="Calibri"/>
+              </a:rPr>
+              <a:t>Готов обсудить</a:t>
+            </a:r>
+          </a:p>
+          <a:p>
+            <a:pPr>
+              <a:spcAft>
+                <a:spcPts val="800"/>
+              </a:spcAft>
+            </a:pPr>
+            <a:r>
+              <a:rPr sz="1500" b="0">
+                <a:solidFill>
+                  <a:srgbClr val="1C1C1C"/>
+                </a:solidFill>
+                <a:latin typeface="Calibri"/>
+              </a:rPr>
+              <a:t>1) приоритет блокеров этапа 2 с технологом</a:t>
+            </a:r>
+          </a:p>
+          <a:p>
+            <a:pPr>
+              <a:spcAft>
+                <a:spcPts val="800"/>
+              </a:spcAft>
+            </a:pPr>
+            <a:r>
+              <a:rPr sz="1500" b="0">
+                <a:solidFill>
+                  <a:srgbClr val="1C1C1C"/>
+                </a:solidFill>
+                <a:latin typeface="Calibri"/>
+              </a:rPr>
+              <a:t>2) пилотный сегмент eco / wellness</a:t>
+            </a:r>
+          </a:p>
+          <a:p>
+            <a:pPr>
+              <a:spcAft>
+                <a:spcPts val="1600"/>
+              </a:spcAft>
+            </a:pPr>
+            <a:r>
+              <a:rPr sz="1500" b="0">
+                <a:solidFill>
+                  <a:srgbClr val="1C1C1C"/>
+                </a:solidFill>
+                <a:latin typeface="Calibri"/>
+              </a:rPr>
+              <a:t>3) продажи без каннибализации HL</a:t>
+            </a:r>
+          </a:p>
+          <a:p>
+            <a:pPr>
+              <a:spcAft>
+                <a:spcPts val="0"/>
+              </a:spcAft>
+            </a:pPr>
+            <a:r>
+              <a:rPr sz="1600" b="1">
+                <a:solidFill>
+                  <a:srgbClr val="1C1C1C"/>
+                </a:solidFill>
+                <a:latin typeface="Calibri"/>
+              </a:rPr>
+              <a:t>Спасибо. Вопросы.</a:t>
             </a:r>
           </a:p>
         </p:txBody>
@@ -4018,7 +5140,7 @@
             <a:avLst/>
           </a:prstGeom>
           <a:solidFill>
-            <a:srgbClr val="F7F9FB"/>
+            <a:srgbClr val="F7F5F2"/>
           </a:solidFill>
           <a:ln>
             <a:noFill/>
@@ -4061,7 +5183,7 @@
             <a:avLst/>
           </a:prstGeom>
           <a:solidFill>
-            <a:srgbClr val="1F6B5C"/>
+            <a:srgbClr val="2F5D50"/>
           </a:solidFill>
           <a:ln>
             <a:noFill/>
@@ -4097,8 +5219,8 @@
         </p:nvSpPr>
         <p:spPr>
           <a:xfrm>
-            <a:off x="502920" y="320040"/>
-            <a:ext cx="11155680" cy="640080"/>
+            <a:off x="502920" y="256032"/>
+            <a:ext cx="11155680" cy="502920"/>
           </a:xfrm>
           <a:prstGeom prst="rect">
             <a:avLst/>
@@ -4114,7 +5236,7 @@
             <a:r>
               <a:rPr sz="2800" b="1">
                 <a:solidFill>
-                  <a:srgbClr val="1A2A2E"/>
+                  <a:srgbClr val="2F5D50"/>
                 </a:solidFill>
                 <a:latin typeface="Calibri"/>
               </a:rPr>
@@ -4125,14 +5247,220 @@
       </p:sp>
       <p:sp>
         <p:nvSpPr>
-          <p:cNvPr id="5" name="TextBox 4"/>
+          <p:cNvPr id="5" name="Rectangle 4"/>
+          <p:cNvSpPr/>
+          <p:nvPr/>
+        </p:nvSpPr>
+        <p:spPr>
+          <a:xfrm>
+            <a:off x="502920" y="777240"/>
+            <a:ext cx="11155680" cy="22860"/>
+          </a:xfrm>
+          <a:prstGeom prst="rect">
+            <a:avLst/>
+          </a:prstGeom>
+          <a:solidFill>
+            <a:srgbClr val="D8D2C8"/>
+          </a:solidFill>
+          <a:ln>
+            <a:noFill/>
+          </a:ln>
+        </p:spPr>
+        <p:style>
+          <a:lnRef idx="1">
+            <a:schemeClr val="accent1"/>
+          </a:lnRef>
+          <a:fillRef idx="3">
+            <a:schemeClr val="accent1"/>
+          </a:fillRef>
+          <a:effectRef idx="2">
+            <a:schemeClr val="accent1"/>
+          </a:effectRef>
+          <a:fontRef idx="minor">
+            <a:schemeClr val="lt1"/>
+          </a:fontRef>
+        </p:style>
+        <p:txBody>
+          <a:bodyPr rtlCol="0" anchor="ctr"/>
+          <a:lstStyle/>
+          <a:p>
+            <a:pPr algn="ctr"/>
+          </a:p>
+        </p:txBody>
+      </p:sp>
+      <p:sp>
+        <p:nvSpPr>
+          <p:cNvPr id="6" name="TextBox 5"/>
           <p:cNvSpPr txBox="1"/>
           <p:nvPr/>
         </p:nvSpPr>
         <p:spPr>
           <a:xfrm>
-            <a:off x="502920" y="1097280"/>
-            <a:ext cx="11155680" cy="5303520"/>
+            <a:off x="502920" y="6446520"/>
+            <a:ext cx="9601200" cy="320040"/>
+          </a:xfrm>
+          <a:prstGeom prst="rect">
+            <a:avLst/>
+          </a:prstGeom>
+          <a:noFill/>
+        </p:spPr>
+        <p:txBody>
+          <a:bodyPr wrap="none">
+            <a:spAutoFit/>
+          </a:bodyPr>
+          <a:lstStyle/>
+          <a:p>
+            <a:r>
+              <a:rPr sz="1100" b="0">
+                <a:solidFill>
+                  <a:srgbClr val="5A5A5A"/>
+                </a:solidFill>
+                <a:latin typeface="Calibri"/>
+              </a:rPr>
+              <a:t>Travel+ Natural · пульт v1.14 · собес · не оферта</a:t>
+            </a:r>
+          </a:p>
+        </p:txBody>
+      </p:sp>
+      <p:sp>
+        <p:nvSpPr>
+          <p:cNvPr id="7" name="TextBox 6"/>
+          <p:cNvSpPr txBox="1"/>
+          <p:nvPr/>
+        </p:nvSpPr>
+        <p:spPr>
+          <a:xfrm>
+            <a:off x="10607040" y="6446520"/>
+            <a:ext cx="1188720" cy="320040"/>
+          </a:xfrm>
+          <a:prstGeom prst="rect">
+            <a:avLst/>
+          </a:prstGeom>
+          <a:noFill/>
+        </p:spPr>
+        <p:txBody>
+          <a:bodyPr wrap="none">
+            <a:spAutoFit/>
+          </a:bodyPr>
+          <a:lstStyle/>
+          <a:p>
+            <a:pPr algn="r"/>
+            <a:r>
+              <a:rPr sz="1100" b="0">
+                <a:solidFill>
+                  <a:srgbClr val="5A5A5A"/>
+                </a:solidFill>
+                <a:latin typeface="Calibri"/>
+              </a:rPr>
+              <a:t>2/12</a:t>
+            </a:r>
+          </a:p>
+        </p:txBody>
+      </p:sp>
+      <p:sp>
+        <p:nvSpPr>
+          <p:cNvPr id="8" name="Rounded Rectangle 7"/>
+          <p:cNvSpPr/>
+          <p:nvPr/>
+        </p:nvSpPr>
+        <p:spPr>
+          <a:xfrm>
+            <a:off x="502920" y="1051560"/>
+            <a:ext cx="5349240" cy="5029200"/>
+          </a:xfrm>
+          <a:prstGeom prst="roundRect">
+            <a:avLst>
+              <a:gd name="adj" fmla="val 8000"/>
+            </a:avLst>
+          </a:prstGeom>
+          <a:solidFill>
+            <a:srgbClr val="FFFFFF"/>
+          </a:solidFill>
+          <a:ln w="12700">
+            <a:solidFill>
+              <a:srgbClr val="D8D2C8"/>
+            </a:solidFill>
+          </a:ln>
+        </p:spPr>
+        <p:style>
+          <a:lnRef idx="1">
+            <a:schemeClr val="accent1"/>
+          </a:lnRef>
+          <a:fillRef idx="3">
+            <a:schemeClr val="accent1"/>
+          </a:fillRef>
+          <a:effectRef idx="2">
+            <a:schemeClr val="accent1"/>
+          </a:effectRef>
+          <a:fontRef idx="minor">
+            <a:schemeClr val="lt1"/>
+          </a:fontRef>
+        </p:style>
+        <p:txBody>
+          <a:bodyPr rtlCol="0" anchor="ctr"/>
+          <a:lstStyle/>
+          <a:p>
+            <a:pPr algn="ctr"/>
+          </a:p>
+        </p:txBody>
+      </p:sp>
+      <p:sp>
+        <p:nvSpPr>
+          <p:cNvPr id="9" name="Rounded Rectangle 8"/>
+          <p:cNvSpPr/>
+          <p:nvPr/>
+        </p:nvSpPr>
+        <p:spPr>
+          <a:xfrm>
+            <a:off x="6126480" y="1051560"/>
+            <a:ext cx="5440680" cy="5029200"/>
+          </a:xfrm>
+          <a:prstGeom prst="roundRect">
+            <a:avLst>
+              <a:gd name="adj" fmla="val 8000"/>
+            </a:avLst>
+          </a:prstGeom>
+          <a:solidFill>
+            <a:srgbClr val="FFFFFF"/>
+          </a:solidFill>
+          <a:ln w="12700">
+            <a:solidFill>
+              <a:srgbClr val="D8D2C8"/>
+            </a:solidFill>
+          </a:ln>
+        </p:spPr>
+        <p:style>
+          <a:lnRef idx="1">
+            <a:schemeClr val="accent1"/>
+          </a:lnRef>
+          <a:fillRef idx="3">
+            <a:schemeClr val="accent1"/>
+          </a:fillRef>
+          <a:effectRef idx="2">
+            <a:schemeClr val="accent1"/>
+          </a:effectRef>
+          <a:fontRef idx="minor">
+            <a:schemeClr val="lt1"/>
+          </a:fontRef>
+        </p:style>
+        <p:txBody>
+          <a:bodyPr rtlCol="0" anchor="ctr"/>
+          <a:lstStyle/>
+          <a:p>
+            <a:pPr algn="ctr"/>
+          </a:p>
+        </p:txBody>
+      </p:sp>
+      <p:sp>
+        <p:nvSpPr>
+          <p:cNvPr id="10" name="TextBox 9"/>
+          <p:cNvSpPr txBox="1"/>
+          <p:nvPr/>
+        </p:nvSpPr>
+        <p:spPr>
+          <a:xfrm>
+            <a:off x="777240" y="1280160"/>
+            <a:ext cx="4846320" cy="4572000"/>
           </a:xfrm>
           <a:prstGeom prst="rect">
             <a:avLst/>
@@ -4147,143 +5475,127 @@
           <a:p>
             <a:pPr>
               <a:spcAft>
-                <a:spcPts val="600"/>
-              </a:spcAft>
-            </a:pPr>
-            <a:r>
-              <a:rPr sz="1800" b="0">
-                <a:solidFill>
-                  <a:srgbClr val="2C3A3F"/>
-                </a:solidFill>
-                <a:latin typeface="Calibri"/>
-              </a:rPr>
-              <a:t>Travel+ — производство и one-stop для номера: косметика, тапочки, наборы</a:t>
-            </a:r>
-          </a:p>
-          <a:p>
-            <a:pPr>
-              <a:spcAft>
-                <a:spcPts val="600"/>
-              </a:spcAft>
-            </a:pPr>
-            <a:r>
-              <a:rPr sz="1800" b="0">
-                <a:solidFill>
-                  <a:srgbClr val="2C3A3F"/>
-                </a:solidFill>
-                <a:latin typeface="Calibri"/>
-              </a:rPr>
-              <a:t/>
-            </a:r>
-          </a:p>
-          <a:p>
-            <a:pPr>
-              <a:spcAft>
-                <a:spcPts val="600"/>
-              </a:spcAft>
-            </a:pPr>
-            <a:r>
-              <a:rPr sz="1800" b="0">
-                <a:solidFill>
-                  <a:srgbClr val="2C3A3F"/>
-                </a:solidFill>
-                <a:latin typeface="Calibri"/>
-              </a:rPr>
-              <a:t>· ассортимент и новинки</a:t>
-            </a:r>
-          </a:p>
-          <a:p>
-            <a:pPr>
-              <a:spcAft>
-                <a:spcPts val="600"/>
-              </a:spcAft>
-            </a:pPr>
-            <a:r>
-              <a:rPr sz="1800" b="0">
-                <a:solidFill>
-                  <a:srgbClr val="2C3A3F"/>
-                </a:solidFill>
-                <a:latin typeface="Calibri"/>
-              </a:rPr>
-              <a:t>· позиция линейки в доме брендов</a:t>
-            </a:r>
-          </a:p>
-          <a:p>
-            <a:pPr>
-              <a:spcAft>
-                <a:spcPts val="600"/>
-              </a:spcAft>
-            </a:pPr>
-            <a:r>
-              <a:rPr sz="1800" b="0">
-                <a:solidFill>
-                  <a:srgbClr val="2C3A3F"/>
-                </a:solidFill>
-                <a:latin typeface="Calibri"/>
-              </a:rPr>
-              <a:t>· продукт и доказательства до витрины</a:t>
-            </a:r>
-          </a:p>
-          <a:p>
-            <a:pPr>
-              <a:spcAft>
-                <a:spcPts val="600"/>
-              </a:spcAft>
-            </a:pPr>
-            <a:r>
-              <a:rPr sz="1800" b="0">
-                <a:solidFill>
-                  <a:srgbClr val="2C3A3F"/>
-                </a:solidFill>
-                <a:latin typeface="Calibri"/>
-              </a:rPr>
-              <a:t>· связка технолог → продажи → экономика</a:t>
-            </a:r>
-          </a:p>
-          <a:p>
-            <a:pPr>
-              <a:spcAft>
-                <a:spcPts val="600"/>
-              </a:spcAft>
-            </a:pPr>
-            <a:r>
-              <a:rPr sz="1800" b="0">
-                <a:solidFill>
-                  <a:srgbClr val="2C3A3F"/>
-                </a:solidFill>
-                <a:latin typeface="Calibri"/>
-              </a:rPr>
-              <a:t/>
-            </a:r>
-          </a:p>
-          <a:p>
-            <a:pPr>
-              <a:spcAft>
-                <a:spcPts val="600"/>
-              </a:spcAft>
-            </a:pPr>
-            <a:r>
-              <a:rPr sz="1800" b="0">
-                <a:solidFill>
-                  <a:srgbClr val="2C3A3F"/>
-                </a:solidFill>
-                <a:latin typeface="Calibri"/>
-              </a:rPr>
-              <a:t>Не IT-roadmap. Товар от идеи до полки номера и маржи.</a:t>
-            </a:r>
-          </a:p>
-        </p:txBody>
-      </p:sp>
-      <p:sp>
-        <p:nvSpPr>
-          <p:cNvPr id="6" name="TextBox 5"/>
+                <a:spcPts val="1200"/>
+              </a:spcAft>
+            </a:pPr>
+            <a:r>
+              <a:rPr sz="2000" b="1">
+                <a:solidFill>
+                  <a:srgbClr val="2F5D50"/>
+                </a:solidFill>
+                <a:latin typeface="Calibri"/>
+              </a:rPr>
+              <a:t>Travel+</a:t>
+            </a:r>
+          </a:p>
+          <a:p>
+            <a:pPr>
+              <a:spcAft>
+                <a:spcPts val="1000"/>
+              </a:spcAft>
+            </a:pPr>
+            <a:r>
+              <a:rPr sz="1600" b="0">
+                <a:solidFill>
+                  <a:srgbClr val="1C1C1C"/>
+                </a:solidFill>
+                <a:latin typeface="Calibri"/>
+              </a:rPr>
+              <a:t>Производство и one-stop на номер</a:t>
+            </a:r>
+          </a:p>
+          <a:p>
+            <a:pPr>
+              <a:spcAft>
+                <a:spcPts val="400"/>
+              </a:spcAft>
+            </a:pPr>
+            <a:r>
+              <a:rPr sz="1600" b="0">
+                <a:solidFill>
+                  <a:srgbClr val="1C1C1C"/>
+                </a:solidFill>
+                <a:latin typeface="Calibri"/>
+              </a:rPr>
+              <a:t>· косметика</a:t>
+            </a:r>
+          </a:p>
+          <a:p>
+            <a:pPr>
+              <a:spcAft>
+                <a:spcPts val="400"/>
+              </a:spcAft>
+            </a:pPr>
+            <a:r>
+              <a:rPr sz="1600" b="0">
+                <a:solidFill>
+                  <a:srgbClr val="1C1C1C"/>
+                </a:solidFill>
+                <a:latin typeface="Calibri"/>
+              </a:rPr>
+              <a:t>· тапочки</a:t>
+            </a:r>
+          </a:p>
+          <a:p>
+            <a:pPr>
+              <a:spcAft>
+                <a:spcPts val="1600"/>
+              </a:spcAft>
+            </a:pPr>
+            <a:r>
+              <a:rPr sz="1600" b="0">
+                <a:solidFill>
+                  <a:srgbClr val="1C1C1C"/>
+                </a:solidFill>
+                <a:latin typeface="Calibri"/>
+              </a:rPr>
+              <a:t>· наборы</a:t>
+            </a:r>
+          </a:p>
+          <a:p>
+            <a:pPr>
+              <a:spcAft>
+                <a:spcPts val="400"/>
+              </a:spcAft>
+            </a:pPr>
+            <a:r>
+              <a:rPr sz="1500" b="1">
+                <a:solidFill>
+                  <a:srgbClr val="1C1C1C"/>
+                </a:solidFill>
+                <a:latin typeface="Calibri"/>
+              </a:rPr>
+              <a:t>Не IT-roadmap.</a:t>
+            </a:r>
+          </a:p>
+          <a:p>
+            <a:pPr>
+              <a:spcAft>
+                <a:spcPts val="0"/>
+              </a:spcAft>
+            </a:pPr>
+            <a:r>
+              <a:rPr sz="1500" b="0">
+                <a:solidFill>
+                  <a:srgbClr val="1C1C1C"/>
+                </a:solidFill>
+                <a:latin typeface="Calibri"/>
+              </a:rPr>
+              <a:t>Товар от идеи до полки и маржи.</a:t>
+            </a:r>
+          </a:p>
+        </p:txBody>
+      </p:sp>
+      <p:sp>
+        <p:nvSpPr>
+          <p:cNvPr id="11" name="TextBox 10"/>
           <p:cNvSpPr txBox="1"/>
           <p:nvPr/>
         </p:nvSpPr>
         <p:spPr>
           <a:xfrm>
-            <a:off x="502920" y="6446520"/>
-            <a:ext cx="11155680" cy="320040"/>
+            <a:off x="6400800" y="1280160"/>
+            <a:ext cx="4937760" cy="4572000"/>
           </a:xfrm>
           <a:prstGeom prst="rect">
             <a:avLst/>
@@ -4291,19 +5603,88 @@
           <a:noFill/>
         </p:spPr>
         <p:txBody>
-          <a:bodyPr wrap="none">
+          <a:bodyPr wrap="square">
             <a:spAutoFit/>
           </a:bodyPr>
           <a:lstStyle/>
           <a:p>
-            <a:r>
-              <a:rPr sz="1100" b="0">
-                <a:solidFill>
-                  <a:srgbClr val="5A6A70"/>
-                </a:solidFill>
-                <a:latin typeface="Calibri"/>
-              </a:rPr>
-              <a:t>Travel+ Natural · пульт v1.10 · собес · не оферта</a:t>
+            <a:pPr>
+              <a:spcAft>
+                <a:spcPts val="1200"/>
+              </a:spcAft>
+            </a:pPr>
+            <a:r>
+              <a:rPr sz="2000" b="1">
+                <a:solidFill>
+                  <a:srgbClr val="2F5D50"/>
+                </a:solidFill>
+                <a:latin typeface="Calibri"/>
+              </a:rPr>
+              <a:t>Роль здесь</a:t>
+            </a:r>
+          </a:p>
+          <a:p>
+            <a:pPr>
+              <a:spcAft>
+                <a:spcPts val="600"/>
+              </a:spcAft>
+            </a:pPr>
+            <a:r>
+              <a:rPr sz="1600" b="0">
+                <a:solidFill>
+                  <a:srgbClr val="1C1C1C"/>
+                </a:solidFill>
+                <a:latin typeface="Calibri"/>
+              </a:rPr>
+              <a:t>· ассортимент и новинки</a:t>
+            </a:r>
+          </a:p>
+          <a:p>
+            <a:pPr>
+              <a:spcAft>
+                <a:spcPts val="600"/>
+              </a:spcAft>
+            </a:pPr>
+            <a:r>
+              <a:rPr sz="1600" b="0">
+                <a:solidFill>
+                  <a:srgbClr val="1C1C1C"/>
+                </a:solidFill>
+                <a:latin typeface="Calibri"/>
+              </a:rPr>
+              <a:t>· позиция линейки в доме брендов</a:t>
+            </a:r>
+          </a:p>
+          <a:p>
+            <a:pPr>
+              <a:spcAft>
+                <a:spcPts val="600"/>
+              </a:spcAft>
+            </a:pPr>
+            <a:r>
+              <a:rPr sz="1600" b="0">
+                <a:solidFill>
+                  <a:srgbClr val="1C1C1C"/>
+                </a:solidFill>
+                <a:latin typeface="Calibri"/>
+              </a:rPr>
+              <a:t>· продукт и доказательства до витрины</a:t>
+            </a:r>
+          </a:p>
+          <a:p>
+            <a:pPr>
+              <a:spcAft>
+                <a:spcPts val="0"/>
+              </a:spcAft>
+            </a:pPr>
+            <a:r>
+              <a:rPr sz="1600" b="0">
+                <a:solidFill>
+                  <a:srgbClr val="1C1C1C"/>
+                </a:solidFill>
+                <a:latin typeface="Calibri"/>
+              </a:rPr>
+              <a:t>· связка технолог → продажи → экономика → поставка</a:t>
             </a:r>
           </a:p>
         </p:txBody>
@@ -4341,7 +5722,7 @@
             <a:avLst/>
           </a:prstGeom>
           <a:solidFill>
-            <a:srgbClr val="F7F9FB"/>
+            <a:srgbClr val="F7F5F2"/>
           </a:solidFill>
           <a:ln>
             <a:noFill/>
@@ -4384,7 +5765,7 @@
             <a:avLst/>
           </a:prstGeom>
           <a:solidFill>
-            <a:srgbClr val="1F6B5C"/>
+            <a:srgbClr val="2F5D50"/>
           </a:solidFill>
           <a:ln>
             <a:noFill/>
@@ -4420,8 +5801,8 @@
         </p:nvSpPr>
         <p:spPr>
           <a:xfrm>
-            <a:off x="502920" y="320040"/>
-            <a:ext cx="11155680" cy="640080"/>
+            <a:off x="502920" y="256032"/>
+            <a:ext cx="11155680" cy="502920"/>
           </a:xfrm>
           <a:prstGeom prst="rect">
             <a:avLst/>
@@ -4437,7 +5818,7 @@
             <a:r>
               <a:rPr sz="2800" b="1">
                 <a:solidFill>
-                  <a:srgbClr val="1A2A2E"/>
+                  <a:srgbClr val="2F5D50"/>
                 </a:solidFill>
                 <a:latin typeface="Calibri"/>
               </a:rPr>
@@ -4448,14 +5829,220 @@
       </p:sp>
       <p:sp>
         <p:nvSpPr>
-          <p:cNvPr id="5" name="TextBox 4"/>
+          <p:cNvPr id="5" name="Rectangle 4"/>
+          <p:cNvSpPr/>
+          <p:nvPr/>
+        </p:nvSpPr>
+        <p:spPr>
+          <a:xfrm>
+            <a:off x="502920" y="777240"/>
+            <a:ext cx="11155680" cy="22860"/>
+          </a:xfrm>
+          <a:prstGeom prst="rect">
+            <a:avLst/>
+          </a:prstGeom>
+          <a:solidFill>
+            <a:srgbClr val="D8D2C8"/>
+          </a:solidFill>
+          <a:ln>
+            <a:noFill/>
+          </a:ln>
+        </p:spPr>
+        <p:style>
+          <a:lnRef idx="1">
+            <a:schemeClr val="accent1"/>
+          </a:lnRef>
+          <a:fillRef idx="3">
+            <a:schemeClr val="accent1"/>
+          </a:fillRef>
+          <a:effectRef idx="2">
+            <a:schemeClr val="accent1"/>
+          </a:effectRef>
+          <a:fontRef idx="minor">
+            <a:schemeClr val="lt1"/>
+          </a:fontRef>
+        </p:style>
+        <p:txBody>
+          <a:bodyPr rtlCol="0" anchor="ctr"/>
+          <a:lstStyle/>
+          <a:p>
+            <a:pPr algn="ctr"/>
+          </a:p>
+        </p:txBody>
+      </p:sp>
+      <p:sp>
+        <p:nvSpPr>
+          <p:cNvPr id="6" name="TextBox 5"/>
           <p:cNvSpPr txBox="1"/>
           <p:nvPr/>
         </p:nvSpPr>
         <p:spPr>
           <a:xfrm>
-            <a:off x="502920" y="1097280"/>
-            <a:ext cx="11155680" cy="5303520"/>
+            <a:off x="502920" y="6446520"/>
+            <a:ext cx="9601200" cy="320040"/>
+          </a:xfrm>
+          <a:prstGeom prst="rect">
+            <a:avLst/>
+          </a:prstGeom>
+          <a:noFill/>
+        </p:spPr>
+        <p:txBody>
+          <a:bodyPr wrap="none">
+            <a:spAutoFit/>
+          </a:bodyPr>
+          <a:lstStyle/>
+          <a:p>
+            <a:r>
+              <a:rPr sz="1100" b="0">
+                <a:solidFill>
+                  <a:srgbClr val="5A5A5A"/>
+                </a:solidFill>
+                <a:latin typeface="Calibri"/>
+              </a:rPr>
+              <a:t>Travel+ Natural · пульт v1.14 · собес · не оферта</a:t>
+            </a:r>
+          </a:p>
+        </p:txBody>
+      </p:sp>
+      <p:sp>
+        <p:nvSpPr>
+          <p:cNvPr id="7" name="TextBox 6"/>
+          <p:cNvSpPr txBox="1"/>
+          <p:nvPr/>
+        </p:nvSpPr>
+        <p:spPr>
+          <a:xfrm>
+            <a:off x="10607040" y="6446520"/>
+            <a:ext cx="1188720" cy="320040"/>
+          </a:xfrm>
+          <a:prstGeom prst="rect">
+            <a:avLst/>
+          </a:prstGeom>
+          <a:noFill/>
+        </p:spPr>
+        <p:txBody>
+          <a:bodyPr wrap="none">
+            <a:spAutoFit/>
+          </a:bodyPr>
+          <a:lstStyle/>
+          <a:p>
+            <a:pPr algn="r"/>
+            <a:r>
+              <a:rPr sz="1100" b="0">
+                <a:solidFill>
+                  <a:srgbClr val="5A5A5A"/>
+                </a:solidFill>
+                <a:latin typeface="Calibri"/>
+              </a:rPr>
+              <a:t>3/12</a:t>
+            </a:r>
+          </a:p>
+        </p:txBody>
+      </p:sp>
+      <p:sp>
+        <p:nvSpPr>
+          <p:cNvPr id="8" name="Rounded Rectangle 7"/>
+          <p:cNvSpPr/>
+          <p:nvPr/>
+        </p:nvSpPr>
+        <p:spPr>
+          <a:xfrm>
+            <a:off x="502920" y="1051560"/>
+            <a:ext cx="5349240" cy="5029200"/>
+          </a:xfrm>
+          <a:prstGeom prst="roundRect">
+            <a:avLst>
+              <a:gd name="adj" fmla="val 8000"/>
+            </a:avLst>
+          </a:prstGeom>
+          <a:solidFill>
+            <a:srgbClr val="FFFFFF"/>
+          </a:solidFill>
+          <a:ln w="12700">
+            <a:solidFill>
+              <a:srgbClr val="D8D2C8"/>
+            </a:solidFill>
+          </a:ln>
+        </p:spPr>
+        <p:style>
+          <a:lnRef idx="1">
+            <a:schemeClr val="accent1"/>
+          </a:lnRef>
+          <a:fillRef idx="3">
+            <a:schemeClr val="accent1"/>
+          </a:fillRef>
+          <a:effectRef idx="2">
+            <a:schemeClr val="accent1"/>
+          </a:effectRef>
+          <a:fontRef idx="minor">
+            <a:schemeClr val="lt1"/>
+          </a:fontRef>
+        </p:style>
+        <p:txBody>
+          <a:bodyPr rtlCol="0" anchor="ctr"/>
+          <a:lstStyle/>
+          <a:p>
+            <a:pPr algn="ctr"/>
+          </a:p>
+        </p:txBody>
+      </p:sp>
+      <p:sp>
+        <p:nvSpPr>
+          <p:cNvPr id="9" name="Rounded Rectangle 8"/>
+          <p:cNvSpPr/>
+          <p:nvPr/>
+        </p:nvSpPr>
+        <p:spPr>
+          <a:xfrm>
+            <a:off x="6126480" y="1051560"/>
+            <a:ext cx="5440680" cy="5029200"/>
+          </a:xfrm>
+          <a:prstGeom prst="roundRect">
+            <a:avLst>
+              <a:gd name="adj" fmla="val 8000"/>
+            </a:avLst>
+          </a:prstGeom>
+          <a:solidFill>
+            <a:srgbClr val="FFFFFF"/>
+          </a:solidFill>
+          <a:ln w="12700">
+            <a:solidFill>
+              <a:srgbClr val="D8D2C8"/>
+            </a:solidFill>
+          </a:ln>
+        </p:spPr>
+        <p:style>
+          <a:lnRef idx="1">
+            <a:schemeClr val="accent1"/>
+          </a:lnRef>
+          <a:fillRef idx="3">
+            <a:schemeClr val="accent1"/>
+          </a:fillRef>
+          <a:effectRef idx="2">
+            <a:schemeClr val="accent1"/>
+          </a:effectRef>
+          <a:fontRef idx="minor">
+            <a:schemeClr val="lt1"/>
+          </a:fontRef>
+        </p:style>
+        <p:txBody>
+          <a:bodyPr rtlCol="0" anchor="ctr"/>
+          <a:lstStyle/>
+          <a:p>
+            <a:pPr algn="ctr"/>
+          </a:p>
+        </p:txBody>
+      </p:sp>
+      <p:sp>
+        <p:nvSpPr>
+          <p:cNvPr id="10" name="TextBox 9"/>
+          <p:cNvSpPr txBox="1"/>
+          <p:nvPr/>
+        </p:nvSpPr>
+        <p:spPr>
+          <a:xfrm>
+            <a:off x="777240" y="1280160"/>
+            <a:ext cx="4846320" cy="4572000"/>
           </a:xfrm>
           <a:prstGeom prst="rect">
             <a:avLst/>
@@ -4470,45 +6057,61 @@
           <a:p>
             <a:pPr>
               <a:spcAft>
-                <a:spcPts val="600"/>
-              </a:spcAft>
-            </a:pPr>
-            <a:r>
-              <a:rPr sz="1800" b="0">
-                <a:solidFill>
-                  <a:srgbClr val="2C3A3F"/>
-                </a:solidFill>
-                <a:latin typeface="Calibri"/>
-              </a:rPr>
-              <a:t>Конкуренты: ЕТС Natural · MEZO · Natura Siberica (чужой premium в каталоге)</a:t>
-            </a:r>
-          </a:p>
-          <a:p>
-            <a:pPr>
-              <a:spcAft>
-                <a:spcPts val="600"/>
-              </a:spcAft>
-            </a:pPr>
-            <a:r>
-              <a:rPr sz="1800" b="0">
-                <a:solidFill>
-                  <a:srgbClr val="2C3A3F"/>
-                </a:solidFill>
-                <a:latin typeface="Calibri"/>
-              </a:rPr>
-              <a:t/>
-            </a:r>
-          </a:p>
-          <a:p>
-            <a:pPr>
-              <a:spcAft>
-                <a:spcPts val="600"/>
-              </a:spcAft>
-            </a:pPr>
-            <a:r>
-              <a:rPr sz="1800" b="0">
-                <a:solidFill>
-                  <a:srgbClr val="2C3A3F"/>
+                <a:spcPts val="1200"/>
+              </a:spcAft>
+            </a:pPr>
+            <a:r>
+              <a:rPr sz="2000" b="1">
+                <a:solidFill>
+                  <a:srgbClr val="2F5D50"/>
+                </a:solidFill>
+                <a:latin typeface="Calibri"/>
+              </a:rPr>
+              <a:t>Рынок</a:t>
+            </a:r>
+          </a:p>
+          <a:p>
+            <a:pPr>
+              <a:spcAft>
+                <a:spcPts val="400"/>
+              </a:spcAft>
+            </a:pPr>
+            <a:r>
+              <a:rPr sz="1500" b="0">
+                <a:solidFill>
+                  <a:srgbClr val="1C1C1C"/>
+                </a:solidFill>
+                <a:latin typeface="Calibri"/>
+              </a:rPr>
+              <a:t>Конкуренты: ЕТС Natural · MEZO · NS</a:t>
+            </a:r>
+          </a:p>
+          <a:p>
+            <a:pPr>
+              <a:spcAft>
+                <a:spcPts val="1200"/>
+              </a:spcAft>
+            </a:pPr>
+            <a:r>
+              <a:rPr sz="1400" b="0">
+                <a:solidFill>
+                  <a:srgbClr val="5A5A5A"/>
+                </a:solidFill>
+                <a:latin typeface="Calibri"/>
+              </a:rPr>
+              <a:t>(чужой premium в каталоге)</a:t>
+            </a:r>
+          </a:p>
+          <a:p>
+            <a:pPr>
+              <a:spcAft>
+                <a:spcPts val="1000"/>
+              </a:spcAft>
+            </a:pPr>
+            <a:r>
+              <a:rPr sz="1600" b="0">
+                <a:solidFill>
+                  <a:srgbClr val="1C1C1C"/>
                 </a:solidFill>
                 <a:latin typeface="Calibri"/>
               </a:rPr>
@@ -4518,79 +6121,31 @@
           <a:p>
             <a:pPr>
               <a:spcAft>
-                <a:spcPts val="600"/>
-              </a:spcAft>
-            </a:pPr>
-            <a:r>
-              <a:rPr sz="1800" b="0">
-                <a:solidFill>
-                  <a:srgbClr val="2C3A3F"/>
-                </a:solidFill>
-                <a:latin typeface="Calibri"/>
-              </a:rPr>
-              <a:t>Слабое место: своя понятная Natural с документами.</a:t>
-            </a:r>
-          </a:p>
-          <a:p>
-            <a:pPr>
-              <a:spcAft>
-                <a:spcPts val="600"/>
-              </a:spcAft>
-            </a:pPr>
-            <a:r>
-              <a:rPr sz="1800" b="0">
-                <a:solidFill>
-                  <a:srgbClr val="2C3A3F"/>
-                </a:solidFill>
-                <a:latin typeface="Calibri"/>
-              </a:rPr>
-              <a:t/>
-            </a:r>
-          </a:p>
-          <a:p>
-            <a:pPr>
-              <a:spcAft>
-                <a:spcPts val="600"/>
-              </a:spcAft>
-            </a:pPr>
-            <a:r>
-              <a:rPr sz="1800" b="0">
-                <a:solidFill>
-                  <a:srgbClr val="2C3A3F"/>
-                </a:solidFill>
-                <a:latin typeface="Calibri"/>
-              </a:rPr>
-              <a:t>Ориентир цен (витрина, не оферта):</a:t>
-            </a:r>
-          </a:p>
-          <a:p>
-            <a:pPr>
-              <a:spcAft>
-                <a:spcPts val="600"/>
-              </a:spcAft>
-            </a:pPr>
-            <a:r>
-              <a:rPr sz="1800" b="0">
-                <a:solidFill>
-                  <a:srgbClr val="2C3A3F"/>
-                </a:solidFill>
-                <a:latin typeface="Calibri"/>
-              </a:rPr>
-              <a:t>Hotel Line ~12–15 ₽ · ЕТС Natural ~18 ₽ / 25 мл · NS выше</a:t>
-            </a:r>
-          </a:p>
-        </p:txBody>
-      </p:sp>
-      <p:sp>
-        <p:nvSpPr>
-          <p:cNvPr id="6" name="TextBox 5"/>
+                <a:spcPts val="0"/>
+              </a:spcAft>
+            </a:pPr>
+            <a:r>
+              <a:rPr sz="1600" b="1">
+                <a:solidFill>
+                  <a:srgbClr val="1C1C1C"/>
+                </a:solidFill>
+                <a:latin typeface="Calibri"/>
+              </a:rPr>
+              <a:t>Слабое место: своя Natural с документами.</a:t>
+            </a:r>
+          </a:p>
+        </p:txBody>
+      </p:sp>
+      <p:sp>
+        <p:nvSpPr>
+          <p:cNvPr id="11" name="TextBox 10"/>
           <p:cNvSpPr txBox="1"/>
           <p:nvPr/>
         </p:nvSpPr>
         <p:spPr>
           <a:xfrm>
-            <a:off x="502920" y="6446520"/>
-            <a:ext cx="11155680" cy="320040"/>
+            <a:off x="6400800" y="1280160"/>
+            <a:ext cx="4937760" cy="4572000"/>
           </a:xfrm>
           <a:prstGeom prst="rect">
             <a:avLst/>
@@ -4598,19 +6153,104 @@
           <a:noFill/>
         </p:spPr>
         <p:txBody>
-          <a:bodyPr wrap="none">
+          <a:bodyPr wrap="square">
             <a:spAutoFit/>
           </a:bodyPr>
           <a:lstStyle/>
           <a:p>
-            <a:r>
-              <a:rPr sz="1100" b="0">
-                <a:solidFill>
-                  <a:srgbClr val="5A6A70"/>
-                </a:solidFill>
-                <a:latin typeface="Calibri"/>
-              </a:rPr>
-              <a:t>Travel+ Natural · пульт v1.10 · собес · не оферта</a:t>
+            <a:pPr>
+              <a:spcAft>
+                <a:spcPts val="1200"/>
+              </a:spcAft>
+            </a:pPr>
+            <a:r>
+              <a:rPr sz="2000" b="1">
+                <a:solidFill>
+                  <a:srgbClr val="2F5D50"/>
+                </a:solidFill>
+                <a:latin typeface="Calibri"/>
+              </a:rPr>
+              <a:t>Ориентир цен (не оферта)</a:t>
+            </a:r>
+          </a:p>
+          <a:p>
+            <a:pPr>
+              <a:spcAft>
+                <a:spcPts val="600"/>
+              </a:spcAft>
+            </a:pPr>
+            <a:r>
+              <a:rPr sz="1600" b="0">
+                <a:solidFill>
+                  <a:srgbClr val="1C1C1C"/>
+                </a:solidFill>
+                <a:latin typeface="Calibri"/>
+              </a:rPr>
+              <a:t>Hotel Line ~12-15 ₽ / 30 мл</a:t>
+            </a:r>
+          </a:p>
+          <a:p>
+            <a:pPr>
+              <a:spcAft>
+                <a:spcPts val="600"/>
+              </a:spcAft>
+            </a:pPr>
+            <a:r>
+              <a:rPr sz="1600" b="0">
+                <a:solidFill>
+                  <a:srgbClr val="1C1C1C"/>
+                </a:solidFill>
+                <a:latin typeface="Calibri"/>
+              </a:rPr>
+              <a:t>ЕТС Natural ~18 ₽ / 25 мл</a:t>
+            </a:r>
+          </a:p>
+          <a:p>
+            <a:pPr>
+              <a:spcAft>
+                <a:spcPts val="1400"/>
+              </a:spcAft>
+            </a:pPr>
+            <a:r>
+              <a:rPr sz="1600" b="0">
+                <a:solidFill>
+                  <a:srgbClr val="1C1C1C"/>
+                </a:solidFill>
+                <a:latin typeface="Calibri"/>
+              </a:rPr>
+              <a:t>Natura Siberica выше</a:t>
+            </a:r>
+          </a:p>
+          <a:p>
+            <a:pPr>
+              <a:spcAft>
+                <a:spcPts val="600"/>
+              </a:spcAft>
+            </a:pPr>
+            <a:r>
+              <a:rPr sz="1600" b="1">
+                <a:solidFill>
+                  <a:srgbClr val="1C1C1C"/>
+                </a:solidFill>
+                <a:latin typeface="Calibri"/>
+              </a:rPr>
+              <a:t>Ставка: между HL и NS</a:t>
+            </a:r>
+          </a:p>
+          <a:p>
+            <a:pPr>
+              <a:spcAft>
+                <a:spcPts val="0"/>
+              </a:spcAft>
+            </a:pPr>
+            <a:r>
+              <a:rPr sz="1500" b="0">
+                <a:solidFill>
+                  <a:srgbClr val="1C1C1C"/>
+                </a:solidFill>
+                <a:latin typeface="Calibri"/>
+              </a:rPr>
+              <a:t>натуральность · бумаги · one-stop</a:t>
             </a:r>
           </a:p>
         </p:txBody>
@@ -4648,7 +6288,7 @@
             <a:avLst/>
           </a:prstGeom>
           <a:solidFill>
-            <a:srgbClr val="F7F9FB"/>
+            <a:srgbClr val="F7F5F2"/>
           </a:solidFill>
           <a:ln>
             <a:noFill/>
@@ -4691,7 +6331,7 @@
             <a:avLst/>
           </a:prstGeom>
           <a:solidFill>
-            <a:srgbClr val="1F6B5C"/>
+            <a:srgbClr val="2F5D50"/>
           </a:solidFill>
           <a:ln>
             <a:noFill/>
@@ -4727,8 +6367,8 @@
         </p:nvSpPr>
         <p:spPr>
           <a:xfrm>
-            <a:off x="502920" y="320040"/>
-            <a:ext cx="11155680" cy="640080"/>
+            <a:off x="502920" y="256032"/>
+            <a:ext cx="11155680" cy="502920"/>
           </a:xfrm>
           <a:prstGeom prst="rect">
             <a:avLst/>
@@ -4744,7 +6384,7 @@
             <a:r>
               <a:rPr sz="2800" b="1">
                 <a:solidFill>
-                  <a:srgbClr val="1A2A2E"/>
+                  <a:srgbClr val="2F5D50"/>
                 </a:solidFill>
                 <a:latin typeface="Calibri"/>
               </a:rPr>
@@ -4755,14 +6395,220 @@
       </p:sp>
       <p:sp>
         <p:nvSpPr>
-          <p:cNvPr id="5" name="TextBox 4"/>
+          <p:cNvPr id="5" name="Rectangle 4"/>
+          <p:cNvSpPr/>
+          <p:nvPr/>
+        </p:nvSpPr>
+        <p:spPr>
+          <a:xfrm>
+            <a:off x="502920" y="777240"/>
+            <a:ext cx="11155680" cy="22860"/>
+          </a:xfrm>
+          <a:prstGeom prst="rect">
+            <a:avLst/>
+          </a:prstGeom>
+          <a:solidFill>
+            <a:srgbClr val="D8D2C8"/>
+          </a:solidFill>
+          <a:ln>
+            <a:noFill/>
+          </a:ln>
+        </p:spPr>
+        <p:style>
+          <a:lnRef idx="1">
+            <a:schemeClr val="accent1"/>
+          </a:lnRef>
+          <a:fillRef idx="3">
+            <a:schemeClr val="accent1"/>
+          </a:fillRef>
+          <a:effectRef idx="2">
+            <a:schemeClr val="accent1"/>
+          </a:effectRef>
+          <a:fontRef idx="minor">
+            <a:schemeClr val="lt1"/>
+          </a:fontRef>
+        </p:style>
+        <p:txBody>
+          <a:bodyPr rtlCol="0" anchor="ctr"/>
+          <a:lstStyle/>
+          <a:p>
+            <a:pPr algn="ctr"/>
+          </a:p>
+        </p:txBody>
+      </p:sp>
+      <p:sp>
+        <p:nvSpPr>
+          <p:cNvPr id="6" name="TextBox 5"/>
           <p:cNvSpPr txBox="1"/>
           <p:nvPr/>
         </p:nvSpPr>
         <p:spPr>
           <a:xfrm>
-            <a:off x="502920" y="1097280"/>
-            <a:ext cx="11155680" cy="5303520"/>
+            <a:off x="502920" y="6446520"/>
+            <a:ext cx="9601200" cy="320040"/>
+          </a:xfrm>
+          <a:prstGeom prst="rect">
+            <a:avLst/>
+          </a:prstGeom>
+          <a:noFill/>
+        </p:spPr>
+        <p:txBody>
+          <a:bodyPr wrap="none">
+            <a:spAutoFit/>
+          </a:bodyPr>
+          <a:lstStyle/>
+          <a:p>
+            <a:r>
+              <a:rPr sz="1100" b="0">
+                <a:solidFill>
+                  <a:srgbClr val="5A5A5A"/>
+                </a:solidFill>
+                <a:latin typeface="Calibri"/>
+              </a:rPr>
+              <a:t>Travel+ Natural · пульт v1.14 · собес · не оферта</a:t>
+            </a:r>
+          </a:p>
+        </p:txBody>
+      </p:sp>
+      <p:sp>
+        <p:nvSpPr>
+          <p:cNvPr id="7" name="TextBox 6"/>
+          <p:cNvSpPr txBox="1"/>
+          <p:nvPr/>
+        </p:nvSpPr>
+        <p:spPr>
+          <a:xfrm>
+            <a:off x="10607040" y="6446520"/>
+            <a:ext cx="1188720" cy="320040"/>
+          </a:xfrm>
+          <a:prstGeom prst="rect">
+            <a:avLst/>
+          </a:prstGeom>
+          <a:noFill/>
+        </p:spPr>
+        <p:txBody>
+          <a:bodyPr wrap="none">
+            <a:spAutoFit/>
+          </a:bodyPr>
+          <a:lstStyle/>
+          <a:p>
+            <a:pPr algn="r"/>
+            <a:r>
+              <a:rPr sz="1100" b="0">
+                <a:solidFill>
+                  <a:srgbClr val="5A5A5A"/>
+                </a:solidFill>
+                <a:latin typeface="Calibri"/>
+              </a:rPr>
+              <a:t>4/12</a:t>
+            </a:r>
+          </a:p>
+        </p:txBody>
+      </p:sp>
+      <p:sp>
+        <p:nvSpPr>
+          <p:cNvPr id="8" name="Rounded Rectangle 7"/>
+          <p:cNvSpPr/>
+          <p:nvPr/>
+        </p:nvSpPr>
+        <p:spPr>
+          <a:xfrm>
+            <a:off x="502920" y="1051560"/>
+            <a:ext cx="5349240" cy="5029200"/>
+          </a:xfrm>
+          <a:prstGeom prst="roundRect">
+            <a:avLst>
+              <a:gd name="adj" fmla="val 8000"/>
+            </a:avLst>
+          </a:prstGeom>
+          <a:solidFill>
+            <a:srgbClr val="FFFFFF"/>
+          </a:solidFill>
+          <a:ln w="12700">
+            <a:solidFill>
+              <a:srgbClr val="D8D2C8"/>
+            </a:solidFill>
+          </a:ln>
+        </p:spPr>
+        <p:style>
+          <a:lnRef idx="1">
+            <a:schemeClr val="accent1"/>
+          </a:lnRef>
+          <a:fillRef idx="3">
+            <a:schemeClr val="accent1"/>
+          </a:fillRef>
+          <a:effectRef idx="2">
+            <a:schemeClr val="accent1"/>
+          </a:effectRef>
+          <a:fontRef idx="minor">
+            <a:schemeClr val="lt1"/>
+          </a:fontRef>
+        </p:style>
+        <p:txBody>
+          <a:bodyPr rtlCol="0" anchor="ctr"/>
+          <a:lstStyle/>
+          <a:p>
+            <a:pPr algn="ctr"/>
+          </a:p>
+        </p:txBody>
+      </p:sp>
+      <p:sp>
+        <p:nvSpPr>
+          <p:cNvPr id="9" name="Rounded Rectangle 8"/>
+          <p:cNvSpPr/>
+          <p:nvPr/>
+        </p:nvSpPr>
+        <p:spPr>
+          <a:xfrm>
+            <a:off x="6126480" y="1051560"/>
+            <a:ext cx="5440680" cy="5029200"/>
+          </a:xfrm>
+          <a:prstGeom prst="roundRect">
+            <a:avLst>
+              <a:gd name="adj" fmla="val 8000"/>
+            </a:avLst>
+          </a:prstGeom>
+          <a:solidFill>
+            <a:srgbClr val="FFFFFF"/>
+          </a:solidFill>
+          <a:ln w="12700">
+            <a:solidFill>
+              <a:srgbClr val="D8D2C8"/>
+            </a:solidFill>
+          </a:ln>
+        </p:spPr>
+        <p:style>
+          <a:lnRef idx="1">
+            <a:schemeClr val="accent1"/>
+          </a:lnRef>
+          <a:fillRef idx="3">
+            <a:schemeClr val="accent1"/>
+          </a:fillRef>
+          <a:effectRef idx="2">
+            <a:schemeClr val="accent1"/>
+          </a:effectRef>
+          <a:fontRef idx="minor">
+            <a:schemeClr val="lt1"/>
+          </a:fontRef>
+        </p:style>
+        <p:txBody>
+          <a:bodyPr rtlCol="0" anchor="ctr"/>
+          <a:lstStyle/>
+          <a:p>
+            <a:pPr algn="ctr"/>
+          </a:p>
+        </p:txBody>
+      </p:sp>
+      <p:sp>
+        <p:nvSpPr>
+          <p:cNvPr id="10" name="TextBox 9"/>
+          <p:cNvSpPr txBox="1"/>
+          <p:nvPr/>
+        </p:nvSpPr>
+        <p:spPr>
+          <a:xfrm>
+            <a:off x="777240" y="1280160"/>
+            <a:ext cx="4846320" cy="4572000"/>
           </a:xfrm>
           <a:prstGeom prst="rect">
             <a:avLst/>
@@ -4777,13 +6623,29 @@
           <a:p>
             <a:pPr>
               <a:spcAft>
+                <a:spcPts val="1200"/>
+              </a:spcAft>
+            </a:pPr>
+            <a:r>
+              <a:rPr sz="2000" b="1">
+                <a:solidFill>
+                  <a:srgbClr val="2F5D50"/>
+                </a:solidFill>
+                <a:latin typeface="Calibri"/>
+              </a:rPr>
+              <a:t>Карта</a:t>
+            </a:r>
+          </a:p>
+          <a:p>
+            <a:pPr>
+              <a:spcAft>
                 <a:spcPts val="600"/>
               </a:spcAft>
             </a:pPr>
             <a:r>
-              <a:rPr sz="1800" b="0">
-                <a:solidFill>
-                  <a:srgbClr val="2C3A3F"/>
+              <a:rPr sz="1600" b="0">
+                <a:solidFill>
+                  <a:srgbClr val="1C1C1C"/>
                 </a:solidFill>
                 <a:latin typeface="Calibri"/>
               </a:rPr>
@@ -4797,9 +6659,9 @@
               </a:spcAft>
             </a:pPr>
             <a:r>
-              <a:rPr sz="1800" b="0">
-                <a:solidFill>
-                  <a:srgbClr val="2C3A3F"/>
+              <a:rPr sz="1600" b="0">
+                <a:solidFill>
+                  <a:srgbClr val="1C1C1C"/>
                 </a:solidFill>
                 <a:latin typeface="Calibri"/>
               </a:rPr>
@@ -4813,9 +6675,9 @@
               </a:spcAft>
             </a:pPr>
             <a:r>
-              <a:rPr sz="1800" b="0">
-                <a:solidFill>
-                  <a:srgbClr val="2C3A3F"/>
+              <a:rPr sz="1600" b="1">
+                <a:solidFill>
+                  <a:srgbClr val="1C1C1C"/>
                 </a:solidFill>
                 <a:latin typeface="Calibri"/>
               </a:rPr>
@@ -4829,9 +6691,9 @@
               </a:spcAft>
             </a:pPr>
             <a:r>
-              <a:rPr sz="1800" b="0">
-                <a:solidFill>
-                  <a:srgbClr val="2C3A3F"/>
+              <a:rPr sz="1600" b="0">
+                <a:solidFill>
+                  <a:srgbClr val="1C1C1C"/>
                 </a:solidFill>
                 <a:latin typeface="Calibri"/>
               </a:rPr>
@@ -4841,79 +6703,31 @@
           <a:p>
             <a:pPr>
               <a:spcAft>
-                <a:spcPts val="600"/>
-              </a:spcAft>
-            </a:pPr>
-            <a:r>
-              <a:rPr sz="1800" b="0">
-                <a:solidFill>
-                  <a:srgbClr val="2C3A3F"/>
+                <a:spcPts val="0"/>
+              </a:spcAft>
+            </a:pPr>
+            <a:r>
+              <a:rPr sz="1600" b="0">
+                <a:solidFill>
+                  <a:srgbClr val="1C1C1C"/>
                 </a:solidFill>
                 <a:latin typeface="Calibri"/>
               </a:rPr>
               <a:t>СТМ → отдельный проект</a:t>
             </a:r>
           </a:p>
-          <a:p>
-            <a:pPr>
-              <a:spcAft>
-                <a:spcPts val="600"/>
-              </a:spcAft>
-            </a:pPr>
-            <a:r>
-              <a:rPr sz="1800" b="0">
-                <a:solidFill>
-                  <a:srgbClr val="2C3A3F"/>
-                </a:solidFill>
-                <a:latin typeface="Calibri"/>
-              </a:rPr>
-              <a:t/>
-            </a:r>
-          </a:p>
-          <a:p>
-            <a:pPr>
-              <a:spcAft>
-                <a:spcPts val="600"/>
-              </a:spcAft>
-            </a:pPr>
-            <a:r>
-              <a:rPr sz="1800" b="0">
-                <a:solidFill>
-                  <a:srgbClr val="2C3A3F"/>
-                </a:solidFill>
-                <a:latin typeface="Calibri"/>
-              </a:rPr>
-              <a:t>Мостик: дизайн и аромат — Fleur; запрос на натуральность и бумаги — Natural.</a:t>
-            </a:r>
-          </a:p>
-          <a:p>
-            <a:pPr>
-              <a:spcAft>
-                <a:spcPts val="600"/>
-              </a:spcAft>
-            </a:pPr>
-            <a:r>
-              <a:rPr sz="1800" b="0">
-                <a:solidFill>
-                  <a:srgbClr val="2C3A3F"/>
-                </a:solidFill>
-                <a:latin typeface="Calibri"/>
-              </a:rPr>
-              <a:t>Не конкурируют. Могут жить на разных этажах.</a:t>
-            </a:r>
-          </a:p>
-        </p:txBody>
-      </p:sp>
-      <p:sp>
-        <p:nvSpPr>
-          <p:cNvPr id="6" name="TextBox 5"/>
+        </p:txBody>
+      </p:sp>
+      <p:sp>
+        <p:nvSpPr>
+          <p:cNvPr id="11" name="TextBox 10"/>
           <p:cNvSpPr txBox="1"/>
           <p:nvPr/>
         </p:nvSpPr>
         <p:spPr>
           <a:xfrm>
-            <a:off x="502920" y="6446520"/>
-            <a:ext cx="11155680" cy="320040"/>
+            <a:off x="6400800" y="1280160"/>
+            <a:ext cx="4937760" cy="4572000"/>
           </a:xfrm>
           <a:prstGeom prst="rect">
             <a:avLst/>
@@ -4921,19 +6735,88 @@
           <a:noFill/>
         </p:spPr>
         <p:txBody>
-          <a:bodyPr wrap="none">
+          <a:bodyPr wrap="square">
             <a:spAutoFit/>
           </a:bodyPr>
           <a:lstStyle/>
           <a:p>
-            <a:r>
-              <a:rPr sz="1100" b="0">
-                <a:solidFill>
-                  <a:srgbClr val="5A6A70"/>
-                </a:solidFill>
-                <a:latin typeface="Calibri"/>
-              </a:rPr>
-              <a:t>Travel+ Natural · пульт v1.10 · собес · не оферта</a:t>
+            <a:pPr>
+              <a:spcAft>
+                <a:spcPts val="1200"/>
+              </a:spcAft>
+            </a:pPr>
+            <a:r>
+              <a:rPr sz="2000" b="1">
+                <a:solidFill>
+                  <a:srgbClr val="2F5D50"/>
+                </a:solidFill>
+                <a:latin typeface="Calibri"/>
+              </a:rPr>
+              <a:t>Мостик для продаж</a:t>
+            </a:r>
+          </a:p>
+          <a:p>
+            <a:pPr>
+              <a:spcAft>
+                <a:spcPts val="800"/>
+              </a:spcAft>
+            </a:pPr>
+            <a:r>
+              <a:rPr sz="1600" b="0">
+                <a:solidFill>
+                  <a:srgbClr val="1C1C1C"/>
+                </a:solidFill>
+                <a:latin typeface="Calibri"/>
+              </a:rPr>
+              <a:t>Дизайн и аромат - Fleur.</a:t>
+            </a:r>
+          </a:p>
+          <a:p>
+            <a:pPr>
+              <a:spcAft>
+                <a:spcPts val="800"/>
+              </a:spcAft>
+            </a:pPr>
+            <a:r>
+              <a:rPr sz="1600" b="0">
+                <a:solidFill>
+                  <a:srgbClr val="1C1C1C"/>
+                </a:solidFill>
+                <a:latin typeface="Calibri"/>
+              </a:rPr>
+              <a:t>Натуральность и бумаги - Natural.</a:t>
+            </a:r>
+          </a:p>
+          <a:p>
+            <a:pPr>
+              <a:spcAft>
+                <a:spcPts val="800"/>
+              </a:spcAft>
+            </a:pPr>
+            <a:r>
+              <a:rPr sz="1600" b="1">
+                <a:solidFill>
+                  <a:srgbClr val="1C1C1C"/>
+                </a:solidFill>
+                <a:latin typeface="Calibri"/>
+              </a:rPr>
+              <a:t>Не конкурируют.</a:t>
+            </a:r>
+          </a:p>
+          <a:p>
+            <a:pPr>
+              <a:spcAft>
+                <a:spcPts val="0"/>
+              </a:spcAft>
+            </a:pPr>
+            <a:r>
+              <a:rPr sz="1500" b="0">
+                <a:solidFill>
+                  <a:srgbClr val="1C1C1C"/>
+                </a:solidFill>
+                <a:latin typeface="Calibri"/>
+              </a:rPr>
+              <a:t>Могут жить на разных этажах одного объекта.</a:t>
             </a:r>
           </a:p>
         </p:txBody>
@@ -4971,7 +6854,7 @@
             <a:avLst/>
           </a:prstGeom>
           <a:solidFill>
-            <a:srgbClr val="F7F9FB"/>
+            <a:srgbClr val="F7F5F2"/>
           </a:solidFill>
           <a:ln>
             <a:noFill/>
@@ -5014,7 +6897,7 @@
             <a:avLst/>
           </a:prstGeom>
           <a:solidFill>
-            <a:srgbClr val="1F6B5C"/>
+            <a:srgbClr val="2F5D50"/>
           </a:solidFill>
           <a:ln>
             <a:noFill/>
@@ -5050,8 +6933,8 @@
         </p:nvSpPr>
         <p:spPr>
           <a:xfrm>
-            <a:off x="502920" y="320040"/>
-            <a:ext cx="11155680" cy="640080"/>
+            <a:off x="502920" y="256032"/>
+            <a:ext cx="11155680" cy="502920"/>
           </a:xfrm>
           <a:prstGeom prst="rect">
             <a:avLst/>
@@ -5067,7 +6950,7 @@
             <a:r>
               <a:rPr sz="2800" b="1">
                 <a:solidFill>
-                  <a:srgbClr val="1A2A2E"/>
+                  <a:srgbClr val="2F5D50"/>
                 </a:solidFill>
                 <a:latin typeface="Calibri"/>
               </a:rPr>
@@ -5078,14 +6961,220 @@
       </p:sp>
       <p:sp>
         <p:nvSpPr>
-          <p:cNvPr id="5" name="TextBox 4"/>
+          <p:cNvPr id="5" name="Rectangle 4"/>
+          <p:cNvSpPr/>
+          <p:nvPr/>
+        </p:nvSpPr>
+        <p:spPr>
+          <a:xfrm>
+            <a:off x="502920" y="777240"/>
+            <a:ext cx="11155680" cy="22860"/>
+          </a:xfrm>
+          <a:prstGeom prst="rect">
+            <a:avLst/>
+          </a:prstGeom>
+          <a:solidFill>
+            <a:srgbClr val="D8D2C8"/>
+          </a:solidFill>
+          <a:ln>
+            <a:noFill/>
+          </a:ln>
+        </p:spPr>
+        <p:style>
+          <a:lnRef idx="1">
+            <a:schemeClr val="accent1"/>
+          </a:lnRef>
+          <a:fillRef idx="3">
+            <a:schemeClr val="accent1"/>
+          </a:fillRef>
+          <a:effectRef idx="2">
+            <a:schemeClr val="accent1"/>
+          </a:effectRef>
+          <a:fontRef idx="minor">
+            <a:schemeClr val="lt1"/>
+          </a:fontRef>
+        </p:style>
+        <p:txBody>
+          <a:bodyPr rtlCol="0" anchor="ctr"/>
+          <a:lstStyle/>
+          <a:p>
+            <a:pPr algn="ctr"/>
+          </a:p>
+        </p:txBody>
+      </p:sp>
+      <p:sp>
+        <p:nvSpPr>
+          <p:cNvPr id="6" name="TextBox 5"/>
           <p:cNvSpPr txBox="1"/>
           <p:nvPr/>
         </p:nvSpPr>
         <p:spPr>
           <a:xfrm>
-            <a:off x="502920" y="1097280"/>
-            <a:ext cx="11155680" cy="5303520"/>
+            <a:off x="502920" y="6446520"/>
+            <a:ext cx="9601200" cy="320040"/>
+          </a:xfrm>
+          <a:prstGeom prst="rect">
+            <a:avLst/>
+          </a:prstGeom>
+          <a:noFill/>
+        </p:spPr>
+        <p:txBody>
+          <a:bodyPr wrap="none">
+            <a:spAutoFit/>
+          </a:bodyPr>
+          <a:lstStyle/>
+          <a:p>
+            <a:r>
+              <a:rPr sz="1100" b="0">
+                <a:solidFill>
+                  <a:srgbClr val="5A5A5A"/>
+                </a:solidFill>
+                <a:latin typeface="Calibri"/>
+              </a:rPr>
+              <a:t>Travel+ Natural · пульт v1.14 · собес · не оферта</a:t>
+            </a:r>
+          </a:p>
+        </p:txBody>
+      </p:sp>
+      <p:sp>
+        <p:nvSpPr>
+          <p:cNvPr id="7" name="TextBox 6"/>
+          <p:cNvSpPr txBox="1"/>
+          <p:nvPr/>
+        </p:nvSpPr>
+        <p:spPr>
+          <a:xfrm>
+            <a:off x="10607040" y="6446520"/>
+            <a:ext cx="1188720" cy="320040"/>
+          </a:xfrm>
+          <a:prstGeom prst="rect">
+            <a:avLst/>
+          </a:prstGeom>
+          <a:noFill/>
+        </p:spPr>
+        <p:txBody>
+          <a:bodyPr wrap="none">
+            <a:spAutoFit/>
+          </a:bodyPr>
+          <a:lstStyle/>
+          <a:p>
+            <a:pPr algn="r"/>
+            <a:r>
+              <a:rPr sz="1100" b="0">
+                <a:solidFill>
+                  <a:srgbClr val="5A5A5A"/>
+                </a:solidFill>
+                <a:latin typeface="Calibri"/>
+              </a:rPr>
+              <a:t>5/12</a:t>
+            </a:r>
+          </a:p>
+        </p:txBody>
+      </p:sp>
+      <p:sp>
+        <p:nvSpPr>
+          <p:cNvPr id="8" name="Rounded Rectangle 7"/>
+          <p:cNvSpPr/>
+          <p:nvPr/>
+        </p:nvSpPr>
+        <p:spPr>
+          <a:xfrm>
+            <a:off x="502920" y="1051560"/>
+            <a:ext cx="5349240" cy="5029200"/>
+          </a:xfrm>
+          <a:prstGeom prst="roundRect">
+            <a:avLst>
+              <a:gd name="adj" fmla="val 8000"/>
+            </a:avLst>
+          </a:prstGeom>
+          <a:solidFill>
+            <a:srgbClr val="FFFFFF"/>
+          </a:solidFill>
+          <a:ln w="12700">
+            <a:solidFill>
+              <a:srgbClr val="D8D2C8"/>
+            </a:solidFill>
+          </a:ln>
+        </p:spPr>
+        <p:style>
+          <a:lnRef idx="1">
+            <a:schemeClr val="accent1"/>
+          </a:lnRef>
+          <a:fillRef idx="3">
+            <a:schemeClr val="accent1"/>
+          </a:fillRef>
+          <a:effectRef idx="2">
+            <a:schemeClr val="accent1"/>
+          </a:effectRef>
+          <a:fontRef idx="minor">
+            <a:schemeClr val="lt1"/>
+          </a:fontRef>
+        </p:style>
+        <p:txBody>
+          <a:bodyPr rtlCol="0" anchor="ctr"/>
+          <a:lstStyle/>
+          <a:p>
+            <a:pPr algn="ctr"/>
+          </a:p>
+        </p:txBody>
+      </p:sp>
+      <p:sp>
+        <p:nvSpPr>
+          <p:cNvPr id="9" name="Rounded Rectangle 8"/>
+          <p:cNvSpPr/>
+          <p:nvPr/>
+        </p:nvSpPr>
+        <p:spPr>
+          <a:xfrm>
+            <a:off x="6126480" y="1051560"/>
+            <a:ext cx="5440680" cy="5029200"/>
+          </a:xfrm>
+          <a:prstGeom prst="roundRect">
+            <a:avLst>
+              <a:gd name="adj" fmla="val 8000"/>
+            </a:avLst>
+          </a:prstGeom>
+          <a:solidFill>
+            <a:srgbClr val="FFFFFF"/>
+          </a:solidFill>
+          <a:ln w="12700">
+            <a:solidFill>
+              <a:srgbClr val="D8D2C8"/>
+            </a:solidFill>
+          </a:ln>
+        </p:spPr>
+        <p:style>
+          <a:lnRef idx="1">
+            <a:schemeClr val="accent1"/>
+          </a:lnRef>
+          <a:fillRef idx="3">
+            <a:schemeClr val="accent1"/>
+          </a:fillRef>
+          <a:effectRef idx="2">
+            <a:schemeClr val="accent1"/>
+          </a:effectRef>
+          <a:fontRef idx="minor">
+            <a:schemeClr val="lt1"/>
+          </a:fontRef>
+        </p:style>
+        <p:txBody>
+          <a:bodyPr rtlCol="0" anchor="ctr"/>
+          <a:lstStyle/>
+          <a:p>
+            <a:pPr algn="ctr"/>
+          </a:p>
+        </p:txBody>
+      </p:sp>
+      <p:sp>
+        <p:nvSpPr>
+          <p:cNvPr id="10" name="TextBox 9"/>
+          <p:cNvSpPr txBox="1"/>
+          <p:nvPr/>
+        </p:nvSpPr>
+        <p:spPr>
+          <a:xfrm>
+            <a:off x="777240" y="1234440"/>
+            <a:ext cx="4846320" cy="4663440"/>
           </a:xfrm>
           <a:prstGeom prst="rect">
             <a:avLst/>
@@ -5100,143 +7189,159 @@
           <a:p>
             <a:pPr>
               <a:spcAft>
+                <a:spcPts val="1000"/>
+              </a:spcAft>
+            </a:pPr>
+            <a:r>
+              <a:rPr sz="2000" b="1">
+                <a:solidFill>
+                  <a:srgbClr val="2F5D50"/>
+                </a:solidFill>
+                <a:latin typeface="Calibri"/>
+              </a:rPr>
+              <a:t>Обещание</a:t>
+            </a:r>
+          </a:p>
+          <a:p>
+            <a:pPr>
+              <a:spcAft>
+                <a:spcPts val="400"/>
+              </a:spcAft>
+            </a:pPr>
+            <a:r>
+              <a:rPr sz="1600" b="1">
+                <a:solidFill>
+                  <a:srgbClr val="1C1C1C"/>
+                </a:solidFill>
+                <a:latin typeface="Calibri"/>
+              </a:rPr>
+              <a:t>Мягкий уход с понятной натуральностью</a:t>
+            </a:r>
+          </a:p>
+          <a:p>
+            <a:pPr>
+              <a:spcAft>
+                <a:spcPts val="1200"/>
+              </a:spcAft>
+            </a:pPr>
+            <a:r>
+              <a:rPr sz="1500" b="0">
+                <a:solidFill>
+                  <a:srgbClr val="1C1C1C"/>
+                </a:solidFill>
+                <a:latin typeface="Calibri"/>
+              </a:rPr>
+              <a:t>для отеля, которому важны и гость, и документы.</a:t>
+            </a:r>
+          </a:p>
+          <a:p>
+            <a:pPr>
+              <a:spcAft>
                 <a:spcPts val="600"/>
               </a:spcAft>
             </a:pPr>
             <a:r>
-              <a:rPr sz="1800" b="0">
-                <a:solidFill>
-                  <a:srgbClr val="2C3A3F"/>
-                </a:solidFill>
-                <a:latin typeface="Calibri"/>
-              </a:rPr>
-              <a:t>Обещание: мягкий уход с понятной натуральностью —</a:t>
-            </a:r>
-          </a:p>
-          <a:p>
-            <a:pPr>
-              <a:spcAft>
-                <a:spcPts val="600"/>
-              </a:spcAft>
-            </a:pPr>
-            <a:r>
-              <a:rPr sz="1800" b="0">
-                <a:solidFill>
-                  <a:srgbClr val="2C3A3F"/>
-                </a:solidFill>
-                <a:latin typeface="Calibri"/>
-              </a:rPr>
-              <a:t>для отеля, которому важны и гость, и документы.</a:t>
-            </a:r>
-          </a:p>
-          <a:p>
-            <a:pPr>
-              <a:spcAft>
-                <a:spcPts val="600"/>
-              </a:spcAft>
-            </a:pPr>
-            <a:r>
-              <a:rPr sz="1800" b="0">
-                <a:solidFill>
-                  <a:srgbClr val="2C3A3F"/>
-                </a:solidFill>
-                <a:latin typeface="Calibri"/>
-              </a:rPr>
-              <a:t/>
-            </a:r>
-          </a:p>
-          <a:p>
-            <a:pPr>
-              <a:spcAft>
-                <a:spcPts val="600"/>
-              </a:spcAft>
-            </a:pPr>
-            <a:r>
-              <a:rPr sz="1800" b="0">
-                <a:solidFill>
-                  <a:srgbClr val="2C3A3F"/>
-                </a:solidFill>
-                <a:latin typeface="Calibri"/>
-              </a:rPr>
-              <a:t>Герой: закупщик eco / wellness</a:t>
-            </a:r>
-          </a:p>
-          <a:p>
-            <a:pPr>
-              <a:spcAft>
-                <a:spcPts val="600"/>
-              </a:spcAft>
-            </a:pPr>
-            <a:r>
-              <a:rPr sz="1800" b="0">
-                <a:solidFill>
-                  <a:srgbClr val="2C3A3F"/>
-                </a:solidFill>
-                <a:latin typeface="Calibri"/>
-              </a:rPr>
-              <a:t>Проводник: Travel+ Natural</a:t>
-            </a:r>
-          </a:p>
-          <a:p>
-            <a:pPr>
-              <a:spcAft>
-                <a:spcPts val="600"/>
-              </a:spcAft>
-            </a:pPr>
-            <a:r>
-              <a:rPr sz="1800" b="0">
-                <a:solidFill>
-                  <a:srgbClr val="2C3A3F"/>
-                </a:solidFill>
-                <a:latin typeface="Calibri"/>
-              </a:rPr>
-              <a:t>План: сегмент → образец + документы → пилот</a:t>
-            </a:r>
-          </a:p>
-          <a:p>
-            <a:pPr>
-              <a:spcAft>
-                <a:spcPts val="600"/>
-              </a:spcAft>
-            </a:pPr>
-            <a:r>
-              <a:rPr sz="1800" b="0">
-                <a:solidFill>
-                  <a:srgbClr val="2C3A3F"/>
-                </a:solidFill>
-                <a:latin typeface="Calibri"/>
-              </a:rPr>
-              <a:t/>
-            </a:r>
-          </a:p>
-          <a:p>
-            <a:pPr>
-              <a:spcAft>
-                <a:spcPts val="600"/>
-              </a:spcAft>
-            </a:pPr>
-            <a:r>
-              <a:rPr sz="1800" b="0">
-                <a:solidFill>
-                  <a:srgbClr val="2C3A3F"/>
-                </a:solidFill>
-                <a:latin typeface="Calibri"/>
-              </a:rPr>
-              <a:t>Доказательства: состав · пакет Travel+ · ощущение в номере · one-stop · «простыми словами»</a:t>
-            </a:r>
-          </a:p>
-        </p:txBody>
-      </p:sp>
-      <p:sp>
-        <p:nvSpPr>
-          <p:cNvPr id="6" name="TextBox 5"/>
+              <a:rPr sz="1400" b="1">
+                <a:solidFill>
+                  <a:srgbClr val="5A5A5A"/>
+                </a:solidFill>
+                <a:latin typeface="Calibri"/>
+              </a:rPr>
+              <a:t>Доказательства:</a:t>
+            </a:r>
+          </a:p>
+          <a:p>
+            <a:pPr>
+              <a:spcAft>
+                <a:spcPts val="300"/>
+              </a:spcAft>
+            </a:pPr>
+            <a:r>
+              <a:rPr sz="1500" b="0">
+                <a:solidFill>
+                  <a:srgbClr val="1C1C1C"/>
+                </a:solidFill>
+                <a:latin typeface="Calibri"/>
+              </a:rPr>
+              <a:t>· состав в границах</a:t>
+            </a:r>
+          </a:p>
+          <a:p>
+            <a:pPr>
+              <a:spcAft>
+                <a:spcPts val="300"/>
+              </a:spcAft>
+            </a:pPr>
+            <a:r>
+              <a:rPr sz="1500" b="0">
+                <a:solidFill>
+                  <a:srgbClr val="1C1C1C"/>
+                </a:solidFill>
+                <a:latin typeface="Calibri"/>
+              </a:rPr>
+              <a:t>· пакет Travel+</a:t>
+            </a:r>
+          </a:p>
+          <a:p>
+            <a:pPr>
+              <a:spcAft>
+                <a:spcPts val="300"/>
+              </a:spcAft>
+            </a:pPr>
+            <a:r>
+              <a:rPr sz="1500" b="0">
+                <a:solidFill>
+                  <a:srgbClr val="1C1C1C"/>
+                </a:solidFill>
+                <a:latin typeface="Calibri"/>
+              </a:rPr>
+              <a:t>· ощущение в номере</a:t>
+            </a:r>
+          </a:p>
+          <a:p>
+            <a:pPr>
+              <a:spcAft>
+                <a:spcPts val="300"/>
+              </a:spcAft>
+            </a:pPr>
+            <a:r>
+              <a:rPr sz="1500" b="0">
+                <a:solidFill>
+                  <a:srgbClr val="1C1C1C"/>
+                </a:solidFill>
+                <a:latin typeface="Calibri"/>
+              </a:rPr>
+              <a:t>· one-stop</a:t>
+            </a:r>
+          </a:p>
+          <a:p>
+            <a:pPr>
+              <a:spcAft>
+                <a:spcPts val="0"/>
+              </a:spcAft>
+            </a:pPr>
+            <a:r>
+              <a:rPr sz="1500" b="0">
+                <a:solidFill>
+                  <a:srgbClr val="1C1C1C"/>
+                </a:solidFill>
+                <a:latin typeface="Calibri"/>
+              </a:rPr>
+              <a:t>· «простыми словами» на этикетке</a:t>
+            </a:r>
+          </a:p>
+        </p:txBody>
+      </p:sp>
+      <p:sp>
+        <p:nvSpPr>
+          <p:cNvPr id="11" name="TextBox 10"/>
           <p:cNvSpPr txBox="1"/>
           <p:nvPr/>
         </p:nvSpPr>
         <p:spPr>
           <a:xfrm>
-            <a:off x="502920" y="6446520"/>
-            <a:ext cx="11155680" cy="320040"/>
+            <a:off x="6400800" y="1234440"/>
+            <a:ext cx="4937760" cy="4663440"/>
           </a:xfrm>
           <a:prstGeom prst="rect">
             <a:avLst/>
@@ -5244,19 +7349,104 @@
           <a:noFill/>
         </p:spPr>
         <p:txBody>
-          <a:bodyPr wrap="none">
+          <a:bodyPr wrap="square">
             <a:spAutoFit/>
           </a:bodyPr>
           <a:lstStyle/>
           <a:p>
-            <a:r>
-              <a:rPr sz="1100" b="0">
-                <a:solidFill>
-                  <a:srgbClr val="5A6A70"/>
-                </a:solidFill>
-                <a:latin typeface="Calibri"/>
-              </a:rPr>
-              <a:t>Travel+ Natural · пульт v1.10 · собес · не оферта</a:t>
+            <a:pPr>
+              <a:spcAft>
+                <a:spcPts val="1000"/>
+              </a:spcAft>
+            </a:pPr>
+            <a:r>
+              <a:rPr sz="2000" b="1">
+                <a:solidFill>
+                  <a:srgbClr val="2F5D50"/>
+                </a:solidFill>
+                <a:latin typeface="Calibri"/>
+              </a:rPr>
+              <a:t>BrandScript</a:t>
+            </a:r>
+          </a:p>
+          <a:p>
+            <a:pPr>
+              <a:spcAft>
+                <a:spcPts val="600"/>
+              </a:spcAft>
+            </a:pPr>
+            <a:r>
+              <a:rPr sz="1500" b="0">
+                <a:solidFill>
+                  <a:srgbClr val="1C1C1C"/>
+                </a:solidFill>
+                <a:latin typeface="Calibri"/>
+              </a:rPr>
+              <a:t>Герой: закупщик eco / wellness</a:t>
+            </a:r>
+          </a:p>
+          <a:p>
+            <a:pPr>
+              <a:spcAft>
+                <a:spcPts val="600"/>
+              </a:spcAft>
+            </a:pPr>
+            <a:r>
+              <a:rPr sz="1500" b="0">
+                <a:solidFill>
+                  <a:srgbClr val="1C1C1C"/>
+                </a:solidFill>
+                <a:latin typeface="Calibri"/>
+              </a:rPr>
+              <a:t>Проводник: Travel+ Natural</a:t>
+            </a:r>
+          </a:p>
+          <a:p>
+            <a:pPr>
+              <a:spcAft>
+                <a:spcPts val="1400"/>
+              </a:spcAft>
+            </a:pPr>
+            <a:r>
+              <a:rPr sz="1500" b="0">
+                <a:solidFill>
+                  <a:srgbClr val="1C1C1C"/>
+                </a:solidFill>
+                <a:latin typeface="Calibri"/>
+              </a:rPr>
+              <a:t>План: сегмент → образец + бумаги → пилот</a:t>
+            </a:r>
+          </a:p>
+          <a:p>
+            <a:pPr>
+              <a:spcAft>
+                <a:spcPts val="600"/>
+              </a:spcAft>
+            </a:pPr>
+            <a:r>
+              <a:rPr sz="1400" b="1">
+                <a:solidFill>
+                  <a:srgbClr val="5A5A5A"/>
+                </a:solidFill>
+                <a:latin typeface="Calibri"/>
+              </a:rPr>
+              <a:t>Гость после дороги:</a:t>
+            </a:r>
+          </a:p>
+          <a:p>
+            <a:pPr>
+              <a:spcAft>
+                <a:spcPts val="0"/>
+              </a:spcAft>
+            </a:pPr>
+            <a:r>
+              <a:rPr sz="1500" b="0">
+                <a:solidFill>
+                  <a:srgbClr val="1C1C1C"/>
+                </a:solidFill>
+                <a:latin typeface="Calibri"/>
+              </a:rPr>
+              <a:t>мягче, чем ждал - понятная натуральность</a:t>
             </a:r>
           </a:p>
         </p:txBody>
@@ -5294,7 +7484,7 @@
             <a:avLst/>
           </a:prstGeom>
           <a:solidFill>
-            <a:srgbClr val="F7F9FB"/>
+            <a:srgbClr val="F7F5F2"/>
           </a:solidFill>
           <a:ln>
             <a:noFill/>
@@ -5337,7 +7527,7 @@
             <a:avLst/>
           </a:prstGeom>
           <a:solidFill>
-            <a:srgbClr val="1F6B5C"/>
+            <a:srgbClr val="2F5D50"/>
           </a:solidFill>
           <a:ln>
             <a:noFill/>
@@ -5373,8 +7563,8 @@
         </p:nvSpPr>
         <p:spPr>
           <a:xfrm>
-            <a:off x="502920" y="320040"/>
-            <a:ext cx="11155680" cy="640080"/>
+            <a:off x="502920" y="256032"/>
+            <a:ext cx="11155680" cy="502920"/>
           </a:xfrm>
           <a:prstGeom prst="rect">
             <a:avLst/>
@@ -5390,25 +7580,231 @@
             <a:r>
               <a:rPr sz="2800" b="1">
                 <a:solidFill>
-                  <a:srgbClr val="1A2A2E"/>
-                </a:solidFill>
-                <a:latin typeface="Calibri"/>
-              </a:rPr>
-              <a:t>Границы до рынка — DoD этапа 2</a:t>
-            </a:r>
-          </a:p>
-        </p:txBody>
-      </p:sp>
-      <p:sp>
-        <p:nvSpPr>
-          <p:cNvPr id="5" name="TextBox 4"/>
+                  <a:srgbClr val="2F5D50"/>
+                </a:solidFill>
+                <a:latin typeface="Calibri"/>
+              </a:rPr>
+              <a:t>Границы до рынка - DoD этапа 2</a:t>
+            </a:r>
+          </a:p>
+        </p:txBody>
+      </p:sp>
+      <p:sp>
+        <p:nvSpPr>
+          <p:cNvPr id="5" name="Rectangle 4"/>
+          <p:cNvSpPr/>
+          <p:nvPr/>
+        </p:nvSpPr>
+        <p:spPr>
+          <a:xfrm>
+            <a:off x="502920" y="777240"/>
+            <a:ext cx="11155680" cy="22860"/>
+          </a:xfrm>
+          <a:prstGeom prst="rect">
+            <a:avLst/>
+          </a:prstGeom>
+          <a:solidFill>
+            <a:srgbClr val="D8D2C8"/>
+          </a:solidFill>
+          <a:ln>
+            <a:noFill/>
+          </a:ln>
+        </p:spPr>
+        <p:style>
+          <a:lnRef idx="1">
+            <a:schemeClr val="accent1"/>
+          </a:lnRef>
+          <a:fillRef idx="3">
+            <a:schemeClr val="accent1"/>
+          </a:fillRef>
+          <a:effectRef idx="2">
+            <a:schemeClr val="accent1"/>
+          </a:effectRef>
+          <a:fontRef idx="minor">
+            <a:schemeClr val="lt1"/>
+          </a:fontRef>
+        </p:style>
+        <p:txBody>
+          <a:bodyPr rtlCol="0" anchor="ctr"/>
+          <a:lstStyle/>
+          <a:p>
+            <a:pPr algn="ctr"/>
+          </a:p>
+        </p:txBody>
+      </p:sp>
+      <p:sp>
+        <p:nvSpPr>
+          <p:cNvPr id="6" name="TextBox 5"/>
           <p:cNvSpPr txBox="1"/>
           <p:nvPr/>
         </p:nvSpPr>
         <p:spPr>
           <a:xfrm>
-            <a:off x="502920" y="1097280"/>
-            <a:ext cx="11155680" cy="5303520"/>
+            <a:off x="502920" y="6446520"/>
+            <a:ext cx="9601200" cy="320040"/>
+          </a:xfrm>
+          <a:prstGeom prst="rect">
+            <a:avLst/>
+          </a:prstGeom>
+          <a:noFill/>
+        </p:spPr>
+        <p:txBody>
+          <a:bodyPr wrap="none">
+            <a:spAutoFit/>
+          </a:bodyPr>
+          <a:lstStyle/>
+          <a:p>
+            <a:r>
+              <a:rPr sz="1100" b="0">
+                <a:solidFill>
+                  <a:srgbClr val="5A5A5A"/>
+                </a:solidFill>
+                <a:latin typeface="Calibri"/>
+              </a:rPr>
+              <a:t>Travel+ Natural · пульт v1.14 · собес · не оферта</a:t>
+            </a:r>
+          </a:p>
+        </p:txBody>
+      </p:sp>
+      <p:sp>
+        <p:nvSpPr>
+          <p:cNvPr id="7" name="TextBox 6"/>
+          <p:cNvSpPr txBox="1"/>
+          <p:nvPr/>
+        </p:nvSpPr>
+        <p:spPr>
+          <a:xfrm>
+            <a:off x="10607040" y="6446520"/>
+            <a:ext cx="1188720" cy="320040"/>
+          </a:xfrm>
+          <a:prstGeom prst="rect">
+            <a:avLst/>
+          </a:prstGeom>
+          <a:noFill/>
+        </p:spPr>
+        <p:txBody>
+          <a:bodyPr wrap="none">
+            <a:spAutoFit/>
+          </a:bodyPr>
+          <a:lstStyle/>
+          <a:p>
+            <a:pPr algn="r"/>
+            <a:r>
+              <a:rPr sz="1100" b="0">
+                <a:solidFill>
+                  <a:srgbClr val="5A5A5A"/>
+                </a:solidFill>
+                <a:latin typeface="Calibri"/>
+              </a:rPr>
+              <a:t>6/12</a:t>
+            </a:r>
+          </a:p>
+        </p:txBody>
+      </p:sp>
+      <p:sp>
+        <p:nvSpPr>
+          <p:cNvPr id="8" name="Rounded Rectangle 7"/>
+          <p:cNvSpPr/>
+          <p:nvPr/>
+        </p:nvSpPr>
+        <p:spPr>
+          <a:xfrm>
+            <a:off x="502920" y="1051560"/>
+            <a:ext cx="5349240" cy="5029200"/>
+          </a:xfrm>
+          <a:prstGeom prst="roundRect">
+            <a:avLst>
+              <a:gd name="adj" fmla="val 8000"/>
+            </a:avLst>
+          </a:prstGeom>
+          <a:solidFill>
+            <a:srgbClr val="FFFFFF"/>
+          </a:solidFill>
+          <a:ln w="12700">
+            <a:solidFill>
+              <a:srgbClr val="D8D2C8"/>
+            </a:solidFill>
+          </a:ln>
+        </p:spPr>
+        <p:style>
+          <a:lnRef idx="1">
+            <a:schemeClr val="accent1"/>
+          </a:lnRef>
+          <a:fillRef idx="3">
+            <a:schemeClr val="accent1"/>
+          </a:fillRef>
+          <a:effectRef idx="2">
+            <a:schemeClr val="accent1"/>
+          </a:effectRef>
+          <a:fontRef idx="minor">
+            <a:schemeClr val="lt1"/>
+          </a:fontRef>
+        </p:style>
+        <p:txBody>
+          <a:bodyPr rtlCol="0" anchor="ctr"/>
+          <a:lstStyle/>
+          <a:p>
+            <a:pPr algn="ctr"/>
+          </a:p>
+        </p:txBody>
+      </p:sp>
+      <p:sp>
+        <p:nvSpPr>
+          <p:cNvPr id="9" name="Rounded Rectangle 8"/>
+          <p:cNvSpPr/>
+          <p:nvPr/>
+        </p:nvSpPr>
+        <p:spPr>
+          <a:xfrm>
+            <a:off x="6126480" y="1051560"/>
+            <a:ext cx="5440680" cy="5029200"/>
+          </a:xfrm>
+          <a:prstGeom prst="roundRect">
+            <a:avLst>
+              <a:gd name="adj" fmla="val 8000"/>
+            </a:avLst>
+          </a:prstGeom>
+          <a:solidFill>
+            <a:srgbClr val="FFFFFF"/>
+          </a:solidFill>
+          <a:ln w="12700">
+            <a:solidFill>
+              <a:srgbClr val="D8D2C8"/>
+            </a:solidFill>
+          </a:ln>
+        </p:spPr>
+        <p:style>
+          <a:lnRef idx="1">
+            <a:schemeClr val="accent1"/>
+          </a:lnRef>
+          <a:fillRef idx="3">
+            <a:schemeClr val="accent1"/>
+          </a:fillRef>
+          <a:effectRef idx="2">
+            <a:schemeClr val="accent1"/>
+          </a:effectRef>
+          <a:fontRef idx="minor">
+            <a:schemeClr val="lt1"/>
+          </a:fontRef>
+        </p:style>
+        <p:txBody>
+          <a:bodyPr rtlCol="0" anchor="ctr"/>
+          <a:lstStyle/>
+          <a:p>
+            <a:pPr algn="ctr"/>
+          </a:p>
+        </p:txBody>
+      </p:sp>
+      <p:sp>
+        <p:nvSpPr>
+          <p:cNvPr id="10" name="TextBox 9"/>
+          <p:cNvSpPr txBox="1"/>
+          <p:nvPr/>
+        </p:nvSpPr>
+        <p:spPr>
+          <a:xfrm>
+            <a:off x="777240" y="1234440"/>
+            <a:ext cx="4846320" cy="4663440"/>
           </a:xfrm>
           <a:prstGeom prst="rect">
             <a:avLst/>
@@ -5423,45 +7819,29 @@
           <a:p>
             <a:pPr>
               <a:spcAft>
-                <a:spcPts val="600"/>
-              </a:spcAft>
-            </a:pPr>
-            <a:r>
-              <a:rPr sz="1700" b="0">
-                <a:solidFill>
-                  <a:srgbClr val="2C3A3F"/>
-                </a:solidFill>
-                <a:latin typeface="Calibri"/>
-              </a:rPr>
-              <a:t>Пока не закрыто — витрину не открываем:</a:t>
-            </a:r>
-          </a:p>
-          <a:p>
-            <a:pPr>
-              <a:spcAft>
-                <a:spcPts val="600"/>
-              </a:spcAft>
-            </a:pPr>
-            <a:r>
-              <a:rPr sz="1700" b="0">
-                <a:solidFill>
-                  <a:srgbClr val="2C3A3F"/>
-                </a:solidFill>
-                <a:latin typeface="Calibri"/>
-              </a:rPr>
-              <a:t/>
-            </a:r>
-          </a:p>
-          <a:p>
-            <a:pPr>
-              <a:spcAft>
-                <a:spcPts val="600"/>
-              </a:spcAft>
-            </a:pPr>
-            <a:r>
-              <a:rPr sz="1700" b="0">
-                <a:solidFill>
-                  <a:srgbClr val="2C3A3F"/>
+                <a:spcPts val="1000"/>
+              </a:spcAft>
+            </a:pPr>
+            <a:r>
+              <a:rPr sz="1600" b="1">
+                <a:solidFill>
+                  <a:srgbClr val="2F5D50"/>
+                </a:solidFill>
+                <a:latin typeface="Calibri"/>
+              </a:rPr>
+              <a:t>Пока красное - витрину не открываем</a:t>
+            </a:r>
+          </a:p>
+          <a:p>
+            <a:pPr>
+              <a:spcAft>
+                <a:spcPts val="400"/>
+              </a:spcAft>
+            </a:pPr>
+            <a:r>
+              <a:rPr sz="1500" b="0">
+                <a:solidFill>
+                  <a:srgbClr val="1C1C1C"/>
                 </a:solidFill>
                 <a:latin typeface="Calibri"/>
               </a:rPr>
@@ -5471,13 +7851,13 @@
           <a:p>
             <a:pPr>
               <a:spcAft>
-                <a:spcPts val="600"/>
-              </a:spcAft>
-            </a:pPr>
-            <a:r>
-              <a:rPr sz="1700" b="0">
-                <a:solidFill>
-                  <a:srgbClr val="2C3A3F"/>
+                <a:spcPts val="400"/>
+              </a:spcAft>
+            </a:pPr>
+            <a:r>
+              <a:rPr sz="1500" b="0">
+                <a:solidFill>
+                  <a:srgbClr val="1C1C1C"/>
                 </a:solidFill>
                 <a:latin typeface="Calibri"/>
               </a:rPr>
@@ -5487,29 +7867,29 @@
           <a:p>
             <a:pPr>
               <a:spcAft>
-                <a:spcPts val="600"/>
-              </a:spcAft>
-            </a:pPr>
-            <a:r>
-              <a:rPr sz="1700" b="0">
-                <a:solidFill>
-                  <a:srgbClr val="2C3A3F"/>
-                </a:solidFill>
-                <a:latin typeface="Calibri"/>
-              </a:rPr>
-              <a:t>□ Origin зафиксирован (без выдуманного «RU»)</a:t>
-            </a:r>
-          </a:p>
-          <a:p>
-            <a:pPr>
-              <a:spcAft>
-                <a:spcPts val="600"/>
-              </a:spcAft>
-            </a:pPr>
-            <a:r>
-              <a:rPr sz="1700" b="0">
-                <a:solidFill>
-                  <a:srgbClr val="2C3A3F"/>
+                <a:spcPts val="400"/>
+              </a:spcAft>
+            </a:pPr>
+            <a:r>
+              <a:rPr sz="1500" b="0">
+                <a:solidFill>
+                  <a:srgbClr val="1C1C1C"/>
+                </a:solidFill>
+                <a:latin typeface="Calibri"/>
+              </a:rPr>
+              <a:t>□ Origin зафиксирован</a:t>
+            </a:r>
+          </a:p>
+          <a:p>
+            <a:pPr>
+              <a:spcAft>
+                <a:spcPts val="400"/>
+              </a:spcAft>
+            </a:pPr>
+            <a:r>
+              <a:rPr sz="1500" b="0">
+                <a:solidFill>
+                  <a:srgbClr val="1C1C1C"/>
                 </a:solidFill>
                 <a:latin typeface="Calibri"/>
               </a:rPr>
@@ -5519,13 +7899,13 @@
           <a:p>
             <a:pPr>
               <a:spcAft>
-                <a:spcPts val="600"/>
-              </a:spcAft>
-            </a:pPr>
-            <a:r>
-              <a:rPr sz="1700" b="0">
-                <a:solidFill>
-                  <a:srgbClr val="2C3A3F"/>
+                <a:spcPts val="400"/>
+              </a:spcAft>
+            </a:pPr>
+            <a:r>
+              <a:rPr sz="1500" b="0">
+                <a:solidFill>
+                  <a:srgbClr val="1C1C1C"/>
                 </a:solidFill>
                 <a:latin typeface="Calibri"/>
               </a:rPr>
@@ -5535,63 +7915,47 @@
           <a:p>
             <a:pPr>
               <a:spcAft>
-                <a:spcPts val="600"/>
-              </a:spcAft>
-            </a:pPr>
-            <a:r>
-              <a:rPr sz="1700" b="0">
-                <a:solidFill>
-                  <a:srgbClr val="2C3A3F"/>
-                </a:solidFill>
-                <a:latin typeface="Calibri"/>
-              </a:rPr>
-              <a:t>□ COGS / коридор цены · Lead time / MOQ</a:t>
-            </a:r>
-          </a:p>
-          <a:p>
-            <a:pPr>
-              <a:spcAft>
-                <a:spcPts val="600"/>
-              </a:spcAft>
-            </a:pPr>
-            <a:r>
-              <a:rPr sz="1700" b="0">
-                <a:solidFill>
-                  <a:srgbClr val="2C3A3F"/>
-                </a:solidFill>
-                <a:latin typeface="Calibri"/>
-              </a:rPr>
-              <a:t/>
-            </a:r>
-          </a:p>
-          <a:p>
-            <a:pPr>
-              <a:spcAft>
-                <a:spcPts val="600"/>
-              </a:spcAft>
-            </a:pPr>
-            <a:r>
-              <a:rPr sz="1700" b="0">
-                <a:solidFill>
-                  <a:srgbClr val="2C3A3F"/>
-                </a:solidFill>
-                <a:latin typeface="Calibri"/>
-              </a:rPr>
-              <a:t>На старте: без COSMOS, если знака нет — честно.</a:t>
-            </a:r>
-          </a:p>
-        </p:txBody>
-      </p:sp>
-      <p:sp>
-        <p:nvSpPr>
-          <p:cNvPr id="6" name="TextBox 5"/>
+                <a:spcPts val="400"/>
+              </a:spcAft>
+            </a:pPr>
+            <a:r>
+              <a:rPr sz="1500" b="0">
+                <a:solidFill>
+                  <a:srgbClr val="1C1C1C"/>
+                </a:solidFill>
+                <a:latin typeface="Calibri"/>
+              </a:rPr>
+              <a:t>□ COGS / коридор цены</a:t>
+            </a:r>
+          </a:p>
+          <a:p>
+            <a:pPr>
+              <a:spcAft>
+                <a:spcPts val="0"/>
+              </a:spcAft>
+            </a:pPr>
+            <a:r>
+              <a:rPr sz="1500" b="0">
+                <a:solidFill>
+                  <a:srgbClr val="1C1C1C"/>
+                </a:solidFill>
+                <a:latin typeface="Calibri"/>
+              </a:rPr>
+              <a:t>□ Lead time / MOQ / брак</a:t>
+            </a:r>
+          </a:p>
+        </p:txBody>
+      </p:sp>
+      <p:sp>
+        <p:nvSpPr>
+          <p:cNvPr id="11" name="TextBox 10"/>
           <p:cNvSpPr txBox="1"/>
           <p:nvPr/>
         </p:nvSpPr>
         <p:spPr>
           <a:xfrm>
-            <a:off x="502920" y="6446520"/>
-            <a:ext cx="11155680" cy="320040"/>
+            <a:off x="6400800" y="1234440"/>
+            <a:ext cx="4937760" cy="4663440"/>
           </a:xfrm>
           <a:prstGeom prst="rect">
             <a:avLst/>
@@ -5599,19 +7963,88 @@
           <a:noFill/>
         </p:spPr>
         <p:txBody>
-          <a:bodyPr wrap="none">
+          <a:bodyPr wrap="square">
             <a:spAutoFit/>
           </a:bodyPr>
           <a:lstStyle/>
           <a:p>
-            <a:r>
-              <a:rPr sz="1100" b="0">
-                <a:solidFill>
-                  <a:srgbClr val="5A6A70"/>
-                </a:solidFill>
-                <a:latin typeface="Calibri"/>
-              </a:rPr>
-              <a:t>Travel+ Natural · пульт v1.10 · собес · не оферта</a:t>
+            <a:pPr>
+              <a:spcAft>
+                <a:spcPts val="1200"/>
+              </a:spcAft>
+            </a:pPr>
+            <a:r>
+              <a:rPr sz="2000" b="1">
+                <a:solidFill>
+                  <a:srgbClr val="2F5D50"/>
+                </a:solidFill>
+                <a:latin typeface="Calibri"/>
+              </a:rPr>
+              <a:t>Правила</a:t>
+            </a:r>
+          </a:p>
+          <a:p>
+            <a:pPr>
+              <a:spcAft>
+                <a:spcPts val="1000"/>
+              </a:spcAft>
+            </a:pPr>
+            <a:r>
+              <a:rPr sz="1500" b="0">
+                <a:solidFill>
+                  <a:srgbClr val="1C1C1C"/>
+                </a:solidFill>
+                <a:latin typeface="Calibri"/>
+              </a:rPr>
+              <a:t>На старте без COSMOS, если знака нет - честно.</a:t>
+            </a:r>
+          </a:p>
+          <a:p>
+            <a:pPr>
+              <a:spcAft>
+                <a:spcPts val="1000"/>
+              </a:spcAft>
+            </a:pPr>
+            <a:r>
+              <a:rPr sz="1500" b="1">
+                <a:solidFill>
+                  <a:srgbClr val="1C1C1C"/>
+                </a:solidFill>
+                <a:latin typeface="Calibri"/>
+              </a:rPr>
+              <a:t>Без DoD - не КП и не live GTM.</a:t>
+            </a:r>
+          </a:p>
+          <a:p>
+            <a:pPr>
+              <a:spcAft>
+                <a:spcPts val="400"/>
+              </a:spcAft>
+            </a:pPr>
+            <a:r>
+              <a:rPr sz="1500" b="0">
+                <a:solidFill>
+                  <a:srgbClr val="1C1C1C"/>
+                </a:solidFill>
+                <a:latin typeface="Calibri"/>
+              </a:rPr>
+              <a:t>Этапы 3-6 - учебный сценарий,</a:t>
+            </a:r>
+          </a:p>
+          <a:p>
+            <a:pPr>
+              <a:spcAft>
+                <a:spcPts val="0"/>
+              </a:spcAft>
+            </a:pPr>
+            <a:r>
+              <a:rPr sz="1500" b="0">
+                <a:solidFill>
+                  <a:srgbClr val="1C1C1C"/>
+                </a:solidFill>
+                <a:latin typeface="Calibri"/>
+              </a:rPr>
+              <a:t>не факт завода.</a:t>
             </a:r>
           </a:p>
         </p:txBody>
@@ -5649,7 +8082,7 @@
             <a:avLst/>
           </a:prstGeom>
           <a:solidFill>
-            <a:srgbClr val="F7F9FB"/>
+            <a:srgbClr val="F7F5F2"/>
           </a:solidFill>
           <a:ln>
             <a:noFill/>
@@ -5692,7 +8125,7 @@
             <a:avLst/>
           </a:prstGeom>
           <a:solidFill>
-            <a:srgbClr val="1F6B5C"/>
+            <a:srgbClr val="2F5D50"/>
           </a:solidFill>
           <a:ln>
             <a:noFill/>
@@ -5728,8 +8161,8 @@
         </p:nvSpPr>
         <p:spPr>
           <a:xfrm>
-            <a:off x="502920" y="320040"/>
-            <a:ext cx="11155680" cy="640080"/>
+            <a:off x="502920" y="256032"/>
+            <a:ext cx="11155680" cy="502920"/>
           </a:xfrm>
           <a:prstGeom prst="rect">
             <a:avLst/>
@@ -5745,7 +8178,7 @@
             <a:r>
               <a:rPr sz="2800" b="1">
                 <a:solidFill>
-                  <a:srgbClr val="1A2A2E"/>
+                  <a:srgbClr val="2F5D50"/>
                 </a:solidFill>
                 <a:latin typeface="Calibri"/>
               </a:rPr>
@@ -5756,14 +8189,173 @@
       </p:sp>
       <p:sp>
         <p:nvSpPr>
-          <p:cNvPr id="5" name="TextBox 4"/>
+          <p:cNvPr id="5" name="Rectangle 4"/>
+          <p:cNvSpPr/>
+          <p:nvPr/>
+        </p:nvSpPr>
+        <p:spPr>
+          <a:xfrm>
+            <a:off x="502920" y="777240"/>
+            <a:ext cx="11155680" cy="22860"/>
+          </a:xfrm>
+          <a:prstGeom prst="rect">
+            <a:avLst/>
+          </a:prstGeom>
+          <a:solidFill>
+            <a:srgbClr val="D8D2C8"/>
+          </a:solidFill>
+          <a:ln>
+            <a:noFill/>
+          </a:ln>
+        </p:spPr>
+        <p:style>
+          <a:lnRef idx="1">
+            <a:schemeClr val="accent1"/>
+          </a:lnRef>
+          <a:fillRef idx="3">
+            <a:schemeClr val="accent1"/>
+          </a:fillRef>
+          <a:effectRef idx="2">
+            <a:schemeClr val="accent1"/>
+          </a:effectRef>
+          <a:fontRef idx="minor">
+            <a:schemeClr val="lt1"/>
+          </a:fontRef>
+        </p:style>
+        <p:txBody>
+          <a:bodyPr rtlCol="0" anchor="ctr"/>
+          <a:lstStyle/>
+          <a:p>
+            <a:pPr algn="ctr"/>
+          </a:p>
+        </p:txBody>
+      </p:sp>
+      <p:sp>
+        <p:nvSpPr>
+          <p:cNvPr id="6" name="TextBox 5"/>
           <p:cNvSpPr txBox="1"/>
           <p:nvPr/>
         </p:nvSpPr>
         <p:spPr>
           <a:xfrm>
+            <a:off x="502920" y="6446520"/>
+            <a:ext cx="9601200" cy="320040"/>
+          </a:xfrm>
+          <a:prstGeom prst="rect">
+            <a:avLst/>
+          </a:prstGeom>
+          <a:noFill/>
+        </p:spPr>
+        <p:txBody>
+          <a:bodyPr wrap="none">
+            <a:spAutoFit/>
+          </a:bodyPr>
+          <a:lstStyle/>
+          <a:p>
+            <a:r>
+              <a:rPr sz="1100" b="0">
+                <a:solidFill>
+                  <a:srgbClr val="5A5A5A"/>
+                </a:solidFill>
+                <a:latin typeface="Calibri"/>
+              </a:rPr>
+              <a:t>Travel+ Natural · пульт v1.14 · собес · не оферта</a:t>
+            </a:r>
+          </a:p>
+        </p:txBody>
+      </p:sp>
+      <p:sp>
+        <p:nvSpPr>
+          <p:cNvPr id="7" name="TextBox 6"/>
+          <p:cNvSpPr txBox="1"/>
+          <p:nvPr/>
+        </p:nvSpPr>
+        <p:spPr>
+          <a:xfrm>
+            <a:off x="10607040" y="6446520"/>
+            <a:ext cx="1188720" cy="320040"/>
+          </a:xfrm>
+          <a:prstGeom prst="rect">
+            <a:avLst/>
+          </a:prstGeom>
+          <a:noFill/>
+        </p:spPr>
+        <p:txBody>
+          <a:bodyPr wrap="none">
+            <a:spAutoFit/>
+          </a:bodyPr>
+          <a:lstStyle/>
+          <a:p>
+            <a:pPr algn="r"/>
+            <a:r>
+              <a:rPr sz="1100" b="0">
+                <a:solidFill>
+                  <a:srgbClr val="5A5A5A"/>
+                </a:solidFill>
+                <a:latin typeface="Calibri"/>
+              </a:rPr>
+              <a:t>7/12</a:t>
+            </a:r>
+          </a:p>
+        </p:txBody>
+      </p:sp>
+      <p:sp>
+        <p:nvSpPr>
+          <p:cNvPr id="8" name="Rounded Rectangle 7"/>
+          <p:cNvSpPr/>
+          <p:nvPr/>
+        </p:nvSpPr>
+        <p:spPr>
+          <a:xfrm>
             <a:off x="502920" y="1097280"/>
-            <a:ext cx="11155680" cy="5303520"/>
+            <a:ext cx="11155680" cy="4023360"/>
+          </a:xfrm>
+          <a:prstGeom prst="roundRect">
+            <a:avLst>
+              <a:gd name="adj" fmla="val 8000"/>
+            </a:avLst>
+          </a:prstGeom>
+          <a:solidFill>
+            <a:srgbClr val="FFFFFF"/>
+          </a:solidFill>
+          <a:ln w="12700">
+            <a:solidFill>
+              <a:srgbClr val="D8D2C8"/>
+            </a:solidFill>
+          </a:ln>
+        </p:spPr>
+        <p:style>
+          <a:lnRef idx="1">
+            <a:schemeClr val="accent1"/>
+          </a:lnRef>
+          <a:fillRef idx="3">
+            <a:schemeClr val="accent1"/>
+          </a:fillRef>
+          <a:effectRef idx="2">
+            <a:schemeClr val="accent1"/>
+          </a:effectRef>
+          <a:fontRef idx="minor">
+            <a:schemeClr val="lt1"/>
+          </a:fontRef>
+        </p:style>
+        <p:txBody>
+          <a:bodyPr rtlCol="0" anchor="ctr"/>
+          <a:lstStyle/>
+          <a:p>
+            <a:pPr algn="ctr"/>
+          </a:p>
+        </p:txBody>
+      </p:sp>
+      <p:sp>
+        <p:nvSpPr>
+          <p:cNvPr id="9" name="TextBox 8"/>
+          <p:cNvSpPr txBox="1"/>
+          <p:nvPr/>
+        </p:nvSpPr>
+        <p:spPr>
+          <a:xfrm>
+            <a:off x="868680" y="1371600"/>
+            <a:ext cx="10424160" cy="3566160"/>
           </a:xfrm>
           <a:prstGeom prst="rect">
             <a:avLst/>
@@ -5778,29 +8370,29 @@
           <a:p>
             <a:pPr>
               <a:spcAft>
-                <a:spcPts val="600"/>
-              </a:spcAft>
-            </a:pPr>
-            <a:r>
-              <a:rPr sz="1700" b="0">
-                <a:solidFill>
-                  <a:srgbClr val="2C3A3F"/>
-                </a:solidFill>
-                <a:latin typeface="Calibri"/>
-              </a:rPr>
-              <a:t>«Вам нужно выглядеть зеленее — и спокойно пройти и гостя, и документы.</a:t>
-            </a:r>
-          </a:p>
-          <a:p>
-            <a:pPr>
-              <a:spcAft>
-                <a:spcPts val="600"/>
-              </a:spcAft>
-            </a:pPr>
-            <a:r>
-              <a:rPr sz="1700" b="0">
-                <a:solidFill>
-                  <a:srgbClr val="2C3A3F"/>
+                <a:spcPts val="1000"/>
+              </a:spcAft>
+            </a:pPr>
+            <a:r>
+              <a:rPr sz="1800" b="0">
+                <a:solidFill>
+                  <a:srgbClr val="1C1C1C"/>
+                </a:solidFill>
+                <a:latin typeface="Calibri"/>
+              </a:rPr>
+              <a:t>«Вам нужно выглядеть зеленее - и спокойно пройти и гостя, и документы.</a:t>
+            </a:r>
+          </a:p>
+          <a:p>
+            <a:pPr>
+              <a:spcAft>
+                <a:spcPts val="400"/>
+              </a:spcAft>
+            </a:pPr>
+            <a:r>
+              <a:rPr sz="1800" b="0">
+                <a:solidFill>
+                  <a:srgbClr val="1C1C1C"/>
                 </a:solidFill>
                 <a:latin typeface="Calibri"/>
               </a:rPr>
@@ -5810,13 +8402,13 @@
           <a:p>
             <a:pPr>
               <a:spcAft>
-                <a:spcPts val="600"/>
-              </a:spcAft>
-            </a:pPr>
-            <a:r>
-              <a:rPr sz="1700" b="0">
-                <a:solidFill>
-                  <a:srgbClr val="2C3A3F"/>
+                <a:spcPts val="800"/>
+              </a:spcAft>
+            </a:pPr>
+            <a:r>
+              <a:rPr sz="1600" b="0">
+                <a:solidFill>
+                  <a:srgbClr val="5A5A5A"/>
                 </a:solidFill>
                 <a:latin typeface="Calibri"/>
               </a:rPr>
@@ -5826,13 +8418,13 @@
           <a:p>
             <a:pPr>
               <a:spcAft>
-                <a:spcPts val="600"/>
-              </a:spcAft>
-            </a:pPr>
-            <a:r>
-              <a:rPr sz="1700" b="0">
-                <a:solidFill>
-                  <a:srgbClr val="2C3A3F"/>
+                <a:spcPts val="1000"/>
+              </a:spcAft>
+            </a:pPr>
+            <a:r>
+              <a:rPr sz="1800" b="0">
+                <a:solidFill>
+                  <a:srgbClr val="1C1C1C"/>
                 </a:solidFill>
                 <a:latin typeface="Calibri"/>
               </a:rPr>
@@ -5842,79 +8434,31 @@
           <a:p>
             <a:pPr>
               <a:spcAft>
-                <a:spcPts val="600"/>
-              </a:spcAft>
-            </a:pPr>
-            <a:r>
-              <a:rPr sz="1700" b="0">
-                <a:solidFill>
-                  <a:srgbClr val="2C3A3F"/>
+                <a:spcPts val="0"/>
+              </a:spcAft>
+            </a:pPr>
+            <a:r>
+              <a:rPr sz="1800" b="1">
+                <a:solidFill>
+                  <a:srgbClr val="1C1C1C"/>
                 </a:solidFill>
                 <a:latin typeface="Calibri"/>
               </a:rPr>
               <a:t>Три шага: eco / wellness → образец → пилот.»</a:t>
             </a:r>
           </a:p>
-          <a:p>
-            <a:pPr>
-              <a:spcAft>
-                <a:spcPts val="600"/>
-              </a:spcAft>
-            </a:pPr>
-            <a:r>
-              <a:rPr sz="1700" b="0">
-                <a:solidFill>
-                  <a:srgbClr val="2C3A3F"/>
-                </a:solidFill>
-                <a:latin typeface="Calibri"/>
-              </a:rPr>
-              <a:t/>
-            </a:r>
-          </a:p>
-          <a:p>
-            <a:pPr>
-              <a:spcAft>
-                <a:spcPts val="600"/>
-              </a:spcAft>
-            </a:pPr>
-            <a:r>
-              <a:rPr sz="1700" b="0">
-                <a:solidFill>
-                  <a:srgbClr val="2C3A3F"/>
-                </a:solidFill>
-                <a:latin typeface="Calibri"/>
-              </a:rPr>
-              <a:t>Отрицания (COSMOS, origin, цена HL) — только в возражениях.</a:t>
-            </a:r>
-          </a:p>
-          <a:p>
-            <a:pPr>
-              <a:spcAft>
-                <a:spcPts val="600"/>
-              </a:spcAft>
-            </a:pPr>
-            <a:r>
-              <a:rPr sz="1700" b="0">
-                <a:solidFill>
-                  <a:srgbClr val="2C3A3F"/>
-                </a:solidFill>
-                <a:latin typeface="Calibri"/>
-              </a:rPr>
-              <a:t>Гостю: мягкий натуральный уход — не «без химии».</a:t>
-            </a:r>
-          </a:p>
-        </p:txBody>
-      </p:sp>
-      <p:sp>
-        <p:nvSpPr>
-          <p:cNvPr id="6" name="TextBox 5"/>
+        </p:txBody>
+      </p:sp>
+      <p:sp>
+        <p:nvSpPr>
+          <p:cNvPr id="10" name="TextBox 9"/>
           <p:cNvSpPr txBox="1"/>
           <p:nvPr/>
         </p:nvSpPr>
         <p:spPr>
           <a:xfrm>
-            <a:off x="502920" y="6446520"/>
-            <a:ext cx="11155680" cy="320040"/>
+            <a:off x="502920" y="5349240"/>
+            <a:ext cx="11155680" cy="640080"/>
           </a:xfrm>
           <a:prstGeom prst="rect">
             <a:avLst/>
@@ -5922,19 +8466,24 @@
           <a:noFill/>
         </p:spPr>
         <p:txBody>
-          <a:bodyPr wrap="none">
+          <a:bodyPr wrap="square">
             <a:spAutoFit/>
           </a:bodyPr>
           <a:lstStyle/>
           <a:p>
-            <a:r>
-              <a:rPr sz="1100" b="0">
-                <a:solidFill>
-                  <a:srgbClr val="5A6A70"/>
-                </a:solidFill>
-                <a:latin typeface="Calibri"/>
-              </a:rPr>
-              <a:t>Travel+ Natural · пульт v1.10 · собес · не оферта</a:t>
+            <a:pPr>
+              <a:spcAft>
+                <a:spcPts val="600"/>
+              </a:spcAft>
+            </a:pPr>
+            <a:r>
+              <a:rPr sz="1400" b="0">
+                <a:solidFill>
+                  <a:srgbClr val="5A5A5A"/>
+                </a:solidFill>
+                <a:latin typeface="Calibri"/>
+              </a:rPr>
+              <a:t>Отрицания (COSMOS, origin, цена HL) - только в возражениях.</a:t>
             </a:r>
           </a:p>
         </p:txBody>
@@ -5972,7 +8521,7 @@
             <a:avLst/>
           </a:prstGeom>
           <a:solidFill>
-            <a:srgbClr val="F7F9FB"/>
+            <a:srgbClr val="F7F5F2"/>
           </a:solidFill>
           <a:ln>
             <a:noFill/>
@@ -6015,7 +8564,7 @@
             <a:avLst/>
           </a:prstGeom>
           <a:solidFill>
-            <a:srgbClr val="1F6B5C"/>
+            <a:srgbClr val="2F5D50"/>
           </a:solidFill>
           <a:ln>
             <a:noFill/>
@@ -6051,8 +8600,8 @@
         </p:nvSpPr>
         <p:spPr>
           <a:xfrm>
-            <a:off x="502920" y="320040"/>
-            <a:ext cx="11155680" cy="640080"/>
+            <a:off x="502920" y="256032"/>
+            <a:ext cx="11155680" cy="502920"/>
           </a:xfrm>
           <a:prstGeom prst="rect">
             <a:avLst/>
@@ -6068,7 +8617,7 @@
             <a:r>
               <a:rPr sz="2800" b="1">
                 <a:solidFill>
-                  <a:srgbClr val="1A2A2E"/>
+                  <a:srgbClr val="2F5D50"/>
                 </a:solidFill>
                 <a:latin typeface="Calibri"/>
               </a:rPr>
@@ -6079,14 +8628,220 @@
       </p:sp>
       <p:sp>
         <p:nvSpPr>
-          <p:cNvPr id="5" name="TextBox 4"/>
+          <p:cNvPr id="5" name="Rectangle 4"/>
+          <p:cNvSpPr/>
+          <p:nvPr/>
+        </p:nvSpPr>
+        <p:spPr>
+          <a:xfrm>
+            <a:off x="502920" y="777240"/>
+            <a:ext cx="11155680" cy="22860"/>
+          </a:xfrm>
+          <a:prstGeom prst="rect">
+            <a:avLst/>
+          </a:prstGeom>
+          <a:solidFill>
+            <a:srgbClr val="D8D2C8"/>
+          </a:solidFill>
+          <a:ln>
+            <a:noFill/>
+          </a:ln>
+        </p:spPr>
+        <p:style>
+          <a:lnRef idx="1">
+            <a:schemeClr val="accent1"/>
+          </a:lnRef>
+          <a:fillRef idx="3">
+            <a:schemeClr val="accent1"/>
+          </a:fillRef>
+          <a:effectRef idx="2">
+            <a:schemeClr val="accent1"/>
+          </a:effectRef>
+          <a:fontRef idx="minor">
+            <a:schemeClr val="lt1"/>
+          </a:fontRef>
+        </p:style>
+        <p:txBody>
+          <a:bodyPr rtlCol="0" anchor="ctr"/>
+          <a:lstStyle/>
+          <a:p>
+            <a:pPr algn="ctr"/>
+          </a:p>
+        </p:txBody>
+      </p:sp>
+      <p:sp>
+        <p:nvSpPr>
+          <p:cNvPr id="6" name="TextBox 5"/>
           <p:cNvSpPr txBox="1"/>
           <p:nvPr/>
         </p:nvSpPr>
         <p:spPr>
           <a:xfrm>
-            <a:off x="502920" y="1097280"/>
-            <a:ext cx="11155680" cy="5303520"/>
+            <a:off x="502920" y="6446520"/>
+            <a:ext cx="9601200" cy="320040"/>
+          </a:xfrm>
+          <a:prstGeom prst="rect">
+            <a:avLst/>
+          </a:prstGeom>
+          <a:noFill/>
+        </p:spPr>
+        <p:txBody>
+          <a:bodyPr wrap="none">
+            <a:spAutoFit/>
+          </a:bodyPr>
+          <a:lstStyle/>
+          <a:p>
+            <a:r>
+              <a:rPr sz="1100" b="0">
+                <a:solidFill>
+                  <a:srgbClr val="5A5A5A"/>
+                </a:solidFill>
+                <a:latin typeface="Calibri"/>
+              </a:rPr>
+              <a:t>Travel+ Natural · пульт v1.14 · собес · не оферта</a:t>
+            </a:r>
+          </a:p>
+        </p:txBody>
+      </p:sp>
+      <p:sp>
+        <p:nvSpPr>
+          <p:cNvPr id="7" name="TextBox 6"/>
+          <p:cNvSpPr txBox="1"/>
+          <p:nvPr/>
+        </p:nvSpPr>
+        <p:spPr>
+          <a:xfrm>
+            <a:off x="10607040" y="6446520"/>
+            <a:ext cx="1188720" cy="320040"/>
+          </a:xfrm>
+          <a:prstGeom prst="rect">
+            <a:avLst/>
+          </a:prstGeom>
+          <a:noFill/>
+        </p:spPr>
+        <p:txBody>
+          <a:bodyPr wrap="none">
+            <a:spAutoFit/>
+          </a:bodyPr>
+          <a:lstStyle/>
+          <a:p>
+            <a:pPr algn="r"/>
+            <a:r>
+              <a:rPr sz="1100" b="0">
+                <a:solidFill>
+                  <a:srgbClr val="5A5A5A"/>
+                </a:solidFill>
+                <a:latin typeface="Calibri"/>
+              </a:rPr>
+              <a:t>8/12</a:t>
+            </a:r>
+          </a:p>
+        </p:txBody>
+      </p:sp>
+      <p:sp>
+        <p:nvSpPr>
+          <p:cNvPr id="8" name="Rounded Rectangle 7"/>
+          <p:cNvSpPr/>
+          <p:nvPr/>
+        </p:nvSpPr>
+        <p:spPr>
+          <a:xfrm>
+            <a:off x="502920" y="1051560"/>
+            <a:ext cx="5349240" cy="5029200"/>
+          </a:xfrm>
+          <a:prstGeom prst="roundRect">
+            <a:avLst>
+              <a:gd name="adj" fmla="val 8000"/>
+            </a:avLst>
+          </a:prstGeom>
+          <a:solidFill>
+            <a:srgbClr val="FFFFFF"/>
+          </a:solidFill>
+          <a:ln w="12700">
+            <a:solidFill>
+              <a:srgbClr val="D8D2C8"/>
+            </a:solidFill>
+          </a:ln>
+        </p:spPr>
+        <p:style>
+          <a:lnRef idx="1">
+            <a:schemeClr val="accent1"/>
+          </a:lnRef>
+          <a:fillRef idx="3">
+            <a:schemeClr val="accent1"/>
+          </a:fillRef>
+          <a:effectRef idx="2">
+            <a:schemeClr val="accent1"/>
+          </a:effectRef>
+          <a:fontRef idx="minor">
+            <a:schemeClr val="lt1"/>
+          </a:fontRef>
+        </p:style>
+        <p:txBody>
+          <a:bodyPr rtlCol="0" anchor="ctr"/>
+          <a:lstStyle/>
+          <a:p>
+            <a:pPr algn="ctr"/>
+          </a:p>
+        </p:txBody>
+      </p:sp>
+      <p:sp>
+        <p:nvSpPr>
+          <p:cNvPr id="9" name="Rounded Rectangle 8"/>
+          <p:cNvSpPr/>
+          <p:nvPr/>
+        </p:nvSpPr>
+        <p:spPr>
+          <a:xfrm>
+            <a:off x="6126480" y="1051560"/>
+            <a:ext cx="5440680" cy="5029200"/>
+          </a:xfrm>
+          <a:prstGeom prst="roundRect">
+            <a:avLst>
+              <a:gd name="adj" fmla="val 8000"/>
+            </a:avLst>
+          </a:prstGeom>
+          <a:solidFill>
+            <a:srgbClr val="FFFFFF"/>
+          </a:solidFill>
+          <a:ln w="12700">
+            <a:solidFill>
+              <a:srgbClr val="D8D2C8"/>
+            </a:solidFill>
+          </a:ln>
+        </p:spPr>
+        <p:style>
+          <a:lnRef idx="1">
+            <a:schemeClr val="accent1"/>
+          </a:lnRef>
+          <a:fillRef idx="3">
+            <a:schemeClr val="accent1"/>
+          </a:fillRef>
+          <a:effectRef idx="2">
+            <a:schemeClr val="accent1"/>
+          </a:effectRef>
+          <a:fontRef idx="minor">
+            <a:schemeClr val="lt1"/>
+          </a:fontRef>
+        </p:style>
+        <p:txBody>
+          <a:bodyPr rtlCol="0" anchor="ctr"/>
+          <a:lstStyle/>
+          <a:p>
+            <a:pPr algn="ctr"/>
+          </a:p>
+        </p:txBody>
+      </p:sp>
+      <p:sp>
+        <p:nvSpPr>
+          <p:cNvPr id="10" name="TextBox 9"/>
+          <p:cNvSpPr txBox="1"/>
+          <p:nvPr/>
+        </p:nvSpPr>
+        <p:spPr>
+          <a:xfrm>
+            <a:off x="777240" y="1234440"/>
+            <a:ext cx="4846320" cy="4663440"/>
           </a:xfrm>
           <a:prstGeom prst="rect">
             <a:avLst/>
@@ -6101,111 +8856,95 @@
           <a:p>
             <a:pPr>
               <a:spcAft>
-                <a:spcPts val="600"/>
-              </a:spcAft>
-            </a:pPr>
-            <a:r>
-              <a:rPr sz="1800" b="0">
-                <a:solidFill>
-                  <a:srgbClr val="2C3A3F"/>
-                </a:solidFill>
-                <a:latin typeface="Calibri"/>
-              </a:rPr>
-              <a:t>· COSMOS обязателен → Natural в это КП не ставим</a:t>
-            </a:r>
-          </a:p>
-          <a:p>
-            <a:pPr>
-              <a:spcAft>
-                <a:spcPts val="600"/>
-              </a:spcAft>
-            </a:pPr>
-            <a:r>
-              <a:rPr sz="1800" b="0">
-                <a:solidFill>
-                  <a:srgbClr val="2C3A3F"/>
-                </a:solidFill>
-                <a:latin typeface="Calibri"/>
-              </a:rPr>
-              <a:t>· «Natural по цене HL» → нет</a:t>
-            </a:r>
-          </a:p>
-          <a:p>
-            <a:pPr>
-              <a:spcAft>
-                <a:spcPts val="600"/>
-              </a:spcAft>
-            </a:pPr>
-            <a:r>
-              <a:rPr sz="1800" b="0">
-                <a:solidFill>
-                  <a:srgbClr val="2C3A3F"/>
-                </a:solidFill>
-                <a:latin typeface="Calibri"/>
-              </a:rPr>
-              <a:t>· СТМ / наш лого → отдельный проект, не Natural с другим лого</a:t>
-            </a:r>
-          </a:p>
-          <a:p>
-            <a:pPr>
-              <a:spcAft>
-                <a:spcPts val="600"/>
-              </a:spcAft>
-            </a:pPr>
-            <a:r>
-              <a:rPr sz="1800" b="0">
-                <a:solidFill>
-                  <a:srgbClr val="2C3A3F"/>
-                </a:solidFill>
-                <a:latin typeface="Calibri"/>
-              </a:rPr>
-              <a:t>· «Где произведено?» → только зафиксированный origin</a:t>
-            </a:r>
-          </a:p>
-          <a:p>
-            <a:pPr>
-              <a:spcAft>
-                <a:spcPts val="600"/>
-              </a:spcAft>
-            </a:pPr>
-            <a:r>
-              <a:rPr sz="1800" b="0">
-                <a:solidFill>
-                  <a:srgbClr val="2C3A3F"/>
-                </a:solidFill>
-                <a:latin typeface="Calibri"/>
-              </a:rPr>
-              <a:t/>
-            </a:r>
-          </a:p>
-          <a:p>
-            <a:pPr>
-              <a:spcAft>
-                <a:spcPts val="600"/>
-              </a:spcAft>
-            </a:pPr>
-            <a:r>
-              <a:rPr sz="1800" b="0">
-                <a:solidFill>
-                  <a:srgbClr val="2C3A3F"/>
-                </a:solidFill>
-                <a:latin typeface="Calibri"/>
-              </a:rPr>
-              <a:t>Сводный реестр рисков — один лист для продаж (в пульте).</a:t>
-            </a:r>
-          </a:p>
-        </p:txBody>
-      </p:sp>
-      <p:sp>
-        <p:nvSpPr>
-          <p:cNvPr id="6" name="TextBox 5"/>
+                <a:spcPts val="1200"/>
+              </a:spcAft>
+            </a:pPr>
+            <a:r>
+              <a:rPr sz="2000" b="1">
+                <a:solidFill>
+                  <a:srgbClr val="2F5D50"/>
+                </a:solidFill>
+                <a:latin typeface="Calibri"/>
+              </a:rPr>
+              <a:t>Возражения</a:t>
+            </a:r>
+          </a:p>
+          <a:p>
+            <a:pPr>
+              <a:spcAft>
+                <a:spcPts val="800"/>
+              </a:spcAft>
+            </a:pPr>
+            <a:r>
+              <a:rPr sz="1400" b="0">
+                <a:solidFill>
+                  <a:srgbClr val="1C1C1C"/>
+                </a:solidFill>
+                <a:latin typeface="Calibri"/>
+              </a:rPr>
+              <a:t>COSMOS обязателен → Natural в это КП не ставим</a:t>
+            </a:r>
+          </a:p>
+          <a:p>
+            <a:pPr>
+              <a:spcAft>
+                <a:spcPts val="800"/>
+              </a:spcAft>
+            </a:pPr>
+            <a:r>
+              <a:rPr sz="1400" b="0">
+                <a:solidFill>
+                  <a:srgbClr val="1C1C1C"/>
+                </a:solidFill>
+                <a:latin typeface="Calibri"/>
+              </a:rPr>
+              <a:t>«Natural по цене HL» → нет</a:t>
+            </a:r>
+          </a:p>
+          <a:p>
+            <a:pPr>
+              <a:spcAft>
+                <a:spcPts val="800"/>
+              </a:spcAft>
+            </a:pPr>
+            <a:r>
+              <a:rPr sz="1400" b="0">
+                <a:solidFill>
+                  <a:srgbClr val="1C1C1C"/>
+                </a:solidFill>
+                <a:latin typeface="Calibri"/>
+              </a:rPr>
+              <a:t>СТМ / наш лого → отдельный проект</a:t>
+            </a:r>
+          </a:p>
+          <a:p>
+            <a:pPr>
+              <a:spcAft>
+                <a:spcPts val="0"/>
+              </a:spcAft>
+            </a:pPr>
+            <a:r>
+              <a:rPr sz="1400" b="0">
+                <a:solidFill>
+                  <a:srgbClr val="1C1C1C"/>
+                </a:solidFill>
+                <a:latin typeface="Calibri"/>
+              </a:rPr>
+              <a:t>«Где произведено?» → только зафиксированный origin</a:t>
+            </a:r>
+          </a:p>
+        </p:txBody>
+      </p:sp>
+      <p:sp>
+        <p:nvSpPr>
+          <p:cNvPr id="11" name="TextBox 10"/>
           <p:cNvSpPr txBox="1"/>
           <p:nvPr/>
         </p:nvSpPr>
         <p:spPr>
           <a:xfrm>
-            <a:off x="502920" y="6446520"/>
-            <a:ext cx="11155680" cy="320040"/>
+            <a:off x="6400800" y="1234440"/>
+            <a:ext cx="4937760" cy="4663440"/>
           </a:xfrm>
           <a:prstGeom prst="rect">
             <a:avLst/>
@@ -6213,19 +8952,88 @@
           <a:noFill/>
         </p:spPr>
         <p:txBody>
-          <a:bodyPr wrap="none">
+          <a:bodyPr wrap="square">
             <a:spAutoFit/>
           </a:bodyPr>
           <a:lstStyle/>
           <a:p>
-            <a:r>
-              <a:rPr sz="1100" b="0">
-                <a:solidFill>
-                  <a:srgbClr val="5A6A70"/>
-                </a:solidFill>
-                <a:latin typeface="Calibri"/>
-              </a:rPr>
-              <a:t>Travel+ Natural · пульт v1.10 · собес · не оферта</a:t>
+            <a:pPr>
+              <a:spcAft>
+                <a:spcPts val="1200"/>
+              </a:spcAft>
+            </a:pPr>
+            <a:r>
+              <a:rPr sz="2000" b="1">
+                <a:solidFill>
+                  <a:srgbClr val="2F5D50"/>
+                </a:solidFill>
+                <a:latin typeface="Calibri"/>
+              </a:rPr>
+              <a:t>Полевая дисциплина</a:t>
+            </a:r>
+          </a:p>
+          <a:p>
+            <a:pPr>
+              <a:spcAft>
+                <a:spcPts val="400"/>
+              </a:spcAft>
+            </a:pPr>
+            <a:r>
+              <a:rPr sz="1500" b="0">
+                <a:solidFill>
+                  <a:srgbClr val="1C1C1C"/>
+                </a:solidFill>
+                <a:latin typeface="Calibri"/>
+              </a:rPr>
+              <a:t>Реестр рисков - один лист</a:t>
+            </a:r>
+          </a:p>
+          <a:p>
+            <a:pPr>
+              <a:spcAft>
+                <a:spcPts val="1200"/>
+              </a:spcAft>
+            </a:pPr>
+            <a:r>
+              <a:rPr sz="1400" b="0">
+                <a:solidFill>
+                  <a:srgbClr val="5A5A5A"/>
+                </a:solidFill>
+                <a:latin typeface="Calibri"/>
+              </a:rPr>
+              <a:t>(14 пунктов в пульте).</a:t>
+            </a:r>
+          </a:p>
+          <a:p>
+            <a:pPr>
+              <a:spcAft>
+                <a:spcPts val="800"/>
+              </a:spcAft>
+            </a:pPr>
+            <a:r>
+              <a:rPr sz="1500" b="0">
+                <a:solidFill>
+                  <a:srgbClr val="1C1C1C"/>
+                </a:solidFill>
+                <a:latin typeface="Calibri"/>
+              </a:rPr>
+              <a:t>Сегмент не размываем.</a:t>
+            </a:r>
+          </a:p>
+          <a:p>
+            <a:pPr>
+              <a:spcAft>
+                <a:spcPts val="0"/>
+              </a:spcAft>
+            </a:pPr>
+            <a:r>
+              <a:rPr sz="1500" b="1">
+                <a:solidFill>
+                  <a:srgbClr val="1C1C1C"/>
+                </a:solidFill>
+                <a:latin typeface="Calibri"/>
+              </a:rPr>
+              <a:t>Hotel Line не съедаем скидкой Natural.</a:t>
             </a:r>
           </a:p>
         </p:txBody>
@@ -6263,7 +9071,7 @@
             <a:avLst/>
           </a:prstGeom>
           <a:solidFill>
-            <a:srgbClr val="F7F9FB"/>
+            <a:srgbClr val="F7F5F2"/>
           </a:solidFill>
           <a:ln>
             <a:noFill/>
@@ -6306,7 +9114,7 @@
             <a:avLst/>
           </a:prstGeom>
           <a:solidFill>
-            <a:srgbClr val="1F6B5C"/>
+            <a:srgbClr val="2F5D50"/>
           </a:solidFill>
           <a:ln>
             <a:noFill/>
@@ -6342,8 +9150,8 @@
         </p:nvSpPr>
         <p:spPr>
           <a:xfrm>
-            <a:off x="502920" y="320040"/>
-            <a:ext cx="11155680" cy="640080"/>
+            <a:off x="502920" y="256032"/>
+            <a:ext cx="11155680" cy="502920"/>
           </a:xfrm>
           <a:prstGeom prst="rect">
             <a:avLst/>
@@ -6359,7 +9167,7 @@
             <a:r>
               <a:rPr sz="2800" b="1">
                 <a:solidFill>
-                  <a:srgbClr val="1A2A2E"/>
+                  <a:srgbClr val="2F5D50"/>
                 </a:solidFill>
                 <a:latin typeface="Calibri"/>
               </a:rPr>
@@ -6370,14 +9178,220 @@
       </p:sp>
       <p:sp>
         <p:nvSpPr>
-          <p:cNvPr id="5" name="TextBox 4"/>
+          <p:cNvPr id="5" name="Rectangle 4"/>
+          <p:cNvSpPr/>
+          <p:nvPr/>
+        </p:nvSpPr>
+        <p:spPr>
+          <a:xfrm>
+            <a:off x="502920" y="777240"/>
+            <a:ext cx="11155680" cy="22860"/>
+          </a:xfrm>
+          <a:prstGeom prst="rect">
+            <a:avLst/>
+          </a:prstGeom>
+          <a:solidFill>
+            <a:srgbClr val="D8D2C8"/>
+          </a:solidFill>
+          <a:ln>
+            <a:noFill/>
+          </a:ln>
+        </p:spPr>
+        <p:style>
+          <a:lnRef idx="1">
+            <a:schemeClr val="accent1"/>
+          </a:lnRef>
+          <a:fillRef idx="3">
+            <a:schemeClr val="accent1"/>
+          </a:fillRef>
+          <a:effectRef idx="2">
+            <a:schemeClr val="accent1"/>
+          </a:effectRef>
+          <a:fontRef idx="minor">
+            <a:schemeClr val="lt1"/>
+          </a:fontRef>
+        </p:style>
+        <p:txBody>
+          <a:bodyPr rtlCol="0" anchor="ctr"/>
+          <a:lstStyle/>
+          <a:p>
+            <a:pPr algn="ctr"/>
+          </a:p>
+        </p:txBody>
+      </p:sp>
+      <p:sp>
+        <p:nvSpPr>
+          <p:cNvPr id="6" name="TextBox 5"/>
           <p:cNvSpPr txBox="1"/>
           <p:nvPr/>
         </p:nvSpPr>
         <p:spPr>
           <a:xfrm>
-            <a:off x="502920" y="1097280"/>
-            <a:ext cx="11155680" cy="5303520"/>
+            <a:off x="502920" y="6446520"/>
+            <a:ext cx="9601200" cy="320040"/>
+          </a:xfrm>
+          <a:prstGeom prst="rect">
+            <a:avLst/>
+          </a:prstGeom>
+          <a:noFill/>
+        </p:spPr>
+        <p:txBody>
+          <a:bodyPr wrap="none">
+            <a:spAutoFit/>
+          </a:bodyPr>
+          <a:lstStyle/>
+          <a:p>
+            <a:r>
+              <a:rPr sz="1100" b="0">
+                <a:solidFill>
+                  <a:srgbClr val="5A5A5A"/>
+                </a:solidFill>
+                <a:latin typeface="Calibri"/>
+              </a:rPr>
+              <a:t>Travel+ Natural · пульт v1.14 · собес · не оферта</a:t>
+            </a:r>
+          </a:p>
+        </p:txBody>
+      </p:sp>
+      <p:sp>
+        <p:nvSpPr>
+          <p:cNvPr id="7" name="TextBox 6"/>
+          <p:cNvSpPr txBox="1"/>
+          <p:nvPr/>
+        </p:nvSpPr>
+        <p:spPr>
+          <a:xfrm>
+            <a:off x="10607040" y="6446520"/>
+            <a:ext cx="1188720" cy="320040"/>
+          </a:xfrm>
+          <a:prstGeom prst="rect">
+            <a:avLst/>
+          </a:prstGeom>
+          <a:noFill/>
+        </p:spPr>
+        <p:txBody>
+          <a:bodyPr wrap="none">
+            <a:spAutoFit/>
+          </a:bodyPr>
+          <a:lstStyle/>
+          <a:p>
+            <a:pPr algn="r"/>
+            <a:r>
+              <a:rPr sz="1100" b="0">
+                <a:solidFill>
+                  <a:srgbClr val="5A5A5A"/>
+                </a:solidFill>
+                <a:latin typeface="Calibri"/>
+              </a:rPr>
+              <a:t>9/12</a:t>
+            </a:r>
+          </a:p>
+        </p:txBody>
+      </p:sp>
+      <p:sp>
+        <p:nvSpPr>
+          <p:cNvPr id="8" name="Rounded Rectangle 7"/>
+          <p:cNvSpPr/>
+          <p:nvPr/>
+        </p:nvSpPr>
+        <p:spPr>
+          <a:xfrm>
+            <a:off x="502920" y="1051560"/>
+            <a:ext cx="5349240" cy="5029200"/>
+          </a:xfrm>
+          <a:prstGeom prst="roundRect">
+            <a:avLst>
+              <a:gd name="adj" fmla="val 8000"/>
+            </a:avLst>
+          </a:prstGeom>
+          <a:solidFill>
+            <a:srgbClr val="FFFFFF"/>
+          </a:solidFill>
+          <a:ln w="12700">
+            <a:solidFill>
+              <a:srgbClr val="D8D2C8"/>
+            </a:solidFill>
+          </a:ln>
+        </p:spPr>
+        <p:style>
+          <a:lnRef idx="1">
+            <a:schemeClr val="accent1"/>
+          </a:lnRef>
+          <a:fillRef idx="3">
+            <a:schemeClr val="accent1"/>
+          </a:fillRef>
+          <a:effectRef idx="2">
+            <a:schemeClr val="accent1"/>
+          </a:effectRef>
+          <a:fontRef idx="minor">
+            <a:schemeClr val="lt1"/>
+          </a:fontRef>
+        </p:style>
+        <p:txBody>
+          <a:bodyPr rtlCol="0" anchor="ctr"/>
+          <a:lstStyle/>
+          <a:p>
+            <a:pPr algn="ctr"/>
+          </a:p>
+        </p:txBody>
+      </p:sp>
+      <p:sp>
+        <p:nvSpPr>
+          <p:cNvPr id="9" name="Rounded Rectangle 8"/>
+          <p:cNvSpPr/>
+          <p:nvPr/>
+        </p:nvSpPr>
+        <p:spPr>
+          <a:xfrm>
+            <a:off x="6126480" y="1051560"/>
+            <a:ext cx="5440680" cy="5029200"/>
+          </a:xfrm>
+          <a:prstGeom prst="roundRect">
+            <a:avLst>
+              <a:gd name="adj" fmla="val 8000"/>
+            </a:avLst>
+          </a:prstGeom>
+          <a:solidFill>
+            <a:srgbClr val="FFFFFF"/>
+          </a:solidFill>
+          <a:ln w="12700">
+            <a:solidFill>
+              <a:srgbClr val="D8D2C8"/>
+            </a:solidFill>
+          </a:ln>
+        </p:spPr>
+        <p:style>
+          <a:lnRef idx="1">
+            <a:schemeClr val="accent1"/>
+          </a:lnRef>
+          <a:fillRef idx="3">
+            <a:schemeClr val="accent1"/>
+          </a:fillRef>
+          <a:effectRef idx="2">
+            <a:schemeClr val="accent1"/>
+          </a:effectRef>
+          <a:fontRef idx="minor">
+            <a:schemeClr val="lt1"/>
+          </a:fontRef>
+        </p:style>
+        <p:txBody>
+          <a:bodyPr rtlCol="0" anchor="ctr"/>
+          <a:lstStyle/>
+          <a:p>
+            <a:pPr algn="ctr"/>
+          </a:p>
+        </p:txBody>
+      </p:sp>
+      <p:sp>
+        <p:nvSpPr>
+          <p:cNvPr id="10" name="TextBox 9"/>
+          <p:cNvSpPr txBox="1"/>
+          <p:nvPr/>
+        </p:nvSpPr>
+        <p:spPr>
+          <a:xfrm>
+            <a:off x="777240" y="1234440"/>
+            <a:ext cx="4846320" cy="4663440"/>
           </a:xfrm>
           <a:prstGeom prst="rect">
             <a:avLst/>
@@ -6392,143 +9406,111 @@
           <a:p>
             <a:pPr>
               <a:spcAft>
-                <a:spcPts val="600"/>
-              </a:spcAft>
-            </a:pPr>
-            <a:r>
-              <a:rPr sz="1700" b="0">
-                <a:solidFill>
-                  <a:srgbClr val="2C3A3F"/>
-                </a:solidFill>
-                <a:latin typeface="Calibri"/>
-              </a:rPr>
-              <a:t>Успех: 3 клиента · повтор ≥2/3 · мягкость и ощущение натуральности ≥70% · HL цел</a:t>
-            </a:r>
-          </a:p>
-          <a:p>
-            <a:pPr>
-              <a:spcAft>
-                <a:spcPts val="600"/>
-              </a:spcAft>
-            </a:pPr>
-            <a:r>
-              <a:rPr sz="1700" b="0">
-                <a:solidFill>
-                  <a:srgbClr val="2C3A3F"/>
-                </a:solidFill>
-                <a:latin typeface="Calibri"/>
-              </a:rPr>
-              <a:t/>
-            </a:r>
-          </a:p>
-          <a:p>
-            <a:pPr>
-              <a:spcAft>
-                <a:spcPts val="600"/>
-              </a:spcAft>
-            </a:pPr>
-            <a:r>
-              <a:rPr sz="1700" b="0">
-                <a:solidFill>
-                  <a:srgbClr val="2C3A3F"/>
-                </a:solidFill>
-                <a:latin typeface="Calibri"/>
-              </a:rPr>
-              <a:t>Провал: повтор &lt;2/3 или метрики &lt;60% → стоп масштаб</a:t>
-            </a:r>
-          </a:p>
-          <a:p>
-            <a:pPr>
-              <a:spcAft>
-                <a:spcPts val="600"/>
-              </a:spcAft>
-            </a:pPr>
-            <a:r>
-              <a:rPr sz="1700" b="0">
-                <a:solidFill>
-                  <a:srgbClr val="2C3A3F"/>
-                </a:solidFill>
-                <a:latin typeface="Calibri"/>
-              </a:rPr>
-              <a:t>Возврат: диагноз за 2 недели → сенсорика / бумаги / этикетка / коммерция</a:t>
-            </a:r>
-          </a:p>
-          <a:p>
-            <a:pPr>
-              <a:spcAft>
-                <a:spcPts val="600"/>
-              </a:spcAft>
-            </a:pPr>
-            <a:r>
-              <a:rPr sz="1700" b="0">
-                <a:solidFill>
-                  <a:srgbClr val="2C3A3F"/>
-                </a:solidFill>
-                <a:latin typeface="Calibri"/>
-              </a:rPr>
-              <a:t/>
-            </a:r>
-          </a:p>
-          <a:p>
-            <a:pPr>
-              <a:spcAft>
-                <a:spcPts val="600"/>
-              </a:spcAft>
-            </a:pPr>
-            <a:r>
-              <a:rPr sz="1700" b="0">
-                <a:solidFill>
-                  <a:srgbClr val="2C3A3F"/>
-                </a:solidFill>
-                <a:latin typeface="Calibri"/>
-              </a:rPr>
-              <a:t>Второй круг снова провален → линейку закрываем (бренд + Human)</a:t>
-            </a:r>
-          </a:p>
-          <a:p>
-            <a:pPr>
-              <a:spcAft>
-                <a:spcPts val="600"/>
-              </a:spcAft>
-            </a:pPr>
-            <a:r>
-              <a:rPr sz="1700" b="0">
-                <a:solidFill>
-                  <a:srgbClr val="2C3A3F"/>
-                </a:solidFill>
-                <a:latin typeface="Calibri"/>
-              </a:rPr>
-              <a:t/>
-            </a:r>
-          </a:p>
-          <a:p>
-            <a:pPr>
-              <a:spcAft>
-                <a:spcPts val="600"/>
-              </a:spcAft>
-            </a:pPr>
-            <a:r>
-              <a:rPr sz="1700" b="0">
-                <a:solidFill>
-                  <a:srgbClr val="2C3A3F"/>
-                </a:solidFill>
-                <a:latin typeface="Calibri"/>
-              </a:rPr>
-              <a:t>Все цифры сценария — учебный пример, не отчёт завода.</a:t>
-            </a:r>
-          </a:p>
-        </p:txBody>
-      </p:sp>
-      <p:sp>
-        <p:nvSpPr>
-          <p:cNvPr id="6" name="TextBox 5"/>
+                <a:spcPts val="1200"/>
+              </a:spcAft>
+            </a:pPr>
+            <a:r>
+              <a:rPr sz="1800" b="1">
+                <a:solidFill>
+                  <a:srgbClr val="2F5D50"/>
+                </a:solidFill>
+                <a:latin typeface="Calibri"/>
+              </a:rPr>
+              <a:t>Успех (учебный порог)</a:t>
+            </a:r>
+          </a:p>
+          <a:p>
+            <a:pPr>
+              <a:spcAft>
+                <a:spcPts val="800"/>
+              </a:spcAft>
+            </a:pPr>
+            <a:r>
+              <a:rPr sz="1600" b="0">
+                <a:solidFill>
+                  <a:srgbClr val="1C1C1C"/>
+                </a:solidFill>
+                <a:latin typeface="Calibri"/>
+              </a:rPr>
+              <a:t>3 клиента · повтор ≥2/3</a:t>
+            </a:r>
+          </a:p>
+          <a:p>
+            <a:pPr>
+              <a:spcAft>
+                <a:spcPts val="800"/>
+              </a:spcAft>
+            </a:pPr>
+            <a:r>
+              <a:rPr sz="1500" b="0">
+                <a:solidFill>
+                  <a:srgbClr val="1C1C1C"/>
+                </a:solidFill>
+                <a:latin typeface="Calibri"/>
+              </a:rPr>
+              <a:t>мягкость и ощущение натуральности ≥70%</a:t>
+            </a:r>
+          </a:p>
+          <a:p>
+            <a:pPr>
+              <a:spcAft>
+                <a:spcPts val="1600"/>
+              </a:spcAft>
+            </a:pPr>
+            <a:r>
+              <a:rPr sz="1600" b="0">
+                <a:solidFill>
+                  <a:srgbClr val="1C1C1C"/>
+                </a:solidFill>
+                <a:latin typeface="Calibri"/>
+              </a:rPr>
+              <a:t>Hotel Line цел</a:t>
+            </a:r>
+          </a:p>
+          <a:p>
+            <a:pPr>
+              <a:spcAft>
+                <a:spcPts val="200"/>
+              </a:spcAft>
+            </a:pPr>
+            <a:r>
+              <a:rPr sz="1300" b="0">
+                <a:solidFill>
+                  <a:srgbClr val="5A5A5A"/>
+                </a:solidFill>
+                <a:latin typeface="Calibri"/>
+              </a:rPr>
+              <a:t>Цифры сценария - учебный пример,</a:t>
+            </a:r>
+          </a:p>
+          <a:p>
+            <a:pPr>
+              <a:spcAft>
+                <a:spcPts val="0"/>
+              </a:spcAft>
+            </a:pPr>
+            <a:r>
+              <a:rPr sz="1300" b="0">
+                <a:solidFill>
+                  <a:srgbClr val="5A5A5A"/>
+                </a:solidFill>
+                <a:latin typeface="Calibri"/>
+              </a:rPr>
+              <a:t>не отчёт завода.</a:t>
+            </a:r>
+          </a:p>
+        </p:txBody>
+      </p:sp>
+      <p:sp>
+        <p:nvSpPr>
+          <p:cNvPr id="11" name="TextBox 10"/>
           <p:cNvSpPr txBox="1"/>
           <p:nvPr/>
         </p:nvSpPr>
         <p:spPr>
           <a:xfrm>
-            <a:off x="502920" y="6446520"/>
-            <a:ext cx="11155680" cy="320040"/>
+            <a:off x="6400800" y="1234440"/>
+            <a:ext cx="4937760" cy="4663440"/>
           </a:xfrm>
           <a:prstGeom prst="rect">
             <a:avLst/>
@@ -6536,19 +9518,104 @@
           <a:noFill/>
         </p:spPr>
         <p:txBody>
-          <a:bodyPr wrap="none">
+          <a:bodyPr wrap="square">
             <a:spAutoFit/>
           </a:bodyPr>
           <a:lstStyle/>
           <a:p>
-            <a:r>
-              <a:rPr sz="1100" b="0">
-                <a:solidFill>
-                  <a:srgbClr val="5A6A70"/>
-                </a:solidFill>
-                <a:latin typeface="Calibri"/>
-              </a:rPr>
-              <a:t>Travel+ Natural · пульт v1.10 · собес · не оферта</a:t>
+            <a:pPr>
+              <a:spcAft>
+                <a:spcPts val="1200"/>
+              </a:spcAft>
+            </a:pPr>
+            <a:r>
+              <a:rPr sz="1800" b="1">
+                <a:solidFill>
+                  <a:srgbClr val="2F5D50"/>
+                </a:solidFill>
+                <a:latin typeface="Calibri"/>
+              </a:rPr>
+              <a:t>Провал и выход</a:t>
+            </a:r>
+          </a:p>
+          <a:p>
+            <a:pPr>
+              <a:spcAft>
+                <a:spcPts val="400"/>
+              </a:spcAft>
+            </a:pPr>
+            <a:r>
+              <a:rPr sz="1500" b="0">
+                <a:solidFill>
+                  <a:srgbClr val="1C1C1C"/>
+                </a:solidFill>
+                <a:latin typeface="Calibri"/>
+              </a:rPr>
+              <a:t>Повтор &lt;2/3 или метрики &lt;60%</a:t>
+            </a:r>
+          </a:p>
+          <a:p>
+            <a:pPr>
+              <a:spcAft>
+                <a:spcPts val="1200"/>
+              </a:spcAft>
+            </a:pPr>
+            <a:r>
+              <a:rPr sz="1500" b="1">
+                <a:solidFill>
+                  <a:srgbClr val="1C1C1C"/>
+                </a:solidFill>
+                <a:latin typeface="Calibri"/>
+              </a:rPr>
+              <a:t>→ стоп масштаб</a:t>
+            </a:r>
+          </a:p>
+          <a:p>
+            <a:pPr>
+              <a:spcAft>
+                <a:spcPts val="800"/>
+              </a:spcAft>
+            </a:pPr>
+            <a:r>
+              <a:rPr sz="1500" b="0">
+                <a:solidFill>
+                  <a:srgbClr val="1C1C1C"/>
+                </a:solidFill>
+                <a:latin typeface="Calibri"/>
+              </a:rPr>
+              <a:t>Диагноз за 2 недели</a:t>
+            </a:r>
+          </a:p>
+          <a:p>
+            <a:pPr>
+              <a:spcAft>
+                <a:spcPts val="400"/>
+              </a:spcAft>
+            </a:pPr>
+            <a:r>
+              <a:rPr sz="1500" b="0">
+                <a:solidFill>
+                  <a:srgbClr val="1C1C1C"/>
+                </a:solidFill>
+                <a:latin typeface="Calibri"/>
+              </a:rPr>
+              <a:t>Второй круг снова провален</a:t>
+            </a:r>
+          </a:p>
+          <a:p>
+            <a:pPr>
+              <a:spcAft>
+                <a:spcPts val="0"/>
+              </a:spcAft>
+            </a:pPr>
+            <a:r>
+              <a:rPr sz="1600" b="1">
+                <a:solidFill>
+                  <a:srgbClr val="1C1C1C"/>
+                </a:solidFill>
+                <a:latin typeface="Calibri"/>
+              </a:rPr>
+              <a:t>→ линейку закрываем</a:t>
             </a:r>
           </a:p>
         </p:txBody>

--- a/АК/presentation-travelplus-interview.pptx
+++ b/АК/presentation-travelplus-interview.pptx
@@ -3114,7 +3114,7 @@
             <a:avLst/>
           </a:prstGeom>
           <a:solidFill>
-            <a:srgbClr val="F7F5F2"/>
+            <a:srgbClr val="F5F3EF"/>
           </a:solidFill>
           <a:ln>
             <a:noFill/>
@@ -3151,13 +3151,13 @@
         <p:spPr>
           <a:xfrm>
             <a:off x="0" y="0"/>
-            <a:ext cx="109728" cy="6858000"/>
+            <a:ext cx="91440" cy="6858000"/>
           </a:xfrm>
           <a:prstGeom prst="rect">
             <a:avLst/>
           </a:prstGeom>
           <a:solidFill>
-            <a:srgbClr val="2F5D50"/>
+            <a:srgbClr val="2A554A"/>
           </a:solidFill>
           <a:ln>
             <a:noFill/>
@@ -3194,13 +3194,13 @@
         <p:spPr>
           <a:xfrm>
             <a:off x="0" y="0"/>
-            <a:ext cx="4754880" cy="6858000"/>
+            <a:ext cx="4663440" cy="6858000"/>
           </a:xfrm>
           <a:prstGeom prst="rect">
             <a:avLst/>
           </a:prstGeom>
           <a:solidFill>
-            <a:srgbClr val="2F5D50"/>
+            <a:srgbClr val="2A554A"/>
           </a:solidFill>
           <a:ln>
             <a:noFill/>
@@ -3236,8 +3236,8 @@
         </p:nvSpPr>
         <p:spPr>
           <a:xfrm>
-            <a:off x="502920" y="1828800"/>
-            <a:ext cx="3931920" cy="3200400"/>
+            <a:off x="502920" y="1965960"/>
+            <a:ext cx="3840480" cy="2926080"/>
           </a:xfrm>
           <a:prstGeom prst="rect">
             <a:avLst/>
@@ -3251,48 +3251,69 @@
           <a:lstStyle/>
           <a:p>
             <a:pPr>
-              <a:spcAft>
-                <a:spcPts val="1200"/>
-              </a:spcAft>
-            </a:pPr>
-            <a:r>
-              <a:rPr sz="3200" b="1">
+              <a:lnSpc>
+                <a:spcPct val="115000"/>
+              </a:lnSpc>
+              <a:spcBef>
+                <a:spcPts val="0"/>
+              </a:spcBef>
+              <a:spcAft>
+                <a:spcPts val="1400"/>
+              </a:spcAft>
+            </a:pPr>
+            <a:r>
+              <a:rPr sz="3000" b="1">
                 <a:solidFill>
                   <a:srgbClr val="FFFFFF"/>
                 </a:solidFill>
                 <a:latin typeface="Calibri"/>
+                <a:rFonts ascii="Calibri" hAnsi="Calibri" cs="Calibri"/>
               </a:rPr>
               <a:t>Павел Биджиев</a:t>
             </a:r>
           </a:p>
           <a:p>
             <a:pPr>
+              <a:lnSpc>
+                <a:spcPct val="115000"/>
+              </a:lnSpc>
+              <a:spcBef>
+                <a:spcPts val="0"/>
+              </a:spcBef>
               <a:spcAft>
                 <a:spcPts val="800"/>
               </a:spcAft>
             </a:pPr>
             <a:r>
-              <a:rPr sz="1800" b="0">
+              <a:rPr sz="1700" b="0">
                 <a:solidFill>
                   <a:srgbClr val="FFFFFF"/>
                 </a:solidFill>
                 <a:latin typeface="Calibri"/>
+                <a:rFonts ascii="Calibri" hAnsi="Calibri" cs="Calibri"/>
               </a:rPr>
               <a:t>Продакт / бренд-логика</a:t>
             </a:r>
           </a:p>
           <a:p>
             <a:pPr>
-              <a:spcAft>
-                <a:spcPts val="0"/>
-              </a:spcAft>
-            </a:pPr>
-            <a:r>
-              <a:rPr sz="1500" b="0">
-                <a:solidFill>
-                  <a:srgbClr val="D0E4DC"/>
-                </a:solidFill>
-                <a:latin typeface="Calibri"/>
+              <a:lnSpc>
+                <a:spcPct val="115000"/>
+              </a:lnSpc>
+              <a:spcBef>
+                <a:spcPts val="0"/>
+              </a:spcBef>
+              <a:spcAft>
+                <a:spcPts val="0"/>
+              </a:spcAft>
+            </a:pPr>
+            <a:r>
+              <a:rPr sz="1400" b="0">
+                <a:solidFill>
+                  <a:srgbClr val="C8DDD6"/>
+                </a:solidFill>
+                <a:latin typeface="Calibri"/>
+                <a:rFonts ascii="Calibri" hAnsi="Calibri" cs="Calibri"/>
               </a:rPr>
               <a:t>Физические товары · HoReCa amenities</a:t>
             </a:r>
@@ -3307,8 +3328,8 @@
         </p:nvSpPr>
         <p:spPr>
           <a:xfrm>
-            <a:off x="5303520" y="1828800"/>
-            <a:ext cx="6217920" cy="3474720"/>
+            <a:off x="5212080" y="1828800"/>
+            <a:ext cx="6309360" cy="3474720"/>
           </a:xfrm>
           <a:prstGeom prst="rect">
             <a:avLst/>
@@ -3322,70 +3343,104 @@
           <a:lstStyle/>
           <a:p>
             <a:pPr>
-              <a:spcAft>
-                <a:spcPts val="1000"/>
-              </a:spcAft>
-            </a:pPr>
-            <a:r>
-              <a:rPr sz="3400" b="1">
-                <a:solidFill>
-                  <a:srgbClr val="2F5D50"/>
-                </a:solidFill>
-                <a:latin typeface="Calibri"/>
+              <a:lnSpc>
+                <a:spcPct val="115000"/>
+              </a:lnSpc>
+              <a:spcBef>
+                <a:spcPts val="0"/>
+              </a:spcBef>
+              <a:spcAft>
+                <a:spcPts val="1200"/>
+              </a:spcAft>
+            </a:pPr>
+            <a:r>
+              <a:rPr sz="3200" b="1">
+                <a:solidFill>
+                  <a:srgbClr val="2A554A"/>
+                </a:solidFill>
+                <a:latin typeface="Calibri"/>
+                <a:rFonts ascii="Calibri" hAnsi="Calibri" cs="Calibri"/>
               </a:rPr>
               <a:t>Travel+ Natural</a:t>
             </a:r>
           </a:p>
           <a:p>
             <a:pPr>
+              <a:lnSpc>
+                <a:spcPct val="115000"/>
+              </a:lnSpc>
+              <a:spcBef>
+                <a:spcPts val="0"/>
+              </a:spcBef>
               <a:spcAft>
                 <a:spcPts val="400"/>
               </a:spcAft>
             </a:pPr>
             <a:r>
-              <a:rPr sz="2000" b="0">
-                <a:solidFill>
-                  <a:srgbClr val="1C1C1C"/>
-                </a:solidFill>
-                <a:latin typeface="Calibri"/>
+              <a:rPr sz="1900" b="0">
+                <a:solidFill>
+                  <a:srgbClr val="1A1A1A"/>
+                </a:solidFill>
+                <a:latin typeface="Calibri"/>
+                <a:rFonts ascii="Calibri" hAnsi="Calibri" cs="Calibri"/>
               </a:rPr>
               <a:t>Своя натуральная линейка:</a:t>
             </a:r>
           </a:p>
           <a:p>
             <a:pPr>
+              <a:lnSpc>
+                <a:spcPct val="115000"/>
+              </a:lnSpc>
+              <a:spcBef>
+                <a:spcPts val="0"/>
+              </a:spcBef>
               <a:spcAft>
                 <a:spcPts val="1800"/>
               </a:spcAft>
             </a:pPr>
             <a:r>
-              <a:rPr sz="2000" b="0">
-                <a:solidFill>
-                  <a:srgbClr val="1C1C1C"/>
-                </a:solidFill>
-                <a:latin typeface="Calibri"/>
+              <a:rPr sz="1900" b="0">
+                <a:solidFill>
+                  <a:srgbClr val="1A1A1A"/>
+                </a:solidFill>
+                <a:latin typeface="Calibri"/>
+                <a:rFonts ascii="Calibri" hAnsi="Calibri" cs="Calibri"/>
               </a:rPr>
               <a:t>от рамки до пилота</a:t>
             </a:r>
           </a:p>
           <a:p>
             <a:pPr>
-              <a:spcAft>
-                <a:spcPts val="400"/>
+              <a:lnSpc>
+                <a:spcPct val="115000"/>
+              </a:lnSpc>
+              <a:spcBef>
+                <a:spcPts val="0"/>
+              </a:spcBef>
+              <a:spcAft>
+                <a:spcPts val="600"/>
               </a:spcAft>
             </a:pPr>
             <a:r>
               <a:rPr sz="1400" b="0">
                 <a:solidFill>
-                  <a:srgbClr val="5A5A5A"/>
-                </a:solidFill>
-                <a:latin typeface="Calibri"/>
+                  <a:srgbClr val="5C5C5C"/>
+                </a:solidFill>
+                <a:latin typeface="Calibri"/>
+                <a:rFonts ascii="Calibri" hAnsi="Calibri" cs="Calibri"/>
               </a:rPr>
               <a:t>Подготовка · АК-Сервис / Travel+ · Кириши</a:t>
             </a:r>
           </a:p>
           <a:p>
             <a:pPr>
+              <a:lnSpc>
+                <a:spcPct val="115000"/>
+              </a:lnSpc>
+              <a:spcBef>
+                <a:spcPts val="0"/>
+              </a:spcBef>
               <a:spcAft>
                 <a:spcPts val="0"/>
               </a:spcAft>
@@ -3393,50 +3448,12 @@
             <a:r>
               <a:rPr sz="1400" b="0">
                 <a:solidFill>
-                  <a:srgbClr val="5A5A5A"/>
-                </a:solidFill>
-                <a:latin typeface="Calibri"/>
+                  <a:srgbClr val="5C5C5C"/>
+                </a:solidFill>
+                <a:latin typeface="Calibri"/>
+                <a:rFonts ascii="Calibri" hAnsi="Calibri" cs="Calibri"/>
               </a:rPr>
               <a:t>Пульт бренда v1.14 · не оферта</a:t>
-            </a:r>
-          </a:p>
-        </p:txBody>
-      </p:sp>
-      <p:sp>
-        <p:nvSpPr>
-          <p:cNvPr id="7" name="TextBox 6"/>
-          <p:cNvSpPr txBox="1"/>
-          <p:nvPr/>
-        </p:nvSpPr>
-        <p:spPr>
-          <a:xfrm>
-            <a:off x="5303520" y="6035040"/>
-            <a:ext cx="6217920" cy="365760"/>
-          </a:xfrm>
-          <a:prstGeom prst="rect">
-            <a:avLst/>
-          </a:prstGeom>
-          <a:noFill/>
-        </p:spPr>
-        <p:txBody>
-          <a:bodyPr wrap="square">
-            <a:spAutoFit/>
-          </a:bodyPr>
-          <a:lstStyle/>
-          <a:p>
-            <a:pPr>
-              <a:spcAft>
-                <a:spcPts val="600"/>
-              </a:spcAft>
-            </a:pPr>
-            <a:r>
-              <a:rPr sz="1200" b="0">
-                <a:solidFill>
-                  <a:srgbClr val="5A5A5A"/>
-                </a:solidFill>
-                <a:latin typeface="Calibri"/>
-              </a:rPr>
-              <a:t>Горизонтальный формат 16:9 · 12 слайдов</a:t>
             </a:r>
           </a:p>
         </p:txBody>
@@ -3474,7 +3491,7 @@
             <a:avLst/>
           </a:prstGeom>
           <a:solidFill>
-            <a:srgbClr val="F7F5F2"/>
+            <a:srgbClr val="F5F3EF"/>
           </a:solidFill>
           <a:ln>
             <a:noFill/>
@@ -3511,13 +3528,13 @@
         <p:spPr>
           <a:xfrm>
             <a:off x="0" y="0"/>
-            <a:ext cx="109728" cy="6858000"/>
+            <a:ext cx="91440" cy="6858000"/>
           </a:xfrm>
           <a:prstGeom prst="rect">
             <a:avLst/>
           </a:prstGeom>
           <a:solidFill>
-            <a:srgbClr val="2F5D50"/>
+            <a:srgbClr val="2A554A"/>
           </a:solidFill>
           <a:ln>
             <a:noFill/>
@@ -3553,8 +3570,8 @@
         </p:nvSpPr>
         <p:spPr>
           <a:xfrm>
-            <a:off x="502920" y="256032"/>
-            <a:ext cx="11155680" cy="502920"/>
+            <a:off x="457200" y="256032"/>
+            <a:ext cx="11247120" cy="502920"/>
           </a:xfrm>
           <a:prstGeom prst="rect">
             <a:avLst/>
@@ -3568,11 +3585,12 @@
           <a:lstStyle/>
           <a:p>
             <a:r>
-              <a:rPr sz="2800" b="1">
-                <a:solidFill>
-                  <a:srgbClr val="2F5D50"/>
-                </a:solidFill>
-                <a:latin typeface="Calibri"/>
+              <a:rPr sz="2600" b="1">
+                <a:solidFill>
+                  <a:srgbClr val="2A554A"/>
+                </a:solidFill>
+                <a:latin typeface="Calibri"/>
+                <a:rFonts ascii="Calibri" hAnsi="Calibri" cs="Calibri"/>
               </a:rPr>
               <a:t>Поставки и экономика (Китай)</a:t>
             </a:r>
@@ -3587,14 +3605,14 @@
         </p:nvSpPr>
         <p:spPr>
           <a:xfrm>
-            <a:off x="502920" y="777240"/>
-            <a:ext cx="11155680" cy="22860"/>
+            <a:off x="457200" y="804672"/>
+            <a:ext cx="2011680" cy="36576"/>
           </a:xfrm>
           <a:prstGeom prst="rect">
             <a:avLst/>
           </a:prstGeom>
           <a:solidFill>
-            <a:srgbClr val="D8D2C8"/>
+            <a:srgbClr val="2A554A"/>
           </a:solidFill>
           <a:ln>
             <a:noFill/>
@@ -3624,13 +3642,56 @@
       </p:sp>
       <p:sp>
         <p:nvSpPr>
-          <p:cNvPr id="6" name="TextBox 5"/>
+          <p:cNvPr id="6" name="Rectangle 5"/>
+          <p:cNvSpPr/>
+          <p:nvPr/>
+        </p:nvSpPr>
+        <p:spPr>
+          <a:xfrm>
+            <a:off x="457200" y="6263640"/>
+            <a:ext cx="11277295" cy="13716"/>
+          </a:xfrm>
+          <a:prstGeom prst="rect">
+            <a:avLst/>
+          </a:prstGeom>
+          <a:solidFill>
+            <a:srgbClr val="D4CEC4"/>
+          </a:solidFill>
+          <a:ln>
+            <a:noFill/>
+          </a:ln>
+        </p:spPr>
+        <p:style>
+          <a:lnRef idx="1">
+            <a:schemeClr val="accent1"/>
+          </a:lnRef>
+          <a:fillRef idx="3">
+            <a:schemeClr val="accent1"/>
+          </a:fillRef>
+          <a:effectRef idx="2">
+            <a:schemeClr val="accent1"/>
+          </a:effectRef>
+          <a:fontRef idx="minor">
+            <a:schemeClr val="lt1"/>
+          </a:fontRef>
+        </p:style>
+        <p:txBody>
+          <a:bodyPr rtlCol="0" anchor="ctr"/>
+          <a:lstStyle/>
+          <a:p>
+            <a:pPr algn="ctr"/>
+          </a:p>
+        </p:txBody>
+      </p:sp>
+      <p:sp>
+        <p:nvSpPr>
+          <p:cNvPr id="7" name="TextBox 6"/>
           <p:cNvSpPr txBox="1"/>
           <p:nvPr/>
         </p:nvSpPr>
         <p:spPr>
           <a:xfrm>
-            <a:off x="502920" y="6446520"/>
+            <a:off x="457200" y="6355080"/>
             <a:ext cx="9601200" cy="320040"/>
           </a:xfrm>
           <a:prstGeom prst="rect">
@@ -3647,25 +3708,26 @@
             <a:r>
               <a:rPr sz="1100" b="0">
                 <a:solidFill>
-                  <a:srgbClr val="5A5A5A"/>
-                </a:solidFill>
-                <a:latin typeface="Calibri"/>
-              </a:rPr>
-              <a:t>Travel+ Natural · пульт v1.14 · собес · не оферта</a:t>
-            </a:r>
-          </a:p>
-        </p:txBody>
-      </p:sp>
-      <p:sp>
-        <p:nvSpPr>
-          <p:cNvPr id="7" name="TextBox 6"/>
+                  <a:srgbClr val="5C5C5C"/>
+                </a:solidFill>
+                <a:latin typeface="Calibri"/>
+                <a:rFonts ascii="Calibri" hAnsi="Calibri" cs="Calibri"/>
+              </a:rPr>
+              <a:t>Travel+ Natural  ·  пульт v1.14  ·  собеседование  ·  не оферта</a:t>
+            </a:r>
+          </a:p>
+        </p:txBody>
+      </p:sp>
+      <p:sp>
+        <p:nvSpPr>
+          <p:cNvPr id="8" name="TextBox 7"/>
           <p:cNvSpPr txBox="1"/>
           <p:nvPr/>
         </p:nvSpPr>
         <p:spPr>
           <a:xfrm>
-            <a:off x="10607040" y="6446520"/>
-            <a:ext cx="1188720" cy="320040"/>
+            <a:off x="10515600" y="6355080"/>
+            <a:ext cx="1280160" cy="320040"/>
           </a:xfrm>
           <a:prstGeom prst="rect">
             <a:avLst/>
@@ -3682,29 +3744,30 @@
             <a:r>
               <a:rPr sz="1100" b="0">
                 <a:solidFill>
-                  <a:srgbClr val="5A5A5A"/>
-                </a:solidFill>
-                <a:latin typeface="Calibri"/>
-              </a:rPr>
-              <a:t>10/12</a:t>
-            </a:r>
-          </a:p>
-        </p:txBody>
-      </p:sp>
-      <p:sp>
-        <p:nvSpPr>
-          <p:cNvPr id="8" name="Rounded Rectangle 7"/>
+                  <a:srgbClr val="5C5C5C"/>
+                </a:solidFill>
+                <a:latin typeface="Calibri"/>
+                <a:rFonts ascii="Calibri" hAnsi="Calibri" cs="Calibri"/>
+              </a:rPr>
+              <a:t>10 / 12</a:t>
+            </a:r>
+          </a:p>
+        </p:txBody>
+      </p:sp>
+      <p:sp>
+        <p:nvSpPr>
+          <p:cNvPr id="9" name="Rounded Rectangle 8"/>
           <p:cNvSpPr/>
           <p:nvPr/>
         </p:nvSpPr>
         <p:spPr>
           <a:xfrm>
-            <a:off x="502920" y="1051560"/>
-            <a:ext cx="5349240" cy="5029200"/>
+            <a:off x="457200" y="960120"/>
+            <a:ext cx="5510631" cy="5074920"/>
           </a:xfrm>
           <a:prstGeom prst="roundRect">
             <a:avLst>
-              <a:gd name="adj" fmla="val 8000"/>
+              <a:gd name="adj" fmla="val 6000"/>
             </a:avLst>
           </a:prstGeom>
           <a:solidFill>
@@ -3712,7 +3775,7 @@
           </a:solidFill>
           <a:ln w="12700">
             <a:solidFill>
-              <a:srgbClr val="D8D2C8"/>
+              <a:srgbClr val="D4CEC4"/>
             </a:solidFill>
           </a:ln>
         </p:spPr>
@@ -3740,18 +3803,61 @@
       </p:sp>
       <p:sp>
         <p:nvSpPr>
-          <p:cNvPr id="9" name="Rounded Rectangle 8"/>
+          <p:cNvPr id="10" name="Rectangle 9"/>
           <p:cNvSpPr/>
           <p:nvPr/>
         </p:nvSpPr>
         <p:spPr>
           <a:xfrm>
-            <a:off x="6126480" y="1051560"/>
-            <a:ext cx="5440680" cy="5029200"/>
+            <a:off x="457200" y="960120"/>
+            <a:ext cx="5510631" cy="73152"/>
+          </a:xfrm>
+          <a:prstGeom prst="rect">
+            <a:avLst/>
+          </a:prstGeom>
+          <a:solidFill>
+            <a:srgbClr val="2A554A"/>
+          </a:solidFill>
+          <a:ln>
+            <a:noFill/>
+          </a:ln>
+        </p:spPr>
+        <p:style>
+          <a:lnRef idx="1">
+            <a:schemeClr val="accent1"/>
+          </a:lnRef>
+          <a:fillRef idx="3">
+            <a:schemeClr val="accent1"/>
+          </a:fillRef>
+          <a:effectRef idx="2">
+            <a:schemeClr val="accent1"/>
+          </a:effectRef>
+          <a:fontRef idx="minor">
+            <a:schemeClr val="lt1"/>
+          </a:fontRef>
+        </p:style>
+        <p:txBody>
+          <a:bodyPr rtlCol="0" anchor="ctr"/>
+          <a:lstStyle/>
+          <a:p>
+            <a:pPr algn="ctr"/>
+          </a:p>
+        </p:txBody>
+      </p:sp>
+      <p:sp>
+        <p:nvSpPr>
+          <p:cNvPr id="11" name="Rounded Rectangle 10"/>
+          <p:cNvSpPr/>
+          <p:nvPr/>
+        </p:nvSpPr>
+        <p:spPr>
+          <a:xfrm>
+            <a:off x="6223863" y="960120"/>
+            <a:ext cx="5510631" cy="5074920"/>
           </a:xfrm>
           <a:prstGeom prst="roundRect">
             <a:avLst>
-              <a:gd name="adj" fmla="val 8000"/>
+              <a:gd name="adj" fmla="val 6000"/>
             </a:avLst>
           </a:prstGeom>
           <a:solidFill>
@@ -3759,7 +3865,7 @@
           </a:solidFill>
           <a:ln w="12700">
             <a:solidFill>
-              <a:srgbClr val="D8D2C8"/>
+              <a:srgbClr val="D4CEC4"/>
             </a:solidFill>
           </a:ln>
         </p:spPr>
@@ -3787,14 +3893,57 @@
       </p:sp>
       <p:sp>
         <p:nvSpPr>
-          <p:cNvPr id="10" name="TextBox 9"/>
+          <p:cNvPr id="12" name="Rectangle 11"/>
+          <p:cNvSpPr/>
+          <p:nvPr/>
+        </p:nvSpPr>
+        <p:spPr>
+          <a:xfrm>
+            <a:off x="6223863" y="960120"/>
+            <a:ext cx="5510631" cy="73152"/>
+          </a:xfrm>
+          <a:prstGeom prst="rect">
+            <a:avLst/>
+          </a:prstGeom>
+          <a:solidFill>
+            <a:srgbClr val="2A554A"/>
+          </a:solidFill>
+          <a:ln>
+            <a:noFill/>
+          </a:ln>
+        </p:spPr>
+        <p:style>
+          <a:lnRef idx="1">
+            <a:schemeClr val="accent1"/>
+          </a:lnRef>
+          <a:fillRef idx="3">
+            <a:schemeClr val="accent1"/>
+          </a:fillRef>
+          <a:effectRef idx="2">
+            <a:schemeClr val="accent1"/>
+          </a:effectRef>
+          <a:fontRef idx="minor">
+            <a:schemeClr val="lt1"/>
+          </a:fontRef>
+        </p:style>
+        <p:txBody>
+          <a:bodyPr rtlCol="0" anchor="ctr"/>
+          <a:lstStyle/>
+          <a:p>
+            <a:pPr algn="ctr"/>
+          </a:p>
+        </p:txBody>
+      </p:sp>
+      <p:sp>
+        <p:nvSpPr>
+          <p:cNvPr id="13" name="TextBox 12"/>
           <p:cNvSpPr txBox="1"/>
           <p:nvPr/>
         </p:nvSpPr>
         <p:spPr>
           <a:xfrm>
-            <a:off x="777240" y="1234440"/>
-            <a:ext cx="4846320" cy="4663440"/>
+            <a:off x="749808" y="1216152"/>
+            <a:ext cx="4925415" cy="4663440"/>
           </a:xfrm>
           <a:prstGeom prst="rect">
             <a:avLst/>
@@ -3808,96 +3957,131 @@
           <a:lstStyle/>
           <a:p>
             <a:pPr>
+              <a:lnSpc>
+                <a:spcPct val="115000"/>
+              </a:lnSpc>
+              <a:spcBef>
+                <a:spcPts val="0"/>
+              </a:spcBef>
+              <a:spcAft>
+                <a:spcPts val="1400"/>
+              </a:spcAft>
+            </a:pPr>
+            <a:r>
+              <a:rPr sz="1500" b="1">
+                <a:solidFill>
+                  <a:srgbClr val="2A554A"/>
+                </a:solidFill>
+                <a:latin typeface="Calibri"/>
+                <a:rFonts ascii="Calibri" hAnsi="Calibri" cs="Calibri"/>
+              </a:rPr>
+              <a:t>Экономика</a:t>
+            </a:r>
+          </a:p>
+          <a:p>
+            <a:pPr>
+              <a:lnSpc>
+                <a:spcPct val="115000"/>
+              </a:lnSpc>
+              <a:spcBef>
+                <a:spcPts val="0"/>
+              </a:spcBef>
+              <a:spcAft>
+                <a:spcPts val="800"/>
+              </a:spcAft>
+            </a:pPr>
+            <a:r>
+              <a:rPr sz="1600" b="0">
+                <a:solidFill>
+                  <a:srgbClr val="1A1A1A"/>
+                </a:solidFill>
+                <a:latin typeface="Calibri"/>
+                <a:rFonts ascii="Calibri" hAnsi="Calibri" cs="Calibri"/>
+              </a:rPr>
+              <a:t>Прайс — после себестоимости на складе.</a:t>
+            </a:r>
+          </a:p>
+          <a:p>
+            <a:pPr>
+              <a:lnSpc>
+                <a:spcPct val="115000"/>
+              </a:lnSpc>
+              <a:spcBef>
+                <a:spcPts val="0"/>
+              </a:spcBef>
               <a:spcAft>
                 <a:spcPts val="1200"/>
               </a:spcAft>
             </a:pPr>
             <a:r>
-              <a:rPr sz="2000" b="1">
-                <a:solidFill>
-                  <a:srgbClr val="2F5D50"/>
-                </a:solidFill>
-                <a:latin typeface="Calibri"/>
-              </a:rPr>
-              <a:t>Экономика</a:t>
-            </a:r>
-          </a:p>
-          <a:p>
-            <a:pPr>
+              <a:rPr sz="1600" b="0">
+                <a:solidFill>
+                  <a:srgbClr val="1A1A1A"/>
+                </a:solidFill>
+                <a:latin typeface="Calibri"/>
+                <a:rFonts ascii="Calibri" hAnsi="Calibri" cs="Calibri"/>
+              </a:rPr>
+              <a:t>Ориентир: выше Hotel Line · рядом с ЕТС · ниже NS.</a:t>
+            </a:r>
+          </a:p>
+          <a:p>
+            <a:pPr>
+              <a:lnSpc>
+                <a:spcPct val="115000"/>
+              </a:lnSpc>
+              <a:spcBef>
+                <a:spcPts val="0"/>
+              </a:spcBef>
               <a:spcAft>
                 <a:spcPts val="800"/>
               </a:spcAft>
             </a:pPr>
             <a:r>
-              <a:rPr sz="1500" b="0">
-                <a:solidFill>
-                  <a:srgbClr val="1C1C1C"/>
-                </a:solidFill>
-                <a:latin typeface="Calibri"/>
-              </a:rPr>
-              <a:t>Прайс - после COGS (цена на складе).</a:t>
-            </a:r>
-          </a:p>
-          <a:p>
-            <a:pPr>
+              <a:rPr sz="1600" b="1">
+                <a:solidFill>
+                  <a:srgbClr val="1A1A1A"/>
+                </a:solidFill>
+                <a:latin typeface="Calibri"/>
+                <a:rFonts ascii="Calibri" hAnsi="Calibri" cs="Calibri"/>
+              </a:rPr>
+              <a:t>Не воюем копейкой.</a:t>
+            </a:r>
+          </a:p>
+          <a:p>
+            <a:pPr>
+              <a:lnSpc>
+                <a:spcPct val="115000"/>
+              </a:lnSpc>
+              <a:spcBef>
+                <a:spcPts val="0"/>
+              </a:spcBef>
               <a:spcAft>
                 <a:spcPts val="800"/>
               </a:spcAft>
             </a:pPr>
             <a:r>
-              <a:rPr sz="1500" b="0">
-                <a:solidFill>
-                  <a:srgbClr val="1C1C1C"/>
-                </a:solidFill>
-                <a:latin typeface="Calibri"/>
-              </a:rPr>
-              <a:t>Ориентир: выше HL · рядом с ЕТС · ниже NS.</a:t>
-            </a:r>
-          </a:p>
-          <a:p>
-            <a:pPr>
-              <a:spcAft>
-                <a:spcPts val="400"/>
-              </a:spcAft>
-            </a:pPr>
-            <a:r>
-              <a:rPr sz="1500" b="0">
-                <a:solidFill>
-                  <a:srgbClr val="1C1C1C"/>
-                </a:solidFill>
-                <a:latin typeface="Calibri"/>
-              </a:rPr>
-              <a:t>Не война копейкой -</a:t>
-            </a:r>
-          </a:p>
-          <a:p>
-            <a:pPr>
-              <a:spcAft>
-                <a:spcPts val="0"/>
-              </a:spcAft>
-            </a:pPr>
-            <a:r>
-              <a:rPr sz="1500" b="1">
-                <a:solidFill>
-                  <a:srgbClr val="1C1C1C"/>
-                </a:solidFill>
-                <a:latin typeface="Calibri"/>
-              </a:rPr>
-              <a:t>пакет и ощущение натуральности.</a:t>
-            </a:r>
-          </a:p>
-        </p:txBody>
-      </p:sp>
-      <p:sp>
-        <p:nvSpPr>
-          <p:cNvPr id="11" name="TextBox 10"/>
+              <a:rPr sz="1600" b="0">
+                <a:solidFill>
+                  <a:srgbClr val="1A1A1A"/>
+                </a:solidFill>
+                <a:latin typeface="Calibri"/>
+                <a:rFonts ascii="Calibri" hAnsi="Calibri" cs="Calibri"/>
+              </a:rPr>
+              <a:t>Выигрываем пакетом и ощущением.</a:t>
+            </a:r>
+          </a:p>
+        </p:txBody>
+      </p:sp>
+      <p:sp>
+        <p:nvSpPr>
+          <p:cNvPr id="14" name="TextBox 13"/>
           <p:cNvSpPr txBox="1"/>
           <p:nvPr/>
         </p:nvSpPr>
         <p:spPr>
           <a:xfrm>
-            <a:off x="6400800" y="1234440"/>
-            <a:ext cx="4937760" cy="4663440"/>
+            <a:off x="6516471" y="1216152"/>
+            <a:ext cx="4925415" cy="4663440"/>
           </a:xfrm>
           <a:prstGeom prst="rect">
             <a:avLst/>
@@ -3911,96 +4095,138 @@
           <a:lstStyle/>
           <a:p>
             <a:pPr>
-              <a:spcAft>
-                <a:spcPts val="1200"/>
-              </a:spcAft>
-            </a:pPr>
-            <a:r>
-              <a:rPr sz="2000" b="1">
-                <a:solidFill>
-                  <a:srgbClr val="2F5D50"/>
-                </a:solidFill>
-                <a:latin typeface="Calibri"/>
-              </a:rPr>
-              <a:t>Если Китай / гибрид</a:t>
-            </a:r>
-          </a:p>
-          <a:p>
-            <a:pPr>
-              <a:spcAft>
-                <a:spcPts val="600"/>
-              </a:spcAft>
-            </a:pPr>
-            <a:r>
-              <a:rPr sz="1500" b="0">
-                <a:solidFill>
-                  <a:srgbClr val="1C1C1C"/>
-                </a:solidFill>
-                <a:latin typeface="Calibri"/>
+              <a:lnSpc>
+                <a:spcPct val="115000"/>
+              </a:lnSpc>
+              <a:spcBef>
+                <a:spcPts val="0"/>
+              </a:spcBef>
+              <a:spcAft>
+                <a:spcPts val="1400"/>
+              </a:spcAft>
+            </a:pPr>
+            <a:r>
+              <a:rPr sz="1500" b="1">
+                <a:solidFill>
+                  <a:srgbClr val="2A554A"/>
+                </a:solidFill>
+                <a:latin typeface="Calibri"/>
+                <a:rFonts ascii="Calibri" hAnsi="Calibri" cs="Calibri"/>
+              </a:rPr>
+              <a:t>Если Китай или гибрид</a:t>
+            </a:r>
+          </a:p>
+          <a:p>
+            <a:pPr>
+              <a:lnSpc>
+                <a:spcPct val="115000"/>
+              </a:lnSpc>
+              <a:spcBef>
+                <a:spcPts val="0"/>
+              </a:spcBef>
+              <a:spcAft>
+                <a:spcPts val="800"/>
+              </a:spcAft>
+            </a:pPr>
+            <a:r>
+              <a:rPr sz="1600" b="0">
+                <a:solidFill>
+                  <a:srgbClr val="1A1A1A"/>
+                </a:solidFill>
+                <a:latin typeface="Calibri"/>
+                <a:rFonts ascii="Calibri" hAnsi="Calibri" cs="Calibri"/>
               </a:rPr>
               <a:t>Сравниваем заводы в FOB</a:t>
             </a:r>
           </a:p>
           <a:p>
             <a:pPr>
-              <a:spcAft>
-                <a:spcPts val="600"/>
-              </a:spcAft>
-            </a:pPr>
-            <a:r>
-              <a:rPr sz="1500" b="0">
-                <a:solidFill>
-                  <a:srgbClr val="1C1C1C"/>
-                </a:solidFill>
-                <a:latin typeface="Calibri"/>
-              </a:rPr>
-              <a:t>Логистика до Кириши - отдельной строкой</a:t>
-            </a:r>
-          </a:p>
-          <a:p>
-            <a:pPr>
-              <a:spcAft>
-                <a:spcPts val="600"/>
-              </a:spcAft>
-            </a:pPr>
-            <a:r>
-              <a:rPr sz="1400" b="0">
-                <a:solidFill>
-                  <a:srgbClr val="1C1C1C"/>
-                </a:solidFill>
-                <a:latin typeface="Calibri"/>
-              </a:rPr>
-              <a:t>Landed cost = FOB + фрахт + таможня + довоз</a:t>
-            </a:r>
-          </a:p>
-          <a:p>
-            <a:pPr>
-              <a:spcAft>
-                <a:spcPts val="600"/>
-              </a:spcAft>
-            </a:pPr>
-            <a:r>
-              <a:rPr sz="1500" b="1">
-                <a:solidFill>
-                  <a:srgbClr val="1C1C1C"/>
-                </a:solidFill>
-                <a:latin typeface="Calibri"/>
-              </a:rPr>
-              <a:t>Срок пилота = «на складе»</a:t>
-            </a:r>
-          </a:p>
-          <a:p>
-            <a:pPr>
-              <a:spcAft>
-                <a:spcPts val="0"/>
-              </a:spcAft>
-            </a:pPr>
-            <a:r>
-              <a:rPr sz="1400" b="0">
-                <a:solidFill>
-                  <a:srgbClr val="1C1C1C"/>
-                </a:solidFill>
-                <a:latin typeface="Calibri"/>
+              <a:lnSpc>
+                <a:spcPct val="115000"/>
+              </a:lnSpc>
+              <a:spcBef>
+                <a:spcPts val="0"/>
+              </a:spcBef>
+              <a:spcAft>
+                <a:spcPts val="800"/>
+              </a:spcAft>
+            </a:pPr>
+            <a:r>
+              <a:rPr sz="1600" b="0">
+                <a:solidFill>
+                  <a:srgbClr val="1A1A1A"/>
+                </a:solidFill>
+                <a:latin typeface="Calibri"/>
+                <a:rFonts ascii="Calibri" hAnsi="Calibri" cs="Calibri"/>
+              </a:rPr>
+              <a:t>Логистику до Кириши считаем отдельно</a:t>
+            </a:r>
+          </a:p>
+          <a:p>
+            <a:pPr>
+              <a:lnSpc>
+                <a:spcPct val="115000"/>
+              </a:lnSpc>
+              <a:spcBef>
+                <a:spcPts val="0"/>
+              </a:spcBef>
+              <a:spcAft>
+                <a:spcPts val="1000"/>
+              </a:spcAft>
+            </a:pPr>
+            <a:r>
+              <a:rPr sz="1600" b="0">
+                <a:solidFill>
+                  <a:srgbClr val="1A1A1A"/>
+                </a:solidFill>
+                <a:latin typeface="Calibri"/>
+                <a:rFonts ascii="Calibri" hAnsi="Calibri" cs="Calibri"/>
+              </a:rPr>
+              <a:t>Полная цена = FOB + фрахт + таможня + довоз</a:t>
+            </a:r>
+          </a:p>
+          <a:p>
+            <a:pPr>
+              <a:lnSpc>
+                <a:spcPct val="115000"/>
+              </a:lnSpc>
+              <a:spcBef>
+                <a:spcPts val="0"/>
+              </a:spcBef>
+              <a:spcAft>
+                <a:spcPts val="800"/>
+              </a:spcAft>
+            </a:pPr>
+            <a:r>
+              <a:rPr sz="1600" b="1">
+                <a:solidFill>
+                  <a:srgbClr val="1A1A1A"/>
+                </a:solidFill>
+                <a:latin typeface="Calibri"/>
+                <a:rFonts ascii="Calibri" hAnsi="Calibri" cs="Calibri"/>
+              </a:rPr>
+              <a:t>Срок пилота — «на складе»</a:t>
+            </a:r>
+          </a:p>
+          <a:p>
+            <a:pPr>
+              <a:lnSpc>
+                <a:spcPct val="115000"/>
+              </a:lnSpc>
+              <a:spcBef>
+                <a:spcPts val="0"/>
+              </a:spcBef>
+              <a:spcAft>
+                <a:spcPts val="800"/>
+              </a:spcAft>
+            </a:pPr>
+            <a:r>
+              <a:rPr sz="1600" b="0">
+                <a:solidFill>
+                  <a:srgbClr val="1A1A1A"/>
+                </a:solidFill>
+                <a:latin typeface="Calibri"/>
+                <a:rFonts ascii="Calibri" hAnsi="Calibri" cs="Calibri"/>
               </a:rPr>
               <a:t>Origin не ясен → не говорим «российское»</a:t>
             </a:r>
@@ -4040,7 +4266,7 @@
             <a:avLst/>
           </a:prstGeom>
           <a:solidFill>
-            <a:srgbClr val="F7F5F2"/>
+            <a:srgbClr val="F5F3EF"/>
           </a:solidFill>
           <a:ln>
             <a:noFill/>
@@ -4077,13 +4303,13 @@
         <p:spPr>
           <a:xfrm>
             <a:off x="0" y="0"/>
-            <a:ext cx="109728" cy="6858000"/>
+            <a:ext cx="91440" cy="6858000"/>
           </a:xfrm>
           <a:prstGeom prst="rect">
             <a:avLst/>
           </a:prstGeom>
           <a:solidFill>
-            <a:srgbClr val="2F5D50"/>
+            <a:srgbClr val="2A554A"/>
           </a:solidFill>
           <a:ln>
             <a:noFill/>
@@ -4119,8 +4345,8 @@
         </p:nvSpPr>
         <p:spPr>
           <a:xfrm>
-            <a:off x="502920" y="256032"/>
-            <a:ext cx="11155680" cy="502920"/>
+            <a:off x="457200" y="256032"/>
+            <a:ext cx="11247120" cy="502920"/>
           </a:xfrm>
           <a:prstGeom prst="rect">
             <a:avLst/>
@@ -4134,13 +4360,14 @@
           <a:lstStyle/>
           <a:p>
             <a:r>
-              <a:rPr sz="2800" b="1">
-                <a:solidFill>
-                  <a:srgbClr val="2F5D50"/>
-                </a:solidFill>
-                <a:latin typeface="Calibri"/>
-              </a:rPr>
-              <a:t>Что в пульте уже есть</a:t>
+              <a:rPr sz="2600" b="1">
+                <a:solidFill>
+                  <a:srgbClr val="2A554A"/>
+                </a:solidFill>
+                <a:latin typeface="Calibri"/>
+                <a:rFonts ascii="Calibri" hAnsi="Calibri" cs="Calibri"/>
+              </a:rPr>
+              <a:t>Что уже есть в пульте</a:t>
             </a:r>
           </a:p>
         </p:txBody>
@@ -4153,14 +4380,14 @@
         </p:nvSpPr>
         <p:spPr>
           <a:xfrm>
-            <a:off x="502920" y="777240"/>
-            <a:ext cx="11155680" cy="22860"/>
+            <a:off x="457200" y="804672"/>
+            <a:ext cx="2011680" cy="36576"/>
           </a:xfrm>
           <a:prstGeom prst="rect">
             <a:avLst/>
           </a:prstGeom>
           <a:solidFill>
-            <a:srgbClr val="D8D2C8"/>
+            <a:srgbClr val="2A554A"/>
           </a:solidFill>
           <a:ln>
             <a:noFill/>
@@ -4190,13 +4417,56 @@
       </p:sp>
       <p:sp>
         <p:nvSpPr>
-          <p:cNvPr id="6" name="TextBox 5"/>
+          <p:cNvPr id="6" name="Rectangle 5"/>
+          <p:cNvSpPr/>
+          <p:nvPr/>
+        </p:nvSpPr>
+        <p:spPr>
+          <a:xfrm>
+            <a:off x="457200" y="6263640"/>
+            <a:ext cx="11277295" cy="13716"/>
+          </a:xfrm>
+          <a:prstGeom prst="rect">
+            <a:avLst/>
+          </a:prstGeom>
+          <a:solidFill>
+            <a:srgbClr val="D4CEC4"/>
+          </a:solidFill>
+          <a:ln>
+            <a:noFill/>
+          </a:ln>
+        </p:spPr>
+        <p:style>
+          <a:lnRef idx="1">
+            <a:schemeClr val="accent1"/>
+          </a:lnRef>
+          <a:fillRef idx="3">
+            <a:schemeClr val="accent1"/>
+          </a:fillRef>
+          <a:effectRef idx="2">
+            <a:schemeClr val="accent1"/>
+          </a:effectRef>
+          <a:fontRef idx="minor">
+            <a:schemeClr val="lt1"/>
+          </a:fontRef>
+        </p:style>
+        <p:txBody>
+          <a:bodyPr rtlCol="0" anchor="ctr"/>
+          <a:lstStyle/>
+          <a:p>
+            <a:pPr algn="ctr"/>
+          </a:p>
+        </p:txBody>
+      </p:sp>
+      <p:sp>
+        <p:nvSpPr>
+          <p:cNvPr id="7" name="TextBox 6"/>
           <p:cNvSpPr txBox="1"/>
           <p:nvPr/>
         </p:nvSpPr>
         <p:spPr>
           <a:xfrm>
-            <a:off x="502920" y="6446520"/>
+            <a:off x="457200" y="6355080"/>
             <a:ext cx="9601200" cy="320040"/>
           </a:xfrm>
           <a:prstGeom prst="rect">
@@ -4213,25 +4483,26 @@
             <a:r>
               <a:rPr sz="1100" b="0">
                 <a:solidFill>
-                  <a:srgbClr val="5A5A5A"/>
-                </a:solidFill>
-                <a:latin typeface="Calibri"/>
-              </a:rPr>
-              <a:t>Travel+ Natural · пульт v1.14 · собес · не оферта</a:t>
-            </a:r>
-          </a:p>
-        </p:txBody>
-      </p:sp>
-      <p:sp>
-        <p:nvSpPr>
-          <p:cNvPr id="7" name="TextBox 6"/>
+                  <a:srgbClr val="5C5C5C"/>
+                </a:solidFill>
+                <a:latin typeface="Calibri"/>
+                <a:rFonts ascii="Calibri" hAnsi="Calibri" cs="Calibri"/>
+              </a:rPr>
+              <a:t>Travel+ Natural  ·  пульт v1.14  ·  собеседование  ·  не оферта</a:t>
+            </a:r>
+          </a:p>
+        </p:txBody>
+      </p:sp>
+      <p:sp>
+        <p:nvSpPr>
+          <p:cNvPr id="8" name="TextBox 7"/>
           <p:cNvSpPr txBox="1"/>
           <p:nvPr/>
         </p:nvSpPr>
         <p:spPr>
           <a:xfrm>
-            <a:off x="10607040" y="6446520"/>
-            <a:ext cx="1188720" cy="320040"/>
+            <a:off x="10515600" y="6355080"/>
+            <a:ext cx="1280160" cy="320040"/>
           </a:xfrm>
           <a:prstGeom prst="rect">
             <a:avLst/>
@@ -4248,29 +4519,30 @@
             <a:r>
               <a:rPr sz="1100" b="0">
                 <a:solidFill>
-                  <a:srgbClr val="5A5A5A"/>
-                </a:solidFill>
-                <a:latin typeface="Calibri"/>
-              </a:rPr>
-              <a:t>11/12</a:t>
-            </a:r>
-          </a:p>
-        </p:txBody>
-      </p:sp>
-      <p:sp>
-        <p:nvSpPr>
-          <p:cNvPr id="8" name="Rounded Rectangle 7"/>
+                  <a:srgbClr val="5C5C5C"/>
+                </a:solidFill>
+                <a:latin typeface="Calibri"/>
+                <a:rFonts ascii="Calibri" hAnsi="Calibri" cs="Calibri"/>
+              </a:rPr>
+              <a:t>11 / 12</a:t>
+            </a:r>
+          </a:p>
+        </p:txBody>
+      </p:sp>
+      <p:sp>
+        <p:nvSpPr>
+          <p:cNvPr id="9" name="Rounded Rectangle 8"/>
           <p:cNvSpPr/>
           <p:nvPr/>
         </p:nvSpPr>
         <p:spPr>
           <a:xfrm>
-            <a:off x="502920" y="1051560"/>
-            <a:ext cx="5349240" cy="5029200"/>
+            <a:off x="457200" y="960120"/>
+            <a:ext cx="5510631" cy="5074920"/>
           </a:xfrm>
           <a:prstGeom prst="roundRect">
             <a:avLst>
-              <a:gd name="adj" fmla="val 8000"/>
+              <a:gd name="adj" fmla="val 6000"/>
             </a:avLst>
           </a:prstGeom>
           <a:solidFill>
@@ -4278,7 +4550,7 @@
           </a:solidFill>
           <a:ln w="12700">
             <a:solidFill>
-              <a:srgbClr val="D8D2C8"/>
+              <a:srgbClr val="D4CEC4"/>
             </a:solidFill>
           </a:ln>
         </p:spPr>
@@ -4306,18 +4578,61 @@
       </p:sp>
       <p:sp>
         <p:nvSpPr>
-          <p:cNvPr id="9" name="Rounded Rectangle 8"/>
+          <p:cNvPr id="10" name="Rectangle 9"/>
           <p:cNvSpPr/>
           <p:nvPr/>
         </p:nvSpPr>
         <p:spPr>
           <a:xfrm>
-            <a:off x="6126480" y="1051560"/>
-            <a:ext cx="5440680" cy="5029200"/>
+            <a:off x="457200" y="960120"/>
+            <a:ext cx="5510631" cy="73152"/>
+          </a:xfrm>
+          <a:prstGeom prst="rect">
+            <a:avLst/>
+          </a:prstGeom>
+          <a:solidFill>
+            <a:srgbClr val="2A554A"/>
+          </a:solidFill>
+          <a:ln>
+            <a:noFill/>
+          </a:ln>
+        </p:spPr>
+        <p:style>
+          <a:lnRef idx="1">
+            <a:schemeClr val="accent1"/>
+          </a:lnRef>
+          <a:fillRef idx="3">
+            <a:schemeClr val="accent1"/>
+          </a:fillRef>
+          <a:effectRef idx="2">
+            <a:schemeClr val="accent1"/>
+          </a:effectRef>
+          <a:fontRef idx="minor">
+            <a:schemeClr val="lt1"/>
+          </a:fontRef>
+        </p:style>
+        <p:txBody>
+          <a:bodyPr rtlCol="0" anchor="ctr"/>
+          <a:lstStyle/>
+          <a:p>
+            <a:pPr algn="ctr"/>
+          </a:p>
+        </p:txBody>
+      </p:sp>
+      <p:sp>
+        <p:nvSpPr>
+          <p:cNvPr id="11" name="Rounded Rectangle 10"/>
+          <p:cNvSpPr/>
+          <p:nvPr/>
+        </p:nvSpPr>
+        <p:spPr>
+          <a:xfrm>
+            <a:off x="6223863" y="960120"/>
+            <a:ext cx="5510631" cy="5074920"/>
           </a:xfrm>
           <a:prstGeom prst="roundRect">
             <a:avLst>
-              <a:gd name="adj" fmla="val 8000"/>
+              <a:gd name="adj" fmla="val 6000"/>
             </a:avLst>
           </a:prstGeom>
           <a:solidFill>
@@ -4325,7 +4640,7 @@
           </a:solidFill>
           <a:ln w="12700">
             <a:solidFill>
-              <a:srgbClr val="D8D2C8"/>
+              <a:srgbClr val="D4CEC4"/>
             </a:solidFill>
           </a:ln>
         </p:spPr>
@@ -4353,14 +4668,57 @@
       </p:sp>
       <p:sp>
         <p:nvSpPr>
-          <p:cNvPr id="10" name="TextBox 9"/>
+          <p:cNvPr id="12" name="Rectangle 11"/>
+          <p:cNvSpPr/>
+          <p:nvPr/>
+        </p:nvSpPr>
+        <p:spPr>
+          <a:xfrm>
+            <a:off x="6223863" y="960120"/>
+            <a:ext cx="5510631" cy="73152"/>
+          </a:xfrm>
+          <a:prstGeom prst="rect">
+            <a:avLst/>
+          </a:prstGeom>
+          <a:solidFill>
+            <a:srgbClr val="2A554A"/>
+          </a:solidFill>
+          <a:ln>
+            <a:noFill/>
+          </a:ln>
+        </p:spPr>
+        <p:style>
+          <a:lnRef idx="1">
+            <a:schemeClr val="accent1"/>
+          </a:lnRef>
+          <a:fillRef idx="3">
+            <a:schemeClr val="accent1"/>
+          </a:fillRef>
+          <a:effectRef idx="2">
+            <a:schemeClr val="accent1"/>
+          </a:effectRef>
+          <a:fontRef idx="minor">
+            <a:schemeClr val="lt1"/>
+          </a:fontRef>
+        </p:style>
+        <p:txBody>
+          <a:bodyPr rtlCol="0" anchor="ctr"/>
+          <a:lstStyle/>
+          <a:p>
+            <a:pPr algn="ctr"/>
+          </a:p>
+        </p:txBody>
+      </p:sp>
+      <p:sp>
+        <p:nvSpPr>
+          <p:cNvPr id="13" name="TextBox 12"/>
           <p:cNvSpPr txBox="1"/>
           <p:nvPr/>
         </p:nvSpPr>
         <p:spPr>
           <a:xfrm>
-            <a:off x="777240" y="1234440"/>
-            <a:ext cx="4846320" cy="4663440"/>
+            <a:off x="749808" y="1216152"/>
+            <a:ext cx="4925415" cy="4663440"/>
           </a:xfrm>
           <a:prstGeom prst="rect">
             <a:avLst/>
@@ -4374,80 +4732,115 @@
           <a:lstStyle/>
           <a:p>
             <a:pPr>
-              <a:spcAft>
-                <a:spcPts val="1200"/>
-              </a:spcAft>
-            </a:pPr>
-            <a:r>
-              <a:rPr sz="2000" b="1">
-                <a:solidFill>
-                  <a:srgbClr val="2F5D50"/>
-                </a:solidFill>
-                <a:latin typeface="Calibri"/>
+              <a:lnSpc>
+                <a:spcPct val="115000"/>
+              </a:lnSpc>
+              <a:spcBef>
+                <a:spcPts val="0"/>
+              </a:spcBef>
+              <a:spcAft>
+                <a:spcPts val="1400"/>
+              </a:spcAft>
+            </a:pPr>
+            <a:r>
+              <a:rPr sz="1500" b="1">
+                <a:solidFill>
+                  <a:srgbClr val="2A554A"/>
+                </a:solidFill>
+                <a:latin typeface="Calibri"/>
+                <a:rFonts ascii="Calibri" hAnsi="Calibri" cs="Calibri"/>
               </a:rPr>
               <a:t>Содержание</a:t>
             </a:r>
           </a:p>
           <a:p>
             <a:pPr>
-              <a:spcAft>
-                <a:spcPts val="600"/>
-              </a:spcAft>
-            </a:pPr>
-            <a:r>
-              <a:rPr sz="1500" b="0">
-                <a:solidFill>
-                  <a:srgbClr val="1C1C1C"/>
-                </a:solidFill>
-                <a:latin typeface="Calibri"/>
-              </a:rPr>
-              <a:t>Этапы 0-2 - разведка и правила</a:t>
-            </a:r>
-          </a:p>
-          <a:p>
-            <a:pPr>
-              <a:spcAft>
-                <a:spcPts val="600"/>
-              </a:spcAft>
-            </a:pPr>
-            <a:r>
-              <a:rPr sz="1500" b="0">
-                <a:solidFill>
-                  <a:srgbClr val="1C1C1C"/>
-                </a:solidFill>
-                <a:latin typeface="Calibri"/>
-              </a:rPr>
-              <a:t>Этапы 3-6 - сценарий «как вести дело»</a:t>
-            </a:r>
-          </a:p>
-          <a:p>
-            <a:pPr>
-              <a:spcAft>
-                <a:spcPts val="600"/>
-              </a:spcAft>
-            </a:pPr>
-            <a:r>
-              <a:rPr sz="1500" b="0">
-                <a:solidFill>
-                  <a:srgbClr val="1C1C1C"/>
-                </a:solidFill>
-                <a:latin typeface="Calibri"/>
+              <a:lnSpc>
+                <a:spcPct val="115000"/>
+              </a:lnSpc>
+              <a:spcBef>
+                <a:spcPts val="0"/>
+              </a:spcBef>
+              <a:spcAft>
+                <a:spcPts val="800"/>
+              </a:spcAft>
+            </a:pPr>
+            <a:r>
+              <a:rPr sz="1600" b="0">
+                <a:solidFill>
+                  <a:srgbClr val="1A1A1A"/>
+                </a:solidFill>
+                <a:latin typeface="Calibri"/>
+                <a:rFonts ascii="Calibri" hAnsi="Calibri" cs="Calibri"/>
+              </a:rPr>
+              <a:t>Этапы 0–2 — разведка и правила</a:t>
+            </a:r>
+          </a:p>
+          <a:p>
+            <a:pPr>
+              <a:lnSpc>
+                <a:spcPct val="115000"/>
+              </a:lnSpc>
+              <a:spcBef>
+                <a:spcPts val="0"/>
+              </a:spcBef>
+              <a:spcAft>
+                <a:spcPts val="800"/>
+              </a:spcAft>
+            </a:pPr>
+            <a:r>
+              <a:rPr sz="1600" b="0">
+                <a:solidFill>
+                  <a:srgbClr val="1A1A1A"/>
+                </a:solidFill>
+                <a:latin typeface="Calibri"/>
+                <a:rFonts ascii="Calibri" hAnsi="Calibri" cs="Calibri"/>
+              </a:rPr>
+              <a:t>Этапы 3–6 — сценарий «как вести дело»</a:t>
+            </a:r>
+          </a:p>
+          <a:p>
+            <a:pPr>
+              <a:lnSpc>
+                <a:spcPct val="115000"/>
+              </a:lnSpc>
+              <a:spcBef>
+                <a:spcPts val="0"/>
+              </a:spcBef>
+              <a:spcAft>
+                <a:spcPts val="800"/>
+              </a:spcAft>
+            </a:pPr>
+            <a:r>
+              <a:rPr sz="1600" b="0">
+                <a:solidFill>
+                  <a:srgbClr val="1A1A1A"/>
+                </a:solidFill>
+                <a:latin typeface="Calibri"/>
+                <a:rFonts ascii="Calibri" hAnsi="Calibri" cs="Calibri"/>
               </a:rPr>
               <a:t>StoryBrand · DoD · риски · возврат</a:t>
             </a:r>
           </a:p>
           <a:p>
             <a:pPr>
-              <a:spcAft>
-                <a:spcPts val="0"/>
-              </a:spcAft>
-            </a:pPr>
-            <a:r>
-              <a:rPr sz="1500" b="0">
-                <a:solidFill>
-                  <a:srgbClr val="1C1C1C"/>
-                </a:solidFill>
-                <a:latin typeface="Calibri"/>
+              <a:lnSpc>
+                <a:spcPct val="115000"/>
+              </a:lnSpc>
+              <a:spcBef>
+                <a:spcPts val="0"/>
+              </a:spcBef>
+              <a:spcAft>
+                <a:spcPts val="800"/>
+              </a:spcAft>
+            </a:pPr>
+            <a:r>
+              <a:rPr sz="1600" b="0">
+                <a:solidFill>
+                  <a:srgbClr val="1A1A1A"/>
+                </a:solidFill>
+                <a:latin typeface="Calibri"/>
+                <a:rFonts ascii="Calibri" hAnsi="Calibri" cs="Calibri"/>
               </a:rPr>
               <a:t>Мостик портфеля Travel+</a:t>
             </a:r>
@@ -4456,14 +4849,14 @@
       </p:sp>
       <p:sp>
         <p:nvSpPr>
-          <p:cNvPr id="11" name="TextBox 10"/>
+          <p:cNvPr id="14" name="TextBox 13"/>
           <p:cNvSpPr txBox="1"/>
           <p:nvPr/>
         </p:nvSpPr>
         <p:spPr>
           <a:xfrm>
-            <a:off x="6400800" y="1234440"/>
-            <a:ext cx="4937760" cy="4663440"/>
+            <a:off x="6516471" y="1216152"/>
+            <a:ext cx="4925415" cy="4663440"/>
           </a:xfrm>
           <a:prstGeom prst="rect">
             <a:avLst/>
@@ -4477,82 +4870,117 @@
           <a:lstStyle/>
           <a:p>
             <a:pPr>
-              <a:spcAft>
-                <a:spcPts val="1200"/>
-              </a:spcAft>
-            </a:pPr>
-            <a:r>
-              <a:rPr sz="2000" b="1">
-                <a:solidFill>
-                  <a:srgbClr val="2F5D50"/>
-                </a:solidFill>
-                <a:latin typeface="Calibri"/>
+              <a:lnSpc>
+                <a:spcPct val="115000"/>
+              </a:lnSpc>
+              <a:spcBef>
+                <a:spcPts val="0"/>
+              </a:spcBef>
+              <a:spcAft>
+                <a:spcPts val="1400"/>
+              </a:spcAft>
+            </a:pPr>
+            <a:r>
+              <a:rPr sz="1500" b="1">
+                <a:solidFill>
+                  <a:srgbClr val="2A554A"/>
+                </a:solidFill>
+                <a:latin typeface="Calibri"/>
+                <a:rFonts ascii="Calibri" hAnsi="Calibri" cs="Calibri"/>
               </a:rPr>
               <a:t>Справочники</a:t>
             </a:r>
           </a:p>
           <a:p>
             <a:pPr>
-              <a:spcAft>
-                <a:spcPts val="600"/>
-              </a:spcAft>
-            </a:pPr>
-            <a:r>
-              <a:rPr sz="1500" b="0">
-                <a:solidFill>
-                  <a:srgbClr val="1C1C1C"/>
-                </a:solidFill>
-                <a:latin typeface="Calibri"/>
+              <a:lnSpc>
+                <a:spcPct val="115000"/>
+              </a:lnSpc>
+              <a:spcBef>
+                <a:spcPts val="0"/>
+              </a:spcBef>
+              <a:spcAft>
+                <a:spcPts val="800"/>
+              </a:spcAft>
+            </a:pPr>
+            <a:r>
+              <a:rPr sz="1600" b="0">
+                <a:solidFill>
+                  <a:srgbClr val="1A1A1A"/>
+                </a:solidFill>
+                <a:latin typeface="Calibri"/>
+                <a:rFonts ascii="Calibri" hAnsi="Calibri" cs="Calibri"/>
               </a:rPr>
               <a:t>Глоссарий бренда + глоссарий ВЭД</a:t>
             </a:r>
           </a:p>
           <a:p>
             <a:pPr>
+              <a:lnSpc>
+                <a:spcPct val="115000"/>
+              </a:lnSpc>
+              <a:spcBef>
+                <a:spcPts val="0"/>
+              </a:spcBef>
               <a:spcAft>
                 <a:spcPts val="1400"/>
               </a:spcAft>
             </a:pPr>
             <a:r>
-              <a:rPr sz="1500" b="0">
-                <a:solidFill>
-                  <a:srgbClr val="1C1C1C"/>
-                </a:solidFill>
-                <a:latin typeface="Calibri"/>
+              <a:rPr sz="1600" b="0">
+                <a:solidFill>
+                  <a:srgbClr val="1A1A1A"/>
+                </a:solidFill>
+                <a:latin typeface="Calibri"/>
+                <a:rFonts ascii="Calibri" hAnsi="Calibri" cs="Calibri"/>
               </a:rPr>
               <a:t>Раздел L: путь · Incoterms · RFQ</a:t>
             </a:r>
           </a:p>
           <a:p>
             <a:pPr>
-              <a:spcAft>
-                <a:spcPts val="600"/>
-              </a:spcAft>
-            </a:pPr>
-            <a:r>
-              <a:rPr sz="1500" b="0">
-                <a:solidFill>
-                  <a:srgbClr val="1C1C1C"/>
-                </a:solidFill>
-                <a:latin typeface="Calibri"/>
-              </a:rPr>
-              <a:t>Статус: рамка для поля / собеса.</a:t>
-            </a:r>
-          </a:p>
-          <a:p>
-            <a:pPr>
-              <a:spcAft>
-                <a:spcPts val="0"/>
-              </a:spcAft>
-            </a:pPr>
-            <a:r>
-              <a:rPr sz="1500" b="1">
-                <a:solidFill>
-                  <a:srgbClr val="1C1C1C"/>
-                </a:solidFill>
-                <a:latin typeface="Calibri"/>
-              </a:rPr>
-              <a:t>v2.0 - когда технолог даст цифры.</a:t>
+              <a:lnSpc>
+                <a:spcPct val="115000"/>
+              </a:lnSpc>
+              <a:spcBef>
+                <a:spcPts val="0"/>
+              </a:spcBef>
+              <a:spcAft>
+                <a:spcPts val="800"/>
+              </a:spcAft>
+            </a:pPr>
+            <a:r>
+              <a:rPr sz="1600" b="0">
+                <a:solidFill>
+                  <a:srgbClr val="1A1A1A"/>
+                </a:solidFill>
+                <a:latin typeface="Calibri"/>
+                <a:rFonts ascii="Calibri" hAnsi="Calibri" cs="Calibri"/>
+              </a:rPr>
+              <a:t>Статус: рамка для поля и собеседования.</a:t>
+            </a:r>
+          </a:p>
+          <a:p>
+            <a:pPr>
+              <a:lnSpc>
+                <a:spcPct val="115000"/>
+              </a:lnSpc>
+              <a:spcBef>
+                <a:spcPts val="0"/>
+              </a:spcBef>
+              <a:spcAft>
+                <a:spcPts val="800"/>
+              </a:spcAft>
+            </a:pPr>
+            <a:r>
+              <a:rPr sz="1600" b="1">
+                <a:solidFill>
+                  <a:srgbClr val="1A1A1A"/>
+                </a:solidFill>
+                <a:latin typeface="Calibri"/>
+                <a:rFonts ascii="Calibri" hAnsi="Calibri" cs="Calibri"/>
+              </a:rPr>
+              <a:t>v2.0 — когда технолог даст цифры.</a:t>
             </a:r>
           </a:p>
         </p:txBody>
@@ -4590,7 +5018,7 @@
             <a:avLst/>
           </a:prstGeom>
           <a:solidFill>
-            <a:srgbClr val="F7F5F2"/>
+            <a:srgbClr val="F5F3EF"/>
           </a:solidFill>
           <a:ln>
             <a:noFill/>
@@ -4627,13 +5055,13 @@
         <p:spPr>
           <a:xfrm>
             <a:off x="0" y="0"/>
-            <a:ext cx="109728" cy="6858000"/>
+            <a:ext cx="91440" cy="6858000"/>
           </a:xfrm>
           <a:prstGeom prst="rect">
             <a:avLst/>
           </a:prstGeom>
           <a:solidFill>
-            <a:srgbClr val="2F5D50"/>
+            <a:srgbClr val="2A554A"/>
           </a:solidFill>
           <a:ln>
             <a:noFill/>
@@ -4669,8 +5097,8 @@
         </p:nvSpPr>
         <p:spPr>
           <a:xfrm>
-            <a:off x="502920" y="256032"/>
-            <a:ext cx="11155680" cy="502920"/>
+            <a:off x="457200" y="256032"/>
+            <a:ext cx="11247120" cy="502920"/>
           </a:xfrm>
           <a:prstGeom prst="rect">
             <a:avLst/>
@@ -4684,11 +5112,12 @@
           <a:lstStyle/>
           <a:p>
             <a:r>
-              <a:rPr sz="2800" b="1">
-                <a:solidFill>
-                  <a:srgbClr val="2F5D50"/>
-                </a:solidFill>
-                <a:latin typeface="Calibri"/>
+              <a:rPr sz="2600" b="1">
+                <a:solidFill>
+                  <a:srgbClr val="2A554A"/>
+                </a:solidFill>
+                <a:latin typeface="Calibri"/>
+                <a:rFonts ascii="Calibri" hAnsi="Calibri" cs="Calibri"/>
               </a:rPr>
               <a:t>Итог и следующий шаг</a:t>
             </a:r>
@@ -4703,14 +5132,14 @@
         </p:nvSpPr>
         <p:spPr>
           <a:xfrm>
-            <a:off x="502920" y="777240"/>
-            <a:ext cx="11155680" cy="22860"/>
+            <a:off x="457200" y="804672"/>
+            <a:ext cx="2011680" cy="36576"/>
           </a:xfrm>
           <a:prstGeom prst="rect">
             <a:avLst/>
           </a:prstGeom>
           <a:solidFill>
-            <a:srgbClr val="D8D2C8"/>
+            <a:srgbClr val="2A554A"/>
           </a:solidFill>
           <a:ln>
             <a:noFill/>
@@ -4740,13 +5169,56 @@
       </p:sp>
       <p:sp>
         <p:nvSpPr>
-          <p:cNvPr id="6" name="TextBox 5"/>
+          <p:cNvPr id="6" name="Rectangle 5"/>
+          <p:cNvSpPr/>
+          <p:nvPr/>
+        </p:nvSpPr>
+        <p:spPr>
+          <a:xfrm>
+            <a:off x="457200" y="6263640"/>
+            <a:ext cx="11277295" cy="13716"/>
+          </a:xfrm>
+          <a:prstGeom prst="rect">
+            <a:avLst/>
+          </a:prstGeom>
+          <a:solidFill>
+            <a:srgbClr val="D4CEC4"/>
+          </a:solidFill>
+          <a:ln>
+            <a:noFill/>
+          </a:ln>
+        </p:spPr>
+        <p:style>
+          <a:lnRef idx="1">
+            <a:schemeClr val="accent1"/>
+          </a:lnRef>
+          <a:fillRef idx="3">
+            <a:schemeClr val="accent1"/>
+          </a:fillRef>
+          <a:effectRef idx="2">
+            <a:schemeClr val="accent1"/>
+          </a:effectRef>
+          <a:fontRef idx="minor">
+            <a:schemeClr val="lt1"/>
+          </a:fontRef>
+        </p:style>
+        <p:txBody>
+          <a:bodyPr rtlCol="0" anchor="ctr"/>
+          <a:lstStyle/>
+          <a:p>
+            <a:pPr algn="ctr"/>
+          </a:p>
+        </p:txBody>
+      </p:sp>
+      <p:sp>
+        <p:nvSpPr>
+          <p:cNvPr id="7" name="TextBox 6"/>
           <p:cNvSpPr txBox="1"/>
           <p:nvPr/>
         </p:nvSpPr>
         <p:spPr>
           <a:xfrm>
-            <a:off x="502920" y="6446520"/>
+            <a:off x="457200" y="6355080"/>
             <a:ext cx="9601200" cy="320040"/>
           </a:xfrm>
           <a:prstGeom prst="rect">
@@ -4763,25 +5235,26 @@
             <a:r>
               <a:rPr sz="1100" b="0">
                 <a:solidFill>
-                  <a:srgbClr val="5A5A5A"/>
-                </a:solidFill>
-                <a:latin typeface="Calibri"/>
-              </a:rPr>
-              <a:t>Travel+ Natural · пульт v1.14 · собес · не оферта</a:t>
-            </a:r>
-          </a:p>
-        </p:txBody>
-      </p:sp>
-      <p:sp>
-        <p:nvSpPr>
-          <p:cNvPr id="7" name="TextBox 6"/>
+                  <a:srgbClr val="5C5C5C"/>
+                </a:solidFill>
+                <a:latin typeface="Calibri"/>
+                <a:rFonts ascii="Calibri" hAnsi="Calibri" cs="Calibri"/>
+              </a:rPr>
+              <a:t>Travel+ Natural  ·  пульт v1.14  ·  собеседование  ·  не оферта</a:t>
+            </a:r>
+          </a:p>
+        </p:txBody>
+      </p:sp>
+      <p:sp>
+        <p:nvSpPr>
+          <p:cNvPr id="8" name="TextBox 7"/>
           <p:cNvSpPr txBox="1"/>
           <p:nvPr/>
         </p:nvSpPr>
         <p:spPr>
           <a:xfrm>
-            <a:off x="10607040" y="6446520"/>
-            <a:ext cx="1188720" cy="320040"/>
+            <a:off x="10515600" y="6355080"/>
+            <a:ext cx="1280160" cy="320040"/>
           </a:xfrm>
           <a:prstGeom prst="rect">
             <a:avLst/>
@@ -4798,29 +5271,30 @@
             <a:r>
               <a:rPr sz="1100" b="0">
                 <a:solidFill>
-                  <a:srgbClr val="5A5A5A"/>
-                </a:solidFill>
-                <a:latin typeface="Calibri"/>
-              </a:rPr>
-              <a:t>12/12</a:t>
-            </a:r>
-          </a:p>
-        </p:txBody>
-      </p:sp>
-      <p:sp>
-        <p:nvSpPr>
-          <p:cNvPr id="8" name="Rounded Rectangle 7"/>
+                  <a:srgbClr val="5C5C5C"/>
+                </a:solidFill>
+                <a:latin typeface="Calibri"/>
+                <a:rFonts ascii="Calibri" hAnsi="Calibri" cs="Calibri"/>
+              </a:rPr>
+              <a:t>12 / 12</a:t>
+            </a:r>
+          </a:p>
+        </p:txBody>
+      </p:sp>
+      <p:sp>
+        <p:nvSpPr>
+          <p:cNvPr id="9" name="Rounded Rectangle 8"/>
           <p:cNvSpPr/>
           <p:nvPr/>
         </p:nvSpPr>
         <p:spPr>
           <a:xfrm>
-            <a:off x="502920" y="1051560"/>
-            <a:ext cx="5349240" cy="5029200"/>
+            <a:off x="457200" y="960120"/>
+            <a:ext cx="5510631" cy="5074920"/>
           </a:xfrm>
           <a:prstGeom prst="roundRect">
             <a:avLst>
-              <a:gd name="adj" fmla="val 8000"/>
+              <a:gd name="adj" fmla="val 6000"/>
             </a:avLst>
           </a:prstGeom>
           <a:solidFill>
@@ -4828,7 +5302,7 @@
           </a:solidFill>
           <a:ln w="12700">
             <a:solidFill>
-              <a:srgbClr val="D8D2C8"/>
+              <a:srgbClr val="D4CEC4"/>
             </a:solidFill>
           </a:ln>
         </p:spPr>
@@ -4856,18 +5330,61 @@
       </p:sp>
       <p:sp>
         <p:nvSpPr>
-          <p:cNvPr id="9" name="Rounded Rectangle 8"/>
+          <p:cNvPr id="10" name="Rectangle 9"/>
           <p:cNvSpPr/>
           <p:nvPr/>
         </p:nvSpPr>
         <p:spPr>
           <a:xfrm>
-            <a:off x="6126480" y="1051560"/>
-            <a:ext cx="5440680" cy="5029200"/>
+            <a:off x="457200" y="960120"/>
+            <a:ext cx="5510631" cy="73152"/>
+          </a:xfrm>
+          <a:prstGeom prst="rect">
+            <a:avLst/>
+          </a:prstGeom>
+          <a:solidFill>
+            <a:srgbClr val="2A554A"/>
+          </a:solidFill>
+          <a:ln>
+            <a:noFill/>
+          </a:ln>
+        </p:spPr>
+        <p:style>
+          <a:lnRef idx="1">
+            <a:schemeClr val="accent1"/>
+          </a:lnRef>
+          <a:fillRef idx="3">
+            <a:schemeClr val="accent1"/>
+          </a:fillRef>
+          <a:effectRef idx="2">
+            <a:schemeClr val="accent1"/>
+          </a:effectRef>
+          <a:fontRef idx="minor">
+            <a:schemeClr val="lt1"/>
+          </a:fontRef>
+        </p:style>
+        <p:txBody>
+          <a:bodyPr rtlCol="0" anchor="ctr"/>
+          <a:lstStyle/>
+          <a:p>
+            <a:pPr algn="ctr"/>
+          </a:p>
+        </p:txBody>
+      </p:sp>
+      <p:sp>
+        <p:nvSpPr>
+          <p:cNvPr id="11" name="Rounded Rectangle 10"/>
+          <p:cNvSpPr/>
+          <p:nvPr/>
+        </p:nvSpPr>
+        <p:spPr>
+          <a:xfrm>
+            <a:off x="6223863" y="960120"/>
+            <a:ext cx="5510631" cy="5074920"/>
           </a:xfrm>
           <a:prstGeom prst="roundRect">
             <a:avLst>
-              <a:gd name="adj" fmla="val 8000"/>
+              <a:gd name="adj" fmla="val 6000"/>
             </a:avLst>
           </a:prstGeom>
           <a:solidFill>
@@ -4875,7 +5392,7 @@
           </a:solidFill>
           <a:ln w="12700">
             <a:solidFill>
-              <a:srgbClr val="D8D2C8"/>
+              <a:srgbClr val="D4CEC4"/>
             </a:solidFill>
           </a:ln>
         </p:spPr>
@@ -4903,14 +5420,57 @@
       </p:sp>
       <p:sp>
         <p:nvSpPr>
-          <p:cNvPr id="10" name="TextBox 9"/>
+          <p:cNvPr id="12" name="Rectangle 11"/>
+          <p:cNvSpPr/>
+          <p:nvPr/>
+        </p:nvSpPr>
+        <p:spPr>
+          <a:xfrm>
+            <a:off x="6223863" y="960120"/>
+            <a:ext cx="5510631" cy="73152"/>
+          </a:xfrm>
+          <a:prstGeom prst="rect">
+            <a:avLst/>
+          </a:prstGeom>
+          <a:solidFill>
+            <a:srgbClr val="2A554A"/>
+          </a:solidFill>
+          <a:ln>
+            <a:noFill/>
+          </a:ln>
+        </p:spPr>
+        <p:style>
+          <a:lnRef idx="1">
+            <a:schemeClr val="accent1"/>
+          </a:lnRef>
+          <a:fillRef idx="3">
+            <a:schemeClr val="accent1"/>
+          </a:fillRef>
+          <a:effectRef idx="2">
+            <a:schemeClr val="accent1"/>
+          </a:effectRef>
+          <a:fontRef idx="minor">
+            <a:schemeClr val="lt1"/>
+          </a:fontRef>
+        </p:style>
+        <p:txBody>
+          <a:bodyPr rtlCol="0" anchor="ctr"/>
+          <a:lstStyle/>
+          <a:p>
+            <a:pPr algn="ctr"/>
+          </a:p>
+        </p:txBody>
+      </p:sp>
+      <p:sp>
+        <p:nvSpPr>
+          <p:cNvPr id="13" name="TextBox 12"/>
           <p:cNvSpPr txBox="1"/>
           <p:nvPr/>
         </p:nvSpPr>
         <p:spPr>
           <a:xfrm>
-            <a:off x="777240" y="1234440"/>
-            <a:ext cx="4846320" cy="4663440"/>
+            <a:off x="749808" y="1216152"/>
+            <a:ext cx="4925415" cy="4663440"/>
           </a:xfrm>
           <a:prstGeom prst="rect">
             <a:avLst/>
@@ -4924,22 +5484,35 @@
           <a:lstStyle/>
           <a:p>
             <a:pPr>
-              <a:spcAft>
-                <a:spcPts val="1200"/>
-              </a:spcAft>
-            </a:pPr>
-            <a:r>
-              <a:rPr sz="2000" b="1">
-                <a:solidFill>
-                  <a:srgbClr val="2F5D50"/>
-                </a:solidFill>
-                <a:latin typeface="Calibri"/>
+              <a:lnSpc>
+                <a:spcPct val="115000"/>
+              </a:lnSpc>
+              <a:spcBef>
+                <a:spcPts val="0"/>
+              </a:spcBef>
+              <a:spcAft>
+                <a:spcPts val="1400"/>
+              </a:spcAft>
+            </a:pPr>
+            <a:r>
+              <a:rPr sz="1500" b="1">
+                <a:solidFill>
+                  <a:srgbClr val="2A554A"/>
+                </a:solidFill>
+                <a:latin typeface="Calibri"/>
+                <a:rFonts ascii="Calibri" hAnsi="Calibri" cs="Calibri"/>
               </a:rPr>
               <a:t>Собрал</a:t>
             </a:r>
           </a:p>
           <a:p>
             <a:pPr>
+              <a:lnSpc>
+                <a:spcPct val="115000"/>
+              </a:lnSpc>
+              <a:spcBef>
+                <a:spcPts val="0"/>
+              </a:spcBef>
               <a:spcAft>
                 <a:spcPts val="800"/>
               </a:spcAft>
@@ -4947,15 +5520,22 @@
             <a:r>
               <a:rPr sz="1600" b="0">
                 <a:solidFill>
-                  <a:srgbClr val="1C1C1C"/>
-                </a:solidFill>
-                <a:latin typeface="Calibri"/>
+                  <a:srgbClr val="1A1A1A"/>
+                </a:solidFill>
+                <a:latin typeface="Calibri"/>
+                <a:rFonts ascii="Calibri" hAnsi="Calibri" cs="Calibri"/>
               </a:rPr>
               <a:t>ДНК + StoryBrand + DoD</a:t>
             </a:r>
           </a:p>
           <a:p>
             <a:pPr>
+              <a:lnSpc>
+                <a:spcPct val="115000"/>
+              </a:lnSpc>
+              <a:spcBef>
+                <a:spcPts val="0"/>
+              </a:spcBef>
               <a:spcAft>
                 <a:spcPts val="800"/>
               </a:spcAft>
@@ -4963,41 +5543,56 @@
             <a:r>
               <a:rPr sz="1600" b="0">
                 <a:solidFill>
-                  <a:srgbClr val="1C1C1C"/>
-                </a:solidFill>
-                <a:latin typeface="Calibri"/>
-              </a:rPr>
-              <a:t>полевая защита</a:t>
-            </a:r>
-          </a:p>
-          <a:p>
-            <a:pPr>
-              <a:spcAft>
-                <a:spcPts val="1600"/>
+                  <a:srgbClr val="1A1A1A"/>
+                </a:solidFill>
+                <a:latin typeface="Calibri"/>
+                <a:rFonts ascii="Calibri" hAnsi="Calibri" cs="Calibri"/>
+              </a:rPr>
+              <a:t>Полевая защита</a:t>
+            </a:r>
+          </a:p>
+          <a:p>
+            <a:pPr>
+              <a:lnSpc>
+                <a:spcPct val="115000"/>
+              </a:lnSpc>
+              <a:spcBef>
+                <a:spcPts val="0"/>
+              </a:spcBef>
+              <a:spcAft>
+                <a:spcPts val="1400"/>
               </a:spcAft>
             </a:pPr>
             <a:r>
               <a:rPr sz="1600" b="0">
                 <a:solidFill>
-                  <a:srgbClr val="1C1C1C"/>
-                </a:solidFill>
-                <a:latin typeface="Calibri"/>
-              </a:rPr>
-              <a:t>China checklist (раздел L)</a:t>
-            </a:r>
-          </a:p>
-          <a:p>
-            <a:pPr>
-              <a:spcAft>
-                <a:spcPts val="0"/>
+                  <a:srgbClr val="1A1A1A"/>
+                </a:solidFill>
+                <a:latin typeface="Calibri"/>
+                <a:rFonts ascii="Calibri" hAnsi="Calibri" cs="Calibri"/>
+              </a:rPr>
+              <a:t>Чеклист поставок при Китае (раздел L)</a:t>
+            </a:r>
+          </a:p>
+          <a:p>
+            <a:pPr>
+              <a:lnSpc>
+                <a:spcPct val="115000"/>
+              </a:lnSpc>
+              <a:spcBef>
+                <a:spcPts val="0"/>
+              </a:spcBef>
+              <a:spcAft>
+                <a:spcPts val="600"/>
               </a:spcAft>
             </a:pPr>
             <a:r>
               <a:rPr sz="1400" b="0">
                 <a:solidFill>
-                  <a:srgbClr val="5A5A5A"/>
-                </a:solidFill>
-                <a:latin typeface="Calibri"/>
+                  <a:srgbClr val="5C5C5C"/>
+                </a:solidFill>
+                <a:latin typeface="Calibri"/>
+                <a:rFonts ascii="Calibri" hAnsi="Calibri" cs="Calibri"/>
               </a:rPr>
               <a:t>Не прайс завода. Не КП.</a:t>
             </a:r>
@@ -5006,14 +5601,14 @@
       </p:sp>
       <p:sp>
         <p:nvSpPr>
-          <p:cNvPr id="11" name="TextBox 10"/>
+          <p:cNvPr id="14" name="TextBox 13"/>
           <p:cNvSpPr txBox="1"/>
           <p:nvPr/>
         </p:nvSpPr>
         <p:spPr>
           <a:xfrm>
-            <a:off x="6400800" y="1234440"/>
-            <a:ext cx="4937760" cy="4663440"/>
+            <a:off x="6516471" y="1216152"/>
+            <a:ext cx="4925415" cy="4663440"/>
           </a:xfrm>
           <a:prstGeom prst="rect">
             <a:avLst/>
@@ -5027,80 +5622,115 @@
           <a:lstStyle/>
           <a:p>
             <a:pPr>
-              <a:spcAft>
-                <a:spcPts val="1200"/>
-              </a:spcAft>
-            </a:pPr>
-            <a:r>
-              <a:rPr sz="2000" b="1">
-                <a:solidFill>
-                  <a:srgbClr val="2F5D50"/>
-                </a:solidFill>
-                <a:latin typeface="Calibri"/>
+              <a:lnSpc>
+                <a:spcPct val="115000"/>
+              </a:lnSpc>
+              <a:spcBef>
+                <a:spcPts val="0"/>
+              </a:spcBef>
+              <a:spcAft>
+                <a:spcPts val="1400"/>
+              </a:spcAft>
+            </a:pPr>
+            <a:r>
+              <a:rPr sz="1500" b="1">
+                <a:solidFill>
+                  <a:srgbClr val="2A554A"/>
+                </a:solidFill>
+                <a:latin typeface="Calibri"/>
+                <a:rFonts ascii="Calibri" hAnsi="Calibri" cs="Calibri"/>
               </a:rPr>
               <a:t>Готов обсудить</a:t>
             </a:r>
           </a:p>
           <a:p>
             <a:pPr>
+              <a:lnSpc>
+                <a:spcPct val="115000"/>
+              </a:lnSpc>
+              <a:spcBef>
+                <a:spcPts val="0"/>
+              </a:spcBef>
               <a:spcAft>
                 <a:spcPts val="800"/>
               </a:spcAft>
             </a:pPr>
             <a:r>
-              <a:rPr sz="1500" b="0">
-                <a:solidFill>
-                  <a:srgbClr val="1C1C1C"/>
-                </a:solidFill>
-                <a:latin typeface="Calibri"/>
-              </a:rPr>
-              <a:t>1) приоритет блокеров этапа 2 с технологом</a:t>
-            </a:r>
-          </a:p>
-          <a:p>
-            <a:pPr>
+              <a:rPr sz="1600" b="0">
+                <a:solidFill>
+                  <a:srgbClr val="1A1A1A"/>
+                </a:solidFill>
+                <a:latin typeface="Calibri"/>
+                <a:rFonts ascii="Calibri" hAnsi="Calibri" cs="Calibri"/>
+              </a:rPr>
+              <a:t>1) Приоритет блокеров этапа 2 с технологом</a:t>
+            </a:r>
+          </a:p>
+          <a:p>
+            <a:pPr>
+              <a:lnSpc>
+                <a:spcPct val="115000"/>
+              </a:lnSpc>
+              <a:spcBef>
+                <a:spcPts val="0"/>
+              </a:spcBef>
               <a:spcAft>
                 <a:spcPts val="800"/>
               </a:spcAft>
             </a:pPr>
             <a:r>
-              <a:rPr sz="1500" b="0">
-                <a:solidFill>
-                  <a:srgbClr val="1C1C1C"/>
-                </a:solidFill>
-                <a:latin typeface="Calibri"/>
-              </a:rPr>
-              <a:t>2) пилотный сегмент eco / wellness</a:t>
-            </a:r>
-          </a:p>
-          <a:p>
-            <a:pPr>
-              <a:spcAft>
-                <a:spcPts val="1600"/>
-              </a:spcAft>
-            </a:pPr>
-            <a:r>
-              <a:rPr sz="1500" b="0">
-                <a:solidFill>
-                  <a:srgbClr val="1C1C1C"/>
-                </a:solidFill>
-                <a:latin typeface="Calibri"/>
-              </a:rPr>
-              <a:t>3) продажи без каннибализации HL</a:t>
-            </a:r>
-          </a:p>
-          <a:p>
-            <a:pPr>
-              <a:spcAft>
-                <a:spcPts val="0"/>
+              <a:rPr sz="1600" b="0">
+                <a:solidFill>
+                  <a:srgbClr val="1A1A1A"/>
+                </a:solidFill>
+                <a:latin typeface="Calibri"/>
+                <a:rFonts ascii="Calibri" hAnsi="Calibri" cs="Calibri"/>
+              </a:rPr>
+              <a:t>2) Пилотный сегмент eco / wellness</a:t>
+            </a:r>
+          </a:p>
+          <a:p>
+            <a:pPr>
+              <a:lnSpc>
+                <a:spcPct val="115000"/>
+              </a:lnSpc>
+              <a:spcBef>
+                <a:spcPts val="0"/>
+              </a:spcBef>
+              <a:spcAft>
+                <a:spcPts val="1400"/>
+              </a:spcAft>
+            </a:pPr>
+            <a:r>
+              <a:rPr sz="1600" b="0">
+                <a:solidFill>
+                  <a:srgbClr val="1A1A1A"/>
+                </a:solidFill>
+                <a:latin typeface="Calibri"/>
+                <a:rFonts ascii="Calibri" hAnsi="Calibri" cs="Calibri"/>
+              </a:rPr>
+              <a:t>3) Как вести продажи, чтобы Natural не ушёл в эконом Hotel Line</a:t>
+            </a:r>
+          </a:p>
+          <a:p>
+            <a:pPr>
+              <a:lnSpc>
+                <a:spcPct val="115000"/>
+              </a:lnSpc>
+              <a:spcBef>
+                <a:spcPts val="0"/>
+              </a:spcBef>
+              <a:spcAft>
+                <a:spcPts val="800"/>
               </a:spcAft>
             </a:pPr>
             <a:r>
               <a:rPr sz="1600" b="1">
                 <a:solidFill>
-                  <a:srgbClr val="1C1C1C"/>
-                </a:solidFill>
-                <a:latin typeface="Calibri"/>
+                  <a:srgbClr val="1A1A1A"/>
+                </a:solidFill>
+                <a:latin typeface="Calibri"/>
+                <a:rFonts ascii="Calibri" hAnsi="Calibri" cs="Calibri"/>
               </a:rPr>
               <a:t>Спасибо. Вопросы.</a:t>
             </a:r>
@@ -5140,7 +5770,7 @@
             <a:avLst/>
           </a:prstGeom>
           <a:solidFill>
-            <a:srgbClr val="F7F5F2"/>
+            <a:srgbClr val="F5F3EF"/>
           </a:solidFill>
           <a:ln>
             <a:noFill/>
@@ -5177,13 +5807,13 @@
         <p:spPr>
           <a:xfrm>
             <a:off x="0" y="0"/>
-            <a:ext cx="109728" cy="6858000"/>
+            <a:ext cx="91440" cy="6858000"/>
           </a:xfrm>
           <a:prstGeom prst="rect">
             <a:avLst/>
           </a:prstGeom>
           <a:solidFill>
-            <a:srgbClr val="2F5D50"/>
+            <a:srgbClr val="2A554A"/>
           </a:solidFill>
           <a:ln>
             <a:noFill/>
@@ -5219,8 +5849,8 @@
         </p:nvSpPr>
         <p:spPr>
           <a:xfrm>
-            <a:off x="502920" y="256032"/>
-            <a:ext cx="11155680" cy="502920"/>
+            <a:off x="457200" y="256032"/>
+            <a:ext cx="11247120" cy="502920"/>
           </a:xfrm>
           <a:prstGeom prst="rect">
             <a:avLst/>
@@ -5234,11 +5864,12 @@
           <a:lstStyle/>
           <a:p>
             <a:r>
-              <a:rPr sz="2800" b="1">
-                <a:solidFill>
-                  <a:srgbClr val="2F5D50"/>
-                </a:solidFill>
-                <a:latin typeface="Calibri"/>
+              <a:rPr sz="2600" b="1">
+                <a:solidFill>
+                  <a:srgbClr val="2A554A"/>
+                </a:solidFill>
+                <a:latin typeface="Calibri"/>
+                <a:rFonts ascii="Calibri" hAnsi="Calibri" cs="Calibri"/>
               </a:rPr>
               <a:t>Как понял роль</a:t>
             </a:r>
@@ -5253,14 +5884,14 @@
         </p:nvSpPr>
         <p:spPr>
           <a:xfrm>
-            <a:off x="502920" y="777240"/>
-            <a:ext cx="11155680" cy="22860"/>
+            <a:off x="457200" y="804672"/>
+            <a:ext cx="2011680" cy="36576"/>
           </a:xfrm>
           <a:prstGeom prst="rect">
             <a:avLst/>
           </a:prstGeom>
           <a:solidFill>
-            <a:srgbClr val="D8D2C8"/>
+            <a:srgbClr val="2A554A"/>
           </a:solidFill>
           <a:ln>
             <a:noFill/>
@@ -5290,13 +5921,56 @@
       </p:sp>
       <p:sp>
         <p:nvSpPr>
-          <p:cNvPr id="6" name="TextBox 5"/>
+          <p:cNvPr id="6" name="Rectangle 5"/>
+          <p:cNvSpPr/>
+          <p:nvPr/>
+        </p:nvSpPr>
+        <p:spPr>
+          <a:xfrm>
+            <a:off x="457200" y="6263640"/>
+            <a:ext cx="11277295" cy="13716"/>
+          </a:xfrm>
+          <a:prstGeom prst="rect">
+            <a:avLst/>
+          </a:prstGeom>
+          <a:solidFill>
+            <a:srgbClr val="D4CEC4"/>
+          </a:solidFill>
+          <a:ln>
+            <a:noFill/>
+          </a:ln>
+        </p:spPr>
+        <p:style>
+          <a:lnRef idx="1">
+            <a:schemeClr val="accent1"/>
+          </a:lnRef>
+          <a:fillRef idx="3">
+            <a:schemeClr val="accent1"/>
+          </a:fillRef>
+          <a:effectRef idx="2">
+            <a:schemeClr val="accent1"/>
+          </a:effectRef>
+          <a:fontRef idx="minor">
+            <a:schemeClr val="lt1"/>
+          </a:fontRef>
+        </p:style>
+        <p:txBody>
+          <a:bodyPr rtlCol="0" anchor="ctr"/>
+          <a:lstStyle/>
+          <a:p>
+            <a:pPr algn="ctr"/>
+          </a:p>
+        </p:txBody>
+      </p:sp>
+      <p:sp>
+        <p:nvSpPr>
+          <p:cNvPr id="7" name="TextBox 6"/>
           <p:cNvSpPr txBox="1"/>
           <p:nvPr/>
         </p:nvSpPr>
         <p:spPr>
           <a:xfrm>
-            <a:off x="502920" y="6446520"/>
+            <a:off x="457200" y="6355080"/>
             <a:ext cx="9601200" cy="320040"/>
           </a:xfrm>
           <a:prstGeom prst="rect">
@@ -5313,25 +5987,26 @@
             <a:r>
               <a:rPr sz="1100" b="0">
                 <a:solidFill>
-                  <a:srgbClr val="5A5A5A"/>
-                </a:solidFill>
-                <a:latin typeface="Calibri"/>
-              </a:rPr>
-              <a:t>Travel+ Natural · пульт v1.14 · собес · не оферта</a:t>
-            </a:r>
-          </a:p>
-        </p:txBody>
-      </p:sp>
-      <p:sp>
-        <p:nvSpPr>
-          <p:cNvPr id="7" name="TextBox 6"/>
+                  <a:srgbClr val="5C5C5C"/>
+                </a:solidFill>
+                <a:latin typeface="Calibri"/>
+                <a:rFonts ascii="Calibri" hAnsi="Calibri" cs="Calibri"/>
+              </a:rPr>
+              <a:t>Travel+ Natural  ·  пульт v1.14  ·  собеседование  ·  не оферта</a:t>
+            </a:r>
+          </a:p>
+        </p:txBody>
+      </p:sp>
+      <p:sp>
+        <p:nvSpPr>
+          <p:cNvPr id="8" name="TextBox 7"/>
           <p:cNvSpPr txBox="1"/>
           <p:nvPr/>
         </p:nvSpPr>
         <p:spPr>
           <a:xfrm>
-            <a:off x="10607040" y="6446520"/>
-            <a:ext cx="1188720" cy="320040"/>
+            <a:off x="10515600" y="6355080"/>
+            <a:ext cx="1280160" cy="320040"/>
           </a:xfrm>
           <a:prstGeom prst="rect">
             <a:avLst/>
@@ -5348,29 +6023,30 @@
             <a:r>
               <a:rPr sz="1100" b="0">
                 <a:solidFill>
-                  <a:srgbClr val="5A5A5A"/>
-                </a:solidFill>
-                <a:latin typeface="Calibri"/>
-              </a:rPr>
-              <a:t>2/12</a:t>
-            </a:r>
-          </a:p>
-        </p:txBody>
-      </p:sp>
-      <p:sp>
-        <p:nvSpPr>
-          <p:cNvPr id="8" name="Rounded Rectangle 7"/>
+                  <a:srgbClr val="5C5C5C"/>
+                </a:solidFill>
+                <a:latin typeface="Calibri"/>
+                <a:rFonts ascii="Calibri" hAnsi="Calibri" cs="Calibri"/>
+              </a:rPr>
+              <a:t>2 / 12</a:t>
+            </a:r>
+          </a:p>
+        </p:txBody>
+      </p:sp>
+      <p:sp>
+        <p:nvSpPr>
+          <p:cNvPr id="9" name="Rounded Rectangle 8"/>
           <p:cNvSpPr/>
           <p:nvPr/>
         </p:nvSpPr>
         <p:spPr>
           <a:xfrm>
-            <a:off x="502920" y="1051560"/>
-            <a:ext cx="5349240" cy="5029200"/>
+            <a:off x="457200" y="960120"/>
+            <a:ext cx="5510631" cy="5074920"/>
           </a:xfrm>
           <a:prstGeom prst="roundRect">
             <a:avLst>
-              <a:gd name="adj" fmla="val 8000"/>
+              <a:gd name="adj" fmla="val 6000"/>
             </a:avLst>
           </a:prstGeom>
           <a:solidFill>
@@ -5378,7 +6054,7 @@
           </a:solidFill>
           <a:ln w="12700">
             <a:solidFill>
-              <a:srgbClr val="D8D2C8"/>
+              <a:srgbClr val="D4CEC4"/>
             </a:solidFill>
           </a:ln>
         </p:spPr>
@@ -5406,18 +6082,61 @@
       </p:sp>
       <p:sp>
         <p:nvSpPr>
-          <p:cNvPr id="9" name="Rounded Rectangle 8"/>
+          <p:cNvPr id="10" name="Rectangle 9"/>
           <p:cNvSpPr/>
           <p:nvPr/>
         </p:nvSpPr>
         <p:spPr>
           <a:xfrm>
-            <a:off x="6126480" y="1051560"/>
-            <a:ext cx="5440680" cy="5029200"/>
+            <a:off x="457200" y="960120"/>
+            <a:ext cx="5510631" cy="73152"/>
+          </a:xfrm>
+          <a:prstGeom prst="rect">
+            <a:avLst/>
+          </a:prstGeom>
+          <a:solidFill>
+            <a:srgbClr val="2A554A"/>
+          </a:solidFill>
+          <a:ln>
+            <a:noFill/>
+          </a:ln>
+        </p:spPr>
+        <p:style>
+          <a:lnRef idx="1">
+            <a:schemeClr val="accent1"/>
+          </a:lnRef>
+          <a:fillRef idx="3">
+            <a:schemeClr val="accent1"/>
+          </a:fillRef>
+          <a:effectRef idx="2">
+            <a:schemeClr val="accent1"/>
+          </a:effectRef>
+          <a:fontRef idx="minor">
+            <a:schemeClr val="lt1"/>
+          </a:fontRef>
+        </p:style>
+        <p:txBody>
+          <a:bodyPr rtlCol="0" anchor="ctr"/>
+          <a:lstStyle/>
+          <a:p>
+            <a:pPr algn="ctr"/>
+          </a:p>
+        </p:txBody>
+      </p:sp>
+      <p:sp>
+        <p:nvSpPr>
+          <p:cNvPr id="11" name="Rounded Rectangle 10"/>
+          <p:cNvSpPr/>
+          <p:nvPr/>
+        </p:nvSpPr>
+        <p:spPr>
+          <a:xfrm>
+            <a:off x="6223863" y="960120"/>
+            <a:ext cx="5510631" cy="5074920"/>
           </a:xfrm>
           <a:prstGeom prst="roundRect">
             <a:avLst>
-              <a:gd name="adj" fmla="val 8000"/>
+              <a:gd name="adj" fmla="val 6000"/>
             </a:avLst>
           </a:prstGeom>
           <a:solidFill>
@@ -5425,7 +6144,7 @@
           </a:solidFill>
           <a:ln w="12700">
             <a:solidFill>
-              <a:srgbClr val="D8D2C8"/>
+              <a:srgbClr val="D4CEC4"/>
             </a:solidFill>
           </a:ln>
         </p:spPr>
@@ -5453,14 +6172,57 @@
       </p:sp>
       <p:sp>
         <p:nvSpPr>
-          <p:cNvPr id="10" name="TextBox 9"/>
+          <p:cNvPr id="12" name="Rectangle 11"/>
+          <p:cNvSpPr/>
+          <p:nvPr/>
+        </p:nvSpPr>
+        <p:spPr>
+          <a:xfrm>
+            <a:off x="6223863" y="960120"/>
+            <a:ext cx="5510631" cy="73152"/>
+          </a:xfrm>
+          <a:prstGeom prst="rect">
+            <a:avLst/>
+          </a:prstGeom>
+          <a:solidFill>
+            <a:srgbClr val="2A554A"/>
+          </a:solidFill>
+          <a:ln>
+            <a:noFill/>
+          </a:ln>
+        </p:spPr>
+        <p:style>
+          <a:lnRef idx="1">
+            <a:schemeClr val="accent1"/>
+          </a:lnRef>
+          <a:fillRef idx="3">
+            <a:schemeClr val="accent1"/>
+          </a:fillRef>
+          <a:effectRef idx="2">
+            <a:schemeClr val="accent1"/>
+          </a:effectRef>
+          <a:fontRef idx="minor">
+            <a:schemeClr val="lt1"/>
+          </a:fontRef>
+        </p:style>
+        <p:txBody>
+          <a:bodyPr rtlCol="0" anchor="ctr"/>
+          <a:lstStyle/>
+          <a:p>
+            <a:pPr algn="ctr"/>
+          </a:p>
+        </p:txBody>
+      </p:sp>
+      <p:sp>
+        <p:nvSpPr>
+          <p:cNvPr id="13" name="TextBox 12"/>
           <p:cNvSpPr txBox="1"/>
           <p:nvPr/>
         </p:nvSpPr>
         <p:spPr>
           <a:xfrm>
-            <a:off x="777240" y="1280160"/>
-            <a:ext cx="4846320" cy="4572000"/>
+            <a:off x="749808" y="1216152"/>
+            <a:ext cx="4925415" cy="4663440"/>
           </a:xfrm>
           <a:prstGeom prst="rect">
             <a:avLst/>
@@ -5474,112 +6236,161 @@
           <a:lstStyle/>
           <a:p>
             <a:pPr>
-              <a:spcAft>
-                <a:spcPts val="1200"/>
-              </a:spcAft>
-            </a:pPr>
-            <a:r>
-              <a:rPr sz="2000" b="1">
-                <a:solidFill>
-                  <a:srgbClr val="2F5D50"/>
-                </a:solidFill>
-                <a:latin typeface="Calibri"/>
+              <a:lnSpc>
+                <a:spcPct val="115000"/>
+              </a:lnSpc>
+              <a:spcBef>
+                <a:spcPts val="0"/>
+              </a:spcBef>
+              <a:spcAft>
+                <a:spcPts val="1400"/>
+              </a:spcAft>
+            </a:pPr>
+            <a:r>
+              <a:rPr sz="1500" b="1">
+                <a:solidFill>
+                  <a:srgbClr val="2A554A"/>
+                </a:solidFill>
+                <a:latin typeface="Calibri"/>
+                <a:rFonts ascii="Calibri" hAnsi="Calibri" cs="Calibri"/>
               </a:rPr>
               <a:t>Travel+</a:t>
             </a:r>
           </a:p>
           <a:p>
             <a:pPr>
-              <a:spcAft>
-                <a:spcPts val="1000"/>
+              <a:lnSpc>
+                <a:spcPct val="115000"/>
+              </a:lnSpc>
+              <a:spcBef>
+                <a:spcPts val="0"/>
+              </a:spcBef>
+              <a:spcAft>
+                <a:spcPts val="800"/>
               </a:spcAft>
             </a:pPr>
             <a:r>
               <a:rPr sz="1600" b="0">
                 <a:solidFill>
-                  <a:srgbClr val="1C1C1C"/>
-                </a:solidFill>
-                <a:latin typeface="Calibri"/>
-              </a:rPr>
-              <a:t>Производство и one-stop на номер</a:t>
-            </a:r>
-          </a:p>
-          <a:p>
-            <a:pPr>
-              <a:spcAft>
-                <a:spcPts val="400"/>
+                  <a:srgbClr val="1A1A1A"/>
+                </a:solidFill>
+                <a:latin typeface="Calibri"/>
+                <a:rFonts ascii="Calibri" hAnsi="Calibri" cs="Calibri"/>
+              </a:rPr>
+              <a:t>Производство и one-stop на номер:</a:t>
+            </a:r>
+          </a:p>
+          <a:p>
+            <a:pPr>
+              <a:lnSpc>
+                <a:spcPct val="115000"/>
+              </a:lnSpc>
+              <a:spcBef>
+                <a:spcPts val="0"/>
+              </a:spcBef>
+              <a:spcAft>
+                <a:spcPts val="800"/>
               </a:spcAft>
             </a:pPr>
             <a:r>
               <a:rPr sz="1600" b="0">
                 <a:solidFill>
-                  <a:srgbClr val="1C1C1C"/>
-                </a:solidFill>
-                <a:latin typeface="Calibri"/>
-              </a:rPr>
-              <a:t>· косметика</a:t>
-            </a:r>
-          </a:p>
-          <a:p>
-            <a:pPr>
-              <a:spcAft>
-                <a:spcPts val="400"/>
+                  <a:srgbClr val="1A1A1A"/>
+                </a:solidFill>
+                <a:latin typeface="Calibri"/>
+                <a:rFonts ascii="Calibri" hAnsi="Calibri" cs="Calibri"/>
+              </a:rPr>
+              <a:t>• Косметика</a:t>
+            </a:r>
+          </a:p>
+          <a:p>
+            <a:pPr>
+              <a:lnSpc>
+                <a:spcPct val="115000"/>
+              </a:lnSpc>
+              <a:spcBef>
+                <a:spcPts val="0"/>
+              </a:spcBef>
+              <a:spcAft>
+                <a:spcPts val="800"/>
               </a:spcAft>
             </a:pPr>
             <a:r>
               <a:rPr sz="1600" b="0">
                 <a:solidFill>
-                  <a:srgbClr val="1C1C1C"/>
-                </a:solidFill>
-                <a:latin typeface="Calibri"/>
-              </a:rPr>
-              <a:t>· тапочки</a:t>
-            </a:r>
-          </a:p>
-          <a:p>
-            <a:pPr>
-              <a:spcAft>
-                <a:spcPts val="1600"/>
+                  <a:srgbClr val="1A1A1A"/>
+                </a:solidFill>
+                <a:latin typeface="Calibri"/>
+                <a:rFonts ascii="Calibri" hAnsi="Calibri" cs="Calibri"/>
+              </a:rPr>
+              <a:t>• Тапочки</a:t>
+            </a:r>
+          </a:p>
+          <a:p>
+            <a:pPr>
+              <a:lnSpc>
+                <a:spcPct val="115000"/>
+              </a:lnSpc>
+              <a:spcBef>
+                <a:spcPts val="0"/>
+              </a:spcBef>
+              <a:spcAft>
+                <a:spcPts val="1400"/>
               </a:spcAft>
             </a:pPr>
             <a:r>
               <a:rPr sz="1600" b="0">
                 <a:solidFill>
-                  <a:srgbClr val="1C1C1C"/>
-                </a:solidFill>
-                <a:latin typeface="Calibri"/>
-              </a:rPr>
-              <a:t>· наборы</a:t>
-            </a:r>
-          </a:p>
-          <a:p>
-            <a:pPr>
-              <a:spcAft>
-                <a:spcPts val="400"/>
-              </a:spcAft>
-            </a:pPr>
-            <a:r>
-              <a:rPr sz="1500" b="1">
-                <a:solidFill>
-                  <a:srgbClr val="1C1C1C"/>
-                </a:solidFill>
-                <a:latin typeface="Calibri"/>
+                  <a:srgbClr val="1A1A1A"/>
+                </a:solidFill>
+                <a:latin typeface="Calibri"/>
+                <a:rFonts ascii="Calibri" hAnsi="Calibri" cs="Calibri"/>
+              </a:rPr>
+              <a:t>• Наборы</a:t>
+            </a:r>
+          </a:p>
+          <a:p>
+            <a:pPr>
+              <a:lnSpc>
+                <a:spcPct val="115000"/>
+              </a:lnSpc>
+              <a:spcBef>
+                <a:spcPts val="0"/>
+              </a:spcBef>
+              <a:spcAft>
+                <a:spcPts val="800"/>
+              </a:spcAft>
+            </a:pPr>
+            <a:r>
+              <a:rPr sz="1600" b="1">
+                <a:solidFill>
+                  <a:srgbClr val="1A1A1A"/>
+                </a:solidFill>
+                <a:latin typeface="Calibri"/>
+                <a:rFonts ascii="Calibri" hAnsi="Calibri" cs="Calibri"/>
               </a:rPr>
               <a:t>Не IT-roadmap.</a:t>
             </a:r>
           </a:p>
           <a:p>
             <a:pPr>
-              <a:spcAft>
-                <a:spcPts val="0"/>
-              </a:spcAft>
-            </a:pPr>
-            <a:r>
-              <a:rPr sz="1500" b="0">
-                <a:solidFill>
-                  <a:srgbClr val="1C1C1C"/>
-                </a:solidFill>
-                <a:latin typeface="Calibri"/>
+              <a:lnSpc>
+                <a:spcPct val="115000"/>
+              </a:lnSpc>
+              <a:spcBef>
+                <a:spcPts val="0"/>
+              </a:spcBef>
+              <a:spcAft>
+                <a:spcPts val="800"/>
+              </a:spcAft>
+            </a:pPr>
+            <a:r>
+              <a:rPr sz="1600" b="0">
+                <a:solidFill>
+                  <a:srgbClr val="1A1A1A"/>
+                </a:solidFill>
+                <a:latin typeface="Calibri"/>
+                <a:rFonts ascii="Calibri" hAnsi="Calibri" cs="Calibri"/>
               </a:rPr>
               <a:t>Товар от идеи до полки и маржи.</a:t>
             </a:r>
@@ -5588,14 +6399,14 @@
       </p:sp>
       <p:sp>
         <p:nvSpPr>
-          <p:cNvPr id="11" name="TextBox 10"/>
+          <p:cNvPr id="14" name="TextBox 13"/>
           <p:cNvSpPr txBox="1"/>
           <p:nvPr/>
         </p:nvSpPr>
         <p:spPr>
           <a:xfrm>
-            <a:off x="6400800" y="1280160"/>
-            <a:ext cx="4937760" cy="4572000"/>
+            <a:off x="6516471" y="1216152"/>
+            <a:ext cx="4925415" cy="4663440"/>
           </a:xfrm>
           <a:prstGeom prst="rect">
             <a:avLst/>
@@ -5609,82 +6420,117 @@
           <a:lstStyle/>
           <a:p>
             <a:pPr>
-              <a:spcAft>
-                <a:spcPts val="1200"/>
-              </a:spcAft>
-            </a:pPr>
-            <a:r>
-              <a:rPr sz="2000" b="1">
-                <a:solidFill>
-                  <a:srgbClr val="2F5D50"/>
-                </a:solidFill>
-                <a:latin typeface="Calibri"/>
+              <a:lnSpc>
+                <a:spcPct val="115000"/>
+              </a:lnSpc>
+              <a:spcBef>
+                <a:spcPts val="0"/>
+              </a:spcBef>
+              <a:spcAft>
+                <a:spcPts val="1400"/>
+              </a:spcAft>
+            </a:pPr>
+            <a:r>
+              <a:rPr sz="1500" b="1">
+                <a:solidFill>
+                  <a:srgbClr val="2A554A"/>
+                </a:solidFill>
+                <a:latin typeface="Calibri"/>
+                <a:rFonts ascii="Calibri" hAnsi="Calibri" cs="Calibri"/>
               </a:rPr>
               <a:t>Роль здесь</a:t>
             </a:r>
           </a:p>
           <a:p>
             <a:pPr>
-              <a:spcAft>
-                <a:spcPts val="600"/>
+              <a:lnSpc>
+                <a:spcPct val="115000"/>
+              </a:lnSpc>
+              <a:spcBef>
+                <a:spcPts val="0"/>
+              </a:spcBef>
+              <a:spcAft>
+                <a:spcPts val="800"/>
               </a:spcAft>
             </a:pPr>
             <a:r>
               <a:rPr sz="1600" b="0">
                 <a:solidFill>
-                  <a:srgbClr val="1C1C1C"/>
-                </a:solidFill>
-                <a:latin typeface="Calibri"/>
-              </a:rPr>
-              <a:t>· ассортимент и новинки</a:t>
-            </a:r>
-          </a:p>
-          <a:p>
-            <a:pPr>
-              <a:spcAft>
-                <a:spcPts val="600"/>
+                  <a:srgbClr val="1A1A1A"/>
+                </a:solidFill>
+                <a:latin typeface="Calibri"/>
+                <a:rFonts ascii="Calibri" hAnsi="Calibri" cs="Calibri"/>
+              </a:rPr>
+              <a:t>• Ассортимент и новинки</a:t>
+            </a:r>
+          </a:p>
+          <a:p>
+            <a:pPr>
+              <a:lnSpc>
+                <a:spcPct val="115000"/>
+              </a:lnSpc>
+              <a:spcBef>
+                <a:spcPts val="0"/>
+              </a:spcBef>
+              <a:spcAft>
+                <a:spcPts val="800"/>
               </a:spcAft>
             </a:pPr>
             <a:r>
               <a:rPr sz="1600" b="0">
                 <a:solidFill>
-                  <a:srgbClr val="1C1C1C"/>
-                </a:solidFill>
-                <a:latin typeface="Calibri"/>
-              </a:rPr>
-              <a:t>· позиция линейки в доме брендов</a:t>
-            </a:r>
-          </a:p>
-          <a:p>
-            <a:pPr>
-              <a:spcAft>
-                <a:spcPts val="600"/>
+                  <a:srgbClr val="1A1A1A"/>
+                </a:solidFill>
+                <a:latin typeface="Calibri"/>
+                <a:rFonts ascii="Calibri" hAnsi="Calibri" cs="Calibri"/>
+              </a:rPr>
+              <a:t>• Позиция линейки в доме брендов</a:t>
+            </a:r>
+          </a:p>
+          <a:p>
+            <a:pPr>
+              <a:lnSpc>
+                <a:spcPct val="115000"/>
+              </a:lnSpc>
+              <a:spcBef>
+                <a:spcPts val="0"/>
+              </a:spcBef>
+              <a:spcAft>
+                <a:spcPts val="800"/>
               </a:spcAft>
             </a:pPr>
             <a:r>
               <a:rPr sz="1600" b="0">
                 <a:solidFill>
-                  <a:srgbClr val="1C1C1C"/>
-                </a:solidFill>
-                <a:latin typeface="Calibri"/>
-              </a:rPr>
-              <a:t>· продукт и доказательства до витрины</a:t>
-            </a:r>
-          </a:p>
-          <a:p>
-            <a:pPr>
-              <a:spcAft>
-                <a:spcPts val="0"/>
+                  <a:srgbClr val="1A1A1A"/>
+                </a:solidFill>
+                <a:latin typeface="Calibri"/>
+                <a:rFonts ascii="Calibri" hAnsi="Calibri" cs="Calibri"/>
+              </a:rPr>
+              <a:t>• Продукт и доказательства до витрины</a:t>
+            </a:r>
+          </a:p>
+          <a:p>
+            <a:pPr>
+              <a:lnSpc>
+                <a:spcPct val="115000"/>
+              </a:lnSpc>
+              <a:spcBef>
+                <a:spcPts val="0"/>
+              </a:spcBef>
+              <a:spcAft>
+                <a:spcPts val="800"/>
               </a:spcAft>
             </a:pPr>
             <a:r>
               <a:rPr sz="1600" b="0">
                 <a:solidFill>
-                  <a:srgbClr val="1C1C1C"/>
-                </a:solidFill>
-                <a:latin typeface="Calibri"/>
-              </a:rPr>
-              <a:t>· связка технолог → продажи → экономика → поставка</a:t>
+                  <a:srgbClr val="1A1A1A"/>
+                </a:solidFill>
+                <a:latin typeface="Calibri"/>
+                <a:rFonts ascii="Calibri" hAnsi="Calibri" cs="Calibri"/>
+              </a:rPr>
+              <a:t>• Связка: технолог → продажи → экономика → поставка</a:t>
             </a:r>
           </a:p>
         </p:txBody>
@@ -5722,7 +6568,7 @@
             <a:avLst/>
           </a:prstGeom>
           <a:solidFill>
-            <a:srgbClr val="F7F5F2"/>
+            <a:srgbClr val="F5F3EF"/>
           </a:solidFill>
           <a:ln>
             <a:noFill/>
@@ -5759,13 +6605,13 @@
         <p:spPr>
           <a:xfrm>
             <a:off x="0" y="0"/>
-            <a:ext cx="109728" cy="6858000"/>
+            <a:ext cx="91440" cy="6858000"/>
           </a:xfrm>
           <a:prstGeom prst="rect">
             <a:avLst/>
           </a:prstGeom>
           <a:solidFill>
-            <a:srgbClr val="2F5D50"/>
+            <a:srgbClr val="2A554A"/>
           </a:solidFill>
           <a:ln>
             <a:noFill/>
@@ -5801,8 +6647,8 @@
         </p:nvSpPr>
         <p:spPr>
           <a:xfrm>
-            <a:off x="502920" y="256032"/>
-            <a:ext cx="11155680" cy="502920"/>
+            <a:off x="457200" y="256032"/>
+            <a:ext cx="11247120" cy="502920"/>
           </a:xfrm>
           <a:prstGeom prst="rect">
             <a:avLst/>
@@ -5816,11 +6662,12 @@
           <a:lstStyle/>
           <a:p>
             <a:r>
-              <a:rPr sz="2800" b="1">
-                <a:solidFill>
-                  <a:srgbClr val="2F5D50"/>
-                </a:solidFill>
-                <a:latin typeface="Calibri"/>
+              <a:rPr sz="2600" b="1">
+                <a:solidFill>
+                  <a:srgbClr val="2A554A"/>
+                </a:solidFill>
+                <a:latin typeface="Calibri"/>
+                <a:rFonts ascii="Calibri" hAnsi="Calibri" cs="Calibri"/>
               </a:rPr>
               <a:t>Дыра на витрине</a:t>
             </a:r>
@@ -5835,14 +6682,14 @@
         </p:nvSpPr>
         <p:spPr>
           <a:xfrm>
-            <a:off x="502920" y="777240"/>
-            <a:ext cx="11155680" cy="22860"/>
+            <a:off x="457200" y="804672"/>
+            <a:ext cx="2011680" cy="36576"/>
           </a:xfrm>
           <a:prstGeom prst="rect">
             <a:avLst/>
           </a:prstGeom>
           <a:solidFill>
-            <a:srgbClr val="D8D2C8"/>
+            <a:srgbClr val="2A554A"/>
           </a:solidFill>
           <a:ln>
             <a:noFill/>
@@ -5872,13 +6719,56 @@
       </p:sp>
       <p:sp>
         <p:nvSpPr>
-          <p:cNvPr id="6" name="TextBox 5"/>
+          <p:cNvPr id="6" name="Rectangle 5"/>
+          <p:cNvSpPr/>
+          <p:nvPr/>
+        </p:nvSpPr>
+        <p:spPr>
+          <a:xfrm>
+            <a:off x="457200" y="6263640"/>
+            <a:ext cx="11277295" cy="13716"/>
+          </a:xfrm>
+          <a:prstGeom prst="rect">
+            <a:avLst/>
+          </a:prstGeom>
+          <a:solidFill>
+            <a:srgbClr val="D4CEC4"/>
+          </a:solidFill>
+          <a:ln>
+            <a:noFill/>
+          </a:ln>
+        </p:spPr>
+        <p:style>
+          <a:lnRef idx="1">
+            <a:schemeClr val="accent1"/>
+          </a:lnRef>
+          <a:fillRef idx="3">
+            <a:schemeClr val="accent1"/>
+          </a:fillRef>
+          <a:effectRef idx="2">
+            <a:schemeClr val="accent1"/>
+          </a:effectRef>
+          <a:fontRef idx="minor">
+            <a:schemeClr val="lt1"/>
+          </a:fontRef>
+        </p:style>
+        <p:txBody>
+          <a:bodyPr rtlCol="0" anchor="ctr"/>
+          <a:lstStyle/>
+          <a:p>
+            <a:pPr algn="ctr"/>
+          </a:p>
+        </p:txBody>
+      </p:sp>
+      <p:sp>
+        <p:nvSpPr>
+          <p:cNvPr id="7" name="TextBox 6"/>
           <p:cNvSpPr txBox="1"/>
           <p:nvPr/>
         </p:nvSpPr>
         <p:spPr>
           <a:xfrm>
-            <a:off x="502920" y="6446520"/>
+            <a:off x="457200" y="6355080"/>
             <a:ext cx="9601200" cy="320040"/>
           </a:xfrm>
           <a:prstGeom prst="rect">
@@ -5895,25 +6785,26 @@
             <a:r>
               <a:rPr sz="1100" b="0">
                 <a:solidFill>
-                  <a:srgbClr val="5A5A5A"/>
-                </a:solidFill>
-                <a:latin typeface="Calibri"/>
-              </a:rPr>
-              <a:t>Travel+ Natural · пульт v1.14 · собес · не оферта</a:t>
-            </a:r>
-          </a:p>
-        </p:txBody>
-      </p:sp>
-      <p:sp>
-        <p:nvSpPr>
-          <p:cNvPr id="7" name="TextBox 6"/>
+                  <a:srgbClr val="5C5C5C"/>
+                </a:solidFill>
+                <a:latin typeface="Calibri"/>
+                <a:rFonts ascii="Calibri" hAnsi="Calibri" cs="Calibri"/>
+              </a:rPr>
+              <a:t>Travel+ Natural  ·  пульт v1.14  ·  собеседование  ·  не оферта</a:t>
+            </a:r>
+          </a:p>
+        </p:txBody>
+      </p:sp>
+      <p:sp>
+        <p:nvSpPr>
+          <p:cNvPr id="8" name="TextBox 7"/>
           <p:cNvSpPr txBox="1"/>
           <p:nvPr/>
         </p:nvSpPr>
         <p:spPr>
           <a:xfrm>
-            <a:off x="10607040" y="6446520"/>
-            <a:ext cx="1188720" cy="320040"/>
+            <a:off x="10515600" y="6355080"/>
+            <a:ext cx="1280160" cy="320040"/>
           </a:xfrm>
           <a:prstGeom prst="rect">
             <a:avLst/>
@@ -5930,29 +6821,30 @@
             <a:r>
               <a:rPr sz="1100" b="0">
                 <a:solidFill>
-                  <a:srgbClr val="5A5A5A"/>
-                </a:solidFill>
-                <a:latin typeface="Calibri"/>
-              </a:rPr>
-              <a:t>3/12</a:t>
-            </a:r>
-          </a:p>
-        </p:txBody>
-      </p:sp>
-      <p:sp>
-        <p:nvSpPr>
-          <p:cNvPr id="8" name="Rounded Rectangle 7"/>
+                  <a:srgbClr val="5C5C5C"/>
+                </a:solidFill>
+                <a:latin typeface="Calibri"/>
+                <a:rFonts ascii="Calibri" hAnsi="Calibri" cs="Calibri"/>
+              </a:rPr>
+              <a:t>3 / 12</a:t>
+            </a:r>
+          </a:p>
+        </p:txBody>
+      </p:sp>
+      <p:sp>
+        <p:nvSpPr>
+          <p:cNvPr id="9" name="Rounded Rectangle 8"/>
           <p:cNvSpPr/>
           <p:nvPr/>
         </p:nvSpPr>
         <p:spPr>
           <a:xfrm>
-            <a:off x="502920" y="1051560"/>
-            <a:ext cx="5349240" cy="5029200"/>
+            <a:off x="457200" y="960120"/>
+            <a:ext cx="5510631" cy="5074920"/>
           </a:xfrm>
           <a:prstGeom prst="roundRect">
             <a:avLst>
-              <a:gd name="adj" fmla="val 8000"/>
+              <a:gd name="adj" fmla="val 6000"/>
             </a:avLst>
           </a:prstGeom>
           <a:solidFill>
@@ -5960,7 +6852,7 @@
           </a:solidFill>
           <a:ln w="12700">
             <a:solidFill>
-              <a:srgbClr val="D8D2C8"/>
+              <a:srgbClr val="D4CEC4"/>
             </a:solidFill>
           </a:ln>
         </p:spPr>
@@ -5988,18 +6880,61 @@
       </p:sp>
       <p:sp>
         <p:nvSpPr>
-          <p:cNvPr id="9" name="Rounded Rectangle 8"/>
+          <p:cNvPr id="10" name="Rectangle 9"/>
           <p:cNvSpPr/>
           <p:nvPr/>
         </p:nvSpPr>
         <p:spPr>
           <a:xfrm>
-            <a:off x="6126480" y="1051560"/>
-            <a:ext cx="5440680" cy="5029200"/>
+            <a:off x="457200" y="960120"/>
+            <a:ext cx="5510631" cy="73152"/>
+          </a:xfrm>
+          <a:prstGeom prst="rect">
+            <a:avLst/>
+          </a:prstGeom>
+          <a:solidFill>
+            <a:srgbClr val="2A554A"/>
+          </a:solidFill>
+          <a:ln>
+            <a:noFill/>
+          </a:ln>
+        </p:spPr>
+        <p:style>
+          <a:lnRef idx="1">
+            <a:schemeClr val="accent1"/>
+          </a:lnRef>
+          <a:fillRef idx="3">
+            <a:schemeClr val="accent1"/>
+          </a:fillRef>
+          <a:effectRef idx="2">
+            <a:schemeClr val="accent1"/>
+          </a:effectRef>
+          <a:fontRef idx="minor">
+            <a:schemeClr val="lt1"/>
+          </a:fontRef>
+        </p:style>
+        <p:txBody>
+          <a:bodyPr rtlCol="0" anchor="ctr"/>
+          <a:lstStyle/>
+          <a:p>
+            <a:pPr algn="ctr"/>
+          </a:p>
+        </p:txBody>
+      </p:sp>
+      <p:sp>
+        <p:nvSpPr>
+          <p:cNvPr id="11" name="Rounded Rectangle 10"/>
+          <p:cNvSpPr/>
+          <p:nvPr/>
+        </p:nvSpPr>
+        <p:spPr>
+          <a:xfrm>
+            <a:off x="6223863" y="960120"/>
+            <a:ext cx="5510631" cy="5074920"/>
           </a:xfrm>
           <a:prstGeom prst="roundRect">
             <a:avLst>
-              <a:gd name="adj" fmla="val 8000"/>
+              <a:gd name="adj" fmla="val 6000"/>
             </a:avLst>
           </a:prstGeom>
           <a:solidFill>
@@ -6007,7 +6942,7 @@
           </a:solidFill>
           <a:ln w="12700">
             <a:solidFill>
-              <a:srgbClr val="D8D2C8"/>
+              <a:srgbClr val="D4CEC4"/>
             </a:solidFill>
           </a:ln>
         </p:spPr>
@@ -6035,14 +6970,57 @@
       </p:sp>
       <p:sp>
         <p:nvSpPr>
-          <p:cNvPr id="10" name="TextBox 9"/>
+          <p:cNvPr id="12" name="Rectangle 11"/>
+          <p:cNvSpPr/>
+          <p:nvPr/>
+        </p:nvSpPr>
+        <p:spPr>
+          <a:xfrm>
+            <a:off x="6223863" y="960120"/>
+            <a:ext cx="5510631" cy="73152"/>
+          </a:xfrm>
+          <a:prstGeom prst="rect">
+            <a:avLst/>
+          </a:prstGeom>
+          <a:solidFill>
+            <a:srgbClr val="2A554A"/>
+          </a:solidFill>
+          <a:ln>
+            <a:noFill/>
+          </a:ln>
+        </p:spPr>
+        <p:style>
+          <a:lnRef idx="1">
+            <a:schemeClr val="accent1"/>
+          </a:lnRef>
+          <a:fillRef idx="3">
+            <a:schemeClr val="accent1"/>
+          </a:fillRef>
+          <a:effectRef idx="2">
+            <a:schemeClr val="accent1"/>
+          </a:effectRef>
+          <a:fontRef idx="minor">
+            <a:schemeClr val="lt1"/>
+          </a:fontRef>
+        </p:style>
+        <p:txBody>
+          <a:bodyPr rtlCol="0" anchor="ctr"/>
+          <a:lstStyle/>
+          <a:p>
+            <a:pPr algn="ctr"/>
+          </a:p>
+        </p:txBody>
+      </p:sp>
+      <p:sp>
+        <p:nvSpPr>
+          <p:cNvPr id="13" name="TextBox 12"/>
           <p:cNvSpPr txBox="1"/>
           <p:nvPr/>
         </p:nvSpPr>
         <p:spPr>
           <a:xfrm>
-            <a:off x="777240" y="1280160"/>
-            <a:ext cx="4846320" cy="4572000"/>
+            <a:off x="749808" y="1216152"/>
+            <a:ext cx="4925415" cy="4663440"/>
           </a:xfrm>
           <a:prstGeom prst="rect">
             <a:avLst/>
@@ -6056,80 +7034,115 @@
           <a:lstStyle/>
           <a:p>
             <a:pPr>
+              <a:lnSpc>
+                <a:spcPct val="115000"/>
+              </a:lnSpc>
+              <a:spcBef>
+                <a:spcPts val="0"/>
+              </a:spcBef>
+              <a:spcAft>
+                <a:spcPts val="1400"/>
+              </a:spcAft>
+            </a:pPr>
+            <a:r>
+              <a:rPr sz="1500" b="1">
+                <a:solidFill>
+                  <a:srgbClr val="2A554A"/>
+                </a:solidFill>
+                <a:latin typeface="Calibri"/>
+                <a:rFonts ascii="Calibri" hAnsi="Calibri" cs="Calibri"/>
+              </a:rPr>
+              <a:t>Рынок</a:t>
+            </a:r>
+          </a:p>
+          <a:p>
+            <a:pPr>
+              <a:lnSpc>
+                <a:spcPct val="115000"/>
+              </a:lnSpc>
+              <a:spcBef>
+                <a:spcPts val="0"/>
+              </a:spcBef>
+              <a:spcAft>
+                <a:spcPts val="800"/>
+              </a:spcAft>
+            </a:pPr>
+            <a:r>
+              <a:rPr sz="1600" b="0">
+                <a:solidFill>
+                  <a:srgbClr val="1A1A1A"/>
+                </a:solidFill>
+                <a:latin typeface="Calibri"/>
+                <a:rFonts ascii="Calibri" hAnsi="Calibri" cs="Calibri"/>
+              </a:rPr>
+              <a:t>Конкуренты: ЕТС Natural · MEZO · NS</a:t>
+            </a:r>
+          </a:p>
+          <a:p>
+            <a:pPr>
+              <a:lnSpc>
+                <a:spcPct val="115000"/>
+              </a:lnSpc>
+              <a:spcBef>
+                <a:spcPts val="0"/>
+              </a:spcBef>
               <a:spcAft>
                 <a:spcPts val="1200"/>
               </a:spcAft>
             </a:pPr>
             <a:r>
-              <a:rPr sz="2000" b="1">
-                <a:solidFill>
-                  <a:srgbClr val="2F5D50"/>
-                </a:solidFill>
-                <a:latin typeface="Calibri"/>
-              </a:rPr>
-              <a:t>Рынок</a:t>
-            </a:r>
-          </a:p>
-          <a:p>
-            <a:pPr>
-              <a:spcAft>
-                <a:spcPts val="400"/>
-              </a:spcAft>
-            </a:pPr>
-            <a:r>
-              <a:rPr sz="1500" b="0">
-                <a:solidFill>
-                  <a:srgbClr val="1C1C1C"/>
-                </a:solidFill>
-                <a:latin typeface="Calibri"/>
-              </a:rPr>
-              <a:t>Конкуренты: ЕТС Natural · MEZO · NS</a:t>
-            </a:r>
-          </a:p>
-          <a:p>
-            <a:pPr>
-              <a:spcAft>
-                <a:spcPts val="1200"/>
-              </a:spcAft>
-            </a:pPr>
-            <a:r>
               <a:rPr sz="1400" b="0">
                 <a:solidFill>
-                  <a:srgbClr val="5A5A5A"/>
-                </a:solidFill>
-                <a:latin typeface="Calibri"/>
-              </a:rPr>
-              <a:t>(чужой premium в каталоге)</a:t>
-            </a:r>
-          </a:p>
-          <a:p>
-            <a:pPr>
-              <a:spcAft>
-                <a:spcPts val="1000"/>
+                  <a:srgbClr val="5C5C5C"/>
+                </a:solidFill>
+                <a:latin typeface="Calibri"/>
+                <a:rFonts ascii="Calibri" hAnsi="Calibri" cs="Calibri"/>
+              </a:rPr>
+              <a:t>(NS — чужой premium в каталоге)</a:t>
+            </a:r>
+          </a:p>
+          <a:p>
+            <a:pPr>
+              <a:lnSpc>
+                <a:spcPct val="115000"/>
+              </a:lnSpc>
+              <a:spcBef>
+                <a:spcPts val="0"/>
+              </a:spcBef>
+              <a:spcAft>
+                <a:spcPts val="800"/>
               </a:spcAft>
             </a:pPr>
             <a:r>
               <a:rPr sz="1600" b="0">
                 <a:solidFill>
-                  <a:srgbClr val="1C1C1C"/>
-                </a:solidFill>
-                <a:latin typeface="Calibri"/>
+                  <a:srgbClr val="1A1A1A"/>
+                </a:solidFill>
+                <a:latin typeface="Calibri"/>
+                <a:rFonts ascii="Calibri" hAnsi="Calibri" cs="Calibri"/>
               </a:rPr>
               <a:t>Travel+ силён в масс и среднем.</a:t>
             </a:r>
           </a:p>
           <a:p>
             <a:pPr>
-              <a:spcAft>
-                <a:spcPts val="0"/>
+              <a:lnSpc>
+                <a:spcPct val="115000"/>
+              </a:lnSpc>
+              <a:spcBef>
+                <a:spcPts val="0"/>
+              </a:spcBef>
+              <a:spcAft>
+                <a:spcPts val="800"/>
               </a:spcAft>
             </a:pPr>
             <a:r>
               <a:rPr sz="1600" b="1">
                 <a:solidFill>
-                  <a:srgbClr val="1C1C1C"/>
-                </a:solidFill>
-                <a:latin typeface="Calibri"/>
+                  <a:srgbClr val="1A1A1A"/>
+                </a:solidFill>
+                <a:latin typeface="Calibri"/>
+                <a:rFonts ascii="Calibri" hAnsi="Calibri" cs="Calibri"/>
               </a:rPr>
               <a:t>Слабое место: своя Natural с документами.</a:t>
             </a:r>
@@ -6138,14 +7151,14 @@
       </p:sp>
       <p:sp>
         <p:nvSpPr>
-          <p:cNvPr id="11" name="TextBox 10"/>
+          <p:cNvPr id="14" name="TextBox 13"/>
           <p:cNvSpPr txBox="1"/>
           <p:nvPr/>
         </p:nvSpPr>
         <p:spPr>
           <a:xfrm>
-            <a:off x="6400800" y="1280160"/>
-            <a:ext cx="4937760" cy="4572000"/>
+            <a:off x="6516471" y="1216152"/>
+            <a:ext cx="4925415" cy="4663440"/>
           </a:xfrm>
           <a:prstGeom prst="rect">
             <a:avLst/>
@@ -6159,54 +7172,81 @@
           <a:lstStyle/>
           <a:p>
             <a:pPr>
-              <a:spcAft>
-                <a:spcPts val="1200"/>
-              </a:spcAft>
-            </a:pPr>
-            <a:r>
-              <a:rPr sz="2000" b="1">
-                <a:solidFill>
-                  <a:srgbClr val="2F5D50"/>
-                </a:solidFill>
-                <a:latin typeface="Calibri"/>
+              <a:lnSpc>
+                <a:spcPct val="115000"/>
+              </a:lnSpc>
+              <a:spcBef>
+                <a:spcPts val="0"/>
+              </a:spcBef>
+              <a:spcAft>
+                <a:spcPts val="1400"/>
+              </a:spcAft>
+            </a:pPr>
+            <a:r>
+              <a:rPr sz="1500" b="1">
+                <a:solidFill>
+                  <a:srgbClr val="2A554A"/>
+                </a:solidFill>
+                <a:latin typeface="Calibri"/>
+                <a:rFonts ascii="Calibri" hAnsi="Calibri" cs="Calibri"/>
               </a:rPr>
               <a:t>Ориентир цен (не оферта)</a:t>
             </a:r>
           </a:p>
           <a:p>
             <a:pPr>
-              <a:spcAft>
-                <a:spcPts val="600"/>
+              <a:lnSpc>
+                <a:spcPct val="115000"/>
+              </a:lnSpc>
+              <a:spcBef>
+                <a:spcPts val="0"/>
+              </a:spcBef>
+              <a:spcAft>
+                <a:spcPts val="800"/>
               </a:spcAft>
             </a:pPr>
             <a:r>
               <a:rPr sz="1600" b="0">
                 <a:solidFill>
-                  <a:srgbClr val="1C1C1C"/>
-                </a:solidFill>
-                <a:latin typeface="Calibri"/>
-              </a:rPr>
-              <a:t>Hotel Line ~12-15 ₽ / 30 мл</a:t>
-            </a:r>
-          </a:p>
-          <a:p>
-            <a:pPr>
-              <a:spcAft>
-                <a:spcPts val="600"/>
+                  <a:srgbClr val="1A1A1A"/>
+                </a:solidFill>
+                <a:latin typeface="Calibri"/>
+                <a:rFonts ascii="Calibri" hAnsi="Calibri" cs="Calibri"/>
+              </a:rPr>
+              <a:t>Hotel Line ≈ 12–15 ₽ / 30 мл</a:t>
+            </a:r>
+          </a:p>
+          <a:p>
+            <a:pPr>
+              <a:lnSpc>
+                <a:spcPct val="115000"/>
+              </a:lnSpc>
+              <a:spcBef>
+                <a:spcPts val="0"/>
+              </a:spcBef>
+              <a:spcAft>
+                <a:spcPts val="800"/>
               </a:spcAft>
             </a:pPr>
             <a:r>
               <a:rPr sz="1600" b="0">
                 <a:solidFill>
-                  <a:srgbClr val="1C1C1C"/>
-                </a:solidFill>
-                <a:latin typeface="Calibri"/>
-              </a:rPr>
-              <a:t>ЕТС Natural ~18 ₽ / 25 мл</a:t>
-            </a:r>
-          </a:p>
-          <a:p>
-            <a:pPr>
+                  <a:srgbClr val="1A1A1A"/>
+                </a:solidFill>
+                <a:latin typeface="Calibri"/>
+                <a:rFonts ascii="Calibri" hAnsi="Calibri" cs="Calibri"/>
+              </a:rPr>
+              <a:t>ЕТС Natural ≈ 18 ₽ / 25 мл</a:t>
+            </a:r>
+          </a:p>
+          <a:p>
+            <a:pPr>
+              <a:lnSpc>
+                <a:spcPct val="115000"/>
+              </a:lnSpc>
+              <a:spcBef>
+                <a:spcPts val="0"/>
+              </a:spcBef>
               <a:spcAft>
                 <a:spcPts val="1400"/>
               </a:spcAft>
@@ -6214,43 +7254,58 @@
             <a:r>
               <a:rPr sz="1600" b="0">
                 <a:solidFill>
-                  <a:srgbClr val="1C1C1C"/>
-                </a:solidFill>
-                <a:latin typeface="Calibri"/>
-              </a:rPr>
-              <a:t>Natura Siberica выше</a:t>
-            </a:r>
-          </a:p>
-          <a:p>
-            <a:pPr>
-              <a:spcAft>
-                <a:spcPts val="600"/>
+                  <a:srgbClr val="1A1A1A"/>
+                </a:solidFill>
+                <a:latin typeface="Calibri"/>
+                <a:rFonts ascii="Calibri" hAnsi="Calibri" cs="Calibri"/>
+              </a:rPr>
+              <a:t>Natura Siberica — выше</a:t>
+            </a:r>
+          </a:p>
+          <a:p>
+            <a:pPr>
+              <a:lnSpc>
+                <a:spcPct val="115000"/>
+              </a:lnSpc>
+              <a:spcBef>
+                <a:spcPts val="0"/>
+              </a:spcBef>
+              <a:spcAft>
+                <a:spcPts val="800"/>
               </a:spcAft>
             </a:pPr>
             <a:r>
               <a:rPr sz="1600" b="1">
                 <a:solidFill>
-                  <a:srgbClr val="1C1C1C"/>
-                </a:solidFill>
-                <a:latin typeface="Calibri"/>
+                  <a:srgbClr val="1A1A1A"/>
+                </a:solidFill>
+                <a:latin typeface="Calibri"/>
+                <a:rFonts ascii="Calibri" hAnsi="Calibri" cs="Calibri"/>
               </a:rPr>
               <a:t>Ставка: между HL и NS</a:t>
             </a:r>
           </a:p>
           <a:p>
             <a:pPr>
-              <a:spcAft>
-                <a:spcPts val="0"/>
-              </a:spcAft>
-            </a:pPr>
-            <a:r>
-              <a:rPr sz="1500" b="0">
-                <a:solidFill>
-                  <a:srgbClr val="1C1C1C"/>
-                </a:solidFill>
-                <a:latin typeface="Calibri"/>
-              </a:rPr>
-              <a:t>натуральность · бумаги · one-stop</a:t>
+              <a:lnSpc>
+                <a:spcPct val="115000"/>
+              </a:lnSpc>
+              <a:spcBef>
+                <a:spcPts val="0"/>
+              </a:spcBef>
+              <a:spcAft>
+                <a:spcPts val="800"/>
+              </a:spcAft>
+            </a:pPr>
+            <a:r>
+              <a:rPr sz="1600" b="0">
+                <a:solidFill>
+                  <a:srgbClr val="1A1A1A"/>
+                </a:solidFill>
+                <a:latin typeface="Calibri"/>
+                <a:rFonts ascii="Calibri" hAnsi="Calibri" cs="Calibri"/>
+              </a:rPr>
+              <a:t>Натуральность · документы · один поставщик</a:t>
             </a:r>
           </a:p>
         </p:txBody>
@@ -6288,7 +7343,7 @@
             <a:avLst/>
           </a:prstGeom>
           <a:solidFill>
-            <a:srgbClr val="F7F5F2"/>
+            <a:srgbClr val="F5F3EF"/>
           </a:solidFill>
           <a:ln>
             <a:noFill/>
@@ -6325,13 +7380,13 @@
         <p:spPr>
           <a:xfrm>
             <a:off x="0" y="0"/>
-            <a:ext cx="109728" cy="6858000"/>
+            <a:ext cx="91440" cy="6858000"/>
           </a:xfrm>
           <a:prstGeom prst="rect">
             <a:avLst/>
           </a:prstGeom>
           <a:solidFill>
-            <a:srgbClr val="2F5D50"/>
+            <a:srgbClr val="2A554A"/>
           </a:solidFill>
           <a:ln>
             <a:noFill/>
@@ -6367,8 +7422,8 @@
         </p:nvSpPr>
         <p:spPr>
           <a:xfrm>
-            <a:off x="502920" y="256032"/>
-            <a:ext cx="11155680" cy="502920"/>
+            <a:off x="457200" y="256032"/>
+            <a:ext cx="11247120" cy="502920"/>
           </a:xfrm>
           <a:prstGeom prst="rect">
             <a:avLst/>
@@ -6382,11 +7437,12 @@
           <a:lstStyle/>
           <a:p>
             <a:r>
-              <a:rPr sz="2800" b="1">
-                <a:solidFill>
-                  <a:srgbClr val="2F5D50"/>
-                </a:solidFill>
-                <a:latin typeface="Calibri"/>
+              <a:rPr sz="2600" b="1">
+                <a:solidFill>
+                  <a:srgbClr val="2A554A"/>
+                </a:solidFill>
+                <a:latin typeface="Calibri"/>
+                <a:rFonts ascii="Calibri" hAnsi="Calibri" cs="Calibri"/>
               </a:rPr>
               <a:t>Дом линеек</a:t>
             </a:r>
@@ -6401,14 +7457,14 @@
         </p:nvSpPr>
         <p:spPr>
           <a:xfrm>
-            <a:off x="502920" y="777240"/>
-            <a:ext cx="11155680" cy="22860"/>
+            <a:off x="457200" y="804672"/>
+            <a:ext cx="2011680" cy="36576"/>
           </a:xfrm>
           <a:prstGeom prst="rect">
             <a:avLst/>
           </a:prstGeom>
           <a:solidFill>
-            <a:srgbClr val="D8D2C8"/>
+            <a:srgbClr val="2A554A"/>
           </a:solidFill>
           <a:ln>
             <a:noFill/>
@@ -6438,13 +7494,56 @@
       </p:sp>
       <p:sp>
         <p:nvSpPr>
-          <p:cNvPr id="6" name="TextBox 5"/>
+          <p:cNvPr id="6" name="Rectangle 5"/>
+          <p:cNvSpPr/>
+          <p:nvPr/>
+        </p:nvSpPr>
+        <p:spPr>
+          <a:xfrm>
+            <a:off x="457200" y="6263640"/>
+            <a:ext cx="11277295" cy="13716"/>
+          </a:xfrm>
+          <a:prstGeom prst="rect">
+            <a:avLst/>
+          </a:prstGeom>
+          <a:solidFill>
+            <a:srgbClr val="D4CEC4"/>
+          </a:solidFill>
+          <a:ln>
+            <a:noFill/>
+          </a:ln>
+        </p:spPr>
+        <p:style>
+          <a:lnRef idx="1">
+            <a:schemeClr val="accent1"/>
+          </a:lnRef>
+          <a:fillRef idx="3">
+            <a:schemeClr val="accent1"/>
+          </a:fillRef>
+          <a:effectRef idx="2">
+            <a:schemeClr val="accent1"/>
+          </a:effectRef>
+          <a:fontRef idx="minor">
+            <a:schemeClr val="lt1"/>
+          </a:fontRef>
+        </p:style>
+        <p:txBody>
+          <a:bodyPr rtlCol="0" anchor="ctr"/>
+          <a:lstStyle/>
+          <a:p>
+            <a:pPr algn="ctr"/>
+          </a:p>
+        </p:txBody>
+      </p:sp>
+      <p:sp>
+        <p:nvSpPr>
+          <p:cNvPr id="7" name="TextBox 6"/>
           <p:cNvSpPr txBox="1"/>
           <p:nvPr/>
         </p:nvSpPr>
         <p:spPr>
           <a:xfrm>
-            <a:off x="502920" y="6446520"/>
+            <a:off x="457200" y="6355080"/>
             <a:ext cx="9601200" cy="320040"/>
           </a:xfrm>
           <a:prstGeom prst="rect">
@@ -6461,25 +7560,26 @@
             <a:r>
               <a:rPr sz="1100" b="0">
                 <a:solidFill>
-                  <a:srgbClr val="5A5A5A"/>
-                </a:solidFill>
-                <a:latin typeface="Calibri"/>
-              </a:rPr>
-              <a:t>Travel+ Natural · пульт v1.14 · собес · не оферта</a:t>
-            </a:r>
-          </a:p>
-        </p:txBody>
-      </p:sp>
-      <p:sp>
-        <p:nvSpPr>
-          <p:cNvPr id="7" name="TextBox 6"/>
+                  <a:srgbClr val="5C5C5C"/>
+                </a:solidFill>
+                <a:latin typeface="Calibri"/>
+                <a:rFonts ascii="Calibri" hAnsi="Calibri" cs="Calibri"/>
+              </a:rPr>
+              <a:t>Travel+ Natural  ·  пульт v1.14  ·  собеседование  ·  не оферта</a:t>
+            </a:r>
+          </a:p>
+        </p:txBody>
+      </p:sp>
+      <p:sp>
+        <p:nvSpPr>
+          <p:cNvPr id="8" name="TextBox 7"/>
           <p:cNvSpPr txBox="1"/>
           <p:nvPr/>
         </p:nvSpPr>
         <p:spPr>
           <a:xfrm>
-            <a:off x="10607040" y="6446520"/>
-            <a:ext cx="1188720" cy="320040"/>
+            <a:off x="10515600" y="6355080"/>
+            <a:ext cx="1280160" cy="320040"/>
           </a:xfrm>
           <a:prstGeom prst="rect">
             <a:avLst/>
@@ -6496,29 +7596,30 @@
             <a:r>
               <a:rPr sz="1100" b="0">
                 <a:solidFill>
-                  <a:srgbClr val="5A5A5A"/>
-                </a:solidFill>
-                <a:latin typeface="Calibri"/>
-              </a:rPr>
-              <a:t>4/12</a:t>
-            </a:r>
-          </a:p>
-        </p:txBody>
-      </p:sp>
-      <p:sp>
-        <p:nvSpPr>
-          <p:cNvPr id="8" name="Rounded Rectangle 7"/>
+                  <a:srgbClr val="5C5C5C"/>
+                </a:solidFill>
+                <a:latin typeface="Calibri"/>
+                <a:rFonts ascii="Calibri" hAnsi="Calibri" cs="Calibri"/>
+              </a:rPr>
+              <a:t>4 / 12</a:t>
+            </a:r>
+          </a:p>
+        </p:txBody>
+      </p:sp>
+      <p:sp>
+        <p:nvSpPr>
+          <p:cNvPr id="9" name="Rounded Rectangle 8"/>
           <p:cNvSpPr/>
           <p:nvPr/>
         </p:nvSpPr>
         <p:spPr>
           <a:xfrm>
-            <a:off x="502920" y="1051560"/>
-            <a:ext cx="5349240" cy="5029200"/>
+            <a:off x="457200" y="960120"/>
+            <a:ext cx="5510631" cy="5074920"/>
           </a:xfrm>
           <a:prstGeom prst="roundRect">
             <a:avLst>
-              <a:gd name="adj" fmla="val 8000"/>
+              <a:gd name="adj" fmla="val 6000"/>
             </a:avLst>
           </a:prstGeom>
           <a:solidFill>
@@ -6526,7 +7627,7 @@
           </a:solidFill>
           <a:ln w="12700">
             <a:solidFill>
-              <a:srgbClr val="D8D2C8"/>
+              <a:srgbClr val="D4CEC4"/>
             </a:solidFill>
           </a:ln>
         </p:spPr>
@@ -6554,18 +7655,61 @@
       </p:sp>
       <p:sp>
         <p:nvSpPr>
-          <p:cNvPr id="9" name="Rounded Rectangle 8"/>
+          <p:cNvPr id="10" name="Rectangle 9"/>
           <p:cNvSpPr/>
           <p:nvPr/>
         </p:nvSpPr>
         <p:spPr>
           <a:xfrm>
-            <a:off x="6126480" y="1051560"/>
-            <a:ext cx="5440680" cy="5029200"/>
+            <a:off x="457200" y="960120"/>
+            <a:ext cx="5510631" cy="73152"/>
+          </a:xfrm>
+          <a:prstGeom prst="rect">
+            <a:avLst/>
+          </a:prstGeom>
+          <a:solidFill>
+            <a:srgbClr val="2A554A"/>
+          </a:solidFill>
+          <a:ln>
+            <a:noFill/>
+          </a:ln>
+        </p:spPr>
+        <p:style>
+          <a:lnRef idx="1">
+            <a:schemeClr val="accent1"/>
+          </a:lnRef>
+          <a:fillRef idx="3">
+            <a:schemeClr val="accent1"/>
+          </a:fillRef>
+          <a:effectRef idx="2">
+            <a:schemeClr val="accent1"/>
+          </a:effectRef>
+          <a:fontRef idx="minor">
+            <a:schemeClr val="lt1"/>
+          </a:fontRef>
+        </p:style>
+        <p:txBody>
+          <a:bodyPr rtlCol="0" anchor="ctr"/>
+          <a:lstStyle/>
+          <a:p>
+            <a:pPr algn="ctr"/>
+          </a:p>
+        </p:txBody>
+      </p:sp>
+      <p:sp>
+        <p:nvSpPr>
+          <p:cNvPr id="11" name="Rounded Rectangle 10"/>
+          <p:cNvSpPr/>
+          <p:nvPr/>
+        </p:nvSpPr>
+        <p:spPr>
+          <a:xfrm>
+            <a:off x="6223863" y="960120"/>
+            <a:ext cx="5510631" cy="5074920"/>
           </a:xfrm>
           <a:prstGeom prst="roundRect">
             <a:avLst>
-              <a:gd name="adj" fmla="val 8000"/>
+              <a:gd name="adj" fmla="val 6000"/>
             </a:avLst>
           </a:prstGeom>
           <a:solidFill>
@@ -6573,7 +7717,7 @@
           </a:solidFill>
           <a:ln w="12700">
             <a:solidFill>
-              <a:srgbClr val="D8D2C8"/>
+              <a:srgbClr val="D4CEC4"/>
             </a:solidFill>
           </a:ln>
         </p:spPr>
@@ -6601,14 +7745,57 @@
       </p:sp>
       <p:sp>
         <p:nvSpPr>
-          <p:cNvPr id="10" name="TextBox 9"/>
+          <p:cNvPr id="12" name="Rectangle 11"/>
+          <p:cNvSpPr/>
+          <p:nvPr/>
+        </p:nvSpPr>
+        <p:spPr>
+          <a:xfrm>
+            <a:off x="6223863" y="960120"/>
+            <a:ext cx="5510631" cy="73152"/>
+          </a:xfrm>
+          <a:prstGeom prst="rect">
+            <a:avLst/>
+          </a:prstGeom>
+          <a:solidFill>
+            <a:srgbClr val="2A554A"/>
+          </a:solidFill>
+          <a:ln>
+            <a:noFill/>
+          </a:ln>
+        </p:spPr>
+        <p:style>
+          <a:lnRef idx="1">
+            <a:schemeClr val="accent1"/>
+          </a:lnRef>
+          <a:fillRef idx="3">
+            <a:schemeClr val="accent1"/>
+          </a:fillRef>
+          <a:effectRef idx="2">
+            <a:schemeClr val="accent1"/>
+          </a:effectRef>
+          <a:fontRef idx="minor">
+            <a:schemeClr val="lt1"/>
+          </a:fontRef>
+        </p:style>
+        <p:txBody>
+          <a:bodyPr rtlCol="0" anchor="ctr"/>
+          <a:lstStyle/>
+          <a:p>
+            <a:pPr algn="ctr"/>
+          </a:p>
+        </p:txBody>
+      </p:sp>
+      <p:sp>
+        <p:nvSpPr>
+          <p:cNvPr id="13" name="TextBox 12"/>
           <p:cNvSpPr txBox="1"/>
           <p:nvPr/>
         </p:nvSpPr>
         <p:spPr>
           <a:xfrm>
-            <a:off x="777240" y="1280160"/>
-            <a:ext cx="4846320" cy="4572000"/>
+            <a:off x="749808" y="1216152"/>
+            <a:ext cx="4925415" cy="4663440"/>
           </a:xfrm>
           <a:prstGeom prst="rect">
             <a:avLst/>
@@ -6622,112 +7809,154 @@
           <a:lstStyle/>
           <a:p>
             <a:pPr>
-              <a:spcAft>
-                <a:spcPts val="1200"/>
-              </a:spcAft>
-            </a:pPr>
-            <a:r>
-              <a:rPr sz="2000" b="1">
-                <a:solidFill>
-                  <a:srgbClr val="2F5D50"/>
-                </a:solidFill>
-                <a:latin typeface="Calibri"/>
+              <a:lnSpc>
+                <a:spcPct val="115000"/>
+              </a:lnSpc>
+              <a:spcBef>
+                <a:spcPts val="0"/>
+              </a:spcBef>
+              <a:spcAft>
+                <a:spcPts val="1400"/>
+              </a:spcAft>
+            </a:pPr>
+            <a:r>
+              <a:rPr sz="1500" b="1">
+                <a:solidFill>
+                  <a:srgbClr val="2A554A"/>
+                </a:solidFill>
+                <a:latin typeface="Calibri"/>
+                <a:rFonts ascii="Calibri" hAnsi="Calibri" cs="Calibri"/>
               </a:rPr>
               <a:t>Карта</a:t>
             </a:r>
           </a:p>
           <a:p>
             <a:pPr>
-              <a:spcAft>
-                <a:spcPts val="600"/>
+              <a:lnSpc>
+                <a:spcPct val="115000"/>
+              </a:lnSpc>
+              <a:spcBef>
+                <a:spcPts val="0"/>
+              </a:spcBef>
+              <a:spcAft>
+                <a:spcPts val="800"/>
               </a:spcAft>
             </a:pPr>
             <a:r>
               <a:rPr sz="1600" b="0">
                 <a:solidFill>
-                  <a:srgbClr val="1C1C1C"/>
-                </a:solidFill>
-                <a:latin typeface="Calibri"/>
+                  <a:srgbClr val="1A1A1A"/>
+                </a:solidFill>
+                <a:latin typeface="Calibri"/>
+                <a:rFonts ascii="Calibri" hAnsi="Calibri" cs="Calibri"/>
               </a:rPr>
               <a:t>Hotel Line → цена</a:t>
             </a:r>
           </a:p>
           <a:p>
             <a:pPr>
-              <a:spcAft>
-                <a:spcPts val="600"/>
+              <a:lnSpc>
+                <a:spcPct val="115000"/>
+              </a:lnSpc>
+              <a:spcBef>
+                <a:spcPts val="0"/>
+              </a:spcBef>
+              <a:spcAft>
+                <a:spcPts val="800"/>
               </a:spcAft>
             </a:pPr>
             <a:r>
               <a:rPr sz="1600" b="0">
                 <a:solidFill>
-                  <a:srgbClr val="1C1C1C"/>
-                </a:solidFill>
-                <a:latin typeface="Calibri"/>
+                  <a:srgbClr val="1A1A1A"/>
+                </a:solidFill>
+                <a:latin typeface="Calibri"/>
+                <a:rFonts ascii="Calibri" hAnsi="Calibri" cs="Calibri"/>
               </a:rPr>
               <a:t>Fleur / Aquatique / La Nuit → дизайн и аромат</a:t>
             </a:r>
           </a:p>
           <a:p>
             <a:pPr>
-              <a:spcAft>
-                <a:spcPts val="600"/>
+              <a:lnSpc>
+                <a:spcPct val="115000"/>
+              </a:lnSpc>
+              <a:spcBef>
+                <a:spcPts val="0"/>
+              </a:spcBef>
+              <a:spcAft>
+                <a:spcPts val="800"/>
               </a:spcAft>
             </a:pPr>
             <a:r>
               <a:rPr sz="1600" b="1">
                 <a:solidFill>
-                  <a:srgbClr val="1C1C1C"/>
-                </a:solidFill>
-                <a:latin typeface="Calibri"/>
+                  <a:srgbClr val="1A1A1A"/>
+                </a:solidFill>
+                <a:latin typeface="Calibri"/>
+                <a:rFonts ascii="Calibri" hAnsi="Calibri" cs="Calibri"/>
               </a:rPr>
               <a:t>Natural → натуральность + документы</a:t>
             </a:r>
           </a:p>
           <a:p>
             <a:pPr>
-              <a:spcAft>
-                <a:spcPts val="600"/>
+              <a:lnSpc>
+                <a:spcPct val="115000"/>
+              </a:lnSpc>
+              <a:spcBef>
+                <a:spcPts val="0"/>
+              </a:spcBef>
+              <a:spcAft>
+                <a:spcPts val="800"/>
               </a:spcAft>
             </a:pPr>
             <a:r>
               <a:rPr sz="1600" b="0">
                 <a:solidFill>
-                  <a:srgbClr val="1C1C1C"/>
-                </a:solidFill>
-                <a:latin typeface="Calibri"/>
+                  <a:srgbClr val="1A1A1A"/>
+                </a:solidFill>
+                <a:latin typeface="Calibri"/>
+                <a:rFonts ascii="Calibri" hAnsi="Calibri" cs="Calibri"/>
               </a:rPr>
               <a:t>Natura Siberica → чужой premium</a:t>
             </a:r>
           </a:p>
           <a:p>
             <a:pPr>
-              <a:spcAft>
-                <a:spcPts val="0"/>
+              <a:lnSpc>
+                <a:spcPct val="115000"/>
+              </a:lnSpc>
+              <a:spcBef>
+                <a:spcPts val="0"/>
+              </a:spcBef>
+              <a:spcAft>
+                <a:spcPts val="800"/>
               </a:spcAft>
             </a:pPr>
             <a:r>
               <a:rPr sz="1600" b="0">
                 <a:solidFill>
-                  <a:srgbClr val="1C1C1C"/>
-                </a:solidFill>
-                <a:latin typeface="Calibri"/>
-              </a:rPr>
-              <a:t>СТМ → отдельный проект</a:t>
-            </a:r>
-          </a:p>
-        </p:txBody>
-      </p:sp>
-      <p:sp>
-        <p:nvSpPr>
-          <p:cNvPr id="11" name="TextBox 10"/>
+                  <a:srgbClr val="1A1A1A"/>
+                </a:solidFill>
+                <a:latin typeface="Calibri"/>
+                <a:rFonts ascii="Calibri" hAnsi="Calibri" cs="Calibri"/>
+              </a:rPr>
+              <a:t>СТМ (лого отеля) → отдельный проект</a:t>
+            </a:r>
+          </a:p>
+        </p:txBody>
+      </p:sp>
+      <p:sp>
+        <p:nvSpPr>
+          <p:cNvPr id="14" name="TextBox 13"/>
           <p:cNvSpPr txBox="1"/>
           <p:nvPr/>
         </p:nvSpPr>
         <p:spPr>
           <a:xfrm>
-            <a:off x="6400800" y="1280160"/>
-            <a:ext cx="4937760" cy="4572000"/>
+            <a:off x="6516471" y="1216152"/>
+            <a:ext cx="4925415" cy="4663440"/>
           </a:xfrm>
           <a:prstGeom prst="rect">
             <a:avLst/>
@@ -6741,22 +7970,35 @@
           <a:lstStyle/>
           <a:p>
             <a:pPr>
-              <a:spcAft>
-                <a:spcPts val="1200"/>
-              </a:spcAft>
-            </a:pPr>
-            <a:r>
-              <a:rPr sz="2000" b="1">
-                <a:solidFill>
-                  <a:srgbClr val="2F5D50"/>
-                </a:solidFill>
-                <a:latin typeface="Calibri"/>
+              <a:lnSpc>
+                <a:spcPct val="115000"/>
+              </a:lnSpc>
+              <a:spcBef>
+                <a:spcPts val="0"/>
+              </a:spcBef>
+              <a:spcAft>
+                <a:spcPts val="1400"/>
+              </a:spcAft>
+            </a:pPr>
+            <a:r>
+              <a:rPr sz="1500" b="1">
+                <a:solidFill>
+                  <a:srgbClr val="2A554A"/>
+                </a:solidFill>
+                <a:latin typeface="Calibri"/>
+                <a:rFonts ascii="Calibri" hAnsi="Calibri" cs="Calibri"/>
               </a:rPr>
               <a:t>Мостик для продаж</a:t>
             </a:r>
           </a:p>
           <a:p>
             <a:pPr>
+              <a:lnSpc>
+                <a:spcPct val="115000"/>
+              </a:lnSpc>
+              <a:spcBef>
+                <a:spcPts val="0"/>
+              </a:spcBef>
               <a:spcAft>
                 <a:spcPts val="800"/>
               </a:spcAft>
@@ -6764,15 +8006,22 @@
             <a:r>
               <a:rPr sz="1600" b="0">
                 <a:solidFill>
-                  <a:srgbClr val="1C1C1C"/>
-                </a:solidFill>
-                <a:latin typeface="Calibri"/>
-              </a:rPr>
-              <a:t>Дизайн и аромат - Fleur.</a:t>
-            </a:r>
-          </a:p>
-          <a:p>
-            <a:pPr>
+                  <a:srgbClr val="1A1A1A"/>
+                </a:solidFill>
+                <a:latin typeface="Calibri"/>
+                <a:rFonts ascii="Calibri" hAnsi="Calibri" cs="Calibri"/>
+              </a:rPr>
+              <a:t>Дизайн и аромат — Fleur.</a:t>
+            </a:r>
+          </a:p>
+          <a:p>
+            <a:pPr>
+              <a:lnSpc>
+                <a:spcPct val="115000"/>
+              </a:lnSpc>
+              <a:spcBef>
+                <a:spcPts val="0"/>
+              </a:spcBef>
               <a:spcAft>
                 <a:spcPts val="800"/>
               </a:spcAft>
@@ -6780,15 +8029,22 @@
             <a:r>
               <a:rPr sz="1600" b="0">
                 <a:solidFill>
-                  <a:srgbClr val="1C1C1C"/>
-                </a:solidFill>
-                <a:latin typeface="Calibri"/>
-              </a:rPr>
-              <a:t>Натуральность и бумаги - Natural.</a:t>
-            </a:r>
-          </a:p>
-          <a:p>
-            <a:pPr>
+                  <a:srgbClr val="1A1A1A"/>
+                </a:solidFill>
+                <a:latin typeface="Calibri"/>
+                <a:rFonts ascii="Calibri" hAnsi="Calibri" cs="Calibri"/>
+              </a:rPr>
+              <a:t>Натуральность и документы — Natural.</a:t>
+            </a:r>
+          </a:p>
+          <a:p>
+            <a:pPr>
+              <a:lnSpc>
+                <a:spcPct val="115000"/>
+              </a:lnSpc>
+              <a:spcBef>
+                <a:spcPts val="0"/>
+              </a:spcBef>
               <a:spcAft>
                 <a:spcPts val="800"/>
               </a:spcAft>
@@ -6796,25 +8052,33 @@
             <a:r>
               <a:rPr sz="1600" b="1">
                 <a:solidFill>
-                  <a:srgbClr val="1C1C1C"/>
-                </a:solidFill>
-                <a:latin typeface="Calibri"/>
+                  <a:srgbClr val="1A1A1A"/>
+                </a:solidFill>
+                <a:latin typeface="Calibri"/>
+                <a:rFonts ascii="Calibri" hAnsi="Calibri" cs="Calibri"/>
               </a:rPr>
               <a:t>Не конкурируют.</a:t>
             </a:r>
           </a:p>
           <a:p>
             <a:pPr>
-              <a:spcAft>
-                <a:spcPts val="0"/>
-              </a:spcAft>
-            </a:pPr>
-            <a:r>
-              <a:rPr sz="1500" b="0">
-                <a:solidFill>
-                  <a:srgbClr val="1C1C1C"/>
-                </a:solidFill>
-                <a:latin typeface="Calibri"/>
+              <a:lnSpc>
+                <a:spcPct val="115000"/>
+              </a:lnSpc>
+              <a:spcBef>
+                <a:spcPts val="0"/>
+              </a:spcBef>
+              <a:spcAft>
+                <a:spcPts val="800"/>
+              </a:spcAft>
+            </a:pPr>
+            <a:r>
+              <a:rPr sz="1600" b="0">
+                <a:solidFill>
+                  <a:srgbClr val="1A1A1A"/>
+                </a:solidFill>
+                <a:latin typeface="Calibri"/>
+                <a:rFonts ascii="Calibri" hAnsi="Calibri" cs="Calibri"/>
               </a:rPr>
               <a:t>Могут жить на разных этажах одного объекта.</a:t>
             </a:r>
@@ -6854,7 +8118,7 @@
             <a:avLst/>
           </a:prstGeom>
           <a:solidFill>
-            <a:srgbClr val="F7F5F2"/>
+            <a:srgbClr val="F5F3EF"/>
           </a:solidFill>
           <a:ln>
             <a:noFill/>
@@ -6891,13 +8155,13 @@
         <p:spPr>
           <a:xfrm>
             <a:off x="0" y="0"/>
-            <a:ext cx="109728" cy="6858000"/>
+            <a:ext cx="91440" cy="6858000"/>
           </a:xfrm>
           <a:prstGeom prst="rect">
             <a:avLst/>
           </a:prstGeom>
           <a:solidFill>
-            <a:srgbClr val="2F5D50"/>
+            <a:srgbClr val="2A554A"/>
           </a:solidFill>
           <a:ln>
             <a:noFill/>
@@ -6933,8 +8197,8 @@
         </p:nvSpPr>
         <p:spPr>
           <a:xfrm>
-            <a:off x="502920" y="256032"/>
-            <a:ext cx="11155680" cy="502920"/>
+            <a:off x="457200" y="256032"/>
+            <a:ext cx="11247120" cy="502920"/>
           </a:xfrm>
           <a:prstGeom prst="rect">
             <a:avLst/>
@@ -6948,11 +8212,12 @@
           <a:lstStyle/>
           <a:p>
             <a:r>
-              <a:rPr sz="2800" b="1">
-                <a:solidFill>
-                  <a:srgbClr val="2F5D50"/>
-                </a:solidFill>
-                <a:latin typeface="Calibri"/>
+              <a:rPr sz="2600" b="1">
+                <a:solidFill>
+                  <a:srgbClr val="2A554A"/>
+                </a:solidFill>
+                <a:latin typeface="Calibri"/>
+                <a:rFonts ascii="Calibri" hAnsi="Calibri" cs="Calibri"/>
               </a:rPr>
               <a:t>Обещание + StoryBrand</a:t>
             </a:r>
@@ -6967,14 +8232,14 @@
         </p:nvSpPr>
         <p:spPr>
           <a:xfrm>
-            <a:off x="502920" y="777240"/>
-            <a:ext cx="11155680" cy="22860"/>
+            <a:off x="457200" y="804672"/>
+            <a:ext cx="2011680" cy="36576"/>
           </a:xfrm>
           <a:prstGeom prst="rect">
             <a:avLst/>
           </a:prstGeom>
           <a:solidFill>
-            <a:srgbClr val="D8D2C8"/>
+            <a:srgbClr val="2A554A"/>
           </a:solidFill>
           <a:ln>
             <a:noFill/>
@@ -7004,13 +8269,56 @@
       </p:sp>
       <p:sp>
         <p:nvSpPr>
-          <p:cNvPr id="6" name="TextBox 5"/>
+          <p:cNvPr id="6" name="Rectangle 5"/>
+          <p:cNvSpPr/>
+          <p:nvPr/>
+        </p:nvSpPr>
+        <p:spPr>
+          <a:xfrm>
+            <a:off x="457200" y="6263640"/>
+            <a:ext cx="11277295" cy="13716"/>
+          </a:xfrm>
+          <a:prstGeom prst="rect">
+            <a:avLst/>
+          </a:prstGeom>
+          <a:solidFill>
+            <a:srgbClr val="D4CEC4"/>
+          </a:solidFill>
+          <a:ln>
+            <a:noFill/>
+          </a:ln>
+        </p:spPr>
+        <p:style>
+          <a:lnRef idx="1">
+            <a:schemeClr val="accent1"/>
+          </a:lnRef>
+          <a:fillRef idx="3">
+            <a:schemeClr val="accent1"/>
+          </a:fillRef>
+          <a:effectRef idx="2">
+            <a:schemeClr val="accent1"/>
+          </a:effectRef>
+          <a:fontRef idx="minor">
+            <a:schemeClr val="lt1"/>
+          </a:fontRef>
+        </p:style>
+        <p:txBody>
+          <a:bodyPr rtlCol="0" anchor="ctr"/>
+          <a:lstStyle/>
+          <a:p>
+            <a:pPr algn="ctr"/>
+          </a:p>
+        </p:txBody>
+      </p:sp>
+      <p:sp>
+        <p:nvSpPr>
+          <p:cNvPr id="7" name="TextBox 6"/>
           <p:cNvSpPr txBox="1"/>
           <p:nvPr/>
         </p:nvSpPr>
         <p:spPr>
           <a:xfrm>
-            <a:off x="502920" y="6446520"/>
+            <a:off x="457200" y="6355080"/>
             <a:ext cx="9601200" cy="320040"/>
           </a:xfrm>
           <a:prstGeom prst="rect">
@@ -7027,25 +8335,26 @@
             <a:r>
               <a:rPr sz="1100" b="0">
                 <a:solidFill>
-                  <a:srgbClr val="5A5A5A"/>
-                </a:solidFill>
-                <a:latin typeface="Calibri"/>
-              </a:rPr>
-              <a:t>Travel+ Natural · пульт v1.14 · собес · не оферта</a:t>
-            </a:r>
-          </a:p>
-        </p:txBody>
-      </p:sp>
-      <p:sp>
-        <p:nvSpPr>
-          <p:cNvPr id="7" name="TextBox 6"/>
+                  <a:srgbClr val="5C5C5C"/>
+                </a:solidFill>
+                <a:latin typeface="Calibri"/>
+                <a:rFonts ascii="Calibri" hAnsi="Calibri" cs="Calibri"/>
+              </a:rPr>
+              <a:t>Travel+ Natural  ·  пульт v1.14  ·  собеседование  ·  не оферта</a:t>
+            </a:r>
+          </a:p>
+        </p:txBody>
+      </p:sp>
+      <p:sp>
+        <p:nvSpPr>
+          <p:cNvPr id="8" name="TextBox 7"/>
           <p:cNvSpPr txBox="1"/>
           <p:nvPr/>
         </p:nvSpPr>
         <p:spPr>
           <a:xfrm>
-            <a:off x="10607040" y="6446520"/>
-            <a:ext cx="1188720" cy="320040"/>
+            <a:off x="10515600" y="6355080"/>
+            <a:ext cx="1280160" cy="320040"/>
           </a:xfrm>
           <a:prstGeom prst="rect">
             <a:avLst/>
@@ -7062,29 +8371,30 @@
             <a:r>
               <a:rPr sz="1100" b="0">
                 <a:solidFill>
-                  <a:srgbClr val="5A5A5A"/>
-                </a:solidFill>
-                <a:latin typeface="Calibri"/>
-              </a:rPr>
-              <a:t>5/12</a:t>
-            </a:r>
-          </a:p>
-        </p:txBody>
-      </p:sp>
-      <p:sp>
-        <p:nvSpPr>
-          <p:cNvPr id="8" name="Rounded Rectangle 7"/>
+                  <a:srgbClr val="5C5C5C"/>
+                </a:solidFill>
+                <a:latin typeface="Calibri"/>
+                <a:rFonts ascii="Calibri" hAnsi="Calibri" cs="Calibri"/>
+              </a:rPr>
+              <a:t>5 / 12</a:t>
+            </a:r>
+          </a:p>
+        </p:txBody>
+      </p:sp>
+      <p:sp>
+        <p:nvSpPr>
+          <p:cNvPr id="9" name="Rounded Rectangle 8"/>
           <p:cNvSpPr/>
           <p:nvPr/>
         </p:nvSpPr>
         <p:spPr>
           <a:xfrm>
-            <a:off x="502920" y="1051560"/>
-            <a:ext cx="5349240" cy="5029200"/>
+            <a:off x="457200" y="960120"/>
+            <a:ext cx="5510631" cy="5074920"/>
           </a:xfrm>
           <a:prstGeom prst="roundRect">
             <a:avLst>
-              <a:gd name="adj" fmla="val 8000"/>
+              <a:gd name="adj" fmla="val 6000"/>
             </a:avLst>
           </a:prstGeom>
           <a:solidFill>
@@ -7092,7 +8402,7 @@
           </a:solidFill>
           <a:ln w="12700">
             <a:solidFill>
-              <a:srgbClr val="D8D2C8"/>
+              <a:srgbClr val="D4CEC4"/>
             </a:solidFill>
           </a:ln>
         </p:spPr>
@@ -7120,18 +8430,61 @@
       </p:sp>
       <p:sp>
         <p:nvSpPr>
-          <p:cNvPr id="9" name="Rounded Rectangle 8"/>
+          <p:cNvPr id="10" name="Rectangle 9"/>
           <p:cNvSpPr/>
           <p:nvPr/>
         </p:nvSpPr>
         <p:spPr>
           <a:xfrm>
-            <a:off x="6126480" y="1051560"/>
-            <a:ext cx="5440680" cy="5029200"/>
+            <a:off x="457200" y="960120"/>
+            <a:ext cx="5510631" cy="73152"/>
+          </a:xfrm>
+          <a:prstGeom prst="rect">
+            <a:avLst/>
+          </a:prstGeom>
+          <a:solidFill>
+            <a:srgbClr val="2A554A"/>
+          </a:solidFill>
+          <a:ln>
+            <a:noFill/>
+          </a:ln>
+        </p:spPr>
+        <p:style>
+          <a:lnRef idx="1">
+            <a:schemeClr val="accent1"/>
+          </a:lnRef>
+          <a:fillRef idx="3">
+            <a:schemeClr val="accent1"/>
+          </a:fillRef>
+          <a:effectRef idx="2">
+            <a:schemeClr val="accent1"/>
+          </a:effectRef>
+          <a:fontRef idx="minor">
+            <a:schemeClr val="lt1"/>
+          </a:fontRef>
+        </p:style>
+        <p:txBody>
+          <a:bodyPr rtlCol="0" anchor="ctr"/>
+          <a:lstStyle/>
+          <a:p>
+            <a:pPr algn="ctr"/>
+          </a:p>
+        </p:txBody>
+      </p:sp>
+      <p:sp>
+        <p:nvSpPr>
+          <p:cNvPr id="11" name="Rounded Rectangle 10"/>
+          <p:cNvSpPr/>
+          <p:nvPr/>
+        </p:nvSpPr>
+        <p:spPr>
+          <a:xfrm>
+            <a:off x="6223863" y="960120"/>
+            <a:ext cx="5510631" cy="5074920"/>
           </a:xfrm>
           <a:prstGeom prst="roundRect">
             <a:avLst>
-              <a:gd name="adj" fmla="val 8000"/>
+              <a:gd name="adj" fmla="val 6000"/>
             </a:avLst>
           </a:prstGeom>
           <a:solidFill>
@@ -7139,7 +8492,7 @@
           </a:solidFill>
           <a:ln w="12700">
             <a:solidFill>
-              <a:srgbClr val="D8D2C8"/>
+              <a:srgbClr val="D4CEC4"/>
             </a:solidFill>
           </a:ln>
         </p:spPr>
@@ -7167,14 +8520,57 @@
       </p:sp>
       <p:sp>
         <p:nvSpPr>
-          <p:cNvPr id="10" name="TextBox 9"/>
+          <p:cNvPr id="12" name="Rectangle 11"/>
+          <p:cNvSpPr/>
+          <p:nvPr/>
+        </p:nvSpPr>
+        <p:spPr>
+          <a:xfrm>
+            <a:off x="6223863" y="960120"/>
+            <a:ext cx="5510631" cy="73152"/>
+          </a:xfrm>
+          <a:prstGeom prst="rect">
+            <a:avLst/>
+          </a:prstGeom>
+          <a:solidFill>
+            <a:srgbClr val="2A554A"/>
+          </a:solidFill>
+          <a:ln>
+            <a:noFill/>
+          </a:ln>
+        </p:spPr>
+        <p:style>
+          <a:lnRef idx="1">
+            <a:schemeClr val="accent1"/>
+          </a:lnRef>
+          <a:fillRef idx="3">
+            <a:schemeClr val="accent1"/>
+          </a:fillRef>
+          <a:effectRef idx="2">
+            <a:schemeClr val="accent1"/>
+          </a:effectRef>
+          <a:fontRef idx="minor">
+            <a:schemeClr val="lt1"/>
+          </a:fontRef>
+        </p:style>
+        <p:txBody>
+          <a:bodyPr rtlCol="0" anchor="ctr"/>
+          <a:lstStyle/>
+          <a:p>
+            <a:pPr algn="ctr"/>
+          </a:p>
+        </p:txBody>
+      </p:sp>
+      <p:sp>
+        <p:nvSpPr>
+          <p:cNvPr id="13" name="TextBox 12"/>
           <p:cNvSpPr txBox="1"/>
           <p:nvPr/>
         </p:nvSpPr>
         <p:spPr>
           <a:xfrm>
-            <a:off x="777240" y="1234440"/>
-            <a:ext cx="4846320" cy="4663440"/>
+            <a:off x="749808" y="1216152"/>
+            <a:ext cx="4925415" cy="4663440"/>
           </a:xfrm>
           <a:prstGeom prst="rect">
             <a:avLst/>
@@ -7188,160 +8584,223 @@
           <a:lstStyle/>
           <a:p>
             <a:pPr>
-              <a:spcAft>
-                <a:spcPts val="1000"/>
-              </a:spcAft>
-            </a:pPr>
-            <a:r>
-              <a:rPr sz="2000" b="1">
-                <a:solidFill>
-                  <a:srgbClr val="2F5D50"/>
-                </a:solidFill>
-                <a:latin typeface="Calibri"/>
+              <a:lnSpc>
+                <a:spcPct val="115000"/>
+              </a:lnSpc>
+              <a:spcBef>
+                <a:spcPts val="0"/>
+              </a:spcBef>
+              <a:spcAft>
+                <a:spcPts val="1400"/>
+              </a:spcAft>
+            </a:pPr>
+            <a:r>
+              <a:rPr sz="1500" b="1">
+                <a:solidFill>
+                  <a:srgbClr val="2A554A"/>
+                </a:solidFill>
+                <a:latin typeface="Calibri"/>
+                <a:rFonts ascii="Calibri" hAnsi="Calibri" cs="Calibri"/>
               </a:rPr>
               <a:t>Обещание</a:t>
             </a:r>
           </a:p>
           <a:p>
             <a:pPr>
-              <a:spcAft>
-                <a:spcPts val="400"/>
+              <a:lnSpc>
+                <a:spcPct val="115000"/>
+              </a:lnSpc>
+              <a:spcBef>
+                <a:spcPts val="0"/>
+              </a:spcBef>
+              <a:spcAft>
+                <a:spcPts val="800"/>
               </a:spcAft>
             </a:pPr>
             <a:r>
               <a:rPr sz="1600" b="1">
                 <a:solidFill>
-                  <a:srgbClr val="1C1C1C"/>
-                </a:solidFill>
-                <a:latin typeface="Calibri"/>
+                  <a:srgbClr val="1A1A1A"/>
+                </a:solidFill>
+                <a:latin typeface="Calibri"/>
+                <a:rFonts ascii="Calibri" hAnsi="Calibri" cs="Calibri"/>
               </a:rPr>
               <a:t>Мягкий уход с понятной натуральностью</a:t>
             </a:r>
           </a:p>
           <a:p>
             <a:pPr>
+              <a:lnSpc>
+                <a:spcPct val="115000"/>
+              </a:lnSpc>
+              <a:spcBef>
+                <a:spcPts val="0"/>
+              </a:spcBef>
               <a:spcAft>
                 <a:spcPts val="1200"/>
               </a:spcAft>
             </a:pPr>
             <a:r>
-              <a:rPr sz="1500" b="0">
-                <a:solidFill>
-                  <a:srgbClr val="1C1C1C"/>
-                </a:solidFill>
-                <a:latin typeface="Calibri"/>
+              <a:rPr sz="1600" b="0">
+                <a:solidFill>
+                  <a:srgbClr val="1A1A1A"/>
+                </a:solidFill>
+                <a:latin typeface="Calibri"/>
+                <a:rFonts ascii="Calibri" hAnsi="Calibri" cs="Calibri"/>
               </a:rPr>
               <a:t>для отеля, которому важны и гость, и документы.</a:t>
             </a:r>
           </a:p>
           <a:p>
             <a:pPr>
+              <a:lnSpc>
+                <a:spcPct val="115000"/>
+              </a:lnSpc>
+              <a:spcBef>
+                <a:spcPts val="0"/>
+              </a:spcBef>
               <a:spcAft>
                 <a:spcPts val="600"/>
               </a:spcAft>
             </a:pPr>
             <a:r>
-              <a:rPr sz="1400" b="1">
-                <a:solidFill>
-                  <a:srgbClr val="5A5A5A"/>
-                </a:solidFill>
-                <a:latin typeface="Calibri"/>
+              <a:rPr sz="1400" b="0">
+                <a:solidFill>
+                  <a:srgbClr val="5C5C5C"/>
+                </a:solidFill>
+                <a:latin typeface="Calibri"/>
+                <a:rFonts ascii="Calibri" hAnsi="Calibri" cs="Calibri"/>
               </a:rPr>
               <a:t>Доказательства:</a:t>
             </a:r>
           </a:p>
           <a:p>
             <a:pPr>
-              <a:spcAft>
-                <a:spcPts val="300"/>
-              </a:spcAft>
-            </a:pPr>
-            <a:r>
-              <a:rPr sz="1500" b="0">
-                <a:solidFill>
-                  <a:srgbClr val="1C1C1C"/>
-                </a:solidFill>
-                <a:latin typeface="Calibri"/>
-              </a:rPr>
-              <a:t>· состав в границах</a:t>
-            </a:r>
-          </a:p>
-          <a:p>
-            <a:pPr>
-              <a:spcAft>
-                <a:spcPts val="300"/>
-              </a:spcAft>
-            </a:pPr>
-            <a:r>
-              <a:rPr sz="1500" b="0">
-                <a:solidFill>
-                  <a:srgbClr val="1C1C1C"/>
-                </a:solidFill>
-                <a:latin typeface="Calibri"/>
-              </a:rPr>
-              <a:t>· пакет Travel+</a:t>
-            </a:r>
-          </a:p>
-          <a:p>
-            <a:pPr>
-              <a:spcAft>
-                <a:spcPts val="300"/>
-              </a:spcAft>
-            </a:pPr>
-            <a:r>
-              <a:rPr sz="1500" b="0">
-                <a:solidFill>
-                  <a:srgbClr val="1C1C1C"/>
-                </a:solidFill>
-                <a:latin typeface="Calibri"/>
-              </a:rPr>
-              <a:t>· ощущение в номере</a:t>
-            </a:r>
-          </a:p>
-          <a:p>
-            <a:pPr>
-              <a:spcAft>
-                <a:spcPts val="300"/>
-              </a:spcAft>
-            </a:pPr>
-            <a:r>
-              <a:rPr sz="1500" b="0">
-                <a:solidFill>
-                  <a:srgbClr val="1C1C1C"/>
-                </a:solidFill>
-                <a:latin typeface="Calibri"/>
-              </a:rPr>
-              <a:t>· one-stop</a:t>
-            </a:r>
-          </a:p>
-          <a:p>
-            <a:pPr>
-              <a:spcAft>
-                <a:spcPts val="0"/>
-              </a:spcAft>
-            </a:pPr>
-            <a:r>
-              <a:rPr sz="1500" b="0">
-                <a:solidFill>
-                  <a:srgbClr val="1C1C1C"/>
-                </a:solidFill>
-                <a:latin typeface="Calibri"/>
-              </a:rPr>
-              <a:t>· «простыми словами» на этикетке</a:t>
-            </a:r>
-          </a:p>
-        </p:txBody>
-      </p:sp>
-      <p:sp>
-        <p:nvSpPr>
-          <p:cNvPr id="11" name="TextBox 10"/>
+              <a:lnSpc>
+                <a:spcPct val="115000"/>
+              </a:lnSpc>
+              <a:spcBef>
+                <a:spcPts val="0"/>
+              </a:spcBef>
+              <a:spcAft>
+                <a:spcPts val="800"/>
+              </a:spcAft>
+            </a:pPr>
+            <a:r>
+              <a:rPr sz="1600" b="0">
+                <a:solidFill>
+                  <a:srgbClr val="1A1A1A"/>
+                </a:solidFill>
+                <a:latin typeface="Calibri"/>
+                <a:rFonts ascii="Calibri" hAnsi="Calibri" cs="Calibri"/>
+              </a:rPr>
+              <a:t>• Состав в границах</a:t>
+            </a:r>
+          </a:p>
+          <a:p>
+            <a:pPr>
+              <a:lnSpc>
+                <a:spcPct val="115000"/>
+              </a:lnSpc>
+              <a:spcBef>
+                <a:spcPts val="0"/>
+              </a:spcBef>
+              <a:spcAft>
+                <a:spcPts val="800"/>
+              </a:spcAft>
+            </a:pPr>
+            <a:r>
+              <a:rPr sz="1600" b="0">
+                <a:solidFill>
+                  <a:srgbClr val="1A1A1A"/>
+                </a:solidFill>
+                <a:latin typeface="Calibri"/>
+                <a:rFonts ascii="Calibri" hAnsi="Calibri" cs="Calibri"/>
+              </a:rPr>
+              <a:t>• Пакет документов Travel+</a:t>
+            </a:r>
+          </a:p>
+          <a:p>
+            <a:pPr>
+              <a:lnSpc>
+                <a:spcPct val="115000"/>
+              </a:lnSpc>
+              <a:spcBef>
+                <a:spcPts val="0"/>
+              </a:spcBef>
+              <a:spcAft>
+                <a:spcPts val="800"/>
+              </a:spcAft>
+            </a:pPr>
+            <a:r>
+              <a:rPr sz="1600" b="0">
+                <a:solidFill>
+                  <a:srgbClr val="1A1A1A"/>
+                </a:solidFill>
+                <a:latin typeface="Calibri"/>
+                <a:rFonts ascii="Calibri" hAnsi="Calibri" cs="Calibri"/>
+              </a:rPr>
+              <a:t>• Ощущение в номере</a:t>
+            </a:r>
+          </a:p>
+          <a:p>
+            <a:pPr>
+              <a:lnSpc>
+                <a:spcPct val="115000"/>
+              </a:lnSpc>
+              <a:spcBef>
+                <a:spcPts val="0"/>
+              </a:spcBef>
+              <a:spcAft>
+                <a:spcPts val="800"/>
+              </a:spcAft>
+            </a:pPr>
+            <a:r>
+              <a:rPr sz="1600" b="0">
+                <a:solidFill>
+                  <a:srgbClr val="1A1A1A"/>
+                </a:solidFill>
+                <a:latin typeface="Calibri"/>
+                <a:rFonts ascii="Calibri" hAnsi="Calibri" cs="Calibri"/>
+              </a:rPr>
+              <a:t>• Один поставщик на номер</a:t>
+            </a:r>
+          </a:p>
+          <a:p>
+            <a:pPr>
+              <a:lnSpc>
+                <a:spcPct val="115000"/>
+              </a:lnSpc>
+              <a:spcBef>
+                <a:spcPts val="0"/>
+              </a:spcBef>
+              <a:spcAft>
+                <a:spcPts val="800"/>
+              </a:spcAft>
+            </a:pPr>
+            <a:r>
+              <a:rPr sz="1600" b="0">
+                <a:solidFill>
+                  <a:srgbClr val="1A1A1A"/>
+                </a:solidFill>
+                <a:latin typeface="Calibri"/>
+                <a:rFonts ascii="Calibri" hAnsi="Calibri" cs="Calibri"/>
+              </a:rPr>
+              <a:t>• Блок «простыми словами» на этикетке</a:t>
+            </a:r>
+          </a:p>
+        </p:txBody>
+      </p:sp>
+      <p:sp>
+        <p:nvSpPr>
+          <p:cNvPr id="14" name="TextBox 13"/>
           <p:cNvSpPr txBox="1"/>
           <p:nvPr/>
         </p:nvSpPr>
         <p:spPr>
           <a:xfrm>
-            <a:off x="6400800" y="1234440"/>
-            <a:ext cx="4937760" cy="4663440"/>
+            <a:off x="6516471" y="1216152"/>
+            <a:ext cx="4925415" cy="4663440"/>
           </a:xfrm>
           <a:prstGeom prst="rect">
             <a:avLst/>
@@ -7355,98 +8814,163 @@
           <a:lstStyle/>
           <a:p>
             <a:pPr>
-              <a:spcAft>
-                <a:spcPts val="1000"/>
-              </a:spcAft>
-            </a:pPr>
-            <a:r>
-              <a:rPr sz="2000" b="1">
-                <a:solidFill>
-                  <a:srgbClr val="2F5D50"/>
-                </a:solidFill>
-                <a:latin typeface="Calibri"/>
+              <a:lnSpc>
+                <a:spcPct val="115000"/>
+              </a:lnSpc>
+              <a:spcBef>
+                <a:spcPts val="0"/>
+              </a:spcBef>
+              <a:spcAft>
+                <a:spcPts val="1400"/>
+              </a:spcAft>
+            </a:pPr>
+            <a:r>
+              <a:rPr sz="1500" b="1">
+                <a:solidFill>
+                  <a:srgbClr val="2A554A"/>
+                </a:solidFill>
+                <a:latin typeface="Calibri"/>
+                <a:rFonts ascii="Calibri" hAnsi="Calibri" cs="Calibri"/>
               </a:rPr>
               <a:t>BrandScript</a:t>
             </a:r>
           </a:p>
           <a:p>
             <a:pPr>
+              <a:lnSpc>
+                <a:spcPct val="115000"/>
+              </a:lnSpc>
+              <a:spcBef>
+                <a:spcPts val="0"/>
+              </a:spcBef>
+              <a:spcAft>
+                <a:spcPts val="800"/>
+              </a:spcAft>
+            </a:pPr>
+            <a:r>
+              <a:rPr sz="1600" b="0">
+                <a:solidFill>
+                  <a:srgbClr val="1A1A1A"/>
+                </a:solidFill>
+                <a:latin typeface="Calibri"/>
+                <a:rFonts ascii="Calibri" hAnsi="Calibri" cs="Calibri"/>
+              </a:rPr>
+              <a:t>Герой: закупщик eco / wellness</a:t>
+            </a:r>
+          </a:p>
+          <a:p>
+            <a:pPr>
+              <a:lnSpc>
+                <a:spcPct val="115000"/>
+              </a:lnSpc>
+              <a:spcBef>
+                <a:spcPts val="0"/>
+              </a:spcBef>
+              <a:spcAft>
+                <a:spcPts val="800"/>
+              </a:spcAft>
+            </a:pPr>
+            <a:r>
+              <a:rPr sz="1600" b="0">
+                <a:solidFill>
+                  <a:srgbClr val="1A1A1A"/>
+                </a:solidFill>
+                <a:latin typeface="Calibri"/>
+                <a:rFonts ascii="Calibri" hAnsi="Calibri" cs="Calibri"/>
+              </a:rPr>
+              <a:t>Проводник: Travel+ Natural</a:t>
+            </a:r>
+          </a:p>
+          <a:p>
+            <a:pPr>
+              <a:lnSpc>
+                <a:spcPct val="115000"/>
+              </a:lnSpc>
+              <a:spcBef>
+                <a:spcPts val="0"/>
+              </a:spcBef>
+              <a:spcAft>
+                <a:spcPts val="1400"/>
+              </a:spcAft>
+            </a:pPr>
+            <a:r>
+              <a:rPr sz="1600" b="0">
+                <a:solidFill>
+                  <a:srgbClr val="1A1A1A"/>
+                </a:solidFill>
+                <a:latin typeface="Calibri"/>
+                <a:rFonts ascii="Calibri" hAnsi="Calibri" cs="Calibri"/>
+              </a:rPr>
+              <a:t>План: сегмент → образец + документы → пилот</a:t>
+            </a:r>
+          </a:p>
+          <a:p>
+            <a:pPr>
+              <a:lnSpc>
+                <a:spcPct val="115000"/>
+              </a:lnSpc>
+              <a:spcBef>
+                <a:spcPts val="0"/>
+              </a:spcBef>
               <a:spcAft>
                 <a:spcPts val="600"/>
               </a:spcAft>
             </a:pPr>
             <a:r>
-              <a:rPr sz="1500" b="0">
-                <a:solidFill>
-                  <a:srgbClr val="1C1C1C"/>
-                </a:solidFill>
-                <a:latin typeface="Calibri"/>
-              </a:rPr>
-              <a:t>Герой: закупщик eco / wellness</a:t>
-            </a:r>
-          </a:p>
-          <a:p>
-            <a:pPr>
-              <a:spcAft>
-                <a:spcPts val="600"/>
-              </a:spcAft>
-            </a:pPr>
-            <a:r>
-              <a:rPr sz="1500" b="0">
-                <a:solidFill>
-                  <a:srgbClr val="1C1C1C"/>
-                </a:solidFill>
-                <a:latin typeface="Calibri"/>
-              </a:rPr>
-              <a:t>Проводник: Travel+ Natural</a:t>
-            </a:r>
-          </a:p>
-          <a:p>
-            <a:pPr>
-              <a:spcAft>
-                <a:spcPts val="1400"/>
-              </a:spcAft>
-            </a:pPr>
-            <a:r>
-              <a:rPr sz="1500" b="0">
-                <a:solidFill>
-                  <a:srgbClr val="1C1C1C"/>
-                </a:solidFill>
-                <a:latin typeface="Calibri"/>
-              </a:rPr>
-              <a:t>План: сегмент → образец + бумаги → пилот</a:t>
-            </a:r>
-          </a:p>
-          <a:p>
-            <a:pPr>
-              <a:spcAft>
-                <a:spcPts val="600"/>
-              </a:spcAft>
-            </a:pPr>
-            <a:r>
-              <a:rPr sz="1400" b="1">
-                <a:solidFill>
-                  <a:srgbClr val="5A5A5A"/>
-                </a:solidFill>
-                <a:latin typeface="Calibri"/>
+              <a:rPr sz="1400" b="0">
+                <a:solidFill>
+                  <a:srgbClr val="5C5C5C"/>
+                </a:solidFill>
+                <a:latin typeface="Calibri"/>
+                <a:rFonts ascii="Calibri" hAnsi="Calibri" cs="Calibri"/>
               </a:rPr>
               <a:t>Гость после дороги:</a:t>
             </a:r>
           </a:p>
           <a:p>
             <a:pPr>
-              <a:spcAft>
-                <a:spcPts val="0"/>
-              </a:spcAft>
-            </a:pPr>
-            <a:r>
-              <a:rPr sz="1500" b="0">
-                <a:solidFill>
-                  <a:srgbClr val="1C1C1C"/>
-                </a:solidFill>
-                <a:latin typeface="Calibri"/>
-              </a:rPr>
-              <a:t>мягче, чем ждал - понятная натуральность</a:t>
+              <a:lnSpc>
+                <a:spcPct val="115000"/>
+              </a:lnSpc>
+              <a:spcBef>
+                <a:spcPts val="0"/>
+              </a:spcBef>
+              <a:spcAft>
+                <a:spcPts val="800"/>
+              </a:spcAft>
+            </a:pPr>
+            <a:r>
+              <a:rPr sz="1600" b="1">
+                <a:solidFill>
+                  <a:srgbClr val="1A1A1A"/>
+                </a:solidFill>
+                <a:latin typeface="Calibri"/>
+                <a:rFonts ascii="Calibri" hAnsi="Calibri" cs="Calibri"/>
+              </a:rPr>
+              <a:t>Мягче, чем ждал.</a:t>
+            </a:r>
+          </a:p>
+          <a:p>
+            <a:pPr>
+              <a:lnSpc>
+                <a:spcPct val="115000"/>
+              </a:lnSpc>
+              <a:spcBef>
+                <a:spcPts val="0"/>
+              </a:spcBef>
+              <a:spcAft>
+                <a:spcPts val="800"/>
+              </a:spcAft>
+            </a:pPr>
+            <a:r>
+              <a:rPr sz="1600" b="0">
+                <a:solidFill>
+                  <a:srgbClr val="1A1A1A"/>
+                </a:solidFill>
+                <a:latin typeface="Calibri"/>
+                <a:rFonts ascii="Calibri" hAnsi="Calibri" cs="Calibri"/>
+              </a:rPr>
+              <a:t>Понятная натуральность без громких обещаний.</a:t>
             </a:r>
           </a:p>
         </p:txBody>
@@ -7484,7 +9008,7 @@
             <a:avLst/>
           </a:prstGeom>
           <a:solidFill>
-            <a:srgbClr val="F7F5F2"/>
+            <a:srgbClr val="F5F3EF"/>
           </a:solidFill>
           <a:ln>
             <a:noFill/>
@@ -7521,13 +9045,13 @@
         <p:spPr>
           <a:xfrm>
             <a:off x="0" y="0"/>
-            <a:ext cx="109728" cy="6858000"/>
+            <a:ext cx="91440" cy="6858000"/>
           </a:xfrm>
           <a:prstGeom prst="rect">
             <a:avLst/>
           </a:prstGeom>
           <a:solidFill>
-            <a:srgbClr val="2F5D50"/>
+            <a:srgbClr val="2A554A"/>
           </a:solidFill>
           <a:ln>
             <a:noFill/>
@@ -7563,8 +9087,8 @@
         </p:nvSpPr>
         <p:spPr>
           <a:xfrm>
-            <a:off x="502920" y="256032"/>
-            <a:ext cx="11155680" cy="502920"/>
+            <a:off x="457200" y="256032"/>
+            <a:ext cx="11247120" cy="502920"/>
           </a:xfrm>
           <a:prstGeom prst="rect">
             <a:avLst/>
@@ -7578,13 +9102,14 @@
           <a:lstStyle/>
           <a:p>
             <a:r>
-              <a:rPr sz="2800" b="1">
-                <a:solidFill>
-                  <a:srgbClr val="2F5D50"/>
-                </a:solidFill>
-                <a:latin typeface="Calibri"/>
-              </a:rPr>
-              <a:t>Границы до рынка - DoD этапа 2</a:t>
+              <a:rPr sz="2600" b="1">
+                <a:solidFill>
+                  <a:srgbClr val="2A554A"/>
+                </a:solidFill>
+                <a:latin typeface="Calibri"/>
+                <a:rFonts ascii="Calibri" hAnsi="Calibri" cs="Calibri"/>
+              </a:rPr>
+              <a:t>Границы до рынка — DoD этапа 2</a:t>
             </a:r>
           </a:p>
         </p:txBody>
@@ -7597,14 +9122,14 @@
         </p:nvSpPr>
         <p:spPr>
           <a:xfrm>
-            <a:off x="502920" y="777240"/>
-            <a:ext cx="11155680" cy="22860"/>
+            <a:off x="457200" y="804672"/>
+            <a:ext cx="2011680" cy="36576"/>
           </a:xfrm>
           <a:prstGeom prst="rect">
             <a:avLst/>
           </a:prstGeom>
           <a:solidFill>
-            <a:srgbClr val="D8D2C8"/>
+            <a:srgbClr val="2A554A"/>
           </a:solidFill>
           <a:ln>
             <a:noFill/>
@@ -7634,13 +9159,56 @@
       </p:sp>
       <p:sp>
         <p:nvSpPr>
-          <p:cNvPr id="6" name="TextBox 5"/>
+          <p:cNvPr id="6" name="Rectangle 5"/>
+          <p:cNvSpPr/>
+          <p:nvPr/>
+        </p:nvSpPr>
+        <p:spPr>
+          <a:xfrm>
+            <a:off x="457200" y="6263640"/>
+            <a:ext cx="11277295" cy="13716"/>
+          </a:xfrm>
+          <a:prstGeom prst="rect">
+            <a:avLst/>
+          </a:prstGeom>
+          <a:solidFill>
+            <a:srgbClr val="D4CEC4"/>
+          </a:solidFill>
+          <a:ln>
+            <a:noFill/>
+          </a:ln>
+        </p:spPr>
+        <p:style>
+          <a:lnRef idx="1">
+            <a:schemeClr val="accent1"/>
+          </a:lnRef>
+          <a:fillRef idx="3">
+            <a:schemeClr val="accent1"/>
+          </a:fillRef>
+          <a:effectRef idx="2">
+            <a:schemeClr val="accent1"/>
+          </a:effectRef>
+          <a:fontRef idx="minor">
+            <a:schemeClr val="lt1"/>
+          </a:fontRef>
+        </p:style>
+        <p:txBody>
+          <a:bodyPr rtlCol="0" anchor="ctr"/>
+          <a:lstStyle/>
+          <a:p>
+            <a:pPr algn="ctr"/>
+          </a:p>
+        </p:txBody>
+      </p:sp>
+      <p:sp>
+        <p:nvSpPr>
+          <p:cNvPr id="7" name="TextBox 6"/>
           <p:cNvSpPr txBox="1"/>
           <p:nvPr/>
         </p:nvSpPr>
         <p:spPr>
           <a:xfrm>
-            <a:off x="502920" y="6446520"/>
+            <a:off x="457200" y="6355080"/>
             <a:ext cx="9601200" cy="320040"/>
           </a:xfrm>
           <a:prstGeom prst="rect">
@@ -7657,25 +9225,26 @@
             <a:r>
               <a:rPr sz="1100" b="0">
                 <a:solidFill>
-                  <a:srgbClr val="5A5A5A"/>
-                </a:solidFill>
-                <a:latin typeface="Calibri"/>
-              </a:rPr>
-              <a:t>Travel+ Natural · пульт v1.14 · собес · не оферта</a:t>
-            </a:r>
-          </a:p>
-        </p:txBody>
-      </p:sp>
-      <p:sp>
-        <p:nvSpPr>
-          <p:cNvPr id="7" name="TextBox 6"/>
+                  <a:srgbClr val="5C5C5C"/>
+                </a:solidFill>
+                <a:latin typeface="Calibri"/>
+                <a:rFonts ascii="Calibri" hAnsi="Calibri" cs="Calibri"/>
+              </a:rPr>
+              <a:t>Travel+ Natural  ·  пульт v1.14  ·  собеседование  ·  не оферта</a:t>
+            </a:r>
+          </a:p>
+        </p:txBody>
+      </p:sp>
+      <p:sp>
+        <p:nvSpPr>
+          <p:cNvPr id="8" name="TextBox 7"/>
           <p:cNvSpPr txBox="1"/>
           <p:nvPr/>
         </p:nvSpPr>
         <p:spPr>
           <a:xfrm>
-            <a:off x="10607040" y="6446520"/>
-            <a:ext cx="1188720" cy="320040"/>
+            <a:off x="10515600" y="6355080"/>
+            <a:ext cx="1280160" cy="320040"/>
           </a:xfrm>
           <a:prstGeom prst="rect">
             <a:avLst/>
@@ -7692,29 +9261,30 @@
             <a:r>
               <a:rPr sz="1100" b="0">
                 <a:solidFill>
-                  <a:srgbClr val="5A5A5A"/>
-                </a:solidFill>
-                <a:latin typeface="Calibri"/>
-              </a:rPr>
-              <a:t>6/12</a:t>
-            </a:r>
-          </a:p>
-        </p:txBody>
-      </p:sp>
-      <p:sp>
-        <p:nvSpPr>
-          <p:cNvPr id="8" name="Rounded Rectangle 7"/>
+                  <a:srgbClr val="5C5C5C"/>
+                </a:solidFill>
+                <a:latin typeface="Calibri"/>
+                <a:rFonts ascii="Calibri" hAnsi="Calibri" cs="Calibri"/>
+              </a:rPr>
+              <a:t>6 / 12</a:t>
+            </a:r>
+          </a:p>
+        </p:txBody>
+      </p:sp>
+      <p:sp>
+        <p:nvSpPr>
+          <p:cNvPr id="9" name="Rounded Rectangle 8"/>
           <p:cNvSpPr/>
           <p:nvPr/>
         </p:nvSpPr>
         <p:spPr>
           <a:xfrm>
-            <a:off x="502920" y="1051560"/>
-            <a:ext cx="5349240" cy="5029200"/>
+            <a:off x="457200" y="960120"/>
+            <a:ext cx="5510631" cy="5074920"/>
           </a:xfrm>
           <a:prstGeom prst="roundRect">
             <a:avLst>
-              <a:gd name="adj" fmla="val 8000"/>
+              <a:gd name="adj" fmla="val 6000"/>
             </a:avLst>
           </a:prstGeom>
           <a:solidFill>
@@ -7722,7 +9292,7 @@
           </a:solidFill>
           <a:ln w="12700">
             <a:solidFill>
-              <a:srgbClr val="D8D2C8"/>
+              <a:srgbClr val="D4CEC4"/>
             </a:solidFill>
           </a:ln>
         </p:spPr>
@@ -7750,18 +9320,61 @@
       </p:sp>
       <p:sp>
         <p:nvSpPr>
-          <p:cNvPr id="9" name="Rounded Rectangle 8"/>
+          <p:cNvPr id="10" name="Rectangle 9"/>
           <p:cNvSpPr/>
           <p:nvPr/>
         </p:nvSpPr>
         <p:spPr>
           <a:xfrm>
-            <a:off x="6126480" y="1051560"/>
-            <a:ext cx="5440680" cy="5029200"/>
+            <a:off x="457200" y="960120"/>
+            <a:ext cx="5510631" cy="73152"/>
+          </a:xfrm>
+          <a:prstGeom prst="rect">
+            <a:avLst/>
+          </a:prstGeom>
+          <a:solidFill>
+            <a:srgbClr val="2A554A"/>
+          </a:solidFill>
+          <a:ln>
+            <a:noFill/>
+          </a:ln>
+        </p:spPr>
+        <p:style>
+          <a:lnRef idx="1">
+            <a:schemeClr val="accent1"/>
+          </a:lnRef>
+          <a:fillRef idx="3">
+            <a:schemeClr val="accent1"/>
+          </a:fillRef>
+          <a:effectRef idx="2">
+            <a:schemeClr val="accent1"/>
+          </a:effectRef>
+          <a:fontRef idx="minor">
+            <a:schemeClr val="lt1"/>
+          </a:fontRef>
+        </p:style>
+        <p:txBody>
+          <a:bodyPr rtlCol="0" anchor="ctr"/>
+          <a:lstStyle/>
+          <a:p>
+            <a:pPr algn="ctr"/>
+          </a:p>
+        </p:txBody>
+      </p:sp>
+      <p:sp>
+        <p:nvSpPr>
+          <p:cNvPr id="11" name="Rounded Rectangle 10"/>
+          <p:cNvSpPr/>
+          <p:nvPr/>
+        </p:nvSpPr>
+        <p:spPr>
+          <a:xfrm>
+            <a:off x="6223863" y="960120"/>
+            <a:ext cx="5510631" cy="5074920"/>
           </a:xfrm>
           <a:prstGeom prst="roundRect">
             <a:avLst>
-              <a:gd name="adj" fmla="val 8000"/>
+              <a:gd name="adj" fmla="val 6000"/>
             </a:avLst>
           </a:prstGeom>
           <a:solidFill>
@@ -7769,7 +9382,7 @@
           </a:solidFill>
           <a:ln w="12700">
             <a:solidFill>
-              <a:srgbClr val="D8D2C8"/>
+              <a:srgbClr val="D4CEC4"/>
             </a:solidFill>
           </a:ln>
         </p:spPr>
@@ -7797,14 +9410,57 @@
       </p:sp>
       <p:sp>
         <p:nvSpPr>
-          <p:cNvPr id="10" name="TextBox 9"/>
+          <p:cNvPr id="12" name="Rectangle 11"/>
+          <p:cNvSpPr/>
+          <p:nvPr/>
+        </p:nvSpPr>
+        <p:spPr>
+          <a:xfrm>
+            <a:off x="6223863" y="960120"/>
+            <a:ext cx="5510631" cy="73152"/>
+          </a:xfrm>
+          <a:prstGeom prst="rect">
+            <a:avLst/>
+          </a:prstGeom>
+          <a:solidFill>
+            <a:srgbClr val="2A554A"/>
+          </a:solidFill>
+          <a:ln>
+            <a:noFill/>
+          </a:ln>
+        </p:spPr>
+        <p:style>
+          <a:lnRef idx="1">
+            <a:schemeClr val="accent1"/>
+          </a:lnRef>
+          <a:fillRef idx="3">
+            <a:schemeClr val="accent1"/>
+          </a:fillRef>
+          <a:effectRef idx="2">
+            <a:schemeClr val="accent1"/>
+          </a:effectRef>
+          <a:fontRef idx="minor">
+            <a:schemeClr val="lt1"/>
+          </a:fontRef>
+        </p:style>
+        <p:txBody>
+          <a:bodyPr rtlCol="0" anchor="ctr"/>
+          <a:lstStyle/>
+          <a:p>
+            <a:pPr algn="ctr"/>
+          </a:p>
+        </p:txBody>
+      </p:sp>
+      <p:sp>
+        <p:nvSpPr>
+          <p:cNvPr id="13" name="TextBox 12"/>
           <p:cNvSpPr txBox="1"/>
           <p:nvPr/>
         </p:nvSpPr>
         <p:spPr>
           <a:xfrm>
-            <a:off x="777240" y="1234440"/>
-            <a:ext cx="4846320" cy="4663440"/>
+            <a:off x="749808" y="1216152"/>
+            <a:ext cx="4925415" cy="4663440"/>
           </a:xfrm>
           <a:prstGeom prst="rect">
             <a:avLst/>
@@ -7818,144 +9474,200 @@
           <a:lstStyle/>
           <a:p>
             <a:pPr>
-              <a:spcAft>
-                <a:spcPts val="1000"/>
-              </a:spcAft>
-            </a:pPr>
-            <a:r>
-              <a:rPr sz="1600" b="1">
-                <a:solidFill>
-                  <a:srgbClr val="2F5D50"/>
-                </a:solidFill>
-                <a:latin typeface="Calibri"/>
-              </a:rPr>
-              <a:t>Пока красное - витрину не открываем</a:t>
-            </a:r>
-          </a:p>
-          <a:p>
-            <a:pPr>
-              <a:spcAft>
-                <a:spcPts val="400"/>
-              </a:spcAft>
-            </a:pPr>
-            <a:r>
-              <a:rPr sz="1500" b="0">
-                <a:solidFill>
-                  <a:srgbClr val="1C1C1C"/>
-                </a:solidFill>
-                <a:latin typeface="Calibri"/>
-              </a:rPr>
-              <a:t>□ Метод + % натуральности</a:t>
-            </a:r>
-          </a:p>
-          <a:p>
-            <a:pPr>
-              <a:spcAft>
-                <a:spcPts val="400"/>
-              </a:spcAft>
-            </a:pPr>
-            <a:r>
-              <a:rPr sz="1500" b="0">
-                <a:solidFill>
-                  <a:srgbClr val="1C1C1C"/>
-                </a:solidFill>
-                <a:latin typeface="Calibri"/>
-              </a:rPr>
-              <a:t>□ Пакет как на HL/Fleur + лист Natural</a:t>
-            </a:r>
-          </a:p>
-          <a:p>
-            <a:pPr>
-              <a:spcAft>
-                <a:spcPts val="400"/>
-              </a:spcAft>
-            </a:pPr>
-            <a:r>
-              <a:rPr sz="1500" b="0">
-                <a:solidFill>
-                  <a:srgbClr val="1C1C1C"/>
-                </a:solidFill>
-                <a:latin typeface="Calibri"/>
+              <a:lnSpc>
+                <a:spcPct val="115000"/>
+              </a:lnSpc>
+              <a:spcBef>
+                <a:spcPts val="0"/>
+              </a:spcBef>
+              <a:spcAft>
+                <a:spcPts val="1400"/>
+              </a:spcAft>
+            </a:pPr>
+            <a:r>
+              <a:rPr sz="1500" b="1">
+                <a:solidFill>
+                  <a:srgbClr val="2A554A"/>
+                </a:solidFill>
+                <a:latin typeface="Calibri"/>
+                <a:rFonts ascii="Calibri" hAnsi="Calibri" cs="Calibri"/>
+              </a:rPr>
+              <a:t>Пока красное — витрину не открываем</a:t>
+            </a:r>
+          </a:p>
+          <a:p>
+            <a:pPr>
+              <a:lnSpc>
+                <a:spcPct val="115000"/>
+              </a:lnSpc>
+              <a:spcBef>
+                <a:spcPts val="0"/>
+              </a:spcBef>
+              <a:spcAft>
+                <a:spcPts val="800"/>
+              </a:spcAft>
+            </a:pPr>
+            <a:r>
+              <a:rPr sz="1600" b="0">
+                <a:solidFill>
+                  <a:srgbClr val="1A1A1A"/>
+                </a:solidFill>
+                <a:latin typeface="Calibri"/>
+                <a:rFonts ascii="Calibri" hAnsi="Calibri" cs="Calibri"/>
+              </a:rPr>
+              <a:t>□ Метод и % натуральности</a:t>
+            </a:r>
+          </a:p>
+          <a:p>
+            <a:pPr>
+              <a:lnSpc>
+                <a:spcPct val="115000"/>
+              </a:lnSpc>
+              <a:spcBef>
+                <a:spcPts val="0"/>
+              </a:spcBef>
+              <a:spcAft>
+                <a:spcPts val="800"/>
+              </a:spcAft>
+            </a:pPr>
+            <a:r>
+              <a:rPr sz="1600" b="0">
+                <a:solidFill>
+                  <a:srgbClr val="1A1A1A"/>
+                </a:solidFill>
+                <a:latin typeface="Calibri"/>
+                <a:rFonts ascii="Calibri" hAnsi="Calibri" cs="Calibri"/>
+              </a:rPr>
+              <a:t>□ Пакет как у HL / Fleur + лист Natural</a:t>
+            </a:r>
+          </a:p>
+          <a:p>
+            <a:pPr>
+              <a:lnSpc>
+                <a:spcPct val="115000"/>
+              </a:lnSpc>
+              <a:spcBef>
+                <a:spcPts val="0"/>
+              </a:spcBef>
+              <a:spcAft>
+                <a:spcPts val="800"/>
+              </a:spcAft>
+            </a:pPr>
+            <a:r>
+              <a:rPr sz="1600" b="0">
+                <a:solidFill>
+                  <a:srgbClr val="1A1A1A"/>
+                </a:solidFill>
+                <a:latin typeface="Calibri"/>
+                <a:rFonts ascii="Calibri" hAnsi="Calibri" cs="Calibri"/>
               </a:rPr>
               <a:t>□ Origin зафиксирован</a:t>
             </a:r>
           </a:p>
           <a:p>
             <a:pPr>
-              <a:spcAft>
-                <a:spcPts val="400"/>
-              </a:spcAft>
-            </a:pPr>
-            <a:r>
-              <a:rPr sz="1500" b="0">
-                <a:solidFill>
-                  <a:srgbClr val="1C1C1C"/>
-                </a:solidFill>
-                <a:latin typeface="Calibri"/>
+              <a:lnSpc>
+                <a:spcPct val="115000"/>
+              </a:lnSpc>
+              <a:spcBef>
+                <a:spcPts val="0"/>
+              </a:spcBef>
+              <a:spcAft>
+                <a:spcPts val="800"/>
+              </a:spcAft>
+            </a:pPr>
+            <a:r>
+              <a:rPr sz="1600" b="0">
+                <a:solidFill>
+                  <a:srgbClr val="1A1A1A"/>
+                </a:solidFill>
+                <a:latin typeface="Calibri"/>
+                <a:rFonts ascii="Calibri" hAnsi="Calibri" cs="Calibri"/>
               </a:rPr>
               <a:t>□ Слепой тест запаха с гостями</a:t>
             </a:r>
           </a:p>
           <a:p>
             <a:pPr>
-              <a:spcAft>
-                <a:spcPts val="400"/>
-              </a:spcAft>
-            </a:pPr>
-            <a:r>
-              <a:rPr sz="1500" b="0">
-                <a:solidFill>
-                  <a:srgbClr val="1C1C1C"/>
-                </a:solidFill>
-                <a:latin typeface="Calibri"/>
+              <a:lnSpc>
+                <a:spcPct val="115000"/>
+              </a:lnSpc>
+              <a:spcBef>
+                <a:spcPts val="0"/>
+              </a:spcBef>
+              <a:spcAft>
+                <a:spcPts val="800"/>
+              </a:spcAft>
+            </a:pPr>
+            <a:r>
+              <a:rPr sz="1600" b="0">
+                <a:solidFill>
+                  <a:srgbClr val="1A1A1A"/>
+                </a:solidFill>
+                <a:latin typeface="Calibri"/>
+                <a:rFonts ascii="Calibri" hAnsi="Calibri" cs="Calibri"/>
               </a:rPr>
               <a:t>□ Этикетка «простыми словами»</a:t>
             </a:r>
           </a:p>
           <a:p>
             <a:pPr>
-              <a:spcAft>
-                <a:spcPts val="400"/>
-              </a:spcAft>
-            </a:pPr>
-            <a:r>
-              <a:rPr sz="1500" b="0">
-                <a:solidFill>
-                  <a:srgbClr val="1C1C1C"/>
-                </a:solidFill>
-                <a:latin typeface="Calibri"/>
-              </a:rPr>
-              <a:t>□ COGS / коридор цены</a:t>
-            </a:r>
-          </a:p>
-          <a:p>
-            <a:pPr>
-              <a:spcAft>
-                <a:spcPts val="0"/>
-              </a:spcAft>
-            </a:pPr>
-            <a:r>
-              <a:rPr sz="1500" b="0">
-                <a:solidFill>
-                  <a:srgbClr val="1C1C1C"/>
-                </a:solidFill>
-                <a:latin typeface="Calibri"/>
-              </a:rPr>
-              <a:t>□ Lead time / MOQ / брак</a:t>
-            </a:r>
-          </a:p>
-        </p:txBody>
-      </p:sp>
-      <p:sp>
-        <p:nvSpPr>
-          <p:cNvPr id="11" name="TextBox 10"/>
+              <a:lnSpc>
+                <a:spcPct val="115000"/>
+              </a:lnSpc>
+              <a:spcBef>
+                <a:spcPts val="0"/>
+              </a:spcBef>
+              <a:spcAft>
+                <a:spcPts val="800"/>
+              </a:spcAft>
+            </a:pPr>
+            <a:r>
+              <a:rPr sz="1600" b="0">
+                <a:solidFill>
+                  <a:srgbClr val="1A1A1A"/>
+                </a:solidFill>
+                <a:latin typeface="Calibri"/>
+                <a:rFonts ascii="Calibri" hAnsi="Calibri" cs="Calibri"/>
+              </a:rPr>
+              <a:t>□ Себестоимость и коридор цены</a:t>
+            </a:r>
+          </a:p>
+          <a:p>
+            <a:pPr>
+              <a:lnSpc>
+                <a:spcPct val="115000"/>
+              </a:lnSpc>
+              <a:spcBef>
+                <a:spcPts val="0"/>
+              </a:spcBef>
+              <a:spcAft>
+                <a:spcPts val="800"/>
+              </a:spcAft>
+            </a:pPr>
+            <a:r>
+              <a:rPr sz="1600" b="0">
+                <a:solidFill>
+                  <a:srgbClr val="1A1A1A"/>
+                </a:solidFill>
+                <a:latin typeface="Calibri"/>
+                <a:rFonts ascii="Calibri" hAnsi="Calibri" cs="Calibri"/>
+              </a:rPr>
+              <a:t>□ Срок поставки / мин. заказ / брак</a:t>
+            </a:r>
+          </a:p>
+        </p:txBody>
+      </p:sp>
+      <p:sp>
+        <p:nvSpPr>
+          <p:cNvPr id="14" name="TextBox 13"/>
           <p:cNvSpPr txBox="1"/>
           <p:nvPr/>
         </p:nvSpPr>
         <p:spPr>
           <a:xfrm>
-            <a:off x="6400800" y="1234440"/>
-            <a:ext cx="4937760" cy="4663440"/>
+            <a:off x="6516471" y="1216152"/>
+            <a:ext cx="4925415" cy="4663440"/>
           </a:xfrm>
           <a:prstGeom prst="rect">
             <a:avLst/>
@@ -7969,80 +9681,115 @@
           <a:lstStyle/>
           <a:p>
             <a:pPr>
+              <a:lnSpc>
+                <a:spcPct val="115000"/>
+              </a:lnSpc>
+              <a:spcBef>
+                <a:spcPts val="0"/>
+              </a:spcBef>
+              <a:spcAft>
+                <a:spcPts val="1400"/>
+              </a:spcAft>
+            </a:pPr>
+            <a:r>
+              <a:rPr sz="1500" b="1">
+                <a:solidFill>
+                  <a:srgbClr val="2A554A"/>
+                </a:solidFill>
+                <a:latin typeface="Calibri"/>
+                <a:rFonts ascii="Calibri" hAnsi="Calibri" cs="Calibri"/>
+              </a:rPr>
+              <a:t>Правила</a:t>
+            </a:r>
+          </a:p>
+          <a:p>
+            <a:pPr>
+              <a:lnSpc>
+                <a:spcPct val="115000"/>
+              </a:lnSpc>
+              <a:spcBef>
+                <a:spcPts val="0"/>
+              </a:spcBef>
+              <a:spcAft>
+                <a:spcPts val="800"/>
+              </a:spcAft>
+            </a:pPr>
+            <a:r>
+              <a:rPr sz="1600" b="0">
+                <a:solidFill>
+                  <a:srgbClr val="1A1A1A"/>
+                </a:solidFill>
+                <a:latin typeface="Calibri"/>
+                <a:rFonts ascii="Calibri" hAnsi="Calibri" cs="Calibri"/>
+              </a:rPr>
+              <a:t>На старте без COSMOS, если знака нет — честно.</a:t>
+            </a:r>
+          </a:p>
+          <a:p>
+            <a:pPr>
+              <a:lnSpc>
+                <a:spcPct val="115000"/>
+              </a:lnSpc>
+              <a:spcBef>
+                <a:spcPts val="0"/>
+              </a:spcBef>
               <a:spcAft>
                 <a:spcPts val="1200"/>
               </a:spcAft>
             </a:pPr>
             <a:r>
-              <a:rPr sz="2000" b="1">
-                <a:solidFill>
-                  <a:srgbClr val="2F5D50"/>
-                </a:solidFill>
-                <a:latin typeface="Calibri"/>
-              </a:rPr>
-              <a:t>Правила</a:t>
-            </a:r>
-          </a:p>
-          <a:p>
-            <a:pPr>
-              <a:spcAft>
-                <a:spcPts val="1000"/>
-              </a:spcAft>
-            </a:pPr>
-            <a:r>
-              <a:rPr sz="1500" b="0">
-                <a:solidFill>
-                  <a:srgbClr val="1C1C1C"/>
-                </a:solidFill>
-                <a:latin typeface="Calibri"/>
-              </a:rPr>
-              <a:t>На старте без COSMOS, если знака нет - честно.</a:t>
-            </a:r>
-          </a:p>
-          <a:p>
-            <a:pPr>
-              <a:spcAft>
-                <a:spcPts val="1000"/>
-              </a:spcAft>
-            </a:pPr>
-            <a:r>
-              <a:rPr sz="1500" b="1">
-                <a:solidFill>
-                  <a:srgbClr val="1C1C1C"/>
-                </a:solidFill>
-                <a:latin typeface="Calibri"/>
-              </a:rPr>
-              <a:t>Без DoD - не КП и не live GTM.</a:t>
-            </a:r>
-          </a:p>
-          <a:p>
-            <a:pPr>
-              <a:spcAft>
-                <a:spcPts val="400"/>
-              </a:spcAft>
-            </a:pPr>
-            <a:r>
-              <a:rPr sz="1500" b="0">
-                <a:solidFill>
-                  <a:srgbClr val="1C1C1C"/>
-                </a:solidFill>
-                <a:latin typeface="Calibri"/>
-              </a:rPr>
-              <a:t>Этапы 3-6 - учебный сценарий,</a:t>
-            </a:r>
-          </a:p>
-          <a:p>
-            <a:pPr>
-              <a:spcAft>
-                <a:spcPts val="0"/>
-              </a:spcAft>
-            </a:pPr>
-            <a:r>
-              <a:rPr sz="1500" b="0">
-                <a:solidFill>
-                  <a:srgbClr val="1C1C1C"/>
-                </a:solidFill>
-                <a:latin typeface="Calibri"/>
+              <a:rPr sz="1600" b="1">
+                <a:solidFill>
+                  <a:srgbClr val="1A1A1A"/>
+                </a:solidFill>
+                <a:latin typeface="Calibri"/>
+                <a:rFonts ascii="Calibri" hAnsi="Calibri" cs="Calibri"/>
+              </a:rPr>
+              <a:t>Без DoD — не КП и не live GTM.</a:t>
+            </a:r>
+          </a:p>
+          <a:p>
+            <a:pPr>
+              <a:lnSpc>
+                <a:spcPct val="115000"/>
+              </a:lnSpc>
+              <a:spcBef>
+                <a:spcPts val="0"/>
+              </a:spcBef>
+              <a:spcAft>
+                <a:spcPts val="800"/>
+              </a:spcAft>
+            </a:pPr>
+            <a:r>
+              <a:rPr sz="1600" b="0">
+                <a:solidFill>
+                  <a:srgbClr val="1A1A1A"/>
+                </a:solidFill>
+                <a:latin typeface="Calibri"/>
+                <a:rFonts ascii="Calibri" hAnsi="Calibri" cs="Calibri"/>
+              </a:rPr>
+              <a:t>Этапы 3–6 — учебный сценарий,</a:t>
+            </a:r>
+          </a:p>
+          <a:p>
+            <a:pPr>
+              <a:lnSpc>
+                <a:spcPct val="115000"/>
+              </a:lnSpc>
+              <a:spcBef>
+                <a:spcPts val="0"/>
+              </a:spcBef>
+              <a:spcAft>
+                <a:spcPts val="800"/>
+              </a:spcAft>
+            </a:pPr>
+            <a:r>
+              <a:rPr sz="1600" b="0">
+                <a:solidFill>
+                  <a:srgbClr val="1A1A1A"/>
+                </a:solidFill>
+                <a:latin typeface="Calibri"/>
+                <a:rFonts ascii="Calibri" hAnsi="Calibri" cs="Calibri"/>
               </a:rPr>
               <a:t>не факт завода.</a:t>
             </a:r>
@@ -8082,7 +9829,7 @@
             <a:avLst/>
           </a:prstGeom>
           <a:solidFill>
-            <a:srgbClr val="F7F5F2"/>
+            <a:srgbClr val="F5F3EF"/>
           </a:solidFill>
           <a:ln>
             <a:noFill/>
@@ -8119,13 +9866,13 @@
         <p:spPr>
           <a:xfrm>
             <a:off x="0" y="0"/>
-            <a:ext cx="109728" cy="6858000"/>
+            <a:ext cx="91440" cy="6858000"/>
           </a:xfrm>
           <a:prstGeom prst="rect">
             <a:avLst/>
           </a:prstGeom>
           <a:solidFill>
-            <a:srgbClr val="2F5D50"/>
+            <a:srgbClr val="2A554A"/>
           </a:solidFill>
           <a:ln>
             <a:noFill/>
@@ -8161,8 +9908,8 @@
         </p:nvSpPr>
         <p:spPr>
           <a:xfrm>
-            <a:off x="502920" y="256032"/>
-            <a:ext cx="11155680" cy="502920"/>
+            <a:off x="457200" y="256032"/>
+            <a:ext cx="11247120" cy="502920"/>
           </a:xfrm>
           <a:prstGeom prst="rect">
             <a:avLst/>
@@ -8176,11 +9923,12 @@
           <a:lstStyle/>
           <a:p>
             <a:r>
-              <a:rPr sz="2800" b="1">
-                <a:solidFill>
-                  <a:srgbClr val="2F5D50"/>
-                </a:solidFill>
-                <a:latin typeface="Calibri"/>
+              <a:rPr sz="2600" b="1">
+                <a:solidFill>
+                  <a:srgbClr val="2A554A"/>
+                </a:solidFill>
+                <a:latin typeface="Calibri"/>
+                <a:rFonts ascii="Calibri" hAnsi="Calibri" cs="Calibri"/>
               </a:rPr>
               <a:t>Питч закупщику (30 секунд)</a:t>
             </a:r>
@@ -8195,14 +9943,14 @@
         </p:nvSpPr>
         <p:spPr>
           <a:xfrm>
-            <a:off x="502920" y="777240"/>
-            <a:ext cx="11155680" cy="22860"/>
+            <a:off x="457200" y="804672"/>
+            <a:ext cx="2011680" cy="36576"/>
           </a:xfrm>
           <a:prstGeom prst="rect">
             <a:avLst/>
           </a:prstGeom>
           <a:solidFill>
-            <a:srgbClr val="D8D2C8"/>
+            <a:srgbClr val="2A554A"/>
           </a:solidFill>
           <a:ln>
             <a:noFill/>
@@ -8232,13 +9980,56 @@
       </p:sp>
       <p:sp>
         <p:nvSpPr>
-          <p:cNvPr id="6" name="TextBox 5"/>
+          <p:cNvPr id="6" name="Rectangle 5"/>
+          <p:cNvSpPr/>
+          <p:nvPr/>
+        </p:nvSpPr>
+        <p:spPr>
+          <a:xfrm>
+            <a:off x="457200" y="6263640"/>
+            <a:ext cx="11277295" cy="13716"/>
+          </a:xfrm>
+          <a:prstGeom prst="rect">
+            <a:avLst/>
+          </a:prstGeom>
+          <a:solidFill>
+            <a:srgbClr val="D4CEC4"/>
+          </a:solidFill>
+          <a:ln>
+            <a:noFill/>
+          </a:ln>
+        </p:spPr>
+        <p:style>
+          <a:lnRef idx="1">
+            <a:schemeClr val="accent1"/>
+          </a:lnRef>
+          <a:fillRef idx="3">
+            <a:schemeClr val="accent1"/>
+          </a:fillRef>
+          <a:effectRef idx="2">
+            <a:schemeClr val="accent1"/>
+          </a:effectRef>
+          <a:fontRef idx="minor">
+            <a:schemeClr val="lt1"/>
+          </a:fontRef>
+        </p:style>
+        <p:txBody>
+          <a:bodyPr rtlCol="0" anchor="ctr"/>
+          <a:lstStyle/>
+          <a:p>
+            <a:pPr algn="ctr"/>
+          </a:p>
+        </p:txBody>
+      </p:sp>
+      <p:sp>
+        <p:nvSpPr>
+          <p:cNvPr id="7" name="TextBox 6"/>
           <p:cNvSpPr txBox="1"/>
           <p:nvPr/>
         </p:nvSpPr>
         <p:spPr>
           <a:xfrm>
-            <a:off x="502920" y="6446520"/>
+            <a:off x="457200" y="6355080"/>
             <a:ext cx="9601200" cy="320040"/>
           </a:xfrm>
           <a:prstGeom prst="rect">
@@ -8255,25 +10046,26 @@
             <a:r>
               <a:rPr sz="1100" b="0">
                 <a:solidFill>
-                  <a:srgbClr val="5A5A5A"/>
-                </a:solidFill>
-                <a:latin typeface="Calibri"/>
-              </a:rPr>
-              <a:t>Travel+ Natural · пульт v1.14 · собес · не оферта</a:t>
-            </a:r>
-          </a:p>
-        </p:txBody>
-      </p:sp>
-      <p:sp>
-        <p:nvSpPr>
-          <p:cNvPr id="7" name="TextBox 6"/>
+                  <a:srgbClr val="5C5C5C"/>
+                </a:solidFill>
+                <a:latin typeface="Calibri"/>
+                <a:rFonts ascii="Calibri" hAnsi="Calibri" cs="Calibri"/>
+              </a:rPr>
+              <a:t>Travel+ Natural  ·  пульт v1.14  ·  собеседование  ·  не оферта</a:t>
+            </a:r>
+          </a:p>
+        </p:txBody>
+      </p:sp>
+      <p:sp>
+        <p:nvSpPr>
+          <p:cNvPr id="8" name="TextBox 7"/>
           <p:cNvSpPr txBox="1"/>
           <p:nvPr/>
         </p:nvSpPr>
         <p:spPr>
           <a:xfrm>
-            <a:off x="10607040" y="6446520"/>
-            <a:ext cx="1188720" cy="320040"/>
+            <a:off x="10515600" y="6355080"/>
+            <a:ext cx="1280160" cy="320040"/>
           </a:xfrm>
           <a:prstGeom prst="rect">
             <a:avLst/>
@@ -8290,29 +10082,30 @@
             <a:r>
               <a:rPr sz="1100" b="0">
                 <a:solidFill>
-                  <a:srgbClr val="5A5A5A"/>
-                </a:solidFill>
-                <a:latin typeface="Calibri"/>
-              </a:rPr>
-              <a:t>7/12</a:t>
-            </a:r>
-          </a:p>
-        </p:txBody>
-      </p:sp>
-      <p:sp>
-        <p:nvSpPr>
-          <p:cNvPr id="8" name="Rounded Rectangle 7"/>
+                  <a:srgbClr val="5C5C5C"/>
+                </a:solidFill>
+                <a:latin typeface="Calibri"/>
+                <a:rFonts ascii="Calibri" hAnsi="Calibri" cs="Calibri"/>
+              </a:rPr>
+              <a:t>7 / 12</a:t>
+            </a:r>
+          </a:p>
+        </p:txBody>
+      </p:sp>
+      <p:sp>
+        <p:nvSpPr>
+          <p:cNvPr id="9" name="Rounded Rectangle 8"/>
           <p:cNvSpPr/>
           <p:nvPr/>
         </p:nvSpPr>
         <p:spPr>
           <a:xfrm>
-            <a:off x="502920" y="1097280"/>
-            <a:ext cx="11155680" cy="4023360"/>
+            <a:off x="457200" y="960120"/>
+            <a:ext cx="11277295" cy="4206240"/>
           </a:xfrm>
           <a:prstGeom prst="roundRect">
             <a:avLst>
-              <a:gd name="adj" fmla="val 8000"/>
+              <a:gd name="adj" fmla="val 6000"/>
             </a:avLst>
           </a:prstGeom>
           <a:solidFill>
@@ -8320,7 +10113,7 @@
           </a:solidFill>
           <a:ln w="12700">
             <a:solidFill>
-              <a:srgbClr val="D8D2C8"/>
+              <a:srgbClr val="D4CEC4"/>
             </a:solidFill>
           </a:ln>
         </p:spPr>
@@ -8348,14 +10141,57 @@
       </p:sp>
       <p:sp>
         <p:nvSpPr>
-          <p:cNvPr id="9" name="TextBox 8"/>
+          <p:cNvPr id="10" name="Rectangle 9"/>
+          <p:cNvSpPr/>
+          <p:nvPr/>
+        </p:nvSpPr>
+        <p:spPr>
+          <a:xfrm>
+            <a:off x="457200" y="960120"/>
+            <a:ext cx="11277295" cy="73152"/>
+          </a:xfrm>
+          <a:prstGeom prst="rect">
+            <a:avLst/>
+          </a:prstGeom>
+          <a:solidFill>
+            <a:srgbClr val="2A554A"/>
+          </a:solidFill>
+          <a:ln>
+            <a:noFill/>
+          </a:ln>
+        </p:spPr>
+        <p:style>
+          <a:lnRef idx="1">
+            <a:schemeClr val="accent1"/>
+          </a:lnRef>
+          <a:fillRef idx="3">
+            <a:schemeClr val="accent1"/>
+          </a:fillRef>
+          <a:effectRef idx="2">
+            <a:schemeClr val="accent1"/>
+          </a:effectRef>
+          <a:fontRef idx="minor">
+            <a:schemeClr val="lt1"/>
+          </a:fontRef>
+        </p:style>
+        <p:txBody>
+          <a:bodyPr rtlCol="0" anchor="ctr"/>
+          <a:lstStyle/>
+          <a:p>
+            <a:pPr algn="ctr"/>
+          </a:p>
+        </p:txBody>
+      </p:sp>
+      <p:sp>
+        <p:nvSpPr>
+          <p:cNvPr id="11" name="TextBox 10"/>
           <p:cNvSpPr txBox="1"/>
           <p:nvPr/>
         </p:nvSpPr>
         <p:spPr>
           <a:xfrm>
-            <a:off x="868680" y="1371600"/>
-            <a:ext cx="10424160" cy="3566160"/>
+            <a:off x="749808" y="1280160"/>
+            <a:ext cx="10692079" cy="3657600"/>
           </a:xfrm>
           <a:prstGeom prst="rect">
             <a:avLst/>
@@ -8369,80 +10205,115 @@
           <a:lstStyle/>
           <a:p>
             <a:pPr>
+              <a:lnSpc>
+                <a:spcPct val="115000"/>
+              </a:lnSpc>
+              <a:spcBef>
+                <a:spcPts val="0"/>
+              </a:spcBef>
               <a:spcAft>
                 <a:spcPts val="1000"/>
               </a:spcAft>
             </a:pPr>
             <a:r>
-              <a:rPr sz="1800" b="0">
-                <a:solidFill>
-                  <a:srgbClr val="1C1C1C"/>
-                </a:solidFill>
-                <a:latin typeface="Calibri"/>
-              </a:rPr>
-              <a:t>«Вам нужно выглядеть зеленее - и спокойно пройти и гостя, и документы.</a:t>
-            </a:r>
-          </a:p>
-          <a:p>
-            <a:pPr>
+              <a:rPr sz="1700" b="0">
+                <a:solidFill>
+                  <a:srgbClr val="1A1A1A"/>
+                </a:solidFill>
+                <a:latin typeface="Calibri"/>
+                <a:rFonts ascii="Calibri" hAnsi="Calibri" cs="Calibri"/>
+              </a:rPr>
+              <a:t>«Вам нужно выглядеть зеленее — и спокойно пройти и гостя, и документы.</a:t>
+            </a:r>
+          </a:p>
+          <a:p>
+            <a:pPr>
+              <a:lnSpc>
+                <a:spcPct val="115000"/>
+              </a:lnSpc>
+              <a:spcBef>
+                <a:spcPts val="0"/>
+              </a:spcBef>
               <a:spcAft>
                 <a:spcPts val="400"/>
               </a:spcAft>
             </a:pPr>
             <a:r>
-              <a:rPr sz="1800" b="0">
-                <a:solidFill>
-                  <a:srgbClr val="1C1C1C"/>
-                </a:solidFill>
-                <a:latin typeface="Calibri"/>
-              </a:rPr>
-              <a:t>Travel+ Natural: пакет как на Hotel Line и Fleur</a:t>
-            </a:r>
-          </a:p>
-          <a:p>
-            <a:pPr>
+              <a:rPr sz="1700" b="0">
+                <a:solidFill>
+                  <a:srgbClr val="1A1A1A"/>
+                </a:solidFill>
+                <a:latin typeface="Calibri"/>
+                <a:rFonts ascii="Calibri" hAnsi="Calibri" cs="Calibri"/>
+              </a:rPr>
+              <a:t>Travel+ Natural: пакет документов как у Hotel Line и Fleur</a:t>
+            </a:r>
+          </a:p>
+          <a:p>
+            <a:pPr>
+              <a:lnSpc>
+                <a:spcPct val="115000"/>
+              </a:lnSpc>
+              <a:spcBef>
+                <a:spcPts val="0"/>
+              </a:spcBef>
               <a:spcAft>
                 <a:spcPts val="800"/>
               </a:spcAft>
             </a:pPr>
             <a:r>
-              <a:rPr sz="1600" b="0">
-                <a:solidFill>
-                  <a:srgbClr val="5A5A5A"/>
-                </a:solidFill>
-                <a:latin typeface="Calibri"/>
+              <a:rPr sz="1400" b="0">
+                <a:solidFill>
+                  <a:srgbClr val="5C5C5C"/>
+                </a:solidFill>
+                <a:latin typeface="Calibri"/>
+                <a:rFonts ascii="Calibri" hAnsi="Calibri" cs="Calibri"/>
               </a:rPr>
               <a:t>(декларация / СГР, INCI, протоколы по запросу),</a:t>
             </a:r>
           </a:p>
           <a:p>
             <a:pPr>
+              <a:lnSpc>
+                <a:spcPct val="115000"/>
+              </a:lnSpc>
+              <a:spcBef>
+                <a:spcPts val="0"/>
+              </a:spcBef>
               <a:spcAft>
                 <a:spcPts val="1000"/>
               </a:spcAft>
             </a:pPr>
             <a:r>
-              <a:rPr sz="1800" b="0">
-                <a:solidFill>
-                  <a:srgbClr val="1C1C1C"/>
-                </a:solidFill>
-                <a:latin typeface="Calibri"/>
-              </a:rPr>
-              <a:t>прозрачный состав с „простыми словами“, один договор на номер.</a:t>
-            </a:r>
-          </a:p>
-          <a:p>
-            <a:pPr>
-              <a:spcAft>
-                <a:spcPts val="0"/>
-              </a:spcAft>
-            </a:pPr>
-            <a:r>
-              <a:rPr sz="1800" b="1">
-                <a:solidFill>
-                  <a:srgbClr val="1C1C1C"/>
-                </a:solidFill>
-                <a:latin typeface="Calibri"/>
+              <a:rPr sz="1700" b="0">
+                <a:solidFill>
+                  <a:srgbClr val="1A1A1A"/>
+                </a:solidFill>
+                <a:latin typeface="Calibri"/>
+                <a:rFonts ascii="Calibri" hAnsi="Calibri" cs="Calibri"/>
+              </a:rPr>
+              <a:t>прозрачный состав с блоком «простыми словами», один договор на номер.</a:t>
+            </a:r>
+          </a:p>
+          <a:p>
+            <a:pPr>
+              <a:lnSpc>
+                <a:spcPct val="115000"/>
+              </a:lnSpc>
+              <a:spcBef>
+                <a:spcPts val="0"/>
+              </a:spcBef>
+              <a:spcAft>
+                <a:spcPts val="800"/>
+              </a:spcAft>
+            </a:pPr>
+            <a:r>
+              <a:rPr sz="1700" b="1">
+                <a:solidFill>
+                  <a:srgbClr val="1A1A1A"/>
+                </a:solidFill>
+                <a:latin typeface="Calibri"/>
+                <a:rFonts ascii="Calibri" hAnsi="Calibri" cs="Calibri"/>
               </a:rPr>
               <a:t>Три шага: eco / wellness → образец → пилот.»</a:t>
             </a:r>
@@ -8451,14 +10322,14 @@
       </p:sp>
       <p:sp>
         <p:nvSpPr>
-          <p:cNvPr id="10" name="TextBox 9"/>
+          <p:cNvPr id="12" name="TextBox 11"/>
           <p:cNvSpPr txBox="1"/>
           <p:nvPr/>
         </p:nvSpPr>
         <p:spPr>
           <a:xfrm>
-            <a:off x="502920" y="5349240"/>
-            <a:ext cx="11155680" cy="640080"/>
+            <a:off x="457200" y="5394960"/>
+            <a:ext cx="11277295" cy="548640"/>
           </a:xfrm>
           <a:prstGeom prst="rect">
             <a:avLst/>
@@ -8472,6 +10343,12 @@
           <a:lstStyle/>
           <a:p>
             <a:pPr>
+              <a:lnSpc>
+                <a:spcPct val="115000"/>
+              </a:lnSpc>
+              <a:spcBef>
+                <a:spcPts val="0"/>
+              </a:spcBef>
               <a:spcAft>
                 <a:spcPts val="600"/>
               </a:spcAft>
@@ -8479,11 +10356,12 @@
             <a:r>
               <a:rPr sz="1400" b="0">
                 <a:solidFill>
-                  <a:srgbClr val="5A5A5A"/>
-                </a:solidFill>
-                <a:latin typeface="Calibri"/>
-              </a:rPr>
-              <a:t>Отрицания (COSMOS, origin, цена HL) - только в возражениях.</a:t>
+                  <a:srgbClr val="5C5C5C"/>
+                </a:solidFill>
+                <a:latin typeface="Calibri"/>
+                <a:rFonts ascii="Calibri" hAnsi="Calibri" cs="Calibri"/>
+              </a:rPr>
+              <a:t>Отрицания (COSMOS, origin, цена Hotel Line) — только в возражениях.</a:t>
             </a:r>
           </a:p>
         </p:txBody>
@@ -8521,7 +10399,7 @@
             <a:avLst/>
           </a:prstGeom>
           <a:solidFill>
-            <a:srgbClr val="F7F5F2"/>
+            <a:srgbClr val="F5F3EF"/>
           </a:solidFill>
           <a:ln>
             <a:noFill/>
@@ -8558,13 +10436,13 @@
         <p:spPr>
           <a:xfrm>
             <a:off x="0" y="0"/>
-            <a:ext cx="109728" cy="6858000"/>
+            <a:ext cx="91440" cy="6858000"/>
           </a:xfrm>
           <a:prstGeom prst="rect">
             <a:avLst/>
           </a:prstGeom>
           <a:solidFill>
-            <a:srgbClr val="2F5D50"/>
+            <a:srgbClr val="2A554A"/>
           </a:solidFill>
           <a:ln>
             <a:noFill/>
@@ -8600,8 +10478,8 @@
         </p:nvSpPr>
         <p:spPr>
           <a:xfrm>
-            <a:off x="502920" y="256032"/>
-            <a:ext cx="11155680" cy="502920"/>
+            <a:off x="457200" y="256032"/>
+            <a:ext cx="11247120" cy="502920"/>
           </a:xfrm>
           <a:prstGeom prst="rect">
             <a:avLst/>
@@ -8615,11 +10493,12 @@
           <a:lstStyle/>
           <a:p>
             <a:r>
-              <a:rPr sz="2800" b="1">
-                <a:solidFill>
-                  <a:srgbClr val="2F5D50"/>
-                </a:solidFill>
-                <a:latin typeface="Calibri"/>
+              <a:rPr sz="2600" b="1">
+                <a:solidFill>
+                  <a:srgbClr val="2A554A"/>
+                </a:solidFill>
+                <a:latin typeface="Calibri"/>
+                <a:rFonts ascii="Calibri" hAnsi="Calibri" cs="Calibri"/>
               </a:rPr>
               <a:t>Поле: возражения и риски</a:t>
             </a:r>
@@ -8634,14 +10513,14 @@
         </p:nvSpPr>
         <p:spPr>
           <a:xfrm>
-            <a:off x="502920" y="777240"/>
-            <a:ext cx="11155680" cy="22860"/>
+            <a:off x="457200" y="804672"/>
+            <a:ext cx="2011680" cy="36576"/>
           </a:xfrm>
           <a:prstGeom prst="rect">
             <a:avLst/>
           </a:prstGeom>
           <a:solidFill>
-            <a:srgbClr val="D8D2C8"/>
+            <a:srgbClr val="2A554A"/>
           </a:solidFill>
           <a:ln>
             <a:noFill/>
@@ -8671,13 +10550,56 @@
       </p:sp>
       <p:sp>
         <p:nvSpPr>
-          <p:cNvPr id="6" name="TextBox 5"/>
+          <p:cNvPr id="6" name="Rectangle 5"/>
+          <p:cNvSpPr/>
+          <p:nvPr/>
+        </p:nvSpPr>
+        <p:spPr>
+          <a:xfrm>
+            <a:off x="457200" y="6263640"/>
+            <a:ext cx="11277295" cy="13716"/>
+          </a:xfrm>
+          <a:prstGeom prst="rect">
+            <a:avLst/>
+          </a:prstGeom>
+          <a:solidFill>
+            <a:srgbClr val="D4CEC4"/>
+          </a:solidFill>
+          <a:ln>
+            <a:noFill/>
+          </a:ln>
+        </p:spPr>
+        <p:style>
+          <a:lnRef idx="1">
+            <a:schemeClr val="accent1"/>
+          </a:lnRef>
+          <a:fillRef idx="3">
+            <a:schemeClr val="accent1"/>
+          </a:fillRef>
+          <a:effectRef idx="2">
+            <a:schemeClr val="accent1"/>
+          </a:effectRef>
+          <a:fontRef idx="minor">
+            <a:schemeClr val="lt1"/>
+          </a:fontRef>
+        </p:style>
+        <p:txBody>
+          <a:bodyPr rtlCol="0" anchor="ctr"/>
+          <a:lstStyle/>
+          <a:p>
+            <a:pPr algn="ctr"/>
+          </a:p>
+        </p:txBody>
+      </p:sp>
+      <p:sp>
+        <p:nvSpPr>
+          <p:cNvPr id="7" name="TextBox 6"/>
           <p:cNvSpPr txBox="1"/>
           <p:nvPr/>
         </p:nvSpPr>
         <p:spPr>
           <a:xfrm>
-            <a:off x="502920" y="6446520"/>
+            <a:off x="457200" y="6355080"/>
             <a:ext cx="9601200" cy="320040"/>
           </a:xfrm>
           <a:prstGeom prst="rect">
@@ -8694,25 +10616,26 @@
             <a:r>
               <a:rPr sz="1100" b="0">
                 <a:solidFill>
-                  <a:srgbClr val="5A5A5A"/>
-                </a:solidFill>
-                <a:latin typeface="Calibri"/>
-              </a:rPr>
-              <a:t>Travel+ Natural · пульт v1.14 · собес · не оферта</a:t>
-            </a:r>
-          </a:p>
-        </p:txBody>
-      </p:sp>
-      <p:sp>
-        <p:nvSpPr>
-          <p:cNvPr id="7" name="TextBox 6"/>
+                  <a:srgbClr val="5C5C5C"/>
+                </a:solidFill>
+                <a:latin typeface="Calibri"/>
+                <a:rFonts ascii="Calibri" hAnsi="Calibri" cs="Calibri"/>
+              </a:rPr>
+              <a:t>Travel+ Natural  ·  пульт v1.14  ·  собеседование  ·  не оферта</a:t>
+            </a:r>
+          </a:p>
+        </p:txBody>
+      </p:sp>
+      <p:sp>
+        <p:nvSpPr>
+          <p:cNvPr id="8" name="TextBox 7"/>
           <p:cNvSpPr txBox="1"/>
           <p:nvPr/>
         </p:nvSpPr>
         <p:spPr>
           <a:xfrm>
-            <a:off x="10607040" y="6446520"/>
-            <a:ext cx="1188720" cy="320040"/>
+            <a:off x="10515600" y="6355080"/>
+            <a:ext cx="1280160" cy="320040"/>
           </a:xfrm>
           <a:prstGeom prst="rect">
             <a:avLst/>
@@ -8729,29 +10652,30 @@
             <a:r>
               <a:rPr sz="1100" b="0">
                 <a:solidFill>
-                  <a:srgbClr val="5A5A5A"/>
-                </a:solidFill>
-                <a:latin typeface="Calibri"/>
-              </a:rPr>
-              <a:t>8/12</a:t>
-            </a:r>
-          </a:p>
-        </p:txBody>
-      </p:sp>
-      <p:sp>
-        <p:nvSpPr>
-          <p:cNvPr id="8" name="Rounded Rectangle 7"/>
+                  <a:srgbClr val="5C5C5C"/>
+                </a:solidFill>
+                <a:latin typeface="Calibri"/>
+                <a:rFonts ascii="Calibri" hAnsi="Calibri" cs="Calibri"/>
+              </a:rPr>
+              <a:t>8 / 12</a:t>
+            </a:r>
+          </a:p>
+        </p:txBody>
+      </p:sp>
+      <p:sp>
+        <p:nvSpPr>
+          <p:cNvPr id="9" name="Rounded Rectangle 8"/>
           <p:cNvSpPr/>
           <p:nvPr/>
         </p:nvSpPr>
         <p:spPr>
           <a:xfrm>
-            <a:off x="502920" y="1051560"/>
-            <a:ext cx="5349240" cy="5029200"/>
+            <a:off x="457200" y="960120"/>
+            <a:ext cx="5510631" cy="5074920"/>
           </a:xfrm>
           <a:prstGeom prst="roundRect">
             <a:avLst>
-              <a:gd name="adj" fmla="val 8000"/>
+              <a:gd name="adj" fmla="val 6000"/>
             </a:avLst>
           </a:prstGeom>
           <a:solidFill>
@@ -8759,7 +10683,7 @@
           </a:solidFill>
           <a:ln w="12700">
             <a:solidFill>
-              <a:srgbClr val="D8D2C8"/>
+              <a:srgbClr val="D4CEC4"/>
             </a:solidFill>
           </a:ln>
         </p:spPr>
@@ -8787,18 +10711,61 @@
       </p:sp>
       <p:sp>
         <p:nvSpPr>
-          <p:cNvPr id="9" name="Rounded Rectangle 8"/>
+          <p:cNvPr id="10" name="Rectangle 9"/>
           <p:cNvSpPr/>
           <p:nvPr/>
         </p:nvSpPr>
         <p:spPr>
           <a:xfrm>
-            <a:off x="6126480" y="1051560"/>
-            <a:ext cx="5440680" cy="5029200"/>
+            <a:off x="457200" y="960120"/>
+            <a:ext cx="5510631" cy="73152"/>
+          </a:xfrm>
+          <a:prstGeom prst="rect">
+            <a:avLst/>
+          </a:prstGeom>
+          <a:solidFill>
+            <a:srgbClr val="2A554A"/>
+          </a:solidFill>
+          <a:ln>
+            <a:noFill/>
+          </a:ln>
+        </p:spPr>
+        <p:style>
+          <a:lnRef idx="1">
+            <a:schemeClr val="accent1"/>
+          </a:lnRef>
+          <a:fillRef idx="3">
+            <a:schemeClr val="accent1"/>
+          </a:fillRef>
+          <a:effectRef idx="2">
+            <a:schemeClr val="accent1"/>
+          </a:effectRef>
+          <a:fontRef idx="minor">
+            <a:schemeClr val="lt1"/>
+          </a:fontRef>
+        </p:style>
+        <p:txBody>
+          <a:bodyPr rtlCol="0" anchor="ctr"/>
+          <a:lstStyle/>
+          <a:p>
+            <a:pPr algn="ctr"/>
+          </a:p>
+        </p:txBody>
+      </p:sp>
+      <p:sp>
+        <p:nvSpPr>
+          <p:cNvPr id="11" name="Rounded Rectangle 10"/>
+          <p:cNvSpPr/>
+          <p:nvPr/>
+        </p:nvSpPr>
+        <p:spPr>
+          <a:xfrm>
+            <a:off x="6223863" y="960120"/>
+            <a:ext cx="5510631" cy="5074920"/>
           </a:xfrm>
           <a:prstGeom prst="roundRect">
             <a:avLst>
-              <a:gd name="adj" fmla="val 8000"/>
+              <a:gd name="adj" fmla="val 6000"/>
             </a:avLst>
           </a:prstGeom>
           <a:solidFill>
@@ -8806,7 +10773,7 @@
           </a:solidFill>
           <a:ln w="12700">
             <a:solidFill>
-              <a:srgbClr val="D8D2C8"/>
+              <a:srgbClr val="D4CEC4"/>
             </a:solidFill>
           </a:ln>
         </p:spPr>
@@ -8834,14 +10801,57 @@
       </p:sp>
       <p:sp>
         <p:nvSpPr>
-          <p:cNvPr id="10" name="TextBox 9"/>
+          <p:cNvPr id="12" name="Rectangle 11"/>
+          <p:cNvSpPr/>
+          <p:nvPr/>
+        </p:nvSpPr>
+        <p:spPr>
+          <a:xfrm>
+            <a:off x="6223863" y="960120"/>
+            <a:ext cx="5510631" cy="73152"/>
+          </a:xfrm>
+          <a:prstGeom prst="rect">
+            <a:avLst/>
+          </a:prstGeom>
+          <a:solidFill>
+            <a:srgbClr val="2A554A"/>
+          </a:solidFill>
+          <a:ln>
+            <a:noFill/>
+          </a:ln>
+        </p:spPr>
+        <p:style>
+          <a:lnRef idx="1">
+            <a:schemeClr val="accent1"/>
+          </a:lnRef>
+          <a:fillRef idx="3">
+            <a:schemeClr val="accent1"/>
+          </a:fillRef>
+          <a:effectRef idx="2">
+            <a:schemeClr val="accent1"/>
+          </a:effectRef>
+          <a:fontRef idx="minor">
+            <a:schemeClr val="lt1"/>
+          </a:fontRef>
+        </p:style>
+        <p:txBody>
+          <a:bodyPr rtlCol="0" anchor="ctr"/>
+          <a:lstStyle/>
+          <a:p>
+            <a:pPr algn="ctr"/>
+          </a:p>
+        </p:txBody>
+      </p:sp>
+      <p:sp>
+        <p:nvSpPr>
+          <p:cNvPr id="13" name="TextBox 12"/>
           <p:cNvSpPr txBox="1"/>
           <p:nvPr/>
         </p:nvSpPr>
         <p:spPr>
           <a:xfrm>
-            <a:off x="777240" y="1234440"/>
-            <a:ext cx="4846320" cy="4663440"/>
+            <a:off x="749808" y="1216152"/>
+            <a:ext cx="4925415" cy="4663440"/>
           </a:xfrm>
           <a:prstGeom prst="rect">
             <a:avLst/>
@@ -8855,80 +10865,115 @@
           <a:lstStyle/>
           <a:p>
             <a:pPr>
-              <a:spcAft>
-                <a:spcPts val="1200"/>
-              </a:spcAft>
-            </a:pPr>
-            <a:r>
-              <a:rPr sz="2000" b="1">
-                <a:solidFill>
-                  <a:srgbClr val="2F5D50"/>
-                </a:solidFill>
-                <a:latin typeface="Calibri"/>
+              <a:lnSpc>
+                <a:spcPct val="115000"/>
+              </a:lnSpc>
+              <a:spcBef>
+                <a:spcPts val="0"/>
+              </a:spcBef>
+              <a:spcAft>
+                <a:spcPts val="1400"/>
+              </a:spcAft>
+            </a:pPr>
+            <a:r>
+              <a:rPr sz="1500" b="1">
+                <a:solidFill>
+                  <a:srgbClr val="2A554A"/>
+                </a:solidFill>
+                <a:latin typeface="Calibri"/>
+                <a:rFonts ascii="Calibri" hAnsi="Calibri" cs="Calibri"/>
               </a:rPr>
               <a:t>Возражения</a:t>
             </a:r>
           </a:p>
           <a:p>
             <a:pPr>
+              <a:lnSpc>
+                <a:spcPct val="115000"/>
+              </a:lnSpc>
+              <a:spcBef>
+                <a:spcPts val="0"/>
+              </a:spcBef>
               <a:spcAft>
                 <a:spcPts val="800"/>
               </a:spcAft>
             </a:pPr>
             <a:r>
-              <a:rPr sz="1400" b="0">
-                <a:solidFill>
-                  <a:srgbClr val="1C1C1C"/>
-                </a:solidFill>
-                <a:latin typeface="Calibri"/>
+              <a:rPr sz="1600" b="0">
+                <a:solidFill>
+                  <a:srgbClr val="1A1A1A"/>
+                </a:solidFill>
+                <a:latin typeface="Calibri"/>
+                <a:rFonts ascii="Calibri" hAnsi="Calibri" cs="Calibri"/>
               </a:rPr>
               <a:t>COSMOS обязателен → Natural в это КП не ставим</a:t>
             </a:r>
           </a:p>
           <a:p>
             <a:pPr>
+              <a:lnSpc>
+                <a:spcPct val="115000"/>
+              </a:lnSpc>
+              <a:spcBef>
+                <a:spcPts val="0"/>
+              </a:spcBef>
               <a:spcAft>
                 <a:spcPts val="800"/>
               </a:spcAft>
             </a:pPr>
             <a:r>
-              <a:rPr sz="1400" b="0">
-                <a:solidFill>
-                  <a:srgbClr val="1C1C1C"/>
-                </a:solidFill>
-                <a:latin typeface="Calibri"/>
-              </a:rPr>
-              <a:t>«Natural по цене HL» → нет</a:t>
-            </a:r>
-          </a:p>
-          <a:p>
-            <a:pPr>
+              <a:rPr sz="1600" b="0">
+                <a:solidFill>
+                  <a:srgbClr val="1A1A1A"/>
+                </a:solidFill>
+                <a:latin typeface="Calibri"/>
+                <a:rFonts ascii="Calibri" hAnsi="Calibri" cs="Calibri"/>
+              </a:rPr>
+              <a:t>«Natural по цене Hotel Line» → нет</a:t>
+            </a:r>
+          </a:p>
+          <a:p>
+            <a:pPr>
+              <a:lnSpc>
+                <a:spcPct val="115000"/>
+              </a:lnSpc>
+              <a:spcBef>
+                <a:spcPts val="0"/>
+              </a:spcBef>
               <a:spcAft>
                 <a:spcPts val="800"/>
               </a:spcAft>
             </a:pPr>
             <a:r>
-              <a:rPr sz="1400" b="0">
-                <a:solidFill>
-                  <a:srgbClr val="1C1C1C"/>
-                </a:solidFill>
-                <a:latin typeface="Calibri"/>
-              </a:rPr>
-              <a:t>СТМ / наш лого → отдельный проект</a:t>
-            </a:r>
-          </a:p>
-          <a:p>
-            <a:pPr>
-              <a:spcAft>
-                <a:spcPts val="0"/>
-              </a:spcAft>
-            </a:pPr>
-            <a:r>
-              <a:rPr sz="1400" b="0">
-                <a:solidFill>
-                  <a:srgbClr val="1C1C1C"/>
-                </a:solidFill>
-                <a:latin typeface="Calibri"/>
+              <a:rPr sz="1600" b="0">
+                <a:solidFill>
+                  <a:srgbClr val="1A1A1A"/>
+                </a:solidFill>
+                <a:latin typeface="Calibri"/>
+                <a:rFonts ascii="Calibri" hAnsi="Calibri" cs="Calibri"/>
+              </a:rPr>
+              <a:t>СТМ / лого отеля → отдельный проект</a:t>
+            </a:r>
+          </a:p>
+          <a:p>
+            <a:pPr>
+              <a:lnSpc>
+                <a:spcPct val="115000"/>
+              </a:lnSpc>
+              <a:spcBef>
+                <a:spcPts val="0"/>
+              </a:spcBef>
+              <a:spcAft>
+                <a:spcPts val="800"/>
+              </a:spcAft>
+            </a:pPr>
+            <a:r>
+              <a:rPr sz="1600" b="0">
+                <a:solidFill>
+                  <a:srgbClr val="1A1A1A"/>
+                </a:solidFill>
+                <a:latin typeface="Calibri"/>
+                <a:rFonts ascii="Calibri" hAnsi="Calibri" cs="Calibri"/>
               </a:rPr>
               <a:t>«Где произведено?» → только зафиксированный origin</a:t>
             </a:r>
@@ -8937,14 +10982,14 @@
       </p:sp>
       <p:sp>
         <p:nvSpPr>
-          <p:cNvPr id="11" name="TextBox 10"/>
+          <p:cNvPr id="14" name="TextBox 13"/>
           <p:cNvSpPr txBox="1"/>
           <p:nvPr/>
         </p:nvSpPr>
         <p:spPr>
           <a:xfrm>
-            <a:off x="6400800" y="1234440"/>
-            <a:ext cx="4937760" cy="4663440"/>
+            <a:off x="6516471" y="1216152"/>
+            <a:ext cx="4925415" cy="4663440"/>
           </a:xfrm>
           <a:prstGeom prst="rect">
             <a:avLst/>
@@ -8958,82 +11003,117 @@
           <a:lstStyle/>
           <a:p>
             <a:pPr>
+              <a:lnSpc>
+                <a:spcPct val="115000"/>
+              </a:lnSpc>
+              <a:spcBef>
+                <a:spcPts val="0"/>
+              </a:spcBef>
+              <a:spcAft>
+                <a:spcPts val="1400"/>
+              </a:spcAft>
+            </a:pPr>
+            <a:r>
+              <a:rPr sz="1500" b="1">
+                <a:solidFill>
+                  <a:srgbClr val="2A554A"/>
+                </a:solidFill>
+                <a:latin typeface="Calibri"/>
+                <a:rFonts ascii="Calibri" hAnsi="Calibri" cs="Calibri"/>
+              </a:rPr>
+              <a:t>Полевая дисциплина</a:t>
+            </a:r>
+          </a:p>
+          <a:p>
+            <a:pPr>
+              <a:lnSpc>
+                <a:spcPct val="115000"/>
+              </a:lnSpc>
+              <a:spcBef>
+                <a:spcPts val="0"/>
+              </a:spcBef>
+              <a:spcAft>
+                <a:spcPts val="800"/>
+              </a:spcAft>
+            </a:pPr>
+            <a:r>
+              <a:rPr sz="1600" b="0">
+                <a:solidFill>
+                  <a:srgbClr val="1A1A1A"/>
+                </a:solidFill>
+                <a:latin typeface="Calibri"/>
+                <a:rFonts ascii="Calibri" hAnsi="Calibri" cs="Calibri"/>
+              </a:rPr>
+              <a:t>Реестр рисков — один лист</a:t>
+            </a:r>
+          </a:p>
+          <a:p>
+            <a:pPr>
+              <a:lnSpc>
+                <a:spcPct val="115000"/>
+              </a:lnSpc>
+              <a:spcBef>
+                <a:spcPts val="0"/>
+              </a:spcBef>
               <a:spcAft>
                 <a:spcPts val="1200"/>
               </a:spcAft>
             </a:pPr>
             <a:r>
-              <a:rPr sz="2000" b="1">
-                <a:solidFill>
-                  <a:srgbClr val="2F5D50"/>
-                </a:solidFill>
-                <a:latin typeface="Calibri"/>
-              </a:rPr>
-              <a:t>Полевая дисциплина</a:t>
-            </a:r>
-          </a:p>
-          <a:p>
-            <a:pPr>
-              <a:spcAft>
-                <a:spcPts val="400"/>
-              </a:spcAft>
-            </a:pPr>
-            <a:r>
-              <a:rPr sz="1500" b="0">
-                <a:solidFill>
-                  <a:srgbClr val="1C1C1C"/>
-                </a:solidFill>
-                <a:latin typeface="Calibri"/>
-              </a:rPr>
-              <a:t>Реестр рисков - один лист</a:t>
-            </a:r>
-          </a:p>
-          <a:p>
-            <a:pPr>
-              <a:spcAft>
-                <a:spcPts val="1200"/>
-              </a:spcAft>
-            </a:pPr>
-            <a:r>
               <a:rPr sz="1400" b="0">
                 <a:solidFill>
-                  <a:srgbClr val="5A5A5A"/>
-                </a:solidFill>
-                <a:latin typeface="Calibri"/>
-              </a:rPr>
-              <a:t>(14 пунктов в пульте).</a:t>
-            </a:r>
-          </a:p>
-          <a:p>
-            <a:pPr>
+                  <a:srgbClr val="5C5C5C"/>
+                </a:solidFill>
+                <a:latin typeface="Calibri"/>
+                <a:rFonts ascii="Calibri" hAnsi="Calibri" cs="Calibri"/>
+              </a:rPr>
+              <a:t>(14 пунктов в пульте)</a:t>
+            </a:r>
+          </a:p>
+          <a:p>
+            <a:pPr>
+              <a:lnSpc>
+                <a:spcPct val="115000"/>
+              </a:lnSpc>
+              <a:spcBef>
+                <a:spcPts val="0"/>
+              </a:spcBef>
               <a:spcAft>
                 <a:spcPts val="800"/>
               </a:spcAft>
             </a:pPr>
             <a:r>
-              <a:rPr sz="1500" b="0">
-                <a:solidFill>
-                  <a:srgbClr val="1C1C1C"/>
-                </a:solidFill>
-                <a:latin typeface="Calibri"/>
+              <a:rPr sz="1600" b="0">
+                <a:solidFill>
+                  <a:srgbClr val="1A1A1A"/>
+                </a:solidFill>
+                <a:latin typeface="Calibri"/>
+                <a:rFonts ascii="Calibri" hAnsi="Calibri" cs="Calibri"/>
               </a:rPr>
               <a:t>Сегмент не размываем.</a:t>
             </a:r>
           </a:p>
           <a:p>
             <a:pPr>
-              <a:spcAft>
-                <a:spcPts val="0"/>
-              </a:spcAft>
-            </a:pPr>
-            <a:r>
-              <a:rPr sz="1500" b="1">
-                <a:solidFill>
-                  <a:srgbClr val="1C1C1C"/>
-                </a:solidFill>
-                <a:latin typeface="Calibri"/>
-              </a:rPr>
-              <a:t>Hotel Line не съедаем скидкой Natural.</a:t>
+              <a:lnSpc>
+                <a:spcPct val="115000"/>
+              </a:lnSpc>
+              <a:spcBef>
+                <a:spcPts val="0"/>
+              </a:spcBef>
+              <a:spcAft>
+                <a:spcPts val="800"/>
+              </a:spcAft>
+            </a:pPr>
+            <a:r>
+              <a:rPr sz="1600" b="1">
+                <a:solidFill>
+                  <a:srgbClr val="1A1A1A"/>
+                </a:solidFill>
+                <a:latin typeface="Calibri"/>
+                <a:rFonts ascii="Calibri" hAnsi="Calibri" cs="Calibri"/>
+              </a:rPr>
+              <a:t>Не продаём Natural в эконом Hotel Line.</a:t>
             </a:r>
           </a:p>
         </p:txBody>
@@ -9071,7 +11151,7 @@
             <a:avLst/>
           </a:prstGeom>
           <a:solidFill>
-            <a:srgbClr val="F7F5F2"/>
+            <a:srgbClr val="F5F3EF"/>
           </a:solidFill>
           <a:ln>
             <a:noFill/>
@@ -9108,13 +11188,13 @@
         <p:spPr>
           <a:xfrm>
             <a:off x="0" y="0"/>
-            <a:ext cx="109728" cy="6858000"/>
+            <a:ext cx="91440" cy="6858000"/>
           </a:xfrm>
           <a:prstGeom prst="rect">
             <a:avLst/>
           </a:prstGeom>
           <a:solidFill>
-            <a:srgbClr val="2F5D50"/>
+            <a:srgbClr val="2A554A"/>
           </a:solidFill>
           <a:ln>
             <a:noFill/>
@@ -9150,8 +11230,8 @@
         </p:nvSpPr>
         <p:spPr>
           <a:xfrm>
-            <a:off x="502920" y="256032"/>
-            <a:ext cx="11155680" cy="502920"/>
+            <a:off x="457200" y="256032"/>
+            <a:ext cx="11247120" cy="502920"/>
           </a:xfrm>
           <a:prstGeom prst="rect">
             <a:avLst/>
@@ -9165,11 +11245,12 @@
           <a:lstStyle/>
           <a:p>
             <a:r>
-              <a:rPr sz="2800" b="1">
-                <a:solidFill>
-                  <a:srgbClr val="2F5D50"/>
-                </a:solidFill>
-                <a:latin typeface="Calibri"/>
+              <a:rPr sz="2600" b="1">
+                <a:solidFill>
+                  <a:srgbClr val="2A554A"/>
+                </a:solidFill>
+                <a:latin typeface="Calibri"/>
+                <a:rFonts ascii="Calibri" hAnsi="Calibri" cs="Calibri"/>
               </a:rPr>
               <a:t>Пилот: успех, провал, выход</a:t>
             </a:r>
@@ -9184,14 +11265,14 @@
         </p:nvSpPr>
         <p:spPr>
           <a:xfrm>
-            <a:off x="502920" y="777240"/>
-            <a:ext cx="11155680" cy="22860"/>
+            <a:off x="457200" y="804672"/>
+            <a:ext cx="2011680" cy="36576"/>
           </a:xfrm>
           <a:prstGeom prst="rect">
             <a:avLst/>
           </a:prstGeom>
           <a:solidFill>
-            <a:srgbClr val="D8D2C8"/>
+            <a:srgbClr val="2A554A"/>
           </a:solidFill>
           <a:ln>
             <a:noFill/>
@@ -9221,13 +11302,56 @@
       </p:sp>
       <p:sp>
         <p:nvSpPr>
-          <p:cNvPr id="6" name="TextBox 5"/>
+          <p:cNvPr id="6" name="Rectangle 5"/>
+          <p:cNvSpPr/>
+          <p:nvPr/>
+        </p:nvSpPr>
+        <p:spPr>
+          <a:xfrm>
+            <a:off x="457200" y="6263640"/>
+            <a:ext cx="11277295" cy="13716"/>
+          </a:xfrm>
+          <a:prstGeom prst="rect">
+            <a:avLst/>
+          </a:prstGeom>
+          <a:solidFill>
+            <a:srgbClr val="D4CEC4"/>
+          </a:solidFill>
+          <a:ln>
+            <a:noFill/>
+          </a:ln>
+        </p:spPr>
+        <p:style>
+          <a:lnRef idx="1">
+            <a:schemeClr val="accent1"/>
+          </a:lnRef>
+          <a:fillRef idx="3">
+            <a:schemeClr val="accent1"/>
+          </a:fillRef>
+          <a:effectRef idx="2">
+            <a:schemeClr val="accent1"/>
+          </a:effectRef>
+          <a:fontRef idx="minor">
+            <a:schemeClr val="lt1"/>
+          </a:fontRef>
+        </p:style>
+        <p:txBody>
+          <a:bodyPr rtlCol="0" anchor="ctr"/>
+          <a:lstStyle/>
+          <a:p>
+            <a:pPr algn="ctr"/>
+          </a:p>
+        </p:txBody>
+      </p:sp>
+      <p:sp>
+        <p:nvSpPr>
+          <p:cNvPr id="7" name="TextBox 6"/>
           <p:cNvSpPr txBox="1"/>
           <p:nvPr/>
         </p:nvSpPr>
         <p:spPr>
           <a:xfrm>
-            <a:off x="502920" y="6446520"/>
+            <a:off x="457200" y="6355080"/>
             <a:ext cx="9601200" cy="320040"/>
           </a:xfrm>
           <a:prstGeom prst="rect">
@@ -9244,25 +11368,26 @@
             <a:r>
               <a:rPr sz="1100" b="0">
                 <a:solidFill>
-                  <a:srgbClr val="5A5A5A"/>
-                </a:solidFill>
-                <a:latin typeface="Calibri"/>
-              </a:rPr>
-              <a:t>Travel+ Natural · пульт v1.14 · собес · не оферта</a:t>
-            </a:r>
-          </a:p>
-        </p:txBody>
-      </p:sp>
-      <p:sp>
-        <p:nvSpPr>
-          <p:cNvPr id="7" name="TextBox 6"/>
+                  <a:srgbClr val="5C5C5C"/>
+                </a:solidFill>
+                <a:latin typeface="Calibri"/>
+                <a:rFonts ascii="Calibri" hAnsi="Calibri" cs="Calibri"/>
+              </a:rPr>
+              <a:t>Travel+ Natural  ·  пульт v1.14  ·  собеседование  ·  не оферта</a:t>
+            </a:r>
+          </a:p>
+        </p:txBody>
+      </p:sp>
+      <p:sp>
+        <p:nvSpPr>
+          <p:cNvPr id="8" name="TextBox 7"/>
           <p:cNvSpPr txBox="1"/>
           <p:nvPr/>
         </p:nvSpPr>
         <p:spPr>
           <a:xfrm>
-            <a:off x="10607040" y="6446520"/>
-            <a:ext cx="1188720" cy="320040"/>
+            <a:off x="10515600" y="6355080"/>
+            <a:ext cx="1280160" cy="320040"/>
           </a:xfrm>
           <a:prstGeom prst="rect">
             <a:avLst/>
@@ -9279,29 +11404,30 @@
             <a:r>
               <a:rPr sz="1100" b="0">
                 <a:solidFill>
-                  <a:srgbClr val="5A5A5A"/>
-                </a:solidFill>
-                <a:latin typeface="Calibri"/>
-              </a:rPr>
-              <a:t>9/12</a:t>
-            </a:r>
-          </a:p>
-        </p:txBody>
-      </p:sp>
-      <p:sp>
-        <p:nvSpPr>
-          <p:cNvPr id="8" name="Rounded Rectangle 7"/>
+                  <a:srgbClr val="5C5C5C"/>
+                </a:solidFill>
+                <a:latin typeface="Calibri"/>
+                <a:rFonts ascii="Calibri" hAnsi="Calibri" cs="Calibri"/>
+              </a:rPr>
+              <a:t>9 / 12</a:t>
+            </a:r>
+          </a:p>
+        </p:txBody>
+      </p:sp>
+      <p:sp>
+        <p:nvSpPr>
+          <p:cNvPr id="9" name="Rounded Rectangle 8"/>
           <p:cNvSpPr/>
           <p:nvPr/>
         </p:nvSpPr>
         <p:spPr>
           <a:xfrm>
-            <a:off x="502920" y="1051560"/>
-            <a:ext cx="5349240" cy="5029200"/>
+            <a:off x="457200" y="960120"/>
+            <a:ext cx="5510631" cy="5074920"/>
           </a:xfrm>
           <a:prstGeom prst="roundRect">
             <a:avLst>
-              <a:gd name="adj" fmla="val 8000"/>
+              <a:gd name="adj" fmla="val 6000"/>
             </a:avLst>
           </a:prstGeom>
           <a:solidFill>
@@ -9309,7 +11435,7 @@
           </a:solidFill>
           <a:ln w="12700">
             <a:solidFill>
-              <a:srgbClr val="D8D2C8"/>
+              <a:srgbClr val="D4CEC4"/>
             </a:solidFill>
           </a:ln>
         </p:spPr>
@@ -9337,18 +11463,61 @@
       </p:sp>
       <p:sp>
         <p:nvSpPr>
-          <p:cNvPr id="9" name="Rounded Rectangle 8"/>
+          <p:cNvPr id="10" name="Rectangle 9"/>
           <p:cNvSpPr/>
           <p:nvPr/>
         </p:nvSpPr>
         <p:spPr>
           <a:xfrm>
-            <a:off x="6126480" y="1051560"/>
-            <a:ext cx="5440680" cy="5029200"/>
+            <a:off x="457200" y="960120"/>
+            <a:ext cx="5510631" cy="73152"/>
+          </a:xfrm>
+          <a:prstGeom prst="rect">
+            <a:avLst/>
+          </a:prstGeom>
+          <a:solidFill>
+            <a:srgbClr val="2A554A"/>
+          </a:solidFill>
+          <a:ln>
+            <a:noFill/>
+          </a:ln>
+        </p:spPr>
+        <p:style>
+          <a:lnRef idx="1">
+            <a:schemeClr val="accent1"/>
+          </a:lnRef>
+          <a:fillRef idx="3">
+            <a:schemeClr val="accent1"/>
+          </a:fillRef>
+          <a:effectRef idx="2">
+            <a:schemeClr val="accent1"/>
+          </a:effectRef>
+          <a:fontRef idx="minor">
+            <a:schemeClr val="lt1"/>
+          </a:fontRef>
+        </p:style>
+        <p:txBody>
+          <a:bodyPr rtlCol="0" anchor="ctr"/>
+          <a:lstStyle/>
+          <a:p>
+            <a:pPr algn="ctr"/>
+          </a:p>
+        </p:txBody>
+      </p:sp>
+      <p:sp>
+        <p:nvSpPr>
+          <p:cNvPr id="11" name="Rounded Rectangle 10"/>
+          <p:cNvSpPr/>
+          <p:nvPr/>
+        </p:nvSpPr>
+        <p:spPr>
+          <a:xfrm>
+            <a:off x="6223863" y="960120"/>
+            <a:ext cx="5510631" cy="5074920"/>
           </a:xfrm>
           <a:prstGeom prst="roundRect">
             <a:avLst>
-              <a:gd name="adj" fmla="val 8000"/>
+              <a:gd name="adj" fmla="val 6000"/>
             </a:avLst>
           </a:prstGeom>
           <a:solidFill>
@@ -9356,7 +11525,7 @@
           </a:solidFill>
           <a:ln w="12700">
             <a:solidFill>
-              <a:srgbClr val="D8D2C8"/>
+              <a:srgbClr val="D4CEC4"/>
             </a:solidFill>
           </a:ln>
         </p:spPr>
@@ -9384,14 +11553,57 @@
       </p:sp>
       <p:sp>
         <p:nvSpPr>
-          <p:cNvPr id="10" name="TextBox 9"/>
+          <p:cNvPr id="12" name="Rectangle 11"/>
+          <p:cNvSpPr/>
+          <p:nvPr/>
+        </p:nvSpPr>
+        <p:spPr>
+          <a:xfrm>
+            <a:off x="6223863" y="960120"/>
+            <a:ext cx="5510631" cy="73152"/>
+          </a:xfrm>
+          <a:prstGeom prst="rect">
+            <a:avLst/>
+          </a:prstGeom>
+          <a:solidFill>
+            <a:srgbClr val="2A554A"/>
+          </a:solidFill>
+          <a:ln>
+            <a:noFill/>
+          </a:ln>
+        </p:spPr>
+        <p:style>
+          <a:lnRef idx="1">
+            <a:schemeClr val="accent1"/>
+          </a:lnRef>
+          <a:fillRef idx="3">
+            <a:schemeClr val="accent1"/>
+          </a:fillRef>
+          <a:effectRef idx="2">
+            <a:schemeClr val="accent1"/>
+          </a:effectRef>
+          <a:fontRef idx="minor">
+            <a:schemeClr val="lt1"/>
+          </a:fontRef>
+        </p:style>
+        <p:txBody>
+          <a:bodyPr rtlCol="0" anchor="ctr"/>
+          <a:lstStyle/>
+          <a:p>
+            <a:pPr algn="ctr"/>
+          </a:p>
+        </p:txBody>
+      </p:sp>
+      <p:sp>
+        <p:nvSpPr>
+          <p:cNvPr id="13" name="TextBox 12"/>
           <p:cNvSpPr txBox="1"/>
           <p:nvPr/>
         </p:nvSpPr>
         <p:spPr>
           <a:xfrm>
-            <a:off x="777240" y="1234440"/>
-            <a:ext cx="4846320" cy="4663440"/>
+            <a:off x="749808" y="1216152"/>
+            <a:ext cx="4925415" cy="4663440"/>
           </a:xfrm>
           <a:prstGeom prst="rect">
             <a:avLst/>
@@ -9405,22 +11617,35 @@
           <a:lstStyle/>
           <a:p>
             <a:pPr>
-              <a:spcAft>
-                <a:spcPts val="1200"/>
-              </a:spcAft>
-            </a:pPr>
-            <a:r>
-              <a:rPr sz="1800" b="1">
-                <a:solidFill>
-                  <a:srgbClr val="2F5D50"/>
-                </a:solidFill>
-                <a:latin typeface="Calibri"/>
+              <a:lnSpc>
+                <a:spcPct val="115000"/>
+              </a:lnSpc>
+              <a:spcBef>
+                <a:spcPts val="0"/>
+              </a:spcBef>
+              <a:spcAft>
+                <a:spcPts val="1400"/>
+              </a:spcAft>
+            </a:pPr>
+            <a:r>
+              <a:rPr sz="1500" b="1">
+                <a:solidFill>
+                  <a:srgbClr val="2A554A"/>
+                </a:solidFill>
+                <a:latin typeface="Calibri"/>
+                <a:rFonts ascii="Calibri" hAnsi="Calibri" cs="Calibri"/>
               </a:rPr>
               <a:t>Успех (учебный порог)</a:t>
             </a:r>
           </a:p>
           <a:p>
             <a:pPr>
+              <a:lnSpc>
+                <a:spcPct val="115000"/>
+              </a:lnSpc>
+              <a:spcBef>
+                <a:spcPts val="0"/>
+              </a:spcBef>
               <a:spcAft>
                 <a:spcPts val="800"/>
               </a:spcAft>
@@ -9428,73 +11653,125 @@
             <a:r>
               <a:rPr sz="1600" b="0">
                 <a:solidFill>
-                  <a:srgbClr val="1C1C1C"/>
-                </a:solidFill>
-                <a:latin typeface="Calibri"/>
-              </a:rPr>
-              <a:t>3 клиента · повтор ≥2/3</a:t>
-            </a:r>
-          </a:p>
-          <a:p>
-            <a:pPr>
+                  <a:srgbClr val="1A1A1A"/>
+                </a:solidFill>
+                <a:latin typeface="Calibri"/>
+                <a:rFonts ascii="Calibri" hAnsi="Calibri" cs="Calibri"/>
+              </a:rPr>
+              <a:t>• 3 пилотных клиента</a:t>
+            </a:r>
+          </a:p>
+          <a:p>
+            <a:pPr>
+              <a:lnSpc>
+                <a:spcPct val="115000"/>
+              </a:lnSpc>
+              <a:spcBef>
+                <a:spcPts val="0"/>
+              </a:spcBef>
               <a:spcAft>
                 <a:spcPts val="800"/>
               </a:spcAft>
             </a:pPr>
             <a:r>
-              <a:rPr sz="1500" b="0">
-                <a:solidFill>
-                  <a:srgbClr val="1C1C1C"/>
-                </a:solidFill>
-                <a:latin typeface="Calibri"/>
-              </a:rPr>
-              <a:t>мягкость и ощущение натуральности ≥70%</a:t>
-            </a:r>
-          </a:p>
-          <a:p>
-            <a:pPr>
-              <a:spcAft>
-                <a:spcPts val="1600"/>
-              </a:spcAft>
-            </a:pPr>
-            <a:r>
               <a:rPr sz="1600" b="0">
                 <a:solidFill>
-                  <a:srgbClr val="1C1C1C"/>
-                </a:solidFill>
-                <a:latin typeface="Calibri"/>
-              </a:rPr>
-              <a:t>Hotel Line цел</a:t>
-            </a:r>
-          </a:p>
-          <a:p>
-            <a:pPr>
-              <a:spcAft>
-                <a:spcPts val="200"/>
-              </a:spcAft>
-            </a:pPr>
-            <a:r>
-              <a:rPr sz="1300" b="0">
-                <a:solidFill>
-                  <a:srgbClr val="5A5A5A"/>
-                </a:solidFill>
-                <a:latin typeface="Calibri"/>
-              </a:rPr>
-              <a:t>Цифры сценария - учебный пример,</a:t>
-            </a:r>
-          </a:p>
-          <a:p>
-            <a:pPr>
-              <a:spcAft>
-                <a:spcPts val="0"/>
-              </a:spcAft>
-            </a:pPr>
-            <a:r>
-              <a:rPr sz="1300" b="0">
-                <a:solidFill>
-                  <a:srgbClr val="5A5A5A"/>
-                </a:solidFill>
-                <a:latin typeface="Calibri"/>
+                  <a:srgbClr val="1A1A1A"/>
+                </a:solidFill>
+                <a:latin typeface="Calibri"/>
+                <a:rFonts ascii="Calibri" hAnsi="Calibri" cs="Calibri"/>
+              </a:rPr>
+              <a:t>• Повторный заказ у ≥ 2 из 3</a:t>
+            </a:r>
+          </a:p>
+          <a:p>
+            <a:pPr>
+              <a:lnSpc>
+                <a:spcPct val="115000"/>
+              </a:lnSpc>
+              <a:spcBef>
+                <a:spcPts val="0"/>
+              </a:spcBef>
+              <a:spcAft>
+                <a:spcPts val="1000"/>
+              </a:spcAft>
+            </a:pPr>
+            <a:r>
+              <a:rPr sz="1600" b="0">
+                <a:solidFill>
+                  <a:srgbClr val="1A1A1A"/>
+                </a:solidFill>
+                <a:latin typeface="Calibri"/>
+                <a:rFonts ascii="Calibri" hAnsi="Calibri" cs="Calibri"/>
+              </a:rPr>
+              <a:t>• Мягкость и ощущение натуральности ≥ 70%</a:t>
+            </a:r>
+          </a:p>
+          <a:p>
+            <a:pPr>
+              <a:lnSpc>
+                <a:spcPct val="115000"/>
+              </a:lnSpc>
+              <a:spcBef>
+                <a:spcPts val="0"/>
+              </a:spcBef>
+              <a:spcAft>
+                <a:spcPts val="1400"/>
+              </a:spcAft>
+            </a:pPr>
+            <a:r>
+              <a:rPr sz="1600" b="1">
+                <a:solidFill>
+                  <a:srgbClr val="1A1A1A"/>
+                </a:solidFill>
+                <a:latin typeface="Calibri"/>
+                <a:rFonts ascii="Calibri" hAnsi="Calibri" cs="Calibri"/>
+              </a:rPr>
+              <a:t>• Natural не ушёл в эконом Hotel Line</a:t>
+            </a:r>
+          </a:p>
+          <a:p>
+            <a:pPr>
+              <a:lnSpc>
+                <a:spcPct val="115000"/>
+              </a:lnSpc>
+              <a:spcBef>
+                <a:spcPts val="0"/>
+              </a:spcBef>
+              <a:spcAft>
+                <a:spcPts val="600"/>
+              </a:spcAft>
+            </a:pPr>
+            <a:r>
+              <a:rPr sz="1400" b="0">
+                <a:solidFill>
+                  <a:srgbClr val="5C5C5C"/>
+                </a:solidFill>
+                <a:latin typeface="Calibri"/>
+                <a:rFonts ascii="Calibri" hAnsi="Calibri" cs="Calibri"/>
+              </a:rPr>
+              <a:t>Цифры сценария — учебный пример,</a:t>
+            </a:r>
+          </a:p>
+          <a:p>
+            <a:pPr>
+              <a:lnSpc>
+                <a:spcPct val="115000"/>
+              </a:lnSpc>
+              <a:spcBef>
+                <a:spcPts val="0"/>
+              </a:spcBef>
+              <a:spcAft>
+                <a:spcPts val="600"/>
+              </a:spcAft>
+            </a:pPr>
+            <a:r>
+              <a:rPr sz="1400" b="0">
+                <a:solidFill>
+                  <a:srgbClr val="5C5C5C"/>
+                </a:solidFill>
+                <a:latin typeface="Calibri"/>
+                <a:rFonts ascii="Calibri" hAnsi="Calibri" cs="Calibri"/>
               </a:rPr>
               <a:t>не отчёт завода.</a:t>
             </a:r>
@@ -9503,14 +11780,14 @@
       </p:sp>
       <p:sp>
         <p:nvSpPr>
-          <p:cNvPr id="11" name="TextBox 10"/>
+          <p:cNvPr id="14" name="TextBox 13"/>
           <p:cNvSpPr txBox="1"/>
           <p:nvPr/>
         </p:nvSpPr>
         <p:spPr>
           <a:xfrm>
-            <a:off x="6400800" y="1234440"/>
-            <a:ext cx="4937760" cy="4663440"/>
+            <a:off x="6516471" y="1216152"/>
+            <a:ext cx="4925415" cy="4663440"/>
           </a:xfrm>
           <a:prstGeom prst="rect">
             <a:avLst/>
@@ -9524,98 +11801,140 @@
           <a:lstStyle/>
           <a:p>
             <a:pPr>
+              <a:lnSpc>
+                <a:spcPct val="115000"/>
+              </a:lnSpc>
+              <a:spcBef>
+                <a:spcPts val="0"/>
+              </a:spcBef>
+              <a:spcAft>
+                <a:spcPts val="1400"/>
+              </a:spcAft>
+            </a:pPr>
+            <a:r>
+              <a:rPr sz="1500" b="1">
+                <a:solidFill>
+                  <a:srgbClr val="2A554A"/>
+                </a:solidFill>
+                <a:latin typeface="Calibri"/>
+                <a:rFonts ascii="Calibri" hAnsi="Calibri" cs="Calibri"/>
+              </a:rPr>
+              <a:t>Провал и выход</a:t>
+            </a:r>
+          </a:p>
+          <a:p>
+            <a:pPr>
+              <a:lnSpc>
+                <a:spcPct val="115000"/>
+              </a:lnSpc>
+              <a:spcBef>
+                <a:spcPts val="0"/>
+              </a:spcBef>
+              <a:spcAft>
+                <a:spcPts val="800"/>
+              </a:spcAft>
+            </a:pPr>
+            <a:r>
+              <a:rPr sz="1600" b="0">
+                <a:solidFill>
+                  <a:srgbClr val="1A1A1A"/>
+                </a:solidFill>
+                <a:latin typeface="Calibri"/>
+                <a:rFonts ascii="Calibri" hAnsi="Calibri" cs="Calibri"/>
+              </a:rPr>
+              <a:t>Повтор &lt; 2 из 3 или метрики &lt; 60%</a:t>
+            </a:r>
+          </a:p>
+          <a:p>
+            <a:pPr>
+              <a:lnSpc>
+                <a:spcPct val="115000"/>
+              </a:lnSpc>
+              <a:spcBef>
+                <a:spcPts val="0"/>
+              </a:spcBef>
               <a:spcAft>
                 <a:spcPts val="1200"/>
               </a:spcAft>
             </a:pPr>
             <a:r>
-              <a:rPr sz="1800" b="1">
-                <a:solidFill>
-                  <a:srgbClr val="2F5D50"/>
-                </a:solidFill>
-                <a:latin typeface="Calibri"/>
-              </a:rPr>
-              <a:t>Провал и выход</a:t>
-            </a:r>
-          </a:p>
-          <a:p>
-            <a:pPr>
-              <a:spcAft>
-                <a:spcPts val="400"/>
-              </a:spcAft>
-            </a:pPr>
-            <a:r>
-              <a:rPr sz="1500" b="0">
-                <a:solidFill>
-                  <a:srgbClr val="1C1C1C"/>
-                </a:solidFill>
-                <a:latin typeface="Calibri"/>
-              </a:rPr>
-              <a:t>Повтор &lt;2/3 или метрики &lt;60%</a:t>
-            </a:r>
-          </a:p>
-          <a:p>
-            <a:pPr>
-              <a:spcAft>
-                <a:spcPts val="1200"/>
-              </a:spcAft>
-            </a:pPr>
-            <a:r>
-              <a:rPr sz="1500" b="1">
-                <a:solidFill>
-                  <a:srgbClr val="1C1C1C"/>
-                </a:solidFill>
-                <a:latin typeface="Calibri"/>
-              </a:rPr>
-              <a:t>→ стоп масштаб</a:t>
-            </a:r>
-          </a:p>
-          <a:p>
-            <a:pPr>
+              <a:rPr sz="1600" b="1">
+                <a:solidFill>
+                  <a:srgbClr val="1A1A1A"/>
+                </a:solidFill>
+                <a:latin typeface="Calibri"/>
+                <a:rFonts ascii="Calibri" hAnsi="Calibri" cs="Calibri"/>
+              </a:rPr>
+              <a:t>→ Останавливаем масштаб</a:t>
+            </a:r>
+          </a:p>
+          <a:p>
+            <a:pPr>
+              <a:lnSpc>
+                <a:spcPct val="115000"/>
+              </a:lnSpc>
+              <a:spcBef>
+                <a:spcPts val="0"/>
+              </a:spcBef>
               <a:spcAft>
                 <a:spcPts val="800"/>
               </a:spcAft>
             </a:pPr>
             <a:r>
-              <a:rPr sz="1500" b="0">
-                <a:solidFill>
-                  <a:srgbClr val="1C1C1C"/>
-                </a:solidFill>
-                <a:latin typeface="Calibri"/>
-              </a:rPr>
-              <a:t>Диагноз за 2 недели</a:t>
-            </a:r>
-          </a:p>
-          <a:p>
-            <a:pPr>
-              <a:spcAft>
-                <a:spcPts val="400"/>
-              </a:spcAft>
-            </a:pPr>
-            <a:r>
-              <a:rPr sz="1500" b="0">
-                <a:solidFill>
-                  <a:srgbClr val="1C1C1C"/>
-                </a:solidFill>
-                <a:latin typeface="Calibri"/>
+              <a:rPr sz="1600" b="0">
+                <a:solidFill>
+                  <a:srgbClr val="1A1A1A"/>
+                </a:solidFill>
+                <a:latin typeface="Calibri"/>
+                <a:rFonts ascii="Calibri" hAnsi="Calibri" cs="Calibri"/>
+              </a:rPr>
+              <a:t>Диагноз бренд-менеджера за 2 недели</a:t>
+            </a:r>
+          </a:p>
+          <a:p>
+            <a:pPr>
+              <a:lnSpc>
+                <a:spcPct val="115000"/>
+              </a:lnSpc>
+              <a:spcBef>
+                <a:spcPts val="0"/>
+              </a:spcBef>
+              <a:spcAft>
+                <a:spcPts val="800"/>
+              </a:spcAft>
+            </a:pPr>
+            <a:r>
+              <a:rPr sz="1600" b="0">
+                <a:solidFill>
+                  <a:srgbClr val="1A1A1A"/>
+                </a:solidFill>
+                <a:latin typeface="Calibri"/>
+                <a:rFonts ascii="Calibri" hAnsi="Calibri" cs="Calibri"/>
               </a:rPr>
               <a:t>Второй круг снова провален</a:t>
             </a:r>
           </a:p>
           <a:p>
             <a:pPr>
-              <a:spcAft>
-                <a:spcPts val="0"/>
+              <a:lnSpc>
+                <a:spcPct val="115000"/>
+              </a:lnSpc>
+              <a:spcBef>
+                <a:spcPts val="0"/>
+              </a:spcBef>
+              <a:spcAft>
+                <a:spcPts val="800"/>
               </a:spcAft>
             </a:pPr>
             <a:r>
               <a:rPr sz="1600" b="1">
                 <a:solidFill>
-                  <a:srgbClr val="1C1C1C"/>
-                </a:solidFill>
-                <a:latin typeface="Calibri"/>
-              </a:rPr>
-              <a:t>→ линейку закрываем</a:t>
+                  <a:srgbClr val="1A1A1A"/>
+                </a:solidFill>
+                <a:latin typeface="Calibri"/>
+                <a:rFonts ascii="Calibri" hAnsi="Calibri" cs="Calibri"/>
+              </a:rPr>
+              <a:t>→ Закрываем линейку</a:t>
             </a:r>
           </a:p>
         </p:txBody>

--- a/АК/presentation-travelplus-interview.pptx
+++ b/АК/presentation-travelplus-interview.pptx
@@ -3245,14 +3245,12 @@
           <a:noFill/>
         </p:spPr>
         <p:txBody>
-          <a:bodyPr wrap="square">
-            <a:spAutoFit/>
-          </a:bodyPr>
-          <a:lstStyle/>
-          <a:p>
-            <a:pPr>
-              <a:lnSpc>
-                <a:spcPct val="115000"/>
+          <a:bodyPr wrap="square" anchor="t" lIns="50800" rIns="50800" tIns="25400" bIns="25400"/>
+          <a:lstStyle/>
+          <a:p>
+            <a:pPr algn="l">
+              <a:lnSpc>
+                <a:spcPct val="118000"/>
               </a:lnSpc>
               <a:spcBef>
                 <a:spcPts val="0"/>
@@ -3266,16 +3264,16 @@
                 <a:solidFill>
                   <a:srgbClr val="FFFFFF"/>
                 </a:solidFill>
-                <a:latin typeface="Calibri"/>
-                <a:rFonts ascii="Calibri" hAnsi="Calibri" cs="Calibri"/>
+                <a:latin typeface="Manrope"/>
+                <a:rFonts ascii="Manrope" hAnsi="Manrope" cs="Manrope" eastAsia="Manrope"/>
               </a:rPr>
               <a:t>Павел Биджиев</a:t>
             </a:r>
           </a:p>
           <a:p>
-            <a:pPr>
-              <a:lnSpc>
-                <a:spcPct val="115000"/>
+            <a:pPr algn="l">
+              <a:lnSpc>
+                <a:spcPct val="118000"/>
               </a:lnSpc>
               <a:spcBef>
                 <a:spcPts val="0"/>
@@ -3289,16 +3287,16 @@
                 <a:solidFill>
                   <a:srgbClr val="FFFFFF"/>
                 </a:solidFill>
-                <a:latin typeface="Calibri"/>
-                <a:rFonts ascii="Calibri" hAnsi="Calibri" cs="Calibri"/>
+                <a:latin typeface="Golos Text"/>
+                <a:rFonts ascii="Golos Text" hAnsi="Golos Text" cs="Golos Text" eastAsia="Golos Text"/>
               </a:rPr>
               <a:t>Продакт / бренд-логика</a:t>
             </a:r>
           </a:p>
           <a:p>
-            <a:pPr>
-              <a:lnSpc>
-                <a:spcPct val="115000"/>
+            <a:pPr algn="l">
+              <a:lnSpc>
+                <a:spcPct val="118000"/>
               </a:lnSpc>
               <a:spcBef>
                 <a:spcPts val="0"/>
@@ -3312,8 +3310,8 @@
                 <a:solidFill>
                   <a:srgbClr val="C8DDD6"/>
                 </a:solidFill>
-                <a:latin typeface="Calibri"/>
-                <a:rFonts ascii="Calibri" hAnsi="Calibri" cs="Calibri"/>
+                <a:latin typeface="Golos Text"/>
+                <a:rFonts ascii="Golos Text" hAnsi="Golos Text" cs="Golos Text" eastAsia="Golos Text"/>
               </a:rPr>
               <a:t>Физические товары · HoReCa amenities</a:t>
             </a:r>
@@ -3337,14 +3335,12 @@
           <a:noFill/>
         </p:spPr>
         <p:txBody>
-          <a:bodyPr wrap="square">
-            <a:spAutoFit/>
-          </a:bodyPr>
-          <a:lstStyle/>
-          <a:p>
-            <a:pPr>
-              <a:lnSpc>
-                <a:spcPct val="115000"/>
+          <a:bodyPr wrap="square" anchor="t" lIns="50800" rIns="50800" tIns="25400" bIns="25400"/>
+          <a:lstStyle/>
+          <a:p>
+            <a:pPr algn="l">
+              <a:lnSpc>
+                <a:spcPct val="118000"/>
               </a:lnSpc>
               <a:spcBef>
                 <a:spcPts val="0"/>
@@ -3358,16 +3354,16 @@
                 <a:solidFill>
                   <a:srgbClr val="2A554A"/>
                 </a:solidFill>
-                <a:latin typeface="Calibri"/>
-                <a:rFonts ascii="Calibri" hAnsi="Calibri" cs="Calibri"/>
+                <a:latin typeface="Manrope"/>
+                <a:rFonts ascii="Manrope" hAnsi="Manrope" cs="Manrope" eastAsia="Manrope"/>
               </a:rPr>
               <a:t>Travel+ Natural</a:t>
             </a:r>
           </a:p>
           <a:p>
-            <a:pPr>
-              <a:lnSpc>
-                <a:spcPct val="115000"/>
+            <a:pPr algn="l">
+              <a:lnSpc>
+                <a:spcPct val="118000"/>
               </a:lnSpc>
               <a:spcBef>
                 <a:spcPts val="0"/>
@@ -3381,16 +3377,16 @@
                 <a:solidFill>
                   <a:srgbClr val="1A1A1A"/>
                 </a:solidFill>
-                <a:latin typeface="Calibri"/>
-                <a:rFonts ascii="Calibri" hAnsi="Calibri" cs="Calibri"/>
+                <a:latin typeface="Manrope"/>
+                <a:rFonts ascii="Manrope" hAnsi="Manrope" cs="Manrope" eastAsia="Manrope"/>
               </a:rPr>
               <a:t>Своя натуральная линейка:</a:t>
             </a:r>
           </a:p>
           <a:p>
-            <a:pPr>
-              <a:lnSpc>
-                <a:spcPct val="115000"/>
+            <a:pPr algn="l">
+              <a:lnSpc>
+                <a:spcPct val="118000"/>
               </a:lnSpc>
               <a:spcBef>
                 <a:spcPts val="0"/>
@@ -3404,16 +3400,16 @@
                 <a:solidFill>
                   <a:srgbClr val="1A1A1A"/>
                 </a:solidFill>
-                <a:latin typeface="Calibri"/>
-                <a:rFonts ascii="Calibri" hAnsi="Calibri" cs="Calibri"/>
+                <a:latin typeface="Manrope"/>
+                <a:rFonts ascii="Manrope" hAnsi="Manrope" cs="Manrope" eastAsia="Manrope"/>
               </a:rPr>
               <a:t>от рамки до пилота</a:t>
             </a:r>
           </a:p>
           <a:p>
-            <a:pPr>
-              <a:lnSpc>
-                <a:spcPct val="115000"/>
+            <a:pPr algn="l">
+              <a:lnSpc>
+                <a:spcPct val="118000"/>
               </a:lnSpc>
               <a:spcBef>
                 <a:spcPts val="0"/>
@@ -3427,16 +3423,16 @@
                 <a:solidFill>
                   <a:srgbClr val="5C5C5C"/>
                 </a:solidFill>
-                <a:latin typeface="Calibri"/>
-                <a:rFonts ascii="Calibri" hAnsi="Calibri" cs="Calibri"/>
+                <a:latin typeface="Golos Text"/>
+                <a:rFonts ascii="Golos Text" hAnsi="Golos Text" cs="Golos Text" eastAsia="Golos Text"/>
               </a:rPr>
               <a:t>Подготовка · АК-Сервис / Travel+ · Кириши</a:t>
             </a:r>
           </a:p>
           <a:p>
-            <a:pPr>
-              <a:lnSpc>
-                <a:spcPct val="115000"/>
+            <a:pPr algn="l">
+              <a:lnSpc>
+                <a:spcPct val="118000"/>
               </a:lnSpc>
               <a:spcBef>
                 <a:spcPts val="0"/>
@@ -3450,10 +3446,10 @@
                 <a:solidFill>
                   <a:srgbClr val="5C5C5C"/>
                 </a:solidFill>
-                <a:latin typeface="Calibri"/>
-                <a:rFonts ascii="Calibri" hAnsi="Calibri" cs="Calibri"/>
-              </a:rPr>
-              <a:t>Пульт бренда v1.14 · не оферта</a:t>
+                <a:latin typeface="Golos Text"/>
+                <a:rFonts ascii="Golos Text" hAnsi="Golos Text" cs="Golos Text" eastAsia="Golos Text"/>
+              </a:rPr>
+              <a:t>Образец презентации · не оферта</a:t>
             </a:r>
           </a:p>
         </p:txBody>
@@ -3589,8 +3585,8 @@
                 <a:solidFill>
                   <a:srgbClr val="2A554A"/>
                 </a:solidFill>
-                <a:latin typeface="Calibri"/>
-                <a:rFonts ascii="Calibri" hAnsi="Calibri" cs="Calibri"/>
+                <a:latin typeface="Manrope"/>
+                <a:rFonts ascii="Manrope" hAnsi="Manrope" cs="Manrope" eastAsia="Manrope"/>
               </a:rPr>
               <a:t>Поставки и экономика (Китай)</a:t>
             </a:r>
@@ -3710,10 +3706,10 @@
                 <a:solidFill>
                   <a:srgbClr val="5C5C5C"/>
                 </a:solidFill>
-                <a:latin typeface="Calibri"/>
-                <a:rFonts ascii="Calibri" hAnsi="Calibri" cs="Calibri"/>
-              </a:rPr>
-              <a:t>Travel+ Natural  ·  пульт v1.14  ·  собеседование  ·  не оферта</a:t>
+                <a:latin typeface="Golos Text"/>
+                <a:rFonts ascii="Golos Text" hAnsi="Golos Text" cs="Golos Text" eastAsia="Golos Text"/>
+              </a:rPr>
+              <a:t>Travel+ Natural  ·  образец презентации</a:t>
             </a:r>
           </a:p>
         </p:txBody>
@@ -3746,8 +3742,8 @@
                 <a:solidFill>
                   <a:srgbClr val="5C5C5C"/>
                 </a:solidFill>
-                <a:latin typeface="Calibri"/>
-                <a:rFonts ascii="Calibri" hAnsi="Calibri" cs="Calibri"/>
+                <a:latin typeface="Golos Text"/>
+                <a:rFonts ascii="Golos Text" hAnsi="Golos Text" cs="Golos Text" eastAsia="Golos Text"/>
               </a:rPr>
               <a:t>10 / 12</a:t>
             </a:r>
@@ -3810,7 +3806,7 @@
         <p:spPr>
           <a:xfrm>
             <a:off x="457200" y="960120"/>
-            <a:ext cx="5510631" cy="73152"/>
+            <a:ext cx="5510631" cy="82296"/>
           </a:xfrm>
           <a:prstGeom prst="rect">
             <a:avLst/>
@@ -3900,7 +3896,7 @@
         <p:spPr>
           <a:xfrm>
             <a:off x="6223863" y="960120"/>
-            <a:ext cx="5510631" cy="73152"/>
+            <a:ext cx="5510631" cy="82296"/>
           </a:xfrm>
           <a:prstGeom prst="rect">
             <a:avLst/>
@@ -3942,8 +3938,8 @@
         </p:nvSpPr>
         <p:spPr>
           <a:xfrm>
-            <a:off x="749808" y="1216152"/>
-            <a:ext cx="4925415" cy="4663440"/>
+            <a:off x="804672" y="1426464"/>
+            <a:ext cx="4815687" cy="4334256"/>
           </a:xfrm>
           <a:prstGeom prst="rect">
             <a:avLst/>
@@ -3951,20 +3947,18 @@
           <a:noFill/>
         </p:spPr>
         <p:txBody>
-          <a:bodyPr wrap="square">
-            <a:spAutoFit/>
-          </a:bodyPr>
-          <a:lstStyle/>
-          <a:p>
-            <a:pPr>
-              <a:lnSpc>
-                <a:spcPct val="115000"/>
-              </a:lnSpc>
-              <a:spcBef>
-                <a:spcPts val="0"/>
-              </a:spcBef>
-              <a:spcAft>
-                <a:spcPts val="1400"/>
+          <a:bodyPr wrap="square" anchor="t" lIns="50800" rIns="50800" tIns="25400" bIns="25400"/>
+          <a:lstStyle/>
+          <a:p>
+            <a:pPr algn="l">
+              <a:lnSpc>
+                <a:spcPct val="118000"/>
+              </a:lnSpc>
+              <a:spcBef>
+                <a:spcPts val="0"/>
+              </a:spcBef>
+              <a:spcAft>
+                <a:spcPts val="1200"/>
               </a:spcAft>
             </a:pPr>
             <a:r>
@@ -3972,16 +3966,16 @@
                 <a:solidFill>
                   <a:srgbClr val="2A554A"/>
                 </a:solidFill>
-                <a:latin typeface="Calibri"/>
-                <a:rFonts ascii="Calibri" hAnsi="Calibri" cs="Calibri"/>
+                <a:latin typeface="Manrope"/>
+                <a:rFonts ascii="Manrope" hAnsi="Manrope" cs="Manrope" eastAsia="Manrope"/>
               </a:rPr>
               <a:t>Экономика</a:t>
             </a:r>
           </a:p>
           <a:p>
-            <a:pPr>
-              <a:lnSpc>
-                <a:spcPct val="115000"/>
+            <a:pPr algn="l">
+              <a:lnSpc>
+                <a:spcPct val="118000"/>
               </a:lnSpc>
               <a:spcBef>
                 <a:spcPts val="0"/>
@@ -3995,16 +3989,16 @@
                 <a:solidFill>
                   <a:srgbClr val="1A1A1A"/>
                 </a:solidFill>
-                <a:latin typeface="Calibri"/>
-                <a:rFonts ascii="Calibri" hAnsi="Calibri" cs="Calibri"/>
+                <a:latin typeface="Golos Text"/>
+                <a:rFonts ascii="Golos Text" hAnsi="Golos Text" cs="Golos Text" eastAsia="Golos Text"/>
               </a:rPr>
               <a:t>Прайс — после себестоимости на складе.</a:t>
             </a:r>
           </a:p>
           <a:p>
-            <a:pPr>
-              <a:lnSpc>
-                <a:spcPct val="115000"/>
+            <a:pPr algn="l">
+              <a:lnSpc>
+                <a:spcPct val="118000"/>
               </a:lnSpc>
               <a:spcBef>
                 <a:spcPts val="0"/>
@@ -4018,16 +4012,16 @@
                 <a:solidFill>
                   <a:srgbClr val="1A1A1A"/>
                 </a:solidFill>
-                <a:latin typeface="Calibri"/>
-                <a:rFonts ascii="Calibri" hAnsi="Calibri" cs="Calibri"/>
+                <a:latin typeface="Golos Text"/>
+                <a:rFonts ascii="Golos Text" hAnsi="Golos Text" cs="Golos Text" eastAsia="Golos Text"/>
               </a:rPr>
               <a:t>Ориентир: выше Hotel Line · рядом с ЕТС · ниже NS.</a:t>
             </a:r>
           </a:p>
           <a:p>
-            <a:pPr>
-              <a:lnSpc>
-                <a:spcPct val="115000"/>
+            <a:pPr algn="l">
+              <a:lnSpc>
+                <a:spcPct val="118000"/>
               </a:lnSpc>
               <a:spcBef>
                 <a:spcPts val="0"/>
@@ -4041,16 +4035,16 @@
                 <a:solidFill>
                   <a:srgbClr val="1A1A1A"/>
                 </a:solidFill>
-                <a:latin typeface="Calibri"/>
-                <a:rFonts ascii="Calibri" hAnsi="Calibri" cs="Calibri"/>
+                <a:latin typeface="Manrope"/>
+                <a:rFonts ascii="Manrope" hAnsi="Manrope" cs="Manrope" eastAsia="Manrope"/>
               </a:rPr>
               <a:t>Не воюем копейкой.</a:t>
             </a:r>
           </a:p>
           <a:p>
-            <a:pPr>
-              <a:lnSpc>
-                <a:spcPct val="115000"/>
+            <a:pPr algn="l">
+              <a:lnSpc>
+                <a:spcPct val="118000"/>
               </a:lnSpc>
               <a:spcBef>
                 <a:spcPts val="0"/>
@@ -4064,8 +4058,8 @@
                 <a:solidFill>
                   <a:srgbClr val="1A1A1A"/>
                 </a:solidFill>
-                <a:latin typeface="Calibri"/>
-                <a:rFonts ascii="Calibri" hAnsi="Calibri" cs="Calibri"/>
+                <a:latin typeface="Golos Text"/>
+                <a:rFonts ascii="Golos Text" hAnsi="Golos Text" cs="Golos Text" eastAsia="Golos Text"/>
               </a:rPr>
               <a:t>Выигрываем пакетом и ощущением.</a:t>
             </a:r>
@@ -4080,8 +4074,8 @@
         </p:nvSpPr>
         <p:spPr>
           <a:xfrm>
-            <a:off x="6516471" y="1216152"/>
-            <a:ext cx="4925415" cy="4663440"/>
+            <a:off x="6571335" y="1426464"/>
+            <a:ext cx="4815687" cy="4334256"/>
           </a:xfrm>
           <a:prstGeom prst="rect">
             <a:avLst/>
@@ -4089,20 +4083,18 @@
           <a:noFill/>
         </p:spPr>
         <p:txBody>
-          <a:bodyPr wrap="square">
-            <a:spAutoFit/>
-          </a:bodyPr>
-          <a:lstStyle/>
-          <a:p>
-            <a:pPr>
-              <a:lnSpc>
-                <a:spcPct val="115000"/>
-              </a:lnSpc>
-              <a:spcBef>
-                <a:spcPts val="0"/>
-              </a:spcBef>
-              <a:spcAft>
-                <a:spcPts val="1400"/>
+          <a:bodyPr wrap="square" anchor="t" lIns="50800" rIns="50800" tIns="25400" bIns="25400"/>
+          <a:lstStyle/>
+          <a:p>
+            <a:pPr algn="l">
+              <a:lnSpc>
+                <a:spcPct val="118000"/>
+              </a:lnSpc>
+              <a:spcBef>
+                <a:spcPts val="0"/>
+              </a:spcBef>
+              <a:spcAft>
+                <a:spcPts val="1200"/>
               </a:spcAft>
             </a:pPr>
             <a:r>
@@ -4110,16 +4102,16 @@
                 <a:solidFill>
                   <a:srgbClr val="2A554A"/>
                 </a:solidFill>
-                <a:latin typeface="Calibri"/>
-                <a:rFonts ascii="Calibri" hAnsi="Calibri" cs="Calibri"/>
+                <a:latin typeface="Manrope"/>
+                <a:rFonts ascii="Manrope" hAnsi="Manrope" cs="Manrope" eastAsia="Manrope"/>
               </a:rPr>
               <a:t>Если Китай или гибрид</a:t>
             </a:r>
           </a:p>
           <a:p>
-            <a:pPr>
-              <a:lnSpc>
-                <a:spcPct val="115000"/>
+            <a:pPr algn="l">
+              <a:lnSpc>
+                <a:spcPct val="118000"/>
               </a:lnSpc>
               <a:spcBef>
                 <a:spcPts val="0"/>
@@ -4133,16 +4125,16 @@
                 <a:solidFill>
                   <a:srgbClr val="1A1A1A"/>
                 </a:solidFill>
-                <a:latin typeface="Calibri"/>
-                <a:rFonts ascii="Calibri" hAnsi="Calibri" cs="Calibri"/>
+                <a:latin typeface="Golos Text"/>
+                <a:rFonts ascii="Golos Text" hAnsi="Golos Text" cs="Golos Text" eastAsia="Golos Text"/>
               </a:rPr>
               <a:t>Сравниваем заводы в FOB</a:t>
             </a:r>
           </a:p>
           <a:p>
-            <a:pPr>
-              <a:lnSpc>
-                <a:spcPct val="115000"/>
+            <a:pPr algn="l">
+              <a:lnSpc>
+                <a:spcPct val="118000"/>
               </a:lnSpc>
               <a:spcBef>
                 <a:spcPts val="0"/>
@@ -4156,16 +4148,16 @@
                 <a:solidFill>
                   <a:srgbClr val="1A1A1A"/>
                 </a:solidFill>
-                <a:latin typeface="Calibri"/>
-                <a:rFonts ascii="Calibri" hAnsi="Calibri" cs="Calibri"/>
+                <a:latin typeface="Golos Text"/>
+                <a:rFonts ascii="Golos Text" hAnsi="Golos Text" cs="Golos Text" eastAsia="Golos Text"/>
               </a:rPr>
               <a:t>Логистику до Кириши считаем отдельно</a:t>
             </a:r>
           </a:p>
           <a:p>
-            <a:pPr>
-              <a:lnSpc>
-                <a:spcPct val="115000"/>
+            <a:pPr algn="l">
+              <a:lnSpc>
+                <a:spcPct val="118000"/>
               </a:lnSpc>
               <a:spcBef>
                 <a:spcPts val="0"/>
@@ -4179,16 +4171,16 @@
                 <a:solidFill>
                   <a:srgbClr val="1A1A1A"/>
                 </a:solidFill>
-                <a:latin typeface="Calibri"/>
-                <a:rFonts ascii="Calibri" hAnsi="Calibri" cs="Calibri"/>
+                <a:latin typeface="Golos Text"/>
+                <a:rFonts ascii="Golos Text" hAnsi="Golos Text" cs="Golos Text" eastAsia="Golos Text"/>
               </a:rPr>
               <a:t>Полная цена = FOB + фрахт + таможня + довоз</a:t>
             </a:r>
           </a:p>
           <a:p>
-            <a:pPr>
-              <a:lnSpc>
-                <a:spcPct val="115000"/>
+            <a:pPr algn="l">
+              <a:lnSpc>
+                <a:spcPct val="118000"/>
               </a:lnSpc>
               <a:spcBef>
                 <a:spcPts val="0"/>
@@ -4202,16 +4194,16 @@
                 <a:solidFill>
                   <a:srgbClr val="1A1A1A"/>
                 </a:solidFill>
-                <a:latin typeface="Calibri"/>
-                <a:rFonts ascii="Calibri" hAnsi="Calibri" cs="Calibri"/>
+                <a:latin typeface="Manrope"/>
+                <a:rFonts ascii="Manrope" hAnsi="Manrope" cs="Manrope" eastAsia="Manrope"/>
               </a:rPr>
               <a:t>Срок пилота — «на складе»</a:t>
             </a:r>
           </a:p>
           <a:p>
-            <a:pPr>
-              <a:lnSpc>
-                <a:spcPct val="115000"/>
+            <a:pPr algn="l">
+              <a:lnSpc>
+                <a:spcPct val="118000"/>
               </a:lnSpc>
               <a:spcBef>
                 <a:spcPts val="0"/>
@@ -4225,8 +4217,8 @@
                 <a:solidFill>
                   <a:srgbClr val="1A1A1A"/>
                 </a:solidFill>
-                <a:latin typeface="Calibri"/>
-                <a:rFonts ascii="Calibri" hAnsi="Calibri" cs="Calibri"/>
+                <a:latin typeface="Golos Text"/>
+                <a:rFonts ascii="Golos Text" hAnsi="Golos Text" cs="Golos Text" eastAsia="Golos Text"/>
               </a:rPr>
               <a:t>Origin не ясен → не говорим «российское»</a:t>
             </a:r>
@@ -4364,8 +4356,8 @@
                 <a:solidFill>
                   <a:srgbClr val="2A554A"/>
                 </a:solidFill>
-                <a:latin typeface="Calibri"/>
-                <a:rFonts ascii="Calibri" hAnsi="Calibri" cs="Calibri"/>
+                <a:latin typeface="Manrope"/>
+                <a:rFonts ascii="Manrope" hAnsi="Manrope" cs="Manrope" eastAsia="Manrope"/>
               </a:rPr>
               <a:t>Что уже есть в пульте</a:t>
             </a:r>
@@ -4485,10 +4477,10 @@
                 <a:solidFill>
                   <a:srgbClr val="5C5C5C"/>
                 </a:solidFill>
-                <a:latin typeface="Calibri"/>
-                <a:rFonts ascii="Calibri" hAnsi="Calibri" cs="Calibri"/>
-              </a:rPr>
-              <a:t>Travel+ Natural  ·  пульт v1.14  ·  собеседование  ·  не оферта</a:t>
+                <a:latin typeface="Golos Text"/>
+                <a:rFonts ascii="Golos Text" hAnsi="Golos Text" cs="Golos Text" eastAsia="Golos Text"/>
+              </a:rPr>
+              <a:t>Travel+ Natural  ·  образец презентации</a:t>
             </a:r>
           </a:p>
         </p:txBody>
@@ -4521,8 +4513,8 @@
                 <a:solidFill>
                   <a:srgbClr val="5C5C5C"/>
                 </a:solidFill>
-                <a:latin typeface="Calibri"/>
-                <a:rFonts ascii="Calibri" hAnsi="Calibri" cs="Calibri"/>
+                <a:latin typeface="Golos Text"/>
+                <a:rFonts ascii="Golos Text" hAnsi="Golos Text" cs="Golos Text" eastAsia="Golos Text"/>
               </a:rPr>
               <a:t>11 / 12</a:t>
             </a:r>
@@ -4585,7 +4577,7 @@
         <p:spPr>
           <a:xfrm>
             <a:off x="457200" y="960120"/>
-            <a:ext cx="5510631" cy="73152"/>
+            <a:ext cx="5510631" cy="82296"/>
           </a:xfrm>
           <a:prstGeom prst="rect">
             <a:avLst/>
@@ -4675,7 +4667,7 @@
         <p:spPr>
           <a:xfrm>
             <a:off x="6223863" y="960120"/>
-            <a:ext cx="5510631" cy="73152"/>
+            <a:ext cx="5510631" cy="82296"/>
           </a:xfrm>
           <a:prstGeom prst="rect">
             <a:avLst/>
@@ -4717,8 +4709,8 @@
         </p:nvSpPr>
         <p:spPr>
           <a:xfrm>
-            <a:off x="749808" y="1216152"/>
-            <a:ext cx="4925415" cy="4663440"/>
+            <a:off x="804672" y="1426464"/>
+            <a:ext cx="4815687" cy="4334256"/>
           </a:xfrm>
           <a:prstGeom prst="rect">
             <a:avLst/>
@@ -4726,20 +4718,18 @@
           <a:noFill/>
         </p:spPr>
         <p:txBody>
-          <a:bodyPr wrap="square">
-            <a:spAutoFit/>
-          </a:bodyPr>
-          <a:lstStyle/>
-          <a:p>
-            <a:pPr>
-              <a:lnSpc>
-                <a:spcPct val="115000"/>
-              </a:lnSpc>
-              <a:spcBef>
-                <a:spcPts val="0"/>
-              </a:spcBef>
-              <a:spcAft>
-                <a:spcPts val="1400"/>
+          <a:bodyPr wrap="square" anchor="t" lIns="50800" rIns="50800" tIns="25400" bIns="25400"/>
+          <a:lstStyle/>
+          <a:p>
+            <a:pPr algn="l">
+              <a:lnSpc>
+                <a:spcPct val="118000"/>
+              </a:lnSpc>
+              <a:spcBef>
+                <a:spcPts val="0"/>
+              </a:spcBef>
+              <a:spcAft>
+                <a:spcPts val="1200"/>
               </a:spcAft>
             </a:pPr>
             <a:r>
@@ -4747,16 +4737,16 @@
                 <a:solidFill>
                   <a:srgbClr val="2A554A"/>
                 </a:solidFill>
-                <a:latin typeface="Calibri"/>
-                <a:rFonts ascii="Calibri" hAnsi="Calibri" cs="Calibri"/>
+                <a:latin typeface="Manrope"/>
+                <a:rFonts ascii="Manrope" hAnsi="Manrope" cs="Manrope" eastAsia="Manrope"/>
               </a:rPr>
               <a:t>Содержание</a:t>
             </a:r>
           </a:p>
           <a:p>
-            <a:pPr>
-              <a:lnSpc>
-                <a:spcPct val="115000"/>
+            <a:pPr algn="l">
+              <a:lnSpc>
+                <a:spcPct val="118000"/>
               </a:lnSpc>
               <a:spcBef>
                 <a:spcPts val="0"/>
@@ -4770,16 +4760,16 @@
                 <a:solidFill>
                   <a:srgbClr val="1A1A1A"/>
                 </a:solidFill>
-                <a:latin typeface="Calibri"/>
-                <a:rFonts ascii="Calibri" hAnsi="Calibri" cs="Calibri"/>
+                <a:latin typeface="Golos Text"/>
+                <a:rFonts ascii="Golos Text" hAnsi="Golos Text" cs="Golos Text" eastAsia="Golos Text"/>
               </a:rPr>
               <a:t>Этапы 0–2 — разведка и правила</a:t>
             </a:r>
           </a:p>
           <a:p>
-            <a:pPr>
-              <a:lnSpc>
-                <a:spcPct val="115000"/>
+            <a:pPr algn="l">
+              <a:lnSpc>
+                <a:spcPct val="118000"/>
               </a:lnSpc>
               <a:spcBef>
                 <a:spcPts val="0"/>
@@ -4793,16 +4783,16 @@
                 <a:solidFill>
                   <a:srgbClr val="1A1A1A"/>
                 </a:solidFill>
-                <a:latin typeface="Calibri"/>
-                <a:rFonts ascii="Calibri" hAnsi="Calibri" cs="Calibri"/>
+                <a:latin typeface="Golos Text"/>
+                <a:rFonts ascii="Golos Text" hAnsi="Golos Text" cs="Golos Text" eastAsia="Golos Text"/>
               </a:rPr>
               <a:t>Этапы 3–6 — сценарий «как вести дело»</a:t>
             </a:r>
           </a:p>
           <a:p>
-            <a:pPr>
-              <a:lnSpc>
-                <a:spcPct val="115000"/>
+            <a:pPr algn="l">
+              <a:lnSpc>
+                <a:spcPct val="118000"/>
               </a:lnSpc>
               <a:spcBef>
                 <a:spcPts val="0"/>
@@ -4816,16 +4806,16 @@
                 <a:solidFill>
                   <a:srgbClr val="1A1A1A"/>
                 </a:solidFill>
-                <a:latin typeface="Calibri"/>
-                <a:rFonts ascii="Calibri" hAnsi="Calibri" cs="Calibri"/>
+                <a:latin typeface="Golos Text"/>
+                <a:rFonts ascii="Golos Text" hAnsi="Golos Text" cs="Golos Text" eastAsia="Golos Text"/>
               </a:rPr>
               <a:t>StoryBrand · DoD · риски · возврат</a:t>
             </a:r>
           </a:p>
           <a:p>
-            <a:pPr>
-              <a:lnSpc>
-                <a:spcPct val="115000"/>
+            <a:pPr algn="l">
+              <a:lnSpc>
+                <a:spcPct val="118000"/>
               </a:lnSpc>
               <a:spcBef>
                 <a:spcPts val="0"/>
@@ -4839,8 +4829,8 @@
                 <a:solidFill>
                   <a:srgbClr val="1A1A1A"/>
                 </a:solidFill>
-                <a:latin typeface="Calibri"/>
-                <a:rFonts ascii="Calibri" hAnsi="Calibri" cs="Calibri"/>
+                <a:latin typeface="Golos Text"/>
+                <a:rFonts ascii="Golos Text" hAnsi="Golos Text" cs="Golos Text" eastAsia="Golos Text"/>
               </a:rPr>
               <a:t>Мостик портфеля Travel+</a:t>
             </a:r>
@@ -4855,8 +4845,8 @@
         </p:nvSpPr>
         <p:spPr>
           <a:xfrm>
-            <a:off x="6516471" y="1216152"/>
-            <a:ext cx="4925415" cy="4663440"/>
+            <a:off x="6571335" y="1426464"/>
+            <a:ext cx="4815687" cy="4334256"/>
           </a:xfrm>
           <a:prstGeom prst="rect">
             <a:avLst/>
@@ -4864,14 +4854,58 @@
           <a:noFill/>
         </p:spPr>
         <p:txBody>
-          <a:bodyPr wrap="square">
-            <a:spAutoFit/>
-          </a:bodyPr>
-          <a:lstStyle/>
-          <a:p>
-            <a:pPr>
-              <a:lnSpc>
-                <a:spcPct val="115000"/>
+          <a:bodyPr wrap="square" anchor="t" lIns="50800" rIns="50800" tIns="25400" bIns="25400"/>
+          <a:lstStyle/>
+          <a:p>
+            <a:pPr algn="l">
+              <a:lnSpc>
+                <a:spcPct val="118000"/>
+              </a:lnSpc>
+              <a:spcBef>
+                <a:spcPts val="0"/>
+              </a:spcBef>
+              <a:spcAft>
+                <a:spcPts val="1200"/>
+              </a:spcAft>
+            </a:pPr>
+            <a:r>
+              <a:rPr sz="1500" b="1">
+                <a:solidFill>
+                  <a:srgbClr val="2A554A"/>
+                </a:solidFill>
+                <a:latin typeface="Manrope"/>
+                <a:rFonts ascii="Manrope" hAnsi="Manrope" cs="Manrope" eastAsia="Manrope"/>
+              </a:rPr>
+              <a:t>Справочники</a:t>
+            </a:r>
+          </a:p>
+          <a:p>
+            <a:pPr algn="l">
+              <a:lnSpc>
+                <a:spcPct val="118000"/>
+              </a:lnSpc>
+              <a:spcBef>
+                <a:spcPts val="0"/>
+              </a:spcBef>
+              <a:spcAft>
+                <a:spcPts val="800"/>
+              </a:spcAft>
+            </a:pPr>
+            <a:r>
+              <a:rPr sz="1600" b="0">
+                <a:solidFill>
+                  <a:srgbClr val="1A1A1A"/>
+                </a:solidFill>
+                <a:latin typeface="Golos Text"/>
+                <a:rFonts ascii="Golos Text" hAnsi="Golos Text" cs="Golos Text" eastAsia="Golos Text"/>
+              </a:rPr>
+              <a:t>Глоссарий бренда + глоссарий ВЭД</a:t>
+            </a:r>
+          </a:p>
+          <a:p>
+            <a:pPr algn="l">
+              <a:lnSpc>
+                <a:spcPct val="118000"/>
               </a:lnSpc>
               <a:spcBef>
                 <a:spcPts val="0"/>
@@ -4881,20 +4915,20 @@
               </a:spcAft>
             </a:pPr>
             <a:r>
-              <a:rPr sz="1500" b="1">
-                <a:solidFill>
-                  <a:srgbClr val="2A554A"/>
-                </a:solidFill>
-                <a:latin typeface="Calibri"/>
-                <a:rFonts ascii="Calibri" hAnsi="Calibri" cs="Calibri"/>
-              </a:rPr>
-              <a:t>Справочники</a:t>
-            </a:r>
-          </a:p>
-          <a:p>
-            <a:pPr>
-              <a:lnSpc>
-                <a:spcPct val="115000"/>
+              <a:rPr sz="1600" b="0">
+                <a:solidFill>
+                  <a:srgbClr val="1A1A1A"/>
+                </a:solidFill>
+                <a:latin typeface="Golos Text"/>
+                <a:rFonts ascii="Golos Text" hAnsi="Golos Text" cs="Golos Text" eastAsia="Golos Text"/>
+              </a:rPr>
+              <a:t>Раздел L: путь · Incoterms · RFQ</a:t>
+            </a:r>
+          </a:p>
+          <a:p>
+            <a:pPr algn="l">
+              <a:lnSpc>
+                <a:spcPct val="118000"/>
               </a:lnSpc>
               <a:spcBef>
                 <a:spcPts val="0"/>
@@ -4908,77 +4942,31 @@
                 <a:solidFill>
                   <a:srgbClr val="1A1A1A"/>
                 </a:solidFill>
-                <a:latin typeface="Calibri"/>
-                <a:rFonts ascii="Calibri" hAnsi="Calibri" cs="Calibri"/>
-              </a:rPr>
-              <a:t>Глоссарий бренда + глоссарий ВЭД</a:t>
-            </a:r>
-          </a:p>
-          <a:p>
-            <a:pPr>
-              <a:lnSpc>
-                <a:spcPct val="115000"/>
-              </a:lnSpc>
-              <a:spcBef>
-                <a:spcPts val="0"/>
-              </a:spcBef>
-              <a:spcAft>
-                <a:spcPts val="1400"/>
-              </a:spcAft>
-            </a:pPr>
-            <a:r>
-              <a:rPr sz="1600" b="0">
+                <a:latin typeface="Golos Text"/>
+                <a:rFonts ascii="Golos Text" hAnsi="Golos Text" cs="Golos Text" eastAsia="Golos Text"/>
+              </a:rPr>
+              <a:t>Статус: рамка для поля и собеседования.</a:t>
+            </a:r>
+          </a:p>
+          <a:p>
+            <a:pPr algn="l">
+              <a:lnSpc>
+                <a:spcPct val="118000"/>
+              </a:lnSpc>
+              <a:spcBef>
+                <a:spcPts val="0"/>
+              </a:spcBef>
+              <a:spcAft>
+                <a:spcPts val="800"/>
+              </a:spcAft>
+            </a:pPr>
+            <a:r>
+              <a:rPr sz="1600" b="1">
                 <a:solidFill>
                   <a:srgbClr val="1A1A1A"/>
                 </a:solidFill>
-                <a:latin typeface="Calibri"/>
-                <a:rFonts ascii="Calibri" hAnsi="Calibri" cs="Calibri"/>
-              </a:rPr>
-              <a:t>Раздел L: путь · Incoterms · RFQ</a:t>
-            </a:r>
-          </a:p>
-          <a:p>
-            <a:pPr>
-              <a:lnSpc>
-                <a:spcPct val="115000"/>
-              </a:lnSpc>
-              <a:spcBef>
-                <a:spcPts val="0"/>
-              </a:spcBef>
-              <a:spcAft>
-                <a:spcPts val="800"/>
-              </a:spcAft>
-            </a:pPr>
-            <a:r>
-              <a:rPr sz="1600" b="0">
-                <a:solidFill>
-                  <a:srgbClr val="1A1A1A"/>
-                </a:solidFill>
-                <a:latin typeface="Calibri"/>
-                <a:rFonts ascii="Calibri" hAnsi="Calibri" cs="Calibri"/>
-              </a:rPr>
-              <a:t>Статус: рамка для поля и собеседования.</a:t>
-            </a:r>
-          </a:p>
-          <a:p>
-            <a:pPr>
-              <a:lnSpc>
-                <a:spcPct val="115000"/>
-              </a:lnSpc>
-              <a:spcBef>
-                <a:spcPts val="0"/>
-              </a:spcBef>
-              <a:spcAft>
-                <a:spcPts val="800"/>
-              </a:spcAft>
-            </a:pPr>
-            <a:r>
-              <a:rPr sz="1600" b="1">
-                <a:solidFill>
-                  <a:srgbClr val="1A1A1A"/>
-                </a:solidFill>
-                <a:latin typeface="Calibri"/>
-                <a:rFonts ascii="Calibri" hAnsi="Calibri" cs="Calibri"/>
+                <a:latin typeface="Manrope"/>
+                <a:rFonts ascii="Manrope" hAnsi="Manrope" cs="Manrope" eastAsia="Manrope"/>
               </a:rPr>
               <a:t>v2.0 — когда технолог даст цифры.</a:t>
             </a:r>
@@ -5116,8 +5104,8 @@
                 <a:solidFill>
                   <a:srgbClr val="2A554A"/>
                 </a:solidFill>
-                <a:latin typeface="Calibri"/>
-                <a:rFonts ascii="Calibri" hAnsi="Calibri" cs="Calibri"/>
+                <a:latin typeface="Manrope"/>
+                <a:rFonts ascii="Manrope" hAnsi="Manrope" cs="Manrope" eastAsia="Manrope"/>
               </a:rPr>
               <a:t>Итог и следующий шаг</a:t>
             </a:r>
@@ -5237,10 +5225,10 @@
                 <a:solidFill>
                   <a:srgbClr val="5C5C5C"/>
                 </a:solidFill>
-                <a:latin typeface="Calibri"/>
-                <a:rFonts ascii="Calibri" hAnsi="Calibri" cs="Calibri"/>
-              </a:rPr>
-              <a:t>Travel+ Natural  ·  пульт v1.14  ·  собеседование  ·  не оферта</a:t>
+                <a:latin typeface="Golos Text"/>
+                <a:rFonts ascii="Golos Text" hAnsi="Golos Text" cs="Golos Text" eastAsia="Golos Text"/>
+              </a:rPr>
+              <a:t>Travel+ Natural  ·  образец презентации</a:t>
             </a:r>
           </a:p>
         </p:txBody>
@@ -5273,8 +5261,8 @@
                 <a:solidFill>
                   <a:srgbClr val="5C5C5C"/>
                 </a:solidFill>
-                <a:latin typeface="Calibri"/>
-                <a:rFonts ascii="Calibri" hAnsi="Calibri" cs="Calibri"/>
+                <a:latin typeface="Golos Text"/>
+                <a:rFonts ascii="Golos Text" hAnsi="Golos Text" cs="Golos Text" eastAsia="Golos Text"/>
               </a:rPr>
               <a:t>12 / 12</a:t>
             </a:r>
@@ -5337,7 +5325,7 @@
         <p:spPr>
           <a:xfrm>
             <a:off x="457200" y="960120"/>
-            <a:ext cx="5510631" cy="73152"/>
+            <a:ext cx="5510631" cy="82296"/>
           </a:xfrm>
           <a:prstGeom prst="rect">
             <a:avLst/>
@@ -5427,7 +5415,7 @@
         <p:spPr>
           <a:xfrm>
             <a:off x="6223863" y="960120"/>
-            <a:ext cx="5510631" cy="73152"/>
+            <a:ext cx="5510631" cy="82296"/>
           </a:xfrm>
           <a:prstGeom prst="rect">
             <a:avLst/>
@@ -5469,8 +5457,8 @@
         </p:nvSpPr>
         <p:spPr>
           <a:xfrm>
-            <a:off x="749808" y="1216152"/>
-            <a:ext cx="4925415" cy="4663440"/>
+            <a:off x="804672" y="1426464"/>
+            <a:ext cx="4815687" cy="4334256"/>
           </a:xfrm>
           <a:prstGeom prst="rect">
             <a:avLst/>
@@ -5478,14 +5466,81 @@
           <a:noFill/>
         </p:spPr>
         <p:txBody>
-          <a:bodyPr wrap="square">
-            <a:spAutoFit/>
-          </a:bodyPr>
-          <a:lstStyle/>
-          <a:p>
-            <a:pPr>
-              <a:lnSpc>
-                <a:spcPct val="115000"/>
+          <a:bodyPr wrap="square" anchor="t" lIns="50800" rIns="50800" tIns="25400" bIns="25400"/>
+          <a:lstStyle/>
+          <a:p>
+            <a:pPr algn="l">
+              <a:lnSpc>
+                <a:spcPct val="118000"/>
+              </a:lnSpc>
+              <a:spcBef>
+                <a:spcPts val="0"/>
+              </a:spcBef>
+              <a:spcAft>
+                <a:spcPts val="1200"/>
+              </a:spcAft>
+            </a:pPr>
+            <a:r>
+              <a:rPr sz="1500" b="1">
+                <a:solidFill>
+                  <a:srgbClr val="2A554A"/>
+                </a:solidFill>
+                <a:latin typeface="Manrope"/>
+                <a:rFonts ascii="Manrope" hAnsi="Manrope" cs="Manrope" eastAsia="Manrope"/>
+              </a:rPr>
+              <a:t>Собрал</a:t>
+            </a:r>
+          </a:p>
+          <a:p>
+            <a:pPr algn="l">
+              <a:lnSpc>
+                <a:spcPct val="118000"/>
+              </a:lnSpc>
+              <a:spcBef>
+                <a:spcPts val="0"/>
+              </a:spcBef>
+              <a:spcAft>
+                <a:spcPts val="800"/>
+              </a:spcAft>
+            </a:pPr>
+            <a:r>
+              <a:rPr sz="1600" b="0">
+                <a:solidFill>
+                  <a:srgbClr val="1A1A1A"/>
+                </a:solidFill>
+                <a:latin typeface="Golos Text"/>
+                <a:rFonts ascii="Golos Text" hAnsi="Golos Text" cs="Golos Text" eastAsia="Golos Text"/>
+              </a:rPr>
+              <a:t>ДНК + StoryBrand + DoD</a:t>
+            </a:r>
+          </a:p>
+          <a:p>
+            <a:pPr algn="l">
+              <a:lnSpc>
+                <a:spcPct val="118000"/>
+              </a:lnSpc>
+              <a:spcBef>
+                <a:spcPts val="0"/>
+              </a:spcBef>
+              <a:spcAft>
+                <a:spcPts val="800"/>
+              </a:spcAft>
+            </a:pPr>
+            <a:r>
+              <a:rPr sz="1600" b="0">
+                <a:solidFill>
+                  <a:srgbClr val="1A1A1A"/>
+                </a:solidFill>
+                <a:latin typeface="Golos Text"/>
+                <a:rFonts ascii="Golos Text" hAnsi="Golos Text" cs="Golos Text" eastAsia="Golos Text"/>
+              </a:rPr>
+              <a:t>Полевая защита</a:t>
+            </a:r>
+          </a:p>
+          <a:p>
+            <a:pPr algn="l">
+              <a:lnSpc>
+                <a:spcPct val="118000"/>
               </a:lnSpc>
               <a:spcBef>
                 <a:spcPts val="0"/>
@@ -5495,89 +5550,20 @@
               </a:spcAft>
             </a:pPr>
             <a:r>
-              <a:rPr sz="1500" b="1">
-                <a:solidFill>
-                  <a:srgbClr val="2A554A"/>
-                </a:solidFill>
-                <a:latin typeface="Calibri"/>
-                <a:rFonts ascii="Calibri" hAnsi="Calibri" cs="Calibri"/>
-              </a:rPr>
-              <a:t>Собрал</a:t>
-            </a:r>
-          </a:p>
-          <a:p>
-            <a:pPr>
-              <a:lnSpc>
-                <a:spcPct val="115000"/>
-              </a:lnSpc>
-              <a:spcBef>
-                <a:spcPts val="0"/>
-              </a:spcBef>
-              <a:spcAft>
-                <a:spcPts val="800"/>
-              </a:spcAft>
-            </a:pPr>
-            <a:r>
               <a:rPr sz="1600" b="0">
                 <a:solidFill>
                   <a:srgbClr val="1A1A1A"/>
                 </a:solidFill>
-                <a:latin typeface="Calibri"/>
-                <a:rFonts ascii="Calibri" hAnsi="Calibri" cs="Calibri"/>
-              </a:rPr>
-              <a:t>ДНК + StoryBrand + DoD</a:t>
-            </a:r>
-          </a:p>
-          <a:p>
-            <a:pPr>
-              <a:lnSpc>
-                <a:spcPct val="115000"/>
-              </a:lnSpc>
-              <a:spcBef>
-                <a:spcPts val="0"/>
-              </a:spcBef>
-              <a:spcAft>
-                <a:spcPts val="800"/>
-              </a:spcAft>
-            </a:pPr>
-            <a:r>
-              <a:rPr sz="1600" b="0">
-                <a:solidFill>
-                  <a:srgbClr val="1A1A1A"/>
-                </a:solidFill>
-                <a:latin typeface="Calibri"/>
-                <a:rFonts ascii="Calibri" hAnsi="Calibri" cs="Calibri"/>
-              </a:rPr>
-              <a:t>Полевая защита</a:t>
-            </a:r>
-          </a:p>
-          <a:p>
-            <a:pPr>
-              <a:lnSpc>
-                <a:spcPct val="115000"/>
-              </a:lnSpc>
-              <a:spcBef>
-                <a:spcPts val="0"/>
-              </a:spcBef>
-              <a:spcAft>
-                <a:spcPts val="1400"/>
-              </a:spcAft>
-            </a:pPr>
-            <a:r>
-              <a:rPr sz="1600" b="0">
-                <a:solidFill>
-                  <a:srgbClr val="1A1A1A"/>
-                </a:solidFill>
-                <a:latin typeface="Calibri"/>
-                <a:rFonts ascii="Calibri" hAnsi="Calibri" cs="Calibri"/>
+                <a:latin typeface="Golos Text"/>
+                <a:rFonts ascii="Golos Text" hAnsi="Golos Text" cs="Golos Text" eastAsia="Golos Text"/>
               </a:rPr>
               <a:t>Чеклист поставок при Китае (раздел L)</a:t>
             </a:r>
           </a:p>
           <a:p>
-            <a:pPr>
-              <a:lnSpc>
-                <a:spcPct val="115000"/>
+            <a:pPr algn="l">
+              <a:lnSpc>
+                <a:spcPct val="118000"/>
               </a:lnSpc>
               <a:spcBef>
                 <a:spcPts val="0"/>
@@ -5591,8 +5577,8 @@
                 <a:solidFill>
                   <a:srgbClr val="5C5C5C"/>
                 </a:solidFill>
-                <a:latin typeface="Calibri"/>
-                <a:rFonts ascii="Calibri" hAnsi="Calibri" cs="Calibri"/>
+                <a:latin typeface="Golos Text"/>
+                <a:rFonts ascii="Golos Text" hAnsi="Golos Text" cs="Golos Text" eastAsia="Golos Text"/>
               </a:rPr>
               <a:t>Не прайс завода. Не КП.</a:t>
             </a:r>
@@ -5607,8 +5593,8 @@
         </p:nvSpPr>
         <p:spPr>
           <a:xfrm>
-            <a:off x="6516471" y="1216152"/>
-            <a:ext cx="4925415" cy="4663440"/>
+            <a:off x="6571335" y="1426464"/>
+            <a:ext cx="4815687" cy="4334256"/>
           </a:xfrm>
           <a:prstGeom prst="rect">
             <a:avLst/>
@@ -5616,14 +5602,81 @@
           <a:noFill/>
         </p:spPr>
         <p:txBody>
-          <a:bodyPr wrap="square">
-            <a:spAutoFit/>
-          </a:bodyPr>
-          <a:lstStyle/>
-          <a:p>
-            <a:pPr>
-              <a:lnSpc>
-                <a:spcPct val="115000"/>
+          <a:bodyPr wrap="square" anchor="t" lIns="50800" rIns="50800" tIns="25400" bIns="25400"/>
+          <a:lstStyle/>
+          <a:p>
+            <a:pPr algn="l">
+              <a:lnSpc>
+                <a:spcPct val="118000"/>
+              </a:lnSpc>
+              <a:spcBef>
+                <a:spcPts val="0"/>
+              </a:spcBef>
+              <a:spcAft>
+                <a:spcPts val="1200"/>
+              </a:spcAft>
+            </a:pPr>
+            <a:r>
+              <a:rPr sz="1500" b="1">
+                <a:solidFill>
+                  <a:srgbClr val="2A554A"/>
+                </a:solidFill>
+                <a:latin typeface="Manrope"/>
+                <a:rFonts ascii="Manrope" hAnsi="Manrope" cs="Manrope" eastAsia="Manrope"/>
+              </a:rPr>
+              <a:t>Готов обсудить</a:t>
+            </a:r>
+          </a:p>
+          <a:p>
+            <a:pPr algn="l">
+              <a:lnSpc>
+                <a:spcPct val="118000"/>
+              </a:lnSpc>
+              <a:spcBef>
+                <a:spcPts val="0"/>
+              </a:spcBef>
+              <a:spcAft>
+                <a:spcPts val="800"/>
+              </a:spcAft>
+            </a:pPr>
+            <a:r>
+              <a:rPr sz="1600" b="0">
+                <a:solidFill>
+                  <a:srgbClr val="1A1A1A"/>
+                </a:solidFill>
+                <a:latin typeface="Golos Text"/>
+                <a:rFonts ascii="Golos Text" hAnsi="Golos Text" cs="Golos Text" eastAsia="Golos Text"/>
+              </a:rPr>
+              <a:t>1) Приоритет блокеров этапа 2 с технологом</a:t>
+            </a:r>
+          </a:p>
+          <a:p>
+            <a:pPr algn="l">
+              <a:lnSpc>
+                <a:spcPct val="118000"/>
+              </a:lnSpc>
+              <a:spcBef>
+                <a:spcPts val="0"/>
+              </a:spcBef>
+              <a:spcAft>
+                <a:spcPts val="800"/>
+              </a:spcAft>
+            </a:pPr>
+            <a:r>
+              <a:rPr sz="1600" b="0">
+                <a:solidFill>
+                  <a:srgbClr val="1A1A1A"/>
+                </a:solidFill>
+                <a:latin typeface="Golos Text"/>
+                <a:rFonts ascii="Golos Text" hAnsi="Golos Text" cs="Golos Text" eastAsia="Golos Text"/>
+              </a:rPr>
+              <a:t>2) Пилотный сегмент eco / wellness</a:t>
+            </a:r>
+          </a:p>
+          <a:p>
+            <a:pPr algn="l">
+              <a:lnSpc>
+                <a:spcPct val="118000"/>
               </a:lnSpc>
               <a:spcBef>
                 <a:spcPts val="0"/>
@@ -5633,20 +5686,20 @@
               </a:spcAft>
             </a:pPr>
             <a:r>
-              <a:rPr sz="1500" b="1">
-                <a:solidFill>
-                  <a:srgbClr val="2A554A"/>
-                </a:solidFill>
-                <a:latin typeface="Calibri"/>
-                <a:rFonts ascii="Calibri" hAnsi="Calibri" cs="Calibri"/>
-              </a:rPr>
-              <a:t>Готов обсудить</a:t>
-            </a:r>
-          </a:p>
-          <a:p>
-            <a:pPr>
-              <a:lnSpc>
-                <a:spcPct val="115000"/>
+              <a:rPr sz="1600" b="0">
+                <a:solidFill>
+                  <a:srgbClr val="1A1A1A"/>
+                </a:solidFill>
+                <a:latin typeface="Golos Text"/>
+                <a:rFonts ascii="Golos Text" hAnsi="Golos Text" cs="Golos Text" eastAsia="Golos Text"/>
+              </a:rPr>
+              <a:t>3) Как вести продажи, чтобы Natural не ушёл в эконом Hotel Line</a:t>
+            </a:r>
+          </a:p>
+          <a:p>
+            <a:pPr algn="l">
+              <a:lnSpc>
+                <a:spcPct val="118000"/>
               </a:lnSpc>
               <a:spcBef>
                 <a:spcPts val="0"/>
@@ -5656,81 +5709,12 @@
               </a:spcAft>
             </a:pPr>
             <a:r>
-              <a:rPr sz="1600" b="0">
+              <a:rPr sz="1600" b="1">
                 <a:solidFill>
                   <a:srgbClr val="1A1A1A"/>
                 </a:solidFill>
-                <a:latin typeface="Calibri"/>
-                <a:rFonts ascii="Calibri" hAnsi="Calibri" cs="Calibri"/>
-              </a:rPr>
-              <a:t>1) Приоритет блокеров этапа 2 с технологом</a:t>
-            </a:r>
-          </a:p>
-          <a:p>
-            <a:pPr>
-              <a:lnSpc>
-                <a:spcPct val="115000"/>
-              </a:lnSpc>
-              <a:spcBef>
-                <a:spcPts val="0"/>
-              </a:spcBef>
-              <a:spcAft>
-                <a:spcPts val="800"/>
-              </a:spcAft>
-            </a:pPr>
-            <a:r>
-              <a:rPr sz="1600" b="0">
-                <a:solidFill>
-                  <a:srgbClr val="1A1A1A"/>
-                </a:solidFill>
-                <a:latin typeface="Calibri"/>
-                <a:rFonts ascii="Calibri" hAnsi="Calibri" cs="Calibri"/>
-              </a:rPr>
-              <a:t>2) Пилотный сегмент eco / wellness</a:t>
-            </a:r>
-          </a:p>
-          <a:p>
-            <a:pPr>
-              <a:lnSpc>
-                <a:spcPct val="115000"/>
-              </a:lnSpc>
-              <a:spcBef>
-                <a:spcPts val="0"/>
-              </a:spcBef>
-              <a:spcAft>
-                <a:spcPts val="1400"/>
-              </a:spcAft>
-            </a:pPr>
-            <a:r>
-              <a:rPr sz="1600" b="0">
-                <a:solidFill>
-                  <a:srgbClr val="1A1A1A"/>
-                </a:solidFill>
-                <a:latin typeface="Calibri"/>
-                <a:rFonts ascii="Calibri" hAnsi="Calibri" cs="Calibri"/>
-              </a:rPr>
-              <a:t>3) Как вести продажи, чтобы Natural не ушёл в эконом Hotel Line</a:t>
-            </a:r>
-          </a:p>
-          <a:p>
-            <a:pPr>
-              <a:lnSpc>
-                <a:spcPct val="115000"/>
-              </a:lnSpc>
-              <a:spcBef>
-                <a:spcPts val="0"/>
-              </a:spcBef>
-              <a:spcAft>
-                <a:spcPts val="800"/>
-              </a:spcAft>
-            </a:pPr>
-            <a:r>
-              <a:rPr sz="1600" b="1">
-                <a:solidFill>
-                  <a:srgbClr val="1A1A1A"/>
-                </a:solidFill>
-                <a:latin typeface="Calibri"/>
-                <a:rFonts ascii="Calibri" hAnsi="Calibri" cs="Calibri"/>
+                <a:latin typeface="Manrope"/>
+                <a:rFonts ascii="Manrope" hAnsi="Manrope" cs="Manrope" eastAsia="Manrope"/>
               </a:rPr>
               <a:t>Спасибо. Вопросы.</a:t>
             </a:r>
@@ -5868,8 +5852,8 @@
                 <a:solidFill>
                   <a:srgbClr val="2A554A"/>
                 </a:solidFill>
-                <a:latin typeface="Calibri"/>
-                <a:rFonts ascii="Calibri" hAnsi="Calibri" cs="Calibri"/>
+                <a:latin typeface="Manrope"/>
+                <a:rFonts ascii="Manrope" hAnsi="Manrope" cs="Manrope" eastAsia="Manrope"/>
               </a:rPr>
               <a:t>Как понял роль</a:t>
             </a:r>
@@ -5989,10 +5973,10 @@
                 <a:solidFill>
                   <a:srgbClr val="5C5C5C"/>
                 </a:solidFill>
-                <a:latin typeface="Calibri"/>
-                <a:rFonts ascii="Calibri" hAnsi="Calibri" cs="Calibri"/>
-              </a:rPr>
-              <a:t>Travel+ Natural  ·  пульт v1.14  ·  собеседование  ·  не оферта</a:t>
+                <a:latin typeface="Golos Text"/>
+                <a:rFonts ascii="Golos Text" hAnsi="Golos Text" cs="Golos Text" eastAsia="Golos Text"/>
+              </a:rPr>
+              <a:t>Travel+ Natural  ·  образец презентации</a:t>
             </a:r>
           </a:p>
         </p:txBody>
@@ -6025,8 +6009,8 @@
                 <a:solidFill>
                   <a:srgbClr val="5C5C5C"/>
                 </a:solidFill>
-                <a:latin typeface="Calibri"/>
-                <a:rFonts ascii="Calibri" hAnsi="Calibri" cs="Calibri"/>
+                <a:latin typeface="Golos Text"/>
+                <a:rFonts ascii="Golos Text" hAnsi="Golos Text" cs="Golos Text" eastAsia="Golos Text"/>
               </a:rPr>
               <a:t>2 / 12</a:t>
             </a:r>
@@ -6089,7 +6073,7 @@
         <p:spPr>
           <a:xfrm>
             <a:off x="457200" y="960120"/>
-            <a:ext cx="5510631" cy="73152"/>
+            <a:ext cx="5510631" cy="82296"/>
           </a:xfrm>
           <a:prstGeom prst="rect">
             <a:avLst/>
@@ -6179,7 +6163,7 @@
         <p:spPr>
           <a:xfrm>
             <a:off x="6223863" y="960120"/>
-            <a:ext cx="5510631" cy="73152"/>
+            <a:ext cx="5510631" cy="82296"/>
           </a:xfrm>
           <a:prstGeom prst="rect">
             <a:avLst/>
@@ -6221,8 +6205,8 @@
         </p:nvSpPr>
         <p:spPr>
           <a:xfrm>
-            <a:off x="749808" y="1216152"/>
-            <a:ext cx="4925415" cy="4663440"/>
+            <a:off x="804672" y="1426464"/>
+            <a:ext cx="4815687" cy="4334256"/>
           </a:xfrm>
           <a:prstGeom prst="rect">
             <a:avLst/>
@@ -6230,14 +6214,104 @@
           <a:noFill/>
         </p:spPr>
         <p:txBody>
-          <a:bodyPr wrap="square">
-            <a:spAutoFit/>
-          </a:bodyPr>
-          <a:lstStyle/>
-          <a:p>
-            <a:pPr>
-              <a:lnSpc>
-                <a:spcPct val="115000"/>
+          <a:bodyPr wrap="square" anchor="t" lIns="50800" rIns="50800" tIns="25400" bIns="25400"/>
+          <a:lstStyle/>
+          <a:p>
+            <a:pPr algn="l">
+              <a:lnSpc>
+                <a:spcPct val="118000"/>
+              </a:lnSpc>
+              <a:spcBef>
+                <a:spcPts val="0"/>
+              </a:spcBef>
+              <a:spcAft>
+                <a:spcPts val="1200"/>
+              </a:spcAft>
+            </a:pPr>
+            <a:r>
+              <a:rPr sz="1500" b="1">
+                <a:solidFill>
+                  <a:srgbClr val="2A554A"/>
+                </a:solidFill>
+                <a:latin typeface="Manrope"/>
+                <a:rFonts ascii="Manrope" hAnsi="Manrope" cs="Manrope" eastAsia="Manrope"/>
+              </a:rPr>
+              <a:t>Travel+</a:t>
+            </a:r>
+          </a:p>
+          <a:p>
+            <a:pPr algn="l">
+              <a:lnSpc>
+                <a:spcPct val="118000"/>
+              </a:lnSpc>
+              <a:spcBef>
+                <a:spcPts val="0"/>
+              </a:spcBef>
+              <a:spcAft>
+                <a:spcPts val="800"/>
+              </a:spcAft>
+            </a:pPr>
+            <a:r>
+              <a:rPr sz="1600" b="0">
+                <a:solidFill>
+                  <a:srgbClr val="1A1A1A"/>
+                </a:solidFill>
+                <a:latin typeface="Golos Text"/>
+                <a:rFonts ascii="Golos Text" hAnsi="Golos Text" cs="Golos Text" eastAsia="Golos Text"/>
+              </a:rPr>
+              <a:t>Производство и one-stop на номер:</a:t>
+            </a:r>
+          </a:p>
+          <a:p>
+            <a:pPr algn="l">
+              <a:lnSpc>
+                <a:spcPct val="118000"/>
+              </a:lnSpc>
+              <a:spcBef>
+                <a:spcPts val="0"/>
+              </a:spcBef>
+              <a:spcAft>
+                <a:spcPts val="800"/>
+              </a:spcAft>
+            </a:pPr>
+            <a:r>
+              <a:rPr sz="1600" b="0">
+                <a:solidFill>
+                  <a:srgbClr val="1A1A1A"/>
+                </a:solidFill>
+                <a:latin typeface="Golos Text"/>
+                <a:rFonts ascii="Golos Text" hAnsi="Golos Text" cs="Golos Text" eastAsia="Golos Text"/>
+              </a:rPr>
+              <a:t>• Косметика</a:t>
+            </a:r>
+          </a:p>
+          <a:p>
+            <a:pPr algn="l">
+              <a:lnSpc>
+                <a:spcPct val="118000"/>
+              </a:lnSpc>
+              <a:spcBef>
+                <a:spcPts val="0"/>
+              </a:spcBef>
+              <a:spcAft>
+                <a:spcPts val="800"/>
+              </a:spcAft>
+            </a:pPr>
+            <a:r>
+              <a:rPr sz="1600" b="0">
+                <a:solidFill>
+                  <a:srgbClr val="1A1A1A"/>
+                </a:solidFill>
+                <a:latin typeface="Golos Text"/>
+                <a:rFonts ascii="Golos Text" hAnsi="Golos Text" cs="Golos Text" eastAsia="Golos Text"/>
+              </a:rPr>
+              <a:t>• Тапочки</a:t>
+            </a:r>
+          </a:p>
+          <a:p>
+            <a:pPr algn="l">
+              <a:lnSpc>
+                <a:spcPct val="118000"/>
               </a:lnSpc>
               <a:spcBef>
                 <a:spcPts val="0"/>
@@ -6247,20 +6321,20 @@
               </a:spcAft>
             </a:pPr>
             <a:r>
-              <a:rPr sz="1500" b="1">
-                <a:solidFill>
-                  <a:srgbClr val="2A554A"/>
-                </a:solidFill>
-                <a:latin typeface="Calibri"/>
-                <a:rFonts ascii="Calibri" hAnsi="Calibri" cs="Calibri"/>
-              </a:rPr>
-              <a:t>Travel+</a:t>
-            </a:r>
-          </a:p>
-          <a:p>
-            <a:pPr>
-              <a:lnSpc>
-                <a:spcPct val="115000"/>
+              <a:rPr sz="1600" b="0">
+                <a:solidFill>
+                  <a:srgbClr val="1A1A1A"/>
+                </a:solidFill>
+                <a:latin typeface="Golos Text"/>
+                <a:rFonts ascii="Golos Text" hAnsi="Golos Text" cs="Golos Text" eastAsia="Golos Text"/>
+              </a:rPr>
+              <a:t>• Наборы</a:t>
+            </a:r>
+          </a:p>
+          <a:p>
+            <a:pPr algn="l">
+              <a:lnSpc>
+                <a:spcPct val="118000"/>
               </a:lnSpc>
               <a:spcBef>
                 <a:spcPts val="0"/>
@@ -6270,127 +6344,35 @@
               </a:spcAft>
             </a:pPr>
             <a:r>
+              <a:rPr sz="1600" b="1">
+                <a:solidFill>
+                  <a:srgbClr val="1A1A1A"/>
+                </a:solidFill>
+                <a:latin typeface="Manrope"/>
+                <a:rFonts ascii="Manrope" hAnsi="Manrope" cs="Manrope" eastAsia="Manrope"/>
+              </a:rPr>
+              <a:t>Не IT-roadmap.</a:t>
+            </a:r>
+          </a:p>
+          <a:p>
+            <a:pPr algn="l">
+              <a:lnSpc>
+                <a:spcPct val="118000"/>
+              </a:lnSpc>
+              <a:spcBef>
+                <a:spcPts val="0"/>
+              </a:spcBef>
+              <a:spcAft>
+                <a:spcPts val="800"/>
+              </a:spcAft>
+            </a:pPr>
+            <a:r>
               <a:rPr sz="1600" b="0">
                 <a:solidFill>
                   <a:srgbClr val="1A1A1A"/>
                 </a:solidFill>
-                <a:latin typeface="Calibri"/>
-                <a:rFonts ascii="Calibri" hAnsi="Calibri" cs="Calibri"/>
-              </a:rPr>
-              <a:t>Производство и one-stop на номер:</a:t>
-            </a:r>
-          </a:p>
-          <a:p>
-            <a:pPr>
-              <a:lnSpc>
-                <a:spcPct val="115000"/>
-              </a:lnSpc>
-              <a:spcBef>
-                <a:spcPts val="0"/>
-              </a:spcBef>
-              <a:spcAft>
-                <a:spcPts val="800"/>
-              </a:spcAft>
-            </a:pPr>
-            <a:r>
-              <a:rPr sz="1600" b="0">
-                <a:solidFill>
-                  <a:srgbClr val="1A1A1A"/>
-                </a:solidFill>
-                <a:latin typeface="Calibri"/>
-                <a:rFonts ascii="Calibri" hAnsi="Calibri" cs="Calibri"/>
-              </a:rPr>
-              <a:t>• Косметика</a:t>
-            </a:r>
-          </a:p>
-          <a:p>
-            <a:pPr>
-              <a:lnSpc>
-                <a:spcPct val="115000"/>
-              </a:lnSpc>
-              <a:spcBef>
-                <a:spcPts val="0"/>
-              </a:spcBef>
-              <a:spcAft>
-                <a:spcPts val="800"/>
-              </a:spcAft>
-            </a:pPr>
-            <a:r>
-              <a:rPr sz="1600" b="0">
-                <a:solidFill>
-                  <a:srgbClr val="1A1A1A"/>
-                </a:solidFill>
-                <a:latin typeface="Calibri"/>
-                <a:rFonts ascii="Calibri" hAnsi="Calibri" cs="Calibri"/>
-              </a:rPr>
-              <a:t>• Тапочки</a:t>
-            </a:r>
-          </a:p>
-          <a:p>
-            <a:pPr>
-              <a:lnSpc>
-                <a:spcPct val="115000"/>
-              </a:lnSpc>
-              <a:spcBef>
-                <a:spcPts val="0"/>
-              </a:spcBef>
-              <a:spcAft>
-                <a:spcPts val="1400"/>
-              </a:spcAft>
-            </a:pPr>
-            <a:r>
-              <a:rPr sz="1600" b="0">
-                <a:solidFill>
-                  <a:srgbClr val="1A1A1A"/>
-                </a:solidFill>
-                <a:latin typeface="Calibri"/>
-                <a:rFonts ascii="Calibri" hAnsi="Calibri" cs="Calibri"/>
-              </a:rPr>
-              <a:t>• Наборы</a:t>
-            </a:r>
-          </a:p>
-          <a:p>
-            <a:pPr>
-              <a:lnSpc>
-                <a:spcPct val="115000"/>
-              </a:lnSpc>
-              <a:spcBef>
-                <a:spcPts val="0"/>
-              </a:spcBef>
-              <a:spcAft>
-                <a:spcPts val="800"/>
-              </a:spcAft>
-            </a:pPr>
-            <a:r>
-              <a:rPr sz="1600" b="1">
-                <a:solidFill>
-                  <a:srgbClr val="1A1A1A"/>
-                </a:solidFill>
-                <a:latin typeface="Calibri"/>
-                <a:rFonts ascii="Calibri" hAnsi="Calibri" cs="Calibri"/>
-              </a:rPr>
-              <a:t>Не IT-roadmap.</a:t>
-            </a:r>
-          </a:p>
-          <a:p>
-            <a:pPr>
-              <a:lnSpc>
-                <a:spcPct val="115000"/>
-              </a:lnSpc>
-              <a:spcBef>
-                <a:spcPts val="0"/>
-              </a:spcBef>
-              <a:spcAft>
-                <a:spcPts val="800"/>
-              </a:spcAft>
-            </a:pPr>
-            <a:r>
-              <a:rPr sz="1600" b="0">
-                <a:solidFill>
-                  <a:srgbClr val="1A1A1A"/>
-                </a:solidFill>
-                <a:latin typeface="Calibri"/>
-                <a:rFonts ascii="Calibri" hAnsi="Calibri" cs="Calibri"/>
+                <a:latin typeface="Golos Text"/>
+                <a:rFonts ascii="Golos Text" hAnsi="Golos Text" cs="Golos Text" eastAsia="Golos Text"/>
               </a:rPr>
               <a:t>Товар от идеи до полки и маржи.</a:t>
             </a:r>
@@ -6405,8 +6387,8 @@
         </p:nvSpPr>
         <p:spPr>
           <a:xfrm>
-            <a:off x="6516471" y="1216152"/>
-            <a:ext cx="4925415" cy="4663440"/>
+            <a:off x="6571335" y="1426464"/>
+            <a:ext cx="4815687" cy="4334256"/>
           </a:xfrm>
           <a:prstGeom prst="rect">
             <a:avLst/>
@@ -6414,20 +6396,18 @@
           <a:noFill/>
         </p:spPr>
         <p:txBody>
-          <a:bodyPr wrap="square">
-            <a:spAutoFit/>
-          </a:bodyPr>
-          <a:lstStyle/>
-          <a:p>
-            <a:pPr>
-              <a:lnSpc>
-                <a:spcPct val="115000"/>
-              </a:lnSpc>
-              <a:spcBef>
-                <a:spcPts val="0"/>
-              </a:spcBef>
-              <a:spcAft>
-                <a:spcPts val="1400"/>
+          <a:bodyPr wrap="square" anchor="t" lIns="50800" rIns="50800" tIns="25400" bIns="25400"/>
+          <a:lstStyle/>
+          <a:p>
+            <a:pPr algn="l">
+              <a:lnSpc>
+                <a:spcPct val="118000"/>
+              </a:lnSpc>
+              <a:spcBef>
+                <a:spcPts val="0"/>
+              </a:spcBef>
+              <a:spcAft>
+                <a:spcPts val="1200"/>
               </a:spcAft>
             </a:pPr>
             <a:r>
@@ -6435,16 +6415,16 @@
                 <a:solidFill>
                   <a:srgbClr val="2A554A"/>
                 </a:solidFill>
-                <a:latin typeface="Calibri"/>
-                <a:rFonts ascii="Calibri" hAnsi="Calibri" cs="Calibri"/>
+                <a:latin typeface="Manrope"/>
+                <a:rFonts ascii="Manrope" hAnsi="Manrope" cs="Manrope" eastAsia="Manrope"/>
               </a:rPr>
               <a:t>Роль здесь</a:t>
             </a:r>
           </a:p>
           <a:p>
-            <a:pPr>
-              <a:lnSpc>
-                <a:spcPct val="115000"/>
+            <a:pPr algn="l">
+              <a:lnSpc>
+                <a:spcPct val="118000"/>
               </a:lnSpc>
               <a:spcBef>
                 <a:spcPts val="0"/>
@@ -6458,16 +6438,16 @@
                 <a:solidFill>
                   <a:srgbClr val="1A1A1A"/>
                 </a:solidFill>
-                <a:latin typeface="Calibri"/>
-                <a:rFonts ascii="Calibri" hAnsi="Calibri" cs="Calibri"/>
+                <a:latin typeface="Golos Text"/>
+                <a:rFonts ascii="Golos Text" hAnsi="Golos Text" cs="Golos Text" eastAsia="Golos Text"/>
               </a:rPr>
               <a:t>• Ассортимент и новинки</a:t>
             </a:r>
           </a:p>
           <a:p>
-            <a:pPr>
-              <a:lnSpc>
-                <a:spcPct val="115000"/>
+            <a:pPr algn="l">
+              <a:lnSpc>
+                <a:spcPct val="118000"/>
               </a:lnSpc>
               <a:spcBef>
                 <a:spcPts val="0"/>
@@ -6481,16 +6461,16 @@
                 <a:solidFill>
                   <a:srgbClr val="1A1A1A"/>
                 </a:solidFill>
-                <a:latin typeface="Calibri"/>
-                <a:rFonts ascii="Calibri" hAnsi="Calibri" cs="Calibri"/>
+                <a:latin typeface="Golos Text"/>
+                <a:rFonts ascii="Golos Text" hAnsi="Golos Text" cs="Golos Text" eastAsia="Golos Text"/>
               </a:rPr>
               <a:t>• Позиция линейки в доме брендов</a:t>
             </a:r>
           </a:p>
           <a:p>
-            <a:pPr>
-              <a:lnSpc>
-                <a:spcPct val="115000"/>
+            <a:pPr algn="l">
+              <a:lnSpc>
+                <a:spcPct val="118000"/>
               </a:lnSpc>
               <a:spcBef>
                 <a:spcPts val="0"/>
@@ -6504,16 +6484,16 @@
                 <a:solidFill>
                   <a:srgbClr val="1A1A1A"/>
                 </a:solidFill>
-                <a:latin typeface="Calibri"/>
-                <a:rFonts ascii="Calibri" hAnsi="Calibri" cs="Calibri"/>
+                <a:latin typeface="Golos Text"/>
+                <a:rFonts ascii="Golos Text" hAnsi="Golos Text" cs="Golos Text" eastAsia="Golos Text"/>
               </a:rPr>
               <a:t>• Продукт и доказательства до витрины</a:t>
             </a:r>
           </a:p>
           <a:p>
-            <a:pPr>
-              <a:lnSpc>
-                <a:spcPct val="115000"/>
+            <a:pPr algn="l">
+              <a:lnSpc>
+                <a:spcPct val="118000"/>
               </a:lnSpc>
               <a:spcBef>
                 <a:spcPts val="0"/>
@@ -6527,8 +6507,8 @@
                 <a:solidFill>
                   <a:srgbClr val="1A1A1A"/>
                 </a:solidFill>
-                <a:latin typeface="Calibri"/>
-                <a:rFonts ascii="Calibri" hAnsi="Calibri" cs="Calibri"/>
+                <a:latin typeface="Golos Text"/>
+                <a:rFonts ascii="Golos Text" hAnsi="Golos Text" cs="Golos Text" eastAsia="Golos Text"/>
               </a:rPr>
               <a:t>• Связка: технолог → продажи → экономика → поставка</a:t>
             </a:r>
@@ -6666,8 +6646,8 @@
                 <a:solidFill>
                   <a:srgbClr val="2A554A"/>
                 </a:solidFill>
-                <a:latin typeface="Calibri"/>
-                <a:rFonts ascii="Calibri" hAnsi="Calibri" cs="Calibri"/>
+                <a:latin typeface="Manrope"/>
+                <a:rFonts ascii="Manrope" hAnsi="Manrope" cs="Manrope" eastAsia="Manrope"/>
               </a:rPr>
               <a:t>Дыра на витрине</a:t>
             </a:r>
@@ -6787,10 +6767,10 @@
                 <a:solidFill>
                   <a:srgbClr val="5C5C5C"/>
                 </a:solidFill>
-                <a:latin typeface="Calibri"/>
-                <a:rFonts ascii="Calibri" hAnsi="Calibri" cs="Calibri"/>
-              </a:rPr>
-              <a:t>Travel+ Natural  ·  пульт v1.14  ·  собеседование  ·  не оферта</a:t>
+                <a:latin typeface="Golos Text"/>
+                <a:rFonts ascii="Golos Text" hAnsi="Golos Text" cs="Golos Text" eastAsia="Golos Text"/>
+              </a:rPr>
+              <a:t>Travel+ Natural  ·  образец презентации</a:t>
             </a:r>
           </a:p>
         </p:txBody>
@@ -6823,8 +6803,8 @@
                 <a:solidFill>
                   <a:srgbClr val="5C5C5C"/>
                 </a:solidFill>
-                <a:latin typeface="Calibri"/>
-                <a:rFonts ascii="Calibri" hAnsi="Calibri" cs="Calibri"/>
+                <a:latin typeface="Golos Text"/>
+                <a:rFonts ascii="Golos Text" hAnsi="Golos Text" cs="Golos Text" eastAsia="Golos Text"/>
               </a:rPr>
               <a:t>3 / 12</a:t>
             </a:r>
@@ -6887,7 +6867,7 @@
         <p:spPr>
           <a:xfrm>
             <a:off x="457200" y="960120"/>
-            <a:ext cx="5510631" cy="73152"/>
+            <a:ext cx="5510631" cy="82296"/>
           </a:xfrm>
           <a:prstGeom prst="rect">
             <a:avLst/>
@@ -6977,7 +6957,7 @@
         <p:spPr>
           <a:xfrm>
             <a:off x="6223863" y="960120"/>
-            <a:ext cx="5510631" cy="73152"/>
+            <a:ext cx="5510631" cy="82296"/>
           </a:xfrm>
           <a:prstGeom prst="rect">
             <a:avLst/>
@@ -7019,8 +6999,8 @@
         </p:nvSpPr>
         <p:spPr>
           <a:xfrm>
-            <a:off x="749808" y="1216152"/>
-            <a:ext cx="4925415" cy="4663440"/>
+            <a:off x="804672" y="1426464"/>
+            <a:ext cx="4815687" cy="4334256"/>
           </a:xfrm>
           <a:prstGeom prst="rect">
             <a:avLst/>
@@ -7028,20 +7008,18 @@
           <a:noFill/>
         </p:spPr>
         <p:txBody>
-          <a:bodyPr wrap="square">
-            <a:spAutoFit/>
-          </a:bodyPr>
-          <a:lstStyle/>
-          <a:p>
-            <a:pPr>
-              <a:lnSpc>
-                <a:spcPct val="115000"/>
-              </a:lnSpc>
-              <a:spcBef>
-                <a:spcPts val="0"/>
-              </a:spcBef>
-              <a:spcAft>
-                <a:spcPts val="1400"/>
+          <a:bodyPr wrap="square" anchor="t" lIns="50800" rIns="50800" tIns="25400" bIns="25400"/>
+          <a:lstStyle/>
+          <a:p>
+            <a:pPr algn="l">
+              <a:lnSpc>
+                <a:spcPct val="118000"/>
+              </a:lnSpc>
+              <a:spcBef>
+                <a:spcPts val="0"/>
+              </a:spcBef>
+              <a:spcAft>
+                <a:spcPts val="1200"/>
               </a:spcAft>
             </a:pPr>
             <a:r>
@@ -7049,16 +7027,16 @@
                 <a:solidFill>
                   <a:srgbClr val="2A554A"/>
                 </a:solidFill>
-                <a:latin typeface="Calibri"/>
-                <a:rFonts ascii="Calibri" hAnsi="Calibri" cs="Calibri"/>
+                <a:latin typeface="Manrope"/>
+                <a:rFonts ascii="Manrope" hAnsi="Manrope" cs="Manrope" eastAsia="Manrope"/>
               </a:rPr>
               <a:t>Рынок</a:t>
             </a:r>
           </a:p>
           <a:p>
-            <a:pPr>
-              <a:lnSpc>
-                <a:spcPct val="115000"/>
+            <a:pPr algn="l">
+              <a:lnSpc>
+                <a:spcPct val="118000"/>
               </a:lnSpc>
               <a:spcBef>
                 <a:spcPts val="0"/>
@@ -7072,16 +7050,16 @@
                 <a:solidFill>
                   <a:srgbClr val="1A1A1A"/>
                 </a:solidFill>
-                <a:latin typeface="Calibri"/>
-                <a:rFonts ascii="Calibri" hAnsi="Calibri" cs="Calibri"/>
+                <a:latin typeface="Golos Text"/>
+                <a:rFonts ascii="Golos Text" hAnsi="Golos Text" cs="Golos Text" eastAsia="Golos Text"/>
               </a:rPr>
               <a:t>Конкуренты: ЕТС Natural · MEZO · NS</a:t>
             </a:r>
           </a:p>
           <a:p>
-            <a:pPr>
-              <a:lnSpc>
-                <a:spcPct val="115000"/>
+            <a:pPr algn="l">
+              <a:lnSpc>
+                <a:spcPct val="118000"/>
               </a:lnSpc>
               <a:spcBef>
                 <a:spcPts val="0"/>
@@ -7095,16 +7073,16 @@
                 <a:solidFill>
                   <a:srgbClr val="5C5C5C"/>
                 </a:solidFill>
-                <a:latin typeface="Calibri"/>
-                <a:rFonts ascii="Calibri" hAnsi="Calibri" cs="Calibri"/>
+                <a:latin typeface="Golos Text"/>
+                <a:rFonts ascii="Golos Text" hAnsi="Golos Text" cs="Golos Text" eastAsia="Golos Text"/>
               </a:rPr>
               <a:t>(NS — чужой premium в каталоге)</a:t>
             </a:r>
           </a:p>
           <a:p>
-            <a:pPr>
-              <a:lnSpc>
-                <a:spcPct val="115000"/>
+            <a:pPr algn="l">
+              <a:lnSpc>
+                <a:spcPct val="118000"/>
               </a:lnSpc>
               <a:spcBef>
                 <a:spcPts val="0"/>
@@ -7118,16 +7096,16 @@
                 <a:solidFill>
                   <a:srgbClr val="1A1A1A"/>
                 </a:solidFill>
-                <a:latin typeface="Calibri"/>
-                <a:rFonts ascii="Calibri" hAnsi="Calibri" cs="Calibri"/>
+                <a:latin typeface="Golos Text"/>
+                <a:rFonts ascii="Golos Text" hAnsi="Golos Text" cs="Golos Text" eastAsia="Golos Text"/>
               </a:rPr>
               <a:t>Travel+ силён в масс и среднем.</a:t>
             </a:r>
           </a:p>
           <a:p>
-            <a:pPr>
-              <a:lnSpc>
-                <a:spcPct val="115000"/>
+            <a:pPr algn="l">
+              <a:lnSpc>
+                <a:spcPct val="118000"/>
               </a:lnSpc>
               <a:spcBef>
                 <a:spcPts val="0"/>
@@ -7141,8 +7119,8 @@
                 <a:solidFill>
                   <a:srgbClr val="1A1A1A"/>
                 </a:solidFill>
-                <a:latin typeface="Calibri"/>
-                <a:rFonts ascii="Calibri" hAnsi="Calibri" cs="Calibri"/>
+                <a:latin typeface="Manrope"/>
+                <a:rFonts ascii="Manrope" hAnsi="Manrope" cs="Manrope" eastAsia="Manrope"/>
               </a:rPr>
               <a:t>Слабое место: своя Natural с документами.</a:t>
             </a:r>
@@ -7157,8 +7135,8 @@
         </p:nvSpPr>
         <p:spPr>
           <a:xfrm>
-            <a:off x="6516471" y="1216152"/>
-            <a:ext cx="4925415" cy="4663440"/>
+            <a:off x="6571335" y="1426464"/>
+            <a:ext cx="4815687" cy="4334256"/>
           </a:xfrm>
           <a:prstGeom prst="rect">
             <a:avLst/>
@@ -7166,14 +7144,81 @@
           <a:noFill/>
         </p:spPr>
         <p:txBody>
-          <a:bodyPr wrap="square">
-            <a:spAutoFit/>
-          </a:bodyPr>
-          <a:lstStyle/>
-          <a:p>
-            <a:pPr>
-              <a:lnSpc>
-                <a:spcPct val="115000"/>
+          <a:bodyPr wrap="square" anchor="t" lIns="50800" rIns="50800" tIns="25400" bIns="25400"/>
+          <a:lstStyle/>
+          <a:p>
+            <a:pPr algn="l">
+              <a:lnSpc>
+                <a:spcPct val="118000"/>
+              </a:lnSpc>
+              <a:spcBef>
+                <a:spcPts val="0"/>
+              </a:spcBef>
+              <a:spcAft>
+                <a:spcPts val="1200"/>
+              </a:spcAft>
+            </a:pPr>
+            <a:r>
+              <a:rPr sz="1500" b="1">
+                <a:solidFill>
+                  <a:srgbClr val="2A554A"/>
+                </a:solidFill>
+                <a:latin typeface="Manrope"/>
+                <a:rFonts ascii="Manrope" hAnsi="Manrope" cs="Manrope" eastAsia="Manrope"/>
+              </a:rPr>
+              <a:t>Ориентир цен (не оферта)</a:t>
+            </a:r>
+          </a:p>
+          <a:p>
+            <a:pPr algn="l">
+              <a:lnSpc>
+                <a:spcPct val="118000"/>
+              </a:lnSpc>
+              <a:spcBef>
+                <a:spcPts val="0"/>
+              </a:spcBef>
+              <a:spcAft>
+                <a:spcPts val="800"/>
+              </a:spcAft>
+            </a:pPr>
+            <a:r>
+              <a:rPr sz="1600" b="0">
+                <a:solidFill>
+                  <a:srgbClr val="1A1A1A"/>
+                </a:solidFill>
+                <a:latin typeface="Golos Text"/>
+                <a:rFonts ascii="Golos Text" hAnsi="Golos Text" cs="Golos Text" eastAsia="Golos Text"/>
+              </a:rPr>
+              <a:t>Hotel Line ≈ 12–15 ₽ / 30 мл</a:t>
+            </a:r>
+          </a:p>
+          <a:p>
+            <a:pPr algn="l">
+              <a:lnSpc>
+                <a:spcPct val="118000"/>
+              </a:lnSpc>
+              <a:spcBef>
+                <a:spcPts val="0"/>
+              </a:spcBef>
+              <a:spcAft>
+                <a:spcPts val="800"/>
+              </a:spcAft>
+            </a:pPr>
+            <a:r>
+              <a:rPr sz="1600" b="0">
+                <a:solidFill>
+                  <a:srgbClr val="1A1A1A"/>
+                </a:solidFill>
+                <a:latin typeface="Golos Text"/>
+                <a:rFonts ascii="Golos Text" hAnsi="Golos Text" cs="Golos Text" eastAsia="Golos Text"/>
+              </a:rPr>
+              <a:t>ЕТС Natural ≈ 18 ₽ / 25 мл</a:t>
+            </a:r>
+          </a:p>
+          <a:p>
+            <a:pPr algn="l">
+              <a:lnSpc>
+                <a:spcPct val="118000"/>
               </a:lnSpc>
               <a:spcBef>
                 <a:spcPts val="0"/>
@@ -7183,20 +7228,20 @@
               </a:spcAft>
             </a:pPr>
             <a:r>
-              <a:rPr sz="1500" b="1">
-                <a:solidFill>
-                  <a:srgbClr val="2A554A"/>
-                </a:solidFill>
-                <a:latin typeface="Calibri"/>
-                <a:rFonts ascii="Calibri" hAnsi="Calibri" cs="Calibri"/>
-              </a:rPr>
-              <a:t>Ориентир цен (не оферта)</a:t>
-            </a:r>
-          </a:p>
-          <a:p>
-            <a:pPr>
-              <a:lnSpc>
-                <a:spcPct val="115000"/>
+              <a:rPr sz="1600" b="0">
+                <a:solidFill>
+                  <a:srgbClr val="1A1A1A"/>
+                </a:solidFill>
+                <a:latin typeface="Golos Text"/>
+                <a:rFonts ascii="Golos Text" hAnsi="Golos Text" cs="Golos Text" eastAsia="Golos Text"/>
+              </a:rPr>
+              <a:t>Natura Siberica — выше</a:t>
+            </a:r>
+          </a:p>
+          <a:p>
+            <a:pPr algn="l">
+              <a:lnSpc>
+                <a:spcPct val="118000"/>
               </a:lnSpc>
               <a:spcBef>
                 <a:spcPts val="0"/>
@@ -7206,104 +7251,35 @@
               </a:spcAft>
             </a:pPr>
             <a:r>
+              <a:rPr sz="1600" b="1">
+                <a:solidFill>
+                  <a:srgbClr val="1A1A1A"/>
+                </a:solidFill>
+                <a:latin typeface="Manrope"/>
+                <a:rFonts ascii="Manrope" hAnsi="Manrope" cs="Manrope" eastAsia="Manrope"/>
+              </a:rPr>
+              <a:t>Ставка: между HL и NS</a:t>
+            </a:r>
+          </a:p>
+          <a:p>
+            <a:pPr algn="l">
+              <a:lnSpc>
+                <a:spcPct val="118000"/>
+              </a:lnSpc>
+              <a:spcBef>
+                <a:spcPts val="0"/>
+              </a:spcBef>
+              <a:spcAft>
+                <a:spcPts val="800"/>
+              </a:spcAft>
+            </a:pPr>
+            <a:r>
               <a:rPr sz="1600" b="0">
                 <a:solidFill>
                   <a:srgbClr val="1A1A1A"/>
                 </a:solidFill>
-                <a:latin typeface="Calibri"/>
-                <a:rFonts ascii="Calibri" hAnsi="Calibri" cs="Calibri"/>
-              </a:rPr>
-              <a:t>Hotel Line ≈ 12–15 ₽ / 30 мл</a:t>
-            </a:r>
-          </a:p>
-          <a:p>
-            <a:pPr>
-              <a:lnSpc>
-                <a:spcPct val="115000"/>
-              </a:lnSpc>
-              <a:spcBef>
-                <a:spcPts val="0"/>
-              </a:spcBef>
-              <a:spcAft>
-                <a:spcPts val="800"/>
-              </a:spcAft>
-            </a:pPr>
-            <a:r>
-              <a:rPr sz="1600" b="0">
-                <a:solidFill>
-                  <a:srgbClr val="1A1A1A"/>
-                </a:solidFill>
-                <a:latin typeface="Calibri"/>
-                <a:rFonts ascii="Calibri" hAnsi="Calibri" cs="Calibri"/>
-              </a:rPr>
-              <a:t>ЕТС Natural ≈ 18 ₽ / 25 мл</a:t>
-            </a:r>
-          </a:p>
-          <a:p>
-            <a:pPr>
-              <a:lnSpc>
-                <a:spcPct val="115000"/>
-              </a:lnSpc>
-              <a:spcBef>
-                <a:spcPts val="0"/>
-              </a:spcBef>
-              <a:spcAft>
-                <a:spcPts val="1400"/>
-              </a:spcAft>
-            </a:pPr>
-            <a:r>
-              <a:rPr sz="1600" b="0">
-                <a:solidFill>
-                  <a:srgbClr val="1A1A1A"/>
-                </a:solidFill>
-                <a:latin typeface="Calibri"/>
-                <a:rFonts ascii="Calibri" hAnsi="Calibri" cs="Calibri"/>
-              </a:rPr>
-              <a:t>Natura Siberica — выше</a:t>
-            </a:r>
-          </a:p>
-          <a:p>
-            <a:pPr>
-              <a:lnSpc>
-                <a:spcPct val="115000"/>
-              </a:lnSpc>
-              <a:spcBef>
-                <a:spcPts val="0"/>
-              </a:spcBef>
-              <a:spcAft>
-                <a:spcPts val="800"/>
-              </a:spcAft>
-            </a:pPr>
-            <a:r>
-              <a:rPr sz="1600" b="1">
-                <a:solidFill>
-                  <a:srgbClr val="1A1A1A"/>
-                </a:solidFill>
-                <a:latin typeface="Calibri"/>
-                <a:rFonts ascii="Calibri" hAnsi="Calibri" cs="Calibri"/>
-              </a:rPr>
-              <a:t>Ставка: между HL и NS</a:t>
-            </a:r>
-          </a:p>
-          <a:p>
-            <a:pPr>
-              <a:lnSpc>
-                <a:spcPct val="115000"/>
-              </a:lnSpc>
-              <a:spcBef>
-                <a:spcPts val="0"/>
-              </a:spcBef>
-              <a:spcAft>
-                <a:spcPts val="800"/>
-              </a:spcAft>
-            </a:pPr>
-            <a:r>
-              <a:rPr sz="1600" b="0">
-                <a:solidFill>
-                  <a:srgbClr val="1A1A1A"/>
-                </a:solidFill>
-                <a:latin typeface="Calibri"/>
-                <a:rFonts ascii="Calibri" hAnsi="Calibri" cs="Calibri"/>
+                <a:latin typeface="Golos Text"/>
+                <a:rFonts ascii="Golos Text" hAnsi="Golos Text" cs="Golos Text" eastAsia="Golos Text"/>
               </a:rPr>
               <a:t>Натуральность · документы · один поставщик</a:t>
             </a:r>
@@ -7441,8 +7417,8 @@
                 <a:solidFill>
                   <a:srgbClr val="2A554A"/>
                 </a:solidFill>
-                <a:latin typeface="Calibri"/>
-                <a:rFonts ascii="Calibri" hAnsi="Calibri" cs="Calibri"/>
+                <a:latin typeface="Manrope"/>
+                <a:rFonts ascii="Manrope" hAnsi="Manrope" cs="Manrope" eastAsia="Manrope"/>
               </a:rPr>
               <a:t>Дом линеек</a:t>
             </a:r>
@@ -7562,10 +7538,10 @@
                 <a:solidFill>
                   <a:srgbClr val="5C5C5C"/>
                 </a:solidFill>
-                <a:latin typeface="Calibri"/>
-                <a:rFonts ascii="Calibri" hAnsi="Calibri" cs="Calibri"/>
-              </a:rPr>
-              <a:t>Travel+ Natural  ·  пульт v1.14  ·  собеседование  ·  не оферта</a:t>
+                <a:latin typeface="Golos Text"/>
+                <a:rFonts ascii="Golos Text" hAnsi="Golos Text" cs="Golos Text" eastAsia="Golos Text"/>
+              </a:rPr>
+              <a:t>Travel+ Natural  ·  образец презентации</a:t>
             </a:r>
           </a:p>
         </p:txBody>
@@ -7598,8 +7574,8 @@
                 <a:solidFill>
                   <a:srgbClr val="5C5C5C"/>
                 </a:solidFill>
-                <a:latin typeface="Calibri"/>
-                <a:rFonts ascii="Calibri" hAnsi="Calibri" cs="Calibri"/>
+                <a:latin typeface="Golos Text"/>
+                <a:rFonts ascii="Golos Text" hAnsi="Golos Text" cs="Golos Text" eastAsia="Golos Text"/>
               </a:rPr>
               <a:t>4 / 12</a:t>
             </a:r>
@@ -7662,7 +7638,7 @@
         <p:spPr>
           <a:xfrm>
             <a:off x="457200" y="960120"/>
-            <a:ext cx="5510631" cy="73152"/>
+            <a:ext cx="5510631" cy="82296"/>
           </a:xfrm>
           <a:prstGeom prst="rect">
             <a:avLst/>
@@ -7752,7 +7728,7 @@
         <p:spPr>
           <a:xfrm>
             <a:off x="6223863" y="960120"/>
-            <a:ext cx="5510631" cy="73152"/>
+            <a:ext cx="5510631" cy="82296"/>
           </a:xfrm>
           <a:prstGeom prst="rect">
             <a:avLst/>
@@ -7794,8 +7770,8 @@
         </p:nvSpPr>
         <p:spPr>
           <a:xfrm>
-            <a:off x="749808" y="1216152"/>
-            <a:ext cx="4925415" cy="4663440"/>
+            <a:off x="804672" y="1426464"/>
+            <a:ext cx="4815687" cy="4334256"/>
           </a:xfrm>
           <a:prstGeom prst="rect">
             <a:avLst/>
@@ -7803,20 +7779,18 @@
           <a:noFill/>
         </p:spPr>
         <p:txBody>
-          <a:bodyPr wrap="square">
-            <a:spAutoFit/>
-          </a:bodyPr>
-          <a:lstStyle/>
-          <a:p>
-            <a:pPr>
-              <a:lnSpc>
-                <a:spcPct val="115000"/>
-              </a:lnSpc>
-              <a:spcBef>
-                <a:spcPts val="0"/>
-              </a:spcBef>
-              <a:spcAft>
-                <a:spcPts val="1400"/>
+          <a:bodyPr wrap="square" anchor="t" lIns="50800" rIns="50800" tIns="25400" bIns="25400"/>
+          <a:lstStyle/>
+          <a:p>
+            <a:pPr algn="l">
+              <a:lnSpc>
+                <a:spcPct val="118000"/>
+              </a:lnSpc>
+              <a:spcBef>
+                <a:spcPts val="0"/>
+              </a:spcBef>
+              <a:spcAft>
+                <a:spcPts val="1200"/>
               </a:spcAft>
             </a:pPr>
             <a:r>
@@ -7824,16 +7798,16 @@
                 <a:solidFill>
                   <a:srgbClr val="2A554A"/>
                 </a:solidFill>
-                <a:latin typeface="Calibri"/>
-                <a:rFonts ascii="Calibri" hAnsi="Calibri" cs="Calibri"/>
+                <a:latin typeface="Manrope"/>
+                <a:rFonts ascii="Manrope" hAnsi="Manrope" cs="Manrope" eastAsia="Manrope"/>
               </a:rPr>
               <a:t>Карта</a:t>
             </a:r>
           </a:p>
           <a:p>
-            <a:pPr>
-              <a:lnSpc>
-                <a:spcPct val="115000"/>
+            <a:pPr algn="l">
+              <a:lnSpc>
+                <a:spcPct val="118000"/>
               </a:lnSpc>
               <a:spcBef>
                 <a:spcPts val="0"/>
@@ -7847,16 +7821,16 @@
                 <a:solidFill>
                   <a:srgbClr val="1A1A1A"/>
                 </a:solidFill>
-                <a:latin typeface="Calibri"/>
-                <a:rFonts ascii="Calibri" hAnsi="Calibri" cs="Calibri"/>
+                <a:latin typeface="Golos Text"/>
+                <a:rFonts ascii="Golos Text" hAnsi="Golos Text" cs="Golos Text" eastAsia="Golos Text"/>
               </a:rPr>
               <a:t>Hotel Line → цена</a:t>
             </a:r>
           </a:p>
           <a:p>
-            <a:pPr>
-              <a:lnSpc>
-                <a:spcPct val="115000"/>
+            <a:pPr algn="l">
+              <a:lnSpc>
+                <a:spcPct val="118000"/>
               </a:lnSpc>
               <a:spcBef>
                 <a:spcPts val="0"/>
@@ -7870,16 +7844,16 @@
                 <a:solidFill>
                   <a:srgbClr val="1A1A1A"/>
                 </a:solidFill>
-                <a:latin typeface="Calibri"/>
-                <a:rFonts ascii="Calibri" hAnsi="Calibri" cs="Calibri"/>
+                <a:latin typeface="Golos Text"/>
+                <a:rFonts ascii="Golos Text" hAnsi="Golos Text" cs="Golos Text" eastAsia="Golos Text"/>
               </a:rPr>
               <a:t>Fleur / Aquatique / La Nuit → дизайн и аромат</a:t>
             </a:r>
           </a:p>
           <a:p>
-            <a:pPr>
-              <a:lnSpc>
-                <a:spcPct val="115000"/>
+            <a:pPr algn="l">
+              <a:lnSpc>
+                <a:spcPct val="118000"/>
               </a:lnSpc>
               <a:spcBef>
                 <a:spcPts val="0"/>
@@ -7893,16 +7867,16 @@
                 <a:solidFill>
                   <a:srgbClr val="1A1A1A"/>
                 </a:solidFill>
-                <a:latin typeface="Calibri"/>
-                <a:rFonts ascii="Calibri" hAnsi="Calibri" cs="Calibri"/>
+                <a:latin typeface="Manrope"/>
+                <a:rFonts ascii="Manrope" hAnsi="Manrope" cs="Manrope" eastAsia="Manrope"/>
               </a:rPr>
               <a:t>Natural → натуральность + документы</a:t>
             </a:r>
           </a:p>
           <a:p>
-            <a:pPr>
-              <a:lnSpc>
-                <a:spcPct val="115000"/>
+            <a:pPr algn="l">
+              <a:lnSpc>
+                <a:spcPct val="118000"/>
               </a:lnSpc>
               <a:spcBef>
                 <a:spcPts val="0"/>
@@ -7916,16 +7890,16 @@
                 <a:solidFill>
                   <a:srgbClr val="1A1A1A"/>
                 </a:solidFill>
-                <a:latin typeface="Calibri"/>
-                <a:rFonts ascii="Calibri" hAnsi="Calibri" cs="Calibri"/>
+                <a:latin typeface="Golos Text"/>
+                <a:rFonts ascii="Golos Text" hAnsi="Golos Text" cs="Golos Text" eastAsia="Golos Text"/>
               </a:rPr>
               <a:t>Natura Siberica → чужой premium</a:t>
             </a:r>
           </a:p>
           <a:p>
-            <a:pPr>
-              <a:lnSpc>
-                <a:spcPct val="115000"/>
+            <a:pPr algn="l">
+              <a:lnSpc>
+                <a:spcPct val="118000"/>
               </a:lnSpc>
               <a:spcBef>
                 <a:spcPts val="0"/>
@@ -7939,8 +7913,8 @@
                 <a:solidFill>
                   <a:srgbClr val="1A1A1A"/>
                 </a:solidFill>
-                <a:latin typeface="Calibri"/>
-                <a:rFonts ascii="Calibri" hAnsi="Calibri" cs="Calibri"/>
+                <a:latin typeface="Golos Text"/>
+                <a:rFonts ascii="Golos Text" hAnsi="Golos Text" cs="Golos Text" eastAsia="Golos Text"/>
               </a:rPr>
               <a:t>СТМ (лого отеля) → отдельный проект</a:t>
             </a:r>
@@ -7955,8 +7929,8 @@
         </p:nvSpPr>
         <p:spPr>
           <a:xfrm>
-            <a:off x="6516471" y="1216152"/>
-            <a:ext cx="4925415" cy="4663440"/>
+            <a:off x="6571335" y="1426464"/>
+            <a:ext cx="4815687" cy="4334256"/>
           </a:xfrm>
           <a:prstGeom prst="rect">
             <a:avLst/>
@@ -7964,20 +7938,18 @@
           <a:noFill/>
         </p:spPr>
         <p:txBody>
-          <a:bodyPr wrap="square">
-            <a:spAutoFit/>
-          </a:bodyPr>
-          <a:lstStyle/>
-          <a:p>
-            <a:pPr>
-              <a:lnSpc>
-                <a:spcPct val="115000"/>
-              </a:lnSpc>
-              <a:spcBef>
-                <a:spcPts val="0"/>
-              </a:spcBef>
-              <a:spcAft>
-                <a:spcPts val="1400"/>
+          <a:bodyPr wrap="square" anchor="t" lIns="50800" rIns="50800" tIns="25400" bIns="25400"/>
+          <a:lstStyle/>
+          <a:p>
+            <a:pPr algn="l">
+              <a:lnSpc>
+                <a:spcPct val="118000"/>
+              </a:lnSpc>
+              <a:spcBef>
+                <a:spcPts val="0"/>
+              </a:spcBef>
+              <a:spcAft>
+                <a:spcPts val="1200"/>
               </a:spcAft>
             </a:pPr>
             <a:r>
@@ -7985,16 +7957,16 @@
                 <a:solidFill>
                   <a:srgbClr val="2A554A"/>
                 </a:solidFill>
-                <a:latin typeface="Calibri"/>
-                <a:rFonts ascii="Calibri" hAnsi="Calibri" cs="Calibri"/>
+                <a:latin typeface="Manrope"/>
+                <a:rFonts ascii="Manrope" hAnsi="Manrope" cs="Manrope" eastAsia="Manrope"/>
               </a:rPr>
               <a:t>Мостик для продаж</a:t>
             </a:r>
           </a:p>
           <a:p>
-            <a:pPr>
-              <a:lnSpc>
-                <a:spcPct val="115000"/>
+            <a:pPr algn="l">
+              <a:lnSpc>
+                <a:spcPct val="118000"/>
               </a:lnSpc>
               <a:spcBef>
                 <a:spcPts val="0"/>
@@ -8008,16 +7980,16 @@
                 <a:solidFill>
                   <a:srgbClr val="1A1A1A"/>
                 </a:solidFill>
-                <a:latin typeface="Calibri"/>
-                <a:rFonts ascii="Calibri" hAnsi="Calibri" cs="Calibri"/>
+                <a:latin typeface="Golos Text"/>
+                <a:rFonts ascii="Golos Text" hAnsi="Golos Text" cs="Golos Text" eastAsia="Golos Text"/>
               </a:rPr>
               <a:t>Дизайн и аромат — Fleur.</a:t>
             </a:r>
           </a:p>
           <a:p>
-            <a:pPr>
-              <a:lnSpc>
-                <a:spcPct val="115000"/>
+            <a:pPr algn="l">
+              <a:lnSpc>
+                <a:spcPct val="118000"/>
               </a:lnSpc>
               <a:spcBef>
                 <a:spcPts val="0"/>
@@ -8031,16 +8003,16 @@
                 <a:solidFill>
                   <a:srgbClr val="1A1A1A"/>
                 </a:solidFill>
-                <a:latin typeface="Calibri"/>
-                <a:rFonts ascii="Calibri" hAnsi="Calibri" cs="Calibri"/>
+                <a:latin typeface="Golos Text"/>
+                <a:rFonts ascii="Golos Text" hAnsi="Golos Text" cs="Golos Text" eastAsia="Golos Text"/>
               </a:rPr>
               <a:t>Натуральность и документы — Natural.</a:t>
             </a:r>
           </a:p>
           <a:p>
-            <a:pPr>
-              <a:lnSpc>
-                <a:spcPct val="115000"/>
+            <a:pPr algn="l">
+              <a:lnSpc>
+                <a:spcPct val="118000"/>
               </a:lnSpc>
               <a:spcBef>
                 <a:spcPts val="0"/>
@@ -8054,16 +8026,16 @@
                 <a:solidFill>
                   <a:srgbClr val="1A1A1A"/>
                 </a:solidFill>
-                <a:latin typeface="Calibri"/>
-                <a:rFonts ascii="Calibri" hAnsi="Calibri" cs="Calibri"/>
+                <a:latin typeface="Manrope"/>
+                <a:rFonts ascii="Manrope" hAnsi="Manrope" cs="Manrope" eastAsia="Manrope"/>
               </a:rPr>
               <a:t>Не конкурируют.</a:t>
             </a:r>
           </a:p>
           <a:p>
-            <a:pPr>
-              <a:lnSpc>
-                <a:spcPct val="115000"/>
+            <a:pPr algn="l">
+              <a:lnSpc>
+                <a:spcPct val="118000"/>
               </a:lnSpc>
               <a:spcBef>
                 <a:spcPts val="0"/>
@@ -8077,8 +8049,8 @@
                 <a:solidFill>
                   <a:srgbClr val="1A1A1A"/>
                 </a:solidFill>
-                <a:latin typeface="Calibri"/>
-                <a:rFonts ascii="Calibri" hAnsi="Calibri" cs="Calibri"/>
+                <a:latin typeface="Golos Text"/>
+                <a:rFonts ascii="Golos Text" hAnsi="Golos Text" cs="Golos Text" eastAsia="Golos Text"/>
               </a:rPr>
               <a:t>Могут жить на разных этажах одного объекта.</a:t>
             </a:r>
@@ -8216,8 +8188,8 @@
                 <a:solidFill>
                   <a:srgbClr val="2A554A"/>
                 </a:solidFill>
-                <a:latin typeface="Calibri"/>
-                <a:rFonts ascii="Calibri" hAnsi="Calibri" cs="Calibri"/>
+                <a:latin typeface="Manrope"/>
+                <a:rFonts ascii="Manrope" hAnsi="Manrope" cs="Manrope" eastAsia="Manrope"/>
               </a:rPr>
               <a:t>Обещание + StoryBrand</a:t>
             </a:r>
@@ -8337,10 +8309,10 @@
                 <a:solidFill>
                   <a:srgbClr val="5C5C5C"/>
                 </a:solidFill>
-                <a:latin typeface="Calibri"/>
-                <a:rFonts ascii="Calibri" hAnsi="Calibri" cs="Calibri"/>
-              </a:rPr>
-              <a:t>Travel+ Natural  ·  пульт v1.14  ·  собеседование  ·  не оферта</a:t>
+                <a:latin typeface="Golos Text"/>
+                <a:rFonts ascii="Golos Text" hAnsi="Golos Text" cs="Golos Text" eastAsia="Golos Text"/>
+              </a:rPr>
+              <a:t>Travel+ Natural  ·  образец презентации</a:t>
             </a:r>
           </a:p>
         </p:txBody>
@@ -8373,8 +8345,8 @@
                 <a:solidFill>
                   <a:srgbClr val="5C5C5C"/>
                 </a:solidFill>
-                <a:latin typeface="Calibri"/>
-                <a:rFonts ascii="Calibri" hAnsi="Calibri" cs="Calibri"/>
+                <a:latin typeface="Golos Text"/>
+                <a:rFonts ascii="Golos Text" hAnsi="Golos Text" cs="Golos Text" eastAsia="Golos Text"/>
               </a:rPr>
               <a:t>5 / 12</a:t>
             </a:r>
@@ -8437,7 +8409,7 @@
         <p:spPr>
           <a:xfrm>
             <a:off x="457200" y="960120"/>
-            <a:ext cx="5510631" cy="73152"/>
+            <a:ext cx="5510631" cy="82296"/>
           </a:xfrm>
           <a:prstGeom prst="rect">
             <a:avLst/>
@@ -8527,7 +8499,7 @@
         <p:spPr>
           <a:xfrm>
             <a:off x="6223863" y="960120"/>
-            <a:ext cx="5510631" cy="73152"/>
+            <a:ext cx="5510631" cy="82296"/>
           </a:xfrm>
           <a:prstGeom prst="rect">
             <a:avLst/>
@@ -8569,8 +8541,8 @@
         </p:nvSpPr>
         <p:spPr>
           <a:xfrm>
-            <a:off x="749808" y="1216152"/>
-            <a:ext cx="4925415" cy="4663440"/>
+            <a:off x="804672" y="1426464"/>
+            <a:ext cx="4815687" cy="4334256"/>
           </a:xfrm>
           <a:prstGeom prst="rect">
             <a:avLst/>
@@ -8578,20 +8550,18 @@
           <a:noFill/>
         </p:spPr>
         <p:txBody>
-          <a:bodyPr wrap="square">
-            <a:spAutoFit/>
-          </a:bodyPr>
-          <a:lstStyle/>
-          <a:p>
-            <a:pPr>
-              <a:lnSpc>
-                <a:spcPct val="115000"/>
-              </a:lnSpc>
-              <a:spcBef>
-                <a:spcPts val="0"/>
-              </a:spcBef>
-              <a:spcAft>
-                <a:spcPts val="1400"/>
+          <a:bodyPr wrap="square" anchor="t" lIns="50800" rIns="50800" tIns="25400" bIns="25400"/>
+          <a:lstStyle/>
+          <a:p>
+            <a:pPr algn="l">
+              <a:lnSpc>
+                <a:spcPct val="118000"/>
+              </a:lnSpc>
+              <a:spcBef>
+                <a:spcPts val="0"/>
+              </a:spcBef>
+              <a:spcAft>
+                <a:spcPts val="1200"/>
               </a:spcAft>
             </a:pPr>
             <a:r>
@@ -8599,16 +8569,16 @@
                 <a:solidFill>
                   <a:srgbClr val="2A554A"/>
                 </a:solidFill>
-                <a:latin typeface="Calibri"/>
-                <a:rFonts ascii="Calibri" hAnsi="Calibri" cs="Calibri"/>
+                <a:latin typeface="Manrope"/>
+                <a:rFonts ascii="Manrope" hAnsi="Manrope" cs="Manrope" eastAsia="Manrope"/>
               </a:rPr>
               <a:t>Обещание</a:t>
             </a:r>
           </a:p>
           <a:p>
-            <a:pPr>
-              <a:lnSpc>
-                <a:spcPct val="115000"/>
+            <a:pPr algn="l">
+              <a:lnSpc>
+                <a:spcPct val="118000"/>
               </a:lnSpc>
               <a:spcBef>
                 <a:spcPts val="0"/>
@@ -8622,16 +8592,16 @@
                 <a:solidFill>
                   <a:srgbClr val="1A1A1A"/>
                 </a:solidFill>
-                <a:latin typeface="Calibri"/>
-                <a:rFonts ascii="Calibri" hAnsi="Calibri" cs="Calibri"/>
+                <a:latin typeface="Manrope"/>
+                <a:rFonts ascii="Manrope" hAnsi="Manrope" cs="Manrope" eastAsia="Manrope"/>
               </a:rPr>
               <a:t>Мягкий уход с понятной натуральностью</a:t>
             </a:r>
           </a:p>
           <a:p>
-            <a:pPr>
-              <a:lnSpc>
-                <a:spcPct val="115000"/>
+            <a:pPr algn="l">
+              <a:lnSpc>
+                <a:spcPct val="118000"/>
               </a:lnSpc>
               <a:spcBef>
                 <a:spcPts val="0"/>
@@ -8645,16 +8615,16 @@
                 <a:solidFill>
                   <a:srgbClr val="1A1A1A"/>
                 </a:solidFill>
-                <a:latin typeface="Calibri"/>
-                <a:rFonts ascii="Calibri" hAnsi="Calibri" cs="Calibri"/>
+                <a:latin typeface="Golos Text"/>
+                <a:rFonts ascii="Golos Text" hAnsi="Golos Text" cs="Golos Text" eastAsia="Golos Text"/>
               </a:rPr>
               <a:t>для отеля, которому важны и гость, и документы.</a:t>
             </a:r>
           </a:p>
           <a:p>
-            <a:pPr>
-              <a:lnSpc>
-                <a:spcPct val="115000"/>
+            <a:pPr algn="l">
+              <a:lnSpc>
+                <a:spcPct val="118000"/>
               </a:lnSpc>
               <a:spcBef>
                 <a:spcPts val="0"/>
@@ -8668,16 +8638,16 @@
                 <a:solidFill>
                   <a:srgbClr val="5C5C5C"/>
                 </a:solidFill>
-                <a:latin typeface="Calibri"/>
-                <a:rFonts ascii="Calibri" hAnsi="Calibri" cs="Calibri"/>
+                <a:latin typeface="Golos Text"/>
+                <a:rFonts ascii="Golos Text" hAnsi="Golos Text" cs="Golos Text" eastAsia="Golos Text"/>
               </a:rPr>
               <a:t>Доказательства:</a:t>
             </a:r>
           </a:p>
           <a:p>
-            <a:pPr>
-              <a:lnSpc>
-                <a:spcPct val="115000"/>
+            <a:pPr algn="l">
+              <a:lnSpc>
+                <a:spcPct val="118000"/>
               </a:lnSpc>
               <a:spcBef>
                 <a:spcPts val="0"/>
@@ -8691,16 +8661,16 @@
                 <a:solidFill>
                   <a:srgbClr val="1A1A1A"/>
                 </a:solidFill>
-                <a:latin typeface="Calibri"/>
-                <a:rFonts ascii="Calibri" hAnsi="Calibri" cs="Calibri"/>
+                <a:latin typeface="Golos Text"/>
+                <a:rFonts ascii="Golos Text" hAnsi="Golos Text" cs="Golos Text" eastAsia="Golos Text"/>
               </a:rPr>
               <a:t>• Состав в границах</a:t>
             </a:r>
           </a:p>
           <a:p>
-            <a:pPr>
-              <a:lnSpc>
-                <a:spcPct val="115000"/>
+            <a:pPr algn="l">
+              <a:lnSpc>
+                <a:spcPct val="118000"/>
               </a:lnSpc>
               <a:spcBef>
                 <a:spcPts val="0"/>
@@ -8714,16 +8684,16 @@
                 <a:solidFill>
                   <a:srgbClr val="1A1A1A"/>
                 </a:solidFill>
-                <a:latin typeface="Calibri"/>
-                <a:rFonts ascii="Calibri" hAnsi="Calibri" cs="Calibri"/>
+                <a:latin typeface="Golos Text"/>
+                <a:rFonts ascii="Golos Text" hAnsi="Golos Text" cs="Golos Text" eastAsia="Golos Text"/>
               </a:rPr>
               <a:t>• Пакет документов Travel+</a:t>
             </a:r>
           </a:p>
           <a:p>
-            <a:pPr>
-              <a:lnSpc>
-                <a:spcPct val="115000"/>
+            <a:pPr algn="l">
+              <a:lnSpc>
+                <a:spcPct val="118000"/>
               </a:lnSpc>
               <a:spcBef>
                 <a:spcPts val="0"/>
@@ -8737,16 +8707,16 @@
                 <a:solidFill>
                   <a:srgbClr val="1A1A1A"/>
                 </a:solidFill>
-                <a:latin typeface="Calibri"/>
-                <a:rFonts ascii="Calibri" hAnsi="Calibri" cs="Calibri"/>
+                <a:latin typeface="Golos Text"/>
+                <a:rFonts ascii="Golos Text" hAnsi="Golos Text" cs="Golos Text" eastAsia="Golos Text"/>
               </a:rPr>
               <a:t>• Ощущение в номере</a:t>
             </a:r>
           </a:p>
           <a:p>
-            <a:pPr>
-              <a:lnSpc>
-                <a:spcPct val="115000"/>
+            <a:pPr algn="l">
+              <a:lnSpc>
+                <a:spcPct val="118000"/>
               </a:lnSpc>
               <a:spcBef>
                 <a:spcPts val="0"/>
@@ -8760,16 +8730,16 @@
                 <a:solidFill>
                   <a:srgbClr val="1A1A1A"/>
                 </a:solidFill>
-                <a:latin typeface="Calibri"/>
-                <a:rFonts ascii="Calibri" hAnsi="Calibri" cs="Calibri"/>
+                <a:latin typeface="Golos Text"/>
+                <a:rFonts ascii="Golos Text" hAnsi="Golos Text" cs="Golos Text" eastAsia="Golos Text"/>
               </a:rPr>
               <a:t>• Один поставщик на номер</a:t>
             </a:r>
           </a:p>
           <a:p>
-            <a:pPr>
-              <a:lnSpc>
-                <a:spcPct val="115000"/>
+            <a:pPr algn="l">
+              <a:lnSpc>
+                <a:spcPct val="118000"/>
               </a:lnSpc>
               <a:spcBef>
                 <a:spcPts val="0"/>
@@ -8783,8 +8753,8 @@
                 <a:solidFill>
                   <a:srgbClr val="1A1A1A"/>
                 </a:solidFill>
-                <a:latin typeface="Calibri"/>
-                <a:rFonts ascii="Calibri" hAnsi="Calibri" cs="Calibri"/>
+                <a:latin typeface="Golos Text"/>
+                <a:rFonts ascii="Golos Text" hAnsi="Golos Text" cs="Golos Text" eastAsia="Golos Text"/>
               </a:rPr>
               <a:t>• Блок «простыми словами» на этикетке</a:t>
             </a:r>
@@ -8799,8 +8769,8 @@
         </p:nvSpPr>
         <p:spPr>
           <a:xfrm>
-            <a:off x="6516471" y="1216152"/>
-            <a:ext cx="4925415" cy="4663440"/>
+            <a:off x="6571335" y="1426464"/>
+            <a:ext cx="4815687" cy="4334256"/>
           </a:xfrm>
           <a:prstGeom prst="rect">
             <a:avLst/>
@@ -8808,14 +8778,81 @@
           <a:noFill/>
         </p:spPr>
         <p:txBody>
-          <a:bodyPr wrap="square">
-            <a:spAutoFit/>
-          </a:bodyPr>
-          <a:lstStyle/>
-          <a:p>
-            <a:pPr>
-              <a:lnSpc>
-                <a:spcPct val="115000"/>
+          <a:bodyPr wrap="square" anchor="t" lIns="50800" rIns="50800" tIns="25400" bIns="25400"/>
+          <a:lstStyle/>
+          <a:p>
+            <a:pPr algn="l">
+              <a:lnSpc>
+                <a:spcPct val="118000"/>
+              </a:lnSpc>
+              <a:spcBef>
+                <a:spcPts val="0"/>
+              </a:spcBef>
+              <a:spcAft>
+                <a:spcPts val="1200"/>
+              </a:spcAft>
+            </a:pPr>
+            <a:r>
+              <a:rPr sz="1500" b="1">
+                <a:solidFill>
+                  <a:srgbClr val="2A554A"/>
+                </a:solidFill>
+                <a:latin typeface="Manrope"/>
+                <a:rFonts ascii="Manrope" hAnsi="Manrope" cs="Manrope" eastAsia="Manrope"/>
+              </a:rPr>
+              <a:t>BrandScript</a:t>
+            </a:r>
+          </a:p>
+          <a:p>
+            <a:pPr algn="l">
+              <a:lnSpc>
+                <a:spcPct val="118000"/>
+              </a:lnSpc>
+              <a:spcBef>
+                <a:spcPts val="0"/>
+              </a:spcBef>
+              <a:spcAft>
+                <a:spcPts val="800"/>
+              </a:spcAft>
+            </a:pPr>
+            <a:r>
+              <a:rPr sz="1600" b="0">
+                <a:solidFill>
+                  <a:srgbClr val="1A1A1A"/>
+                </a:solidFill>
+                <a:latin typeface="Golos Text"/>
+                <a:rFonts ascii="Golos Text" hAnsi="Golos Text" cs="Golos Text" eastAsia="Golos Text"/>
+              </a:rPr>
+              <a:t>Герой: закупщик eco / wellness</a:t>
+            </a:r>
+          </a:p>
+          <a:p>
+            <a:pPr algn="l">
+              <a:lnSpc>
+                <a:spcPct val="118000"/>
+              </a:lnSpc>
+              <a:spcBef>
+                <a:spcPts val="0"/>
+              </a:spcBef>
+              <a:spcAft>
+                <a:spcPts val="800"/>
+              </a:spcAft>
+            </a:pPr>
+            <a:r>
+              <a:rPr sz="1600" b="0">
+                <a:solidFill>
+                  <a:srgbClr val="1A1A1A"/>
+                </a:solidFill>
+                <a:latin typeface="Golos Text"/>
+                <a:rFonts ascii="Golos Text" hAnsi="Golos Text" cs="Golos Text" eastAsia="Golos Text"/>
+              </a:rPr>
+              <a:t>Проводник: Travel+ Natural</a:t>
+            </a:r>
+          </a:p>
+          <a:p>
+            <a:pPr algn="l">
+              <a:lnSpc>
+                <a:spcPct val="118000"/>
               </a:lnSpc>
               <a:spcBef>
                 <a:spcPts val="0"/>
@@ -8825,20 +8862,43 @@
               </a:spcAft>
             </a:pPr>
             <a:r>
-              <a:rPr sz="1500" b="1">
-                <a:solidFill>
-                  <a:srgbClr val="2A554A"/>
-                </a:solidFill>
-                <a:latin typeface="Calibri"/>
-                <a:rFonts ascii="Calibri" hAnsi="Calibri" cs="Calibri"/>
-              </a:rPr>
-              <a:t>BrandScript</a:t>
-            </a:r>
-          </a:p>
-          <a:p>
-            <a:pPr>
-              <a:lnSpc>
-                <a:spcPct val="115000"/>
+              <a:rPr sz="1600" b="0">
+                <a:solidFill>
+                  <a:srgbClr val="1A1A1A"/>
+                </a:solidFill>
+                <a:latin typeface="Golos Text"/>
+                <a:rFonts ascii="Golos Text" hAnsi="Golos Text" cs="Golos Text" eastAsia="Golos Text"/>
+              </a:rPr>
+              <a:t>План: сегмент → образец + документы → пилот</a:t>
+            </a:r>
+          </a:p>
+          <a:p>
+            <a:pPr algn="l">
+              <a:lnSpc>
+                <a:spcPct val="118000"/>
+              </a:lnSpc>
+              <a:spcBef>
+                <a:spcPts val="0"/>
+              </a:spcBef>
+              <a:spcAft>
+                <a:spcPts val="600"/>
+              </a:spcAft>
+            </a:pPr>
+            <a:r>
+              <a:rPr sz="1400" b="0">
+                <a:solidFill>
+                  <a:srgbClr val="5C5C5C"/>
+                </a:solidFill>
+                <a:latin typeface="Golos Text"/>
+                <a:rFonts ascii="Golos Text" hAnsi="Golos Text" cs="Golos Text" eastAsia="Golos Text"/>
+              </a:rPr>
+              <a:t>Гость после дороги:</a:t>
+            </a:r>
+          </a:p>
+          <a:p>
+            <a:pPr algn="l">
+              <a:lnSpc>
+                <a:spcPct val="118000"/>
               </a:lnSpc>
               <a:spcBef>
                 <a:spcPts val="0"/>
@@ -8848,127 +8908,35 @@
               </a:spcAft>
             </a:pPr>
             <a:r>
+              <a:rPr sz="1600" b="1">
+                <a:solidFill>
+                  <a:srgbClr val="1A1A1A"/>
+                </a:solidFill>
+                <a:latin typeface="Manrope"/>
+                <a:rFonts ascii="Manrope" hAnsi="Manrope" cs="Manrope" eastAsia="Manrope"/>
+              </a:rPr>
+              <a:t>Мягче, чем ждал.</a:t>
+            </a:r>
+          </a:p>
+          <a:p>
+            <a:pPr algn="l">
+              <a:lnSpc>
+                <a:spcPct val="118000"/>
+              </a:lnSpc>
+              <a:spcBef>
+                <a:spcPts val="0"/>
+              </a:spcBef>
+              <a:spcAft>
+                <a:spcPts val="800"/>
+              </a:spcAft>
+            </a:pPr>
+            <a:r>
               <a:rPr sz="1600" b="0">
                 <a:solidFill>
                   <a:srgbClr val="1A1A1A"/>
                 </a:solidFill>
-                <a:latin typeface="Calibri"/>
-                <a:rFonts ascii="Calibri" hAnsi="Calibri" cs="Calibri"/>
-              </a:rPr>
-              <a:t>Герой: закупщик eco / wellness</a:t>
-            </a:r>
-          </a:p>
-          <a:p>
-            <a:pPr>
-              <a:lnSpc>
-                <a:spcPct val="115000"/>
-              </a:lnSpc>
-              <a:spcBef>
-                <a:spcPts val="0"/>
-              </a:spcBef>
-              <a:spcAft>
-                <a:spcPts val="800"/>
-              </a:spcAft>
-            </a:pPr>
-            <a:r>
-              <a:rPr sz="1600" b="0">
-                <a:solidFill>
-                  <a:srgbClr val="1A1A1A"/>
-                </a:solidFill>
-                <a:latin typeface="Calibri"/>
-                <a:rFonts ascii="Calibri" hAnsi="Calibri" cs="Calibri"/>
-              </a:rPr>
-              <a:t>Проводник: Travel+ Natural</a:t>
-            </a:r>
-          </a:p>
-          <a:p>
-            <a:pPr>
-              <a:lnSpc>
-                <a:spcPct val="115000"/>
-              </a:lnSpc>
-              <a:spcBef>
-                <a:spcPts val="0"/>
-              </a:spcBef>
-              <a:spcAft>
-                <a:spcPts val="1400"/>
-              </a:spcAft>
-            </a:pPr>
-            <a:r>
-              <a:rPr sz="1600" b="0">
-                <a:solidFill>
-                  <a:srgbClr val="1A1A1A"/>
-                </a:solidFill>
-                <a:latin typeface="Calibri"/>
-                <a:rFonts ascii="Calibri" hAnsi="Calibri" cs="Calibri"/>
-              </a:rPr>
-              <a:t>План: сегмент → образец + документы → пилот</a:t>
-            </a:r>
-          </a:p>
-          <a:p>
-            <a:pPr>
-              <a:lnSpc>
-                <a:spcPct val="115000"/>
-              </a:lnSpc>
-              <a:spcBef>
-                <a:spcPts val="0"/>
-              </a:spcBef>
-              <a:spcAft>
-                <a:spcPts val="600"/>
-              </a:spcAft>
-            </a:pPr>
-            <a:r>
-              <a:rPr sz="1400" b="0">
-                <a:solidFill>
-                  <a:srgbClr val="5C5C5C"/>
-                </a:solidFill>
-                <a:latin typeface="Calibri"/>
-                <a:rFonts ascii="Calibri" hAnsi="Calibri" cs="Calibri"/>
-              </a:rPr>
-              <a:t>Гость после дороги:</a:t>
-            </a:r>
-          </a:p>
-          <a:p>
-            <a:pPr>
-              <a:lnSpc>
-                <a:spcPct val="115000"/>
-              </a:lnSpc>
-              <a:spcBef>
-                <a:spcPts val="0"/>
-              </a:spcBef>
-              <a:spcAft>
-                <a:spcPts val="800"/>
-              </a:spcAft>
-            </a:pPr>
-            <a:r>
-              <a:rPr sz="1600" b="1">
-                <a:solidFill>
-                  <a:srgbClr val="1A1A1A"/>
-                </a:solidFill>
-                <a:latin typeface="Calibri"/>
-                <a:rFonts ascii="Calibri" hAnsi="Calibri" cs="Calibri"/>
-              </a:rPr>
-              <a:t>Мягче, чем ждал.</a:t>
-            </a:r>
-          </a:p>
-          <a:p>
-            <a:pPr>
-              <a:lnSpc>
-                <a:spcPct val="115000"/>
-              </a:lnSpc>
-              <a:spcBef>
-                <a:spcPts val="0"/>
-              </a:spcBef>
-              <a:spcAft>
-                <a:spcPts val="800"/>
-              </a:spcAft>
-            </a:pPr>
-            <a:r>
-              <a:rPr sz="1600" b="0">
-                <a:solidFill>
-                  <a:srgbClr val="1A1A1A"/>
-                </a:solidFill>
-                <a:latin typeface="Calibri"/>
-                <a:rFonts ascii="Calibri" hAnsi="Calibri" cs="Calibri"/>
+                <a:latin typeface="Golos Text"/>
+                <a:rFonts ascii="Golos Text" hAnsi="Golos Text" cs="Golos Text" eastAsia="Golos Text"/>
               </a:rPr>
               <a:t>Понятная натуральность без громких обещаний.</a:t>
             </a:r>
@@ -9106,8 +9074,8 @@
                 <a:solidFill>
                   <a:srgbClr val="2A554A"/>
                 </a:solidFill>
-                <a:latin typeface="Calibri"/>
-                <a:rFonts ascii="Calibri" hAnsi="Calibri" cs="Calibri"/>
+                <a:latin typeface="Manrope"/>
+                <a:rFonts ascii="Manrope" hAnsi="Manrope" cs="Manrope" eastAsia="Manrope"/>
               </a:rPr>
               <a:t>Границы до рынка — DoD этапа 2</a:t>
             </a:r>
@@ -9227,10 +9195,10 @@
                 <a:solidFill>
                   <a:srgbClr val="5C5C5C"/>
                 </a:solidFill>
-                <a:latin typeface="Calibri"/>
-                <a:rFonts ascii="Calibri" hAnsi="Calibri" cs="Calibri"/>
-              </a:rPr>
-              <a:t>Travel+ Natural  ·  пульт v1.14  ·  собеседование  ·  не оферта</a:t>
+                <a:latin typeface="Golos Text"/>
+                <a:rFonts ascii="Golos Text" hAnsi="Golos Text" cs="Golos Text" eastAsia="Golos Text"/>
+              </a:rPr>
+              <a:t>Travel+ Natural  ·  образец презентации</a:t>
             </a:r>
           </a:p>
         </p:txBody>
@@ -9263,8 +9231,8 @@
                 <a:solidFill>
                   <a:srgbClr val="5C5C5C"/>
                 </a:solidFill>
-                <a:latin typeface="Calibri"/>
-                <a:rFonts ascii="Calibri" hAnsi="Calibri" cs="Calibri"/>
+                <a:latin typeface="Golos Text"/>
+                <a:rFonts ascii="Golos Text" hAnsi="Golos Text" cs="Golos Text" eastAsia="Golos Text"/>
               </a:rPr>
               <a:t>6 / 12</a:t>
             </a:r>
@@ -9327,7 +9295,7 @@
         <p:spPr>
           <a:xfrm>
             <a:off x="457200" y="960120"/>
-            <a:ext cx="5510631" cy="73152"/>
+            <a:ext cx="5510631" cy="82296"/>
           </a:xfrm>
           <a:prstGeom prst="rect">
             <a:avLst/>
@@ -9417,7 +9385,7 @@
         <p:spPr>
           <a:xfrm>
             <a:off x="6223863" y="960120"/>
-            <a:ext cx="5510631" cy="73152"/>
+            <a:ext cx="5510631" cy="82296"/>
           </a:xfrm>
           <a:prstGeom prst="rect">
             <a:avLst/>
@@ -9459,8 +9427,8 @@
         </p:nvSpPr>
         <p:spPr>
           <a:xfrm>
-            <a:off x="749808" y="1216152"/>
-            <a:ext cx="4925415" cy="4663440"/>
+            <a:off x="804672" y="1426464"/>
+            <a:ext cx="4815687" cy="4334256"/>
           </a:xfrm>
           <a:prstGeom prst="rect">
             <a:avLst/>
@@ -9468,20 +9436,18 @@
           <a:noFill/>
         </p:spPr>
         <p:txBody>
-          <a:bodyPr wrap="square">
-            <a:spAutoFit/>
-          </a:bodyPr>
-          <a:lstStyle/>
-          <a:p>
-            <a:pPr>
-              <a:lnSpc>
-                <a:spcPct val="115000"/>
-              </a:lnSpc>
-              <a:spcBef>
-                <a:spcPts val="0"/>
-              </a:spcBef>
-              <a:spcAft>
-                <a:spcPts val="1400"/>
+          <a:bodyPr wrap="square" anchor="t" lIns="50800" rIns="50800" tIns="25400" bIns="25400"/>
+          <a:lstStyle/>
+          <a:p>
+            <a:pPr algn="l">
+              <a:lnSpc>
+                <a:spcPct val="118000"/>
+              </a:lnSpc>
+              <a:spcBef>
+                <a:spcPts val="0"/>
+              </a:spcBef>
+              <a:spcAft>
+                <a:spcPts val="1200"/>
               </a:spcAft>
             </a:pPr>
             <a:r>
@@ -9489,16 +9455,16 @@
                 <a:solidFill>
                   <a:srgbClr val="2A554A"/>
                 </a:solidFill>
-                <a:latin typeface="Calibri"/>
-                <a:rFonts ascii="Calibri" hAnsi="Calibri" cs="Calibri"/>
+                <a:latin typeface="Manrope"/>
+                <a:rFonts ascii="Manrope" hAnsi="Manrope" cs="Manrope" eastAsia="Manrope"/>
               </a:rPr>
               <a:t>Пока красное — витрину не открываем</a:t>
             </a:r>
           </a:p>
           <a:p>
-            <a:pPr>
-              <a:lnSpc>
-                <a:spcPct val="115000"/>
+            <a:pPr algn="l">
+              <a:lnSpc>
+                <a:spcPct val="118000"/>
               </a:lnSpc>
               <a:spcBef>
                 <a:spcPts val="0"/>
@@ -9512,16 +9478,16 @@
                 <a:solidFill>
                   <a:srgbClr val="1A1A1A"/>
                 </a:solidFill>
-                <a:latin typeface="Calibri"/>
-                <a:rFonts ascii="Calibri" hAnsi="Calibri" cs="Calibri"/>
+                <a:latin typeface="Golos Text"/>
+                <a:rFonts ascii="Golos Text" hAnsi="Golos Text" cs="Golos Text" eastAsia="Golos Text"/>
               </a:rPr>
               <a:t>□ Метод и % натуральности</a:t>
             </a:r>
           </a:p>
           <a:p>
-            <a:pPr>
-              <a:lnSpc>
-                <a:spcPct val="115000"/>
+            <a:pPr algn="l">
+              <a:lnSpc>
+                <a:spcPct val="118000"/>
               </a:lnSpc>
               <a:spcBef>
                 <a:spcPts val="0"/>
@@ -9535,16 +9501,16 @@
                 <a:solidFill>
                   <a:srgbClr val="1A1A1A"/>
                 </a:solidFill>
-                <a:latin typeface="Calibri"/>
-                <a:rFonts ascii="Calibri" hAnsi="Calibri" cs="Calibri"/>
+                <a:latin typeface="Golos Text"/>
+                <a:rFonts ascii="Golos Text" hAnsi="Golos Text" cs="Golos Text" eastAsia="Golos Text"/>
               </a:rPr>
               <a:t>□ Пакет как у HL / Fleur + лист Natural</a:t>
             </a:r>
           </a:p>
           <a:p>
-            <a:pPr>
-              <a:lnSpc>
-                <a:spcPct val="115000"/>
+            <a:pPr algn="l">
+              <a:lnSpc>
+                <a:spcPct val="118000"/>
               </a:lnSpc>
               <a:spcBef>
                 <a:spcPts val="0"/>
@@ -9558,16 +9524,16 @@
                 <a:solidFill>
                   <a:srgbClr val="1A1A1A"/>
                 </a:solidFill>
-                <a:latin typeface="Calibri"/>
-                <a:rFonts ascii="Calibri" hAnsi="Calibri" cs="Calibri"/>
+                <a:latin typeface="Golos Text"/>
+                <a:rFonts ascii="Golos Text" hAnsi="Golos Text" cs="Golos Text" eastAsia="Golos Text"/>
               </a:rPr>
               <a:t>□ Origin зафиксирован</a:t>
             </a:r>
           </a:p>
           <a:p>
-            <a:pPr>
-              <a:lnSpc>
-                <a:spcPct val="115000"/>
+            <a:pPr algn="l">
+              <a:lnSpc>
+                <a:spcPct val="118000"/>
               </a:lnSpc>
               <a:spcBef>
                 <a:spcPts val="0"/>
@@ -9581,16 +9547,16 @@
                 <a:solidFill>
                   <a:srgbClr val="1A1A1A"/>
                 </a:solidFill>
-                <a:latin typeface="Calibri"/>
-                <a:rFonts ascii="Calibri" hAnsi="Calibri" cs="Calibri"/>
+                <a:latin typeface="Golos Text"/>
+                <a:rFonts ascii="Golos Text" hAnsi="Golos Text" cs="Golos Text" eastAsia="Golos Text"/>
               </a:rPr>
               <a:t>□ Слепой тест запаха с гостями</a:t>
             </a:r>
           </a:p>
           <a:p>
-            <a:pPr>
-              <a:lnSpc>
-                <a:spcPct val="115000"/>
+            <a:pPr algn="l">
+              <a:lnSpc>
+                <a:spcPct val="118000"/>
               </a:lnSpc>
               <a:spcBef>
                 <a:spcPts val="0"/>
@@ -9604,16 +9570,16 @@
                 <a:solidFill>
                   <a:srgbClr val="1A1A1A"/>
                 </a:solidFill>
-                <a:latin typeface="Calibri"/>
-                <a:rFonts ascii="Calibri" hAnsi="Calibri" cs="Calibri"/>
+                <a:latin typeface="Golos Text"/>
+                <a:rFonts ascii="Golos Text" hAnsi="Golos Text" cs="Golos Text" eastAsia="Golos Text"/>
               </a:rPr>
               <a:t>□ Этикетка «простыми словами»</a:t>
             </a:r>
           </a:p>
           <a:p>
-            <a:pPr>
-              <a:lnSpc>
-                <a:spcPct val="115000"/>
+            <a:pPr algn="l">
+              <a:lnSpc>
+                <a:spcPct val="118000"/>
               </a:lnSpc>
               <a:spcBef>
                 <a:spcPts val="0"/>
@@ -9627,16 +9593,16 @@
                 <a:solidFill>
                   <a:srgbClr val="1A1A1A"/>
                 </a:solidFill>
-                <a:latin typeface="Calibri"/>
-                <a:rFonts ascii="Calibri" hAnsi="Calibri" cs="Calibri"/>
+                <a:latin typeface="Golos Text"/>
+                <a:rFonts ascii="Golos Text" hAnsi="Golos Text" cs="Golos Text" eastAsia="Golos Text"/>
               </a:rPr>
               <a:t>□ Себестоимость и коридор цены</a:t>
             </a:r>
           </a:p>
           <a:p>
-            <a:pPr>
-              <a:lnSpc>
-                <a:spcPct val="115000"/>
+            <a:pPr algn="l">
+              <a:lnSpc>
+                <a:spcPct val="118000"/>
               </a:lnSpc>
               <a:spcBef>
                 <a:spcPts val="0"/>
@@ -9650,8 +9616,8 @@
                 <a:solidFill>
                   <a:srgbClr val="1A1A1A"/>
                 </a:solidFill>
-                <a:latin typeface="Calibri"/>
-                <a:rFonts ascii="Calibri" hAnsi="Calibri" cs="Calibri"/>
+                <a:latin typeface="Golos Text"/>
+                <a:rFonts ascii="Golos Text" hAnsi="Golos Text" cs="Golos Text" eastAsia="Golos Text"/>
               </a:rPr>
               <a:t>□ Срок поставки / мин. заказ / брак</a:t>
             </a:r>
@@ -9666,8 +9632,8 @@
         </p:nvSpPr>
         <p:spPr>
           <a:xfrm>
-            <a:off x="6516471" y="1216152"/>
-            <a:ext cx="4925415" cy="4663440"/>
+            <a:off x="6571335" y="1426464"/>
+            <a:ext cx="4815687" cy="4334256"/>
           </a:xfrm>
           <a:prstGeom prst="rect">
             <a:avLst/>
@@ -9675,20 +9641,18 @@
           <a:noFill/>
         </p:spPr>
         <p:txBody>
-          <a:bodyPr wrap="square">
-            <a:spAutoFit/>
-          </a:bodyPr>
-          <a:lstStyle/>
-          <a:p>
-            <a:pPr>
-              <a:lnSpc>
-                <a:spcPct val="115000"/>
-              </a:lnSpc>
-              <a:spcBef>
-                <a:spcPts val="0"/>
-              </a:spcBef>
-              <a:spcAft>
-                <a:spcPts val="1400"/>
+          <a:bodyPr wrap="square" anchor="t" lIns="50800" rIns="50800" tIns="25400" bIns="25400"/>
+          <a:lstStyle/>
+          <a:p>
+            <a:pPr algn="l">
+              <a:lnSpc>
+                <a:spcPct val="118000"/>
+              </a:lnSpc>
+              <a:spcBef>
+                <a:spcPts val="0"/>
+              </a:spcBef>
+              <a:spcAft>
+                <a:spcPts val="1200"/>
               </a:spcAft>
             </a:pPr>
             <a:r>
@@ -9696,16 +9660,16 @@
                 <a:solidFill>
                   <a:srgbClr val="2A554A"/>
                 </a:solidFill>
-                <a:latin typeface="Calibri"/>
-                <a:rFonts ascii="Calibri" hAnsi="Calibri" cs="Calibri"/>
+                <a:latin typeface="Manrope"/>
+                <a:rFonts ascii="Manrope" hAnsi="Manrope" cs="Manrope" eastAsia="Manrope"/>
               </a:rPr>
               <a:t>Правила</a:t>
             </a:r>
           </a:p>
           <a:p>
-            <a:pPr>
-              <a:lnSpc>
-                <a:spcPct val="115000"/>
+            <a:pPr algn="l">
+              <a:lnSpc>
+                <a:spcPct val="118000"/>
               </a:lnSpc>
               <a:spcBef>
                 <a:spcPts val="0"/>
@@ -9719,16 +9683,16 @@
                 <a:solidFill>
                   <a:srgbClr val="1A1A1A"/>
                 </a:solidFill>
-                <a:latin typeface="Calibri"/>
-                <a:rFonts ascii="Calibri" hAnsi="Calibri" cs="Calibri"/>
+                <a:latin typeface="Golos Text"/>
+                <a:rFonts ascii="Golos Text" hAnsi="Golos Text" cs="Golos Text" eastAsia="Golos Text"/>
               </a:rPr>
               <a:t>На старте без COSMOS, если знака нет — честно.</a:t>
             </a:r>
           </a:p>
           <a:p>
-            <a:pPr>
-              <a:lnSpc>
-                <a:spcPct val="115000"/>
+            <a:pPr algn="l">
+              <a:lnSpc>
+                <a:spcPct val="118000"/>
               </a:lnSpc>
               <a:spcBef>
                 <a:spcPts val="0"/>
@@ -9742,16 +9706,16 @@
                 <a:solidFill>
                   <a:srgbClr val="1A1A1A"/>
                 </a:solidFill>
-                <a:latin typeface="Calibri"/>
-                <a:rFonts ascii="Calibri" hAnsi="Calibri" cs="Calibri"/>
+                <a:latin typeface="Manrope"/>
+                <a:rFonts ascii="Manrope" hAnsi="Manrope" cs="Manrope" eastAsia="Manrope"/>
               </a:rPr>
               <a:t>Без DoD — не КП и не live GTM.</a:t>
             </a:r>
           </a:p>
           <a:p>
-            <a:pPr>
-              <a:lnSpc>
-                <a:spcPct val="115000"/>
+            <a:pPr algn="l">
+              <a:lnSpc>
+                <a:spcPct val="118000"/>
               </a:lnSpc>
               <a:spcBef>
                 <a:spcPts val="0"/>
@@ -9765,16 +9729,16 @@
                 <a:solidFill>
                   <a:srgbClr val="1A1A1A"/>
                 </a:solidFill>
-                <a:latin typeface="Calibri"/>
-                <a:rFonts ascii="Calibri" hAnsi="Calibri" cs="Calibri"/>
+                <a:latin typeface="Golos Text"/>
+                <a:rFonts ascii="Golos Text" hAnsi="Golos Text" cs="Golos Text" eastAsia="Golos Text"/>
               </a:rPr>
               <a:t>Этапы 3–6 — учебный сценарий,</a:t>
             </a:r>
           </a:p>
           <a:p>
-            <a:pPr>
-              <a:lnSpc>
-                <a:spcPct val="115000"/>
+            <a:pPr algn="l">
+              <a:lnSpc>
+                <a:spcPct val="118000"/>
               </a:lnSpc>
               <a:spcBef>
                 <a:spcPts val="0"/>
@@ -9788,8 +9752,8 @@
                 <a:solidFill>
                   <a:srgbClr val="1A1A1A"/>
                 </a:solidFill>
-                <a:latin typeface="Calibri"/>
-                <a:rFonts ascii="Calibri" hAnsi="Calibri" cs="Calibri"/>
+                <a:latin typeface="Golos Text"/>
+                <a:rFonts ascii="Golos Text" hAnsi="Golos Text" cs="Golos Text" eastAsia="Golos Text"/>
               </a:rPr>
               <a:t>не факт завода.</a:t>
             </a:r>
@@ -9927,8 +9891,8 @@
                 <a:solidFill>
                   <a:srgbClr val="2A554A"/>
                 </a:solidFill>
-                <a:latin typeface="Calibri"/>
-                <a:rFonts ascii="Calibri" hAnsi="Calibri" cs="Calibri"/>
+                <a:latin typeface="Manrope"/>
+                <a:rFonts ascii="Manrope" hAnsi="Manrope" cs="Manrope" eastAsia="Manrope"/>
               </a:rPr>
               <a:t>Питч закупщику (30 секунд)</a:t>
             </a:r>
@@ -10048,10 +10012,10 @@
                 <a:solidFill>
                   <a:srgbClr val="5C5C5C"/>
                 </a:solidFill>
-                <a:latin typeface="Calibri"/>
-                <a:rFonts ascii="Calibri" hAnsi="Calibri" cs="Calibri"/>
-              </a:rPr>
-              <a:t>Travel+ Natural  ·  пульт v1.14  ·  собеседование  ·  не оферта</a:t>
+                <a:latin typeface="Golos Text"/>
+                <a:rFonts ascii="Golos Text" hAnsi="Golos Text" cs="Golos Text" eastAsia="Golos Text"/>
+              </a:rPr>
+              <a:t>Travel+ Natural  ·  образец презентации</a:t>
             </a:r>
           </a:p>
         </p:txBody>
@@ -10084,8 +10048,8 @@
                 <a:solidFill>
                   <a:srgbClr val="5C5C5C"/>
                 </a:solidFill>
-                <a:latin typeface="Calibri"/>
-                <a:rFonts ascii="Calibri" hAnsi="Calibri" cs="Calibri"/>
+                <a:latin typeface="Golos Text"/>
+                <a:rFonts ascii="Golos Text" hAnsi="Golos Text" cs="Golos Text" eastAsia="Golos Text"/>
               </a:rPr>
               <a:t>7 / 12</a:t>
             </a:r>
@@ -10148,7 +10112,7 @@
         <p:spPr>
           <a:xfrm>
             <a:off x="457200" y="960120"/>
-            <a:ext cx="11277295" cy="73152"/>
+            <a:ext cx="11277295" cy="82296"/>
           </a:xfrm>
           <a:prstGeom prst="rect">
             <a:avLst/>
@@ -10190,8 +10154,8 @@
         </p:nvSpPr>
         <p:spPr>
           <a:xfrm>
-            <a:off x="749808" y="1280160"/>
-            <a:ext cx="10692079" cy="3657600"/>
+            <a:off x="804672" y="1426464"/>
+            <a:ext cx="10582351" cy="3465576"/>
           </a:xfrm>
           <a:prstGeom prst="rect">
             <a:avLst/>
@@ -10199,14 +10163,12 @@
           <a:noFill/>
         </p:spPr>
         <p:txBody>
-          <a:bodyPr wrap="square">
-            <a:spAutoFit/>
-          </a:bodyPr>
-          <a:lstStyle/>
-          <a:p>
-            <a:pPr>
-              <a:lnSpc>
-                <a:spcPct val="115000"/>
+          <a:bodyPr wrap="square" anchor="t" lIns="50800" rIns="50800" tIns="25400" bIns="25400"/>
+          <a:lstStyle/>
+          <a:p>
+            <a:pPr algn="l">
+              <a:lnSpc>
+                <a:spcPct val="118000"/>
               </a:lnSpc>
               <a:spcBef>
                 <a:spcPts val="0"/>
@@ -10220,16 +10182,16 @@
                 <a:solidFill>
                   <a:srgbClr val="1A1A1A"/>
                 </a:solidFill>
-                <a:latin typeface="Calibri"/>
-                <a:rFonts ascii="Calibri" hAnsi="Calibri" cs="Calibri"/>
+                <a:latin typeface="Golos Text"/>
+                <a:rFonts ascii="Golos Text" hAnsi="Golos Text" cs="Golos Text" eastAsia="Golos Text"/>
               </a:rPr>
               <a:t>«Вам нужно выглядеть зеленее — и спокойно пройти и гостя, и документы.</a:t>
             </a:r>
           </a:p>
           <a:p>
-            <a:pPr>
-              <a:lnSpc>
-                <a:spcPct val="115000"/>
+            <a:pPr algn="l">
+              <a:lnSpc>
+                <a:spcPct val="118000"/>
               </a:lnSpc>
               <a:spcBef>
                 <a:spcPts val="0"/>
@@ -10243,16 +10205,16 @@
                 <a:solidFill>
                   <a:srgbClr val="1A1A1A"/>
                 </a:solidFill>
-                <a:latin typeface="Calibri"/>
-                <a:rFonts ascii="Calibri" hAnsi="Calibri" cs="Calibri"/>
+                <a:latin typeface="Golos Text"/>
+                <a:rFonts ascii="Golos Text" hAnsi="Golos Text" cs="Golos Text" eastAsia="Golos Text"/>
               </a:rPr>
               <a:t>Travel+ Natural: пакет документов как у Hotel Line и Fleur</a:t>
             </a:r>
           </a:p>
           <a:p>
-            <a:pPr>
-              <a:lnSpc>
-                <a:spcPct val="115000"/>
+            <a:pPr algn="l">
+              <a:lnSpc>
+                <a:spcPct val="118000"/>
               </a:lnSpc>
               <a:spcBef>
                 <a:spcPts val="0"/>
@@ -10266,16 +10228,16 @@
                 <a:solidFill>
                   <a:srgbClr val="5C5C5C"/>
                 </a:solidFill>
-                <a:latin typeface="Calibri"/>
-                <a:rFonts ascii="Calibri" hAnsi="Calibri" cs="Calibri"/>
+                <a:latin typeface="Golos Text"/>
+                <a:rFonts ascii="Golos Text" hAnsi="Golos Text" cs="Golos Text" eastAsia="Golos Text"/>
               </a:rPr>
               <a:t>(декларация / СГР, INCI, протоколы по запросу),</a:t>
             </a:r>
           </a:p>
           <a:p>
-            <a:pPr>
-              <a:lnSpc>
-                <a:spcPct val="115000"/>
+            <a:pPr algn="l">
+              <a:lnSpc>
+                <a:spcPct val="118000"/>
               </a:lnSpc>
               <a:spcBef>
                 <a:spcPts val="0"/>
@@ -10289,16 +10251,16 @@
                 <a:solidFill>
                   <a:srgbClr val="1A1A1A"/>
                 </a:solidFill>
-                <a:latin typeface="Calibri"/>
-                <a:rFonts ascii="Calibri" hAnsi="Calibri" cs="Calibri"/>
+                <a:latin typeface="Golos Text"/>
+                <a:rFonts ascii="Golos Text" hAnsi="Golos Text" cs="Golos Text" eastAsia="Golos Text"/>
               </a:rPr>
               <a:t>прозрачный состав с блоком «простыми словами», один договор на номер.</a:t>
             </a:r>
           </a:p>
           <a:p>
-            <a:pPr>
-              <a:lnSpc>
-                <a:spcPct val="115000"/>
+            <a:pPr algn="l">
+              <a:lnSpc>
+                <a:spcPct val="118000"/>
               </a:lnSpc>
               <a:spcBef>
                 <a:spcPts val="0"/>
@@ -10312,8 +10274,8 @@
                 <a:solidFill>
                   <a:srgbClr val="1A1A1A"/>
                 </a:solidFill>
-                <a:latin typeface="Calibri"/>
-                <a:rFonts ascii="Calibri" hAnsi="Calibri" cs="Calibri"/>
+                <a:latin typeface="Manrope"/>
+                <a:rFonts ascii="Manrope" hAnsi="Manrope" cs="Manrope" eastAsia="Manrope"/>
               </a:rPr>
               <a:t>Три шага: eco / wellness → образец → пилот.»</a:t>
             </a:r>
@@ -10328,8 +10290,8 @@
         </p:nvSpPr>
         <p:spPr>
           <a:xfrm>
-            <a:off x="457200" y="5394960"/>
-            <a:ext cx="11277295" cy="548640"/>
+            <a:off x="804672" y="5367528"/>
+            <a:ext cx="10582351" cy="502920"/>
           </a:xfrm>
           <a:prstGeom prst="rect">
             <a:avLst/>
@@ -10337,20 +10299,18 @@
           <a:noFill/>
         </p:spPr>
         <p:txBody>
-          <a:bodyPr wrap="square">
-            <a:spAutoFit/>
-          </a:bodyPr>
-          <a:lstStyle/>
-          <a:p>
-            <a:pPr>
-              <a:lnSpc>
-                <a:spcPct val="115000"/>
-              </a:lnSpc>
-              <a:spcBef>
-                <a:spcPts val="0"/>
-              </a:spcBef>
-              <a:spcAft>
-                <a:spcPts val="600"/>
+          <a:bodyPr wrap="square" anchor="t" lIns="50800" rIns="50800" tIns="25400" bIns="25400"/>
+          <a:lstStyle/>
+          <a:p>
+            <a:pPr algn="l">
+              <a:lnSpc>
+                <a:spcPct val="118000"/>
+              </a:lnSpc>
+              <a:spcBef>
+                <a:spcPts val="0"/>
+              </a:spcBef>
+              <a:spcAft>
+                <a:spcPts val="0"/>
               </a:spcAft>
             </a:pPr>
             <a:r>
@@ -10358,8 +10318,8 @@
                 <a:solidFill>
                   <a:srgbClr val="5C5C5C"/>
                 </a:solidFill>
-                <a:latin typeface="Calibri"/>
-                <a:rFonts ascii="Calibri" hAnsi="Calibri" cs="Calibri"/>
+                <a:latin typeface="Golos Text"/>
+                <a:rFonts ascii="Golos Text" hAnsi="Golos Text" cs="Golos Text" eastAsia="Golos Text"/>
               </a:rPr>
               <a:t>Отрицания (COSMOS, origin, цена Hotel Line) — только в возражениях.</a:t>
             </a:r>
@@ -10497,8 +10457,8 @@
                 <a:solidFill>
                   <a:srgbClr val="2A554A"/>
                 </a:solidFill>
-                <a:latin typeface="Calibri"/>
-                <a:rFonts ascii="Calibri" hAnsi="Calibri" cs="Calibri"/>
+                <a:latin typeface="Manrope"/>
+                <a:rFonts ascii="Manrope" hAnsi="Manrope" cs="Manrope" eastAsia="Manrope"/>
               </a:rPr>
               <a:t>Поле: возражения и риски</a:t>
             </a:r>
@@ -10618,10 +10578,10 @@
                 <a:solidFill>
                   <a:srgbClr val="5C5C5C"/>
                 </a:solidFill>
-                <a:latin typeface="Calibri"/>
-                <a:rFonts ascii="Calibri" hAnsi="Calibri" cs="Calibri"/>
-              </a:rPr>
-              <a:t>Travel+ Natural  ·  пульт v1.14  ·  собеседование  ·  не оферта</a:t>
+                <a:latin typeface="Golos Text"/>
+                <a:rFonts ascii="Golos Text" hAnsi="Golos Text" cs="Golos Text" eastAsia="Golos Text"/>
+              </a:rPr>
+              <a:t>Travel+ Natural  ·  образец презентации</a:t>
             </a:r>
           </a:p>
         </p:txBody>
@@ -10654,8 +10614,8 @@
                 <a:solidFill>
                   <a:srgbClr val="5C5C5C"/>
                 </a:solidFill>
-                <a:latin typeface="Calibri"/>
-                <a:rFonts ascii="Calibri" hAnsi="Calibri" cs="Calibri"/>
+                <a:latin typeface="Golos Text"/>
+                <a:rFonts ascii="Golos Text" hAnsi="Golos Text" cs="Golos Text" eastAsia="Golos Text"/>
               </a:rPr>
               <a:t>8 / 12</a:t>
             </a:r>
@@ -10718,7 +10678,7 @@
         <p:spPr>
           <a:xfrm>
             <a:off x="457200" y="960120"/>
-            <a:ext cx="5510631" cy="73152"/>
+            <a:ext cx="5510631" cy="82296"/>
           </a:xfrm>
           <a:prstGeom prst="rect">
             <a:avLst/>
@@ -10808,7 +10768,7 @@
         <p:spPr>
           <a:xfrm>
             <a:off x="6223863" y="960120"/>
-            <a:ext cx="5510631" cy="73152"/>
+            <a:ext cx="5510631" cy="82296"/>
           </a:xfrm>
           <a:prstGeom prst="rect">
             <a:avLst/>
@@ -10850,8 +10810,8 @@
         </p:nvSpPr>
         <p:spPr>
           <a:xfrm>
-            <a:off x="749808" y="1216152"/>
-            <a:ext cx="4925415" cy="4663440"/>
+            <a:off x="804672" y="1426464"/>
+            <a:ext cx="4815687" cy="4334256"/>
           </a:xfrm>
           <a:prstGeom prst="rect">
             <a:avLst/>
@@ -10859,20 +10819,18 @@
           <a:noFill/>
         </p:spPr>
         <p:txBody>
-          <a:bodyPr wrap="square">
-            <a:spAutoFit/>
-          </a:bodyPr>
-          <a:lstStyle/>
-          <a:p>
-            <a:pPr>
-              <a:lnSpc>
-                <a:spcPct val="115000"/>
-              </a:lnSpc>
-              <a:spcBef>
-                <a:spcPts val="0"/>
-              </a:spcBef>
-              <a:spcAft>
-                <a:spcPts val="1400"/>
+          <a:bodyPr wrap="square" anchor="t" lIns="50800" rIns="50800" tIns="25400" bIns="25400"/>
+          <a:lstStyle/>
+          <a:p>
+            <a:pPr algn="l">
+              <a:lnSpc>
+                <a:spcPct val="118000"/>
+              </a:lnSpc>
+              <a:spcBef>
+                <a:spcPts val="0"/>
+              </a:spcBef>
+              <a:spcAft>
+                <a:spcPts val="1200"/>
               </a:spcAft>
             </a:pPr>
             <a:r>
@@ -10880,16 +10838,16 @@
                 <a:solidFill>
                   <a:srgbClr val="2A554A"/>
                 </a:solidFill>
-                <a:latin typeface="Calibri"/>
-                <a:rFonts ascii="Calibri" hAnsi="Calibri" cs="Calibri"/>
+                <a:latin typeface="Manrope"/>
+                <a:rFonts ascii="Manrope" hAnsi="Manrope" cs="Manrope" eastAsia="Manrope"/>
               </a:rPr>
               <a:t>Возражения</a:t>
             </a:r>
           </a:p>
           <a:p>
-            <a:pPr>
-              <a:lnSpc>
-                <a:spcPct val="115000"/>
+            <a:pPr algn="l">
+              <a:lnSpc>
+                <a:spcPct val="118000"/>
               </a:lnSpc>
               <a:spcBef>
                 <a:spcPts val="0"/>
@@ -10903,16 +10861,16 @@
                 <a:solidFill>
                   <a:srgbClr val="1A1A1A"/>
                 </a:solidFill>
-                <a:latin typeface="Calibri"/>
-                <a:rFonts ascii="Calibri" hAnsi="Calibri" cs="Calibri"/>
+                <a:latin typeface="Golos Text"/>
+                <a:rFonts ascii="Golos Text" hAnsi="Golos Text" cs="Golos Text" eastAsia="Golos Text"/>
               </a:rPr>
               <a:t>COSMOS обязателен → Natural в это КП не ставим</a:t>
             </a:r>
           </a:p>
           <a:p>
-            <a:pPr>
-              <a:lnSpc>
-                <a:spcPct val="115000"/>
+            <a:pPr algn="l">
+              <a:lnSpc>
+                <a:spcPct val="118000"/>
               </a:lnSpc>
               <a:spcBef>
                 <a:spcPts val="0"/>
@@ -10926,16 +10884,16 @@
                 <a:solidFill>
                   <a:srgbClr val="1A1A1A"/>
                 </a:solidFill>
-                <a:latin typeface="Calibri"/>
-                <a:rFonts ascii="Calibri" hAnsi="Calibri" cs="Calibri"/>
+                <a:latin typeface="Golos Text"/>
+                <a:rFonts ascii="Golos Text" hAnsi="Golos Text" cs="Golos Text" eastAsia="Golos Text"/>
               </a:rPr>
               <a:t>«Natural по цене Hotel Line» → нет</a:t>
             </a:r>
           </a:p>
           <a:p>
-            <a:pPr>
-              <a:lnSpc>
-                <a:spcPct val="115000"/>
+            <a:pPr algn="l">
+              <a:lnSpc>
+                <a:spcPct val="118000"/>
               </a:lnSpc>
               <a:spcBef>
                 <a:spcPts val="0"/>
@@ -10949,16 +10907,16 @@
                 <a:solidFill>
                   <a:srgbClr val="1A1A1A"/>
                 </a:solidFill>
-                <a:latin typeface="Calibri"/>
-                <a:rFonts ascii="Calibri" hAnsi="Calibri" cs="Calibri"/>
+                <a:latin typeface="Golos Text"/>
+                <a:rFonts ascii="Golos Text" hAnsi="Golos Text" cs="Golos Text" eastAsia="Golos Text"/>
               </a:rPr>
               <a:t>СТМ / лого отеля → отдельный проект</a:t>
             </a:r>
           </a:p>
           <a:p>
-            <a:pPr>
-              <a:lnSpc>
-                <a:spcPct val="115000"/>
+            <a:pPr algn="l">
+              <a:lnSpc>
+                <a:spcPct val="118000"/>
               </a:lnSpc>
               <a:spcBef>
                 <a:spcPts val="0"/>
@@ -10972,8 +10930,8 @@
                 <a:solidFill>
                   <a:srgbClr val="1A1A1A"/>
                 </a:solidFill>
-                <a:latin typeface="Calibri"/>
-                <a:rFonts ascii="Calibri" hAnsi="Calibri" cs="Calibri"/>
+                <a:latin typeface="Golos Text"/>
+                <a:rFonts ascii="Golos Text" hAnsi="Golos Text" cs="Golos Text" eastAsia="Golos Text"/>
               </a:rPr>
               <a:t>«Где произведено?» → только зафиксированный origin</a:t>
             </a:r>
@@ -10988,8 +10946,8 @@
         </p:nvSpPr>
         <p:spPr>
           <a:xfrm>
-            <a:off x="6516471" y="1216152"/>
-            <a:ext cx="4925415" cy="4663440"/>
+            <a:off x="6571335" y="1426464"/>
+            <a:ext cx="4815687" cy="4334256"/>
           </a:xfrm>
           <a:prstGeom prst="rect">
             <a:avLst/>
@@ -10997,20 +10955,18 @@
           <a:noFill/>
         </p:spPr>
         <p:txBody>
-          <a:bodyPr wrap="square">
-            <a:spAutoFit/>
-          </a:bodyPr>
-          <a:lstStyle/>
-          <a:p>
-            <a:pPr>
-              <a:lnSpc>
-                <a:spcPct val="115000"/>
-              </a:lnSpc>
-              <a:spcBef>
-                <a:spcPts val="0"/>
-              </a:spcBef>
-              <a:spcAft>
-                <a:spcPts val="1400"/>
+          <a:bodyPr wrap="square" anchor="t" lIns="50800" rIns="50800" tIns="25400" bIns="25400"/>
+          <a:lstStyle/>
+          <a:p>
+            <a:pPr algn="l">
+              <a:lnSpc>
+                <a:spcPct val="118000"/>
+              </a:lnSpc>
+              <a:spcBef>
+                <a:spcPts val="0"/>
+              </a:spcBef>
+              <a:spcAft>
+                <a:spcPts val="1200"/>
               </a:spcAft>
             </a:pPr>
             <a:r>
@@ -11018,16 +10974,16 @@
                 <a:solidFill>
                   <a:srgbClr val="2A554A"/>
                 </a:solidFill>
-                <a:latin typeface="Calibri"/>
-                <a:rFonts ascii="Calibri" hAnsi="Calibri" cs="Calibri"/>
+                <a:latin typeface="Manrope"/>
+                <a:rFonts ascii="Manrope" hAnsi="Manrope" cs="Manrope" eastAsia="Manrope"/>
               </a:rPr>
               <a:t>Полевая дисциплина</a:t>
             </a:r>
           </a:p>
           <a:p>
-            <a:pPr>
-              <a:lnSpc>
-                <a:spcPct val="115000"/>
+            <a:pPr algn="l">
+              <a:lnSpc>
+                <a:spcPct val="118000"/>
               </a:lnSpc>
               <a:spcBef>
                 <a:spcPts val="0"/>
@@ -11041,16 +10997,16 @@
                 <a:solidFill>
                   <a:srgbClr val="1A1A1A"/>
                 </a:solidFill>
-                <a:latin typeface="Calibri"/>
-                <a:rFonts ascii="Calibri" hAnsi="Calibri" cs="Calibri"/>
+                <a:latin typeface="Golos Text"/>
+                <a:rFonts ascii="Golos Text" hAnsi="Golos Text" cs="Golos Text" eastAsia="Golos Text"/>
               </a:rPr>
               <a:t>Реестр рисков — один лист</a:t>
             </a:r>
           </a:p>
           <a:p>
-            <a:pPr>
-              <a:lnSpc>
-                <a:spcPct val="115000"/>
+            <a:pPr algn="l">
+              <a:lnSpc>
+                <a:spcPct val="118000"/>
               </a:lnSpc>
               <a:spcBef>
                 <a:spcPts val="0"/>
@@ -11064,16 +11020,16 @@
                 <a:solidFill>
                   <a:srgbClr val="5C5C5C"/>
                 </a:solidFill>
-                <a:latin typeface="Calibri"/>
-                <a:rFonts ascii="Calibri" hAnsi="Calibri" cs="Calibri"/>
+                <a:latin typeface="Golos Text"/>
+                <a:rFonts ascii="Golos Text" hAnsi="Golos Text" cs="Golos Text" eastAsia="Golos Text"/>
               </a:rPr>
               <a:t>(14 пунктов в пульте)</a:t>
             </a:r>
           </a:p>
           <a:p>
-            <a:pPr>
-              <a:lnSpc>
-                <a:spcPct val="115000"/>
+            <a:pPr algn="l">
+              <a:lnSpc>
+                <a:spcPct val="118000"/>
               </a:lnSpc>
               <a:spcBef>
                 <a:spcPts val="0"/>
@@ -11087,16 +11043,16 @@
                 <a:solidFill>
                   <a:srgbClr val="1A1A1A"/>
                 </a:solidFill>
-                <a:latin typeface="Calibri"/>
-                <a:rFonts ascii="Calibri" hAnsi="Calibri" cs="Calibri"/>
+                <a:latin typeface="Golos Text"/>
+                <a:rFonts ascii="Golos Text" hAnsi="Golos Text" cs="Golos Text" eastAsia="Golos Text"/>
               </a:rPr>
               <a:t>Сегмент не размываем.</a:t>
             </a:r>
           </a:p>
           <a:p>
-            <a:pPr>
-              <a:lnSpc>
-                <a:spcPct val="115000"/>
+            <a:pPr algn="l">
+              <a:lnSpc>
+                <a:spcPct val="118000"/>
               </a:lnSpc>
               <a:spcBef>
                 <a:spcPts val="0"/>
@@ -11110,8 +11066,8 @@
                 <a:solidFill>
                   <a:srgbClr val="1A1A1A"/>
                 </a:solidFill>
-                <a:latin typeface="Calibri"/>
-                <a:rFonts ascii="Calibri" hAnsi="Calibri" cs="Calibri"/>
+                <a:latin typeface="Manrope"/>
+                <a:rFonts ascii="Manrope" hAnsi="Manrope" cs="Manrope" eastAsia="Manrope"/>
               </a:rPr>
               <a:t>Не продаём Natural в эконом Hotel Line.</a:t>
             </a:r>
@@ -11249,8 +11205,8 @@
                 <a:solidFill>
                   <a:srgbClr val="2A554A"/>
                 </a:solidFill>
-                <a:latin typeface="Calibri"/>
-                <a:rFonts ascii="Calibri" hAnsi="Calibri" cs="Calibri"/>
+                <a:latin typeface="Manrope"/>
+                <a:rFonts ascii="Manrope" hAnsi="Manrope" cs="Manrope" eastAsia="Manrope"/>
               </a:rPr>
               <a:t>Пилот: успех, провал, выход</a:t>
             </a:r>
@@ -11370,10 +11326,10 @@
                 <a:solidFill>
                   <a:srgbClr val="5C5C5C"/>
                 </a:solidFill>
-                <a:latin typeface="Calibri"/>
-                <a:rFonts ascii="Calibri" hAnsi="Calibri" cs="Calibri"/>
-              </a:rPr>
-              <a:t>Travel+ Natural  ·  пульт v1.14  ·  собеседование  ·  не оферта</a:t>
+                <a:latin typeface="Golos Text"/>
+                <a:rFonts ascii="Golos Text" hAnsi="Golos Text" cs="Golos Text" eastAsia="Golos Text"/>
+              </a:rPr>
+              <a:t>Travel+ Natural  ·  образец презентации</a:t>
             </a:r>
           </a:p>
         </p:txBody>
@@ -11406,8 +11362,8 @@
                 <a:solidFill>
                   <a:srgbClr val="5C5C5C"/>
                 </a:solidFill>
-                <a:latin typeface="Calibri"/>
-                <a:rFonts ascii="Calibri" hAnsi="Calibri" cs="Calibri"/>
+                <a:latin typeface="Golos Text"/>
+                <a:rFonts ascii="Golos Text" hAnsi="Golos Text" cs="Golos Text" eastAsia="Golos Text"/>
               </a:rPr>
               <a:t>9 / 12</a:t>
             </a:r>
@@ -11470,7 +11426,7 @@
         <p:spPr>
           <a:xfrm>
             <a:off x="457200" y="960120"/>
-            <a:ext cx="5510631" cy="73152"/>
+            <a:ext cx="5510631" cy="82296"/>
           </a:xfrm>
           <a:prstGeom prst="rect">
             <a:avLst/>
@@ -11560,7 +11516,7 @@
         <p:spPr>
           <a:xfrm>
             <a:off x="6223863" y="960120"/>
-            <a:ext cx="5510631" cy="73152"/>
+            <a:ext cx="5510631" cy="82296"/>
           </a:xfrm>
           <a:prstGeom prst="rect">
             <a:avLst/>
@@ -11602,8 +11558,8 @@
         </p:nvSpPr>
         <p:spPr>
           <a:xfrm>
-            <a:off x="749808" y="1216152"/>
-            <a:ext cx="4925415" cy="4663440"/>
+            <a:off x="804672" y="1426464"/>
+            <a:ext cx="4815687" cy="4334256"/>
           </a:xfrm>
           <a:prstGeom prst="rect">
             <a:avLst/>
@@ -11611,14 +11567,104 @@
           <a:noFill/>
         </p:spPr>
         <p:txBody>
-          <a:bodyPr wrap="square">
-            <a:spAutoFit/>
-          </a:bodyPr>
-          <a:lstStyle/>
-          <a:p>
-            <a:pPr>
-              <a:lnSpc>
-                <a:spcPct val="115000"/>
+          <a:bodyPr wrap="square" anchor="t" lIns="50800" rIns="50800" tIns="25400" bIns="25400"/>
+          <a:lstStyle/>
+          <a:p>
+            <a:pPr algn="l">
+              <a:lnSpc>
+                <a:spcPct val="118000"/>
+              </a:lnSpc>
+              <a:spcBef>
+                <a:spcPts val="0"/>
+              </a:spcBef>
+              <a:spcAft>
+                <a:spcPts val="1200"/>
+              </a:spcAft>
+            </a:pPr>
+            <a:r>
+              <a:rPr sz="1500" b="1">
+                <a:solidFill>
+                  <a:srgbClr val="2A554A"/>
+                </a:solidFill>
+                <a:latin typeface="Manrope"/>
+                <a:rFonts ascii="Manrope" hAnsi="Manrope" cs="Manrope" eastAsia="Manrope"/>
+              </a:rPr>
+              <a:t>Успех (учебный порог)</a:t>
+            </a:r>
+          </a:p>
+          <a:p>
+            <a:pPr algn="l">
+              <a:lnSpc>
+                <a:spcPct val="118000"/>
+              </a:lnSpc>
+              <a:spcBef>
+                <a:spcPts val="0"/>
+              </a:spcBef>
+              <a:spcAft>
+                <a:spcPts val="800"/>
+              </a:spcAft>
+            </a:pPr>
+            <a:r>
+              <a:rPr sz="1600" b="0">
+                <a:solidFill>
+                  <a:srgbClr val="1A1A1A"/>
+                </a:solidFill>
+                <a:latin typeface="Golos Text"/>
+                <a:rFonts ascii="Golos Text" hAnsi="Golos Text" cs="Golos Text" eastAsia="Golos Text"/>
+              </a:rPr>
+              <a:t>• 3 пилотных клиента</a:t>
+            </a:r>
+          </a:p>
+          <a:p>
+            <a:pPr algn="l">
+              <a:lnSpc>
+                <a:spcPct val="118000"/>
+              </a:lnSpc>
+              <a:spcBef>
+                <a:spcPts val="0"/>
+              </a:spcBef>
+              <a:spcAft>
+                <a:spcPts val="800"/>
+              </a:spcAft>
+            </a:pPr>
+            <a:r>
+              <a:rPr sz="1600" b="0">
+                <a:solidFill>
+                  <a:srgbClr val="1A1A1A"/>
+                </a:solidFill>
+                <a:latin typeface="Golos Text"/>
+                <a:rFonts ascii="Golos Text" hAnsi="Golos Text" cs="Golos Text" eastAsia="Golos Text"/>
+              </a:rPr>
+              <a:t>• Повторный заказ у ≥ 2 из 3</a:t>
+            </a:r>
+          </a:p>
+          <a:p>
+            <a:pPr algn="l">
+              <a:lnSpc>
+                <a:spcPct val="118000"/>
+              </a:lnSpc>
+              <a:spcBef>
+                <a:spcPts val="0"/>
+              </a:spcBef>
+              <a:spcAft>
+                <a:spcPts val="1000"/>
+              </a:spcAft>
+            </a:pPr>
+            <a:r>
+              <a:rPr sz="1600" b="0">
+                <a:solidFill>
+                  <a:srgbClr val="1A1A1A"/>
+                </a:solidFill>
+                <a:latin typeface="Golos Text"/>
+                <a:rFonts ascii="Golos Text" hAnsi="Golos Text" cs="Golos Text" eastAsia="Golos Text"/>
+              </a:rPr>
+              <a:t>• Мягкость и ощущение натуральности ≥ 70%</a:t>
+            </a:r>
+          </a:p>
+          <a:p>
+            <a:pPr algn="l">
+              <a:lnSpc>
+                <a:spcPct val="118000"/>
               </a:lnSpc>
               <a:spcBef>
                 <a:spcPts val="0"/>
@@ -11628,112 +11674,20 @@
               </a:spcAft>
             </a:pPr>
             <a:r>
-              <a:rPr sz="1500" b="1">
-                <a:solidFill>
-                  <a:srgbClr val="2A554A"/>
-                </a:solidFill>
-                <a:latin typeface="Calibri"/>
-                <a:rFonts ascii="Calibri" hAnsi="Calibri" cs="Calibri"/>
-              </a:rPr>
-              <a:t>Успех (учебный порог)</a:t>
-            </a:r>
-          </a:p>
-          <a:p>
-            <a:pPr>
-              <a:lnSpc>
-                <a:spcPct val="115000"/>
-              </a:lnSpc>
-              <a:spcBef>
-                <a:spcPts val="0"/>
-              </a:spcBef>
-              <a:spcAft>
-                <a:spcPts val="800"/>
-              </a:spcAft>
-            </a:pPr>
-            <a:r>
-              <a:rPr sz="1600" b="0">
+              <a:rPr sz="1600" b="1">
                 <a:solidFill>
                   <a:srgbClr val="1A1A1A"/>
                 </a:solidFill>
-                <a:latin typeface="Calibri"/>
-                <a:rFonts ascii="Calibri" hAnsi="Calibri" cs="Calibri"/>
-              </a:rPr>
-              <a:t>• 3 пилотных клиента</a:t>
-            </a:r>
-          </a:p>
-          <a:p>
-            <a:pPr>
-              <a:lnSpc>
-                <a:spcPct val="115000"/>
-              </a:lnSpc>
-              <a:spcBef>
-                <a:spcPts val="0"/>
-              </a:spcBef>
-              <a:spcAft>
-                <a:spcPts val="800"/>
-              </a:spcAft>
-            </a:pPr>
-            <a:r>
-              <a:rPr sz="1600" b="0">
-                <a:solidFill>
-                  <a:srgbClr val="1A1A1A"/>
-                </a:solidFill>
-                <a:latin typeface="Calibri"/>
-                <a:rFonts ascii="Calibri" hAnsi="Calibri" cs="Calibri"/>
-              </a:rPr>
-              <a:t>• Повторный заказ у ≥ 2 из 3</a:t>
-            </a:r>
-          </a:p>
-          <a:p>
-            <a:pPr>
-              <a:lnSpc>
-                <a:spcPct val="115000"/>
-              </a:lnSpc>
-              <a:spcBef>
-                <a:spcPts val="0"/>
-              </a:spcBef>
-              <a:spcAft>
-                <a:spcPts val="1000"/>
-              </a:spcAft>
-            </a:pPr>
-            <a:r>
-              <a:rPr sz="1600" b="0">
-                <a:solidFill>
-                  <a:srgbClr val="1A1A1A"/>
-                </a:solidFill>
-                <a:latin typeface="Calibri"/>
-                <a:rFonts ascii="Calibri" hAnsi="Calibri" cs="Calibri"/>
-              </a:rPr>
-              <a:t>• Мягкость и ощущение натуральности ≥ 70%</a:t>
-            </a:r>
-          </a:p>
-          <a:p>
-            <a:pPr>
-              <a:lnSpc>
-                <a:spcPct val="115000"/>
-              </a:lnSpc>
-              <a:spcBef>
-                <a:spcPts val="0"/>
-              </a:spcBef>
-              <a:spcAft>
-                <a:spcPts val="1400"/>
-              </a:spcAft>
-            </a:pPr>
-            <a:r>
-              <a:rPr sz="1600" b="1">
-                <a:solidFill>
-                  <a:srgbClr val="1A1A1A"/>
-                </a:solidFill>
-                <a:latin typeface="Calibri"/>
-                <a:rFonts ascii="Calibri" hAnsi="Calibri" cs="Calibri"/>
+                <a:latin typeface="Manrope"/>
+                <a:rFonts ascii="Manrope" hAnsi="Manrope" cs="Manrope" eastAsia="Manrope"/>
               </a:rPr>
               <a:t>• Natural не ушёл в эконом Hotel Line</a:t>
             </a:r>
           </a:p>
           <a:p>
-            <a:pPr>
-              <a:lnSpc>
-                <a:spcPct val="115000"/>
+            <a:pPr algn="l">
+              <a:lnSpc>
+                <a:spcPct val="118000"/>
               </a:lnSpc>
               <a:spcBef>
                 <a:spcPts val="0"/>
@@ -11747,16 +11701,16 @@
                 <a:solidFill>
                   <a:srgbClr val="5C5C5C"/>
                 </a:solidFill>
-                <a:latin typeface="Calibri"/>
-                <a:rFonts ascii="Calibri" hAnsi="Calibri" cs="Calibri"/>
+                <a:latin typeface="Golos Text"/>
+                <a:rFonts ascii="Golos Text" hAnsi="Golos Text" cs="Golos Text" eastAsia="Golos Text"/>
               </a:rPr>
               <a:t>Цифры сценария — учебный пример,</a:t>
             </a:r>
           </a:p>
           <a:p>
-            <a:pPr>
-              <a:lnSpc>
-                <a:spcPct val="115000"/>
+            <a:pPr algn="l">
+              <a:lnSpc>
+                <a:spcPct val="118000"/>
               </a:lnSpc>
               <a:spcBef>
                 <a:spcPts val="0"/>
@@ -11770,8 +11724,8 @@
                 <a:solidFill>
                   <a:srgbClr val="5C5C5C"/>
                 </a:solidFill>
-                <a:latin typeface="Calibri"/>
-                <a:rFonts ascii="Calibri" hAnsi="Calibri" cs="Calibri"/>
+                <a:latin typeface="Golos Text"/>
+                <a:rFonts ascii="Golos Text" hAnsi="Golos Text" cs="Golos Text" eastAsia="Golos Text"/>
               </a:rPr>
               <a:t>не отчёт завода.</a:t>
             </a:r>
@@ -11786,8 +11740,8 @@
         </p:nvSpPr>
         <p:spPr>
           <a:xfrm>
-            <a:off x="6516471" y="1216152"/>
-            <a:ext cx="4925415" cy="4663440"/>
+            <a:off x="6571335" y="1426464"/>
+            <a:ext cx="4815687" cy="4334256"/>
           </a:xfrm>
           <a:prstGeom prst="rect">
             <a:avLst/>
@@ -11795,20 +11749,18 @@
           <a:noFill/>
         </p:spPr>
         <p:txBody>
-          <a:bodyPr wrap="square">
-            <a:spAutoFit/>
-          </a:bodyPr>
-          <a:lstStyle/>
-          <a:p>
-            <a:pPr>
-              <a:lnSpc>
-                <a:spcPct val="115000"/>
-              </a:lnSpc>
-              <a:spcBef>
-                <a:spcPts val="0"/>
-              </a:spcBef>
-              <a:spcAft>
-                <a:spcPts val="1400"/>
+          <a:bodyPr wrap="square" anchor="t" lIns="50800" rIns="50800" tIns="25400" bIns="25400"/>
+          <a:lstStyle/>
+          <a:p>
+            <a:pPr algn="l">
+              <a:lnSpc>
+                <a:spcPct val="118000"/>
+              </a:lnSpc>
+              <a:spcBef>
+                <a:spcPts val="0"/>
+              </a:spcBef>
+              <a:spcAft>
+                <a:spcPts val="1200"/>
               </a:spcAft>
             </a:pPr>
             <a:r>
@@ -11816,16 +11768,16 @@
                 <a:solidFill>
                   <a:srgbClr val="2A554A"/>
                 </a:solidFill>
-                <a:latin typeface="Calibri"/>
-                <a:rFonts ascii="Calibri" hAnsi="Calibri" cs="Calibri"/>
+                <a:latin typeface="Manrope"/>
+                <a:rFonts ascii="Manrope" hAnsi="Manrope" cs="Manrope" eastAsia="Manrope"/>
               </a:rPr>
               <a:t>Провал и выход</a:t>
             </a:r>
           </a:p>
           <a:p>
-            <a:pPr>
-              <a:lnSpc>
-                <a:spcPct val="115000"/>
+            <a:pPr algn="l">
+              <a:lnSpc>
+                <a:spcPct val="118000"/>
               </a:lnSpc>
               <a:spcBef>
                 <a:spcPts val="0"/>
@@ -11839,16 +11791,16 @@
                 <a:solidFill>
                   <a:srgbClr val="1A1A1A"/>
                 </a:solidFill>
-                <a:latin typeface="Calibri"/>
-                <a:rFonts ascii="Calibri" hAnsi="Calibri" cs="Calibri"/>
+                <a:latin typeface="Golos Text"/>
+                <a:rFonts ascii="Golos Text" hAnsi="Golos Text" cs="Golos Text" eastAsia="Golos Text"/>
               </a:rPr>
               <a:t>Повтор &lt; 2 из 3 или метрики &lt; 60%</a:t>
             </a:r>
           </a:p>
           <a:p>
-            <a:pPr>
-              <a:lnSpc>
-                <a:spcPct val="115000"/>
+            <a:pPr algn="l">
+              <a:lnSpc>
+                <a:spcPct val="118000"/>
               </a:lnSpc>
               <a:spcBef>
                 <a:spcPts val="0"/>
@@ -11862,16 +11814,16 @@
                 <a:solidFill>
                   <a:srgbClr val="1A1A1A"/>
                 </a:solidFill>
-                <a:latin typeface="Calibri"/>
-                <a:rFonts ascii="Calibri" hAnsi="Calibri" cs="Calibri"/>
+                <a:latin typeface="Manrope"/>
+                <a:rFonts ascii="Manrope" hAnsi="Manrope" cs="Manrope" eastAsia="Manrope"/>
               </a:rPr>
               <a:t>→ Останавливаем масштаб</a:t>
             </a:r>
           </a:p>
           <a:p>
-            <a:pPr>
-              <a:lnSpc>
-                <a:spcPct val="115000"/>
+            <a:pPr algn="l">
+              <a:lnSpc>
+                <a:spcPct val="118000"/>
               </a:lnSpc>
               <a:spcBef>
                 <a:spcPts val="0"/>
@@ -11885,16 +11837,16 @@
                 <a:solidFill>
                   <a:srgbClr val="1A1A1A"/>
                 </a:solidFill>
-                <a:latin typeface="Calibri"/>
-                <a:rFonts ascii="Calibri" hAnsi="Calibri" cs="Calibri"/>
+                <a:latin typeface="Golos Text"/>
+                <a:rFonts ascii="Golos Text" hAnsi="Golos Text" cs="Golos Text" eastAsia="Golos Text"/>
               </a:rPr>
               <a:t>Диагноз бренд-менеджера за 2 недели</a:t>
             </a:r>
           </a:p>
           <a:p>
-            <a:pPr>
-              <a:lnSpc>
-                <a:spcPct val="115000"/>
+            <a:pPr algn="l">
+              <a:lnSpc>
+                <a:spcPct val="118000"/>
               </a:lnSpc>
               <a:spcBef>
                 <a:spcPts val="0"/>
@@ -11908,16 +11860,16 @@
                 <a:solidFill>
                   <a:srgbClr val="1A1A1A"/>
                 </a:solidFill>
-                <a:latin typeface="Calibri"/>
-                <a:rFonts ascii="Calibri" hAnsi="Calibri" cs="Calibri"/>
+                <a:latin typeface="Golos Text"/>
+                <a:rFonts ascii="Golos Text" hAnsi="Golos Text" cs="Golos Text" eastAsia="Golos Text"/>
               </a:rPr>
               <a:t>Второй круг снова провален</a:t>
             </a:r>
           </a:p>
           <a:p>
-            <a:pPr>
-              <a:lnSpc>
-                <a:spcPct val="115000"/>
+            <a:pPr algn="l">
+              <a:lnSpc>
+                <a:spcPct val="118000"/>
               </a:lnSpc>
               <a:spcBef>
                 <a:spcPts val="0"/>
@@ -11931,8 +11883,8 @@
                 <a:solidFill>
                   <a:srgbClr val="1A1A1A"/>
                 </a:solidFill>
-                <a:latin typeface="Calibri"/>
-                <a:rFonts ascii="Calibri" hAnsi="Calibri" cs="Calibri"/>
+                <a:latin typeface="Manrope"/>
+                <a:rFonts ascii="Manrope" hAnsi="Manrope" cs="Manrope" eastAsia="Manrope"/>
               </a:rPr>
               <a:t>→ Закрываем линейку</a:t>
             </a:r>

--- a/АК/presentation-travelplus-interview.pptx
+++ b/АК/presentation-travelplus-interview.pptx
@@ -3969,99 +3969,168 @@
                 <a:latin typeface="Manrope"/>
                 <a:rFonts ascii="Manrope" hAnsi="Manrope" cs="Manrope" eastAsia="Manrope"/>
               </a:rPr>
-              <a:t>Экономика</a:t>
-            </a:r>
-          </a:p>
-          <a:p>
-            <a:pPr algn="l">
-              <a:lnSpc>
-                <a:spcPct val="118000"/>
-              </a:lnSpc>
-              <a:spcBef>
-                <a:spcPts val="0"/>
-              </a:spcBef>
-              <a:spcAft>
-                <a:spcPts val="800"/>
-              </a:spcAft>
-            </a:pPr>
-            <a:r>
-              <a:rPr sz="1600" b="0">
+              <a:t>Экономика и цена</a:t>
+            </a:r>
+          </a:p>
+          <a:p>
+            <a:pPr algn="l">
+              <a:lnSpc>
+                <a:spcPct val="118000"/>
+              </a:lnSpc>
+              <a:spcBef>
+                <a:spcPts val="0"/>
+              </a:spcBef>
+              <a:spcAft>
+                <a:spcPts val="600"/>
+              </a:spcAft>
+            </a:pPr>
+            <a:r>
+              <a:rPr sz="1500" b="0">
                 <a:solidFill>
                   <a:srgbClr val="1A1A1A"/>
                 </a:solidFill>
                 <a:latin typeface="Golos Text"/>
                 <a:rFonts ascii="Golos Text" hAnsi="Golos Text" cs="Golos Text" eastAsia="Golos Text"/>
               </a:rPr>
-              <a:t>Прайс — после себестоимости на складе.</a:t>
-            </a:r>
-          </a:p>
-          <a:p>
-            <a:pPr algn="l">
-              <a:lnSpc>
-                <a:spcPct val="118000"/>
-              </a:lnSpc>
-              <a:spcBef>
-                <a:spcPts val="0"/>
-              </a:spcBef>
-              <a:spcAft>
-                <a:spcPts val="1200"/>
-              </a:spcAft>
-            </a:pPr>
-            <a:r>
-              <a:rPr sz="1600" b="0">
+              <a:t>Прайс утверждаем только после себестоимости на складе в Киришах.</a:t>
+            </a:r>
+          </a:p>
+          <a:p>
+            <a:pPr algn="l">
+              <a:lnSpc>
+                <a:spcPct val="118000"/>
+              </a:lnSpc>
+              <a:spcBef>
+                <a:spcPts val="0"/>
+              </a:spcBef>
+              <a:spcAft>
+                <a:spcPts val="400"/>
+              </a:spcAft>
+            </a:pPr>
+            <a:r>
+              <a:rPr sz="1500" b="0">
                 <a:solidFill>
                   <a:srgbClr val="1A1A1A"/>
                 </a:solidFill>
                 <a:latin typeface="Golos Text"/>
                 <a:rFonts ascii="Golos Text" hAnsi="Golos Text" cs="Golos Text" eastAsia="Golos Text"/>
               </a:rPr>
-              <a:t>Ориентир: выше Hotel Line · рядом с ЕТС · ниже NS.</a:t>
-            </a:r>
-          </a:p>
-          <a:p>
-            <a:pPr algn="l">
-              <a:lnSpc>
-                <a:spcPct val="118000"/>
-              </a:lnSpc>
-              <a:spcBef>
-                <a:spcPts val="0"/>
-              </a:spcBef>
-              <a:spcAft>
-                <a:spcPts val="800"/>
-              </a:spcAft>
-            </a:pPr>
-            <a:r>
-              <a:rPr sz="1600" b="1">
+              <a:t>Ориентир по полке:</a:t>
+            </a:r>
+          </a:p>
+          <a:p>
+            <a:pPr algn="l">
+              <a:lnSpc>
+                <a:spcPct val="118000"/>
+              </a:lnSpc>
+              <a:spcBef>
+                <a:spcPts val="0"/>
+              </a:spcBef>
+              <a:spcAft>
+                <a:spcPts val="600"/>
+              </a:spcAft>
+            </a:pPr>
+            <a:r>
+              <a:rPr sz="1500" b="0">
+                <a:solidFill>
+                  <a:srgbClr val="1A1A1A"/>
+                </a:solidFill>
+                <a:latin typeface="Golos Text"/>
+                <a:rFonts ascii="Golos Text" hAnsi="Golos Text" cs="Golos Text" eastAsia="Golos Text"/>
+              </a:rPr>
+              <a:t>• выше Hotel Line</a:t>
+            </a:r>
+          </a:p>
+          <a:p>
+            <a:pPr algn="l">
+              <a:lnSpc>
+                <a:spcPct val="118000"/>
+              </a:lnSpc>
+              <a:spcBef>
+                <a:spcPts val="0"/>
+              </a:spcBef>
+              <a:spcAft>
+                <a:spcPts val="600"/>
+              </a:spcAft>
+            </a:pPr>
+            <a:r>
+              <a:rPr sz="1500" b="0">
+                <a:solidFill>
+                  <a:srgbClr val="1A1A1A"/>
+                </a:solidFill>
+                <a:latin typeface="Golos Text"/>
+                <a:rFonts ascii="Golos Text" hAnsi="Golos Text" cs="Golos Text" eastAsia="Golos Text"/>
+              </a:rPr>
+              <a:t>• рядом с ЕТС Natural</a:t>
+            </a:r>
+          </a:p>
+          <a:p>
+            <a:pPr algn="l">
+              <a:lnSpc>
+                <a:spcPct val="118000"/>
+              </a:lnSpc>
+              <a:spcBef>
+                <a:spcPts val="0"/>
+              </a:spcBef>
+              <a:spcAft>
+                <a:spcPts val="1000"/>
+              </a:spcAft>
+            </a:pPr>
+            <a:r>
+              <a:rPr sz="1500" b="0">
+                <a:solidFill>
+                  <a:srgbClr val="1A1A1A"/>
+                </a:solidFill>
+                <a:latin typeface="Golos Text"/>
+                <a:rFonts ascii="Golos Text" hAnsi="Golos Text" cs="Golos Text" eastAsia="Golos Text"/>
+              </a:rPr>
+              <a:t>• ниже Natura Siberica</a:t>
+            </a:r>
+          </a:p>
+          <a:p>
+            <a:pPr algn="l">
+              <a:lnSpc>
+                <a:spcPct val="118000"/>
+              </a:lnSpc>
+              <a:spcBef>
+                <a:spcPts val="0"/>
+              </a:spcBef>
+              <a:spcAft>
+                <a:spcPts val="400"/>
+              </a:spcAft>
+            </a:pPr>
+            <a:r>
+              <a:rPr sz="1500" b="1">
                 <a:solidFill>
                   <a:srgbClr val="1A1A1A"/>
                 </a:solidFill>
                 <a:latin typeface="Manrope"/>
                 <a:rFonts ascii="Manrope" hAnsi="Manrope" cs="Manrope" eastAsia="Manrope"/>
               </a:rPr>
-              <a:t>Не воюем копейкой.</a:t>
-            </a:r>
-          </a:p>
-          <a:p>
-            <a:pPr algn="l">
-              <a:lnSpc>
-                <a:spcPct val="118000"/>
-              </a:lnSpc>
-              <a:spcBef>
-                <a:spcPts val="0"/>
-              </a:spcBef>
-              <a:spcAft>
-                <a:spcPts val="800"/>
-              </a:spcAft>
-            </a:pPr>
-            <a:r>
-              <a:rPr sz="1600" b="0">
+              <a:t>Не воюем копейкой с ЕТС.</a:t>
+            </a:r>
+          </a:p>
+          <a:p>
+            <a:pPr algn="l">
+              <a:lnSpc>
+                <a:spcPct val="118000"/>
+              </a:lnSpc>
+              <a:spcBef>
+                <a:spcPts val="0"/>
+              </a:spcBef>
+              <a:spcAft>
+                <a:spcPts val="600"/>
+              </a:spcAft>
+            </a:pPr>
+            <a:r>
+              <a:rPr sz="1500" b="0">
                 <a:solidFill>
                   <a:srgbClr val="1A1A1A"/>
                 </a:solidFill>
                 <a:latin typeface="Golos Text"/>
                 <a:rFonts ascii="Golos Text" hAnsi="Golos Text" cs="Golos Text" eastAsia="Golos Text"/>
               </a:rPr>
-              <a:t>Выигрываем пакетом и ощущением.</a:t>
+              <a:t>Выигрываем пакетом документов и ощущением в номере.</a:t>
             </a:r>
           </a:p>
         </p:txBody>
@@ -4105,53 +4174,53 @@
                 <a:latin typeface="Manrope"/>
                 <a:rFonts ascii="Manrope" hAnsi="Manrope" cs="Manrope" eastAsia="Manrope"/>
               </a:rPr>
-              <a:t>Если Китай или гибрид</a:t>
-            </a:r>
-          </a:p>
-          <a:p>
-            <a:pPr algn="l">
-              <a:lnSpc>
-                <a:spcPct val="118000"/>
-              </a:lnSpc>
-              <a:spcBef>
-                <a:spcPts val="0"/>
-              </a:spcBef>
-              <a:spcAft>
-                <a:spcPts val="800"/>
-              </a:spcAft>
-            </a:pPr>
-            <a:r>
-              <a:rPr sz="1600" b="0">
+              <a:t>Если поставка из Китая</a:t>
+            </a:r>
+          </a:p>
+          <a:p>
+            <a:pPr algn="l">
+              <a:lnSpc>
+                <a:spcPct val="118000"/>
+              </a:lnSpc>
+              <a:spcBef>
+                <a:spcPts val="0"/>
+              </a:spcBef>
+              <a:spcAft>
+                <a:spcPts val="600"/>
+              </a:spcAft>
+            </a:pPr>
+            <a:r>
+              <a:rPr sz="1500" b="0">
                 <a:solidFill>
                   <a:srgbClr val="1A1A1A"/>
                 </a:solidFill>
                 <a:latin typeface="Golos Text"/>
                 <a:rFonts ascii="Golos Text" hAnsi="Golos Text" cs="Golos Text" eastAsia="Golos Text"/>
               </a:rPr>
-              <a:t>Сравниваем заводы в FOB</a:t>
-            </a:r>
-          </a:p>
-          <a:p>
-            <a:pPr algn="l">
-              <a:lnSpc>
-                <a:spcPct val="118000"/>
-              </a:lnSpc>
-              <a:spcBef>
-                <a:spcPts val="0"/>
-              </a:spcBef>
-              <a:spcAft>
-                <a:spcPts val="800"/>
-              </a:spcAft>
-            </a:pPr>
-            <a:r>
-              <a:rPr sz="1600" b="0">
+              <a:t>1. Сравниваем заводы в цене FOB</a:t>
+            </a:r>
+          </a:p>
+          <a:p>
+            <a:pPr algn="l">
+              <a:lnSpc>
+                <a:spcPct val="118000"/>
+              </a:lnSpc>
+              <a:spcBef>
+                <a:spcPts val="0"/>
+              </a:spcBef>
+              <a:spcAft>
+                <a:spcPts val="600"/>
+              </a:spcAft>
+            </a:pPr>
+            <a:r>
+              <a:rPr sz="1500" b="0">
                 <a:solidFill>
                   <a:srgbClr val="1A1A1A"/>
                 </a:solidFill>
                 <a:latin typeface="Golos Text"/>
                 <a:rFonts ascii="Golos Text" hAnsi="Golos Text" cs="Golos Text" eastAsia="Golos Text"/>
               </a:rPr>
-              <a:t>Логистику до Кириши считаем отдельно</a:t>
+              <a:t>2. Логистику до Кириши считаем отдельной строкой</a:t>
             </a:r>
           </a:p>
           <a:p>
@@ -4167,60 +4236,83 @@
               </a:spcAft>
             </a:pPr>
             <a:r>
-              <a:rPr sz="1600" b="0">
+              <a:rPr sz="1500" b="0">
                 <a:solidFill>
                   <a:srgbClr val="1A1A1A"/>
                 </a:solidFill>
                 <a:latin typeface="Golos Text"/>
                 <a:rFonts ascii="Golos Text" hAnsi="Golos Text" cs="Golos Text" eastAsia="Golos Text"/>
               </a:rPr>
-              <a:t>Полная цена = FOB + фрахт + таможня + довоз</a:t>
-            </a:r>
-          </a:p>
-          <a:p>
-            <a:pPr algn="l">
-              <a:lnSpc>
-                <a:spcPct val="118000"/>
-              </a:lnSpc>
-              <a:spcBef>
-                <a:spcPts val="0"/>
-              </a:spcBef>
-              <a:spcAft>
-                <a:spcPts val="800"/>
-              </a:spcAft>
-            </a:pPr>
-            <a:r>
-              <a:rPr sz="1600" b="1">
+              <a:t>3. Полная цена = FOB + фрахт + таможня + довоз + запас</a:t>
+            </a:r>
+          </a:p>
+          <a:p>
+            <a:pPr algn="l">
+              <a:lnSpc>
+                <a:spcPct val="118000"/>
+              </a:lnSpc>
+              <a:spcBef>
+                <a:spcPts val="0"/>
+              </a:spcBef>
+              <a:spcAft>
+                <a:spcPts val="200"/>
+              </a:spcAft>
+            </a:pPr>
+            <a:r>
+              <a:rPr sz="1500" b="1">
                 <a:solidFill>
                   <a:srgbClr val="1A1A1A"/>
                 </a:solidFill>
                 <a:latin typeface="Manrope"/>
                 <a:rFonts ascii="Manrope" hAnsi="Manrope" cs="Manrope" eastAsia="Manrope"/>
               </a:rPr>
-              <a:t>Срок пилота — «на складе»</a:t>
-            </a:r>
-          </a:p>
-          <a:p>
-            <a:pPr algn="l">
-              <a:lnSpc>
-                <a:spcPct val="118000"/>
-              </a:lnSpc>
-              <a:spcBef>
-                <a:spcPts val="0"/>
-              </a:spcBef>
-              <a:spcAft>
-                <a:spcPts val="800"/>
-              </a:spcAft>
-            </a:pPr>
-            <a:r>
-              <a:rPr sz="1600" b="0">
+              <a:t>Срок пилота — дата «на складе»,</a:t>
+            </a:r>
+          </a:p>
+          <a:p>
+            <a:pPr algn="l">
+              <a:lnSpc>
+                <a:spcPct val="118000"/>
+              </a:lnSpc>
+              <a:spcBef>
+                <a:spcPts val="0"/>
+              </a:spcBef>
+              <a:spcAft>
+                <a:spcPts val="600"/>
+              </a:spcAft>
+            </a:pPr>
+            <a:r>
+              <a:rPr sz="1500" b="0">
                 <a:solidFill>
                   <a:srgbClr val="1A1A1A"/>
                 </a:solidFill>
                 <a:latin typeface="Golos Text"/>
                 <a:rFonts ascii="Golos Text" hAnsi="Golos Text" cs="Golos Text" eastAsia="Golos Text"/>
               </a:rPr>
-              <a:t>Origin не ясен → не говорим «российское»</a:t>
+              <a:t>а не формулировка «завод отгрузил».</a:t>
+            </a:r>
+          </a:p>
+          <a:p>
+            <a:pPr algn="l">
+              <a:lnSpc>
+                <a:spcPct val="118000"/>
+              </a:lnSpc>
+              <a:spcBef>
+                <a:spcPts val="0"/>
+              </a:spcBef>
+              <a:spcAft>
+                <a:spcPts val="600"/>
+              </a:spcAft>
+            </a:pPr>
+            <a:r>
+              <a:rPr sz="1500" b="0">
+                <a:solidFill>
+                  <a:srgbClr val="1A1A1A"/>
+                </a:solidFill>
+                <a:latin typeface="Golos Text"/>
+                <a:rFonts ascii="Golos Text" hAnsi="Golos Text" cs="Golos Text" eastAsia="Golos Text"/>
+              </a:rPr>
+              <a:t>Происхождение не зафиксировано — не называем «российское».</a:t>
             </a:r>
           </a:p>
         </p:txBody>
@@ -4740,99 +4832,145 @@
                 <a:latin typeface="Manrope"/>
                 <a:rFonts ascii="Manrope" hAnsi="Manrope" cs="Manrope" eastAsia="Manrope"/>
               </a:rPr>
-              <a:t>Содержание</a:t>
-            </a:r>
-          </a:p>
-          <a:p>
-            <a:pPr algn="l">
-              <a:lnSpc>
-                <a:spcPct val="118000"/>
-              </a:lnSpc>
-              <a:spcBef>
-                <a:spcPts val="0"/>
-              </a:spcBef>
-              <a:spcAft>
-                <a:spcPts val="800"/>
-              </a:spcAft>
-            </a:pPr>
-            <a:r>
-              <a:rPr sz="1600" b="0">
+              <a:t>Содержание пульта v1.14</a:t>
+            </a:r>
+          </a:p>
+          <a:p>
+            <a:pPr algn="l">
+              <a:lnSpc>
+                <a:spcPct val="118000"/>
+              </a:lnSpc>
+              <a:spcBef>
+                <a:spcPts val="0"/>
+              </a:spcBef>
+              <a:spcAft>
+                <a:spcPts val="600"/>
+              </a:spcAft>
+            </a:pPr>
+            <a:r>
+              <a:rPr sz="1500" b="0">
                 <a:solidFill>
                   <a:srgbClr val="1A1A1A"/>
                 </a:solidFill>
                 <a:latin typeface="Golos Text"/>
                 <a:rFonts ascii="Golos Text" hAnsi="Golos Text" cs="Golos Text" eastAsia="Golos Text"/>
               </a:rPr>
-              <a:t>Этапы 0–2 — разведка и правила</a:t>
-            </a:r>
-          </a:p>
-          <a:p>
-            <a:pPr algn="l">
-              <a:lnSpc>
-                <a:spcPct val="118000"/>
-              </a:lnSpc>
-              <a:spcBef>
-                <a:spcPts val="0"/>
-              </a:spcBef>
-              <a:spcAft>
-                <a:spcPts val="800"/>
-              </a:spcAft>
-            </a:pPr>
-            <a:r>
-              <a:rPr sz="1600" b="0">
+              <a:t>Этапы 0–2: разведка, правила, границы продукта</a:t>
+            </a:r>
+          </a:p>
+          <a:p>
+            <a:pPr algn="l">
+              <a:lnSpc>
+                <a:spcPct val="118000"/>
+              </a:lnSpc>
+              <a:spcBef>
+                <a:spcPts val="0"/>
+              </a:spcBef>
+              <a:spcAft>
+                <a:spcPts val="600"/>
+              </a:spcAft>
+            </a:pPr>
+            <a:r>
+              <a:rPr sz="1500" b="0">
                 <a:solidFill>
                   <a:srgbClr val="1A1A1A"/>
                 </a:solidFill>
                 <a:latin typeface="Golos Text"/>
                 <a:rFonts ascii="Golos Text" hAnsi="Golos Text" cs="Golos Text" eastAsia="Golos Text"/>
               </a:rPr>
-              <a:t>Этапы 3–6 — сценарий «как вести дело»</a:t>
-            </a:r>
-          </a:p>
-          <a:p>
-            <a:pPr algn="l">
-              <a:lnSpc>
-                <a:spcPct val="118000"/>
-              </a:lnSpc>
-              <a:spcBef>
-                <a:spcPts val="0"/>
-              </a:spcBef>
-              <a:spcAft>
-                <a:spcPts val="800"/>
-              </a:spcAft>
-            </a:pPr>
-            <a:r>
-              <a:rPr sz="1600" b="0">
+              <a:t>Этапы 3–6: учебный сценарий «как вести дело»</a:t>
+            </a:r>
+          </a:p>
+          <a:p>
+            <a:pPr algn="l">
+              <a:lnSpc>
+                <a:spcPct val="118000"/>
+              </a:lnSpc>
+              <a:spcBef>
+                <a:spcPts val="0"/>
+              </a:spcBef>
+              <a:spcAft>
+                <a:spcPts val="600"/>
+              </a:spcAft>
+            </a:pPr>
+            <a:r>
+              <a:rPr sz="1500" b="0">
                 <a:solidFill>
                   <a:srgbClr val="1A1A1A"/>
                 </a:solidFill>
                 <a:latin typeface="Golos Text"/>
                 <a:rFonts ascii="Golos Text" hAnsi="Golos Text" cs="Golos Text" eastAsia="Golos Text"/>
               </a:rPr>
-              <a:t>StoryBrand · DoD · риски · возврат</a:t>
-            </a:r>
-          </a:p>
-          <a:p>
-            <a:pPr algn="l">
-              <a:lnSpc>
-                <a:spcPct val="118000"/>
-              </a:lnSpc>
-              <a:spcBef>
-                <a:spcPts val="0"/>
-              </a:spcBef>
-              <a:spcAft>
-                <a:spcPts val="800"/>
-              </a:spcAft>
-            </a:pPr>
-            <a:r>
-              <a:rPr sz="1600" b="0">
+              <a:t>StoryBrand, чеклист готовности, реестр рисков</a:t>
+            </a:r>
+          </a:p>
+          <a:p>
+            <a:pPr algn="l">
+              <a:lnSpc>
+                <a:spcPct val="118000"/>
+              </a:lnSpc>
+              <a:spcBef>
+                <a:spcPts val="0"/>
+              </a:spcBef>
+              <a:spcAft>
+                <a:spcPts val="600"/>
+              </a:spcAft>
+            </a:pPr>
+            <a:r>
+              <a:rPr sz="1500" b="0">
                 <a:solidFill>
                   <a:srgbClr val="1A1A1A"/>
                 </a:solidFill>
                 <a:latin typeface="Golos Text"/>
                 <a:rFonts ascii="Golos Text" hAnsi="Golos Text" cs="Golos Text" eastAsia="Golos Text"/>
               </a:rPr>
-              <a:t>Мостик портфеля Travel+</a:t>
+              <a:t>Правила пилота: успех, провал, выход</a:t>
+            </a:r>
+          </a:p>
+          <a:p>
+            <a:pPr algn="l">
+              <a:lnSpc>
+                <a:spcPct val="118000"/>
+              </a:lnSpc>
+              <a:spcBef>
+                <a:spcPts val="0"/>
+              </a:spcBef>
+              <a:spcAft>
+                <a:spcPts val="600"/>
+              </a:spcAft>
+            </a:pPr>
+            <a:r>
+              <a:rPr sz="1500" b="0">
+                <a:solidFill>
+                  <a:srgbClr val="1A1A1A"/>
+                </a:solidFill>
+                <a:latin typeface="Golos Text"/>
+                <a:rFonts ascii="Golos Text" hAnsi="Golos Text" cs="Golos Text" eastAsia="Golos Text"/>
+              </a:rPr>
+              <a:t>Мостик портфеля Travel+ (Hotel Line, Fleur, Natural, СТМ)</a:t>
+            </a:r>
+          </a:p>
+          <a:p>
+            <a:pPr algn="l">
+              <a:lnSpc>
+                <a:spcPct val="118000"/>
+              </a:lnSpc>
+              <a:spcBef>
+                <a:spcPts val="1800"/>
+              </a:spcBef>
+              <a:spcAft>
+                <a:spcPts val="0"/>
+              </a:spcAft>
+            </a:pPr>
+            <a:r>
+              <a:rPr sz="1200" b="0">
+                <a:solidFill>
+                  <a:srgbClr val="5C5C5C"/>
+                </a:solidFill>
+                <a:latin typeface="Golos Text"/>
+                <a:rFonts ascii="Golos Text" hAnsi="Golos Text" cs="Golos Text" eastAsia="Golos Text"/>
+              </a:rPr>
+              <a:t>Статус: образец для поля и собеседования. Не коммерческое предложение.</a:t>
             </a:r>
           </a:p>
         </p:txBody>
@@ -4876,76 +5014,99 @@
                 <a:latin typeface="Manrope"/>
                 <a:rFonts ascii="Manrope" hAnsi="Manrope" cs="Manrope" eastAsia="Manrope"/>
               </a:rPr>
-              <a:t>Справочники</a:t>
-            </a:r>
-          </a:p>
-          <a:p>
-            <a:pPr algn="l">
-              <a:lnSpc>
-                <a:spcPct val="118000"/>
-              </a:lnSpc>
-              <a:spcBef>
-                <a:spcPts val="0"/>
-              </a:spcBef>
-              <a:spcAft>
-                <a:spcPts val="800"/>
-              </a:spcAft>
-            </a:pPr>
-            <a:r>
-              <a:rPr sz="1600" b="0">
+              <a:t>Справочники и логистика</a:t>
+            </a:r>
+          </a:p>
+          <a:p>
+            <a:pPr algn="l">
+              <a:lnSpc>
+                <a:spcPct val="118000"/>
+              </a:lnSpc>
+              <a:spcBef>
+                <a:spcPts val="0"/>
+              </a:spcBef>
+              <a:spcAft>
+                <a:spcPts val="600"/>
+              </a:spcAft>
+            </a:pPr>
+            <a:r>
+              <a:rPr sz="1500" b="0">
                 <a:solidFill>
                   <a:srgbClr val="1A1A1A"/>
                 </a:solidFill>
                 <a:latin typeface="Golos Text"/>
                 <a:rFonts ascii="Golos Text" hAnsi="Golos Text" cs="Golos Text" eastAsia="Golos Text"/>
               </a:rPr>
-              <a:t>Глоссарий бренда + глоссарий ВЭД</a:t>
-            </a:r>
-          </a:p>
-          <a:p>
-            <a:pPr algn="l">
-              <a:lnSpc>
-                <a:spcPct val="118000"/>
-              </a:lnSpc>
-              <a:spcBef>
-                <a:spcPts val="0"/>
-              </a:spcBef>
-              <a:spcAft>
-                <a:spcPts val="1400"/>
-              </a:spcAft>
-            </a:pPr>
-            <a:r>
-              <a:rPr sz="1600" b="0">
+              <a:t>Глоссарий бренда и глоссарий ВЭД</a:t>
+            </a:r>
+          </a:p>
+          <a:p>
+            <a:pPr algn="l">
+              <a:lnSpc>
+                <a:spcPct val="118000"/>
+              </a:lnSpc>
+              <a:spcBef>
+                <a:spcPts val="0"/>
+              </a:spcBef>
+              <a:spcAft>
+                <a:spcPts val="600"/>
+              </a:spcAft>
+            </a:pPr>
+            <a:r>
+              <a:rPr sz="1500" b="0">
                 <a:solidFill>
                   <a:srgbClr val="1A1A1A"/>
                 </a:solidFill>
                 <a:latin typeface="Golos Text"/>
                 <a:rFonts ascii="Golos Text" hAnsi="Golos Text" cs="Golos Text" eastAsia="Golos Text"/>
               </a:rPr>
-              <a:t>Раздел L: путь · Incoterms · RFQ</a:t>
-            </a:r>
-          </a:p>
-          <a:p>
-            <a:pPr algn="l">
-              <a:lnSpc>
-                <a:spcPct val="118000"/>
-              </a:lnSpc>
-              <a:spcBef>
-                <a:spcPts val="0"/>
-              </a:spcBef>
-              <a:spcAft>
-                <a:spcPts val="800"/>
-              </a:spcAft>
-            </a:pPr>
-            <a:r>
-              <a:rPr sz="1600" b="0">
+              <a:t>Раздел L: путь товара, Incoterms, RFQ, приёмка на складе</a:t>
+            </a:r>
+          </a:p>
+          <a:p>
+            <a:pPr algn="l">
+              <a:lnSpc>
+                <a:spcPct val="118000"/>
+              </a:lnSpc>
+              <a:spcBef>
+                <a:spcPts val="0"/>
+              </a:spcBef>
+              <a:spcAft>
+                <a:spcPts val="600"/>
+              </a:spcAft>
+            </a:pPr>
+            <a:r>
+              <a:rPr sz="1500" b="0">
                 <a:solidFill>
                   <a:srgbClr val="1A1A1A"/>
                 </a:solidFill>
                 <a:latin typeface="Golos Text"/>
                 <a:rFonts ascii="Golos Text" hAnsi="Golos Text" cs="Golos Text" eastAsia="Golos Text"/>
               </a:rPr>
-              <a:t>Статус: рамка для поля и собеседования.</a:t>
+              <a:t>Волна A: markdown-реестры в папке brand-pult/</a:t>
+            </a:r>
+          </a:p>
+          <a:p>
+            <a:pPr algn="l">
+              <a:lnSpc>
+                <a:spcPct val="118000"/>
+              </a:lnSpc>
+              <a:spcBef>
+                <a:spcPts val="0"/>
+              </a:spcBef>
+              <a:spcAft>
+                <a:spcPts val="1000"/>
+              </a:spcAft>
+            </a:pPr>
+            <a:r>
+              <a:rPr sz="1500" b="0">
+                <a:solidFill>
+                  <a:srgbClr val="1A1A1A"/>
+                </a:solidFill>
+                <a:latin typeface="Golos Text"/>
+                <a:rFonts ascii="Golos Text" hAnsi="Golos Text" cs="Golos Text" eastAsia="Golos Text"/>
+              </a:rPr>
+              <a:t>Презентация и скрипт — синхрон с пультом</a:t>
             </a:r>
           </a:p>
           <a:p>
@@ -4961,14 +5122,14 @@
               </a:spcAft>
             </a:pPr>
             <a:r>
-              <a:rPr sz="1600" b="1">
+              <a:rPr sz="1500" b="1">
                 <a:solidFill>
                   <a:srgbClr val="1A1A1A"/>
                 </a:solidFill>
                 <a:latin typeface="Manrope"/>
                 <a:rFonts ascii="Manrope" hAnsi="Manrope" cs="Manrope" eastAsia="Manrope"/>
               </a:rPr>
-              <a:t>v2.0 — когда технолог даст цифры.</a:t>
+              <a:t>Версия 2.0 — когда технолог закроет цифры завода.</a:t>
             </a:r>
           </a:p>
         </p:txBody>
@@ -7042,30 +7203,30 @@
                 <a:spcPts val="0"/>
               </a:spcBef>
               <a:spcAft>
-                <a:spcPts val="800"/>
-              </a:spcAft>
-            </a:pPr>
-            <a:r>
-              <a:rPr sz="1600" b="0">
+                <a:spcPts val="600"/>
+              </a:spcAft>
+            </a:pPr>
+            <a:r>
+              <a:rPr sz="1500" b="0">
                 <a:solidFill>
                   <a:srgbClr val="1A1A1A"/>
                 </a:solidFill>
                 <a:latin typeface="Golos Text"/>
                 <a:rFonts ascii="Golos Text" hAnsi="Golos Text" cs="Golos Text" eastAsia="Golos Text"/>
               </a:rPr>
-              <a:t>Конкуренты: ЕТС Natural · MEZO · NS</a:t>
-            </a:r>
-          </a:p>
-          <a:p>
-            <a:pPr algn="l">
-              <a:lnSpc>
-                <a:spcPct val="118000"/>
-              </a:lnSpc>
-              <a:spcBef>
-                <a:spcPts val="0"/>
-              </a:spcBef>
-              <a:spcAft>
-                <a:spcPts val="1200"/>
+              <a:t>Конкуренты на полке: ЕТС Natural, MEZO, Natura Siberica.</a:t>
+            </a:r>
+          </a:p>
+          <a:p>
+            <a:pPr algn="l">
+              <a:lnSpc>
+                <a:spcPct val="118000"/>
+              </a:lnSpc>
+              <a:spcBef>
+                <a:spcPts val="0"/>
+              </a:spcBef>
+              <a:spcAft>
+                <a:spcPts val="1000"/>
               </a:spcAft>
             </a:pPr>
             <a:r>
@@ -7076,30 +7237,30 @@
                 <a:latin typeface="Golos Text"/>
                 <a:rFonts ascii="Golos Text" hAnsi="Golos Text" cs="Golos Text" eastAsia="Golos Text"/>
               </a:rPr>
-              <a:t>(NS — чужой premium в каталоге)</a:t>
-            </a:r>
-          </a:p>
-          <a:p>
-            <a:pPr algn="l">
-              <a:lnSpc>
-                <a:spcPct val="118000"/>
-              </a:lnSpc>
-              <a:spcBef>
-                <a:spcPts val="0"/>
-              </a:spcBef>
-              <a:spcAft>
-                <a:spcPts val="800"/>
-              </a:spcAft>
-            </a:pPr>
-            <a:r>
-              <a:rPr sz="1600" b="0">
+              <a:t>(Natura Siberica — чужой премиум в каталоге Travel+)</a:t>
+            </a:r>
+          </a:p>
+          <a:p>
+            <a:pPr algn="l">
+              <a:lnSpc>
+                <a:spcPct val="118000"/>
+              </a:lnSpc>
+              <a:spcBef>
+                <a:spcPts val="0"/>
+              </a:spcBef>
+              <a:spcAft>
+                <a:spcPts val="600"/>
+              </a:spcAft>
+            </a:pPr>
+            <a:r>
+              <a:rPr sz="1500" b="0">
                 <a:solidFill>
                   <a:srgbClr val="1A1A1A"/>
                 </a:solidFill>
                 <a:latin typeface="Golos Text"/>
                 <a:rFonts ascii="Golos Text" hAnsi="Golos Text" cs="Golos Text" eastAsia="Golos Text"/>
               </a:rPr>
-              <a:t>Travel+ силён в масс и среднем.</a:t>
+              <a:t>Travel+ силён в массовом и среднем сегменте.</a:t>
             </a:r>
           </a:p>
           <a:p>
@@ -7115,14 +7276,14 @@
               </a:spcAft>
             </a:pPr>
             <a:r>
-              <a:rPr sz="1600" b="1">
+              <a:rPr sz="1500" b="1">
                 <a:solidFill>
                   <a:srgbClr val="1A1A1A"/>
                 </a:solidFill>
                 <a:latin typeface="Manrope"/>
                 <a:rFonts ascii="Manrope" hAnsi="Manrope" cs="Manrope" eastAsia="Manrope"/>
               </a:rPr>
-              <a:t>Слабое место: своя Natural с документами.</a:t>
+              <a:t>Слабое место: своей линейки Natural с документами нет.</a:t>
             </a:r>
           </a:p>
         </p:txBody>
@@ -7178,64 +7339,64 @@
                 <a:spcPts val="0"/>
               </a:spcBef>
               <a:spcAft>
-                <a:spcPts val="800"/>
-              </a:spcAft>
-            </a:pPr>
-            <a:r>
-              <a:rPr sz="1600" b="0">
+                <a:spcPts val="600"/>
+              </a:spcAft>
+            </a:pPr>
+            <a:r>
+              <a:rPr sz="1500" b="0">
                 <a:solidFill>
                   <a:srgbClr val="1A1A1A"/>
                 </a:solidFill>
                 <a:latin typeface="Golos Text"/>
                 <a:rFonts ascii="Golos Text" hAnsi="Golos Text" cs="Golos Text" eastAsia="Golos Text"/>
               </a:rPr>
-              <a:t>Hotel Line ≈ 12–15 ₽ / 30 мл</a:t>
-            </a:r>
-          </a:p>
-          <a:p>
-            <a:pPr algn="l">
-              <a:lnSpc>
-                <a:spcPct val="118000"/>
-              </a:lnSpc>
-              <a:spcBef>
-                <a:spcPts val="0"/>
-              </a:spcBef>
-              <a:spcAft>
-                <a:spcPts val="800"/>
-              </a:spcAft>
-            </a:pPr>
-            <a:r>
-              <a:rPr sz="1600" b="0">
+              <a:t>Hotel Line — ориентир 12–15 ₽ / 30 мл</a:t>
+            </a:r>
+          </a:p>
+          <a:p>
+            <a:pPr algn="l">
+              <a:lnSpc>
+                <a:spcPct val="118000"/>
+              </a:lnSpc>
+              <a:spcBef>
+                <a:spcPts val="0"/>
+              </a:spcBef>
+              <a:spcAft>
+                <a:spcPts val="600"/>
+              </a:spcAft>
+            </a:pPr>
+            <a:r>
+              <a:rPr sz="1500" b="0">
                 <a:solidFill>
                   <a:srgbClr val="1A1A1A"/>
                 </a:solidFill>
                 <a:latin typeface="Golos Text"/>
                 <a:rFonts ascii="Golos Text" hAnsi="Golos Text" cs="Golos Text" eastAsia="Golos Text"/>
               </a:rPr>
-              <a:t>ЕТС Natural ≈ 18 ₽ / 25 мл</a:t>
-            </a:r>
-          </a:p>
-          <a:p>
-            <a:pPr algn="l">
-              <a:lnSpc>
-                <a:spcPct val="118000"/>
-              </a:lnSpc>
-              <a:spcBef>
-                <a:spcPts val="0"/>
-              </a:spcBef>
-              <a:spcAft>
-                <a:spcPts val="1400"/>
-              </a:spcAft>
-            </a:pPr>
-            <a:r>
-              <a:rPr sz="1600" b="0">
+              <a:t>ЕТС Natural — ориентир 18 ₽ / 25 мл</a:t>
+            </a:r>
+          </a:p>
+          <a:p>
+            <a:pPr algn="l">
+              <a:lnSpc>
+                <a:spcPct val="118000"/>
+              </a:lnSpc>
+              <a:spcBef>
+                <a:spcPts val="0"/>
+              </a:spcBef>
+              <a:spcAft>
+                <a:spcPts val="1200"/>
+              </a:spcAft>
+            </a:pPr>
+            <a:r>
+              <a:rPr sz="1500" b="0">
                 <a:solidFill>
                   <a:srgbClr val="1A1A1A"/>
                 </a:solidFill>
                 <a:latin typeface="Golos Text"/>
                 <a:rFonts ascii="Golos Text" hAnsi="Golos Text" cs="Golos Text" eastAsia="Golos Text"/>
               </a:rPr>
-              <a:t>Natura Siberica — выше</a:t>
+              <a:t>Natura Siberica — ориентир 30–40 ₽ и выше</a:t>
             </a:r>
           </a:p>
           <a:p>
@@ -7251,37 +7412,37 @@
               </a:spcAft>
             </a:pPr>
             <a:r>
-              <a:rPr sz="1600" b="1">
+              <a:rPr sz="1500" b="1">
                 <a:solidFill>
                   <a:srgbClr val="1A1A1A"/>
                 </a:solidFill>
                 <a:latin typeface="Manrope"/>
                 <a:rFonts ascii="Manrope" hAnsi="Manrope" cs="Manrope" eastAsia="Manrope"/>
               </a:rPr>
-              <a:t>Ставка: между HL и NS</a:t>
-            </a:r>
-          </a:p>
-          <a:p>
-            <a:pPr algn="l">
-              <a:lnSpc>
-                <a:spcPct val="118000"/>
-              </a:lnSpc>
-              <a:spcBef>
-                <a:spcPts val="0"/>
-              </a:spcBef>
-              <a:spcAft>
-                <a:spcPts val="800"/>
-              </a:spcAft>
-            </a:pPr>
-            <a:r>
-              <a:rPr sz="1600" b="0">
+              <a:t>Ставка Natural: между Hotel Line и Natura Siberica</a:t>
+            </a:r>
+          </a:p>
+          <a:p>
+            <a:pPr algn="l">
+              <a:lnSpc>
+                <a:spcPct val="118000"/>
+              </a:lnSpc>
+              <a:spcBef>
+                <a:spcPts val="0"/>
+              </a:spcBef>
+              <a:spcAft>
+                <a:spcPts val="600"/>
+              </a:spcAft>
+            </a:pPr>
+            <a:r>
+              <a:rPr sz="1500" b="0">
                 <a:solidFill>
                   <a:srgbClr val="1A1A1A"/>
                 </a:solidFill>
                 <a:latin typeface="Golos Text"/>
                 <a:rFonts ascii="Golos Text" hAnsi="Golos Text" cs="Golos Text" eastAsia="Golos Text"/>
               </a:rPr>
-              <a:t>Натуральность · документы · один поставщик</a:t>
+              <a:t>Натуральность, пакет документов, один поставщик на номер.</a:t>
             </a:r>
           </a:p>
         </p:txBody>
@@ -7801,53 +7962,53 @@
                 <a:latin typeface="Manrope"/>
                 <a:rFonts ascii="Manrope" hAnsi="Manrope" cs="Manrope" eastAsia="Manrope"/>
               </a:rPr>
-              <a:t>Карта</a:t>
-            </a:r>
-          </a:p>
-          <a:p>
-            <a:pPr algn="l">
-              <a:lnSpc>
-                <a:spcPct val="118000"/>
-              </a:lnSpc>
-              <a:spcBef>
-                <a:spcPts val="0"/>
-              </a:spcBef>
-              <a:spcAft>
-                <a:spcPts val="800"/>
-              </a:spcAft>
-            </a:pPr>
-            <a:r>
-              <a:rPr sz="1600" b="0">
+              <a:t>Карта портфеля</a:t>
+            </a:r>
+          </a:p>
+          <a:p>
+            <a:pPr algn="l">
+              <a:lnSpc>
+                <a:spcPct val="118000"/>
+              </a:lnSpc>
+              <a:spcBef>
+                <a:spcPts val="0"/>
+              </a:spcBef>
+              <a:spcAft>
+                <a:spcPts val="600"/>
+              </a:spcAft>
+            </a:pPr>
+            <a:r>
+              <a:rPr sz="1500" b="0">
                 <a:solidFill>
                   <a:srgbClr val="1A1A1A"/>
                 </a:solidFill>
                 <a:latin typeface="Golos Text"/>
                 <a:rFonts ascii="Golos Text" hAnsi="Golos Text" cs="Golos Text" eastAsia="Golos Text"/>
               </a:rPr>
-              <a:t>Hotel Line → цена</a:t>
-            </a:r>
-          </a:p>
-          <a:p>
-            <a:pPr algn="l">
-              <a:lnSpc>
-                <a:spcPct val="118000"/>
-              </a:lnSpc>
-              <a:spcBef>
-                <a:spcPts val="0"/>
-              </a:spcBef>
-              <a:spcAft>
-                <a:spcPts val="800"/>
-              </a:spcAft>
-            </a:pPr>
-            <a:r>
-              <a:rPr sz="1600" b="0">
+              <a:t>Hotel Line — цена и базовый сегмент</a:t>
+            </a:r>
+          </a:p>
+          <a:p>
+            <a:pPr algn="l">
+              <a:lnSpc>
+                <a:spcPct val="118000"/>
+              </a:lnSpc>
+              <a:spcBef>
+                <a:spcPts val="0"/>
+              </a:spcBef>
+              <a:spcAft>
+                <a:spcPts val="600"/>
+              </a:spcAft>
+            </a:pPr>
+            <a:r>
+              <a:rPr sz="1500" b="0">
                 <a:solidFill>
                   <a:srgbClr val="1A1A1A"/>
                 </a:solidFill>
                 <a:latin typeface="Golos Text"/>
                 <a:rFonts ascii="Golos Text" hAnsi="Golos Text" cs="Golos Text" eastAsia="Golos Text"/>
               </a:rPr>
-              <a:t>Fleur / Aquatique / La Nuit → дизайн и аромат</a:t>
+              <a:t>Fleur / Aquatique / La Nuit — дизайн и аромат</a:t>
             </a:r>
           </a:p>
           <a:p>
@@ -7863,60 +8024,60 @@
               </a:spcAft>
             </a:pPr>
             <a:r>
-              <a:rPr sz="1600" b="1">
+              <a:rPr sz="1500" b="1">
                 <a:solidFill>
                   <a:srgbClr val="1A1A1A"/>
                 </a:solidFill>
                 <a:latin typeface="Manrope"/>
                 <a:rFonts ascii="Manrope" hAnsi="Manrope" cs="Manrope" eastAsia="Manrope"/>
               </a:rPr>
-              <a:t>Natural → натуральность + документы</a:t>
-            </a:r>
-          </a:p>
-          <a:p>
-            <a:pPr algn="l">
-              <a:lnSpc>
-                <a:spcPct val="118000"/>
-              </a:lnSpc>
-              <a:spcBef>
-                <a:spcPts val="0"/>
-              </a:spcBef>
-              <a:spcAft>
-                <a:spcPts val="800"/>
-              </a:spcAft>
-            </a:pPr>
-            <a:r>
-              <a:rPr sz="1600" b="0">
+              <a:t>Natural — натуральность и документы</a:t>
+            </a:r>
+          </a:p>
+          <a:p>
+            <a:pPr algn="l">
+              <a:lnSpc>
+                <a:spcPct val="118000"/>
+              </a:lnSpc>
+              <a:spcBef>
+                <a:spcPts val="0"/>
+              </a:spcBef>
+              <a:spcAft>
+                <a:spcPts val="600"/>
+              </a:spcAft>
+            </a:pPr>
+            <a:r>
+              <a:rPr sz="1500" b="0">
                 <a:solidFill>
                   <a:srgbClr val="1A1A1A"/>
                 </a:solidFill>
                 <a:latin typeface="Golos Text"/>
                 <a:rFonts ascii="Golos Text" hAnsi="Golos Text" cs="Golos Text" eastAsia="Golos Text"/>
               </a:rPr>
-              <a:t>Natura Siberica → чужой premium</a:t>
-            </a:r>
-          </a:p>
-          <a:p>
-            <a:pPr algn="l">
-              <a:lnSpc>
-                <a:spcPct val="118000"/>
-              </a:lnSpc>
-              <a:spcBef>
-                <a:spcPts val="0"/>
-              </a:spcBef>
-              <a:spcAft>
-                <a:spcPts val="800"/>
-              </a:spcAft>
-            </a:pPr>
-            <a:r>
-              <a:rPr sz="1600" b="0">
+              <a:t>Natura Siberica — чужой премиум в каталоге</a:t>
+            </a:r>
+          </a:p>
+          <a:p>
+            <a:pPr algn="l">
+              <a:lnSpc>
+                <a:spcPct val="118000"/>
+              </a:lnSpc>
+              <a:spcBef>
+                <a:spcPts val="0"/>
+              </a:spcBef>
+              <a:spcAft>
+                <a:spcPts val="600"/>
+              </a:spcAft>
+            </a:pPr>
+            <a:r>
+              <a:rPr sz="1500" b="0">
                 <a:solidFill>
                   <a:srgbClr val="1A1A1A"/>
                 </a:solidFill>
                 <a:latin typeface="Golos Text"/>
                 <a:rFonts ascii="Golos Text" hAnsi="Golos Text" cs="Golos Text" eastAsia="Golos Text"/>
               </a:rPr>
-              <a:t>СТМ (лого отеля) → отдельный проект</a:t>
+              <a:t>СТМ с логотипом отеля — отдельный проект</a:t>
             </a:r>
           </a:p>
         </p:txBody>
@@ -7972,87 +8133,87 @@
                 <a:spcPts val="0"/>
               </a:spcBef>
               <a:spcAft>
-                <a:spcPts val="800"/>
-              </a:spcAft>
-            </a:pPr>
-            <a:r>
-              <a:rPr sz="1600" b="0">
+                <a:spcPts val="600"/>
+              </a:spcAft>
+            </a:pPr>
+            <a:r>
+              <a:rPr sz="1500" b="0">
                 <a:solidFill>
                   <a:srgbClr val="1A1A1A"/>
                 </a:solidFill>
                 <a:latin typeface="Golos Text"/>
                 <a:rFonts ascii="Golos Text" hAnsi="Golos Text" cs="Golos Text" eastAsia="Golos Text"/>
               </a:rPr>
-              <a:t>Дизайн и аромат — Fleur.</a:t>
-            </a:r>
-          </a:p>
-          <a:p>
-            <a:pPr algn="l">
-              <a:lnSpc>
-                <a:spcPct val="118000"/>
-              </a:lnSpc>
-              <a:spcBef>
-                <a:spcPts val="0"/>
-              </a:spcBef>
-              <a:spcAft>
-                <a:spcPts val="800"/>
-              </a:spcAft>
-            </a:pPr>
-            <a:r>
-              <a:rPr sz="1600" b="0">
+              <a:t>Fleur закрывает дизайн и аромат в номере.</a:t>
+            </a:r>
+          </a:p>
+          <a:p>
+            <a:pPr algn="l">
+              <a:lnSpc>
+                <a:spcPct val="118000"/>
+              </a:lnSpc>
+              <a:spcBef>
+                <a:spcPts val="0"/>
+              </a:spcBef>
+              <a:spcAft>
+                <a:spcPts val="600"/>
+              </a:spcAft>
+            </a:pPr>
+            <a:r>
+              <a:rPr sz="1500" b="0">
                 <a:solidFill>
                   <a:srgbClr val="1A1A1A"/>
                 </a:solidFill>
                 <a:latin typeface="Golos Text"/>
                 <a:rFonts ascii="Golos Text" hAnsi="Golos Text" cs="Golos Text" eastAsia="Golos Text"/>
               </a:rPr>
-              <a:t>Натуральность и документы — Natural.</a:t>
-            </a:r>
-          </a:p>
-          <a:p>
-            <a:pPr algn="l">
-              <a:lnSpc>
-                <a:spcPct val="118000"/>
-              </a:lnSpc>
-              <a:spcBef>
-                <a:spcPts val="0"/>
-              </a:spcBef>
-              <a:spcAft>
-                <a:spcPts val="800"/>
-              </a:spcAft>
-            </a:pPr>
-            <a:r>
-              <a:rPr sz="1600" b="1">
+              <a:t>Natural — запрос на натуральность и полный пакет документов.</a:t>
+            </a:r>
+          </a:p>
+          <a:p>
+            <a:pPr algn="l">
+              <a:lnSpc>
+                <a:spcPct val="118000"/>
+              </a:lnSpc>
+              <a:spcBef>
+                <a:spcPts val="0"/>
+              </a:spcBef>
+              <a:spcAft>
+                <a:spcPts val="1000"/>
+              </a:spcAft>
+            </a:pPr>
+            <a:r>
+              <a:rPr sz="1500" b="1">
                 <a:solidFill>
                   <a:srgbClr val="1A1A1A"/>
                 </a:solidFill>
                 <a:latin typeface="Manrope"/>
                 <a:rFonts ascii="Manrope" hAnsi="Manrope" cs="Manrope" eastAsia="Manrope"/>
               </a:rPr>
-              <a:t>Не конкурируют.</a:t>
-            </a:r>
-          </a:p>
-          <a:p>
-            <a:pPr algn="l">
-              <a:lnSpc>
-                <a:spcPct val="118000"/>
-              </a:lnSpc>
-              <a:spcBef>
-                <a:spcPts val="0"/>
-              </a:spcBef>
-              <a:spcAft>
-                <a:spcPts val="800"/>
-              </a:spcAft>
-            </a:pPr>
-            <a:r>
-              <a:rPr sz="1600" b="0">
+              <a:t>Fleur и Natural не конкурируют — разные задачи.</a:t>
+            </a:r>
+          </a:p>
+          <a:p>
+            <a:pPr algn="l">
+              <a:lnSpc>
+                <a:spcPct val="118000"/>
+              </a:lnSpc>
+              <a:spcBef>
+                <a:spcPts val="0"/>
+              </a:spcBef>
+              <a:spcAft>
+                <a:spcPts val="600"/>
+              </a:spcAft>
+            </a:pPr>
+            <a:r>
+              <a:rPr sz="1500" b="0">
                 <a:solidFill>
                   <a:srgbClr val="1A1A1A"/>
                 </a:solidFill>
                 <a:latin typeface="Golos Text"/>
                 <a:rFonts ascii="Golos Text" hAnsi="Golos Text" cs="Golos Text" eastAsia="Golos Text"/>
               </a:rPr>
-              <a:t>Могут жить на разных этажах одного объекта.</a:t>
+              <a:t>На одном объекте: стандартные номера — Hotel Line или Fleur; wellness-корпус или этаж с eco-запросом — Natural.</a:t>
             </a:r>
           </a:p>
         </p:txBody>
@@ -8588,7 +8749,7 @@
               </a:spcAft>
             </a:pPr>
             <a:r>
-              <a:rPr sz="1600" b="1">
+              <a:rPr sz="1500" b="1">
                 <a:solidFill>
                   <a:srgbClr val="1A1A1A"/>
                 </a:solidFill>
@@ -8607,30 +8768,30 @@
                 <a:spcPts val="0"/>
               </a:spcBef>
               <a:spcAft>
-                <a:spcPts val="1200"/>
-              </a:spcAft>
-            </a:pPr>
-            <a:r>
-              <a:rPr sz="1600" b="0">
+                <a:spcPts val="1000"/>
+              </a:spcAft>
+            </a:pPr>
+            <a:r>
+              <a:rPr sz="1500" b="0">
                 <a:solidFill>
                   <a:srgbClr val="1A1A1A"/>
                 </a:solidFill>
                 <a:latin typeface="Golos Text"/>
                 <a:rFonts ascii="Golos Text" hAnsi="Golos Text" cs="Golos Text" eastAsia="Golos Text"/>
               </a:rPr>
-              <a:t>для отеля, которому важны и гость, и документы.</a:t>
-            </a:r>
-          </a:p>
-          <a:p>
-            <a:pPr algn="l">
-              <a:lnSpc>
-                <a:spcPct val="118000"/>
-              </a:lnSpc>
-              <a:spcBef>
-                <a:spcPts val="0"/>
-              </a:spcBef>
-              <a:spcAft>
-                <a:spcPts val="600"/>
+              <a:t>Для отеля, которому важен комфорт гостя и спокойная проверка документов.</a:t>
+            </a:r>
+          </a:p>
+          <a:p>
+            <a:pPr algn="l">
+              <a:lnSpc>
+                <a:spcPct val="118000"/>
+              </a:lnSpc>
+              <a:spcBef>
+                <a:spcPts val="0"/>
+              </a:spcBef>
+              <a:spcAft>
+                <a:spcPts val="400"/>
               </a:spcAft>
             </a:pPr>
             <a:r>
@@ -8653,34 +8814,34 @@
                 <a:spcPts val="0"/>
               </a:spcBef>
               <a:spcAft>
-                <a:spcPts val="800"/>
-              </a:spcAft>
-            </a:pPr>
-            <a:r>
-              <a:rPr sz="1600" b="0">
+                <a:spcPts val="600"/>
+              </a:spcAft>
+            </a:pPr>
+            <a:r>
+              <a:rPr sz="1500" b="0">
                 <a:solidFill>
                   <a:srgbClr val="1A1A1A"/>
                 </a:solidFill>
                 <a:latin typeface="Golos Text"/>
                 <a:rFonts ascii="Golos Text" hAnsi="Golos Text" cs="Golos Text" eastAsia="Golos Text"/>
               </a:rPr>
-              <a:t>• Состав в границах</a:t>
-            </a:r>
-          </a:p>
-          <a:p>
-            <a:pPr algn="l">
-              <a:lnSpc>
-                <a:spcPct val="118000"/>
-              </a:lnSpc>
-              <a:spcBef>
-                <a:spcPts val="0"/>
-              </a:spcBef>
-              <a:spcAft>
-                <a:spcPts val="800"/>
-              </a:spcAft>
-            </a:pPr>
-            <a:r>
-              <a:rPr sz="1600" b="0">
+              <a:t>• Состав в согласованных границах</a:t>
+            </a:r>
+          </a:p>
+          <a:p>
+            <a:pPr algn="l">
+              <a:lnSpc>
+                <a:spcPct val="118000"/>
+              </a:lnSpc>
+              <a:spcBef>
+                <a:spcPts val="0"/>
+              </a:spcBef>
+              <a:spcAft>
+                <a:spcPts val="600"/>
+              </a:spcAft>
+            </a:pPr>
+            <a:r>
+              <a:rPr sz="1500" b="0">
                 <a:solidFill>
                   <a:srgbClr val="1A1A1A"/>
                 </a:solidFill>
@@ -8699,57 +8860,57 @@
                 <a:spcPts val="0"/>
               </a:spcBef>
               <a:spcAft>
-                <a:spcPts val="800"/>
-              </a:spcAft>
-            </a:pPr>
-            <a:r>
-              <a:rPr sz="1600" b="0">
+                <a:spcPts val="600"/>
+              </a:spcAft>
+            </a:pPr>
+            <a:r>
+              <a:rPr sz="1500" b="0">
                 <a:solidFill>
                   <a:srgbClr val="1A1A1A"/>
                 </a:solidFill>
                 <a:latin typeface="Golos Text"/>
                 <a:rFonts ascii="Golos Text" hAnsi="Golos Text" cs="Golos Text" eastAsia="Golos Text"/>
               </a:rPr>
-              <a:t>• Ощущение в номере</a:t>
-            </a:r>
-          </a:p>
-          <a:p>
-            <a:pPr algn="l">
-              <a:lnSpc>
-                <a:spcPct val="118000"/>
-              </a:lnSpc>
-              <a:spcBef>
-                <a:spcPts val="0"/>
-              </a:spcBef>
-              <a:spcAft>
-                <a:spcPts val="800"/>
-              </a:spcAft>
-            </a:pPr>
-            <a:r>
-              <a:rPr sz="1600" b="0">
+              <a:t>• Ощущение в номере после использования</a:t>
+            </a:r>
+          </a:p>
+          <a:p>
+            <a:pPr algn="l">
+              <a:lnSpc>
+                <a:spcPct val="118000"/>
+              </a:lnSpc>
+              <a:spcBef>
+                <a:spcPts val="0"/>
+              </a:spcBef>
+              <a:spcAft>
+                <a:spcPts val="600"/>
+              </a:spcAft>
+            </a:pPr>
+            <a:r>
+              <a:rPr sz="1500" b="0">
                 <a:solidFill>
                   <a:srgbClr val="1A1A1A"/>
                 </a:solidFill>
                 <a:latin typeface="Golos Text"/>
                 <a:rFonts ascii="Golos Text" hAnsi="Golos Text" cs="Golos Text" eastAsia="Golos Text"/>
               </a:rPr>
-              <a:t>• Один поставщик на номер</a:t>
-            </a:r>
-          </a:p>
-          <a:p>
-            <a:pPr algn="l">
-              <a:lnSpc>
-                <a:spcPct val="118000"/>
-              </a:lnSpc>
-              <a:spcBef>
-                <a:spcPts val="0"/>
-              </a:spcBef>
-              <a:spcAft>
-                <a:spcPts val="800"/>
-              </a:spcAft>
-            </a:pPr>
-            <a:r>
-              <a:rPr sz="1600" b="0">
+              <a:t>• Один поставщик на весь номер</a:t>
+            </a:r>
+          </a:p>
+          <a:p>
+            <a:pPr algn="l">
+              <a:lnSpc>
+                <a:spcPct val="118000"/>
+              </a:lnSpc>
+              <a:spcBef>
+                <a:spcPts val="0"/>
+              </a:spcBef>
+              <a:spcAft>
+                <a:spcPts val="600"/>
+              </a:spcAft>
+            </a:pPr>
+            <a:r>
+              <a:rPr sz="1500" b="0">
                 <a:solidFill>
                   <a:srgbClr val="1A1A1A"/>
                 </a:solidFill>
@@ -8812,18 +8973,64 @@
                 <a:spcPts val="0"/>
               </a:spcBef>
               <a:spcAft>
+                <a:spcPts val="200"/>
+              </a:spcAft>
+            </a:pPr>
+            <a:r>
+              <a:rPr sz="1500" b="1">
+                <a:solidFill>
+                  <a:srgbClr val="1A1A1A"/>
+                </a:solidFill>
+                <a:latin typeface="Manrope"/>
+                <a:rFonts ascii="Manrope" hAnsi="Manrope" cs="Manrope" eastAsia="Manrope"/>
+              </a:rPr>
+              <a:t>Герой</a:t>
+            </a:r>
+          </a:p>
+          <a:p>
+            <a:pPr algn="l">
+              <a:lnSpc>
+                <a:spcPct val="118000"/>
+              </a:lnSpc>
+              <a:spcBef>
+                <a:spcPts val="0"/>
+              </a:spcBef>
+              <a:spcAft>
                 <a:spcPts val="800"/>
               </a:spcAft>
             </a:pPr>
             <a:r>
-              <a:rPr sz="1600" b="0">
+              <a:rPr sz="1500" b="0">
                 <a:solidFill>
                   <a:srgbClr val="1A1A1A"/>
                 </a:solidFill>
                 <a:latin typeface="Golos Text"/>
                 <a:rFonts ascii="Golos Text" hAnsi="Golos Text" cs="Golos Text" eastAsia="Golos Text"/>
               </a:rPr>
-              <a:t>Герой: закупщик eco / wellness</a:t>
+              <a:t>Закупщик отеля с запросом eco / wellness: выглядеть «зеленее» без дыры в бюджете и в бумагах.</a:t>
+            </a:r>
+          </a:p>
+          <a:p>
+            <a:pPr algn="l">
+              <a:lnSpc>
+                <a:spcPct val="118000"/>
+              </a:lnSpc>
+              <a:spcBef>
+                <a:spcPts val="0"/>
+              </a:spcBef>
+              <a:spcAft>
+                <a:spcPts val="200"/>
+              </a:spcAft>
+            </a:pPr>
+            <a:r>
+              <a:rPr sz="1500" b="1">
+                <a:solidFill>
+                  <a:srgbClr val="1A1A1A"/>
+                </a:solidFill>
+                <a:latin typeface="Manrope"/>
+                <a:rFonts ascii="Manrope" hAnsi="Manrope" cs="Manrope" eastAsia="Manrope"/>
+              </a:rPr>
+              <a:t>Проводник</a:t>
             </a:r>
           </a:p>
           <a:p>
@@ -8839,37 +9046,60 @@
               </a:spcAft>
             </a:pPr>
             <a:r>
-              <a:rPr sz="1600" b="0">
+              <a:rPr sz="1500" b="0">
                 <a:solidFill>
                   <a:srgbClr val="1A1A1A"/>
                 </a:solidFill>
                 <a:latin typeface="Golos Text"/>
                 <a:rFonts ascii="Golos Text" hAnsi="Golos Text" cs="Golos Text" eastAsia="Golos Text"/>
               </a:rPr>
-              <a:t>Проводник: Travel+ Natural</a:t>
-            </a:r>
-          </a:p>
-          <a:p>
-            <a:pPr algn="l">
-              <a:lnSpc>
-                <a:spcPct val="118000"/>
-              </a:lnSpc>
-              <a:spcBef>
-                <a:spcPts val="0"/>
-              </a:spcBef>
-              <a:spcAft>
-                <a:spcPts val="1400"/>
-              </a:spcAft>
-            </a:pPr>
-            <a:r>
-              <a:rPr sz="1600" b="0">
+              <a:t>Travel+ Natural — своя линейка, документы и one-stop на номер.</a:t>
+            </a:r>
+          </a:p>
+          <a:p>
+            <a:pPr algn="l">
+              <a:lnSpc>
+                <a:spcPct val="118000"/>
+              </a:lnSpc>
+              <a:spcBef>
+                <a:spcPts val="0"/>
+              </a:spcBef>
+              <a:spcAft>
+                <a:spcPts val="200"/>
+              </a:spcAft>
+            </a:pPr>
+            <a:r>
+              <a:rPr sz="1500" b="1">
+                <a:solidFill>
+                  <a:srgbClr val="1A1A1A"/>
+                </a:solidFill>
+                <a:latin typeface="Manrope"/>
+                <a:rFonts ascii="Manrope" hAnsi="Manrope" cs="Manrope" eastAsia="Manrope"/>
+              </a:rPr>
+              <a:t>План</a:t>
+            </a:r>
+          </a:p>
+          <a:p>
+            <a:pPr algn="l">
+              <a:lnSpc>
+                <a:spcPct val="118000"/>
+              </a:lnSpc>
+              <a:spcBef>
+                <a:spcPts val="0"/>
+              </a:spcBef>
+              <a:spcAft>
+                <a:spcPts val="600"/>
+              </a:spcAft>
+            </a:pPr>
+            <a:r>
+              <a:rPr sz="1500" b="0">
                 <a:solidFill>
                   <a:srgbClr val="1A1A1A"/>
                 </a:solidFill>
                 <a:latin typeface="Golos Text"/>
                 <a:rFonts ascii="Golos Text" hAnsi="Golos Text" cs="Golos Text" eastAsia="Golos Text"/>
               </a:rPr>
-              <a:t>План: сегмент → образец + документы → пилот</a:t>
+              <a:t>1. Согласовать сегмент и объект</a:t>
             </a:r>
           </a:p>
           <a:p>
@@ -8885,13 +9115,59 @@
               </a:spcAft>
             </a:pPr>
             <a:r>
-              <a:rPr sz="1400" b="0">
-                <a:solidFill>
-                  <a:srgbClr val="5C5C5C"/>
+              <a:rPr sz="1500" b="0">
+                <a:solidFill>
+                  <a:srgbClr val="1A1A1A"/>
                 </a:solidFill>
                 <a:latin typeface="Golos Text"/>
                 <a:rFonts ascii="Golos Text" hAnsi="Golos Text" cs="Golos Text" eastAsia="Golos Text"/>
               </a:rPr>
+              <a:t>2. Образец с этикеткой и пакетом документов</a:t>
+            </a:r>
+          </a:p>
+          <a:p>
+            <a:pPr algn="l">
+              <a:lnSpc>
+                <a:spcPct val="118000"/>
+              </a:lnSpc>
+              <a:spcBef>
+                <a:spcPts val="0"/>
+              </a:spcBef>
+              <a:spcAft>
+                <a:spcPts val="1000"/>
+              </a:spcAft>
+            </a:pPr>
+            <a:r>
+              <a:rPr sz="1500" b="0">
+                <a:solidFill>
+                  <a:srgbClr val="1A1A1A"/>
+                </a:solidFill>
+                <a:latin typeface="Golos Text"/>
+                <a:rFonts ascii="Golos Text" hAnsi="Golos Text" cs="Golos Text" eastAsia="Golos Text"/>
+              </a:rPr>
+              <a:t>3. Пилот на этаже или в корпусе</a:t>
+            </a:r>
+          </a:p>
+          <a:p>
+            <a:pPr algn="l">
+              <a:lnSpc>
+                <a:spcPct val="118000"/>
+              </a:lnSpc>
+              <a:spcBef>
+                <a:spcPts val="0"/>
+              </a:spcBef>
+              <a:spcAft>
+                <a:spcPts val="400"/>
+              </a:spcAft>
+            </a:pPr>
+            <a:r>
+              <a:rPr sz="1400" b="0">
+                <a:solidFill>
+                  <a:srgbClr val="5C5C5C"/>
+                </a:solidFill>
+                <a:latin typeface="Golos Text"/>
+                <a:rFonts ascii="Golos Text" hAnsi="Golos Text" cs="Golos Text" eastAsia="Golos Text"/>
+              </a:rPr>
               <a:t>Гость после дороги:</a:t>
             </a:r>
           </a:p>
@@ -8904,41 +9180,41 @@
                 <a:spcPts val="0"/>
               </a:spcBef>
               <a:spcAft>
-                <a:spcPts val="800"/>
-              </a:spcAft>
-            </a:pPr>
-            <a:r>
-              <a:rPr sz="1600" b="1">
+                <a:spcPts val="200"/>
+              </a:spcAft>
+            </a:pPr>
+            <a:r>
+              <a:rPr sz="1500" b="1">
                 <a:solidFill>
                   <a:srgbClr val="1A1A1A"/>
                 </a:solidFill>
                 <a:latin typeface="Manrope"/>
                 <a:rFonts ascii="Manrope" hAnsi="Manrope" cs="Manrope" eastAsia="Manrope"/>
               </a:rPr>
-              <a:t>Мягче, чем ждал.</a:t>
-            </a:r>
-          </a:p>
-          <a:p>
-            <a:pPr algn="l">
-              <a:lnSpc>
-                <a:spcPct val="118000"/>
-              </a:lnSpc>
-              <a:spcBef>
-                <a:spcPts val="0"/>
-              </a:spcBef>
-              <a:spcAft>
-                <a:spcPts val="800"/>
-              </a:spcAft>
-            </a:pPr>
-            <a:r>
-              <a:rPr sz="1600" b="0">
+              <a:t>Ощущение мягче, чем ожидал.</a:t>
+            </a:r>
+          </a:p>
+          <a:p>
+            <a:pPr algn="l">
+              <a:lnSpc>
+                <a:spcPct val="118000"/>
+              </a:lnSpc>
+              <a:spcBef>
+                <a:spcPts val="0"/>
+              </a:spcBef>
+              <a:spcAft>
+                <a:spcPts val="600"/>
+              </a:spcAft>
+            </a:pPr>
+            <a:r>
+              <a:rPr sz="1500" b="0">
                 <a:solidFill>
                   <a:srgbClr val="1A1A1A"/>
                 </a:solidFill>
                 <a:latin typeface="Golos Text"/>
                 <a:rFonts ascii="Golos Text" hAnsi="Golos Text" cs="Golos Text" eastAsia="Golos Text"/>
               </a:rPr>
-              <a:t>Понятная натуральность без громких обещаний.</a:t>
+              <a:t>Понятная натуральность — без громких обещаний на этикетке.</a:t>
             </a:r>
           </a:p>
         </p:txBody>
@@ -9077,7 +9353,7 @@
                 <a:latin typeface="Manrope"/>
                 <a:rFonts ascii="Manrope" hAnsi="Manrope" cs="Manrope" eastAsia="Manrope"/>
               </a:rPr>
-              <a:t>Границы до рынка — DoD этапа 2</a:t>
+              <a:t>Готовность продукта перед рынком</a:t>
             </a:r>
           </a:p>
         </p:txBody>
@@ -9458,168 +9734,168 @@
                 <a:latin typeface="Manrope"/>
                 <a:rFonts ascii="Manrope" hAnsi="Manrope" cs="Manrope" eastAsia="Manrope"/>
               </a:rPr>
-              <a:t>Пока красное — витрину не открываем</a:t>
-            </a:r>
-          </a:p>
-          <a:p>
-            <a:pPr algn="l">
-              <a:lnSpc>
-                <a:spcPct val="118000"/>
-              </a:lnSpc>
-              <a:spcBef>
-                <a:spcPts val="0"/>
-              </a:spcBef>
-              <a:spcAft>
-                <a:spcPts val="800"/>
-              </a:spcAft>
-            </a:pPr>
-            <a:r>
-              <a:rPr sz="1600" b="0">
+              <a:t>Чеклист: без этого — не в продажи</a:t>
+            </a:r>
+          </a:p>
+          <a:p>
+            <a:pPr algn="l">
+              <a:lnSpc>
+                <a:spcPct val="118000"/>
+              </a:lnSpc>
+              <a:spcBef>
+                <a:spcPts val="0"/>
+              </a:spcBef>
+              <a:spcAft>
+                <a:spcPts val="600"/>
+              </a:spcAft>
+            </a:pPr>
+            <a:r>
+              <a:rPr sz="1500" b="0">
                 <a:solidFill>
                   <a:srgbClr val="1A1A1A"/>
                 </a:solidFill>
                 <a:latin typeface="Golos Text"/>
                 <a:rFonts ascii="Golos Text" hAnsi="Golos Text" cs="Golos Text" eastAsia="Golos Text"/>
               </a:rPr>
-              <a:t>□ Метод и % натуральности</a:t>
-            </a:r>
-          </a:p>
-          <a:p>
-            <a:pPr algn="l">
-              <a:lnSpc>
-                <a:spcPct val="118000"/>
-              </a:lnSpc>
-              <a:spcBef>
-                <a:spcPts val="0"/>
-              </a:spcBef>
-              <a:spcAft>
-                <a:spcPts val="800"/>
-              </a:spcAft>
-            </a:pPr>
-            <a:r>
-              <a:rPr sz="1600" b="0">
+              <a:t>□ Метод расчёта и доля натуральных ингредиентов</a:t>
+            </a:r>
+          </a:p>
+          <a:p>
+            <a:pPr algn="l">
+              <a:lnSpc>
+                <a:spcPct val="118000"/>
+              </a:lnSpc>
+              <a:spcBef>
+                <a:spcPts val="0"/>
+              </a:spcBef>
+              <a:spcAft>
+                <a:spcPts val="600"/>
+              </a:spcAft>
+            </a:pPr>
+            <a:r>
+              <a:rPr sz="1500" b="0">
                 <a:solidFill>
                   <a:srgbClr val="1A1A1A"/>
                 </a:solidFill>
                 <a:latin typeface="Golos Text"/>
                 <a:rFonts ascii="Golos Text" hAnsi="Golos Text" cs="Golos Text" eastAsia="Golos Text"/>
               </a:rPr>
-              <a:t>□ Пакет как у HL / Fleur + лист Natural</a:t>
-            </a:r>
-          </a:p>
-          <a:p>
-            <a:pPr algn="l">
-              <a:lnSpc>
-                <a:spcPct val="118000"/>
-              </a:lnSpc>
-              <a:spcBef>
-                <a:spcPts val="0"/>
-              </a:spcBef>
-              <a:spcAft>
-                <a:spcPts val="800"/>
-              </a:spcAft>
-            </a:pPr>
-            <a:r>
-              <a:rPr sz="1600" b="0">
+              <a:t>□ Пакет документов как у Hotel Line и Fleur + лист состава Natural</a:t>
+            </a:r>
+          </a:p>
+          <a:p>
+            <a:pPr algn="l">
+              <a:lnSpc>
+                <a:spcPct val="118000"/>
+              </a:lnSpc>
+              <a:spcBef>
+                <a:spcPts val="0"/>
+              </a:spcBef>
+              <a:spcAft>
+                <a:spcPts val="600"/>
+              </a:spcAft>
+            </a:pPr>
+            <a:r>
+              <a:rPr sz="1500" b="0">
                 <a:solidFill>
                   <a:srgbClr val="1A1A1A"/>
                 </a:solidFill>
                 <a:latin typeface="Golos Text"/>
                 <a:rFonts ascii="Golos Text" hAnsi="Golos Text" cs="Golos Text" eastAsia="Golos Text"/>
               </a:rPr>
-              <a:t>□ Origin зафиксирован</a:t>
-            </a:r>
-          </a:p>
-          <a:p>
-            <a:pPr algn="l">
-              <a:lnSpc>
-                <a:spcPct val="118000"/>
-              </a:lnSpc>
-              <a:spcBef>
-                <a:spcPts val="0"/>
-              </a:spcBef>
-              <a:spcAft>
-                <a:spcPts val="800"/>
-              </a:spcAft>
-            </a:pPr>
-            <a:r>
-              <a:rPr sz="1600" b="0">
+              <a:t>□ Происхождение (origin) зафиксировано письменно</a:t>
+            </a:r>
+          </a:p>
+          <a:p>
+            <a:pPr algn="l">
+              <a:lnSpc>
+                <a:spcPct val="118000"/>
+              </a:lnSpc>
+              <a:spcBef>
+                <a:spcPts val="0"/>
+              </a:spcBef>
+              <a:spcAft>
+                <a:spcPts val="600"/>
+              </a:spcAft>
+            </a:pPr>
+            <a:r>
+              <a:rPr sz="1500" b="0">
                 <a:solidFill>
                   <a:srgbClr val="1A1A1A"/>
                 </a:solidFill>
                 <a:latin typeface="Golos Text"/>
                 <a:rFonts ascii="Golos Text" hAnsi="Golos Text" cs="Golos Text" eastAsia="Golos Text"/>
               </a:rPr>
-              <a:t>□ Слепой тест запаха с гостями</a:t>
-            </a:r>
-          </a:p>
-          <a:p>
-            <a:pPr algn="l">
-              <a:lnSpc>
-                <a:spcPct val="118000"/>
-              </a:lnSpc>
-              <a:spcBef>
-                <a:spcPts val="0"/>
-              </a:spcBef>
-              <a:spcAft>
-                <a:spcPts val="800"/>
-              </a:spcAft>
-            </a:pPr>
-            <a:r>
-              <a:rPr sz="1600" b="0">
+              <a:t>□ Слепой тест запаха и ощущения с гостями</a:t>
+            </a:r>
+          </a:p>
+          <a:p>
+            <a:pPr algn="l">
+              <a:lnSpc>
+                <a:spcPct val="118000"/>
+              </a:lnSpc>
+              <a:spcBef>
+                <a:spcPts val="0"/>
+              </a:spcBef>
+              <a:spcAft>
+                <a:spcPts val="600"/>
+              </a:spcAft>
+            </a:pPr>
+            <a:r>
+              <a:rPr sz="1500" b="0">
                 <a:solidFill>
                   <a:srgbClr val="1A1A1A"/>
                 </a:solidFill>
                 <a:latin typeface="Golos Text"/>
                 <a:rFonts ascii="Golos Text" hAnsi="Golos Text" cs="Golos Text" eastAsia="Golos Text"/>
               </a:rPr>
-              <a:t>□ Этикетка «простыми словами»</a:t>
-            </a:r>
-          </a:p>
-          <a:p>
-            <a:pPr algn="l">
-              <a:lnSpc>
-                <a:spcPct val="118000"/>
-              </a:lnSpc>
-              <a:spcBef>
-                <a:spcPts val="0"/>
-              </a:spcBef>
-              <a:spcAft>
-                <a:spcPts val="800"/>
-              </a:spcAft>
-            </a:pPr>
-            <a:r>
-              <a:rPr sz="1600" b="0">
+              <a:t>□ Этикетка с блоком «простыми словами»</a:t>
+            </a:r>
+          </a:p>
+          <a:p>
+            <a:pPr algn="l">
+              <a:lnSpc>
+                <a:spcPct val="118000"/>
+              </a:lnSpc>
+              <a:spcBef>
+                <a:spcPts val="0"/>
+              </a:spcBef>
+              <a:spcAft>
+                <a:spcPts val="600"/>
+              </a:spcAft>
+            </a:pPr>
+            <a:r>
+              <a:rPr sz="1500" b="0">
                 <a:solidFill>
                   <a:srgbClr val="1A1A1A"/>
                 </a:solidFill>
                 <a:latin typeface="Golos Text"/>
                 <a:rFonts ascii="Golos Text" hAnsi="Golos Text" cs="Golos Text" eastAsia="Golos Text"/>
               </a:rPr>
-              <a:t>□ Себестоимость и коридор цены</a:t>
-            </a:r>
-          </a:p>
-          <a:p>
-            <a:pPr algn="l">
-              <a:lnSpc>
-                <a:spcPct val="118000"/>
-              </a:lnSpc>
-              <a:spcBef>
-                <a:spcPts val="0"/>
-              </a:spcBef>
-              <a:spcAft>
-                <a:spcPts val="800"/>
-              </a:spcAft>
-            </a:pPr>
-            <a:r>
-              <a:rPr sz="1600" b="0">
+              <a:t>□ Себестоимость и коридор цены на полке</a:t>
+            </a:r>
+          </a:p>
+          <a:p>
+            <a:pPr algn="l">
+              <a:lnSpc>
+                <a:spcPct val="118000"/>
+              </a:lnSpc>
+              <a:spcBef>
+                <a:spcPts val="0"/>
+              </a:spcBef>
+              <a:spcAft>
+                <a:spcPts val="600"/>
+              </a:spcAft>
+            </a:pPr>
+            <a:r>
+              <a:rPr sz="1500" b="0">
                 <a:solidFill>
                   <a:srgbClr val="1A1A1A"/>
                 </a:solidFill>
                 <a:latin typeface="Golos Text"/>
                 <a:rFonts ascii="Golos Text" hAnsi="Golos Text" cs="Golos Text" eastAsia="Golos Text"/>
               </a:rPr>
-              <a:t>□ Срок поставки / мин. заказ / брак</a:t>
+              <a:t>□ Срок поставки, минимальный заказ, правила брака</a:t>
             </a:r>
           </a:p>
         </p:txBody>
@@ -9663,99 +9939,122 @@
                 <a:latin typeface="Manrope"/>
                 <a:rFonts ascii="Manrope" hAnsi="Manrope" cs="Manrope" eastAsia="Manrope"/>
               </a:rPr>
-              <a:t>Правила</a:t>
-            </a:r>
-          </a:p>
-          <a:p>
-            <a:pPr algn="l">
-              <a:lnSpc>
-                <a:spcPct val="118000"/>
-              </a:lnSpc>
-              <a:spcBef>
-                <a:spcPts val="0"/>
-              </a:spcBef>
-              <a:spcAft>
-                <a:spcPts val="800"/>
-              </a:spcAft>
-            </a:pPr>
-            <a:r>
-              <a:rPr sz="1600" b="0">
+              <a:t>Как читать список</a:t>
+            </a:r>
+          </a:p>
+          <a:p>
+            <a:pPr algn="l">
+              <a:lnSpc>
+                <a:spcPct val="118000"/>
+              </a:lnSpc>
+              <a:spcBef>
+                <a:spcPts val="0"/>
+              </a:spcBef>
+              <a:spcAft>
+                <a:spcPts val="600"/>
+              </a:spcAft>
+            </a:pPr>
+            <a:r>
+              <a:rPr sz="1500" b="0">
                 <a:solidFill>
                   <a:srgbClr val="1A1A1A"/>
                 </a:solidFill>
                 <a:latin typeface="Golos Text"/>
                 <a:rFonts ascii="Golos Text" hAnsi="Golos Text" cs="Golos Text" eastAsia="Golos Text"/>
               </a:rPr>
-              <a:t>На старте без COSMOS, если знака нет — честно.</a:t>
-            </a:r>
-          </a:p>
-          <a:p>
-            <a:pPr algn="l">
-              <a:lnSpc>
-                <a:spcPct val="118000"/>
-              </a:lnSpc>
-              <a:spcBef>
-                <a:spcPts val="0"/>
-              </a:spcBef>
-              <a:spcAft>
-                <a:spcPts val="1200"/>
-              </a:spcAft>
-            </a:pPr>
-            <a:r>
-              <a:rPr sz="1600" b="1">
+              <a:t>Каждый пункт — обязательное условие.</a:t>
+            </a:r>
+          </a:p>
+          <a:p>
+            <a:pPr algn="l">
+              <a:lnSpc>
+                <a:spcPct val="118000"/>
+              </a:lnSpc>
+              <a:spcBef>
+                <a:spcPts val="0"/>
+              </a:spcBef>
+              <a:spcAft>
+                <a:spcPts val="600"/>
+              </a:spcAft>
+            </a:pPr>
+            <a:r>
+              <a:rPr sz="1500" b="0">
+                <a:solidFill>
+                  <a:srgbClr val="1A1A1A"/>
+                </a:solidFill>
+                <a:latin typeface="Golos Text"/>
+                <a:rFonts ascii="Golos Text" hAnsi="Golos Text" cs="Golos Text" eastAsia="Golos Text"/>
+              </a:rPr>
+              <a:t>Пока хотя бы один не закрыт — коммерческое предложение и выход на витрину стоп.</a:t>
+            </a:r>
+          </a:p>
+          <a:p>
+            <a:pPr algn="l">
+              <a:lnSpc>
+                <a:spcPct val="118000"/>
+              </a:lnSpc>
+              <a:spcBef>
+                <a:spcPts val="0"/>
+              </a:spcBef>
+              <a:spcAft>
+                <a:spcPts val="1000"/>
+              </a:spcAft>
+            </a:pPr>
+            <a:r>
+              <a:rPr sz="1500" b="0">
+                <a:solidFill>
+                  <a:srgbClr val="1A1A1A"/>
+                </a:solidFill>
+                <a:latin typeface="Golos Text"/>
+                <a:rFonts ascii="Golos Text" hAnsi="Golos Text" cs="Golos Text" eastAsia="Golos Text"/>
+              </a:rPr>
+              <a:t>На старте без знака COSMOS, если его нет — говорим честно.</a:t>
+            </a:r>
+          </a:p>
+          <a:p>
+            <a:pPr algn="l">
+              <a:lnSpc>
+                <a:spcPct val="118000"/>
+              </a:lnSpc>
+              <a:spcBef>
+                <a:spcPts val="0"/>
+              </a:spcBef>
+              <a:spcAft>
+                <a:spcPts val="200"/>
+              </a:spcAft>
+            </a:pPr>
+            <a:r>
+              <a:rPr sz="1500" b="1">
                 <a:solidFill>
                   <a:srgbClr val="1A1A1A"/>
                 </a:solidFill>
                 <a:latin typeface="Manrope"/>
                 <a:rFonts ascii="Manrope" hAnsi="Manrope" cs="Manrope" eastAsia="Manrope"/>
               </a:rPr>
-              <a:t>Без DoD — не КП и не live GTM.</a:t>
-            </a:r>
-          </a:p>
-          <a:p>
-            <a:pPr algn="l">
-              <a:lnSpc>
-                <a:spcPct val="118000"/>
-              </a:lnSpc>
-              <a:spcBef>
-                <a:spcPts val="0"/>
-              </a:spcBef>
-              <a:spcAft>
-                <a:spcPts val="800"/>
-              </a:spcAft>
-            </a:pPr>
-            <a:r>
-              <a:rPr sz="1600" b="0">
+              <a:t>Этапы 3–6 в пульте — учебный сценарий,</a:t>
+            </a:r>
+          </a:p>
+          <a:p>
+            <a:pPr algn="l">
+              <a:lnSpc>
+                <a:spcPct val="118000"/>
+              </a:lnSpc>
+              <a:spcBef>
+                <a:spcPts val="0"/>
+              </a:spcBef>
+              <a:spcAft>
+                <a:spcPts val="600"/>
+              </a:spcAft>
+            </a:pPr>
+            <a:r>
+              <a:rPr sz="1500" b="0">
                 <a:solidFill>
                   <a:srgbClr val="1A1A1A"/>
                 </a:solidFill>
                 <a:latin typeface="Golos Text"/>
                 <a:rFonts ascii="Golos Text" hAnsi="Golos Text" cs="Golos Text" eastAsia="Golos Text"/>
               </a:rPr>
-              <a:t>Этапы 3–6 — учебный сценарий,</a:t>
-            </a:r>
-          </a:p>
-          <a:p>
-            <a:pPr algn="l">
-              <a:lnSpc>
-                <a:spcPct val="118000"/>
-              </a:lnSpc>
-              <a:spcBef>
-                <a:spcPts val="0"/>
-              </a:spcBef>
-              <a:spcAft>
-                <a:spcPts val="800"/>
-              </a:spcAft>
-            </a:pPr>
-            <a:r>
-              <a:rPr sz="1600" b="0">
-                <a:solidFill>
-                  <a:srgbClr val="1A1A1A"/>
-                </a:solidFill>
-                <a:latin typeface="Golos Text"/>
-                <a:rFonts ascii="Golos Text" hAnsi="Golos Text" cs="Golos Text" eastAsia="Golos Text"/>
-              </a:rPr>
-              <a:t>не факт завода.</a:t>
+              <a:t>а не отчёт завода и не основание для КП.</a:t>
             </a:r>
           </a:p>
         </p:txBody>
@@ -10065,7 +10364,7 @@
         <p:spPr>
           <a:xfrm>
             <a:off x="457200" y="960120"/>
-            <a:ext cx="11277295" cy="4206240"/>
+            <a:ext cx="11277295" cy="4343400"/>
           </a:xfrm>
           <a:prstGeom prst="roundRect">
             <a:avLst>
@@ -10155,7 +10454,7 @@
         <p:spPr>
           <a:xfrm>
             <a:off x="804672" y="1426464"/>
-            <a:ext cx="10582351" cy="3465576"/>
+            <a:ext cx="10582351" cy="3602736"/>
           </a:xfrm>
           <a:prstGeom prst="rect">
             <a:avLst/>
@@ -10174,18 +10473,41 @@
                 <a:spcPts val="0"/>
               </a:spcBef>
               <a:spcAft>
+                <a:spcPts val="400"/>
+              </a:spcAft>
+            </a:pPr>
+            <a:r>
+              <a:rPr sz="1600" b="1">
+                <a:solidFill>
+                  <a:srgbClr val="1A1A1A"/>
+                </a:solidFill>
+                <a:latin typeface="Manrope"/>
+                <a:rFonts ascii="Manrope" hAnsi="Manrope" cs="Manrope" eastAsia="Manrope"/>
+              </a:rPr>
+              <a:t>Задача закупщика</a:t>
+            </a:r>
+          </a:p>
+          <a:p>
+            <a:pPr algn="l">
+              <a:lnSpc>
+                <a:spcPct val="118000"/>
+              </a:lnSpc>
+              <a:spcBef>
+                <a:spcPts val="0"/>
+              </a:spcBef>
+              <a:spcAft>
                 <a:spcPts val="1000"/>
               </a:spcAft>
             </a:pPr>
             <a:r>
-              <a:rPr sz="1700" b="0">
+              <a:rPr sz="1500" b="0">
                 <a:solidFill>
                   <a:srgbClr val="1A1A1A"/>
                 </a:solidFill>
                 <a:latin typeface="Golos Text"/>
                 <a:rFonts ascii="Golos Text" hAnsi="Golos Text" cs="Golos Text" eastAsia="Golos Text"/>
               </a:rPr>
-              <a:t>«Вам нужно выглядеть зеленее — и спокойно пройти и гостя, и документы.</a:t>
+              <a:t>Отель хочет выглядеть экологичнее — без риска для гостя и без пробелов в документах при проверке.</a:t>
             </a:r>
           </a:p>
           <a:p>
@@ -10201,37 +10523,60 @@
               </a:spcAft>
             </a:pPr>
             <a:r>
-              <a:rPr sz="1700" b="0">
+              <a:rPr sz="1600" b="1">
+                <a:solidFill>
+                  <a:srgbClr val="1A1A1A"/>
+                </a:solidFill>
+                <a:latin typeface="Manrope"/>
+                <a:rFonts ascii="Manrope" hAnsi="Manrope" cs="Manrope" eastAsia="Manrope"/>
+              </a:rPr>
+              <a:t>Что предлагаем</a:t>
+            </a:r>
+          </a:p>
+          <a:p>
+            <a:pPr algn="l">
+              <a:lnSpc>
+                <a:spcPct val="118000"/>
+              </a:lnSpc>
+              <a:spcBef>
+                <a:spcPts val="0"/>
+              </a:spcBef>
+              <a:spcAft>
+                <a:spcPts val="600"/>
+              </a:spcAft>
+            </a:pPr>
+            <a:r>
+              <a:rPr sz="1500" b="0">
                 <a:solidFill>
                   <a:srgbClr val="1A1A1A"/>
                 </a:solidFill>
                 <a:latin typeface="Golos Text"/>
                 <a:rFonts ascii="Golos Text" hAnsi="Golos Text" cs="Golos Text" eastAsia="Golos Text"/>
               </a:rPr>
-              <a:t>Travel+ Natural: пакет документов как у Hotel Line и Fleur</a:t>
-            </a:r>
-          </a:p>
-          <a:p>
-            <a:pPr algn="l">
-              <a:lnSpc>
-                <a:spcPct val="118000"/>
-              </a:lnSpc>
-              <a:spcBef>
-                <a:spcPts val="0"/>
-              </a:spcBef>
-              <a:spcAft>
-                <a:spcPts val="800"/>
-              </a:spcAft>
-            </a:pPr>
-            <a:r>
-              <a:rPr sz="1400" b="0">
-                <a:solidFill>
-                  <a:srgbClr val="5C5C5C"/>
+              <a:t>Travel+ Natural — пакет документов как у Hotel Line и Fleur:</a:t>
+            </a:r>
+          </a:p>
+          <a:p>
+            <a:pPr algn="l">
+              <a:lnSpc>
+                <a:spcPct val="118000"/>
+              </a:lnSpc>
+              <a:spcBef>
+                <a:spcPts val="0"/>
+              </a:spcBef>
+              <a:spcAft>
+                <a:spcPts val="600"/>
+              </a:spcAft>
+            </a:pPr>
+            <a:r>
+              <a:rPr sz="1500" b="0">
+                <a:solidFill>
+                  <a:srgbClr val="1A1A1A"/>
                 </a:solidFill>
                 <a:latin typeface="Golos Text"/>
                 <a:rFonts ascii="Golos Text" hAnsi="Golos Text" cs="Golos Text" eastAsia="Golos Text"/>
               </a:rPr>
-              <a:t>(декларация / СГР, INCI, протоколы по запросу),</a:t>
+              <a:t>декларация или СГР, INCI, протоколы по запросу.</a:t>
             </a:r>
           </a:p>
           <a:p>
@@ -10247,37 +10592,106 @@
               </a:spcAft>
             </a:pPr>
             <a:r>
-              <a:rPr sz="1700" b="0">
+              <a:rPr sz="1500" b="0">
                 <a:solidFill>
                   <a:srgbClr val="1A1A1A"/>
                 </a:solidFill>
                 <a:latin typeface="Golos Text"/>
                 <a:rFonts ascii="Golos Text" hAnsi="Golos Text" cs="Golos Text" eastAsia="Golos Text"/>
               </a:rPr>
-              <a:t>прозрачный состав с блоком «простыми словами», один договор на номер.</a:t>
-            </a:r>
-          </a:p>
-          <a:p>
-            <a:pPr algn="l">
-              <a:lnSpc>
-                <a:spcPct val="118000"/>
-              </a:lnSpc>
-              <a:spcBef>
-                <a:spcPts val="0"/>
-              </a:spcBef>
-              <a:spcAft>
-                <a:spcPts val="800"/>
-              </a:spcAft>
-            </a:pPr>
-            <a:r>
-              <a:rPr sz="1700" b="1">
+              <a:t>Состав с блоком «простыми словами». Один договор на весь номер.</a:t>
+            </a:r>
+          </a:p>
+          <a:p>
+            <a:pPr algn="l">
+              <a:lnSpc>
+                <a:spcPct val="118000"/>
+              </a:lnSpc>
+              <a:spcBef>
+                <a:spcPts val="0"/>
+              </a:spcBef>
+              <a:spcAft>
+                <a:spcPts val="400"/>
+              </a:spcAft>
+            </a:pPr>
+            <a:r>
+              <a:rPr sz="1600" b="1">
                 <a:solidFill>
                   <a:srgbClr val="1A1A1A"/>
                 </a:solidFill>
                 <a:latin typeface="Manrope"/>
                 <a:rFonts ascii="Manrope" hAnsi="Manrope" cs="Manrope" eastAsia="Manrope"/>
               </a:rPr>
-              <a:t>Три шага: eco / wellness → образец → пилот.»</a:t>
+              <a:t>Три шага</a:t>
+            </a:r>
+          </a:p>
+          <a:p>
+            <a:pPr algn="l">
+              <a:lnSpc>
+                <a:spcPct val="118000"/>
+              </a:lnSpc>
+              <a:spcBef>
+                <a:spcPts val="0"/>
+              </a:spcBef>
+              <a:spcAft>
+                <a:spcPts val="600"/>
+              </a:spcAft>
+            </a:pPr>
+            <a:r>
+              <a:rPr sz="1500" b="0">
+                <a:solidFill>
+                  <a:srgbClr val="1A1A1A"/>
+                </a:solidFill>
+                <a:latin typeface="Golos Text"/>
+                <a:rFonts ascii="Golos Text" hAnsi="Golos Text" cs="Golos Text" eastAsia="Golos Text"/>
+              </a:rPr>
+              <a:t>1. Сегмент eco / wellness и объект</a:t>
+            </a:r>
+          </a:p>
+          <a:p>
+            <a:pPr algn="l">
+              <a:lnSpc>
+                <a:spcPct val="118000"/>
+              </a:lnSpc>
+              <a:spcBef>
+                <a:spcPts val="0"/>
+              </a:spcBef>
+              <a:spcAft>
+                <a:spcPts val="600"/>
+              </a:spcAft>
+            </a:pPr>
+            <a:r>
+              <a:rPr sz="1500" b="0">
+                <a:solidFill>
+                  <a:srgbClr val="1A1A1A"/>
+                </a:solidFill>
+                <a:latin typeface="Golos Text"/>
+                <a:rFonts ascii="Golos Text" hAnsi="Golos Text" cs="Golos Text" eastAsia="Golos Text"/>
+              </a:rPr>
+              <a:t>2. Образец с этикеткой и документами</a:t>
+            </a:r>
+          </a:p>
+          <a:p>
+            <a:pPr algn="l">
+              <a:lnSpc>
+                <a:spcPct val="118000"/>
+              </a:lnSpc>
+              <a:spcBef>
+                <a:spcPts val="0"/>
+              </a:spcBef>
+              <a:spcAft>
+                <a:spcPts val="600"/>
+              </a:spcAft>
+            </a:pPr>
+            <a:r>
+              <a:rPr sz="1500" b="0">
+                <a:solidFill>
+                  <a:srgbClr val="1A1A1A"/>
+                </a:solidFill>
+                <a:latin typeface="Golos Text"/>
+                <a:rFonts ascii="Golos Text" hAnsi="Golos Text" cs="Golos Text" eastAsia="Golos Text"/>
+              </a:rPr>
+              <a:t>3. Пилот на этаже или в корпусе</a:t>
             </a:r>
           </a:p>
         </p:txBody>
@@ -10290,7 +10704,7 @@
         </p:nvSpPr>
         <p:spPr>
           <a:xfrm>
-            <a:off x="804672" y="5367528"/>
+            <a:off x="804672" y="5468112"/>
             <a:ext cx="10582351" cy="502920"/>
           </a:xfrm>
           <a:prstGeom prst="rect">
@@ -10321,7 +10735,7 @@
                 <a:latin typeface="Golos Text"/>
                 <a:rFonts ascii="Golos Text" hAnsi="Golos Text" cs="Golos Text" eastAsia="Golos Text"/>
               </a:rPr>
-              <a:t>Отрицания (COSMOS, origin, цена Hotel Line) — только в возражениях.</a:t>
+              <a:t>Отрицания (COSMOS, происхождение, цена Hotel Line) — только в блоке возражений.</a:t>
             </a:r>
           </a:p>
         </p:txBody>
@@ -10841,53 +11255,122 @@
                 <a:latin typeface="Manrope"/>
                 <a:rFonts ascii="Manrope" hAnsi="Manrope" cs="Manrope" eastAsia="Manrope"/>
               </a:rPr>
-              <a:t>Возражения</a:t>
-            </a:r>
-          </a:p>
-          <a:p>
-            <a:pPr algn="l">
-              <a:lnSpc>
-                <a:spcPct val="118000"/>
-              </a:lnSpc>
-              <a:spcBef>
-                <a:spcPts val="0"/>
-              </a:spcBef>
-              <a:spcAft>
-                <a:spcPts val="800"/>
-              </a:spcAft>
-            </a:pPr>
-            <a:r>
-              <a:rPr sz="1600" b="0">
+              <a:t>Возражения и ответы</a:t>
+            </a:r>
+          </a:p>
+          <a:p>
+            <a:pPr algn="l">
+              <a:lnSpc>
+                <a:spcPct val="118000"/>
+              </a:lnSpc>
+              <a:spcBef>
+                <a:spcPts val="0"/>
+              </a:spcBef>
+              <a:spcAft>
+                <a:spcPts val="200"/>
+              </a:spcAft>
+            </a:pPr>
+            <a:r>
+              <a:rPr sz="1500" b="1">
+                <a:solidFill>
+                  <a:srgbClr val="1A1A1A"/>
+                </a:solidFill>
+                <a:latin typeface="Manrope"/>
+                <a:rFonts ascii="Manrope" hAnsi="Manrope" cs="Manrope" eastAsia="Manrope"/>
+              </a:rPr>
+              <a:t>COSMOS в тендере обязателен</a:t>
+            </a:r>
+          </a:p>
+          <a:p>
+            <a:pPr algn="l">
+              <a:lnSpc>
+                <a:spcPct val="118000"/>
+              </a:lnSpc>
+              <a:spcBef>
+                <a:spcPts val="0"/>
+              </a:spcBef>
+              <a:spcAft>
+                <a:spcPts val="1000"/>
+              </a:spcAft>
+            </a:pPr>
+            <a:r>
+              <a:rPr sz="1500" b="0">
                 <a:solidFill>
                   <a:srgbClr val="1A1A1A"/>
                 </a:solidFill>
                 <a:latin typeface="Golos Text"/>
                 <a:rFonts ascii="Golos Text" hAnsi="Golos Text" cs="Golos Text" eastAsia="Golos Text"/>
               </a:rPr>
-              <a:t>COSMOS обязателен → Natural в это КП не ставим</a:t>
-            </a:r>
-          </a:p>
-          <a:p>
-            <a:pPr algn="l">
-              <a:lnSpc>
-                <a:spcPct val="118000"/>
-              </a:lnSpc>
-              <a:spcBef>
-                <a:spcPts val="0"/>
-              </a:spcBef>
-              <a:spcAft>
-                <a:spcPts val="800"/>
-              </a:spcAft>
-            </a:pPr>
-            <a:r>
-              <a:rPr sz="1600" b="0">
+              <a:t>Знака нет — Natural в это коммерческое предложение не ставим. Предлагаем Hotel Line или отказ.</a:t>
+            </a:r>
+          </a:p>
+          <a:p>
+            <a:pPr algn="l">
+              <a:lnSpc>
+                <a:spcPct val="118000"/>
+              </a:lnSpc>
+              <a:spcBef>
+                <a:spcPts val="0"/>
+              </a:spcBef>
+              <a:spcAft>
+                <a:spcPts val="200"/>
+              </a:spcAft>
+            </a:pPr>
+            <a:r>
+              <a:rPr sz="1500" b="1">
+                <a:solidFill>
+                  <a:srgbClr val="1A1A1A"/>
+                </a:solidFill>
+                <a:latin typeface="Manrope"/>
+                <a:rFonts ascii="Manrope" hAnsi="Manrope" cs="Manrope" eastAsia="Manrope"/>
+              </a:rPr>
+              <a:t>«Natural по цене Hotel Line»</a:t>
+            </a:r>
+          </a:p>
+          <a:p>
+            <a:pPr algn="l">
+              <a:lnSpc>
+                <a:spcPct val="118000"/>
+              </a:lnSpc>
+              <a:spcBef>
+                <a:spcPts val="0"/>
+              </a:spcBef>
+              <a:spcAft>
+                <a:spcPts val="1000"/>
+              </a:spcAft>
+            </a:pPr>
+            <a:r>
+              <a:rPr sz="1500" b="0">
                 <a:solidFill>
                   <a:srgbClr val="1A1A1A"/>
                 </a:solidFill>
                 <a:latin typeface="Golos Text"/>
                 <a:rFonts ascii="Golos Text" hAnsi="Golos Text" cs="Golos Text" eastAsia="Golos Text"/>
               </a:rPr>
-              <a:t>«Natural по цене Hotel Line» → нет</a:t>
+              <a:t>Нет. Другая себестоимость и другая позиция на полке.</a:t>
+            </a:r>
+          </a:p>
+          <a:p>
+            <a:pPr algn="l">
+              <a:lnSpc>
+                <a:spcPct val="118000"/>
+              </a:lnSpc>
+              <a:spcBef>
+                <a:spcPts val="0"/>
+              </a:spcBef>
+              <a:spcAft>
+                <a:spcPts val="200"/>
+              </a:spcAft>
+            </a:pPr>
+            <a:r>
+              <a:rPr sz="1500" b="1">
+                <a:solidFill>
+                  <a:srgbClr val="1A1A1A"/>
+                </a:solidFill>
+                <a:latin typeface="Manrope"/>
+                <a:rFonts ascii="Manrope" hAnsi="Manrope" cs="Manrope" eastAsia="Manrope"/>
+              </a:rPr>
+              <a:t>СТМ / логотип отеля</a:t>
             </a:r>
           </a:p>
           <a:p>
@@ -10903,37 +11386,60 @@
               </a:spcAft>
             </a:pPr>
             <a:r>
-              <a:rPr sz="1600" b="0">
+              <a:rPr sz="1500" b="0">
                 <a:solidFill>
                   <a:srgbClr val="1A1A1A"/>
                 </a:solidFill>
                 <a:latin typeface="Golos Text"/>
                 <a:rFonts ascii="Golos Text" hAnsi="Golos Text" cs="Golos Text" eastAsia="Golos Text"/>
               </a:rPr>
-              <a:t>СТМ / лого отеля → отдельный проект</a:t>
-            </a:r>
-          </a:p>
-          <a:p>
-            <a:pPr algn="l">
-              <a:lnSpc>
-                <a:spcPct val="118000"/>
-              </a:lnSpc>
-              <a:spcBef>
-                <a:spcPts val="0"/>
-              </a:spcBef>
-              <a:spcAft>
-                <a:spcPts val="800"/>
-              </a:spcAft>
-            </a:pPr>
-            <a:r>
-              <a:rPr sz="1600" b="0">
+              <a:t>Отдельный проект. Не маскируем под Natural.</a:t>
+            </a:r>
+          </a:p>
+          <a:p>
+            <a:pPr algn="l">
+              <a:lnSpc>
+                <a:spcPct val="118000"/>
+              </a:lnSpc>
+              <a:spcBef>
+                <a:spcPts val="0"/>
+              </a:spcBef>
+              <a:spcAft>
+                <a:spcPts val="200"/>
+              </a:spcAft>
+            </a:pPr>
+            <a:r>
+              <a:rPr sz="1500" b="1">
+                <a:solidFill>
+                  <a:srgbClr val="1A1A1A"/>
+                </a:solidFill>
+                <a:latin typeface="Manrope"/>
+                <a:rFonts ascii="Manrope" hAnsi="Manrope" cs="Manrope" eastAsia="Manrope"/>
+              </a:rPr>
+              <a:t>«Где произведено?»</a:t>
+            </a:r>
+          </a:p>
+          <a:p>
+            <a:pPr algn="l">
+              <a:lnSpc>
+                <a:spcPct val="118000"/>
+              </a:lnSpc>
+              <a:spcBef>
+                <a:spcPts val="0"/>
+              </a:spcBef>
+              <a:spcAft>
+                <a:spcPts val="600"/>
+              </a:spcAft>
+            </a:pPr>
+            <a:r>
+              <a:rPr sz="1500" b="0">
                 <a:solidFill>
                   <a:srgbClr val="1A1A1A"/>
                 </a:solidFill>
                 <a:latin typeface="Golos Text"/>
                 <a:rFonts ascii="Golos Text" hAnsi="Golos Text" cs="Golos Text" eastAsia="Golos Text"/>
               </a:rPr>
-              <a:t>«Где произведено?» → только зафиксированный origin</a:t>
+              <a:t>Только зафиксированное происхождение. Без догадок и «скорее всего».</a:t>
             </a:r>
           </a:p>
         </p:txBody>
@@ -10989,41 +11495,41 @@
                 <a:spcPts val="0"/>
               </a:spcBef>
               <a:spcAft>
-                <a:spcPts val="800"/>
-              </a:spcAft>
-            </a:pPr>
-            <a:r>
-              <a:rPr sz="1600" b="0">
+                <a:spcPts val="600"/>
+              </a:spcAft>
+            </a:pPr>
+            <a:r>
+              <a:rPr sz="1500" b="0">
                 <a:solidFill>
                   <a:srgbClr val="1A1A1A"/>
                 </a:solidFill>
                 <a:latin typeface="Golos Text"/>
                 <a:rFonts ascii="Golos Text" hAnsi="Golos Text" cs="Golos Text" eastAsia="Golos Text"/>
               </a:rPr>
-              <a:t>Реестр рисков — один лист</a:t>
-            </a:r>
-          </a:p>
-          <a:p>
-            <a:pPr algn="l">
-              <a:lnSpc>
-                <a:spcPct val="118000"/>
-              </a:lnSpc>
-              <a:spcBef>
-                <a:spcPts val="0"/>
-              </a:spcBef>
-              <a:spcAft>
-                <a:spcPts val="1200"/>
-              </a:spcAft>
-            </a:pPr>
-            <a:r>
-              <a:rPr sz="1400" b="0">
-                <a:solidFill>
-                  <a:srgbClr val="5C5C5C"/>
+              <a:t>Реестр рисков — один лист в пульте (14 пунктов).</a:t>
+            </a:r>
+          </a:p>
+          <a:p>
+            <a:pPr algn="l">
+              <a:lnSpc>
+                <a:spcPct val="118000"/>
+              </a:lnSpc>
+              <a:spcBef>
+                <a:spcPts val="0"/>
+              </a:spcBef>
+              <a:spcAft>
+                <a:spcPts val="1000"/>
+              </a:spcAft>
+            </a:pPr>
+            <a:r>
+              <a:rPr sz="1500" b="0">
+                <a:solidFill>
+                  <a:srgbClr val="1A1A1A"/>
                 </a:solidFill>
                 <a:latin typeface="Golos Text"/>
                 <a:rFonts ascii="Golos Text" hAnsi="Golos Text" cs="Golos Text" eastAsia="Golos Text"/>
               </a:rPr>
-              <a:t>(14 пунктов в пульте)</a:t>
+              <a:t>Сегмент не размываем: Natural не уходит в эконом-запрос.</a:t>
             </a:r>
           </a:p>
           <a:p>
@@ -11039,37 +11545,37 @@
               </a:spcAft>
             </a:pPr>
             <a:r>
-              <a:rPr sz="1600" b="0">
+              <a:rPr sz="1500" b="1">
                 <a:solidFill>
                   <a:srgbClr val="1A1A1A"/>
+                </a:solidFill>
+                <a:latin typeface="Manrope"/>
+                <a:rFonts ascii="Manrope" hAnsi="Manrope" cs="Manrope" eastAsia="Manrope"/>
+              </a:rPr>
+              <a:t>Не продаём Natural вместо Hotel Line по цене базовой линейки.</a:t>
+            </a:r>
+          </a:p>
+          <a:p>
+            <a:pPr algn="l">
+              <a:lnSpc>
+                <a:spcPct val="118000"/>
+              </a:lnSpc>
+              <a:spcBef>
+                <a:spcPts val="1800"/>
+              </a:spcBef>
+              <a:spcAft>
+                <a:spcPts val="0"/>
+              </a:spcAft>
+            </a:pPr>
+            <a:r>
+              <a:rPr sz="1200" b="0">
+                <a:solidFill>
+                  <a:srgbClr val="5C5C5C"/>
                 </a:solidFill>
                 <a:latin typeface="Golos Text"/>
                 <a:rFonts ascii="Golos Text" hAnsi="Golos Text" cs="Golos Text" eastAsia="Golos Text"/>
               </a:rPr>
-              <a:t>Сегмент не размываем.</a:t>
-            </a:r>
-          </a:p>
-          <a:p>
-            <a:pPr algn="l">
-              <a:lnSpc>
-                <a:spcPct val="118000"/>
-              </a:lnSpc>
-              <a:spcBef>
-                <a:spcPts val="0"/>
-              </a:spcBef>
-              <a:spcAft>
-                <a:spcPts val="800"/>
-              </a:spcAft>
-            </a:pPr>
-            <a:r>
-              <a:rPr sz="1600" b="1">
-                <a:solidFill>
-                  <a:srgbClr val="1A1A1A"/>
-                </a:solidFill>
-                <a:latin typeface="Manrope"/>
-                <a:rFonts ascii="Manrope" hAnsi="Manrope" cs="Manrope" eastAsia="Manrope"/>
-              </a:rPr>
-              <a:t>Не продаём Natural в эконом Hotel Line.</a:t>
+              <a:t>Цифры сценария — учебный пример, не отчёт завода.</a:t>
             </a:r>
           </a:p>
         </p:txBody>
@@ -11601,80 +12107,80 @@
                 <a:spcPts val="0"/>
               </a:spcBef>
               <a:spcAft>
-                <a:spcPts val="800"/>
-              </a:spcAft>
-            </a:pPr>
-            <a:r>
-              <a:rPr sz="1600" b="0">
+                <a:spcPts val="600"/>
+              </a:spcAft>
+            </a:pPr>
+            <a:r>
+              <a:rPr sz="1500" b="0">
                 <a:solidFill>
                   <a:srgbClr val="1A1A1A"/>
                 </a:solidFill>
                 <a:latin typeface="Golos Text"/>
                 <a:rFonts ascii="Golos Text" hAnsi="Golos Text" cs="Golos Text" eastAsia="Golos Text"/>
               </a:rPr>
-              <a:t>• 3 пилотных клиента</a:t>
-            </a:r>
-          </a:p>
-          <a:p>
-            <a:pPr algn="l">
-              <a:lnSpc>
-                <a:spcPct val="118000"/>
-              </a:lnSpc>
-              <a:spcBef>
-                <a:spcPts val="0"/>
-              </a:spcBef>
-              <a:spcAft>
-                <a:spcPts val="800"/>
-              </a:spcAft>
-            </a:pPr>
-            <a:r>
-              <a:rPr sz="1600" b="0">
+              <a:t>• Три пилотных клиента</a:t>
+            </a:r>
+          </a:p>
+          <a:p>
+            <a:pPr algn="l">
+              <a:lnSpc>
+                <a:spcPct val="118000"/>
+              </a:lnSpc>
+              <a:spcBef>
+                <a:spcPts val="0"/>
+              </a:spcBef>
+              <a:spcAft>
+                <a:spcPts val="600"/>
+              </a:spcAft>
+            </a:pPr>
+            <a:r>
+              <a:rPr sz="1500" b="0">
                 <a:solidFill>
                   <a:srgbClr val="1A1A1A"/>
                 </a:solidFill>
                 <a:latin typeface="Golos Text"/>
                 <a:rFonts ascii="Golos Text" hAnsi="Golos Text" cs="Golos Text" eastAsia="Golos Text"/>
               </a:rPr>
-              <a:t>• Повторный заказ у ≥ 2 из 3</a:t>
-            </a:r>
-          </a:p>
-          <a:p>
-            <a:pPr algn="l">
-              <a:lnSpc>
-                <a:spcPct val="118000"/>
-              </a:lnSpc>
-              <a:spcBef>
-                <a:spcPts val="0"/>
-              </a:spcBef>
-              <a:spcAft>
-                <a:spcPts val="1000"/>
-              </a:spcAft>
-            </a:pPr>
-            <a:r>
-              <a:rPr sz="1600" b="0">
+              <a:t>• Повторный заказ минимум у двух из трёх</a:t>
+            </a:r>
+          </a:p>
+          <a:p>
+            <a:pPr algn="l">
+              <a:lnSpc>
+                <a:spcPct val="118000"/>
+              </a:lnSpc>
+              <a:spcBef>
+                <a:spcPts val="0"/>
+              </a:spcBef>
+              <a:spcAft>
+                <a:spcPts val="600"/>
+              </a:spcAft>
+            </a:pPr>
+            <a:r>
+              <a:rPr sz="1500" b="0">
                 <a:solidFill>
                   <a:srgbClr val="1A1A1A"/>
                 </a:solidFill>
                 <a:latin typeface="Golos Text"/>
                 <a:rFonts ascii="Golos Text" hAnsi="Golos Text" cs="Golos Text" eastAsia="Golos Text"/>
               </a:rPr>
-              <a:t>• Мягкость и ощущение натуральности ≥ 70%</a:t>
-            </a:r>
-          </a:p>
-          <a:p>
-            <a:pPr algn="l">
-              <a:lnSpc>
-                <a:spcPct val="118000"/>
-              </a:lnSpc>
-              <a:spcBef>
-                <a:spcPts val="0"/>
-              </a:spcBef>
-              <a:spcAft>
-                <a:spcPts val="1400"/>
-              </a:spcAft>
-            </a:pPr>
-            <a:r>
-              <a:rPr sz="1600" b="1">
+              <a:t>• Мягкость и ощущение натуральности — не ниже 70% в опросе</a:t>
+            </a:r>
+          </a:p>
+          <a:p>
+            <a:pPr algn="l">
+              <a:lnSpc>
+                <a:spcPct val="118000"/>
+              </a:lnSpc>
+              <a:spcBef>
+                <a:spcPts val="0"/>
+              </a:spcBef>
+              <a:spcAft>
+                <a:spcPts val="800"/>
+              </a:spcAft>
+            </a:pPr>
+            <a:r>
+              <a:rPr sz="1500" b="1">
                 <a:solidFill>
                   <a:srgbClr val="1A1A1A"/>
                 </a:solidFill>
@@ -11690,21 +12196,65 @@
                 <a:spcPct val="118000"/>
               </a:lnSpc>
               <a:spcBef>
-                <a:spcPts val="0"/>
-              </a:spcBef>
-              <a:spcAft>
-                <a:spcPts val="600"/>
-              </a:spcAft>
-            </a:pPr>
-            <a:r>
-              <a:rPr sz="1400" b="0">
+                <a:spcPts val="1800"/>
+              </a:spcBef>
+              <a:spcAft>
+                <a:spcPts val="0"/>
+              </a:spcAft>
+            </a:pPr>
+            <a:r>
+              <a:rPr sz="1200" b="0">
                 <a:solidFill>
                   <a:srgbClr val="5C5C5C"/>
                 </a:solidFill>
                 <a:latin typeface="Golos Text"/>
                 <a:rFonts ascii="Golos Text" hAnsi="Golos Text" cs="Golos Text" eastAsia="Golos Text"/>
               </a:rPr>
-              <a:t>Цифры сценария — учебный пример,</a:t>
+              <a:t>Цифры сценария — учебный пример, не отчёт завода.</a:t>
+            </a:r>
+          </a:p>
+        </p:txBody>
+      </p:sp>
+      <p:sp>
+        <p:nvSpPr>
+          <p:cNvPr id="14" name="TextBox 13"/>
+          <p:cNvSpPr txBox="1"/>
+          <p:nvPr/>
+        </p:nvSpPr>
+        <p:spPr>
+          <a:xfrm>
+            <a:off x="6571335" y="1426464"/>
+            <a:ext cx="4815687" cy="4334256"/>
+          </a:xfrm>
+          <a:prstGeom prst="rect">
+            <a:avLst/>
+          </a:prstGeom>
+          <a:noFill/>
+        </p:spPr>
+        <p:txBody>
+          <a:bodyPr wrap="square" anchor="t" lIns="50800" rIns="50800" tIns="25400" bIns="25400"/>
+          <a:lstStyle/>
+          <a:p>
+            <a:pPr algn="l">
+              <a:lnSpc>
+                <a:spcPct val="118000"/>
+              </a:lnSpc>
+              <a:spcBef>
+                <a:spcPts val="0"/>
+              </a:spcBef>
+              <a:spcAft>
+                <a:spcPts val="1200"/>
+              </a:spcAft>
+            </a:pPr>
+            <a:r>
+              <a:rPr sz="1500" b="1">
+                <a:solidFill>
+                  <a:srgbClr val="2A554A"/>
+                </a:solidFill>
+                <a:latin typeface="Manrope"/>
+                <a:rFonts ascii="Manrope" hAnsi="Manrope" cs="Manrope" eastAsia="Manrope"/>
+              </a:rPr>
+              <a:t>Провал и выход</a:t>
             </a:r>
           </a:p>
           <a:p>
@@ -11720,173 +12270,129 @@
               </a:spcAft>
             </a:pPr>
             <a:r>
-              <a:rPr sz="1400" b="0">
-                <a:solidFill>
-                  <a:srgbClr val="5C5C5C"/>
+              <a:rPr sz="1500" b="0">
+                <a:solidFill>
+                  <a:srgbClr val="1A1A1A"/>
                 </a:solidFill>
                 <a:latin typeface="Golos Text"/>
                 <a:rFonts ascii="Golos Text" hAnsi="Golos Text" cs="Golos Text" eastAsia="Golos Text"/>
               </a:rPr>
-              <a:t>не отчёт завода.</a:t>
-            </a:r>
-          </a:p>
-        </p:txBody>
-      </p:sp>
-      <p:sp>
-        <p:nvSpPr>
-          <p:cNvPr id="14" name="TextBox 13"/>
-          <p:cNvSpPr txBox="1"/>
-          <p:nvPr/>
-        </p:nvSpPr>
-        <p:spPr>
-          <a:xfrm>
-            <a:off x="6571335" y="1426464"/>
-            <a:ext cx="4815687" cy="4334256"/>
-          </a:xfrm>
-          <a:prstGeom prst="rect">
-            <a:avLst/>
-          </a:prstGeom>
-          <a:noFill/>
-        </p:spPr>
-        <p:txBody>
-          <a:bodyPr wrap="square" anchor="t" lIns="50800" rIns="50800" tIns="25400" bIns="25400"/>
-          <a:lstStyle/>
-          <a:p>
-            <a:pPr algn="l">
-              <a:lnSpc>
-                <a:spcPct val="118000"/>
-              </a:lnSpc>
-              <a:spcBef>
-                <a:spcPts val="0"/>
-              </a:spcBef>
-              <a:spcAft>
-                <a:spcPts val="1200"/>
+              <a:t>Повторный заказ меньше чем у двух из трёх — или метрики ниже 60%.</a:t>
+            </a:r>
+          </a:p>
+          <a:p>
+            <a:pPr algn="l">
+              <a:lnSpc>
+                <a:spcPct val="118000"/>
+              </a:lnSpc>
+              <a:spcBef>
+                <a:spcPts val="0"/>
+              </a:spcBef>
+              <a:spcAft>
+                <a:spcPts val="800"/>
               </a:spcAft>
             </a:pPr>
             <a:r>
               <a:rPr sz="1500" b="1">
                 <a:solidFill>
-                  <a:srgbClr val="2A554A"/>
+                  <a:srgbClr val="1A1A1A"/>
                 </a:solidFill>
                 <a:latin typeface="Manrope"/>
                 <a:rFonts ascii="Manrope" hAnsi="Manrope" cs="Manrope" eastAsia="Manrope"/>
               </a:rPr>
-              <a:t>Провал и выход</a:t>
-            </a:r>
-          </a:p>
-          <a:p>
-            <a:pPr algn="l">
-              <a:lnSpc>
-                <a:spcPct val="118000"/>
-              </a:lnSpc>
-              <a:spcBef>
-                <a:spcPts val="0"/>
-              </a:spcBef>
-              <a:spcAft>
-                <a:spcPts val="800"/>
-              </a:spcAft>
-            </a:pPr>
-            <a:r>
-              <a:rPr sz="1600" b="0">
+              <a:t>→ Останавливаем масштабирование</a:t>
+            </a:r>
+          </a:p>
+          <a:p>
+            <a:pPr algn="l">
+              <a:lnSpc>
+                <a:spcPct val="118000"/>
+              </a:lnSpc>
+              <a:spcBef>
+                <a:spcPts val="0"/>
+              </a:spcBef>
+              <a:spcAft>
+                <a:spcPts val="600"/>
+              </a:spcAft>
+            </a:pPr>
+            <a:r>
+              <a:rPr sz="1500" b="0">
                 <a:solidFill>
                   <a:srgbClr val="1A1A1A"/>
                 </a:solidFill>
                 <a:latin typeface="Golos Text"/>
                 <a:rFonts ascii="Golos Text" hAnsi="Golos Text" cs="Golos Text" eastAsia="Golos Text"/>
               </a:rPr>
-              <a:t>Повтор &lt; 2 из 3 или метрики &lt; 60%</a:t>
-            </a:r>
-          </a:p>
-          <a:p>
-            <a:pPr algn="l">
-              <a:lnSpc>
-                <a:spcPct val="118000"/>
-              </a:lnSpc>
-              <a:spcBef>
-                <a:spcPts val="0"/>
-              </a:spcBef>
-              <a:spcAft>
-                <a:spcPts val="1200"/>
-              </a:spcAft>
-            </a:pPr>
-            <a:r>
-              <a:rPr sz="1600" b="1">
+              <a:t>Диагноз бренд-менеджера — в течение двух недель.</a:t>
+            </a:r>
+          </a:p>
+          <a:p>
+            <a:pPr algn="l">
+              <a:lnSpc>
+                <a:spcPct val="118000"/>
+              </a:lnSpc>
+              <a:spcBef>
+                <a:spcPts val="0"/>
+              </a:spcBef>
+              <a:spcAft>
+                <a:spcPts val="600"/>
+              </a:spcAft>
+            </a:pPr>
+            <a:r>
+              <a:rPr sz="1500" b="0">
+                <a:solidFill>
+                  <a:srgbClr val="1A1A1A"/>
+                </a:solidFill>
+                <a:latin typeface="Golos Text"/>
+                <a:rFonts ascii="Golos Text" hAnsi="Golos Text" cs="Golos Text" eastAsia="Golos Text"/>
+              </a:rPr>
+              <a:t>Второй пилотный круг снова провален.</a:t>
+            </a:r>
+          </a:p>
+          <a:p>
+            <a:pPr algn="l">
+              <a:lnSpc>
+                <a:spcPct val="118000"/>
+              </a:lnSpc>
+              <a:spcBef>
+                <a:spcPts val="0"/>
+              </a:spcBef>
+              <a:spcAft>
+                <a:spcPts val="800"/>
+              </a:spcAft>
+            </a:pPr>
+            <a:r>
+              <a:rPr sz="1500" b="1">
                 <a:solidFill>
                   <a:srgbClr val="1A1A1A"/>
                 </a:solidFill>
                 <a:latin typeface="Manrope"/>
                 <a:rFonts ascii="Manrope" hAnsi="Manrope" cs="Manrope" eastAsia="Manrope"/>
               </a:rPr>
-              <a:t>→ Останавливаем масштаб</a:t>
-            </a:r>
-          </a:p>
-          <a:p>
-            <a:pPr algn="l">
-              <a:lnSpc>
-                <a:spcPct val="118000"/>
-              </a:lnSpc>
-              <a:spcBef>
-                <a:spcPts val="0"/>
-              </a:spcBef>
-              <a:spcAft>
-                <a:spcPts val="800"/>
-              </a:spcAft>
-            </a:pPr>
-            <a:r>
-              <a:rPr sz="1600" b="0">
-                <a:solidFill>
-                  <a:srgbClr val="1A1A1A"/>
+              <a:t>→ Закрываем линейку</a:t>
+            </a:r>
+          </a:p>
+          <a:p>
+            <a:pPr algn="l">
+              <a:lnSpc>
+                <a:spcPct val="118000"/>
+              </a:lnSpc>
+              <a:spcBef>
+                <a:spcPts val="1800"/>
+              </a:spcBef>
+              <a:spcAft>
+                <a:spcPts val="0"/>
+              </a:spcAft>
+            </a:pPr>
+            <a:r>
+              <a:rPr sz="1200" b="0">
+                <a:solidFill>
+                  <a:srgbClr val="5C5C5C"/>
                 </a:solidFill>
                 <a:latin typeface="Golos Text"/>
                 <a:rFonts ascii="Golos Text" hAnsi="Golos Text" cs="Golos Text" eastAsia="Golos Text"/>
               </a:rPr>
-              <a:t>Диагноз бренд-менеджера за 2 недели</a:t>
-            </a:r>
-          </a:p>
-          <a:p>
-            <a:pPr algn="l">
-              <a:lnSpc>
-                <a:spcPct val="118000"/>
-              </a:lnSpc>
-              <a:spcBef>
-                <a:spcPts val="0"/>
-              </a:spcBef>
-              <a:spcAft>
-                <a:spcPts val="800"/>
-              </a:spcAft>
-            </a:pPr>
-            <a:r>
-              <a:rPr sz="1600" b="0">
-                <a:solidFill>
-                  <a:srgbClr val="1A1A1A"/>
-                </a:solidFill>
-                <a:latin typeface="Golos Text"/>
-                <a:rFonts ascii="Golos Text" hAnsi="Golos Text" cs="Golos Text" eastAsia="Golos Text"/>
-              </a:rPr>
-              <a:t>Второй круг снова провален</a:t>
-            </a:r>
-          </a:p>
-          <a:p>
-            <a:pPr algn="l">
-              <a:lnSpc>
-                <a:spcPct val="118000"/>
-              </a:lnSpc>
-              <a:spcBef>
-                <a:spcPts val="0"/>
-              </a:spcBef>
-              <a:spcAft>
-                <a:spcPts val="800"/>
-              </a:spcAft>
-            </a:pPr>
-            <a:r>
-              <a:rPr sz="1600" b="1">
-                <a:solidFill>
-                  <a:srgbClr val="1A1A1A"/>
-                </a:solidFill>
-                <a:latin typeface="Manrope"/>
-                <a:rFonts ascii="Manrope" hAnsi="Manrope" cs="Manrope" eastAsia="Manrope"/>
-              </a:rPr>
-              <a:t>→ Закрываем линейку</a:t>
+              <a:t>Пороги — для учебного сценария в пульте, не KPI завода.</a:t>
             </a:r>
           </a:p>
         </p:txBody>

--- a/АК/presentation-travelplus-interview.pptx
+++ b/АК/presentation-travelplus-interview.pptx
@@ -3709,7 +3709,7 @@
                 <a:latin typeface="Golos Text"/>
                 <a:rFonts ascii="Golos Text" hAnsi="Golos Text" cs="Golos Text" eastAsia="Golos Text"/>
               </a:rPr>
-              <a:t>Travel+ Natural  ·  образец презентации</a:t>
+              <a:t>Natural · пример презентации</a:t>
             </a:r>
           </a:p>
         </p:txBody>
@@ -4572,7 +4572,7 @@
                 <a:latin typeface="Golos Text"/>
                 <a:rFonts ascii="Golos Text" hAnsi="Golos Text" cs="Golos Text" eastAsia="Golos Text"/>
               </a:rPr>
-              <a:t>Travel+ Natural  ·  образец презентации</a:t>
+              <a:t>Natural · пример презентации</a:t>
             </a:r>
           </a:p>
         </p:txBody>
@@ -5389,7 +5389,7 @@
                 <a:latin typeface="Golos Text"/>
                 <a:rFonts ascii="Golos Text" hAnsi="Golos Text" cs="Golos Text" eastAsia="Golos Text"/>
               </a:rPr>
-              <a:t>Travel+ Natural  ·  образец презентации</a:t>
+              <a:t>Natural · пример презентации</a:t>
             </a:r>
           </a:p>
         </p:txBody>
@@ -6137,7 +6137,7 @@
                 <a:latin typeface="Golos Text"/>
                 <a:rFonts ascii="Golos Text" hAnsi="Golos Text" cs="Golos Text" eastAsia="Golos Text"/>
               </a:rPr>
-              <a:t>Travel+ Natural  ·  образец презентации</a:t>
+              <a:t>Natural · пример презентации</a:t>
             </a:r>
           </a:p>
         </p:txBody>
@@ -6490,29 +6490,6 @@
                 <a:rFonts ascii="Golos Text" hAnsi="Golos Text" cs="Golos Text" eastAsia="Golos Text"/>
               </a:rPr>
               <a:t>• Наборы</a:t>
-            </a:r>
-          </a:p>
-          <a:p>
-            <a:pPr algn="l">
-              <a:lnSpc>
-                <a:spcPct val="118000"/>
-              </a:lnSpc>
-              <a:spcBef>
-                <a:spcPts val="0"/>
-              </a:spcBef>
-              <a:spcAft>
-                <a:spcPts val="800"/>
-              </a:spcAft>
-            </a:pPr>
-            <a:r>
-              <a:rPr sz="1600" b="1">
-                <a:solidFill>
-                  <a:srgbClr val="1A1A1A"/>
-                </a:solidFill>
-                <a:latin typeface="Manrope"/>
-                <a:rFonts ascii="Manrope" hAnsi="Manrope" cs="Manrope" eastAsia="Manrope"/>
-              </a:rPr>
-              <a:t>Не IT-roadmap.</a:t>
             </a:r>
           </a:p>
           <a:p>
@@ -6931,7 +6908,7 @@
                 <a:latin typeface="Golos Text"/>
                 <a:rFonts ascii="Golos Text" hAnsi="Golos Text" cs="Golos Text" eastAsia="Golos Text"/>
               </a:rPr>
-              <a:t>Travel+ Natural  ·  образец презентации</a:t>
+              <a:t>Natural · пример презентации</a:t>
             </a:r>
           </a:p>
         </p:txBody>
@@ -7702,7 +7679,7 @@
                 <a:latin typeface="Golos Text"/>
                 <a:rFonts ascii="Golos Text" hAnsi="Golos Text" cs="Golos Text" eastAsia="Golos Text"/>
               </a:rPr>
-              <a:t>Travel+ Natural  ·  образец презентации</a:t>
+              <a:t>Natural · пример презентации</a:t>
             </a:r>
           </a:p>
         </p:txBody>
@@ -8473,7 +8450,7 @@
                 <a:latin typeface="Golos Text"/>
                 <a:rFonts ascii="Golos Text" hAnsi="Golos Text" cs="Golos Text" eastAsia="Golos Text"/>
               </a:rPr>
-              <a:t>Travel+ Natural  ·  образец презентации</a:t>
+              <a:t>Natural · пример презентации</a:t>
             </a:r>
           </a:p>
         </p:txBody>
@@ -9474,7 +9451,7 @@
                 <a:latin typeface="Golos Text"/>
                 <a:rFonts ascii="Golos Text" hAnsi="Golos Text" cs="Golos Text" eastAsia="Golos Text"/>
               </a:rPr>
-              <a:t>Travel+ Natural  ·  образец презентации</a:t>
+              <a:t>Natural · пример презентации</a:t>
             </a:r>
           </a:p>
         </p:txBody>
@@ -10314,7 +10291,7 @@
                 <a:latin typeface="Golos Text"/>
                 <a:rFonts ascii="Golos Text" hAnsi="Golos Text" cs="Golos Text" eastAsia="Golos Text"/>
               </a:rPr>
-              <a:t>Travel+ Natural  ·  образец презентации</a:t>
+              <a:t>Natural · пример презентации</a:t>
             </a:r>
           </a:p>
         </p:txBody>
@@ -10995,7 +10972,7 @@
                 <a:latin typeface="Golos Text"/>
                 <a:rFonts ascii="Golos Text" hAnsi="Golos Text" cs="Golos Text" eastAsia="Golos Text"/>
               </a:rPr>
-              <a:t>Travel+ Natural  ·  образец презентации</a:t>
+              <a:t>Natural · пример презентации</a:t>
             </a:r>
           </a:p>
         </p:txBody>
@@ -11835,7 +11812,7 @@
                 <a:latin typeface="Golos Text"/>
                 <a:rFonts ascii="Golos Text" hAnsi="Golos Text" cs="Golos Text" eastAsia="Golos Text"/>
               </a:rPr>
-              <a:t>Travel+ Natural  ·  образец презентации</a:t>
+              <a:t>Natural · пример презентации</a:t>
             </a:r>
           </a:p>
         </p:txBody>

--- a/АК/presentation-travelplus-interview.pptx
+++ b/АК/presentation-travelplus-interview.pptx
@@ -6409,246 +6409,315 @@
                 <a:spcPts val="0"/>
               </a:spcBef>
               <a:spcAft>
-                <a:spcPts val="800"/>
-              </a:spcAft>
-            </a:pPr>
-            <a:r>
-              <a:rPr sz="1600" b="0">
+                <a:spcPts val="200"/>
+              </a:spcAft>
+            </a:pPr>
+            <a:r>
+              <a:rPr sz="1500" b="1">
+                <a:solidFill>
+                  <a:srgbClr val="1A1A1A"/>
+                </a:solidFill>
+                <a:latin typeface="Manrope"/>
+                <a:rFonts ascii="Manrope" hAnsi="Manrope" cs="Manrope" eastAsia="Manrope"/>
+              </a:rPr>
+              <a:t>Поставка на номер</a:t>
+            </a:r>
+          </a:p>
+          <a:p>
+            <a:pPr algn="l">
+              <a:lnSpc>
+                <a:spcPct val="118000"/>
+              </a:lnSpc>
+              <a:spcBef>
+                <a:spcPts val="0"/>
+              </a:spcBef>
+              <a:spcAft>
+                <a:spcPts val="1000"/>
+              </a:spcAft>
+            </a:pPr>
+            <a:r>
+              <a:rPr sz="1500" b="0">
                 <a:solidFill>
                   <a:srgbClr val="1A1A1A"/>
                 </a:solidFill>
                 <a:latin typeface="Golos Text"/>
                 <a:rFonts ascii="Golos Text" hAnsi="Golos Text" cs="Golos Text" eastAsia="Golos Text"/>
               </a:rPr>
-              <a:t>Производство и one-stop на номер:</a:t>
-            </a:r>
-          </a:p>
-          <a:p>
-            <a:pPr algn="l">
-              <a:lnSpc>
-                <a:spcPct val="118000"/>
-              </a:lnSpc>
-              <a:spcBef>
-                <a:spcPts val="0"/>
-              </a:spcBef>
-              <a:spcAft>
-                <a:spcPts val="800"/>
-              </a:spcAft>
-            </a:pPr>
-            <a:r>
-              <a:rPr sz="1600" b="0">
+              <a:t>One-stop: косметика, тапочки, наборы</a:t>
+            </a:r>
+          </a:p>
+          <a:p>
+            <a:pPr algn="l">
+              <a:lnSpc>
+                <a:spcPct val="118000"/>
+              </a:lnSpc>
+              <a:spcBef>
+                <a:spcPts val="0"/>
+              </a:spcBef>
+              <a:spcAft>
+                <a:spcPts val="200"/>
+              </a:spcAft>
+            </a:pPr>
+            <a:r>
+              <a:rPr sz="1500" b="1">
+                <a:solidFill>
+                  <a:srgbClr val="1A1A1A"/>
+                </a:solidFill>
+                <a:latin typeface="Manrope"/>
+                <a:rFonts ascii="Manrope" hAnsi="Manrope" cs="Manrope" eastAsia="Manrope"/>
+              </a:rPr>
+              <a:t>Контур производства</a:t>
+            </a:r>
+          </a:p>
+          <a:p>
+            <a:pPr algn="l">
+              <a:lnSpc>
+                <a:spcPct val="118000"/>
+              </a:lnSpc>
+              <a:spcBef>
+                <a:spcPts val="0"/>
+              </a:spcBef>
+              <a:spcAft>
+                <a:spcPts val="1000"/>
+              </a:spcAft>
+            </a:pPr>
+            <a:r>
+              <a:rPr sz="1500" b="0">
                 <a:solidFill>
                   <a:srgbClr val="1A1A1A"/>
                 </a:solidFill>
                 <a:latin typeface="Golos Text"/>
                 <a:rFonts ascii="Golos Text" hAnsi="Golos Text" cs="Golos Text" eastAsia="Golos Text"/>
               </a:rPr>
-              <a:t>• Косметика</a:t>
-            </a:r>
-          </a:p>
-          <a:p>
-            <a:pPr algn="l">
-              <a:lnSpc>
-                <a:spcPct val="118000"/>
-              </a:lnSpc>
-              <a:spcBef>
-                <a:spcPts val="0"/>
-              </a:spcBef>
-              <a:spcAft>
-                <a:spcPts val="800"/>
-              </a:spcAft>
-            </a:pPr>
-            <a:r>
-              <a:rPr sz="1600" b="0">
+              <a:t>Своё производство и сборка; закупки и производство в Китае</a:t>
+            </a:r>
+          </a:p>
+          <a:p>
+            <a:pPr algn="l">
+              <a:lnSpc>
+                <a:spcPct val="118000"/>
+              </a:lnSpc>
+              <a:spcBef>
+                <a:spcPts val="0"/>
+              </a:spcBef>
+              <a:spcAft>
+                <a:spcPts val="200"/>
+              </a:spcAft>
+            </a:pPr>
+            <a:r>
+              <a:rPr sz="1500" b="1">
+                <a:solidFill>
+                  <a:srgbClr val="1A1A1A"/>
+                </a:solidFill>
+                <a:latin typeface="Manrope"/>
+                <a:rFonts ascii="Manrope" hAnsi="Manrope" cs="Manrope" eastAsia="Manrope"/>
+              </a:rPr>
+              <a:t>Фокус роли</a:t>
+            </a:r>
+          </a:p>
+          <a:p>
+            <a:pPr algn="l">
+              <a:lnSpc>
+                <a:spcPct val="118000"/>
+              </a:lnSpc>
+              <a:spcBef>
+                <a:spcPts val="0"/>
+              </a:spcBef>
+              <a:spcAft>
+                <a:spcPts val="0"/>
+              </a:spcAft>
+            </a:pPr>
+            <a:r>
+              <a:rPr sz="1500" b="0">
                 <a:solidFill>
                   <a:srgbClr val="1A1A1A"/>
                 </a:solidFill>
                 <a:latin typeface="Golos Text"/>
                 <a:rFonts ascii="Golos Text" hAnsi="Golos Text" cs="Golos Text" eastAsia="Golos Text"/>
               </a:rPr>
-              <a:t>• Тапочки</a:t>
-            </a:r>
-          </a:p>
-          <a:p>
-            <a:pPr algn="l">
-              <a:lnSpc>
-                <a:spcPct val="118000"/>
-              </a:lnSpc>
-              <a:spcBef>
-                <a:spcPts val="0"/>
-              </a:spcBef>
-              <a:spcAft>
-                <a:spcPts val="1400"/>
-              </a:spcAft>
-            </a:pPr>
-            <a:r>
-              <a:rPr sz="1600" b="0">
+              <a:t>Товар от идеи до полки и маржи.</a:t>
+            </a:r>
+          </a:p>
+        </p:txBody>
+      </p:sp>
+      <p:sp>
+        <p:nvSpPr>
+          <p:cNvPr id="14" name="TextBox 13"/>
+          <p:cNvSpPr txBox="1"/>
+          <p:nvPr/>
+        </p:nvSpPr>
+        <p:spPr>
+          <a:xfrm>
+            <a:off x="6571335" y="1426464"/>
+            <a:ext cx="4815687" cy="4334256"/>
+          </a:xfrm>
+          <a:prstGeom prst="rect">
+            <a:avLst/>
+          </a:prstGeom>
+          <a:noFill/>
+        </p:spPr>
+        <p:txBody>
+          <a:bodyPr wrap="square" anchor="t" lIns="50800" rIns="50800" tIns="25400" bIns="25400"/>
+          <a:lstStyle/>
+          <a:p>
+            <a:pPr algn="l">
+              <a:lnSpc>
+                <a:spcPct val="118000"/>
+              </a:lnSpc>
+              <a:spcBef>
+                <a:spcPts val="0"/>
+              </a:spcBef>
+              <a:spcAft>
+                <a:spcPts val="1200"/>
+              </a:spcAft>
+            </a:pPr>
+            <a:r>
+              <a:rPr sz="1500" b="1">
+                <a:solidFill>
+                  <a:srgbClr val="2A554A"/>
+                </a:solidFill>
+                <a:latin typeface="Manrope"/>
+                <a:rFonts ascii="Manrope" hAnsi="Manrope" cs="Manrope" eastAsia="Manrope"/>
+              </a:rPr>
+              <a:t>Роль здесь</a:t>
+            </a:r>
+          </a:p>
+          <a:p>
+            <a:pPr algn="l">
+              <a:lnSpc>
+                <a:spcPct val="118000"/>
+              </a:lnSpc>
+              <a:spcBef>
+                <a:spcPts val="0"/>
+              </a:spcBef>
+              <a:spcAft>
+                <a:spcPts val="200"/>
+              </a:spcAft>
+            </a:pPr>
+            <a:r>
+              <a:rPr sz="1500" b="1">
+                <a:solidFill>
+                  <a:srgbClr val="1A1A1A"/>
+                </a:solidFill>
+                <a:latin typeface="Manrope"/>
+                <a:rFonts ascii="Manrope" hAnsi="Manrope" cs="Manrope" eastAsia="Manrope"/>
+              </a:rPr>
+              <a:t>Ассортимент</a:t>
+            </a:r>
+          </a:p>
+          <a:p>
+            <a:pPr algn="l">
+              <a:lnSpc>
+                <a:spcPct val="118000"/>
+              </a:lnSpc>
+              <a:spcBef>
+                <a:spcPts val="0"/>
+              </a:spcBef>
+              <a:spcAft>
+                <a:spcPts val="1000"/>
+              </a:spcAft>
+            </a:pPr>
+            <a:r>
+              <a:rPr sz="1500" b="0">
                 <a:solidFill>
                   <a:srgbClr val="1A1A1A"/>
                 </a:solidFill>
                 <a:latin typeface="Golos Text"/>
                 <a:rFonts ascii="Golos Text" hAnsi="Golos Text" cs="Golos Text" eastAsia="Golos Text"/>
               </a:rPr>
-              <a:t>• Наборы</a:t>
-            </a:r>
-          </a:p>
-          <a:p>
-            <a:pPr algn="l">
-              <a:lnSpc>
-                <a:spcPct val="118000"/>
-              </a:lnSpc>
-              <a:spcBef>
-                <a:spcPts val="0"/>
-              </a:spcBef>
-              <a:spcAft>
-                <a:spcPts val="800"/>
-              </a:spcAft>
-            </a:pPr>
-            <a:r>
-              <a:rPr sz="1600" b="0">
+              <a:t>Новинки и позиция в доме брендов</a:t>
+            </a:r>
+          </a:p>
+          <a:p>
+            <a:pPr algn="l">
+              <a:lnSpc>
+                <a:spcPct val="118000"/>
+              </a:lnSpc>
+              <a:spcBef>
+                <a:spcPts val="0"/>
+              </a:spcBef>
+              <a:spcAft>
+                <a:spcPts val="200"/>
+              </a:spcAft>
+            </a:pPr>
+            <a:r>
+              <a:rPr sz="1500" b="1">
+                <a:solidFill>
+                  <a:srgbClr val="1A1A1A"/>
+                </a:solidFill>
+                <a:latin typeface="Manrope"/>
+                <a:rFonts ascii="Manrope" hAnsi="Manrope" cs="Manrope" eastAsia="Manrope"/>
+              </a:rPr>
+              <a:t>Продукт</a:t>
+            </a:r>
+          </a:p>
+          <a:p>
+            <a:pPr algn="l">
+              <a:lnSpc>
+                <a:spcPct val="118000"/>
+              </a:lnSpc>
+              <a:spcBef>
+                <a:spcPts val="0"/>
+              </a:spcBef>
+              <a:spcAft>
+                <a:spcPts val="1000"/>
+              </a:spcAft>
+            </a:pPr>
+            <a:r>
+              <a:rPr sz="1500" b="0">
                 <a:solidFill>
                   <a:srgbClr val="1A1A1A"/>
                 </a:solidFill>
                 <a:latin typeface="Golos Text"/>
                 <a:rFonts ascii="Golos Text" hAnsi="Golos Text" cs="Golos Text" eastAsia="Golos Text"/>
               </a:rPr>
-              <a:t>Товар от идеи до полки и маржи.</a:t>
-            </a:r>
-          </a:p>
-        </p:txBody>
-      </p:sp>
-      <p:sp>
-        <p:nvSpPr>
-          <p:cNvPr id="14" name="TextBox 13"/>
-          <p:cNvSpPr txBox="1"/>
-          <p:nvPr/>
-        </p:nvSpPr>
-        <p:spPr>
-          <a:xfrm>
-            <a:off x="6571335" y="1426464"/>
-            <a:ext cx="4815687" cy="4334256"/>
-          </a:xfrm>
-          <a:prstGeom prst="rect">
-            <a:avLst/>
-          </a:prstGeom>
-          <a:noFill/>
-        </p:spPr>
-        <p:txBody>
-          <a:bodyPr wrap="square" anchor="t" lIns="50800" rIns="50800" tIns="25400" bIns="25400"/>
-          <a:lstStyle/>
-          <a:p>
-            <a:pPr algn="l">
-              <a:lnSpc>
-                <a:spcPct val="118000"/>
-              </a:lnSpc>
-              <a:spcBef>
-                <a:spcPts val="0"/>
-              </a:spcBef>
-              <a:spcAft>
-                <a:spcPts val="1200"/>
+              <a:t>Доказательства до выхода на витрину</a:t>
+            </a:r>
+          </a:p>
+          <a:p>
+            <a:pPr algn="l">
+              <a:lnSpc>
+                <a:spcPct val="118000"/>
+              </a:lnSpc>
+              <a:spcBef>
+                <a:spcPts val="0"/>
+              </a:spcBef>
+              <a:spcAft>
+                <a:spcPts val="200"/>
               </a:spcAft>
             </a:pPr>
             <a:r>
               <a:rPr sz="1500" b="1">
                 <a:solidFill>
-                  <a:srgbClr val="2A554A"/>
+                  <a:srgbClr val="1A1A1A"/>
                 </a:solidFill>
                 <a:latin typeface="Manrope"/>
                 <a:rFonts ascii="Manrope" hAnsi="Manrope" cs="Manrope" eastAsia="Manrope"/>
               </a:rPr>
-              <a:t>Роль здесь</a:t>
-            </a:r>
-          </a:p>
-          <a:p>
-            <a:pPr algn="l">
-              <a:lnSpc>
-                <a:spcPct val="118000"/>
-              </a:lnSpc>
-              <a:spcBef>
-                <a:spcPts val="0"/>
-              </a:spcBef>
-              <a:spcAft>
-                <a:spcPts val="800"/>
-              </a:spcAft>
-            </a:pPr>
-            <a:r>
-              <a:rPr sz="1600" b="0">
+              <a:t>Связка</a:t>
+            </a:r>
+          </a:p>
+          <a:p>
+            <a:pPr algn="l">
+              <a:lnSpc>
+                <a:spcPct val="118000"/>
+              </a:lnSpc>
+              <a:spcBef>
+                <a:spcPts val="0"/>
+              </a:spcBef>
+              <a:spcAft>
+                <a:spcPts val="0"/>
+              </a:spcAft>
+            </a:pPr>
+            <a:r>
+              <a:rPr sz="1500" b="0">
                 <a:solidFill>
                   <a:srgbClr val="1A1A1A"/>
                 </a:solidFill>
                 <a:latin typeface="Golos Text"/>
                 <a:rFonts ascii="Golos Text" hAnsi="Golos Text" cs="Golos Text" eastAsia="Golos Text"/>
               </a:rPr>
-              <a:t>• Ассортимент и новинки</a:t>
-            </a:r>
-          </a:p>
-          <a:p>
-            <a:pPr algn="l">
-              <a:lnSpc>
-                <a:spcPct val="118000"/>
-              </a:lnSpc>
-              <a:spcBef>
-                <a:spcPts val="0"/>
-              </a:spcBef>
-              <a:spcAft>
-                <a:spcPts val="800"/>
-              </a:spcAft>
-            </a:pPr>
-            <a:r>
-              <a:rPr sz="1600" b="0">
-                <a:solidFill>
-                  <a:srgbClr val="1A1A1A"/>
-                </a:solidFill>
-                <a:latin typeface="Golos Text"/>
-                <a:rFonts ascii="Golos Text" hAnsi="Golos Text" cs="Golos Text" eastAsia="Golos Text"/>
-              </a:rPr>
-              <a:t>• Позиция линейки в доме брендов</a:t>
-            </a:r>
-          </a:p>
-          <a:p>
-            <a:pPr algn="l">
-              <a:lnSpc>
-                <a:spcPct val="118000"/>
-              </a:lnSpc>
-              <a:spcBef>
-                <a:spcPts val="0"/>
-              </a:spcBef>
-              <a:spcAft>
-                <a:spcPts val="800"/>
-              </a:spcAft>
-            </a:pPr>
-            <a:r>
-              <a:rPr sz="1600" b="0">
-                <a:solidFill>
-                  <a:srgbClr val="1A1A1A"/>
-                </a:solidFill>
-                <a:latin typeface="Golos Text"/>
-                <a:rFonts ascii="Golos Text" hAnsi="Golos Text" cs="Golos Text" eastAsia="Golos Text"/>
-              </a:rPr>
-              <a:t>• Продукт и доказательства до витрины</a:t>
-            </a:r>
-          </a:p>
-          <a:p>
-            <a:pPr algn="l">
-              <a:lnSpc>
-                <a:spcPct val="118000"/>
-              </a:lnSpc>
-              <a:spcBef>
-                <a:spcPts val="0"/>
-              </a:spcBef>
-              <a:spcAft>
-                <a:spcPts val="800"/>
-              </a:spcAft>
-            </a:pPr>
-            <a:r>
-              <a:rPr sz="1600" b="0">
-                <a:solidFill>
-                  <a:srgbClr val="1A1A1A"/>
-                </a:solidFill>
-                <a:latin typeface="Golos Text"/>
-                <a:rFonts ascii="Golos Text" hAnsi="Golos Text" cs="Golos Text" eastAsia="Golos Text"/>
-              </a:rPr>
-              <a:t>• Связка: технолог → продажи → экономика → поставка</a:t>
+              <a:t>Технолог → продажи → экономика → поставка</a:t>
             </a:r>
           </a:p>
         </p:txBody>

--- a/АК/presentation-travelplus-interview.pptx
+++ b/АК/presentation-travelplus-interview.pptx
@@ -7249,7 +7249,30 @@
                 <a:spcPts val="0"/>
               </a:spcBef>
               <a:spcAft>
-                <a:spcPts val="600"/>
+                <a:spcPts val="200"/>
+              </a:spcAft>
+            </a:pPr>
+            <a:r>
+              <a:rPr sz="1500" b="1">
+                <a:solidFill>
+                  <a:srgbClr val="1A1A1A"/>
+                </a:solidFill>
+                <a:latin typeface="Manrope"/>
+                <a:rFonts ascii="Manrope" hAnsi="Manrope" cs="Manrope" eastAsia="Manrope"/>
+              </a:rPr>
+              <a:t>Конкуренты</a:t>
+            </a:r>
+          </a:p>
+          <a:p>
+            <a:pPr algn="l">
+              <a:lnSpc>
+                <a:spcPct val="118000"/>
+              </a:lnSpc>
+              <a:spcBef>
+                <a:spcPts val="0"/>
+              </a:spcBef>
+              <a:spcAft>
+                <a:spcPts val="1000"/>
               </a:spcAft>
             </a:pPr>
             <a:r>
@@ -7260,7 +7283,30 @@
                 <a:latin typeface="Golos Text"/>
                 <a:rFonts ascii="Golos Text" hAnsi="Golos Text" cs="Golos Text" eastAsia="Golos Text"/>
               </a:rPr>
-              <a:t>Конкуренты на полке: ЕТС Natural, MEZO, Natura Siberica.</a:t>
+              <a:t>ЕТС Natural · MEZO · Natura Siberica (чужой премиум в каталоге)</a:t>
+            </a:r>
+          </a:p>
+          <a:p>
+            <a:pPr algn="l">
+              <a:lnSpc>
+                <a:spcPct val="118000"/>
+              </a:lnSpc>
+              <a:spcBef>
+                <a:spcPts val="0"/>
+              </a:spcBef>
+              <a:spcAft>
+                <a:spcPts val="200"/>
+              </a:spcAft>
+            </a:pPr>
+            <a:r>
+              <a:rPr sz="1500" b="1">
+                <a:solidFill>
+                  <a:srgbClr val="1A1A1A"/>
+                </a:solidFill>
+                <a:latin typeface="Manrope"/>
+                <a:rFonts ascii="Manrope" hAnsi="Manrope" cs="Manrope" eastAsia="Manrope"/>
+              </a:rPr>
+              <a:t>Сила Travel+</a:t>
             </a:r>
           </a:p>
           <a:p>
@@ -7276,26 +7322,49 @@
               </a:spcAft>
             </a:pPr>
             <a:r>
-              <a:rPr sz="1400" b="0">
-                <a:solidFill>
-                  <a:srgbClr val="5C5C5C"/>
+              <a:rPr sz="1500" b="0">
+                <a:solidFill>
+                  <a:srgbClr val="1A1A1A"/>
                 </a:solidFill>
                 <a:latin typeface="Golos Text"/>
                 <a:rFonts ascii="Golos Text" hAnsi="Golos Text" cs="Golos Text" eastAsia="Golos Text"/>
               </a:rPr>
-              <a:t>(Natura Siberica — чужой премиум в каталоге Travel+)</a:t>
-            </a:r>
-          </a:p>
-          <a:p>
-            <a:pPr algn="l">
-              <a:lnSpc>
-                <a:spcPct val="118000"/>
-              </a:lnSpc>
-              <a:spcBef>
-                <a:spcPts val="0"/>
-              </a:spcBef>
-              <a:spcAft>
-                <a:spcPts val="600"/>
+              <a:t>Массовый и средний сегмент</a:t>
+            </a:r>
+          </a:p>
+          <a:p>
+            <a:pPr algn="l">
+              <a:lnSpc>
+                <a:spcPct val="118000"/>
+              </a:lnSpc>
+              <a:spcBef>
+                <a:spcPts val="0"/>
+              </a:spcBef>
+              <a:spcAft>
+                <a:spcPts val="200"/>
+              </a:spcAft>
+            </a:pPr>
+            <a:r>
+              <a:rPr sz="1500" b="1">
+                <a:solidFill>
+                  <a:srgbClr val="1A1A1A"/>
+                </a:solidFill>
+                <a:latin typeface="Manrope"/>
+                <a:rFonts ascii="Manrope" hAnsi="Manrope" cs="Manrope" eastAsia="Manrope"/>
+              </a:rPr>
+              <a:t>Дыра</a:t>
+            </a:r>
+          </a:p>
+          <a:p>
+            <a:pPr algn="l">
+              <a:lnSpc>
+                <a:spcPct val="118000"/>
+              </a:lnSpc>
+              <a:spcBef>
+                <a:spcPts val="0"/>
+              </a:spcBef>
+              <a:spcAft>
+                <a:spcPts val="0"/>
               </a:spcAft>
             </a:pPr>
             <a:r>
@@ -7306,86 +7375,86 @@
                 <a:latin typeface="Golos Text"/>
                 <a:rFonts ascii="Golos Text" hAnsi="Golos Text" cs="Golos Text" eastAsia="Golos Text"/>
               </a:rPr>
-              <a:t>Travel+ силён в массовом и среднем сегменте.</a:t>
-            </a:r>
-          </a:p>
-          <a:p>
-            <a:pPr algn="l">
-              <a:lnSpc>
-                <a:spcPct val="118000"/>
-              </a:lnSpc>
-              <a:spcBef>
-                <a:spcPts val="0"/>
-              </a:spcBef>
-              <a:spcAft>
-                <a:spcPts val="800"/>
+              <a:t>Своей Natural с документами нет</a:t>
+            </a:r>
+          </a:p>
+        </p:txBody>
+      </p:sp>
+      <p:sp>
+        <p:nvSpPr>
+          <p:cNvPr id="14" name="TextBox 13"/>
+          <p:cNvSpPr txBox="1"/>
+          <p:nvPr/>
+        </p:nvSpPr>
+        <p:spPr>
+          <a:xfrm>
+            <a:off x="6571335" y="1426464"/>
+            <a:ext cx="4815687" cy="4334256"/>
+          </a:xfrm>
+          <a:prstGeom prst="rect">
+            <a:avLst/>
+          </a:prstGeom>
+          <a:noFill/>
+        </p:spPr>
+        <p:txBody>
+          <a:bodyPr wrap="square" anchor="t" lIns="50800" rIns="50800" tIns="25400" bIns="25400"/>
+          <a:lstStyle/>
+          <a:p>
+            <a:pPr algn="l">
+              <a:lnSpc>
+                <a:spcPct val="118000"/>
+              </a:lnSpc>
+              <a:spcBef>
+                <a:spcPts val="0"/>
+              </a:spcBef>
+              <a:spcAft>
+                <a:spcPts val="1200"/>
               </a:spcAft>
             </a:pPr>
             <a:r>
               <a:rPr sz="1500" b="1">
                 <a:solidFill>
-                  <a:srgbClr val="1A1A1A"/>
+                  <a:srgbClr val="2A554A"/>
                 </a:solidFill>
                 <a:latin typeface="Manrope"/>
                 <a:rFonts ascii="Manrope" hAnsi="Manrope" cs="Manrope" eastAsia="Manrope"/>
               </a:rPr>
-              <a:t>Слабое место: своей линейки Natural с документами нет.</a:t>
-            </a:r>
-          </a:p>
-        </p:txBody>
-      </p:sp>
-      <p:sp>
-        <p:nvSpPr>
-          <p:cNvPr id="14" name="TextBox 13"/>
-          <p:cNvSpPr txBox="1"/>
-          <p:nvPr/>
-        </p:nvSpPr>
-        <p:spPr>
-          <a:xfrm>
-            <a:off x="6571335" y="1426464"/>
-            <a:ext cx="4815687" cy="4334256"/>
-          </a:xfrm>
-          <a:prstGeom prst="rect">
-            <a:avLst/>
-          </a:prstGeom>
-          <a:noFill/>
-        </p:spPr>
-        <p:txBody>
-          <a:bodyPr wrap="square" anchor="t" lIns="50800" rIns="50800" tIns="25400" bIns="25400"/>
-          <a:lstStyle/>
-          <a:p>
-            <a:pPr algn="l">
-              <a:lnSpc>
-                <a:spcPct val="118000"/>
-              </a:lnSpc>
-              <a:spcBef>
-                <a:spcPts val="0"/>
-              </a:spcBef>
-              <a:spcAft>
-                <a:spcPts val="1200"/>
+              <a:t>Ценовая лестка (не оферта)</a:t>
+            </a:r>
+          </a:p>
+          <a:p>
+            <a:pPr algn="l">
+              <a:lnSpc>
+                <a:spcPct val="118000"/>
+              </a:lnSpc>
+              <a:spcBef>
+                <a:spcPts val="0"/>
+              </a:spcBef>
+              <a:spcAft>
+                <a:spcPts val="200"/>
               </a:spcAft>
             </a:pPr>
             <a:r>
               <a:rPr sz="1500" b="1">
                 <a:solidFill>
-                  <a:srgbClr val="2A554A"/>
+                  <a:srgbClr val="1A1A1A"/>
                 </a:solidFill>
                 <a:latin typeface="Manrope"/>
                 <a:rFonts ascii="Manrope" hAnsi="Manrope" cs="Manrope" eastAsia="Manrope"/>
               </a:rPr>
-              <a:t>Ориентир цен (не оферта)</a:t>
-            </a:r>
-          </a:p>
-          <a:p>
-            <a:pPr algn="l">
-              <a:lnSpc>
-                <a:spcPct val="118000"/>
-              </a:lnSpc>
-              <a:spcBef>
-                <a:spcPts val="0"/>
-              </a:spcBef>
-              <a:spcAft>
-                <a:spcPts val="600"/>
+              <a:t>Hotel Line</a:t>
+            </a:r>
+          </a:p>
+          <a:p>
+            <a:pPr algn="l">
+              <a:lnSpc>
+                <a:spcPct val="118000"/>
+              </a:lnSpc>
+              <a:spcBef>
+                <a:spcPts val="0"/>
+              </a:spcBef>
+              <a:spcAft>
+                <a:spcPts val="1000"/>
               </a:spcAft>
             </a:pPr>
             <a:r>
@@ -7396,19 +7465,42 @@
                 <a:latin typeface="Golos Text"/>
                 <a:rFonts ascii="Golos Text" hAnsi="Golos Text" cs="Golos Text" eastAsia="Golos Text"/>
               </a:rPr>
-              <a:t>Hotel Line — ориентир 12–15 ₽ / 30 мл</a:t>
-            </a:r>
-          </a:p>
-          <a:p>
-            <a:pPr algn="l">
-              <a:lnSpc>
-                <a:spcPct val="118000"/>
-              </a:lnSpc>
-              <a:spcBef>
-                <a:spcPts val="0"/>
-              </a:spcBef>
-              <a:spcAft>
-                <a:spcPts val="600"/>
+              <a:t>12–15 ₽ / 30 мл</a:t>
+            </a:r>
+          </a:p>
+          <a:p>
+            <a:pPr algn="l">
+              <a:lnSpc>
+                <a:spcPct val="118000"/>
+              </a:lnSpc>
+              <a:spcBef>
+                <a:spcPts val="0"/>
+              </a:spcBef>
+              <a:spcAft>
+                <a:spcPts val="200"/>
+              </a:spcAft>
+            </a:pPr>
+            <a:r>
+              <a:rPr sz="1500" b="1">
+                <a:solidFill>
+                  <a:srgbClr val="1A1A1A"/>
+                </a:solidFill>
+                <a:latin typeface="Manrope"/>
+                <a:rFonts ascii="Manrope" hAnsi="Manrope" cs="Manrope" eastAsia="Manrope"/>
+              </a:rPr>
+              <a:t>ЕТС Natural</a:t>
+            </a:r>
+          </a:p>
+          <a:p>
+            <a:pPr algn="l">
+              <a:lnSpc>
+                <a:spcPct val="118000"/>
+              </a:lnSpc>
+              <a:spcBef>
+                <a:spcPts val="0"/>
+              </a:spcBef>
+              <a:spcAft>
+                <a:spcPts val="1000"/>
               </a:spcAft>
             </a:pPr>
             <a:r>
@@ -7419,19 +7511,42 @@
                 <a:latin typeface="Golos Text"/>
                 <a:rFonts ascii="Golos Text" hAnsi="Golos Text" cs="Golos Text" eastAsia="Golos Text"/>
               </a:rPr>
-              <a:t>ЕТС Natural — ориентир 18 ₽ / 25 мл</a:t>
-            </a:r>
-          </a:p>
-          <a:p>
-            <a:pPr algn="l">
-              <a:lnSpc>
-                <a:spcPct val="118000"/>
-              </a:lnSpc>
-              <a:spcBef>
-                <a:spcPts val="0"/>
-              </a:spcBef>
-              <a:spcAft>
-                <a:spcPts val="1200"/>
+              <a:t>18 ₽ / 25 мл</a:t>
+            </a:r>
+          </a:p>
+          <a:p>
+            <a:pPr algn="l">
+              <a:lnSpc>
+                <a:spcPct val="118000"/>
+              </a:lnSpc>
+              <a:spcBef>
+                <a:spcPts val="0"/>
+              </a:spcBef>
+              <a:spcAft>
+                <a:spcPts val="200"/>
+              </a:spcAft>
+            </a:pPr>
+            <a:r>
+              <a:rPr sz="1500" b="1">
+                <a:solidFill>
+                  <a:srgbClr val="1A1A1A"/>
+                </a:solidFill>
+                <a:latin typeface="Manrope"/>
+                <a:rFonts ascii="Manrope" hAnsi="Manrope" cs="Manrope" eastAsia="Manrope"/>
+              </a:rPr>
+              <a:t>Natura Siberica</a:t>
+            </a:r>
+          </a:p>
+          <a:p>
+            <a:pPr algn="l">
+              <a:lnSpc>
+                <a:spcPct val="118000"/>
+              </a:lnSpc>
+              <a:spcBef>
+                <a:spcPts val="0"/>
+              </a:spcBef>
+              <a:spcAft>
+                <a:spcPts val="1000"/>
               </a:spcAft>
             </a:pPr>
             <a:r>
@@ -7442,19 +7557,19 @@
                 <a:latin typeface="Golos Text"/>
                 <a:rFonts ascii="Golos Text" hAnsi="Golos Text" cs="Golos Text" eastAsia="Golos Text"/>
               </a:rPr>
-              <a:t>Natura Siberica — ориентир 30–40 ₽ и выше</a:t>
-            </a:r>
-          </a:p>
-          <a:p>
-            <a:pPr algn="l">
-              <a:lnSpc>
-                <a:spcPct val="118000"/>
-              </a:lnSpc>
-              <a:spcBef>
-                <a:spcPts val="0"/>
-              </a:spcBef>
-              <a:spcAft>
-                <a:spcPts val="800"/>
+              <a:t>30–40 ₽ и выше</a:t>
+            </a:r>
+          </a:p>
+          <a:p>
+            <a:pPr algn="l">
+              <a:lnSpc>
+                <a:spcPct val="118000"/>
+              </a:lnSpc>
+              <a:spcBef>
+                <a:spcPts val="0"/>
+              </a:spcBef>
+              <a:spcAft>
+                <a:spcPts val="200"/>
               </a:spcAft>
             </a:pPr>
             <a:r>
@@ -7465,19 +7580,19 @@
                 <a:latin typeface="Manrope"/>
                 <a:rFonts ascii="Manrope" hAnsi="Manrope" cs="Manrope" eastAsia="Manrope"/>
               </a:rPr>
-              <a:t>Ставка Natural: между Hotel Line и Natura Siberica</a:t>
-            </a:r>
-          </a:p>
-          <a:p>
-            <a:pPr algn="l">
-              <a:lnSpc>
-                <a:spcPct val="118000"/>
-              </a:lnSpc>
-              <a:spcBef>
-                <a:spcPts val="0"/>
-              </a:spcBef>
-              <a:spcAft>
-                <a:spcPts val="600"/>
+              <a:t>Место Natural</a:t>
+            </a:r>
+          </a:p>
+          <a:p>
+            <a:pPr algn="l">
+              <a:lnSpc>
+                <a:spcPct val="118000"/>
+              </a:lnSpc>
+              <a:spcBef>
+                <a:spcPts val="0"/>
+              </a:spcBef>
+              <a:spcAft>
+                <a:spcPts val="0"/>
               </a:spcAft>
             </a:pPr>
             <a:r>
@@ -7488,7 +7603,7 @@
                 <a:latin typeface="Golos Text"/>
                 <a:rFonts ascii="Golos Text" hAnsi="Golos Text" cs="Golos Text" eastAsia="Golos Text"/>
               </a:rPr>
-              <a:t>Натуральность, пакет документов, один поставщик на номер.</a:t>
+              <a:t>Между Hotel Line и Natura Siberica</a:t>
             </a:r>
           </a:p>
         </p:txBody>

--- a/АК/presentation-travelplus-interview.pptx
+++ b/АК/presentation-travelplus-interview.pptx
@@ -8123,19 +8123,42 @@
                 <a:latin typeface="Manrope"/>
                 <a:rFonts ascii="Manrope" hAnsi="Manrope" cs="Manrope" eastAsia="Manrope"/>
               </a:rPr>
-              <a:t>Карта портфеля</a:t>
-            </a:r>
-          </a:p>
-          <a:p>
-            <a:pPr algn="l">
-              <a:lnSpc>
-                <a:spcPct val="118000"/>
-              </a:lnSpc>
-              <a:spcBef>
-                <a:spcPts val="0"/>
-              </a:spcBef>
-              <a:spcAft>
-                <a:spcPts val="600"/>
+              <a:t>Портфель</a:t>
+            </a:r>
+          </a:p>
+          <a:p>
+            <a:pPr algn="l">
+              <a:lnSpc>
+                <a:spcPct val="118000"/>
+              </a:lnSpc>
+              <a:spcBef>
+                <a:spcPts val="0"/>
+              </a:spcBef>
+              <a:spcAft>
+                <a:spcPts val="200"/>
+              </a:spcAft>
+            </a:pPr>
+            <a:r>
+              <a:rPr sz="1500" b="1">
+                <a:solidFill>
+                  <a:srgbClr val="1A1A1A"/>
+                </a:solidFill>
+                <a:latin typeface="Manrope"/>
+                <a:rFonts ascii="Manrope" hAnsi="Manrope" cs="Manrope" eastAsia="Manrope"/>
+              </a:rPr>
+              <a:t>Hotel Line</a:t>
+            </a:r>
+          </a:p>
+          <a:p>
+            <a:pPr algn="l">
+              <a:lnSpc>
+                <a:spcPct val="118000"/>
+              </a:lnSpc>
+              <a:spcBef>
+                <a:spcPts val="0"/>
+              </a:spcBef>
+              <a:spcAft>
+                <a:spcPts val="1000"/>
               </a:spcAft>
             </a:pPr>
             <a:r>
@@ -8146,19 +8169,42 @@
                 <a:latin typeface="Golos Text"/>
                 <a:rFonts ascii="Golos Text" hAnsi="Golos Text" cs="Golos Text" eastAsia="Golos Text"/>
               </a:rPr>
-              <a:t>Hotel Line — цена и базовый сегмент</a:t>
-            </a:r>
-          </a:p>
-          <a:p>
-            <a:pPr algn="l">
-              <a:lnSpc>
-                <a:spcPct val="118000"/>
-              </a:lnSpc>
-              <a:spcBef>
-                <a:spcPts val="0"/>
-              </a:spcBef>
-              <a:spcAft>
-                <a:spcPts val="600"/>
+              <a:t>Цена и базовый сегмент</a:t>
+            </a:r>
+          </a:p>
+          <a:p>
+            <a:pPr algn="l">
+              <a:lnSpc>
+                <a:spcPct val="118000"/>
+              </a:lnSpc>
+              <a:spcBef>
+                <a:spcPts val="0"/>
+              </a:spcBef>
+              <a:spcAft>
+                <a:spcPts val="200"/>
+              </a:spcAft>
+            </a:pPr>
+            <a:r>
+              <a:rPr sz="1500" b="1">
+                <a:solidFill>
+                  <a:srgbClr val="1A1A1A"/>
+                </a:solidFill>
+                <a:latin typeface="Manrope"/>
+                <a:rFonts ascii="Manrope" hAnsi="Manrope" cs="Manrope" eastAsia="Manrope"/>
+              </a:rPr>
+              <a:t>Fleur / Aquatique / La Nuit</a:t>
+            </a:r>
+          </a:p>
+          <a:p>
+            <a:pPr algn="l">
+              <a:lnSpc>
+                <a:spcPct val="118000"/>
+              </a:lnSpc>
+              <a:spcBef>
+                <a:spcPts val="0"/>
+              </a:spcBef>
+              <a:spcAft>
+                <a:spcPts val="1000"/>
               </a:spcAft>
             </a:pPr>
             <a:r>
@@ -8169,19 +8215,19 @@
                 <a:latin typeface="Golos Text"/>
                 <a:rFonts ascii="Golos Text" hAnsi="Golos Text" cs="Golos Text" eastAsia="Golos Text"/>
               </a:rPr>
-              <a:t>Fleur / Aquatique / La Nuit — дизайн и аромат</a:t>
-            </a:r>
-          </a:p>
-          <a:p>
-            <a:pPr algn="l">
-              <a:lnSpc>
-                <a:spcPct val="118000"/>
-              </a:lnSpc>
-              <a:spcBef>
-                <a:spcPts val="0"/>
-              </a:spcBef>
-              <a:spcAft>
-                <a:spcPts val="800"/>
+              <a:t>Дизайн и аромат</a:t>
+            </a:r>
+          </a:p>
+          <a:p>
+            <a:pPr algn="l">
+              <a:lnSpc>
+                <a:spcPct val="118000"/>
+              </a:lnSpc>
+              <a:spcBef>
+                <a:spcPts val="0"/>
+              </a:spcBef>
+              <a:spcAft>
+                <a:spcPts val="200"/>
               </a:spcAft>
             </a:pPr>
             <a:r>
@@ -8192,19 +8238,19 @@
                 <a:latin typeface="Manrope"/>
                 <a:rFonts ascii="Manrope" hAnsi="Manrope" cs="Manrope" eastAsia="Manrope"/>
               </a:rPr>
-              <a:t>Natural — натуральность и документы</a:t>
-            </a:r>
-          </a:p>
-          <a:p>
-            <a:pPr algn="l">
-              <a:lnSpc>
-                <a:spcPct val="118000"/>
-              </a:lnSpc>
-              <a:spcBef>
-                <a:spcPts val="0"/>
-              </a:spcBef>
-              <a:spcAft>
-                <a:spcPts val="600"/>
+              <a:t>Natural</a:t>
+            </a:r>
+          </a:p>
+          <a:p>
+            <a:pPr algn="l">
+              <a:lnSpc>
+                <a:spcPct val="118000"/>
+              </a:lnSpc>
+              <a:spcBef>
+                <a:spcPts val="0"/>
+              </a:spcBef>
+              <a:spcAft>
+                <a:spcPts val="1000"/>
               </a:spcAft>
             </a:pPr>
             <a:r>
@@ -8215,19 +8261,42 @@
                 <a:latin typeface="Golos Text"/>
                 <a:rFonts ascii="Golos Text" hAnsi="Golos Text" cs="Golos Text" eastAsia="Golos Text"/>
               </a:rPr>
-              <a:t>Natura Siberica — чужой премиум в каталоге</a:t>
-            </a:r>
-          </a:p>
-          <a:p>
-            <a:pPr algn="l">
-              <a:lnSpc>
-                <a:spcPct val="118000"/>
-              </a:lnSpc>
-              <a:spcBef>
-                <a:spcPts val="0"/>
-              </a:spcBef>
-              <a:spcAft>
-                <a:spcPts val="600"/>
+              <a:t>Натуральность и документы</a:t>
+            </a:r>
+          </a:p>
+          <a:p>
+            <a:pPr algn="l">
+              <a:lnSpc>
+                <a:spcPct val="118000"/>
+              </a:lnSpc>
+              <a:spcBef>
+                <a:spcPts val="0"/>
+              </a:spcBef>
+              <a:spcAft>
+                <a:spcPts val="200"/>
+              </a:spcAft>
+            </a:pPr>
+            <a:r>
+              <a:rPr sz="1500" b="1">
+                <a:solidFill>
+                  <a:srgbClr val="1A1A1A"/>
+                </a:solidFill>
+                <a:latin typeface="Manrope"/>
+                <a:rFonts ascii="Manrope" hAnsi="Manrope" cs="Manrope" eastAsia="Manrope"/>
+              </a:rPr>
+              <a:t>Natura Siberica</a:t>
+            </a:r>
+          </a:p>
+          <a:p>
+            <a:pPr algn="l">
+              <a:lnSpc>
+                <a:spcPct val="118000"/>
+              </a:lnSpc>
+              <a:spcBef>
+                <a:spcPts val="0"/>
+              </a:spcBef>
+              <a:spcAft>
+                <a:spcPts val="1000"/>
               </a:spcAft>
             </a:pPr>
             <a:r>
@@ -8238,7 +8307,53 @@
                 <a:latin typeface="Golos Text"/>
                 <a:rFonts ascii="Golos Text" hAnsi="Golos Text" cs="Golos Text" eastAsia="Golos Text"/>
               </a:rPr>
-              <a:t>СТМ с логотипом отеля — отдельный проект</a:t>
+              <a:t>Чужой премиум в каталоге</a:t>
+            </a:r>
+          </a:p>
+          <a:p>
+            <a:pPr algn="l">
+              <a:lnSpc>
+                <a:spcPct val="118000"/>
+              </a:lnSpc>
+              <a:spcBef>
+                <a:spcPts val="0"/>
+              </a:spcBef>
+              <a:spcAft>
+                <a:spcPts val="200"/>
+              </a:spcAft>
+            </a:pPr>
+            <a:r>
+              <a:rPr sz="1500" b="1">
+                <a:solidFill>
+                  <a:srgbClr val="1A1A1A"/>
+                </a:solidFill>
+                <a:latin typeface="Manrope"/>
+                <a:rFonts ascii="Manrope" hAnsi="Manrope" cs="Manrope" eastAsia="Manrope"/>
+              </a:rPr>
+              <a:t>СТМ</a:t>
+            </a:r>
+          </a:p>
+          <a:p>
+            <a:pPr algn="l">
+              <a:lnSpc>
+                <a:spcPct val="118000"/>
+              </a:lnSpc>
+              <a:spcBef>
+                <a:spcPts val="0"/>
+              </a:spcBef>
+              <a:spcAft>
+                <a:spcPts val="0"/>
+              </a:spcAft>
+            </a:pPr>
+            <a:r>
+              <a:rPr sz="1500" b="0">
+                <a:solidFill>
+                  <a:srgbClr val="1A1A1A"/>
+                </a:solidFill>
+                <a:latin typeface="Golos Text"/>
+                <a:rFonts ascii="Golos Text" hAnsi="Golos Text" cs="Golos Text" eastAsia="Golos Text"/>
+              </a:rPr>
+              <a:t>Отдельный проект под логотип отеля</a:t>
             </a:r>
           </a:p>
         </p:txBody>
@@ -8282,19 +8397,42 @@
                 <a:latin typeface="Manrope"/>
                 <a:rFonts ascii="Manrope" hAnsi="Manrope" cs="Manrope" eastAsia="Manrope"/>
               </a:rPr>
-              <a:t>Мостик для продаж</a:t>
-            </a:r>
-          </a:p>
-          <a:p>
-            <a:pPr algn="l">
-              <a:lnSpc>
-                <a:spcPct val="118000"/>
-              </a:lnSpc>
-              <a:spcBef>
-                <a:spcPts val="0"/>
-              </a:spcBef>
-              <a:spcAft>
-                <a:spcPts val="600"/>
+              <a:t>Как не мешать линейки</a:t>
+            </a:r>
+          </a:p>
+          <a:p>
+            <a:pPr algn="l">
+              <a:lnSpc>
+                <a:spcPct val="118000"/>
+              </a:lnSpc>
+              <a:spcBef>
+                <a:spcPts val="0"/>
+              </a:spcBef>
+              <a:spcAft>
+                <a:spcPts val="200"/>
+              </a:spcAft>
+            </a:pPr>
+            <a:r>
+              <a:rPr sz="1500" b="1">
+                <a:solidFill>
+                  <a:srgbClr val="1A1A1A"/>
+                </a:solidFill>
+                <a:latin typeface="Manrope"/>
+                <a:rFonts ascii="Manrope" hAnsi="Manrope" cs="Manrope" eastAsia="Manrope"/>
+              </a:rPr>
+              <a:t>Fleur</a:t>
+            </a:r>
+          </a:p>
+          <a:p>
+            <a:pPr algn="l">
+              <a:lnSpc>
+                <a:spcPct val="118000"/>
+              </a:lnSpc>
+              <a:spcBef>
+                <a:spcPts val="0"/>
+              </a:spcBef>
+              <a:spcAft>
+                <a:spcPts val="1000"/>
               </a:spcAft>
             </a:pPr>
             <a:r>
@@ -8305,19 +8443,42 @@
                 <a:latin typeface="Golos Text"/>
                 <a:rFonts ascii="Golos Text" hAnsi="Golos Text" cs="Golos Text" eastAsia="Golos Text"/>
               </a:rPr>
-              <a:t>Fleur закрывает дизайн и аромат в номере.</a:t>
-            </a:r>
-          </a:p>
-          <a:p>
-            <a:pPr algn="l">
-              <a:lnSpc>
-                <a:spcPct val="118000"/>
-              </a:lnSpc>
-              <a:spcBef>
-                <a:spcPts val="0"/>
-              </a:spcBef>
-              <a:spcAft>
-                <a:spcPts val="600"/>
+              <a:t>Закрывает дизайн и аромат в номере</a:t>
+            </a:r>
+          </a:p>
+          <a:p>
+            <a:pPr algn="l">
+              <a:lnSpc>
+                <a:spcPct val="118000"/>
+              </a:lnSpc>
+              <a:spcBef>
+                <a:spcPts val="0"/>
+              </a:spcBef>
+              <a:spcAft>
+                <a:spcPts val="200"/>
+              </a:spcAft>
+            </a:pPr>
+            <a:r>
+              <a:rPr sz="1500" b="1">
+                <a:solidFill>
+                  <a:srgbClr val="1A1A1A"/>
+                </a:solidFill>
+                <a:latin typeface="Manrope"/>
+                <a:rFonts ascii="Manrope" hAnsi="Manrope" cs="Manrope" eastAsia="Manrope"/>
+              </a:rPr>
+              <a:t>Natural</a:t>
+            </a:r>
+          </a:p>
+          <a:p>
+            <a:pPr algn="l">
+              <a:lnSpc>
+                <a:spcPct val="118000"/>
+              </a:lnSpc>
+              <a:spcBef>
+                <a:spcPts val="0"/>
+              </a:spcBef>
+              <a:spcAft>
+                <a:spcPts val="1000"/>
               </a:spcAft>
             </a:pPr>
             <a:r>
@@ -8328,19 +8489,19 @@
                 <a:latin typeface="Golos Text"/>
                 <a:rFonts ascii="Golos Text" hAnsi="Golos Text" cs="Golos Text" eastAsia="Golos Text"/>
               </a:rPr>
-              <a:t>Natural — запрос на натуральность и полный пакет документов.</a:t>
-            </a:r>
-          </a:p>
-          <a:p>
-            <a:pPr algn="l">
-              <a:lnSpc>
-                <a:spcPct val="118000"/>
-              </a:lnSpc>
-              <a:spcBef>
-                <a:spcPts val="0"/>
-              </a:spcBef>
-              <a:spcAft>
-                <a:spcPts val="1000"/>
+              <a:t>Закрывает запрос eco и пакет документов</a:t>
+            </a:r>
+          </a:p>
+          <a:p>
+            <a:pPr algn="l">
+              <a:lnSpc>
+                <a:spcPct val="118000"/>
+              </a:lnSpc>
+              <a:spcBef>
+                <a:spcPts val="0"/>
+              </a:spcBef>
+              <a:spcAft>
+                <a:spcPts val="200"/>
               </a:spcAft>
             </a:pPr>
             <a:r>
@@ -8351,19 +8512,19 @@
                 <a:latin typeface="Manrope"/>
                 <a:rFonts ascii="Manrope" hAnsi="Manrope" cs="Manrope" eastAsia="Manrope"/>
               </a:rPr>
-              <a:t>Fleur и Natural не конкурируют — разные задачи.</a:t>
-            </a:r>
-          </a:p>
-          <a:p>
-            <a:pPr algn="l">
-              <a:lnSpc>
-                <a:spcPct val="118000"/>
-              </a:lnSpc>
-              <a:spcBef>
-                <a:spcPts val="0"/>
-              </a:spcBef>
-              <a:spcAft>
-                <a:spcPts val="600"/>
+              <a:t>Между собой</a:t>
+            </a:r>
+          </a:p>
+          <a:p>
+            <a:pPr algn="l">
+              <a:lnSpc>
+                <a:spcPct val="118000"/>
+              </a:lnSpc>
+              <a:spcBef>
+                <a:spcPts val="0"/>
+              </a:spcBef>
+              <a:spcAft>
+                <a:spcPts val="1000"/>
               </a:spcAft>
             </a:pPr>
             <a:r>
@@ -8374,7 +8535,53 @@
                 <a:latin typeface="Golos Text"/>
                 <a:rFonts ascii="Golos Text" hAnsi="Golos Text" cs="Golos Text" eastAsia="Golos Text"/>
               </a:rPr>
-              <a:t>На одном объекте: стандартные номера — Hotel Line или Fleur; wellness-корпус или этаж с eco-запросом — Natural.</a:t>
+              <a:t>Не конкурируют — разные задачи</a:t>
+            </a:r>
+          </a:p>
+          <a:p>
+            <a:pPr algn="l">
+              <a:lnSpc>
+                <a:spcPct val="118000"/>
+              </a:lnSpc>
+              <a:spcBef>
+                <a:spcPts val="0"/>
+              </a:spcBef>
+              <a:spcAft>
+                <a:spcPts val="200"/>
+              </a:spcAft>
+            </a:pPr>
+            <a:r>
+              <a:rPr sz="1500" b="1">
+                <a:solidFill>
+                  <a:srgbClr val="1A1A1A"/>
+                </a:solidFill>
+                <a:latin typeface="Manrope"/>
+                <a:rFonts ascii="Manrope" hAnsi="Manrope" cs="Manrope" eastAsia="Manrope"/>
+              </a:rPr>
+              <a:t>На объекте</a:t>
+            </a:r>
+          </a:p>
+          <a:p>
+            <a:pPr algn="l">
+              <a:lnSpc>
+                <a:spcPct val="118000"/>
+              </a:lnSpc>
+              <a:spcBef>
+                <a:spcPts val="0"/>
+              </a:spcBef>
+              <a:spcAft>
+                <a:spcPts val="0"/>
+              </a:spcAft>
+            </a:pPr>
+            <a:r>
+              <a:rPr sz="1500" b="0">
+                <a:solidFill>
+                  <a:srgbClr val="1A1A1A"/>
+                </a:solidFill>
+                <a:latin typeface="Golos Text"/>
+                <a:rFonts ascii="Golos Text" hAnsi="Golos Text" cs="Golos Text" eastAsia="Golos Text"/>
+              </a:rPr>
+              <a:t>Стандартные номера — Hotel Line или Fleur; wellness-этаж — Natural</a:t>
             </a:r>
           </a:p>
         </p:txBody>

--- a/АК/presentation-travelplus-interview.pptx
+++ b/АК/presentation-travelplus-interview.pptx
@@ -9113,7 +9113,7 @@
                 <a:spcPts val="0"/>
               </a:spcBef>
               <a:spcAft>
-                <a:spcPts val="800"/>
+                <a:spcPts val="200"/>
               </a:spcAft>
             </a:pPr>
             <a:r>
@@ -9124,7 +9124,7 @@
                 <a:latin typeface="Manrope"/>
                 <a:rFonts ascii="Manrope" hAnsi="Manrope" cs="Manrope" eastAsia="Manrope"/>
               </a:rPr>
-              <a:t>Мягкий уход с понятной натуральностью</a:t>
+              <a:t>Суть</a:t>
             </a:r>
           </a:p>
           <a:p>
@@ -9147,42 +9147,88 @@
                 <a:latin typeface="Golos Text"/>
                 <a:rFonts ascii="Golos Text" hAnsi="Golos Text" cs="Golos Text" eastAsia="Golos Text"/>
               </a:rPr>
-              <a:t>Для отеля, которому важен комфорт гостя и спокойная проверка документов.</a:t>
-            </a:r>
-          </a:p>
-          <a:p>
-            <a:pPr algn="l">
-              <a:lnSpc>
-                <a:spcPct val="118000"/>
-              </a:lnSpc>
-              <a:spcBef>
-                <a:spcPts val="0"/>
-              </a:spcBef>
-              <a:spcAft>
-                <a:spcPts val="400"/>
-              </a:spcAft>
-            </a:pPr>
-            <a:r>
-              <a:rPr sz="1400" b="0">
-                <a:solidFill>
-                  <a:srgbClr val="5C5C5C"/>
+              <a:t>Мягкий уход с понятной натуральностью</a:t>
+            </a:r>
+          </a:p>
+          <a:p>
+            <a:pPr algn="l">
+              <a:lnSpc>
+                <a:spcPct val="118000"/>
+              </a:lnSpc>
+              <a:spcBef>
+                <a:spcPts val="0"/>
+              </a:spcBef>
+              <a:spcAft>
+                <a:spcPts val="200"/>
+              </a:spcAft>
+            </a:pPr>
+            <a:r>
+              <a:rPr sz="1500" b="1">
+                <a:solidFill>
+                  <a:srgbClr val="1A1A1A"/>
+                </a:solidFill>
+                <a:latin typeface="Manrope"/>
+                <a:rFonts ascii="Manrope" hAnsi="Manrope" cs="Manrope" eastAsia="Manrope"/>
+              </a:rPr>
+              <a:t>Для кого</a:t>
+            </a:r>
+          </a:p>
+          <a:p>
+            <a:pPr algn="l">
+              <a:lnSpc>
+                <a:spcPct val="118000"/>
+              </a:lnSpc>
+              <a:spcBef>
+                <a:spcPts val="0"/>
+              </a:spcBef>
+              <a:spcAft>
+                <a:spcPts val="1000"/>
+              </a:spcAft>
+            </a:pPr>
+            <a:r>
+              <a:rPr sz="1500" b="0">
+                <a:solidFill>
+                  <a:srgbClr val="1A1A1A"/>
                 </a:solidFill>
                 <a:latin typeface="Golos Text"/>
                 <a:rFonts ascii="Golos Text" hAnsi="Golos Text" cs="Golos Text" eastAsia="Golos Text"/>
               </a:rPr>
-              <a:t>Доказательства:</a:t>
-            </a:r>
-          </a:p>
-          <a:p>
-            <a:pPr algn="l">
-              <a:lnSpc>
-                <a:spcPct val="118000"/>
-              </a:lnSpc>
-              <a:spcBef>
-                <a:spcPts val="0"/>
-              </a:spcBef>
-              <a:spcAft>
-                <a:spcPts val="600"/>
+              <a:t>Отель, которому важен комфорт гостя и спокойная проверка документов</a:t>
+            </a:r>
+          </a:p>
+          <a:p>
+            <a:pPr algn="l">
+              <a:lnSpc>
+                <a:spcPct val="118000"/>
+              </a:lnSpc>
+              <a:spcBef>
+                <a:spcPts val="0"/>
+              </a:spcBef>
+              <a:spcAft>
+                <a:spcPts val="200"/>
+              </a:spcAft>
+            </a:pPr>
+            <a:r>
+              <a:rPr sz="1500" b="1">
+                <a:solidFill>
+                  <a:srgbClr val="1A1A1A"/>
+                </a:solidFill>
+                <a:latin typeface="Manrope"/>
+                <a:rFonts ascii="Manrope" hAnsi="Manrope" cs="Manrope" eastAsia="Manrope"/>
+              </a:rPr>
+              <a:t>Состав</a:t>
+            </a:r>
+          </a:p>
+          <a:p>
+            <a:pPr algn="l">
+              <a:lnSpc>
+                <a:spcPct val="118000"/>
+              </a:lnSpc>
+              <a:spcBef>
+                <a:spcPts val="0"/>
+              </a:spcBef>
+              <a:spcAft>
+                <a:spcPts val="1000"/>
               </a:spcAft>
             </a:pPr>
             <a:r>
@@ -9193,19 +9239,42 @@
                 <a:latin typeface="Golos Text"/>
                 <a:rFonts ascii="Golos Text" hAnsi="Golos Text" cs="Golos Text" eastAsia="Golos Text"/>
               </a:rPr>
-              <a:t>• Состав в согласованных границах</a:t>
-            </a:r>
-          </a:p>
-          <a:p>
-            <a:pPr algn="l">
-              <a:lnSpc>
-                <a:spcPct val="118000"/>
-              </a:lnSpc>
-              <a:spcBef>
-                <a:spcPts val="0"/>
-              </a:spcBef>
-              <a:spcAft>
-                <a:spcPts val="600"/>
+              <a:t>Согласованные границы + блок «простыми словами» на этикетке</a:t>
+            </a:r>
+          </a:p>
+          <a:p>
+            <a:pPr algn="l">
+              <a:lnSpc>
+                <a:spcPct val="118000"/>
+              </a:lnSpc>
+              <a:spcBef>
+                <a:spcPts val="0"/>
+              </a:spcBef>
+              <a:spcAft>
+                <a:spcPts val="200"/>
+              </a:spcAft>
+            </a:pPr>
+            <a:r>
+              <a:rPr sz="1500" b="1">
+                <a:solidFill>
+                  <a:srgbClr val="1A1A1A"/>
+                </a:solidFill>
+                <a:latin typeface="Manrope"/>
+                <a:rFonts ascii="Manrope" hAnsi="Manrope" cs="Manrope" eastAsia="Manrope"/>
+              </a:rPr>
+              <a:t>Пакет</a:t>
+            </a:r>
+          </a:p>
+          <a:p>
+            <a:pPr algn="l">
+              <a:lnSpc>
+                <a:spcPct val="118000"/>
+              </a:lnSpc>
+              <a:spcBef>
+                <a:spcPts val="0"/>
+              </a:spcBef>
+              <a:spcAft>
+                <a:spcPts val="1000"/>
               </a:spcAft>
             </a:pPr>
             <a:r>
@@ -9216,19 +9285,42 @@
                 <a:latin typeface="Golos Text"/>
                 <a:rFonts ascii="Golos Text" hAnsi="Golos Text" cs="Golos Text" eastAsia="Golos Text"/>
               </a:rPr>
-              <a:t>• Пакет документов Travel+</a:t>
-            </a:r>
-          </a:p>
-          <a:p>
-            <a:pPr algn="l">
-              <a:lnSpc>
-                <a:spcPct val="118000"/>
-              </a:lnSpc>
-              <a:spcBef>
-                <a:spcPts val="0"/>
-              </a:spcBef>
-              <a:spcAft>
-                <a:spcPts val="600"/>
+              <a:t>Документы Travel+, one-stop на номер</a:t>
+            </a:r>
+          </a:p>
+          <a:p>
+            <a:pPr algn="l">
+              <a:lnSpc>
+                <a:spcPct val="118000"/>
+              </a:lnSpc>
+              <a:spcBef>
+                <a:spcPts val="0"/>
+              </a:spcBef>
+              <a:spcAft>
+                <a:spcPts val="200"/>
+              </a:spcAft>
+            </a:pPr>
+            <a:r>
+              <a:rPr sz="1500" b="1">
+                <a:solidFill>
+                  <a:srgbClr val="1A1A1A"/>
+                </a:solidFill>
+                <a:latin typeface="Manrope"/>
+                <a:rFonts ascii="Manrope" hAnsi="Manrope" cs="Manrope" eastAsia="Manrope"/>
+              </a:rPr>
+              <a:t>В номере</a:t>
+            </a:r>
+          </a:p>
+          <a:p>
+            <a:pPr algn="l">
+              <a:lnSpc>
+                <a:spcPct val="118000"/>
+              </a:lnSpc>
+              <a:spcBef>
+                <a:spcPts val="0"/>
+              </a:spcBef>
+              <a:spcAft>
+                <a:spcPts val="0"/>
               </a:spcAft>
             </a:pPr>
             <a:r>
@@ -9239,19 +9331,86 @@
                 <a:latin typeface="Golos Text"/>
                 <a:rFonts ascii="Golos Text" hAnsi="Golos Text" cs="Golos Text" eastAsia="Golos Text"/>
               </a:rPr>
-              <a:t>• Ощущение в номере после использования</a:t>
-            </a:r>
-          </a:p>
-          <a:p>
-            <a:pPr algn="l">
-              <a:lnSpc>
-                <a:spcPct val="118000"/>
-              </a:lnSpc>
-              <a:spcBef>
-                <a:spcPts val="0"/>
-              </a:spcBef>
-              <a:spcAft>
-                <a:spcPts val="600"/>
+              <a:t>Ощущение после использования, не только надпись на флаконе</a:t>
+            </a:r>
+          </a:p>
+        </p:txBody>
+      </p:sp>
+      <p:sp>
+        <p:nvSpPr>
+          <p:cNvPr id="14" name="TextBox 13"/>
+          <p:cNvSpPr txBox="1"/>
+          <p:nvPr/>
+        </p:nvSpPr>
+        <p:spPr>
+          <a:xfrm>
+            <a:off x="6571335" y="1426464"/>
+            <a:ext cx="4815687" cy="4334256"/>
+          </a:xfrm>
+          <a:prstGeom prst="rect">
+            <a:avLst/>
+          </a:prstGeom>
+          <a:noFill/>
+        </p:spPr>
+        <p:txBody>
+          <a:bodyPr wrap="square" anchor="t" lIns="50800" rIns="50800" tIns="25400" bIns="25400"/>
+          <a:lstStyle/>
+          <a:p>
+            <a:pPr algn="l">
+              <a:lnSpc>
+                <a:spcPct val="118000"/>
+              </a:lnSpc>
+              <a:spcBef>
+                <a:spcPts val="0"/>
+              </a:spcBef>
+              <a:spcAft>
+                <a:spcPts val="1200"/>
+              </a:spcAft>
+            </a:pPr>
+            <a:r>
+              <a:rPr sz="1500" b="1">
+                <a:solidFill>
+                  <a:srgbClr val="2A554A"/>
+                </a:solidFill>
+                <a:latin typeface="Manrope"/>
+                <a:rFonts ascii="Manrope" hAnsi="Manrope" cs="Manrope" eastAsia="Manrope"/>
+              </a:rPr>
+              <a:t>BrandScript</a:t>
+            </a:r>
+          </a:p>
+          <a:p>
+            <a:pPr algn="l">
+              <a:lnSpc>
+                <a:spcPct val="118000"/>
+              </a:lnSpc>
+              <a:spcBef>
+                <a:spcPts val="0"/>
+              </a:spcBef>
+              <a:spcAft>
+                <a:spcPts val="200"/>
+              </a:spcAft>
+            </a:pPr>
+            <a:r>
+              <a:rPr sz="1500" b="1">
+                <a:solidFill>
+                  <a:srgbClr val="1A1A1A"/>
+                </a:solidFill>
+                <a:latin typeface="Manrope"/>
+                <a:rFonts ascii="Manrope" hAnsi="Manrope" cs="Manrope" eastAsia="Manrope"/>
+              </a:rPr>
+              <a:t>Герой</a:t>
+            </a:r>
+          </a:p>
+          <a:p>
+            <a:pPr algn="l">
+              <a:lnSpc>
+                <a:spcPct val="118000"/>
+              </a:lnSpc>
+              <a:spcBef>
+                <a:spcPts val="0"/>
+              </a:spcBef>
+              <a:spcAft>
+                <a:spcPts val="1000"/>
               </a:spcAft>
             </a:pPr>
             <a:r>
@@ -9262,19 +9421,42 @@
                 <a:latin typeface="Golos Text"/>
                 <a:rFonts ascii="Golos Text" hAnsi="Golos Text" cs="Golos Text" eastAsia="Golos Text"/>
               </a:rPr>
-              <a:t>• Один поставщик на весь номер</a:t>
-            </a:r>
-          </a:p>
-          <a:p>
-            <a:pPr algn="l">
-              <a:lnSpc>
-                <a:spcPct val="118000"/>
-              </a:lnSpc>
-              <a:spcBef>
-                <a:spcPts val="0"/>
-              </a:spcBef>
-              <a:spcAft>
-                <a:spcPts val="600"/>
+              <a:t>Закупщик eco / wellness: выглядеть «зеленее» без дыры в бюджете и в бумагах</a:t>
+            </a:r>
+          </a:p>
+          <a:p>
+            <a:pPr algn="l">
+              <a:lnSpc>
+                <a:spcPct val="118000"/>
+              </a:lnSpc>
+              <a:spcBef>
+                <a:spcPts val="0"/>
+              </a:spcBef>
+              <a:spcAft>
+                <a:spcPts val="200"/>
+              </a:spcAft>
+            </a:pPr>
+            <a:r>
+              <a:rPr sz="1500" b="1">
+                <a:solidFill>
+                  <a:srgbClr val="1A1A1A"/>
+                </a:solidFill>
+                <a:latin typeface="Manrope"/>
+                <a:rFonts ascii="Manrope" hAnsi="Manrope" cs="Manrope" eastAsia="Manrope"/>
+              </a:rPr>
+              <a:t>Проводник</a:t>
+            </a:r>
+          </a:p>
+          <a:p>
+            <a:pPr algn="l">
+              <a:lnSpc>
+                <a:spcPct val="118000"/>
+              </a:lnSpc>
+              <a:spcBef>
+                <a:spcPts val="0"/>
+              </a:spcBef>
+              <a:spcAft>
+                <a:spcPts val="1000"/>
               </a:spcAft>
             </a:pPr>
             <a:r>
@@ -9285,51 +9467,53 @@
                 <a:latin typeface="Golos Text"/>
                 <a:rFonts ascii="Golos Text" hAnsi="Golos Text" cs="Golos Text" eastAsia="Golos Text"/>
               </a:rPr>
-              <a:t>• Блок «простыми словами» на этикетке</a:t>
-            </a:r>
-          </a:p>
-        </p:txBody>
-      </p:sp>
-      <p:sp>
-        <p:nvSpPr>
-          <p:cNvPr id="14" name="TextBox 13"/>
-          <p:cNvSpPr txBox="1"/>
-          <p:nvPr/>
-        </p:nvSpPr>
-        <p:spPr>
-          <a:xfrm>
-            <a:off x="6571335" y="1426464"/>
-            <a:ext cx="4815687" cy="4334256"/>
-          </a:xfrm>
-          <a:prstGeom prst="rect">
-            <a:avLst/>
-          </a:prstGeom>
-          <a:noFill/>
-        </p:spPr>
-        <p:txBody>
-          <a:bodyPr wrap="square" anchor="t" lIns="50800" rIns="50800" tIns="25400" bIns="25400"/>
-          <a:lstStyle/>
-          <a:p>
-            <a:pPr algn="l">
-              <a:lnSpc>
-                <a:spcPct val="118000"/>
-              </a:lnSpc>
-              <a:spcBef>
-                <a:spcPts val="0"/>
-              </a:spcBef>
-              <a:spcAft>
-                <a:spcPts val="1200"/>
+              <a:t>Travel+ Natural — своя линейка и один договор на номер</a:t>
+            </a:r>
+          </a:p>
+          <a:p>
+            <a:pPr algn="l">
+              <a:lnSpc>
+                <a:spcPct val="118000"/>
+              </a:lnSpc>
+              <a:spcBef>
+                <a:spcPts val="0"/>
+              </a:spcBef>
+              <a:spcAft>
+                <a:spcPts val="200"/>
               </a:spcAft>
             </a:pPr>
             <a:r>
               <a:rPr sz="1500" b="1">
                 <a:solidFill>
-                  <a:srgbClr val="2A554A"/>
+                  <a:srgbClr val="1A1A1A"/>
                 </a:solidFill>
                 <a:latin typeface="Manrope"/>
                 <a:rFonts ascii="Manrope" hAnsi="Manrope" cs="Manrope" eastAsia="Manrope"/>
               </a:rPr>
-              <a:t>BrandScript</a:t>
+              <a:t>План</a:t>
+            </a:r>
+          </a:p>
+          <a:p>
+            <a:pPr algn="l">
+              <a:lnSpc>
+                <a:spcPct val="118000"/>
+              </a:lnSpc>
+              <a:spcBef>
+                <a:spcPts val="0"/>
+              </a:spcBef>
+              <a:spcAft>
+                <a:spcPts val="1000"/>
+              </a:spcAft>
+            </a:pPr>
+            <a:r>
+              <a:rPr sz="1500" b="0">
+                <a:solidFill>
+                  <a:srgbClr val="1A1A1A"/>
+                </a:solidFill>
+                <a:latin typeface="Golos Text"/>
+                <a:rFonts ascii="Golos Text" hAnsi="Golos Text" cs="Golos Text" eastAsia="Golos Text"/>
+              </a:rPr>
+              <a:t>Сегмент → образец с документами → пилот на этаже</a:t>
             </a:r>
           </a:p>
           <a:p>
@@ -9352,19 +9536,19 @@
                 <a:latin typeface="Manrope"/>
                 <a:rFonts ascii="Manrope" hAnsi="Manrope" cs="Manrope" eastAsia="Manrope"/>
               </a:rPr>
-              <a:t>Герой</a:t>
-            </a:r>
-          </a:p>
-          <a:p>
-            <a:pPr algn="l">
-              <a:lnSpc>
-                <a:spcPct val="118000"/>
-              </a:lnSpc>
-              <a:spcBef>
-                <a:spcPts val="0"/>
-              </a:spcBef>
-              <a:spcAft>
-                <a:spcPts val="800"/>
+              <a:t>Гость</a:t>
+            </a:r>
+          </a:p>
+          <a:p>
+            <a:pPr algn="l">
+              <a:lnSpc>
+                <a:spcPct val="118000"/>
+              </a:lnSpc>
+              <a:spcBef>
+                <a:spcPts val="0"/>
+              </a:spcBef>
+              <a:spcAft>
+                <a:spcPts val="0"/>
               </a:spcAft>
             </a:pPr>
             <a:r>
@@ -9375,214 +9559,7 @@
                 <a:latin typeface="Golos Text"/>
                 <a:rFonts ascii="Golos Text" hAnsi="Golos Text" cs="Golos Text" eastAsia="Golos Text"/>
               </a:rPr>
-              <a:t>Закупщик отеля с запросом eco / wellness: выглядеть «зеленее» без дыры в бюджете и в бумагах.</a:t>
-            </a:r>
-          </a:p>
-          <a:p>
-            <a:pPr algn="l">
-              <a:lnSpc>
-                <a:spcPct val="118000"/>
-              </a:lnSpc>
-              <a:spcBef>
-                <a:spcPts val="0"/>
-              </a:spcBef>
-              <a:spcAft>
-                <a:spcPts val="200"/>
-              </a:spcAft>
-            </a:pPr>
-            <a:r>
-              <a:rPr sz="1500" b="1">
-                <a:solidFill>
-                  <a:srgbClr val="1A1A1A"/>
-                </a:solidFill>
-                <a:latin typeface="Manrope"/>
-                <a:rFonts ascii="Manrope" hAnsi="Manrope" cs="Manrope" eastAsia="Manrope"/>
-              </a:rPr>
-              <a:t>Проводник</a:t>
-            </a:r>
-          </a:p>
-          <a:p>
-            <a:pPr algn="l">
-              <a:lnSpc>
-                <a:spcPct val="118000"/>
-              </a:lnSpc>
-              <a:spcBef>
-                <a:spcPts val="0"/>
-              </a:spcBef>
-              <a:spcAft>
-                <a:spcPts val="800"/>
-              </a:spcAft>
-            </a:pPr>
-            <a:r>
-              <a:rPr sz="1500" b="0">
-                <a:solidFill>
-                  <a:srgbClr val="1A1A1A"/>
-                </a:solidFill>
-                <a:latin typeface="Golos Text"/>
-                <a:rFonts ascii="Golos Text" hAnsi="Golos Text" cs="Golos Text" eastAsia="Golos Text"/>
-              </a:rPr>
-              <a:t>Travel+ Natural — своя линейка, документы и one-stop на номер.</a:t>
-            </a:r>
-          </a:p>
-          <a:p>
-            <a:pPr algn="l">
-              <a:lnSpc>
-                <a:spcPct val="118000"/>
-              </a:lnSpc>
-              <a:spcBef>
-                <a:spcPts val="0"/>
-              </a:spcBef>
-              <a:spcAft>
-                <a:spcPts val="200"/>
-              </a:spcAft>
-            </a:pPr>
-            <a:r>
-              <a:rPr sz="1500" b="1">
-                <a:solidFill>
-                  <a:srgbClr val="1A1A1A"/>
-                </a:solidFill>
-                <a:latin typeface="Manrope"/>
-                <a:rFonts ascii="Manrope" hAnsi="Manrope" cs="Manrope" eastAsia="Manrope"/>
-              </a:rPr>
-              <a:t>План</a:t>
-            </a:r>
-          </a:p>
-          <a:p>
-            <a:pPr algn="l">
-              <a:lnSpc>
-                <a:spcPct val="118000"/>
-              </a:lnSpc>
-              <a:spcBef>
-                <a:spcPts val="0"/>
-              </a:spcBef>
-              <a:spcAft>
-                <a:spcPts val="600"/>
-              </a:spcAft>
-            </a:pPr>
-            <a:r>
-              <a:rPr sz="1500" b="0">
-                <a:solidFill>
-                  <a:srgbClr val="1A1A1A"/>
-                </a:solidFill>
-                <a:latin typeface="Golos Text"/>
-                <a:rFonts ascii="Golos Text" hAnsi="Golos Text" cs="Golos Text" eastAsia="Golos Text"/>
-              </a:rPr>
-              <a:t>1. Согласовать сегмент и объект</a:t>
-            </a:r>
-          </a:p>
-          <a:p>
-            <a:pPr algn="l">
-              <a:lnSpc>
-                <a:spcPct val="118000"/>
-              </a:lnSpc>
-              <a:spcBef>
-                <a:spcPts val="0"/>
-              </a:spcBef>
-              <a:spcAft>
-                <a:spcPts val="600"/>
-              </a:spcAft>
-            </a:pPr>
-            <a:r>
-              <a:rPr sz="1500" b="0">
-                <a:solidFill>
-                  <a:srgbClr val="1A1A1A"/>
-                </a:solidFill>
-                <a:latin typeface="Golos Text"/>
-                <a:rFonts ascii="Golos Text" hAnsi="Golos Text" cs="Golos Text" eastAsia="Golos Text"/>
-              </a:rPr>
-              <a:t>2. Образец с этикеткой и пакетом документов</a:t>
-            </a:r>
-          </a:p>
-          <a:p>
-            <a:pPr algn="l">
-              <a:lnSpc>
-                <a:spcPct val="118000"/>
-              </a:lnSpc>
-              <a:spcBef>
-                <a:spcPts val="0"/>
-              </a:spcBef>
-              <a:spcAft>
-                <a:spcPts val="1000"/>
-              </a:spcAft>
-            </a:pPr>
-            <a:r>
-              <a:rPr sz="1500" b="0">
-                <a:solidFill>
-                  <a:srgbClr val="1A1A1A"/>
-                </a:solidFill>
-                <a:latin typeface="Golos Text"/>
-                <a:rFonts ascii="Golos Text" hAnsi="Golos Text" cs="Golos Text" eastAsia="Golos Text"/>
-              </a:rPr>
-              <a:t>3. Пилот на этаже или в корпусе</a:t>
-            </a:r>
-          </a:p>
-          <a:p>
-            <a:pPr algn="l">
-              <a:lnSpc>
-                <a:spcPct val="118000"/>
-              </a:lnSpc>
-              <a:spcBef>
-                <a:spcPts val="0"/>
-              </a:spcBef>
-              <a:spcAft>
-                <a:spcPts val="400"/>
-              </a:spcAft>
-            </a:pPr>
-            <a:r>
-              <a:rPr sz="1400" b="0">
-                <a:solidFill>
-                  <a:srgbClr val="5C5C5C"/>
-                </a:solidFill>
-                <a:latin typeface="Golos Text"/>
-                <a:rFonts ascii="Golos Text" hAnsi="Golos Text" cs="Golos Text" eastAsia="Golos Text"/>
-              </a:rPr>
-              <a:t>Гость после дороги:</a:t>
-            </a:r>
-          </a:p>
-          <a:p>
-            <a:pPr algn="l">
-              <a:lnSpc>
-                <a:spcPct val="118000"/>
-              </a:lnSpc>
-              <a:spcBef>
-                <a:spcPts val="0"/>
-              </a:spcBef>
-              <a:spcAft>
-                <a:spcPts val="200"/>
-              </a:spcAft>
-            </a:pPr>
-            <a:r>
-              <a:rPr sz="1500" b="1">
-                <a:solidFill>
-                  <a:srgbClr val="1A1A1A"/>
-                </a:solidFill>
-                <a:latin typeface="Manrope"/>
-                <a:rFonts ascii="Manrope" hAnsi="Manrope" cs="Manrope" eastAsia="Manrope"/>
-              </a:rPr>
-              <a:t>Ощущение мягче, чем ожидал.</a:t>
-            </a:r>
-          </a:p>
-          <a:p>
-            <a:pPr algn="l">
-              <a:lnSpc>
-                <a:spcPct val="118000"/>
-              </a:lnSpc>
-              <a:spcBef>
-                <a:spcPts val="0"/>
-              </a:spcBef>
-              <a:spcAft>
-                <a:spcPts val="600"/>
-              </a:spcAft>
-            </a:pPr>
-            <a:r>
-              <a:rPr sz="1500" b="0">
-                <a:solidFill>
-                  <a:srgbClr val="1A1A1A"/>
-                </a:solidFill>
-                <a:latin typeface="Golos Text"/>
-                <a:rFonts ascii="Golos Text" hAnsi="Golos Text" cs="Golos Text" eastAsia="Golos Text"/>
-              </a:rPr>
-              <a:t>Понятная натуральность — без громких обещаний на этикетке.</a:t>
+              <a:t>После дороги — мягче, чем ожидал; натуральность без громких обещаний</a:t>
             </a:r>
           </a:p>
         </p:txBody>

--- a/АК/presentation-travelplus-interview.pptx
+++ b/АК/presentation-travelplus-interview.pptx
@@ -10079,19 +10079,42 @@
                 <a:latin typeface="Manrope"/>
                 <a:rFonts ascii="Manrope" hAnsi="Manrope" cs="Manrope" eastAsia="Manrope"/>
               </a:rPr>
-              <a:t>Чеклист: без этого — не в продажи</a:t>
-            </a:r>
-          </a:p>
-          <a:p>
-            <a:pPr algn="l">
-              <a:lnSpc>
-                <a:spcPct val="118000"/>
-              </a:lnSpc>
-              <a:spcBef>
-                <a:spcPts val="0"/>
-              </a:spcBef>
-              <a:spcAft>
-                <a:spcPts val="600"/>
+              <a:t>Чеклист</a:t>
+            </a:r>
+          </a:p>
+          <a:p>
+            <a:pPr algn="l">
+              <a:lnSpc>
+                <a:spcPct val="118000"/>
+              </a:lnSpc>
+              <a:spcBef>
+                <a:spcPts val="0"/>
+              </a:spcBef>
+              <a:spcAft>
+                <a:spcPts val="200"/>
+              </a:spcAft>
+            </a:pPr>
+            <a:r>
+              <a:rPr sz="1500" b="1">
+                <a:solidFill>
+                  <a:srgbClr val="1A1A1A"/>
+                </a:solidFill>
+                <a:latin typeface="Manrope"/>
+                <a:rFonts ascii="Manrope" hAnsi="Manrope" cs="Manrope" eastAsia="Manrope"/>
+              </a:rPr>
+              <a:t>Натуральность</a:t>
+            </a:r>
+          </a:p>
+          <a:p>
+            <a:pPr algn="l">
+              <a:lnSpc>
+                <a:spcPct val="118000"/>
+              </a:lnSpc>
+              <a:spcBef>
+                <a:spcPts val="0"/>
+              </a:spcBef>
+              <a:spcAft>
+                <a:spcPts val="800"/>
               </a:spcAft>
             </a:pPr>
             <a:r>
@@ -10102,19 +10125,42 @@
                 <a:latin typeface="Golos Text"/>
                 <a:rFonts ascii="Golos Text" hAnsi="Golos Text" cs="Golos Text" eastAsia="Golos Text"/>
               </a:rPr>
-              <a:t>□ Метод расчёта и доля натуральных ингредиентов</a:t>
-            </a:r>
-          </a:p>
-          <a:p>
-            <a:pPr algn="l">
-              <a:lnSpc>
-                <a:spcPct val="118000"/>
-              </a:lnSpc>
-              <a:spcBef>
-                <a:spcPts val="0"/>
-              </a:spcBef>
-              <a:spcAft>
-                <a:spcPts val="600"/>
+              <a:t>Метод расчёта и доля ингредиентов</a:t>
+            </a:r>
+          </a:p>
+          <a:p>
+            <a:pPr algn="l">
+              <a:lnSpc>
+                <a:spcPct val="118000"/>
+              </a:lnSpc>
+              <a:spcBef>
+                <a:spcPts val="0"/>
+              </a:spcBef>
+              <a:spcAft>
+                <a:spcPts val="200"/>
+              </a:spcAft>
+            </a:pPr>
+            <a:r>
+              <a:rPr sz="1500" b="1">
+                <a:solidFill>
+                  <a:srgbClr val="1A1A1A"/>
+                </a:solidFill>
+                <a:latin typeface="Manrope"/>
+                <a:rFonts ascii="Manrope" hAnsi="Manrope" cs="Manrope" eastAsia="Manrope"/>
+              </a:rPr>
+              <a:t>Документы</a:t>
+            </a:r>
+          </a:p>
+          <a:p>
+            <a:pPr algn="l">
+              <a:lnSpc>
+                <a:spcPct val="118000"/>
+              </a:lnSpc>
+              <a:spcBef>
+                <a:spcPts val="0"/>
+              </a:spcBef>
+              <a:spcAft>
+                <a:spcPts val="800"/>
               </a:spcAft>
             </a:pPr>
             <a:r>
@@ -10125,19 +10171,42 @@
                 <a:latin typeface="Golos Text"/>
                 <a:rFonts ascii="Golos Text" hAnsi="Golos Text" cs="Golos Text" eastAsia="Golos Text"/>
               </a:rPr>
-              <a:t>□ Пакет документов как у Hotel Line и Fleur + лист состава Natural</a:t>
-            </a:r>
-          </a:p>
-          <a:p>
-            <a:pPr algn="l">
-              <a:lnSpc>
-                <a:spcPct val="118000"/>
-              </a:lnSpc>
-              <a:spcBef>
-                <a:spcPts val="0"/>
-              </a:spcBef>
-              <a:spcAft>
-                <a:spcPts val="600"/>
+              <a:t>Пакет как у Hotel Line и Fleur + лист состава Natural</a:t>
+            </a:r>
+          </a:p>
+          <a:p>
+            <a:pPr algn="l">
+              <a:lnSpc>
+                <a:spcPct val="118000"/>
+              </a:lnSpc>
+              <a:spcBef>
+                <a:spcPts val="0"/>
+              </a:spcBef>
+              <a:spcAft>
+                <a:spcPts val="200"/>
+              </a:spcAft>
+            </a:pPr>
+            <a:r>
+              <a:rPr sz="1500" b="1">
+                <a:solidFill>
+                  <a:srgbClr val="1A1A1A"/>
+                </a:solidFill>
+                <a:latin typeface="Manrope"/>
+                <a:rFonts ascii="Manrope" hAnsi="Manrope" cs="Manrope" eastAsia="Manrope"/>
+              </a:rPr>
+              <a:t>Происхождение</a:t>
+            </a:r>
+          </a:p>
+          <a:p>
+            <a:pPr algn="l">
+              <a:lnSpc>
+                <a:spcPct val="118000"/>
+              </a:lnSpc>
+              <a:spcBef>
+                <a:spcPts val="0"/>
+              </a:spcBef>
+              <a:spcAft>
+                <a:spcPts val="800"/>
               </a:spcAft>
             </a:pPr>
             <a:r>
@@ -10148,19 +10217,42 @@
                 <a:latin typeface="Golos Text"/>
                 <a:rFonts ascii="Golos Text" hAnsi="Golos Text" cs="Golos Text" eastAsia="Golos Text"/>
               </a:rPr>
-              <a:t>□ Происхождение (origin) зафиксировано письменно</a:t>
-            </a:r>
-          </a:p>
-          <a:p>
-            <a:pPr algn="l">
-              <a:lnSpc>
-                <a:spcPct val="118000"/>
-              </a:lnSpc>
-              <a:spcBef>
-                <a:spcPts val="0"/>
-              </a:spcBef>
-              <a:spcAft>
-                <a:spcPts val="600"/>
+              <a:t>Origin зафиксирован письменно</a:t>
+            </a:r>
+          </a:p>
+          <a:p>
+            <a:pPr algn="l">
+              <a:lnSpc>
+                <a:spcPct val="118000"/>
+              </a:lnSpc>
+              <a:spcBef>
+                <a:spcPts val="0"/>
+              </a:spcBef>
+              <a:spcAft>
+                <a:spcPts val="200"/>
+              </a:spcAft>
+            </a:pPr>
+            <a:r>
+              <a:rPr sz="1500" b="1">
+                <a:solidFill>
+                  <a:srgbClr val="1A1A1A"/>
+                </a:solidFill>
+                <a:latin typeface="Manrope"/>
+                <a:rFonts ascii="Manrope" hAnsi="Manrope" cs="Manrope" eastAsia="Manrope"/>
+              </a:rPr>
+              <a:t>Тест</a:t>
+            </a:r>
+          </a:p>
+          <a:p>
+            <a:pPr algn="l">
+              <a:lnSpc>
+                <a:spcPct val="118000"/>
+              </a:lnSpc>
+              <a:spcBef>
+                <a:spcPts val="0"/>
+              </a:spcBef>
+              <a:spcAft>
+                <a:spcPts val="800"/>
               </a:spcAft>
             </a:pPr>
             <a:r>
@@ -10171,19 +10263,42 @@
                 <a:latin typeface="Golos Text"/>
                 <a:rFonts ascii="Golos Text" hAnsi="Golos Text" cs="Golos Text" eastAsia="Golos Text"/>
               </a:rPr>
-              <a:t>□ Слепой тест запаха и ощущения с гостями</a:t>
-            </a:r>
-          </a:p>
-          <a:p>
-            <a:pPr algn="l">
-              <a:lnSpc>
-                <a:spcPct val="118000"/>
-              </a:lnSpc>
-              <a:spcBef>
-                <a:spcPts val="0"/>
-              </a:spcBef>
-              <a:spcAft>
-                <a:spcPts val="600"/>
+              <a:t>Слепой тест запаха и ощущения с гостями</a:t>
+            </a:r>
+          </a:p>
+          <a:p>
+            <a:pPr algn="l">
+              <a:lnSpc>
+                <a:spcPct val="118000"/>
+              </a:lnSpc>
+              <a:spcBef>
+                <a:spcPts val="0"/>
+              </a:spcBef>
+              <a:spcAft>
+                <a:spcPts val="200"/>
+              </a:spcAft>
+            </a:pPr>
+            <a:r>
+              <a:rPr sz="1500" b="1">
+                <a:solidFill>
+                  <a:srgbClr val="1A1A1A"/>
+                </a:solidFill>
+                <a:latin typeface="Manrope"/>
+                <a:rFonts ascii="Manrope" hAnsi="Manrope" cs="Manrope" eastAsia="Manrope"/>
+              </a:rPr>
+              <a:t>Этикетка</a:t>
+            </a:r>
+          </a:p>
+          <a:p>
+            <a:pPr algn="l">
+              <a:lnSpc>
+                <a:spcPct val="118000"/>
+              </a:lnSpc>
+              <a:spcBef>
+                <a:spcPts val="0"/>
+              </a:spcBef>
+              <a:spcAft>
+                <a:spcPts val="800"/>
               </a:spcAft>
             </a:pPr>
             <a:r>
@@ -10194,19 +10309,42 @@
                 <a:latin typeface="Golos Text"/>
                 <a:rFonts ascii="Golos Text" hAnsi="Golos Text" cs="Golos Text" eastAsia="Golos Text"/>
               </a:rPr>
-              <a:t>□ Этикетка с блоком «простыми словами»</a:t>
-            </a:r>
-          </a:p>
-          <a:p>
-            <a:pPr algn="l">
-              <a:lnSpc>
-                <a:spcPct val="118000"/>
-              </a:lnSpc>
-              <a:spcBef>
-                <a:spcPts val="0"/>
-              </a:spcBef>
-              <a:spcAft>
-                <a:spcPts val="600"/>
+              <a:t>Блок «простыми словами»</a:t>
+            </a:r>
+          </a:p>
+          <a:p>
+            <a:pPr algn="l">
+              <a:lnSpc>
+                <a:spcPct val="118000"/>
+              </a:lnSpc>
+              <a:spcBef>
+                <a:spcPts val="0"/>
+              </a:spcBef>
+              <a:spcAft>
+                <a:spcPts val="200"/>
+              </a:spcAft>
+            </a:pPr>
+            <a:r>
+              <a:rPr sz="1500" b="1">
+                <a:solidFill>
+                  <a:srgbClr val="1A1A1A"/>
+                </a:solidFill>
+                <a:latin typeface="Manrope"/>
+                <a:rFonts ascii="Manrope" hAnsi="Manrope" cs="Manrope" eastAsia="Manrope"/>
+              </a:rPr>
+              <a:t>Экономика</a:t>
+            </a:r>
+          </a:p>
+          <a:p>
+            <a:pPr algn="l">
+              <a:lnSpc>
+                <a:spcPct val="118000"/>
+              </a:lnSpc>
+              <a:spcBef>
+                <a:spcPts val="0"/>
+              </a:spcBef>
+              <a:spcAft>
+                <a:spcPts val="800"/>
               </a:spcAft>
             </a:pPr>
             <a:r>
@@ -10217,19 +10355,42 @@
                 <a:latin typeface="Golos Text"/>
                 <a:rFonts ascii="Golos Text" hAnsi="Golos Text" cs="Golos Text" eastAsia="Golos Text"/>
               </a:rPr>
-              <a:t>□ Себестоимость и коридор цены на полке</a:t>
-            </a:r>
-          </a:p>
-          <a:p>
-            <a:pPr algn="l">
-              <a:lnSpc>
-                <a:spcPct val="118000"/>
-              </a:lnSpc>
-              <a:spcBef>
-                <a:spcPts val="0"/>
-              </a:spcBef>
-              <a:spcAft>
-                <a:spcPts val="600"/>
+              <a:t>Себестоимость и коридор цены на полке</a:t>
+            </a:r>
+          </a:p>
+          <a:p>
+            <a:pPr algn="l">
+              <a:lnSpc>
+                <a:spcPct val="118000"/>
+              </a:lnSpc>
+              <a:spcBef>
+                <a:spcPts val="0"/>
+              </a:spcBef>
+              <a:spcAft>
+                <a:spcPts val="200"/>
+              </a:spcAft>
+            </a:pPr>
+            <a:r>
+              <a:rPr sz="1500" b="1">
+                <a:solidFill>
+                  <a:srgbClr val="1A1A1A"/>
+                </a:solidFill>
+                <a:latin typeface="Manrope"/>
+                <a:rFonts ascii="Manrope" hAnsi="Manrope" cs="Manrope" eastAsia="Manrope"/>
+              </a:rPr>
+              <a:t>Поставка</a:t>
+            </a:r>
+          </a:p>
+          <a:p>
+            <a:pPr algn="l">
+              <a:lnSpc>
+                <a:spcPct val="118000"/>
+              </a:lnSpc>
+              <a:spcBef>
+                <a:spcPts val="0"/>
+              </a:spcBef>
+              <a:spcAft>
+                <a:spcPts val="0"/>
               </a:spcAft>
             </a:pPr>
             <a:r>
@@ -10240,7 +10401,7 @@
                 <a:latin typeface="Golos Text"/>
                 <a:rFonts ascii="Golos Text" hAnsi="Golos Text" cs="Golos Text" eastAsia="Golos Text"/>
               </a:rPr>
-              <a:t>□ Срок поставки, минимальный заказ, правила брака</a:t>
+              <a:t>Срок, минимальный заказ, правила брака</a:t>
             </a:r>
           </a:p>
         </p:txBody>
@@ -10284,19 +10445,42 @@
                 <a:latin typeface="Manrope"/>
                 <a:rFonts ascii="Manrope" hAnsi="Manrope" cs="Manrope" eastAsia="Manrope"/>
               </a:rPr>
-              <a:t>Как читать список</a:t>
-            </a:r>
-          </a:p>
-          <a:p>
-            <a:pPr algn="l">
-              <a:lnSpc>
-                <a:spcPct val="118000"/>
-              </a:lnSpc>
-              <a:spcBef>
-                <a:spcPts val="0"/>
-              </a:spcBef>
-              <a:spcAft>
-                <a:spcPts val="600"/>
+              <a:t>Как читать</a:t>
+            </a:r>
+          </a:p>
+          <a:p>
+            <a:pPr algn="l">
+              <a:lnSpc>
+                <a:spcPct val="118000"/>
+              </a:lnSpc>
+              <a:spcBef>
+                <a:spcPts val="0"/>
+              </a:spcBef>
+              <a:spcAft>
+                <a:spcPts val="200"/>
+              </a:spcAft>
+            </a:pPr>
+            <a:r>
+              <a:rPr sz="1500" b="1">
+                <a:solidFill>
+                  <a:srgbClr val="1A1A1A"/>
+                </a:solidFill>
+                <a:latin typeface="Manrope"/>
+                <a:rFonts ascii="Manrope" hAnsi="Manrope" cs="Manrope" eastAsia="Manrope"/>
+              </a:rPr>
+              <a:t>Правило</a:t>
+            </a:r>
+          </a:p>
+          <a:p>
+            <a:pPr algn="l">
+              <a:lnSpc>
+                <a:spcPct val="118000"/>
+              </a:lnSpc>
+              <a:spcBef>
+                <a:spcPts val="0"/>
+              </a:spcBef>
+              <a:spcAft>
+                <a:spcPts val="1000"/>
               </a:spcAft>
             </a:pPr>
             <a:r>
@@ -10307,19 +10491,42 @@
                 <a:latin typeface="Golos Text"/>
                 <a:rFonts ascii="Golos Text" hAnsi="Golos Text" cs="Golos Text" eastAsia="Golos Text"/>
               </a:rPr>
-              <a:t>Каждый пункт — обязательное условие.</a:t>
-            </a:r>
-          </a:p>
-          <a:p>
-            <a:pPr algn="l">
-              <a:lnSpc>
-                <a:spcPct val="118000"/>
-              </a:lnSpc>
-              <a:spcBef>
-                <a:spcPts val="0"/>
-              </a:spcBef>
-              <a:spcAft>
-                <a:spcPts val="600"/>
+              <a:t>Каждый пункт обязателен; пока не закрыт — в продажи и на витрину не выходим</a:t>
+            </a:r>
+          </a:p>
+          <a:p>
+            <a:pPr algn="l">
+              <a:lnSpc>
+                <a:spcPct val="118000"/>
+              </a:lnSpc>
+              <a:spcBef>
+                <a:spcPts val="0"/>
+              </a:spcBef>
+              <a:spcAft>
+                <a:spcPts val="200"/>
+              </a:spcAft>
+            </a:pPr>
+            <a:r>
+              <a:rPr sz="1500" b="1">
+                <a:solidFill>
+                  <a:srgbClr val="1A1A1A"/>
+                </a:solidFill>
+                <a:latin typeface="Manrope"/>
+                <a:rFonts ascii="Manrope" hAnsi="Manrope" cs="Manrope" eastAsia="Manrope"/>
+              </a:rPr>
+              <a:t>COSMOS</a:t>
+            </a:r>
+          </a:p>
+          <a:p>
+            <a:pPr algn="l">
+              <a:lnSpc>
+                <a:spcPct val="118000"/>
+              </a:lnSpc>
+              <a:spcBef>
+                <a:spcPts val="0"/>
+              </a:spcBef>
+              <a:spcAft>
+                <a:spcPts val="0"/>
               </a:spcAft>
             </a:pPr>
             <a:r>
@@ -10330,76 +10537,7 @@
                 <a:latin typeface="Golos Text"/>
                 <a:rFonts ascii="Golos Text" hAnsi="Golos Text" cs="Golos Text" eastAsia="Golos Text"/>
               </a:rPr>
-              <a:t>Пока хотя бы один не закрыт — коммерческое предложение и выход на витрину стоп.</a:t>
-            </a:r>
-          </a:p>
-          <a:p>
-            <a:pPr algn="l">
-              <a:lnSpc>
-                <a:spcPct val="118000"/>
-              </a:lnSpc>
-              <a:spcBef>
-                <a:spcPts val="0"/>
-              </a:spcBef>
-              <a:spcAft>
-                <a:spcPts val="1000"/>
-              </a:spcAft>
-            </a:pPr>
-            <a:r>
-              <a:rPr sz="1500" b="0">
-                <a:solidFill>
-                  <a:srgbClr val="1A1A1A"/>
-                </a:solidFill>
-                <a:latin typeface="Golos Text"/>
-                <a:rFonts ascii="Golos Text" hAnsi="Golos Text" cs="Golos Text" eastAsia="Golos Text"/>
-              </a:rPr>
-              <a:t>На старте без знака COSMOS, если его нет — говорим честно.</a:t>
-            </a:r>
-          </a:p>
-          <a:p>
-            <a:pPr algn="l">
-              <a:lnSpc>
-                <a:spcPct val="118000"/>
-              </a:lnSpc>
-              <a:spcBef>
-                <a:spcPts val="0"/>
-              </a:spcBef>
-              <a:spcAft>
-                <a:spcPts val="200"/>
-              </a:spcAft>
-            </a:pPr>
-            <a:r>
-              <a:rPr sz="1500" b="1">
-                <a:solidFill>
-                  <a:srgbClr val="1A1A1A"/>
-                </a:solidFill>
-                <a:latin typeface="Manrope"/>
-                <a:rFonts ascii="Manrope" hAnsi="Manrope" cs="Manrope" eastAsia="Manrope"/>
-              </a:rPr>
-              <a:t>Этапы 3–6 в пульте — учебный сценарий,</a:t>
-            </a:r>
-          </a:p>
-          <a:p>
-            <a:pPr algn="l">
-              <a:lnSpc>
-                <a:spcPct val="118000"/>
-              </a:lnSpc>
-              <a:spcBef>
-                <a:spcPts val="0"/>
-              </a:spcBef>
-              <a:spcAft>
-                <a:spcPts val="600"/>
-              </a:spcAft>
-            </a:pPr>
-            <a:r>
-              <a:rPr sz="1500" b="0">
-                <a:solidFill>
-                  <a:srgbClr val="1A1A1A"/>
-                </a:solidFill>
-                <a:latin typeface="Golos Text"/>
-                <a:rFonts ascii="Golos Text" hAnsi="Golos Text" cs="Golos Text" eastAsia="Golos Text"/>
-              </a:rPr>
-              <a:t>а не отчёт завода и не основание для КП.</a:t>
+              <a:t>Знака нет — говорим честно, не обещаем сертификат</a:t>
             </a:r>
           </a:p>
         </p:txBody>

--- a/АК/presentation-travelplus-interview.pptx
+++ b/АК/presentation-travelplus-interview.pptx
@@ -3969,19 +3969,42 @@
                 <a:latin typeface="Manrope"/>
                 <a:rFonts ascii="Manrope" hAnsi="Manrope" cs="Manrope" eastAsia="Manrope"/>
               </a:rPr>
-              <a:t>Экономика и цена</a:t>
-            </a:r>
-          </a:p>
-          <a:p>
-            <a:pPr algn="l">
-              <a:lnSpc>
-                <a:spcPct val="118000"/>
-              </a:lnSpc>
-              <a:spcBef>
-                <a:spcPts val="0"/>
-              </a:spcBef>
-              <a:spcAft>
-                <a:spcPts val="600"/>
+              <a:t>Экономика</a:t>
+            </a:r>
+          </a:p>
+          <a:p>
+            <a:pPr algn="l">
+              <a:lnSpc>
+                <a:spcPct val="118000"/>
+              </a:lnSpc>
+              <a:spcBef>
+                <a:spcPts val="0"/>
+              </a:spcBef>
+              <a:spcAft>
+                <a:spcPts val="200"/>
+              </a:spcAft>
+            </a:pPr>
+            <a:r>
+              <a:rPr sz="1500" b="1">
+                <a:solidFill>
+                  <a:srgbClr val="1A1A1A"/>
+                </a:solidFill>
+                <a:latin typeface="Manrope"/>
+                <a:rFonts ascii="Manrope" hAnsi="Manrope" cs="Manrope" eastAsia="Manrope"/>
+              </a:rPr>
+              <a:t>Прайс</a:t>
+            </a:r>
+          </a:p>
+          <a:p>
+            <a:pPr algn="l">
+              <a:lnSpc>
+                <a:spcPct val="118000"/>
+              </a:lnSpc>
+              <a:spcBef>
+                <a:spcPts val="0"/>
+              </a:spcBef>
+              <a:spcAft>
+                <a:spcPts val="1000"/>
               </a:spcAft>
             </a:pPr>
             <a:r>
@@ -3992,19 +4015,42 @@
                 <a:latin typeface="Golos Text"/>
                 <a:rFonts ascii="Golos Text" hAnsi="Golos Text" cs="Golos Text" eastAsia="Golos Text"/>
               </a:rPr>
-              <a:t>Прайс утверждаем только после себестоимости на складе в Киришах.</a:t>
-            </a:r>
-          </a:p>
-          <a:p>
-            <a:pPr algn="l">
-              <a:lnSpc>
-                <a:spcPct val="118000"/>
-              </a:lnSpc>
-              <a:spcBef>
-                <a:spcPts val="0"/>
-              </a:spcBef>
-              <a:spcAft>
-                <a:spcPts val="400"/>
+              <a:t>Только после себестоимости на складе в Киришах</a:t>
+            </a:r>
+          </a:p>
+          <a:p>
+            <a:pPr algn="l">
+              <a:lnSpc>
+                <a:spcPct val="118000"/>
+              </a:lnSpc>
+              <a:spcBef>
+                <a:spcPts val="0"/>
+              </a:spcBef>
+              <a:spcAft>
+                <a:spcPts val="200"/>
+              </a:spcAft>
+            </a:pPr>
+            <a:r>
+              <a:rPr sz="1500" b="1">
+                <a:solidFill>
+                  <a:srgbClr val="1A1A1A"/>
+                </a:solidFill>
+                <a:latin typeface="Manrope"/>
+                <a:rFonts ascii="Manrope" hAnsi="Manrope" cs="Manrope" eastAsia="Manrope"/>
+              </a:rPr>
+              <a:t>Hotel Line</a:t>
+            </a:r>
+          </a:p>
+          <a:p>
+            <a:pPr algn="l">
+              <a:lnSpc>
+                <a:spcPct val="118000"/>
+              </a:lnSpc>
+              <a:spcBef>
+                <a:spcPts val="0"/>
+              </a:spcBef>
+              <a:spcAft>
+                <a:spcPts val="800"/>
               </a:spcAft>
             </a:pPr>
             <a:r>
@@ -4015,19 +4061,42 @@
                 <a:latin typeface="Golos Text"/>
                 <a:rFonts ascii="Golos Text" hAnsi="Golos Text" cs="Golos Text" eastAsia="Golos Text"/>
               </a:rPr>
-              <a:t>Ориентир по полке:</a:t>
-            </a:r>
-          </a:p>
-          <a:p>
-            <a:pPr algn="l">
-              <a:lnSpc>
-                <a:spcPct val="118000"/>
-              </a:lnSpc>
-              <a:spcBef>
-                <a:spcPts val="0"/>
-              </a:spcBef>
-              <a:spcAft>
-                <a:spcPts val="600"/>
+              <a:t>Выше по цене</a:t>
+            </a:r>
+          </a:p>
+          <a:p>
+            <a:pPr algn="l">
+              <a:lnSpc>
+                <a:spcPct val="118000"/>
+              </a:lnSpc>
+              <a:spcBef>
+                <a:spcPts val="0"/>
+              </a:spcBef>
+              <a:spcAft>
+                <a:spcPts val="200"/>
+              </a:spcAft>
+            </a:pPr>
+            <a:r>
+              <a:rPr sz="1500" b="1">
+                <a:solidFill>
+                  <a:srgbClr val="1A1A1A"/>
+                </a:solidFill>
+                <a:latin typeface="Manrope"/>
+                <a:rFonts ascii="Manrope" hAnsi="Manrope" cs="Manrope" eastAsia="Manrope"/>
+              </a:rPr>
+              <a:t>ЕТС Natural</a:t>
+            </a:r>
+          </a:p>
+          <a:p>
+            <a:pPr algn="l">
+              <a:lnSpc>
+                <a:spcPct val="118000"/>
+              </a:lnSpc>
+              <a:spcBef>
+                <a:spcPts val="0"/>
+              </a:spcBef>
+              <a:spcAft>
+                <a:spcPts val="800"/>
               </a:spcAft>
             </a:pPr>
             <a:r>
@@ -4038,19 +4107,42 @@
                 <a:latin typeface="Golos Text"/>
                 <a:rFonts ascii="Golos Text" hAnsi="Golos Text" cs="Golos Text" eastAsia="Golos Text"/>
               </a:rPr>
-              <a:t>• выше Hotel Line</a:t>
-            </a:r>
-          </a:p>
-          <a:p>
-            <a:pPr algn="l">
-              <a:lnSpc>
-                <a:spcPct val="118000"/>
-              </a:lnSpc>
-              <a:spcBef>
-                <a:spcPts val="0"/>
-              </a:spcBef>
-              <a:spcAft>
-                <a:spcPts val="600"/>
+              <a:t>Рядом по цене</a:t>
+            </a:r>
+          </a:p>
+          <a:p>
+            <a:pPr algn="l">
+              <a:lnSpc>
+                <a:spcPct val="118000"/>
+              </a:lnSpc>
+              <a:spcBef>
+                <a:spcPts val="0"/>
+              </a:spcBef>
+              <a:spcAft>
+                <a:spcPts val="200"/>
+              </a:spcAft>
+            </a:pPr>
+            <a:r>
+              <a:rPr sz="1500" b="1">
+                <a:solidFill>
+                  <a:srgbClr val="1A1A1A"/>
+                </a:solidFill>
+                <a:latin typeface="Manrope"/>
+                <a:rFonts ascii="Manrope" hAnsi="Manrope" cs="Manrope" eastAsia="Manrope"/>
+              </a:rPr>
+              <a:t>Natura Siberica</a:t>
+            </a:r>
+          </a:p>
+          <a:p>
+            <a:pPr algn="l">
+              <a:lnSpc>
+                <a:spcPct val="118000"/>
+              </a:lnSpc>
+              <a:spcBef>
+                <a:spcPts val="0"/>
+              </a:spcBef>
+              <a:spcAft>
+                <a:spcPts val="800"/>
               </a:spcAft>
             </a:pPr>
             <a:r>
@@ -4061,19 +4153,42 @@
                 <a:latin typeface="Golos Text"/>
                 <a:rFonts ascii="Golos Text" hAnsi="Golos Text" cs="Golos Text" eastAsia="Golos Text"/>
               </a:rPr>
-              <a:t>• рядом с ЕТС Natural</a:t>
-            </a:r>
-          </a:p>
-          <a:p>
-            <a:pPr algn="l">
-              <a:lnSpc>
-                <a:spcPct val="118000"/>
-              </a:lnSpc>
-              <a:spcBef>
-                <a:spcPts val="0"/>
-              </a:spcBef>
-              <a:spcAft>
-                <a:spcPts val="1000"/>
+              <a:t>Ниже по цене</a:t>
+            </a:r>
+          </a:p>
+          <a:p>
+            <a:pPr algn="l">
+              <a:lnSpc>
+                <a:spcPct val="118000"/>
+              </a:lnSpc>
+              <a:spcBef>
+                <a:spcPts val="0"/>
+              </a:spcBef>
+              <a:spcAft>
+                <a:spcPts val="200"/>
+              </a:spcAft>
+            </a:pPr>
+            <a:r>
+              <a:rPr sz="1500" b="1">
+                <a:solidFill>
+                  <a:srgbClr val="1A1A1A"/>
+                </a:solidFill>
+                <a:latin typeface="Manrope"/>
+                <a:rFonts ascii="Manrope" hAnsi="Manrope" cs="Manrope" eastAsia="Manrope"/>
+              </a:rPr>
+              <a:t>Стратегия</a:t>
+            </a:r>
+          </a:p>
+          <a:p>
+            <a:pPr algn="l">
+              <a:lnSpc>
+                <a:spcPct val="118000"/>
+              </a:lnSpc>
+              <a:spcBef>
+                <a:spcPts val="0"/>
+              </a:spcBef>
+              <a:spcAft>
+                <a:spcPts val="800"/>
               </a:spcAft>
             </a:pPr>
             <a:r>
@@ -4084,19 +4199,19 @@
                 <a:latin typeface="Golos Text"/>
                 <a:rFonts ascii="Golos Text" hAnsi="Golos Text" cs="Golos Text" eastAsia="Golos Text"/>
               </a:rPr>
-              <a:t>• ниже Natura Siberica</a:t>
-            </a:r>
-          </a:p>
-          <a:p>
-            <a:pPr algn="l">
-              <a:lnSpc>
-                <a:spcPct val="118000"/>
-              </a:lnSpc>
-              <a:spcBef>
-                <a:spcPts val="0"/>
-              </a:spcBef>
-              <a:spcAft>
-                <a:spcPts val="400"/>
+              <a:t>Не воюем копейкой с ЕТС</a:t>
+            </a:r>
+          </a:p>
+          <a:p>
+            <a:pPr algn="l">
+              <a:lnSpc>
+                <a:spcPct val="118000"/>
+              </a:lnSpc>
+              <a:spcBef>
+                <a:spcPts val="0"/>
+              </a:spcBef>
+              <a:spcAft>
+                <a:spcPts val="200"/>
               </a:spcAft>
             </a:pPr>
             <a:r>
@@ -4107,19 +4222,19 @@
                 <a:latin typeface="Manrope"/>
                 <a:rFonts ascii="Manrope" hAnsi="Manrope" cs="Manrope" eastAsia="Manrope"/>
               </a:rPr>
-              <a:t>Не воюем копейкой с ЕТС.</a:t>
-            </a:r>
-          </a:p>
-          <a:p>
-            <a:pPr algn="l">
-              <a:lnSpc>
-                <a:spcPct val="118000"/>
-              </a:lnSpc>
-              <a:spcBef>
-                <a:spcPts val="0"/>
-              </a:spcBef>
-              <a:spcAft>
-                <a:spcPts val="600"/>
+              <a:t>Выигрыш</a:t>
+            </a:r>
+          </a:p>
+          <a:p>
+            <a:pPr algn="l">
+              <a:lnSpc>
+                <a:spcPct val="118000"/>
+              </a:lnSpc>
+              <a:spcBef>
+                <a:spcPts val="0"/>
+              </a:spcBef>
+              <a:spcAft>
+                <a:spcPts val="0"/>
               </a:spcAft>
             </a:pPr>
             <a:r>
@@ -4130,7 +4245,7 @@
                 <a:latin typeface="Golos Text"/>
                 <a:rFonts ascii="Golos Text" hAnsi="Golos Text" cs="Golos Text" eastAsia="Golos Text"/>
               </a:rPr>
-              <a:t>Выигрываем пакетом документов и ощущением в номере.</a:t>
+              <a:t>Пакет документов и ощущение в номере</a:t>
             </a:r>
           </a:p>
         </p:txBody>
@@ -4174,19 +4289,42 @@
                 <a:latin typeface="Manrope"/>
                 <a:rFonts ascii="Manrope" hAnsi="Manrope" cs="Manrope" eastAsia="Manrope"/>
               </a:rPr>
-              <a:t>Если поставка из Китая</a:t>
-            </a:r>
-          </a:p>
-          <a:p>
-            <a:pPr algn="l">
-              <a:lnSpc>
-                <a:spcPct val="118000"/>
-              </a:lnSpc>
-              <a:spcBef>
-                <a:spcPts val="0"/>
-              </a:spcBef>
-              <a:spcAft>
-                <a:spcPts val="600"/>
+              <a:t>Поставка из Китая</a:t>
+            </a:r>
+          </a:p>
+          <a:p>
+            <a:pPr algn="l">
+              <a:lnSpc>
+                <a:spcPct val="118000"/>
+              </a:lnSpc>
+              <a:spcBef>
+                <a:spcPts val="0"/>
+              </a:spcBef>
+              <a:spcAft>
+                <a:spcPts val="200"/>
+              </a:spcAft>
+            </a:pPr>
+            <a:r>
+              <a:rPr sz="1500" b="1">
+                <a:solidFill>
+                  <a:srgbClr val="1A1A1A"/>
+                </a:solidFill>
+                <a:latin typeface="Manrope"/>
+                <a:rFonts ascii="Manrope" hAnsi="Manrope" cs="Manrope" eastAsia="Manrope"/>
+              </a:rPr>
+              <a:t>Шаг 1</a:t>
+            </a:r>
+          </a:p>
+          <a:p>
+            <a:pPr algn="l">
+              <a:lnSpc>
+                <a:spcPct val="118000"/>
+              </a:lnSpc>
+              <a:spcBef>
+                <a:spcPts val="0"/>
+              </a:spcBef>
+              <a:spcAft>
+                <a:spcPts val="800"/>
               </a:spcAft>
             </a:pPr>
             <a:r>
@@ -4197,19 +4335,42 @@
                 <a:latin typeface="Golos Text"/>
                 <a:rFonts ascii="Golos Text" hAnsi="Golos Text" cs="Golos Text" eastAsia="Golos Text"/>
               </a:rPr>
-              <a:t>1. Сравниваем заводы в цене FOB</a:t>
-            </a:r>
-          </a:p>
-          <a:p>
-            <a:pPr algn="l">
-              <a:lnSpc>
-                <a:spcPct val="118000"/>
-              </a:lnSpc>
-              <a:spcBef>
-                <a:spcPts val="0"/>
-              </a:spcBef>
-              <a:spcAft>
-                <a:spcPts val="600"/>
+              <a:t>Сравниваем заводы в цене FOB</a:t>
+            </a:r>
+          </a:p>
+          <a:p>
+            <a:pPr algn="l">
+              <a:lnSpc>
+                <a:spcPct val="118000"/>
+              </a:lnSpc>
+              <a:spcBef>
+                <a:spcPts val="0"/>
+              </a:spcBef>
+              <a:spcAft>
+                <a:spcPts val="200"/>
+              </a:spcAft>
+            </a:pPr>
+            <a:r>
+              <a:rPr sz="1500" b="1">
+                <a:solidFill>
+                  <a:srgbClr val="1A1A1A"/>
+                </a:solidFill>
+                <a:latin typeface="Manrope"/>
+                <a:rFonts ascii="Manrope" hAnsi="Manrope" cs="Manrope" eastAsia="Manrope"/>
+              </a:rPr>
+              <a:t>Шаг 2</a:t>
+            </a:r>
+          </a:p>
+          <a:p>
+            <a:pPr algn="l">
+              <a:lnSpc>
+                <a:spcPct val="118000"/>
+              </a:lnSpc>
+              <a:spcBef>
+                <a:spcPts val="0"/>
+              </a:spcBef>
+              <a:spcAft>
+                <a:spcPts val="800"/>
               </a:spcAft>
             </a:pPr>
             <a:r>
@@ -4220,19 +4381,42 @@
                 <a:latin typeface="Golos Text"/>
                 <a:rFonts ascii="Golos Text" hAnsi="Golos Text" cs="Golos Text" eastAsia="Golos Text"/>
               </a:rPr>
-              <a:t>2. Логистику до Кириши считаем отдельной строкой</a:t>
-            </a:r>
-          </a:p>
-          <a:p>
-            <a:pPr algn="l">
-              <a:lnSpc>
-                <a:spcPct val="118000"/>
-              </a:lnSpc>
-              <a:spcBef>
-                <a:spcPts val="0"/>
-              </a:spcBef>
-              <a:spcAft>
-                <a:spcPts val="1000"/>
+              <a:t>Логистику до Кириши — отдельной строкой</a:t>
+            </a:r>
+          </a:p>
+          <a:p>
+            <a:pPr algn="l">
+              <a:lnSpc>
+                <a:spcPct val="118000"/>
+              </a:lnSpc>
+              <a:spcBef>
+                <a:spcPts val="0"/>
+              </a:spcBef>
+              <a:spcAft>
+                <a:spcPts val="200"/>
+              </a:spcAft>
+            </a:pPr>
+            <a:r>
+              <a:rPr sz="1500" b="1">
+                <a:solidFill>
+                  <a:srgbClr val="1A1A1A"/>
+                </a:solidFill>
+                <a:latin typeface="Manrope"/>
+                <a:rFonts ascii="Manrope" hAnsi="Manrope" cs="Manrope" eastAsia="Manrope"/>
+              </a:rPr>
+              <a:t>Шаг 3</a:t>
+            </a:r>
+          </a:p>
+          <a:p>
+            <a:pPr algn="l">
+              <a:lnSpc>
+                <a:spcPct val="118000"/>
+              </a:lnSpc>
+              <a:spcBef>
+                <a:spcPts val="0"/>
+              </a:spcBef>
+              <a:spcAft>
+                <a:spcPts val="800"/>
               </a:spcAft>
             </a:pPr>
             <a:r>
@@ -4243,7 +4427,7 @@
                 <a:latin typeface="Golos Text"/>
                 <a:rFonts ascii="Golos Text" hAnsi="Golos Text" cs="Golos Text" eastAsia="Golos Text"/>
               </a:rPr>
-              <a:t>3. Полная цена = FOB + фрахт + таможня + довоз + запас</a:t>
+              <a:t>Полная цена = FOB + фрахт + таможня + довоз + запас</a:t>
             </a:r>
           </a:p>
           <a:p>
@@ -4266,19 +4450,19 @@
                 <a:latin typeface="Manrope"/>
                 <a:rFonts ascii="Manrope" hAnsi="Manrope" cs="Manrope" eastAsia="Manrope"/>
               </a:rPr>
-              <a:t>Срок пилота — дата «на складе»,</a:t>
-            </a:r>
-          </a:p>
-          <a:p>
-            <a:pPr algn="l">
-              <a:lnSpc>
-                <a:spcPct val="118000"/>
-              </a:lnSpc>
-              <a:spcBef>
-                <a:spcPts val="0"/>
-              </a:spcBef>
-              <a:spcAft>
-                <a:spcPts val="600"/>
+              <a:t>Срок</a:t>
+            </a:r>
+          </a:p>
+          <a:p>
+            <a:pPr algn="l">
+              <a:lnSpc>
+                <a:spcPct val="118000"/>
+              </a:lnSpc>
+              <a:spcBef>
+                <a:spcPts val="0"/>
+              </a:spcBef>
+              <a:spcAft>
+                <a:spcPts val="800"/>
               </a:spcAft>
             </a:pPr>
             <a:r>
@@ -4289,19 +4473,42 @@
                 <a:latin typeface="Golos Text"/>
                 <a:rFonts ascii="Golos Text" hAnsi="Golos Text" cs="Golos Text" eastAsia="Golos Text"/>
               </a:rPr>
-              <a:t>а не формулировка «завод отгрузил».</a:t>
-            </a:r>
-          </a:p>
-          <a:p>
-            <a:pPr algn="l">
-              <a:lnSpc>
-                <a:spcPct val="118000"/>
-              </a:lnSpc>
-              <a:spcBef>
-                <a:spcPts val="0"/>
-              </a:spcBef>
-              <a:spcAft>
-                <a:spcPts val="600"/>
+              <a:t>Дата «на складе», не «завод отгрузил»</a:t>
+            </a:r>
+          </a:p>
+          <a:p>
+            <a:pPr algn="l">
+              <a:lnSpc>
+                <a:spcPct val="118000"/>
+              </a:lnSpc>
+              <a:spcBef>
+                <a:spcPts val="0"/>
+              </a:spcBef>
+              <a:spcAft>
+                <a:spcPts val="200"/>
+              </a:spcAft>
+            </a:pPr>
+            <a:r>
+              <a:rPr sz="1500" b="1">
+                <a:solidFill>
+                  <a:srgbClr val="1A1A1A"/>
+                </a:solidFill>
+                <a:latin typeface="Manrope"/>
+                <a:rFonts ascii="Manrope" hAnsi="Manrope" cs="Manrope" eastAsia="Manrope"/>
+              </a:rPr>
+              <a:t>Происхождение</a:t>
+            </a:r>
+          </a:p>
+          <a:p>
+            <a:pPr algn="l">
+              <a:lnSpc>
+                <a:spcPct val="118000"/>
+              </a:lnSpc>
+              <a:spcBef>
+                <a:spcPts val="0"/>
+              </a:spcBef>
+              <a:spcAft>
+                <a:spcPts val="0"/>
               </a:spcAft>
             </a:pPr>
             <a:r>
@@ -4312,7 +4519,7 @@
                 <a:latin typeface="Golos Text"/>
                 <a:rFonts ascii="Golos Text" hAnsi="Golos Text" cs="Golos Text" eastAsia="Golos Text"/>
               </a:rPr>
-              <a:t>Происхождение не зафиксировано — не называем «российское».</a:t>
+              <a:t>Не зафиксировано — не называем «российское»</a:t>
             </a:r>
           </a:p>
         </p:txBody>
@@ -4832,19 +5039,42 @@
                 <a:latin typeface="Manrope"/>
                 <a:rFonts ascii="Manrope" hAnsi="Manrope" cs="Manrope" eastAsia="Manrope"/>
               </a:rPr>
-              <a:t>Содержание пульта v1.14</a:t>
-            </a:r>
-          </a:p>
-          <a:p>
-            <a:pPr algn="l">
-              <a:lnSpc>
-                <a:spcPct val="118000"/>
-              </a:lnSpc>
-              <a:spcBef>
-                <a:spcPts val="0"/>
-              </a:spcBef>
-              <a:spcAft>
-                <a:spcPts val="600"/>
+              <a:t>Содержание v1.14</a:t>
+            </a:r>
+          </a:p>
+          <a:p>
+            <a:pPr algn="l">
+              <a:lnSpc>
+                <a:spcPct val="118000"/>
+              </a:lnSpc>
+              <a:spcBef>
+                <a:spcPts val="0"/>
+              </a:spcBef>
+              <a:spcAft>
+                <a:spcPts val="200"/>
+              </a:spcAft>
+            </a:pPr>
+            <a:r>
+              <a:rPr sz="1500" b="1">
+                <a:solidFill>
+                  <a:srgbClr val="1A1A1A"/>
+                </a:solidFill>
+                <a:latin typeface="Manrope"/>
+                <a:rFonts ascii="Manrope" hAnsi="Manrope" cs="Manrope" eastAsia="Manrope"/>
+              </a:rPr>
+              <a:t>Этапы 0–2</a:t>
+            </a:r>
+          </a:p>
+          <a:p>
+            <a:pPr algn="l">
+              <a:lnSpc>
+                <a:spcPct val="118000"/>
+              </a:lnSpc>
+              <a:spcBef>
+                <a:spcPts val="0"/>
+              </a:spcBef>
+              <a:spcAft>
+                <a:spcPts val="800"/>
               </a:spcAft>
             </a:pPr>
             <a:r>
@@ -4855,19 +5085,42 @@
                 <a:latin typeface="Golos Text"/>
                 <a:rFonts ascii="Golos Text" hAnsi="Golos Text" cs="Golos Text" eastAsia="Golos Text"/>
               </a:rPr>
-              <a:t>Этапы 0–2: разведка, правила, границы продукта</a:t>
-            </a:r>
-          </a:p>
-          <a:p>
-            <a:pPr algn="l">
-              <a:lnSpc>
-                <a:spcPct val="118000"/>
-              </a:lnSpc>
-              <a:spcBef>
-                <a:spcPts val="0"/>
-              </a:spcBef>
-              <a:spcAft>
-                <a:spcPts val="600"/>
+              <a:t>Разведка, правила, границы продукта</a:t>
+            </a:r>
+          </a:p>
+          <a:p>
+            <a:pPr algn="l">
+              <a:lnSpc>
+                <a:spcPct val="118000"/>
+              </a:lnSpc>
+              <a:spcBef>
+                <a:spcPts val="0"/>
+              </a:spcBef>
+              <a:spcAft>
+                <a:spcPts val="200"/>
+              </a:spcAft>
+            </a:pPr>
+            <a:r>
+              <a:rPr sz="1500" b="1">
+                <a:solidFill>
+                  <a:srgbClr val="1A1A1A"/>
+                </a:solidFill>
+                <a:latin typeface="Manrope"/>
+                <a:rFonts ascii="Manrope" hAnsi="Manrope" cs="Manrope" eastAsia="Manrope"/>
+              </a:rPr>
+              <a:t>Этапы 3–6</a:t>
+            </a:r>
+          </a:p>
+          <a:p>
+            <a:pPr algn="l">
+              <a:lnSpc>
+                <a:spcPct val="118000"/>
+              </a:lnSpc>
+              <a:spcBef>
+                <a:spcPts val="0"/>
+              </a:spcBef>
+              <a:spcAft>
+                <a:spcPts val="800"/>
               </a:spcAft>
             </a:pPr>
             <a:r>
@@ -4878,19 +5131,42 @@
                 <a:latin typeface="Golos Text"/>
                 <a:rFonts ascii="Golos Text" hAnsi="Golos Text" cs="Golos Text" eastAsia="Golos Text"/>
               </a:rPr>
-              <a:t>Этапы 3–6: учебный сценарий «как вести дело»</a:t>
-            </a:r>
-          </a:p>
-          <a:p>
-            <a:pPr algn="l">
-              <a:lnSpc>
-                <a:spcPct val="118000"/>
-              </a:lnSpc>
-              <a:spcBef>
-                <a:spcPts val="0"/>
-              </a:spcBef>
-              <a:spcAft>
-                <a:spcPts val="600"/>
+              <a:t>Сценарий «как вести дело»</a:t>
+            </a:r>
+          </a:p>
+          <a:p>
+            <a:pPr algn="l">
+              <a:lnSpc>
+                <a:spcPct val="118000"/>
+              </a:lnSpc>
+              <a:spcBef>
+                <a:spcPts val="0"/>
+              </a:spcBef>
+              <a:spcAft>
+                <a:spcPts val="200"/>
+              </a:spcAft>
+            </a:pPr>
+            <a:r>
+              <a:rPr sz="1500" b="1">
+                <a:solidFill>
+                  <a:srgbClr val="1A1A1A"/>
+                </a:solidFill>
+                <a:latin typeface="Manrope"/>
+                <a:rFonts ascii="Manrope" hAnsi="Manrope" cs="Manrope" eastAsia="Manrope"/>
+              </a:rPr>
+              <a:t>Инструменты</a:t>
+            </a:r>
+          </a:p>
+          <a:p>
+            <a:pPr algn="l">
+              <a:lnSpc>
+                <a:spcPct val="118000"/>
+              </a:lnSpc>
+              <a:spcBef>
+                <a:spcPts val="0"/>
+              </a:spcBef>
+              <a:spcAft>
+                <a:spcPts val="800"/>
               </a:spcAft>
             </a:pPr>
             <a:r>
@@ -4901,19 +5177,42 @@
                 <a:latin typeface="Golos Text"/>
                 <a:rFonts ascii="Golos Text" hAnsi="Golos Text" cs="Golos Text" eastAsia="Golos Text"/>
               </a:rPr>
-              <a:t>StoryBrand, чеклист готовности, реестр рисков</a:t>
-            </a:r>
-          </a:p>
-          <a:p>
-            <a:pPr algn="l">
-              <a:lnSpc>
-                <a:spcPct val="118000"/>
-              </a:lnSpc>
-              <a:spcBef>
-                <a:spcPts val="0"/>
-              </a:spcBef>
-              <a:spcAft>
-                <a:spcPts val="600"/>
+              <a:t>StoryBrand, чеклист, реестр рисков, пилот</a:t>
+            </a:r>
+          </a:p>
+          <a:p>
+            <a:pPr algn="l">
+              <a:lnSpc>
+                <a:spcPct val="118000"/>
+              </a:lnSpc>
+              <a:spcBef>
+                <a:spcPts val="0"/>
+              </a:spcBef>
+              <a:spcAft>
+                <a:spcPts val="200"/>
+              </a:spcAft>
+            </a:pPr>
+            <a:r>
+              <a:rPr sz="1500" b="1">
+                <a:solidFill>
+                  <a:srgbClr val="1A1A1A"/>
+                </a:solidFill>
+                <a:latin typeface="Manrope"/>
+                <a:rFonts ascii="Manrope" hAnsi="Manrope" cs="Manrope" eastAsia="Manrope"/>
+              </a:rPr>
+              <a:t>Портфель</a:t>
+            </a:r>
+          </a:p>
+          <a:p>
+            <a:pPr algn="l">
+              <a:lnSpc>
+                <a:spcPct val="118000"/>
+              </a:lnSpc>
+              <a:spcBef>
+                <a:spcPts val="0"/>
+              </a:spcBef>
+              <a:spcAft>
+                <a:spcPts val="800"/>
               </a:spcAft>
             </a:pPr>
             <a:r>
@@ -4924,109 +5223,155 @@
                 <a:latin typeface="Golos Text"/>
                 <a:rFonts ascii="Golos Text" hAnsi="Golos Text" cs="Golos Text" eastAsia="Golos Text"/>
               </a:rPr>
-              <a:t>Правила пилота: успех, провал, выход</a:t>
-            </a:r>
-          </a:p>
-          <a:p>
-            <a:pPr algn="l">
-              <a:lnSpc>
-                <a:spcPct val="118000"/>
-              </a:lnSpc>
-              <a:spcBef>
-                <a:spcPts val="0"/>
-              </a:spcBef>
-              <a:spcAft>
-                <a:spcPts val="600"/>
-              </a:spcAft>
-            </a:pPr>
-            <a:r>
-              <a:rPr sz="1500" b="0">
-                <a:solidFill>
-                  <a:srgbClr val="1A1A1A"/>
+              <a:t>Мостик Travel+: Hotel Line, Fleur, Natural, СТМ</a:t>
+            </a:r>
+          </a:p>
+          <a:p>
+            <a:pPr algn="l">
+              <a:lnSpc>
+                <a:spcPct val="118000"/>
+              </a:lnSpc>
+              <a:spcBef>
+                <a:spcPts val="1800"/>
+              </a:spcBef>
+              <a:spcAft>
+                <a:spcPts val="0"/>
+              </a:spcAft>
+            </a:pPr>
+            <a:r>
+              <a:rPr sz="1200" b="0">
+                <a:solidFill>
+                  <a:srgbClr val="5C5C5C"/>
                 </a:solidFill>
                 <a:latin typeface="Golos Text"/>
                 <a:rFonts ascii="Golos Text" hAnsi="Golos Text" cs="Golos Text" eastAsia="Golos Text"/>
               </a:rPr>
-              <a:t>Мостик портфеля Travel+ (Hotel Line, Fleur, Natural, СТМ)</a:t>
-            </a:r>
-          </a:p>
-          <a:p>
-            <a:pPr algn="l">
-              <a:lnSpc>
-                <a:spcPct val="118000"/>
-              </a:lnSpc>
-              <a:spcBef>
-                <a:spcPts val="1800"/>
-              </a:spcBef>
-              <a:spcAft>
-                <a:spcPts val="0"/>
-              </a:spcAft>
-            </a:pPr>
-            <a:r>
-              <a:rPr sz="1200" b="0">
-                <a:solidFill>
-                  <a:srgbClr val="5C5C5C"/>
+              <a:t>Образец для поля и собеседования. Не коммерческое предложение.</a:t>
+            </a:r>
+          </a:p>
+        </p:txBody>
+      </p:sp>
+      <p:sp>
+        <p:nvSpPr>
+          <p:cNvPr id="14" name="TextBox 13"/>
+          <p:cNvSpPr txBox="1"/>
+          <p:nvPr/>
+        </p:nvSpPr>
+        <p:spPr>
+          <a:xfrm>
+            <a:off x="6571335" y="1426464"/>
+            <a:ext cx="4815687" cy="4334256"/>
+          </a:xfrm>
+          <a:prstGeom prst="rect">
+            <a:avLst/>
+          </a:prstGeom>
+          <a:noFill/>
+        </p:spPr>
+        <p:txBody>
+          <a:bodyPr wrap="square" anchor="t" lIns="50800" rIns="50800" tIns="25400" bIns="25400"/>
+          <a:lstStyle/>
+          <a:p>
+            <a:pPr algn="l">
+              <a:lnSpc>
+                <a:spcPct val="118000"/>
+              </a:lnSpc>
+              <a:spcBef>
+                <a:spcPts val="0"/>
+              </a:spcBef>
+              <a:spcAft>
+                <a:spcPts val="1200"/>
+              </a:spcAft>
+            </a:pPr>
+            <a:r>
+              <a:rPr sz="1500" b="1">
+                <a:solidFill>
+                  <a:srgbClr val="2A554A"/>
+                </a:solidFill>
+                <a:latin typeface="Manrope"/>
+                <a:rFonts ascii="Manrope" hAnsi="Manrope" cs="Manrope" eastAsia="Manrope"/>
+              </a:rPr>
+              <a:t>Справочники</a:t>
+            </a:r>
+          </a:p>
+          <a:p>
+            <a:pPr algn="l">
+              <a:lnSpc>
+                <a:spcPct val="118000"/>
+              </a:lnSpc>
+              <a:spcBef>
+                <a:spcPts val="0"/>
+              </a:spcBef>
+              <a:spcAft>
+                <a:spcPts val="200"/>
+              </a:spcAft>
+            </a:pPr>
+            <a:r>
+              <a:rPr sz="1500" b="1">
+                <a:solidFill>
+                  <a:srgbClr val="1A1A1A"/>
+                </a:solidFill>
+                <a:latin typeface="Manrope"/>
+                <a:rFonts ascii="Manrope" hAnsi="Manrope" cs="Manrope" eastAsia="Manrope"/>
+              </a:rPr>
+              <a:t>Глоссарии</a:t>
+            </a:r>
+          </a:p>
+          <a:p>
+            <a:pPr algn="l">
+              <a:lnSpc>
+                <a:spcPct val="118000"/>
+              </a:lnSpc>
+              <a:spcBef>
+                <a:spcPts val="0"/>
+              </a:spcBef>
+              <a:spcAft>
+                <a:spcPts val="800"/>
+              </a:spcAft>
+            </a:pPr>
+            <a:r>
+              <a:rPr sz="1500" b="0">
+                <a:solidFill>
+                  <a:srgbClr val="1A1A1A"/>
                 </a:solidFill>
                 <a:latin typeface="Golos Text"/>
                 <a:rFonts ascii="Golos Text" hAnsi="Golos Text" cs="Golos Text" eastAsia="Golos Text"/>
               </a:rPr>
-              <a:t>Статус: образец для поля и собеседования. Не коммерческое предложение.</a:t>
-            </a:r>
-          </a:p>
-        </p:txBody>
-      </p:sp>
-      <p:sp>
-        <p:nvSpPr>
-          <p:cNvPr id="14" name="TextBox 13"/>
-          <p:cNvSpPr txBox="1"/>
-          <p:nvPr/>
-        </p:nvSpPr>
-        <p:spPr>
-          <a:xfrm>
-            <a:off x="6571335" y="1426464"/>
-            <a:ext cx="4815687" cy="4334256"/>
-          </a:xfrm>
-          <a:prstGeom prst="rect">
-            <a:avLst/>
-          </a:prstGeom>
-          <a:noFill/>
-        </p:spPr>
-        <p:txBody>
-          <a:bodyPr wrap="square" anchor="t" lIns="50800" rIns="50800" tIns="25400" bIns="25400"/>
-          <a:lstStyle/>
-          <a:p>
-            <a:pPr algn="l">
-              <a:lnSpc>
-                <a:spcPct val="118000"/>
-              </a:lnSpc>
-              <a:spcBef>
-                <a:spcPts val="0"/>
-              </a:spcBef>
-              <a:spcAft>
-                <a:spcPts val="1200"/>
+              <a:t>Бренд и ВЭД</a:t>
+            </a:r>
+          </a:p>
+          <a:p>
+            <a:pPr algn="l">
+              <a:lnSpc>
+                <a:spcPct val="118000"/>
+              </a:lnSpc>
+              <a:spcBef>
+                <a:spcPts val="0"/>
+              </a:spcBef>
+              <a:spcAft>
+                <a:spcPts val="200"/>
               </a:spcAft>
             </a:pPr>
             <a:r>
               <a:rPr sz="1500" b="1">
                 <a:solidFill>
-                  <a:srgbClr val="2A554A"/>
+                  <a:srgbClr val="1A1A1A"/>
                 </a:solidFill>
                 <a:latin typeface="Manrope"/>
                 <a:rFonts ascii="Manrope" hAnsi="Manrope" cs="Manrope" eastAsia="Manrope"/>
               </a:rPr>
-              <a:t>Справочники и логистика</a:t>
-            </a:r>
-          </a:p>
-          <a:p>
-            <a:pPr algn="l">
-              <a:lnSpc>
-                <a:spcPct val="118000"/>
-              </a:lnSpc>
-              <a:spcBef>
-                <a:spcPts val="0"/>
-              </a:spcBef>
-              <a:spcAft>
-                <a:spcPts val="600"/>
+              <a:t>Раздел L</a:t>
+            </a:r>
+          </a:p>
+          <a:p>
+            <a:pPr algn="l">
+              <a:lnSpc>
+                <a:spcPct val="118000"/>
+              </a:lnSpc>
+              <a:spcBef>
+                <a:spcPts val="0"/>
+              </a:spcBef>
+              <a:spcAft>
+                <a:spcPts val="800"/>
               </a:spcAft>
             </a:pPr>
             <a:r>
@@ -5037,19 +5382,42 @@
                 <a:latin typeface="Golos Text"/>
                 <a:rFonts ascii="Golos Text" hAnsi="Golos Text" cs="Golos Text" eastAsia="Golos Text"/>
               </a:rPr>
-              <a:t>Глоссарий бренда и глоссарий ВЭД</a:t>
-            </a:r>
-          </a:p>
-          <a:p>
-            <a:pPr algn="l">
-              <a:lnSpc>
-                <a:spcPct val="118000"/>
-              </a:lnSpc>
-              <a:spcBef>
-                <a:spcPts val="0"/>
-              </a:spcBef>
-              <a:spcAft>
-                <a:spcPts val="600"/>
+              <a:t>Путь товара, Incoterms, RFQ, приёмка</a:t>
+            </a:r>
+          </a:p>
+          <a:p>
+            <a:pPr algn="l">
+              <a:lnSpc>
+                <a:spcPct val="118000"/>
+              </a:lnSpc>
+              <a:spcBef>
+                <a:spcPts val="0"/>
+              </a:spcBef>
+              <a:spcAft>
+                <a:spcPts val="200"/>
+              </a:spcAft>
+            </a:pPr>
+            <a:r>
+              <a:rPr sz="1500" b="1">
+                <a:solidFill>
+                  <a:srgbClr val="1A1A1A"/>
+                </a:solidFill>
+                <a:latin typeface="Manrope"/>
+                <a:rFonts ascii="Manrope" hAnsi="Manrope" cs="Manrope" eastAsia="Manrope"/>
+              </a:rPr>
+              <a:t>Волна A</a:t>
+            </a:r>
+          </a:p>
+          <a:p>
+            <a:pPr algn="l">
+              <a:lnSpc>
+                <a:spcPct val="118000"/>
+              </a:lnSpc>
+              <a:spcBef>
+                <a:spcPts val="0"/>
+              </a:spcBef>
+              <a:spcAft>
+                <a:spcPts val="800"/>
               </a:spcAft>
             </a:pPr>
             <a:r>
@@ -5060,19 +5428,42 @@
                 <a:latin typeface="Golos Text"/>
                 <a:rFonts ascii="Golos Text" hAnsi="Golos Text" cs="Golos Text" eastAsia="Golos Text"/>
               </a:rPr>
-              <a:t>Раздел L: путь товара, Incoterms, RFQ, приёмка на складе</a:t>
-            </a:r>
-          </a:p>
-          <a:p>
-            <a:pPr algn="l">
-              <a:lnSpc>
-                <a:spcPct val="118000"/>
-              </a:lnSpc>
-              <a:spcBef>
-                <a:spcPts val="0"/>
-              </a:spcBef>
-              <a:spcAft>
-                <a:spcPts val="600"/>
+              <a:t>Markdown-реестры в папке brand-pult/</a:t>
+            </a:r>
+          </a:p>
+          <a:p>
+            <a:pPr algn="l">
+              <a:lnSpc>
+                <a:spcPct val="118000"/>
+              </a:lnSpc>
+              <a:spcBef>
+                <a:spcPts val="0"/>
+              </a:spcBef>
+              <a:spcAft>
+                <a:spcPts val="200"/>
+              </a:spcAft>
+            </a:pPr>
+            <a:r>
+              <a:rPr sz="1500" b="1">
+                <a:solidFill>
+                  <a:srgbClr val="1A1A1A"/>
+                </a:solidFill>
+                <a:latin typeface="Manrope"/>
+                <a:rFonts ascii="Manrope" hAnsi="Manrope" cs="Manrope" eastAsia="Manrope"/>
+              </a:rPr>
+              <a:t>Синхрон</a:t>
+            </a:r>
+          </a:p>
+          <a:p>
+            <a:pPr algn="l">
+              <a:lnSpc>
+                <a:spcPct val="118000"/>
+              </a:lnSpc>
+              <a:spcBef>
+                <a:spcPts val="0"/>
+              </a:spcBef>
+              <a:spcAft>
+                <a:spcPts val="800"/>
               </a:spcAft>
             </a:pPr>
             <a:r>
@@ -5083,19 +5474,42 @@
                 <a:latin typeface="Golos Text"/>
                 <a:rFonts ascii="Golos Text" hAnsi="Golos Text" cs="Golos Text" eastAsia="Golos Text"/>
               </a:rPr>
-              <a:t>Волна A: markdown-реестры в папке brand-pult/</a:t>
-            </a:r>
-          </a:p>
-          <a:p>
-            <a:pPr algn="l">
-              <a:lnSpc>
-                <a:spcPct val="118000"/>
-              </a:lnSpc>
-              <a:spcBef>
-                <a:spcPts val="0"/>
-              </a:spcBef>
-              <a:spcAft>
-                <a:spcPts val="1000"/>
+              <a:t>Презентация и скрипт с пультом</a:t>
+            </a:r>
+          </a:p>
+          <a:p>
+            <a:pPr algn="l">
+              <a:lnSpc>
+                <a:spcPct val="118000"/>
+              </a:lnSpc>
+              <a:spcBef>
+                <a:spcPts val="0"/>
+              </a:spcBef>
+              <a:spcAft>
+                <a:spcPts val="200"/>
+              </a:spcAft>
+            </a:pPr>
+            <a:r>
+              <a:rPr sz="1500" b="1">
+                <a:solidFill>
+                  <a:srgbClr val="1A1A1A"/>
+                </a:solidFill>
+                <a:latin typeface="Manrope"/>
+                <a:rFonts ascii="Manrope" hAnsi="Manrope" cs="Manrope" eastAsia="Manrope"/>
+              </a:rPr>
+              <a:t>Версия 2.0</a:t>
+            </a:r>
+          </a:p>
+          <a:p>
+            <a:pPr algn="l">
+              <a:lnSpc>
+                <a:spcPct val="118000"/>
+              </a:lnSpc>
+              <a:spcBef>
+                <a:spcPts val="0"/>
+              </a:spcBef>
+              <a:spcAft>
+                <a:spcPts val="0"/>
               </a:spcAft>
             </a:pPr>
             <a:r>
@@ -5106,30 +5520,7 @@
                 <a:latin typeface="Golos Text"/>
                 <a:rFonts ascii="Golos Text" hAnsi="Golos Text" cs="Golos Text" eastAsia="Golos Text"/>
               </a:rPr>
-              <a:t>Презентация и скрипт — синхрон с пультом</a:t>
-            </a:r>
-          </a:p>
-          <a:p>
-            <a:pPr algn="l">
-              <a:lnSpc>
-                <a:spcPct val="118000"/>
-              </a:lnSpc>
-              <a:spcBef>
-                <a:spcPts val="0"/>
-              </a:spcBef>
-              <a:spcAft>
-                <a:spcPts val="800"/>
-              </a:spcAft>
-            </a:pPr>
-            <a:r>
-              <a:rPr sz="1500" b="1">
-                <a:solidFill>
-                  <a:srgbClr val="1A1A1A"/>
-                </a:solidFill>
-                <a:latin typeface="Manrope"/>
-                <a:rFonts ascii="Manrope" hAnsi="Manrope" cs="Manrope" eastAsia="Manrope"/>
-              </a:rPr>
-              <a:t>Версия 2.0 — когда технолог закроет цифры завода.</a:t>
+              <a:t>Когда технолог закроет цифры завода</a:t>
             </a:r>
           </a:p>
         </p:txBody>
@@ -5661,18 +6052,64 @@
                 <a:spcPts val="0"/>
               </a:spcBef>
               <a:spcAft>
+                <a:spcPts val="200"/>
+              </a:spcAft>
+            </a:pPr>
+            <a:r>
+              <a:rPr sz="1500" b="1">
+                <a:solidFill>
+                  <a:srgbClr val="1A1A1A"/>
+                </a:solidFill>
+                <a:latin typeface="Manrope"/>
+                <a:rFonts ascii="Manrope" hAnsi="Manrope" cs="Manrope" eastAsia="Manrope"/>
+              </a:rPr>
+              <a:t>ДНК</a:t>
+            </a:r>
+          </a:p>
+          <a:p>
+            <a:pPr algn="l">
+              <a:lnSpc>
+                <a:spcPct val="118000"/>
+              </a:lnSpc>
+              <a:spcBef>
+                <a:spcPts val="0"/>
+              </a:spcBef>
+              <a:spcAft>
                 <a:spcPts val="800"/>
               </a:spcAft>
             </a:pPr>
             <a:r>
-              <a:rPr sz="1600" b="0">
+              <a:rPr sz="1500" b="0">
                 <a:solidFill>
                   <a:srgbClr val="1A1A1A"/>
                 </a:solidFill>
                 <a:latin typeface="Golos Text"/>
                 <a:rFonts ascii="Golos Text" hAnsi="Golos Text" cs="Golos Text" eastAsia="Golos Text"/>
               </a:rPr>
-              <a:t>ДНК + StoryBrand + DoD</a:t>
+              <a:t>Обещание и границы линейки</a:t>
+            </a:r>
+          </a:p>
+          <a:p>
+            <a:pPr algn="l">
+              <a:lnSpc>
+                <a:spcPct val="118000"/>
+              </a:lnSpc>
+              <a:spcBef>
+                <a:spcPts val="0"/>
+              </a:spcBef>
+              <a:spcAft>
+                <a:spcPts val="200"/>
+              </a:spcAft>
+            </a:pPr>
+            <a:r>
+              <a:rPr sz="1500" b="1">
+                <a:solidFill>
+                  <a:srgbClr val="1A1A1A"/>
+                </a:solidFill>
+                <a:latin typeface="Manrope"/>
+                <a:rFonts ascii="Manrope" hAnsi="Manrope" cs="Manrope" eastAsia="Manrope"/>
+              </a:rPr>
+              <a:t>StoryBrand</a:t>
             </a:r>
           </a:p>
           <a:p>
@@ -5688,60 +6125,129 @@
               </a:spcAft>
             </a:pPr>
             <a:r>
-              <a:rPr sz="1600" b="0">
+              <a:rPr sz="1500" b="0">
                 <a:solidFill>
                   <a:srgbClr val="1A1A1A"/>
                 </a:solidFill>
                 <a:latin typeface="Golos Text"/>
                 <a:rFonts ascii="Golos Text" hAnsi="Golos Text" cs="Golos Text" eastAsia="Golos Text"/>
               </a:rPr>
-              <a:t>Полевая защита</a:t>
-            </a:r>
-          </a:p>
-          <a:p>
-            <a:pPr algn="l">
-              <a:lnSpc>
-                <a:spcPct val="118000"/>
-              </a:lnSpc>
-              <a:spcBef>
-                <a:spcPts val="0"/>
-              </a:spcBef>
-              <a:spcAft>
-                <a:spcPts val="1400"/>
-              </a:spcAft>
-            </a:pPr>
-            <a:r>
-              <a:rPr sz="1600" b="0">
+              <a:t>Скрипт для продаж</a:t>
+            </a:r>
+          </a:p>
+          <a:p>
+            <a:pPr algn="l">
+              <a:lnSpc>
+                <a:spcPct val="118000"/>
+              </a:lnSpc>
+              <a:spcBef>
+                <a:spcPts val="0"/>
+              </a:spcBef>
+              <a:spcAft>
+                <a:spcPts val="200"/>
+              </a:spcAft>
+            </a:pPr>
+            <a:r>
+              <a:rPr sz="1500" b="1">
+                <a:solidFill>
+                  <a:srgbClr val="1A1A1A"/>
+                </a:solidFill>
+                <a:latin typeface="Manrope"/>
+                <a:rFonts ascii="Manrope" hAnsi="Manrope" cs="Manrope" eastAsia="Manrope"/>
+              </a:rPr>
+              <a:t>Чеклист</a:t>
+            </a:r>
+          </a:p>
+          <a:p>
+            <a:pPr algn="l">
+              <a:lnSpc>
+                <a:spcPct val="118000"/>
+              </a:lnSpc>
+              <a:spcBef>
+                <a:spcPts val="0"/>
+              </a:spcBef>
+              <a:spcAft>
+                <a:spcPts val="800"/>
+              </a:spcAft>
+            </a:pPr>
+            <a:r>
+              <a:rPr sz="1500" b="0">
                 <a:solidFill>
                   <a:srgbClr val="1A1A1A"/>
                 </a:solidFill>
                 <a:latin typeface="Golos Text"/>
                 <a:rFonts ascii="Golos Text" hAnsi="Golos Text" cs="Golos Text" eastAsia="Golos Text"/>
               </a:rPr>
-              <a:t>Чеклист поставок при Китае (раздел L)</a:t>
-            </a:r>
-          </a:p>
-          <a:p>
-            <a:pPr algn="l">
-              <a:lnSpc>
-                <a:spcPct val="118000"/>
-              </a:lnSpc>
-              <a:spcBef>
-                <a:spcPts val="0"/>
-              </a:spcBef>
-              <a:spcAft>
-                <a:spcPts val="600"/>
-              </a:spcAft>
-            </a:pPr>
-            <a:r>
-              <a:rPr sz="1400" b="0">
-                <a:solidFill>
-                  <a:srgbClr val="5C5C5C"/>
+              <a:t>Готовность продукта перед рынком</a:t>
+            </a:r>
+          </a:p>
+          <a:p>
+            <a:pPr algn="l">
+              <a:lnSpc>
+                <a:spcPct val="118000"/>
+              </a:lnSpc>
+              <a:spcBef>
+                <a:spcPts val="0"/>
+              </a:spcBef>
+              <a:spcAft>
+                <a:spcPts val="200"/>
+              </a:spcAft>
+            </a:pPr>
+            <a:r>
+              <a:rPr sz="1500" b="1">
+                <a:solidFill>
+                  <a:srgbClr val="1A1A1A"/>
+                </a:solidFill>
+                <a:latin typeface="Manrope"/>
+                <a:rFonts ascii="Manrope" hAnsi="Manrope" cs="Manrope" eastAsia="Manrope"/>
+              </a:rPr>
+              <a:t>Логистика</a:t>
+            </a:r>
+          </a:p>
+          <a:p>
+            <a:pPr algn="l">
+              <a:lnSpc>
+                <a:spcPct val="118000"/>
+              </a:lnSpc>
+              <a:spcBef>
+                <a:spcPts val="0"/>
+              </a:spcBef>
+              <a:spcAft>
+                <a:spcPts val="800"/>
+              </a:spcAft>
+            </a:pPr>
+            <a:r>
+              <a:rPr sz="1500" b="0">
+                <a:solidFill>
+                  <a:srgbClr val="1A1A1A"/>
                 </a:solidFill>
                 <a:latin typeface="Golos Text"/>
                 <a:rFonts ascii="Golos Text" hAnsi="Golos Text" cs="Golos Text" eastAsia="Golos Text"/>
               </a:rPr>
-              <a:t>Не прайс завода. Не КП.</a:t>
+              <a:t>Раздел L — путь при поставке из Китая</a:t>
+            </a:r>
+          </a:p>
+          <a:p>
+            <a:pPr algn="l">
+              <a:lnSpc>
+                <a:spcPct val="118000"/>
+              </a:lnSpc>
+              <a:spcBef>
+                <a:spcPts val="1800"/>
+              </a:spcBef>
+              <a:spcAft>
+                <a:spcPts val="0"/>
+              </a:spcAft>
+            </a:pPr>
+            <a:r>
+              <a:rPr sz="1200" b="0">
+                <a:solidFill>
+                  <a:srgbClr val="5C5C5C"/>
+                </a:solidFill>
+                <a:latin typeface="Golos Text"/>
+                <a:rFonts ascii="Golos Text" hAnsi="Golos Text" cs="Golos Text" eastAsia="Golos Text"/>
+              </a:rPr>
+              <a:t>Не прайс завода. Не коммерческое предложение.</a:t>
             </a:r>
           </a:p>
         </p:txBody>
@@ -5797,18 +6303,64 @@
                 <a:spcPts val="0"/>
               </a:spcBef>
               <a:spcAft>
+                <a:spcPts val="200"/>
+              </a:spcAft>
+            </a:pPr>
+            <a:r>
+              <a:rPr sz="1500" b="1">
+                <a:solidFill>
+                  <a:srgbClr val="1A1A1A"/>
+                </a:solidFill>
+                <a:latin typeface="Manrope"/>
+                <a:rFonts ascii="Manrope" hAnsi="Manrope" cs="Manrope" eastAsia="Manrope"/>
+              </a:rPr>
+              <a:t>Блокеры</a:t>
+            </a:r>
+          </a:p>
+          <a:p>
+            <a:pPr algn="l">
+              <a:lnSpc>
+                <a:spcPct val="118000"/>
+              </a:lnSpc>
+              <a:spcBef>
+                <a:spcPts val="0"/>
+              </a:spcBef>
+              <a:spcAft>
                 <a:spcPts val="800"/>
               </a:spcAft>
             </a:pPr>
             <a:r>
-              <a:rPr sz="1600" b="0">
+              <a:rPr sz="1500" b="0">
                 <a:solidFill>
                   <a:srgbClr val="1A1A1A"/>
                 </a:solidFill>
                 <a:latin typeface="Golos Text"/>
                 <a:rFonts ascii="Golos Text" hAnsi="Golos Text" cs="Golos Text" eastAsia="Golos Text"/>
               </a:rPr>
-              <a:t>1) Приоритет блокеров этапа 2 с технологом</a:t>
+              <a:t>Приоритет этапа 2 с технологом</a:t>
+            </a:r>
+          </a:p>
+          <a:p>
+            <a:pPr algn="l">
+              <a:lnSpc>
+                <a:spcPct val="118000"/>
+              </a:lnSpc>
+              <a:spcBef>
+                <a:spcPts val="0"/>
+              </a:spcBef>
+              <a:spcAft>
+                <a:spcPts val="200"/>
+              </a:spcAft>
+            </a:pPr>
+            <a:r>
+              <a:rPr sz="1500" b="1">
+                <a:solidFill>
+                  <a:srgbClr val="1A1A1A"/>
+                </a:solidFill>
+                <a:latin typeface="Manrope"/>
+                <a:rFonts ascii="Manrope" hAnsi="Manrope" cs="Manrope" eastAsia="Manrope"/>
+              </a:rPr>
+              <a:t>Сегмент</a:t>
             </a:r>
           </a:p>
           <a:p>
@@ -5824,60 +6376,106 @@
               </a:spcAft>
             </a:pPr>
             <a:r>
-              <a:rPr sz="1600" b="0">
+              <a:rPr sz="1500" b="0">
                 <a:solidFill>
                   <a:srgbClr val="1A1A1A"/>
                 </a:solidFill>
                 <a:latin typeface="Golos Text"/>
                 <a:rFonts ascii="Golos Text" hAnsi="Golos Text" cs="Golos Text" eastAsia="Golos Text"/>
               </a:rPr>
-              <a:t>2) Пилотный сегмент eco / wellness</a:t>
-            </a:r>
-          </a:p>
-          <a:p>
-            <a:pPr algn="l">
-              <a:lnSpc>
-                <a:spcPct val="118000"/>
-              </a:lnSpc>
-              <a:spcBef>
-                <a:spcPts val="0"/>
-              </a:spcBef>
-              <a:spcAft>
-                <a:spcPts val="1400"/>
-              </a:spcAft>
-            </a:pPr>
-            <a:r>
-              <a:rPr sz="1600" b="0">
+              <a:t>Пилот eco / wellness</a:t>
+            </a:r>
+          </a:p>
+          <a:p>
+            <a:pPr algn="l">
+              <a:lnSpc>
+                <a:spcPct val="118000"/>
+              </a:lnSpc>
+              <a:spcBef>
+                <a:spcPts val="0"/>
+              </a:spcBef>
+              <a:spcAft>
+                <a:spcPts val="200"/>
+              </a:spcAft>
+            </a:pPr>
+            <a:r>
+              <a:rPr sz="1500" b="1">
+                <a:solidFill>
+                  <a:srgbClr val="1A1A1A"/>
+                </a:solidFill>
+                <a:latin typeface="Manrope"/>
+                <a:rFonts ascii="Manrope" hAnsi="Manrope" cs="Manrope" eastAsia="Manrope"/>
+              </a:rPr>
+              <a:t>Продажи</a:t>
+            </a:r>
+          </a:p>
+          <a:p>
+            <a:pPr algn="l">
+              <a:lnSpc>
+                <a:spcPct val="118000"/>
+              </a:lnSpc>
+              <a:spcBef>
+                <a:spcPts val="0"/>
+              </a:spcBef>
+              <a:spcAft>
+                <a:spcPts val="800"/>
+              </a:spcAft>
+            </a:pPr>
+            <a:r>
+              <a:rPr sz="1500" b="0">
                 <a:solidFill>
                   <a:srgbClr val="1A1A1A"/>
                 </a:solidFill>
                 <a:latin typeface="Golos Text"/>
                 <a:rFonts ascii="Golos Text" hAnsi="Golos Text" cs="Golos Text" eastAsia="Golos Text"/>
               </a:rPr>
-              <a:t>3) Как вести продажи, чтобы Natural не ушёл в эконом Hotel Line</a:t>
-            </a:r>
-          </a:p>
-          <a:p>
-            <a:pPr algn="l">
-              <a:lnSpc>
-                <a:spcPct val="118000"/>
-              </a:lnSpc>
-              <a:spcBef>
-                <a:spcPts val="0"/>
-              </a:spcBef>
-              <a:spcAft>
-                <a:spcPts val="800"/>
-              </a:spcAft>
-            </a:pPr>
-            <a:r>
-              <a:rPr sz="1600" b="1">
+              <a:t>Как не увести Natural в эконом Hotel Line</a:t>
+            </a:r>
+          </a:p>
+          <a:p>
+            <a:pPr algn="l">
+              <a:lnSpc>
+                <a:spcPct val="118000"/>
+              </a:lnSpc>
+              <a:spcBef>
+                <a:spcPts val="0"/>
+              </a:spcBef>
+              <a:spcAft>
+                <a:spcPts val="200"/>
+              </a:spcAft>
+            </a:pPr>
+            <a:r>
+              <a:rPr sz="1500" b="1">
                 <a:solidFill>
                   <a:srgbClr val="1A1A1A"/>
                 </a:solidFill>
                 <a:latin typeface="Manrope"/>
                 <a:rFonts ascii="Manrope" hAnsi="Manrope" cs="Manrope" eastAsia="Manrope"/>
               </a:rPr>
-              <a:t>Спасибо. Вопросы.</a:t>
+              <a:t>Вопросы</a:t>
+            </a:r>
+          </a:p>
+          <a:p>
+            <a:pPr algn="l">
+              <a:lnSpc>
+                <a:spcPct val="118000"/>
+              </a:lnSpc>
+              <a:spcBef>
+                <a:spcPts val="0"/>
+              </a:spcBef>
+              <a:spcAft>
+                <a:spcPts val="0"/>
+              </a:spcAft>
+            </a:pPr>
+            <a:r>
+              <a:rPr sz="1500" b="0">
+                <a:solidFill>
+                  <a:srgbClr val="1A1A1A"/>
+                </a:solidFill>
+                <a:latin typeface="Golos Text"/>
+                <a:rFonts ascii="Golos Text" hAnsi="Golos Text" cs="Golos Text" eastAsia="Golos Text"/>
+              </a:rPr>
+              <a:t>Спасибо</a:t>
             </a:r>
           </a:p>
         </p:txBody>
@@ -10937,7 +11535,7 @@
         <p:spPr>
           <a:xfrm>
             <a:off x="804672" y="1426464"/>
-            <a:ext cx="10582351" cy="3602736"/>
+            <a:ext cx="10582351" cy="3163824"/>
           </a:xfrm>
           <a:prstGeom prst="rect">
             <a:avLst/>
@@ -10956,18 +11554,18 @@
                 <a:spcPts val="0"/>
               </a:spcBef>
               <a:spcAft>
-                <a:spcPts val="400"/>
-              </a:spcAft>
-            </a:pPr>
-            <a:r>
-              <a:rPr sz="1600" b="1">
+                <a:spcPts val="200"/>
+              </a:spcAft>
+            </a:pPr>
+            <a:r>
+              <a:rPr sz="1500" b="1">
                 <a:solidFill>
                   <a:srgbClr val="1A1A1A"/>
                 </a:solidFill>
                 <a:latin typeface="Manrope"/>
                 <a:rFonts ascii="Manrope" hAnsi="Manrope" cs="Manrope" eastAsia="Manrope"/>
               </a:rPr>
-              <a:t>Задача закупщика</a:t>
+              <a:t>Задача</a:t>
             </a:r>
           </a:p>
           <a:p>
@@ -10990,42 +11588,42 @@
                 <a:latin typeface="Golos Text"/>
                 <a:rFonts ascii="Golos Text" hAnsi="Golos Text" cs="Golos Text" eastAsia="Golos Text"/>
               </a:rPr>
-              <a:t>Отель хочет выглядеть экологичнее — без риска для гостя и без пробелов в документах при проверке.</a:t>
-            </a:r>
-          </a:p>
-          <a:p>
-            <a:pPr algn="l">
-              <a:lnSpc>
-                <a:spcPct val="118000"/>
-              </a:lnSpc>
-              <a:spcBef>
-                <a:spcPts val="0"/>
-              </a:spcBef>
-              <a:spcAft>
-                <a:spcPts val="400"/>
-              </a:spcAft>
-            </a:pPr>
-            <a:r>
-              <a:rPr sz="1600" b="1">
+              <a:t>Отель хочет выглядеть экологичнее — без риска для гостя и без пробелов в документах</a:t>
+            </a:r>
+          </a:p>
+          <a:p>
+            <a:pPr algn="l">
+              <a:lnSpc>
+                <a:spcPct val="118000"/>
+              </a:lnSpc>
+              <a:spcBef>
+                <a:spcPts val="0"/>
+              </a:spcBef>
+              <a:spcAft>
+                <a:spcPts val="200"/>
+              </a:spcAft>
+            </a:pPr>
+            <a:r>
+              <a:rPr sz="1500" b="1">
                 <a:solidFill>
                   <a:srgbClr val="1A1A1A"/>
                 </a:solidFill>
                 <a:latin typeface="Manrope"/>
                 <a:rFonts ascii="Manrope" hAnsi="Manrope" cs="Manrope" eastAsia="Manrope"/>
               </a:rPr>
-              <a:t>Что предлагаем</a:t>
-            </a:r>
-          </a:p>
-          <a:p>
-            <a:pPr algn="l">
-              <a:lnSpc>
-                <a:spcPct val="118000"/>
-              </a:lnSpc>
-              <a:spcBef>
-                <a:spcPts val="0"/>
-              </a:spcBef>
-              <a:spcAft>
-                <a:spcPts val="600"/>
+              <a:t>Предложение</a:t>
+            </a:r>
+          </a:p>
+          <a:p>
+            <a:pPr algn="l">
+              <a:lnSpc>
+                <a:spcPct val="118000"/>
+              </a:lnSpc>
+              <a:spcBef>
+                <a:spcPts val="0"/>
+              </a:spcBef>
+              <a:spcAft>
+                <a:spcPts val="1000"/>
               </a:spcAft>
             </a:pPr>
             <a:r>
@@ -11036,19 +11634,42 @@
                 <a:latin typeface="Golos Text"/>
                 <a:rFonts ascii="Golos Text" hAnsi="Golos Text" cs="Golos Text" eastAsia="Golos Text"/>
               </a:rPr>
-              <a:t>Travel+ Natural — пакет документов как у Hotel Line и Fleur:</a:t>
-            </a:r>
-          </a:p>
-          <a:p>
-            <a:pPr algn="l">
-              <a:lnSpc>
-                <a:spcPct val="118000"/>
-              </a:lnSpc>
-              <a:spcBef>
-                <a:spcPts val="0"/>
-              </a:spcBef>
-              <a:spcAft>
-                <a:spcPts val="600"/>
+              <a:t>Travel+ Natural: пакет как у Hotel Line и Fleur (декларация, INCI, протоколы по запросу)</a:t>
+            </a:r>
+          </a:p>
+          <a:p>
+            <a:pPr algn="l">
+              <a:lnSpc>
+                <a:spcPct val="118000"/>
+              </a:lnSpc>
+              <a:spcBef>
+                <a:spcPts val="0"/>
+              </a:spcBef>
+              <a:spcAft>
+                <a:spcPts val="200"/>
+              </a:spcAft>
+            </a:pPr>
+            <a:r>
+              <a:rPr sz="1500" b="1">
+                <a:solidFill>
+                  <a:srgbClr val="1A1A1A"/>
+                </a:solidFill>
+                <a:latin typeface="Manrope"/>
+                <a:rFonts ascii="Manrope" hAnsi="Manrope" cs="Manrope" eastAsia="Manrope"/>
+              </a:rPr>
+              <a:t>На номер</a:t>
+            </a:r>
+          </a:p>
+          <a:p>
+            <a:pPr algn="l">
+              <a:lnSpc>
+                <a:spcPct val="118000"/>
+              </a:lnSpc>
+              <a:spcBef>
+                <a:spcPts val="0"/>
+              </a:spcBef>
+              <a:spcAft>
+                <a:spcPts val="800"/>
               </a:spcAft>
             </a:pPr>
             <a:r>
@@ -11059,19 +11680,42 @@
                 <a:latin typeface="Golos Text"/>
                 <a:rFonts ascii="Golos Text" hAnsi="Golos Text" cs="Golos Text" eastAsia="Golos Text"/>
               </a:rPr>
-              <a:t>декларация или СГР, INCI, протоколы по запросу.</a:t>
-            </a:r>
-          </a:p>
-          <a:p>
-            <a:pPr algn="l">
-              <a:lnSpc>
-                <a:spcPct val="118000"/>
-              </a:lnSpc>
-              <a:spcBef>
-                <a:spcPts val="0"/>
-              </a:spcBef>
-              <a:spcAft>
-                <a:spcPts val="1000"/>
+              <a:t>Состав с блоком «простыми словами», один договор на весь номер</a:t>
+            </a:r>
+          </a:p>
+          <a:p>
+            <a:pPr algn="l">
+              <a:lnSpc>
+                <a:spcPct val="118000"/>
+              </a:lnSpc>
+              <a:spcBef>
+                <a:spcPts val="0"/>
+              </a:spcBef>
+              <a:spcAft>
+                <a:spcPts val="200"/>
+              </a:spcAft>
+            </a:pPr>
+            <a:r>
+              <a:rPr sz="1500" b="1">
+                <a:solidFill>
+                  <a:srgbClr val="1A1A1A"/>
+                </a:solidFill>
+                <a:latin typeface="Manrope"/>
+                <a:rFonts ascii="Manrope" hAnsi="Manrope" cs="Manrope" eastAsia="Manrope"/>
+              </a:rPr>
+              <a:t>Шаг 1</a:t>
+            </a:r>
+          </a:p>
+          <a:p>
+            <a:pPr algn="l">
+              <a:lnSpc>
+                <a:spcPct val="118000"/>
+              </a:lnSpc>
+              <a:spcBef>
+                <a:spcPts val="0"/>
+              </a:spcBef>
+              <a:spcAft>
+                <a:spcPts val="800"/>
               </a:spcAft>
             </a:pPr>
             <a:r>
@@ -11082,42 +11726,42 @@
                 <a:latin typeface="Golos Text"/>
                 <a:rFonts ascii="Golos Text" hAnsi="Golos Text" cs="Golos Text" eastAsia="Golos Text"/>
               </a:rPr>
-              <a:t>Состав с блоком «простыми словами». Один договор на весь номер.</a:t>
-            </a:r>
-          </a:p>
-          <a:p>
-            <a:pPr algn="l">
-              <a:lnSpc>
-                <a:spcPct val="118000"/>
-              </a:lnSpc>
-              <a:spcBef>
-                <a:spcPts val="0"/>
-              </a:spcBef>
-              <a:spcAft>
-                <a:spcPts val="400"/>
-              </a:spcAft>
-            </a:pPr>
-            <a:r>
-              <a:rPr sz="1600" b="1">
+              <a:t>Сегмент eco / wellness и объект</a:t>
+            </a:r>
+          </a:p>
+          <a:p>
+            <a:pPr algn="l">
+              <a:lnSpc>
+                <a:spcPct val="118000"/>
+              </a:lnSpc>
+              <a:spcBef>
+                <a:spcPts val="0"/>
+              </a:spcBef>
+              <a:spcAft>
+                <a:spcPts val="200"/>
+              </a:spcAft>
+            </a:pPr>
+            <a:r>
+              <a:rPr sz="1500" b="1">
                 <a:solidFill>
                   <a:srgbClr val="1A1A1A"/>
                 </a:solidFill>
                 <a:latin typeface="Manrope"/>
                 <a:rFonts ascii="Manrope" hAnsi="Manrope" cs="Manrope" eastAsia="Manrope"/>
               </a:rPr>
-              <a:t>Три шага</a:t>
-            </a:r>
-          </a:p>
-          <a:p>
-            <a:pPr algn="l">
-              <a:lnSpc>
-                <a:spcPct val="118000"/>
-              </a:lnSpc>
-              <a:spcBef>
-                <a:spcPts val="0"/>
-              </a:spcBef>
-              <a:spcAft>
-                <a:spcPts val="600"/>
+              <a:t>Шаг 2</a:t>
+            </a:r>
+          </a:p>
+          <a:p>
+            <a:pPr algn="l">
+              <a:lnSpc>
+                <a:spcPct val="118000"/>
+              </a:lnSpc>
+              <a:spcBef>
+                <a:spcPts val="0"/>
+              </a:spcBef>
+              <a:spcAft>
+                <a:spcPts val="800"/>
               </a:spcAft>
             </a:pPr>
             <a:r>
@@ -11128,19 +11772,42 @@
                 <a:latin typeface="Golos Text"/>
                 <a:rFonts ascii="Golos Text" hAnsi="Golos Text" cs="Golos Text" eastAsia="Golos Text"/>
               </a:rPr>
-              <a:t>1. Сегмент eco / wellness и объект</a:t>
-            </a:r>
-          </a:p>
-          <a:p>
-            <a:pPr algn="l">
-              <a:lnSpc>
-                <a:spcPct val="118000"/>
-              </a:lnSpc>
-              <a:spcBef>
-                <a:spcPts val="0"/>
-              </a:spcBef>
-              <a:spcAft>
-                <a:spcPts val="600"/>
+              <a:t>Образец с этикеткой и документами</a:t>
+            </a:r>
+          </a:p>
+          <a:p>
+            <a:pPr algn="l">
+              <a:lnSpc>
+                <a:spcPct val="118000"/>
+              </a:lnSpc>
+              <a:spcBef>
+                <a:spcPts val="0"/>
+              </a:spcBef>
+              <a:spcAft>
+                <a:spcPts val="200"/>
+              </a:spcAft>
+            </a:pPr>
+            <a:r>
+              <a:rPr sz="1500" b="1">
+                <a:solidFill>
+                  <a:srgbClr val="1A1A1A"/>
+                </a:solidFill>
+                <a:latin typeface="Manrope"/>
+                <a:rFonts ascii="Manrope" hAnsi="Manrope" cs="Manrope" eastAsia="Manrope"/>
+              </a:rPr>
+              <a:t>Шаг 3</a:t>
+            </a:r>
+          </a:p>
+          <a:p>
+            <a:pPr algn="l">
+              <a:lnSpc>
+                <a:spcPct val="118000"/>
+              </a:lnSpc>
+              <a:spcBef>
+                <a:spcPts val="0"/>
+              </a:spcBef>
+              <a:spcAft>
+                <a:spcPts val="0"/>
               </a:spcAft>
             </a:pPr>
             <a:r>
@@ -11151,30 +11818,7 @@
                 <a:latin typeface="Golos Text"/>
                 <a:rFonts ascii="Golos Text" hAnsi="Golos Text" cs="Golos Text" eastAsia="Golos Text"/>
               </a:rPr>
-              <a:t>2. Образец с этикеткой и документами</a:t>
-            </a:r>
-          </a:p>
-          <a:p>
-            <a:pPr algn="l">
-              <a:lnSpc>
-                <a:spcPct val="118000"/>
-              </a:lnSpc>
-              <a:spcBef>
-                <a:spcPts val="0"/>
-              </a:spcBef>
-              <a:spcAft>
-                <a:spcPts val="600"/>
-              </a:spcAft>
-            </a:pPr>
-            <a:r>
-              <a:rPr sz="1500" b="0">
-                <a:solidFill>
-                  <a:srgbClr val="1A1A1A"/>
-                </a:solidFill>
-                <a:latin typeface="Golos Text"/>
-                <a:rFonts ascii="Golos Text" hAnsi="Golos Text" cs="Golos Text" eastAsia="Golos Text"/>
-              </a:rPr>
-              <a:t>3. Пилот на этаже или в корпусе</a:t>
+              <a:t>Пилот на этаже или в корпусе</a:t>
             </a:r>
           </a:p>
         </p:txBody>
@@ -11187,8 +11831,8 @@
         </p:nvSpPr>
         <p:spPr>
           <a:xfrm>
-            <a:off x="804672" y="5468112"/>
-            <a:ext cx="10582351" cy="502920"/>
+            <a:off x="804672" y="4590288"/>
+            <a:ext cx="10582351" cy="438912"/>
           </a:xfrm>
           <a:prstGeom prst="rect">
             <a:avLst/>
@@ -11211,7 +11855,7 @@
               </a:spcAft>
             </a:pPr>
             <a:r>
-              <a:rPr sz="1400" b="0">
+              <a:rPr sz="1200" b="0">
                 <a:solidFill>
                   <a:srgbClr val="5C5C5C"/>
                 </a:solidFill>
@@ -11773,7 +12417,7 @@
                 <a:spcPts val="0"/>
               </a:spcBef>
               <a:spcAft>
-                <a:spcPts val="1000"/>
+                <a:spcPts val="800"/>
               </a:spcAft>
             </a:pPr>
             <a:r>
@@ -11784,7 +12428,7 @@
                 <a:latin typeface="Golos Text"/>
                 <a:rFonts ascii="Golos Text" hAnsi="Golos Text" cs="Golos Text" eastAsia="Golos Text"/>
               </a:rPr>
-              <a:t>Знака нет — Natural в это коммерческое предложение не ставим. Предлагаем Hotel Line или отказ.</a:t>
+              <a:t>Знака нет — Natural в КП не ставим. Hotel Line или отказ.</a:t>
             </a:r>
           </a:p>
           <a:p>
@@ -11819,7 +12463,7 @@
                 <a:spcPts val="0"/>
               </a:spcBef>
               <a:spcAft>
-                <a:spcPts val="1000"/>
+                <a:spcPts val="800"/>
               </a:spcAft>
             </a:pPr>
             <a:r>
@@ -11830,7 +12474,7 @@
                 <a:latin typeface="Golos Text"/>
                 <a:rFonts ascii="Golos Text" hAnsi="Golos Text" cs="Golos Text" eastAsia="Golos Text"/>
               </a:rPr>
-              <a:t>Нет. Другая себестоимость и другая позиция на полке.</a:t>
+              <a:t>Нет. Другая себестоимость и позиция на полке.</a:t>
             </a:r>
           </a:p>
           <a:p>
@@ -11911,7 +12555,7 @@
                 <a:spcPts val="0"/>
               </a:spcBef>
               <a:spcAft>
-                <a:spcPts val="600"/>
+                <a:spcPts val="0"/>
               </a:spcAft>
             </a:pPr>
             <a:r>
@@ -11922,7 +12566,7 @@
                 <a:latin typeface="Golos Text"/>
                 <a:rFonts ascii="Golos Text" hAnsi="Golos Text" cs="Golos Text" eastAsia="Golos Text"/>
               </a:rPr>
-              <a:t>Только зафиксированное происхождение. Без догадок и «скорее всего».</a:t>
+              <a:t>Только зафиксированное происхождение. Без догадок.</a:t>
             </a:r>
           </a:p>
         </p:txBody>
@@ -11978,7 +12622,30 @@
                 <a:spcPts val="0"/>
               </a:spcBef>
               <a:spcAft>
-                <a:spcPts val="600"/>
+                <a:spcPts val="200"/>
+              </a:spcAft>
+            </a:pPr>
+            <a:r>
+              <a:rPr sz="1500" b="1">
+                <a:solidFill>
+                  <a:srgbClr val="1A1A1A"/>
+                </a:solidFill>
+                <a:latin typeface="Manrope"/>
+                <a:rFonts ascii="Manrope" hAnsi="Manrope" cs="Manrope" eastAsia="Manrope"/>
+              </a:rPr>
+              <a:t>Реестр рисков</a:t>
+            </a:r>
+          </a:p>
+          <a:p>
+            <a:pPr algn="l">
+              <a:lnSpc>
+                <a:spcPct val="118000"/>
+              </a:lnSpc>
+              <a:spcBef>
+                <a:spcPts val="0"/>
+              </a:spcBef>
+              <a:spcAft>
+                <a:spcPts val="1000"/>
               </a:spcAft>
             </a:pPr>
             <a:r>
@@ -11989,7 +12656,30 @@
                 <a:latin typeface="Golos Text"/>
                 <a:rFonts ascii="Golos Text" hAnsi="Golos Text" cs="Golos Text" eastAsia="Golos Text"/>
               </a:rPr>
-              <a:t>Реестр рисков — один лист в пульте (14 пунктов).</a:t>
+              <a:t>Один лист в пульте — 14 пунктов</a:t>
+            </a:r>
+          </a:p>
+          <a:p>
+            <a:pPr algn="l">
+              <a:lnSpc>
+                <a:spcPct val="118000"/>
+              </a:lnSpc>
+              <a:spcBef>
+                <a:spcPts val="0"/>
+              </a:spcBef>
+              <a:spcAft>
+                <a:spcPts val="200"/>
+              </a:spcAft>
+            </a:pPr>
+            <a:r>
+              <a:rPr sz="1500" b="1">
+                <a:solidFill>
+                  <a:srgbClr val="1A1A1A"/>
+                </a:solidFill>
+                <a:latin typeface="Manrope"/>
+                <a:rFonts ascii="Manrope" hAnsi="Manrope" cs="Manrope" eastAsia="Manrope"/>
+              </a:rPr>
+              <a:t>Сегмент</a:t>
             </a:r>
           </a:p>
           <a:p>
@@ -12012,19 +12702,19 @@
                 <a:latin typeface="Golos Text"/>
                 <a:rFonts ascii="Golos Text" hAnsi="Golos Text" cs="Golos Text" eastAsia="Golos Text"/>
               </a:rPr>
-              <a:t>Сегмент не размываем: Natural не уходит в эконом-запрос.</a:t>
-            </a:r>
-          </a:p>
-          <a:p>
-            <a:pPr algn="l">
-              <a:lnSpc>
-                <a:spcPct val="118000"/>
-              </a:lnSpc>
-              <a:spcBef>
-                <a:spcPts val="0"/>
-              </a:spcBef>
-              <a:spcAft>
-                <a:spcPts val="800"/>
+              <a:t>Не размываем: Natural не уходит в эконом-запрос</a:t>
+            </a:r>
+          </a:p>
+          <a:p>
+            <a:pPr algn="l">
+              <a:lnSpc>
+                <a:spcPct val="118000"/>
+              </a:lnSpc>
+              <a:spcBef>
+                <a:spcPts val="0"/>
+              </a:spcBef>
+              <a:spcAft>
+                <a:spcPts val="200"/>
               </a:spcAft>
             </a:pPr>
             <a:r>
@@ -12035,30 +12725,30 @@
                 <a:latin typeface="Manrope"/>
                 <a:rFonts ascii="Manrope" hAnsi="Manrope" cs="Manrope" eastAsia="Manrope"/>
               </a:rPr>
-              <a:t>Не продаём Natural вместо Hotel Line по цене базовой линейки.</a:t>
-            </a:r>
-          </a:p>
-          <a:p>
-            <a:pPr algn="l">
-              <a:lnSpc>
-                <a:spcPct val="118000"/>
-              </a:lnSpc>
-              <a:spcBef>
-                <a:spcPts val="1800"/>
-              </a:spcBef>
-              <a:spcAft>
-                <a:spcPts val="0"/>
-              </a:spcAft>
-            </a:pPr>
-            <a:r>
-              <a:rPr sz="1200" b="0">
-                <a:solidFill>
-                  <a:srgbClr val="5C5C5C"/>
+              <a:t>Цена</a:t>
+            </a:r>
+          </a:p>
+          <a:p>
+            <a:pPr algn="l">
+              <a:lnSpc>
+                <a:spcPct val="118000"/>
+              </a:lnSpc>
+              <a:spcBef>
+                <a:spcPts val="0"/>
+              </a:spcBef>
+              <a:spcAft>
+                <a:spcPts val="0"/>
+              </a:spcAft>
+            </a:pPr>
+            <a:r>
+              <a:rPr sz="1500" b="0">
+                <a:solidFill>
+                  <a:srgbClr val="1A1A1A"/>
                 </a:solidFill>
                 <a:latin typeface="Golos Text"/>
                 <a:rFonts ascii="Golos Text" hAnsi="Golos Text" cs="Golos Text" eastAsia="Golos Text"/>
               </a:rPr>
-              <a:t>Цифры сценария — учебный пример, не отчёт завода.</a:t>
+              <a:t>Не продаём Natural вместо Hotel Line по цене базовой линейки</a:t>
             </a:r>
           </a:p>
         </p:txBody>
@@ -12578,19 +13268,42 @@
                 <a:latin typeface="Manrope"/>
                 <a:rFonts ascii="Manrope" hAnsi="Manrope" cs="Manrope" eastAsia="Manrope"/>
               </a:rPr>
-              <a:t>Успех (учебный порог)</a:t>
-            </a:r>
-          </a:p>
-          <a:p>
-            <a:pPr algn="l">
-              <a:lnSpc>
-                <a:spcPct val="118000"/>
-              </a:lnSpc>
-              <a:spcBef>
-                <a:spcPts val="0"/>
-              </a:spcBef>
-              <a:spcAft>
-                <a:spcPts val="600"/>
+              <a:t>Успех</a:t>
+            </a:r>
+          </a:p>
+          <a:p>
+            <a:pPr algn="l">
+              <a:lnSpc>
+                <a:spcPct val="118000"/>
+              </a:lnSpc>
+              <a:spcBef>
+                <a:spcPts val="0"/>
+              </a:spcBef>
+              <a:spcAft>
+                <a:spcPts val="200"/>
+              </a:spcAft>
+            </a:pPr>
+            <a:r>
+              <a:rPr sz="1500" b="1">
+                <a:solidFill>
+                  <a:srgbClr val="1A1A1A"/>
+                </a:solidFill>
+                <a:latin typeface="Manrope"/>
+                <a:rFonts ascii="Manrope" hAnsi="Manrope" cs="Manrope" eastAsia="Manrope"/>
+              </a:rPr>
+              <a:t>Клиенты</a:t>
+            </a:r>
+          </a:p>
+          <a:p>
+            <a:pPr algn="l">
+              <a:lnSpc>
+                <a:spcPct val="118000"/>
+              </a:lnSpc>
+              <a:spcBef>
+                <a:spcPts val="0"/>
+              </a:spcBef>
+              <a:spcAft>
+                <a:spcPts val="800"/>
               </a:spcAft>
             </a:pPr>
             <a:r>
@@ -12601,19 +13314,42 @@
                 <a:latin typeface="Golos Text"/>
                 <a:rFonts ascii="Golos Text" hAnsi="Golos Text" cs="Golos Text" eastAsia="Golos Text"/>
               </a:rPr>
-              <a:t>• Три пилотных клиента</a:t>
-            </a:r>
-          </a:p>
-          <a:p>
-            <a:pPr algn="l">
-              <a:lnSpc>
-                <a:spcPct val="118000"/>
-              </a:lnSpc>
-              <a:spcBef>
-                <a:spcPts val="0"/>
-              </a:spcBef>
-              <a:spcAft>
-                <a:spcPts val="600"/>
+              <a:t>Три пилотных объекта</a:t>
+            </a:r>
+          </a:p>
+          <a:p>
+            <a:pPr algn="l">
+              <a:lnSpc>
+                <a:spcPct val="118000"/>
+              </a:lnSpc>
+              <a:spcBef>
+                <a:spcPts val="0"/>
+              </a:spcBef>
+              <a:spcAft>
+                <a:spcPts val="200"/>
+              </a:spcAft>
+            </a:pPr>
+            <a:r>
+              <a:rPr sz="1500" b="1">
+                <a:solidFill>
+                  <a:srgbClr val="1A1A1A"/>
+                </a:solidFill>
+                <a:latin typeface="Manrope"/>
+                <a:rFonts ascii="Manrope" hAnsi="Manrope" cs="Manrope" eastAsia="Manrope"/>
+              </a:rPr>
+              <a:t>Повтор</a:t>
+            </a:r>
+          </a:p>
+          <a:p>
+            <a:pPr algn="l">
+              <a:lnSpc>
+                <a:spcPct val="118000"/>
+              </a:lnSpc>
+              <a:spcBef>
+                <a:spcPts val="0"/>
+              </a:spcBef>
+              <a:spcAft>
+                <a:spcPts val="800"/>
               </a:spcAft>
             </a:pPr>
             <a:r>
@@ -12624,19 +13360,42 @@
                 <a:latin typeface="Golos Text"/>
                 <a:rFonts ascii="Golos Text" hAnsi="Golos Text" cs="Golos Text" eastAsia="Golos Text"/>
               </a:rPr>
-              <a:t>• Повторный заказ минимум у двух из трёх</a:t>
-            </a:r>
-          </a:p>
-          <a:p>
-            <a:pPr algn="l">
-              <a:lnSpc>
-                <a:spcPct val="118000"/>
-              </a:lnSpc>
-              <a:spcBef>
-                <a:spcPts val="0"/>
-              </a:spcBef>
-              <a:spcAft>
-                <a:spcPts val="600"/>
+              <a:t>Заказ повторяют минимум два из трёх</a:t>
+            </a:r>
+          </a:p>
+          <a:p>
+            <a:pPr algn="l">
+              <a:lnSpc>
+                <a:spcPct val="118000"/>
+              </a:lnSpc>
+              <a:spcBef>
+                <a:spcPts val="0"/>
+              </a:spcBef>
+              <a:spcAft>
+                <a:spcPts val="200"/>
+              </a:spcAft>
+            </a:pPr>
+            <a:r>
+              <a:rPr sz="1500" b="1">
+                <a:solidFill>
+                  <a:srgbClr val="1A1A1A"/>
+                </a:solidFill>
+                <a:latin typeface="Manrope"/>
+                <a:rFonts ascii="Manrope" hAnsi="Manrope" cs="Manrope" eastAsia="Manrope"/>
+              </a:rPr>
+              <a:t>Опрос</a:t>
+            </a:r>
+          </a:p>
+          <a:p>
+            <a:pPr algn="l">
+              <a:lnSpc>
+                <a:spcPct val="118000"/>
+              </a:lnSpc>
+              <a:spcBef>
+                <a:spcPts val="0"/>
+              </a:spcBef>
+              <a:spcAft>
+                <a:spcPts val="800"/>
               </a:spcAft>
             </a:pPr>
             <a:r>
@@ -12647,19 +13406,19 @@
                 <a:latin typeface="Golos Text"/>
                 <a:rFonts ascii="Golos Text" hAnsi="Golos Text" cs="Golos Text" eastAsia="Golos Text"/>
               </a:rPr>
-              <a:t>• Мягкость и ощущение натуральности — не ниже 70% в опросе</a:t>
-            </a:r>
-          </a:p>
-          <a:p>
-            <a:pPr algn="l">
-              <a:lnSpc>
-                <a:spcPct val="118000"/>
-              </a:lnSpc>
-              <a:spcBef>
-                <a:spcPts val="0"/>
-              </a:spcBef>
-              <a:spcAft>
-                <a:spcPts val="800"/>
+              <a:t>Мягкость и ощущение натуральности — не ниже 70%</a:t>
+            </a:r>
+          </a:p>
+          <a:p>
+            <a:pPr algn="l">
+              <a:lnSpc>
+                <a:spcPct val="118000"/>
+              </a:lnSpc>
+              <a:spcBef>
+                <a:spcPts val="0"/>
+              </a:spcBef>
+              <a:spcAft>
+                <a:spcPts val="200"/>
               </a:spcAft>
             </a:pPr>
             <a:r>
@@ -12670,29 +13429,52 @@
                 <a:latin typeface="Manrope"/>
                 <a:rFonts ascii="Manrope" hAnsi="Manrope" cs="Manrope" eastAsia="Manrope"/>
               </a:rPr>
-              <a:t>• Natural не ушёл в эконом Hotel Line</a:t>
-            </a:r>
-          </a:p>
-          <a:p>
-            <a:pPr algn="l">
-              <a:lnSpc>
-                <a:spcPct val="118000"/>
-              </a:lnSpc>
-              <a:spcBef>
-                <a:spcPts val="1800"/>
-              </a:spcBef>
-              <a:spcAft>
-                <a:spcPts val="0"/>
-              </a:spcAft>
-            </a:pPr>
-            <a:r>
-              <a:rPr sz="1200" b="0">
-                <a:solidFill>
-                  <a:srgbClr val="5C5C5C"/>
+              <a:t>Цена</a:t>
+            </a:r>
+          </a:p>
+          <a:p>
+            <a:pPr algn="l">
+              <a:lnSpc>
+                <a:spcPct val="118000"/>
+              </a:lnSpc>
+              <a:spcBef>
+                <a:spcPts val="0"/>
+              </a:spcBef>
+              <a:spcAft>
+                <a:spcPts val="800"/>
+              </a:spcAft>
+            </a:pPr>
+            <a:r>
+              <a:rPr sz="1500" b="0">
+                <a:solidFill>
+                  <a:srgbClr val="1A1A1A"/>
                 </a:solidFill>
                 <a:latin typeface="Golos Text"/>
                 <a:rFonts ascii="Golos Text" hAnsi="Golos Text" cs="Golos Text" eastAsia="Golos Text"/>
               </a:rPr>
+              <a:t>Natural не ушёл в эконом Hotel Line</a:t>
+            </a:r>
+          </a:p>
+          <a:p>
+            <a:pPr algn="l">
+              <a:lnSpc>
+                <a:spcPct val="118000"/>
+              </a:lnSpc>
+              <a:spcBef>
+                <a:spcPts val="1800"/>
+              </a:spcBef>
+              <a:spcAft>
+                <a:spcPts val="0"/>
+              </a:spcAft>
+            </a:pPr>
+            <a:r>
+              <a:rPr sz="1200" b="0">
+                <a:solidFill>
+                  <a:srgbClr val="5C5C5C"/>
+                </a:solidFill>
+                <a:latin typeface="Golos Text"/>
+                <a:rFonts ascii="Golos Text" hAnsi="Golos Text" cs="Golos Text" eastAsia="Golos Text"/>
+              </a:rPr>
               <a:t>Цифры сценария — учебный пример, не отчёт завода.</a:t>
             </a:r>
           </a:p>
@@ -12749,7 +13531,30 @@
                 <a:spcPts val="0"/>
               </a:spcBef>
               <a:spcAft>
-                <a:spcPts val="600"/>
+                <a:spcPts val="200"/>
+              </a:spcAft>
+            </a:pPr>
+            <a:r>
+              <a:rPr sz="1500" b="1">
+                <a:solidFill>
+                  <a:srgbClr val="1A1A1A"/>
+                </a:solidFill>
+                <a:latin typeface="Manrope"/>
+                <a:rFonts ascii="Manrope" hAnsi="Manrope" cs="Manrope" eastAsia="Manrope"/>
+              </a:rPr>
+              <a:t>Провал</a:t>
+            </a:r>
+          </a:p>
+          <a:p>
+            <a:pPr algn="l">
+              <a:lnSpc>
+                <a:spcPct val="118000"/>
+              </a:lnSpc>
+              <a:spcBef>
+                <a:spcPts val="0"/>
+              </a:spcBef>
+              <a:spcAft>
+                <a:spcPts val="800"/>
               </a:spcAft>
             </a:pPr>
             <a:r>
@@ -12760,19 +13565,19 @@
                 <a:latin typeface="Golos Text"/>
                 <a:rFonts ascii="Golos Text" hAnsi="Golos Text" cs="Golos Text" eastAsia="Golos Text"/>
               </a:rPr>
-              <a:t>Повторный заказ меньше чем у двух из трёх — или метрики ниже 60%.</a:t>
-            </a:r>
-          </a:p>
-          <a:p>
-            <a:pPr algn="l">
-              <a:lnSpc>
-                <a:spcPct val="118000"/>
-              </a:lnSpc>
-              <a:spcBef>
-                <a:spcPts val="0"/>
-              </a:spcBef>
-              <a:spcAft>
-                <a:spcPts val="800"/>
+              <a:t>Повтор у меньше двух из трёх — или метрики ниже 60%</a:t>
+            </a:r>
+          </a:p>
+          <a:p>
+            <a:pPr algn="l">
+              <a:lnSpc>
+                <a:spcPct val="118000"/>
+              </a:lnSpc>
+              <a:spcBef>
+                <a:spcPts val="0"/>
+              </a:spcBef>
+              <a:spcAft>
+                <a:spcPts val="200"/>
               </a:spcAft>
             </a:pPr>
             <a:r>
@@ -12783,19 +13588,19 @@
                 <a:latin typeface="Manrope"/>
                 <a:rFonts ascii="Manrope" hAnsi="Manrope" cs="Manrope" eastAsia="Manrope"/>
               </a:rPr>
-              <a:t>→ Останавливаем масштабирование</a:t>
-            </a:r>
-          </a:p>
-          <a:p>
-            <a:pPr algn="l">
-              <a:lnSpc>
-                <a:spcPct val="118000"/>
-              </a:lnSpc>
-              <a:spcBef>
-                <a:spcPts val="0"/>
-              </a:spcBef>
-              <a:spcAft>
-                <a:spcPts val="600"/>
+              <a:t>Действие</a:t>
+            </a:r>
+          </a:p>
+          <a:p>
+            <a:pPr algn="l">
+              <a:lnSpc>
+                <a:spcPct val="118000"/>
+              </a:lnSpc>
+              <a:spcBef>
+                <a:spcPts val="0"/>
+              </a:spcBef>
+              <a:spcAft>
+                <a:spcPts val="800"/>
               </a:spcAft>
             </a:pPr>
             <a:r>
@@ -12806,19 +13611,42 @@
                 <a:latin typeface="Golos Text"/>
                 <a:rFonts ascii="Golos Text" hAnsi="Golos Text" cs="Golos Text" eastAsia="Golos Text"/>
               </a:rPr>
-              <a:t>Диагноз бренд-менеджера — в течение двух недель.</a:t>
-            </a:r>
-          </a:p>
-          <a:p>
-            <a:pPr algn="l">
-              <a:lnSpc>
-                <a:spcPct val="118000"/>
-              </a:lnSpc>
-              <a:spcBef>
-                <a:spcPts val="0"/>
-              </a:spcBef>
-              <a:spcAft>
-                <a:spcPts val="600"/>
+              <a:t>Останавливаем масштабирование</a:t>
+            </a:r>
+          </a:p>
+          <a:p>
+            <a:pPr algn="l">
+              <a:lnSpc>
+                <a:spcPct val="118000"/>
+              </a:lnSpc>
+              <a:spcBef>
+                <a:spcPts val="0"/>
+              </a:spcBef>
+              <a:spcAft>
+                <a:spcPts val="200"/>
+              </a:spcAft>
+            </a:pPr>
+            <a:r>
+              <a:rPr sz="1500" b="1">
+                <a:solidFill>
+                  <a:srgbClr val="1A1A1A"/>
+                </a:solidFill>
+                <a:latin typeface="Manrope"/>
+                <a:rFonts ascii="Manrope" hAnsi="Manrope" cs="Manrope" eastAsia="Manrope"/>
+              </a:rPr>
+              <a:t>Диагноз</a:t>
+            </a:r>
+          </a:p>
+          <a:p>
+            <a:pPr algn="l">
+              <a:lnSpc>
+                <a:spcPct val="118000"/>
+              </a:lnSpc>
+              <a:spcBef>
+                <a:spcPts val="0"/>
+              </a:spcBef>
+              <a:spcAft>
+                <a:spcPts val="800"/>
               </a:spcAft>
             </a:pPr>
             <a:r>
@@ -12829,19 +13657,19 @@
                 <a:latin typeface="Golos Text"/>
                 <a:rFonts ascii="Golos Text" hAnsi="Golos Text" cs="Golos Text" eastAsia="Golos Text"/>
               </a:rPr>
-              <a:t>Второй пилотный круг снова провален.</a:t>
-            </a:r>
-          </a:p>
-          <a:p>
-            <a:pPr algn="l">
-              <a:lnSpc>
-                <a:spcPct val="118000"/>
-              </a:lnSpc>
-              <a:spcBef>
-                <a:spcPts val="0"/>
-              </a:spcBef>
-              <a:spcAft>
-                <a:spcPts val="800"/>
+              <a:t>Бренд-менеджер — в течение двух недель</a:t>
+            </a:r>
+          </a:p>
+          <a:p>
+            <a:pPr algn="l">
+              <a:lnSpc>
+                <a:spcPct val="118000"/>
+              </a:lnSpc>
+              <a:spcBef>
+                <a:spcPts val="0"/>
+              </a:spcBef>
+              <a:spcAft>
+                <a:spcPts val="200"/>
               </a:spcAft>
             </a:pPr>
             <a:r>
@@ -12852,7 +13680,30 @@
                 <a:latin typeface="Manrope"/>
                 <a:rFonts ascii="Manrope" hAnsi="Manrope" cs="Manrope" eastAsia="Manrope"/>
               </a:rPr>
-              <a:t>→ Закрываем линейку</a:t>
+              <a:t>Второй круг</a:t>
+            </a:r>
+          </a:p>
+          <a:p>
+            <a:pPr algn="l">
+              <a:lnSpc>
+                <a:spcPct val="118000"/>
+              </a:lnSpc>
+              <a:spcBef>
+                <a:spcPts val="0"/>
+              </a:spcBef>
+              <a:spcAft>
+                <a:spcPts val="800"/>
+              </a:spcAft>
+            </a:pPr>
+            <a:r>
+              <a:rPr sz="1500" b="0">
+                <a:solidFill>
+                  <a:srgbClr val="1A1A1A"/>
+                </a:solidFill>
+                <a:latin typeface="Golos Text"/>
+                <a:rFonts ascii="Golos Text" hAnsi="Golos Text" cs="Golos Text" eastAsia="Golos Text"/>
+              </a:rPr>
+              <a:t>Снова провал → закрываем линейку</a:t>
             </a:r>
           </a:p>
           <a:p>

--- a/АК/presentation-travelplus-interview.pptx
+++ b/АК/presentation-travelplus-interview.pptx
@@ -4658,7 +4658,7 @@
                 <a:latin typeface="Manrope"/>
                 <a:rFonts ascii="Manrope" hAnsi="Manrope" cs="Manrope" eastAsia="Manrope"/>
               </a:rPr>
-              <a:t>Что уже есть в пульте</a:t>
+              <a:t>Себестоимость: как считаю</a:t>
             </a:r>
           </a:p>
         </p:txBody>
@@ -5039,7 +5039,7 @@
                 <a:latin typeface="Manrope"/>
                 <a:rFonts ascii="Manrope" hAnsi="Manrope" cs="Manrope" eastAsia="Manrope"/>
               </a:rPr>
-              <a:t>Содержание v1.14</a:t>
+              <a:t>Цена на складе</a:t>
             </a:r>
           </a:p>
           <a:p>
@@ -5062,7 +5062,7 @@
                 <a:latin typeface="Manrope"/>
                 <a:rFonts ascii="Manrope" hAnsi="Manrope" cs="Manrope" eastAsia="Manrope"/>
               </a:rPr>
-              <a:t>Этапы 0–2</a:t>
+              <a:t>FOB</a:t>
             </a:r>
           </a:p>
           <a:p>
@@ -5085,7 +5085,7 @@
                 <a:latin typeface="Golos Text"/>
                 <a:rFonts ascii="Golos Text" hAnsi="Golos Text" cs="Golos Text" eastAsia="Golos Text"/>
               </a:rPr>
-              <a:t>Разведка, правила, границы продукта</a:t>
+              <a:t>База сравнения заводов — отдельно от логистики</a:t>
             </a:r>
           </a:p>
           <a:p>
@@ -5108,7 +5108,7 @@
                 <a:latin typeface="Manrope"/>
                 <a:rFonts ascii="Manrope" hAnsi="Manrope" cs="Manrope" eastAsia="Manrope"/>
               </a:rPr>
-              <a:t>Этапы 3–6</a:t>
+              <a:t>Доставка</a:t>
             </a:r>
           </a:p>
           <a:p>
@@ -5131,7 +5131,7 @@
                 <a:latin typeface="Golos Text"/>
                 <a:rFonts ascii="Golos Text" hAnsi="Golos Text" cs="Golos Text" eastAsia="Golos Text"/>
               </a:rPr>
-              <a:t>Сценарий «как вести дело»</a:t>
+              <a:t>Фрахт, экспедитор, довоз до Кириши</a:t>
             </a:r>
           </a:p>
           <a:p>
@@ -5154,7 +5154,7 @@
                 <a:latin typeface="Manrope"/>
                 <a:rFonts ascii="Manrope" hAnsi="Manrope" cs="Manrope" eastAsia="Manrope"/>
               </a:rPr>
-              <a:t>Инструменты</a:t>
+              <a:t>Таможня</a:t>
             </a:r>
           </a:p>
           <a:p>
@@ -5177,7 +5177,7 @@
                 <a:latin typeface="Golos Text"/>
                 <a:rFonts ascii="Golos Text" hAnsi="Golos Text" cs="Golos Text" eastAsia="Golos Text"/>
               </a:rPr>
-              <a:t>StoryBrand, чеклист, реестр рисков, пилот</a:t>
+              <a:t>Пошлина, НДС, брокер</a:t>
             </a:r>
           </a:p>
           <a:p>
@@ -5200,7 +5200,7 @@
                 <a:latin typeface="Manrope"/>
                 <a:rFonts ascii="Manrope" hAnsi="Manrope" cs="Manrope" eastAsia="Manrope"/>
               </a:rPr>
-              <a:t>Портфель</a:t>
+              <a:t>Запас</a:t>
             </a:r>
           </a:p>
           <a:p>
@@ -5223,30 +5223,76 @@
                 <a:latin typeface="Golos Text"/>
                 <a:rFonts ascii="Golos Text" hAnsi="Golos Text" cs="Golos Text" eastAsia="Golos Text"/>
               </a:rPr>
-              <a:t>Мостик Travel+: Hotel Line, Fleur, Natural, СТМ</a:t>
-            </a:r>
-          </a:p>
-          <a:p>
-            <a:pPr algn="l">
-              <a:lnSpc>
-                <a:spcPct val="118000"/>
-              </a:lnSpc>
-              <a:spcBef>
-                <a:spcPts val="1800"/>
-              </a:spcBef>
-              <a:spcAft>
-                <a:spcPts val="0"/>
-              </a:spcAft>
-            </a:pPr>
-            <a:r>
-              <a:rPr sz="1200" b="0">
-                <a:solidFill>
-                  <a:srgbClr val="5C5C5C"/>
+              <a:t>Брак, пересорт, курс</a:t>
+            </a:r>
+          </a:p>
+          <a:p>
+            <a:pPr algn="l">
+              <a:lnSpc>
+                <a:spcPct val="118000"/>
+              </a:lnSpc>
+              <a:spcBef>
+                <a:spcPts val="0"/>
+              </a:spcBef>
+              <a:spcAft>
+                <a:spcPts val="200"/>
+              </a:spcAft>
+            </a:pPr>
+            <a:r>
+              <a:rPr sz="1500" b="1">
+                <a:solidFill>
+                  <a:srgbClr val="1A1A1A"/>
+                </a:solidFill>
+                <a:latin typeface="Manrope"/>
+                <a:rFonts ascii="Manrope" hAnsi="Manrope" cs="Manrope" eastAsia="Manrope"/>
+              </a:rPr>
+              <a:t>Итог</a:t>
+            </a:r>
+          </a:p>
+          <a:p>
+            <a:pPr algn="l">
+              <a:lnSpc>
+                <a:spcPct val="118000"/>
+              </a:lnSpc>
+              <a:spcBef>
+                <a:spcPts val="0"/>
+              </a:spcBef>
+              <a:spcAft>
+                <a:spcPts val="800"/>
+              </a:spcAft>
+            </a:pPr>
+            <a:r>
+              <a:rPr sz="1500" b="0">
+                <a:solidFill>
+                  <a:srgbClr val="1A1A1A"/>
                 </a:solidFill>
                 <a:latin typeface="Golos Text"/>
                 <a:rFonts ascii="Golos Text" hAnsi="Golos Text" cs="Golos Text" eastAsia="Golos Text"/>
               </a:rPr>
-              <a:t>Образец для поля и собеседования. Не коммерческое предложение.</a:t>
+              <a:t>Сумма строк = цена на складе → из неё прайс и маржа</a:t>
+            </a:r>
+          </a:p>
+          <a:p>
+            <a:pPr algn="l">
+              <a:lnSpc>
+                <a:spcPct val="118000"/>
+              </a:lnSpc>
+              <a:spcBef>
+                <a:spcPts val="1800"/>
+              </a:spcBef>
+              <a:spcAft>
+                <a:spcPts val="0"/>
+              </a:spcAft>
+            </a:pPr>
+            <a:r>
+              <a:rPr sz="1200" b="0">
+                <a:solidFill>
+                  <a:srgbClr val="5C5C5C"/>
+                </a:solidFill>
+                <a:latin typeface="Golos Text"/>
+                <a:rFonts ascii="Golos Text" hAnsi="Golos Text" cs="Golos Text" eastAsia="Golos Text"/>
+              </a:rPr>
+              <a:t>Без этой таблицы прайс Natural не утверждаю.</a:t>
             </a:r>
           </a:p>
         </p:txBody>
@@ -5290,7 +5336,7 @@
                 <a:latin typeface="Manrope"/>
                 <a:rFonts ascii="Manrope" hAnsi="Manrope" cs="Manrope" eastAsia="Manrope"/>
               </a:rPr>
-              <a:t>Справочники</a:t>
+              <a:t>Правила расчёта</a:t>
             </a:r>
           </a:p>
           <a:p>
@@ -5313,7 +5359,7 @@
                 <a:latin typeface="Manrope"/>
                 <a:rFonts ascii="Manrope" hAnsi="Manrope" cs="Manrope" eastAsia="Manrope"/>
               </a:rPr>
-              <a:t>Глоссарии</a:t>
+              <a:t>Заводы</a:t>
             </a:r>
           </a:p>
           <a:p>
@@ -5336,7 +5382,7 @@
                 <a:latin typeface="Golos Text"/>
                 <a:rFonts ascii="Golos Text" hAnsi="Golos Text" cs="Golos Text" eastAsia="Golos Text"/>
               </a:rPr>
-              <a:t>Бренд и ВЭД</a:t>
+              <a:t>Минимум два FOB в сравнении до контракта</a:t>
             </a:r>
           </a:p>
           <a:p>
@@ -5359,7 +5405,7 @@
                 <a:latin typeface="Manrope"/>
                 <a:rFonts ascii="Manrope" hAnsi="Manrope" cs="Manrope" eastAsia="Manrope"/>
               </a:rPr>
-              <a:t>Раздел L</a:t>
+              <a:t>Прайс</a:t>
             </a:r>
           </a:p>
           <a:p>
@@ -5382,7 +5428,7 @@
                 <a:latin typeface="Golos Text"/>
                 <a:rFonts ascii="Golos Text" hAnsi="Golos Text" cs="Golos Text" eastAsia="Golos Text"/>
               </a:rPr>
-              <a:t>Путь товара, Incoterms, RFQ, приёмка</a:t>
+              <a:t>Только после landed cost, не «с потолка»</a:t>
             </a:r>
           </a:p>
           <a:p>
@@ -5405,7 +5451,7 @@
                 <a:latin typeface="Manrope"/>
                 <a:rFonts ascii="Manrope" hAnsi="Manrope" cs="Manrope" eastAsia="Manrope"/>
               </a:rPr>
-              <a:t>Волна A</a:t>
+              <a:t>Маржа</a:t>
             </a:r>
           </a:p>
           <a:p>
@@ -5428,7 +5474,7 @@
                 <a:latin typeface="Golos Text"/>
                 <a:rFonts ascii="Golos Text" hAnsi="Golos Text" cs="Golos Text" eastAsia="Golos Text"/>
               </a:rPr>
-              <a:t>Markdown-реестры в папке brand-pult/</a:t>
+              <a:t>Natural и Hotel Line — разная экономика</a:t>
             </a:r>
           </a:p>
           <a:p>
@@ -5451,7 +5497,7 @@
                 <a:latin typeface="Manrope"/>
                 <a:rFonts ascii="Manrope" hAnsi="Manrope" cs="Manrope" eastAsia="Manrope"/>
               </a:rPr>
-              <a:t>Синхрон</a:t>
+              <a:t>Срок в КП</a:t>
             </a:r>
           </a:p>
           <a:p>
@@ -5474,7 +5520,7 @@
                 <a:latin typeface="Golos Text"/>
                 <a:rFonts ascii="Golos Text" hAnsi="Golos Text" cs="Golos Text" eastAsia="Golos Text"/>
               </a:rPr>
-              <a:t>Презентация и скрипт с пультом</a:t>
+              <a:t>Дата «на складе», не «завод отгрузил»</a:t>
             </a:r>
           </a:p>
           <a:p>
@@ -5497,7 +5543,7 @@
                 <a:latin typeface="Manrope"/>
                 <a:rFonts ascii="Manrope" hAnsi="Manrope" cs="Manrope" eastAsia="Manrope"/>
               </a:rPr>
-              <a:t>Версия 2.0</a:t>
+              <a:t>Коридор</a:t>
             </a:r>
           </a:p>
           <a:p>
@@ -5520,7 +5566,7 @@
                 <a:latin typeface="Golos Text"/>
                 <a:rFonts ascii="Golos Text" hAnsi="Golos Text" cs="Golos Text" eastAsia="Golos Text"/>
               </a:rPr>
-              <a:t>Когда технолог закроет цифры завода</a:t>
+              <a:t>Выше Hotel Line, рядом с ЕТС, ниже Natura Siberica</a:t>
             </a:r>
           </a:p>
         </p:txBody>
@@ -5659,7 +5705,7 @@
                 <a:latin typeface="Manrope"/>
                 <a:rFonts ascii="Manrope" hAnsi="Manrope" cs="Manrope" eastAsia="Manrope"/>
               </a:rPr>
-              <a:t>Итог и следующий шаг</a:t>
+              <a:t>Итог</a:t>
             </a:r>
           </a:p>
         </p:txBody>
@@ -6040,7 +6086,7 @@
                 <a:latin typeface="Manrope"/>
                 <a:rFonts ascii="Manrope" hAnsi="Manrope" cs="Manrope" eastAsia="Manrope"/>
               </a:rPr>
-              <a:t>Собрал</a:t>
+              <a:t>Почему Travel+</a:t>
             </a:r>
           </a:p>
           <a:p>
@@ -6063,7 +6109,7 @@
                 <a:latin typeface="Manrope"/>
                 <a:rFonts ascii="Manrope" hAnsi="Manrope" cs="Manrope" eastAsia="Manrope"/>
               </a:rPr>
-              <a:t>ДНК</a:t>
+              <a:t>Задача</a:t>
             </a:r>
           </a:p>
           <a:p>
@@ -6086,7 +6132,7 @@
                 <a:latin typeface="Golos Text"/>
                 <a:rFonts ascii="Golos Text" hAnsi="Golos Text" cs="Golos Text" eastAsia="Golos Text"/>
               </a:rPr>
-              <a:t>Обещание и границы линейки</a:t>
+              <a:t>Физический товар: своё производство, Китай, дыра Natural на полке</a:t>
             </a:r>
           </a:p>
           <a:p>
@@ -6109,7 +6155,7 @@
                 <a:latin typeface="Manrope"/>
                 <a:rFonts ascii="Manrope" hAnsi="Manrope" cs="Manrope" eastAsia="Manrope"/>
               </a:rPr>
-              <a:t>StoryBrand</a:t>
+              <a:t>Роль</a:t>
             </a:r>
           </a:p>
           <a:p>
@@ -6132,7 +6178,7 @@
                 <a:latin typeface="Golos Text"/>
                 <a:rFonts ascii="Golos Text" hAnsi="Golos Text" cs="Golos Text" eastAsia="Golos Text"/>
               </a:rPr>
-              <a:t>Скрипт для продаж</a:t>
+              <a:t>От рамки линейки до пилота — продукт, цена, документы, поставка</a:t>
             </a:r>
           </a:p>
           <a:p>
@@ -6155,19 +6201,19 @@
                 <a:latin typeface="Manrope"/>
                 <a:rFonts ascii="Manrope" hAnsi="Manrope" cs="Manrope" eastAsia="Manrope"/>
               </a:rPr>
-              <a:t>Чеклист</a:t>
-            </a:r>
-          </a:p>
-          <a:p>
-            <a:pPr algn="l">
-              <a:lnSpc>
-                <a:spcPct val="118000"/>
-              </a:lnSpc>
-              <a:spcBef>
-                <a:spcPts val="0"/>
-              </a:spcBef>
-              <a:spcAft>
-                <a:spcPts val="800"/>
+              <a:t>Старт</a:t>
+            </a:r>
+          </a:p>
+          <a:p>
+            <a:pPr algn="l">
+              <a:lnSpc>
+                <a:spcPct val="118000"/>
+              </a:lnSpc>
+              <a:spcBef>
+                <a:spcPts val="0"/>
+              </a:spcBef>
+              <a:spcAft>
+                <a:spcPts val="0"/>
               </a:spcAft>
             </a:pPr>
             <a:r>
@@ -6178,30 +6224,74 @@
                 <a:latin typeface="Golos Text"/>
                 <a:rFonts ascii="Golos Text" hAnsi="Golos Text" cs="Golos Text" eastAsia="Golos Text"/>
               </a:rPr>
-              <a:t>Готовность продукта перед рынком</a:t>
-            </a:r>
-          </a:p>
-          <a:p>
-            <a:pPr algn="l">
-              <a:lnSpc>
-                <a:spcPct val="118000"/>
-              </a:lnSpc>
-              <a:spcBef>
-                <a:spcPts val="0"/>
-              </a:spcBef>
-              <a:spcAft>
-                <a:spcPts val="200"/>
+              <a:t>Блокеры этапа 2 с технологом и пилотный сегмент eco / wellness</a:t>
+            </a:r>
+          </a:p>
+        </p:txBody>
+      </p:sp>
+      <p:sp>
+        <p:nvSpPr>
+          <p:cNvPr id="14" name="TextBox 13"/>
+          <p:cNvSpPr txBox="1"/>
+          <p:nvPr/>
+        </p:nvSpPr>
+        <p:spPr>
+          <a:xfrm>
+            <a:off x="6571335" y="1426464"/>
+            <a:ext cx="4815687" cy="4334256"/>
+          </a:xfrm>
+          <a:prstGeom prst="rect">
+            <a:avLst/>
+          </a:prstGeom>
+          <a:noFill/>
+        </p:spPr>
+        <p:txBody>
+          <a:bodyPr wrap="square" anchor="t" lIns="50800" rIns="50800" tIns="25400" bIns="25400"/>
+          <a:lstStyle/>
+          <a:p>
+            <a:pPr algn="l">
+              <a:lnSpc>
+                <a:spcPct val="118000"/>
+              </a:lnSpc>
+              <a:spcBef>
+                <a:spcPts val="0"/>
+              </a:spcBef>
+              <a:spcAft>
+                <a:spcPts val="1200"/>
               </a:spcAft>
             </a:pPr>
             <a:r>
               <a:rPr sz="1500" b="1">
                 <a:solidFill>
-                  <a:srgbClr val="1A1A1A"/>
+                  <a:srgbClr val="2A554A"/>
                 </a:solidFill>
                 <a:latin typeface="Manrope"/>
                 <a:rFonts ascii="Manrope" hAnsi="Manrope" cs="Manrope" eastAsia="Manrope"/>
               </a:rPr>
-              <a:t>Логистика</a:t>
+              <a:t>Готов присоединиться</a:t>
+            </a:r>
+          </a:p>
+          <a:p>
+            <a:pPr algn="l">
+              <a:lnSpc>
+                <a:spcPct val="118000"/>
+              </a:lnSpc>
+              <a:spcBef>
+                <a:spcPts val="0"/>
+              </a:spcBef>
+              <a:spcAft>
+                <a:spcPts val="200"/>
+              </a:spcAft>
+            </a:pPr>
+            <a:r>
+              <a:rPr sz="1500" b="1">
+                <a:solidFill>
+                  <a:srgbClr val="1A1A1A"/>
+                </a:solidFill>
+                <a:latin typeface="Manrope"/>
+                <a:rFonts ascii="Manrope" hAnsi="Manrope" cs="Manrope" eastAsia="Manrope"/>
+              </a:rPr>
+              <a:t>Направление</a:t>
             </a:r>
           </a:p>
           <a:p>
@@ -6224,109 +6314,88 @@
                 <a:latin typeface="Golos Text"/>
                 <a:rFonts ascii="Golos Text" hAnsi="Golos Text" cs="Golos Text" eastAsia="Golos Text"/>
               </a:rPr>
-              <a:t>Раздел L — путь при поставке из Китая</a:t>
-            </a:r>
-          </a:p>
-          <a:p>
-            <a:pPr algn="l">
-              <a:lnSpc>
-                <a:spcPct val="118000"/>
-              </a:lnSpc>
-              <a:spcBef>
-                <a:spcPts val="1800"/>
-              </a:spcBef>
-              <a:spcAft>
-                <a:spcPts val="0"/>
-              </a:spcAft>
-            </a:pPr>
-            <a:r>
-              <a:rPr sz="1200" b="0">
-                <a:solidFill>
-                  <a:srgbClr val="5C5C5C"/>
+              <a:t>Вести Natural и работать с линейкой в этом контуре</a:t>
+            </a:r>
+          </a:p>
+          <a:p>
+            <a:pPr algn="l">
+              <a:lnSpc>
+                <a:spcPct val="118000"/>
+              </a:lnSpc>
+              <a:spcBef>
+                <a:spcPts val="0"/>
+              </a:spcBef>
+              <a:spcAft>
+                <a:spcPts val="200"/>
+              </a:spcAft>
+            </a:pPr>
+            <a:r>
+              <a:rPr sz="1500" b="1">
+                <a:solidFill>
+                  <a:srgbClr val="1A1A1A"/>
+                </a:solidFill>
+                <a:latin typeface="Manrope"/>
+                <a:rFonts ascii="Manrope" hAnsi="Manrope" cs="Manrope" eastAsia="Manrope"/>
+              </a:rPr>
+              <a:t>Подход</a:t>
+            </a:r>
+          </a:p>
+          <a:p>
+            <a:pPr algn="l">
+              <a:lnSpc>
+                <a:spcPct val="118000"/>
+              </a:lnSpc>
+              <a:spcBef>
+                <a:spcPts val="0"/>
+              </a:spcBef>
+              <a:spcAft>
+                <a:spcPts val="800"/>
+              </a:spcAft>
+            </a:pPr>
+            <a:r>
+              <a:rPr sz="1500" b="0">
+                <a:solidFill>
+                  <a:srgbClr val="1A1A1A"/>
                 </a:solidFill>
                 <a:latin typeface="Golos Text"/>
                 <a:rFonts ascii="Golos Text" hAnsi="Golos Text" cs="Golos Text" eastAsia="Golos Text"/>
               </a:rPr>
-              <a:t>Не прайс завода. Не коммерческое предложение.</a:t>
-            </a:r>
-          </a:p>
-        </p:txBody>
-      </p:sp>
-      <p:sp>
-        <p:nvSpPr>
-          <p:cNvPr id="14" name="TextBox 13"/>
-          <p:cNvSpPr txBox="1"/>
-          <p:nvPr/>
-        </p:nvSpPr>
-        <p:spPr>
-          <a:xfrm>
-            <a:off x="6571335" y="1426464"/>
-            <a:ext cx="4815687" cy="4334256"/>
-          </a:xfrm>
-          <a:prstGeom prst="rect">
-            <a:avLst/>
-          </a:prstGeom>
-          <a:noFill/>
-        </p:spPr>
-        <p:txBody>
-          <a:bodyPr wrap="square" anchor="t" lIns="50800" rIns="50800" tIns="25400" bIns="25400"/>
-          <a:lstStyle/>
-          <a:p>
-            <a:pPr algn="l">
-              <a:lnSpc>
-                <a:spcPct val="118000"/>
-              </a:lnSpc>
-              <a:spcBef>
-                <a:spcPts val="0"/>
-              </a:spcBef>
-              <a:spcAft>
-                <a:spcPts val="1200"/>
+              <a:t>Цифры и рамка в руках у продаж и завода — не презентация ради слайдов</a:t>
+            </a:r>
+          </a:p>
+          <a:p>
+            <a:pPr algn="l">
+              <a:lnSpc>
+                <a:spcPct val="118000"/>
+              </a:lnSpc>
+              <a:spcBef>
+                <a:spcPts val="0"/>
+              </a:spcBef>
+              <a:spcAft>
+                <a:spcPts val="200"/>
               </a:spcAft>
             </a:pPr>
             <a:r>
               <a:rPr sz="1500" b="1">
                 <a:solidFill>
-                  <a:srgbClr val="2A554A"/>
+                  <a:srgbClr val="1A1A1A"/>
                 </a:solidFill>
                 <a:latin typeface="Manrope"/>
                 <a:rFonts ascii="Manrope" hAnsi="Manrope" cs="Manrope" eastAsia="Manrope"/>
               </a:rPr>
-              <a:t>Готов обсудить</a:t>
-            </a:r>
-          </a:p>
-          <a:p>
-            <a:pPr algn="l">
-              <a:lnSpc>
-                <a:spcPct val="118000"/>
-              </a:lnSpc>
-              <a:spcBef>
-                <a:spcPts val="0"/>
-              </a:spcBef>
-              <a:spcAft>
-                <a:spcPts val="200"/>
-              </a:spcAft>
-            </a:pPr>
-            <a:r>
-              <a:rPr sz="1500" b="1">
-                <a:solidFill>
-                  <a:srgbClr val="1A1A1A"/>
-                </a:solidFill>
-                <a:latin typeface="Manrope"/>
-                <a:rFonts ascii="Manrope" hAnsi="Manrope" cs="Manrope" eastAsia="Manrope"/>
-              </a:rPr>
-              <a:t>Блокеры</a:t>
-            </a:r>
-          </a:p>
-          <a:p>
-            <a:pPr algn="l">
-              <a:lnSpc>
-                <a:spcPct val="118000"/>
-              </a:lnSpc>
-              <a:spcBef>
-                <a:spcPts val="0"/>
-              </a:spcBef>
-              <a:spcAft>
-                <a:spcPts val="800"/>
+              <a:t>Финал</a:t>
+            </a:r>
+          </a:p>
+          <a:p>
+            <a:pPr algn="l">
+              <a:lnSpc>
+                <a:spcPct val="118000"/>
+              </a:lnSpc>
+              <a:spcBef>
+                <a:spcPts val="0"/>
+              </a:spcBef>
+              <a:spcAft>
+                <a:spcPts val="0"/>
               </a:spcAft>
             </a:pPr>
             <a:r>
@@ -6337,145 +6406,7 @@
                 <a:latin typeface="Golos Text"/>
                 <a:rFonts ascii="Golos Text" hAnsi="Golos Text" cs="Golos Text" eastAsia="Golos Text"/>
               </a:rPr>
-              <a:t>Приоритет этапа 2 с технологом</a:t>
-            </a:r>
-          </a:p>
-          <a:p>
-            <a:pPr algn="l">
-              <a:lnSpc>
-                <a:spcPct val="118000"/>
-              </a:lnSpc>
-              <a:spcBef>
-                <a:spcPts val="0"/>
-              </a:spcBef>
-              <a:spcAft>
-                <a:spcPts val="200"/>
-              </a:spcAft>
-            </a:pPr>
-            <a:r>
-              <a:rPr sz="1500" b="1">
-                <a:solidFill>
-                  <a:srgbClr val="1A1A1A"/>
-                </a:solidFill>
-                <a:latin typeface="Manrope"/>
-                <a:rFonts ascii="Manrope" hAnsi="Manrope" cs="Manrope" eastAsia="Manrope"/>
-              </a:rPr>
-              <a:t>Сегмент</a:t>
-            </a:r>
-          </a:p>
-          <a:p>
-            <a:pPr algn="l">
-              <a:lnSpc>
-                <a:spcPct val="118000"/>
-              </a:lnSpc>
-              <a:spcBef>
-                <a:spcPts val="0"/>
-              </a:spcBef>
-              <a:spcAft>
-                <a:spcPts val="800"/>
-              </a:spcAft>
-            </a:pPr>
-            <a:r>
-              <a:rPr sz="1500" b="0">
-                <a:solidFill>
-                  <a:srgbClr val="1A1A1A"/>
-                </a:solidFill>
-                <a:latin typeface="Golos Text"/>
-                <a:rFonts ascii="Golos Text" hAnsi="Golos Text" cs="Golos Text" eastAsia="Golos Text"/>
-              </a:rPr>
-              <a:t>Пилот eco / wellness</a:t>
-            </a:r>
-          </a:p>
-          <a:p>
-            <a:pPr algn="l">
-              <a:lnSpc>
-                <a:spcPct val="118000"/>
-              </a:lnSpc>
-              <a:spcBef>
-                <a:spcPts val="0"/>
-              </a:spcBef>
-              <a:spcAft>
-                <a:spcPts val="200"/>
-              </a:spcAft>
-            </a:pPr>
-            <a:r>
-              <a:rPr sz="1500" b="1">
-                <a:solidFill>
-                  <a:srgbClr val="1A1A1A"/>
-                </a:solidFill>
-                <a:latin typeface="Manrope"/>
-                <a:rFonts ascii="Manrope" hAnsi="Manrope" cs="Manrope" eastAsia="Manrope"/>
-              </a:rPr>
-              <a:t>Продажи</a:t>
-            </a:r>
-          </a:p>
-          <a:p>
-            <a:pPr algn="l">
-              <a:lnSpc>
-                <a:spcPct val="118000"/>
-              </a:lnSpc>
-              <a:spcBef>
-                <a:spcPts val="0"/>
-              </a:spcBef>
-              <a:spcAft>
-                <a:spcPts val="800"/>
-              </a:spcAft>
-            </a:pPr>
-            <a:r>
-              <a:rPr sz="1500" b="0">
-                <a:solidFill>
-                  <a:srgbClr val="1A1A1A"/>
-                </a:solidFill>
-                <a:latin typeface="Golos Text"/>
-                <a:rFonts ascii="Golos Text" hAnsi="Golos Text" cs="Golos Text" eastAsia="Golos Text"/>
-              </a:rPr>
-              <a:t>Как не увести Natural в эконом Hotel Line</a:t>
-            </a:r>
-          </a:p>
-          <a:p>
-            <a:pPr algn="l">
-              <a:lnSpc>
-                <a:spcPct val="118000"/>
-              </a:lnSpc>
-              <a:spcBef>
-                <a:spcPts val="0"/>
-              </a:spcBef>
-              <a:spcAft>
-                <a:spcPts val="200"/>
-              </a:spcAft>
-            </a:pPr>
-            <a:r>
-              <a:rPr sz="1500" b="1">
-                <a:solidFill>
-                  <a:srgbClr val="1A1A1A"/>
-                </a:solidFill>
-                <a:latin typeface="Manrope"/>
-                <a:rFonts ascii="Manrope" hAnsi="Manrope" cs="Manrope" eastAsia="Manrope"/>
-              </a:rPr>
-              <a:t>Вопросы</a:t>
-            </a:r>
-          </a:p>
-          <a:p>
-            <a:pPr algn="l">
-              <a:lnSpc>
-                <a:spcPct val="118000"/>
-              </a:lnSpc>
-              <a:spcBef>
-                <a:spcPts val="0"/>
-              </a:spcBef>
-              <a:spcAft>
-                <a:spcPts val="0"/>
-              </a:spcAft>
-            </a:pPr>
-            <a:r>
-              <a:rPr sz="1500" b="0">
-                <a:solidFill>
-                  <a:srgbClr val="1A1A1A"/>
-                </a:solidFill>
-                <a:latin typeface="Golos Text"/>
-                <a:rFonts ascii="Golos Text" hAnsi="Golos Text" cs="Golos Text" eastAsia="Golos Text"/>
-              </a:rPr>
-              <a:t>Спасибо</a:t>
+              <a:t>Буду рад присоединиться к команде. Спасибо. Вопросы?</a:t>
             </a:r>
           </a:p>
         </p:txBody>

--- a/АК/presentation-travelplus-interview.pptx
+++ b/АК/presentation-travelplus-interview.pptx
@@ -4658,7 +4658,7 @@
                 <a:latin typeface="Manrope"/>
                 <a:rFonts ascii="Manrope" hAnsi="Manrope" cs="Manrope" eastAsia="Manrope"/>
               </a:rPr>
-              <a:t>Себестоимость: как считаю</a:t>
+              <a:t>Себестоимость: простыми словами</a:t>
             </a:r>
           </a:p>
         </p:txBody>
@@ -5039,7 +5039,7 @@
                 <a:latin typeface="Manrope"/>
                 <a:rFonts ascii="Manrope" hAnsi="Manrope" cs="Manrope" eastAsia="Manrope"/>
               </a:rPr>
-              <a:t>Цена на складе</a:t>
+              <a:t>До склада</a:t>
             </a:r>
           </a:p>
           <a:p>
@@ -5062,7 +5062,7 @@
                 <a:latin typeface="Manrope"/>
                 <a:rFonts ascii="Manrope" hAnsi="Manrope" cs="Manrope" eastAsia="Manrope"/>
               </a:rPr>
-              <a:t>FOB</a:t>
+              <a:t>Цена завода</a:t>
             </a:r>
           </a:p>
           <a:p>
@@ -5085,7 +5085,7 @@
                 <a:latin typeface="Golos Text"/>
                 <a:rFonts ascii="Golos Text" hAnsi="Golos Text" cs="Golos Text" eastAsia="Golos Text"/>
               </a:rPr>
-              <a:t>База сравнения заводов — отдельно от логистики</a:t>
+              <a:t>Сколько стоит товар у производителя до отправки</a:t>
             </a:r>
           </a:p>
           <a:p>
@@ -5131,7 +5131,7 @@
                 <a:latin typeface="Golos Text"/>
                 <a:rFonts ascii="Golos Text" hAnsi="Golos Text" cs="Golos Text" eastAsia="Golos Text"/>
               </a:rPr>
-              <a:t>Фрахт, экспедитор, довоз до Кириши</a:t>
+              <a:t>Море или самолёт, экспедитор, довоз до Кириши</a:t>
             </a:r>
           </a:p>
           <a:p>
@@ -5177,7 +5177,7 @@
                 <a:latin typeface="Golos Text"/>
                 <a:rFonts ascii="Golos Text" hAnsi="Golos Text" cs="Golos Text" eastAsia="Golos Text"/>
               </a:rPr>
-              <a:t>Пошлина, НДС, брокер</a:t>
+              <a:t>Пошлина, налог, услуги брокера</a:t>
             </a:r>
           </a:p>
           <a:p>
@@ -5223,7 +5223,7 @@
                 <a:latin typeface="Golos Text"/>
                 <a:rFonts ascii="Golos Text" hAnsi="Golos Text" cs="Golos Text" eastAsia="Golos Text"/>
               </a:rPr>
-              <a:t>Брак, пересорт, курс</a:t>
+              <a:t>Резерв на брак, пересорт и скачок курса — не прибыль</a:t>
             </a:r>
           </a:p>
           <a:p>
@@ -5246,7 +5246,7 @@
                 <a:latin typeface="Manrope"/>
                 <a:rFonts ascii="Manrope" hAnsi="Manrope" cs="Manrope" eastAsia="Manrope"/>
               </a:rPr>
-              <a:t>Итог</a:t>
+              <a:t>На складе</a:t>
             </a:r>
           </a:p>
           <a:p>
@@ -5269,7 +5269,7 @@
                 <a:latin typeface="Golos Text"/>
                 <a:rFonts ascii="Golos Text" hAnsi="Golos Text" cs="Golos Text" eastAsia="Golos Text"/>
               </a:rPr>
-              <a:t>Сумма строк = цена на складе → из неё прайс и маржа</a:t>
+              <a:t>Сложили строки = себестоимость единицы</a:t>
             </a:r>
           </a:p>
           <a:p>
@@ -5292,7 +5292,7 @@
                 <a:latin typeface="Golos Text"/>
                 <a:rFonts ascii="Golos Text" hAnsi="Golos Text" cs="Golos Text" eastAsia="Golos Text"/>
               </a:rPr>
-              <a:t>Без этой таблицы прайс Natural не утверждаю.</a:t>
+              <a:t>Прайс для отеля считаю только от этой цифры.</a:t>
             </a:r>
           </a:p>
         </p:txBody>
@@ -5336,7 +5336,7 @@
                 <a:latin typeface="Manrope"/>
                 <a:rFonts ascii="Manrope" hAnsi="Manrope" cs="Manrope" eastAsia="Manrope"/>
               </a:rPr>
-              <a:t>Правила расчёта</a:t>
+              <a:t>До цены закупщику (ориентировочно)</a:t>
             </a:r>
           </a:p>
           <a:p>
@@ -5359,7 +5359,7 @@
                 <a:latin typeface="Manrope"/>
                 <a:rFonts ascii="Manrope" hAnsi="Manrope" cs="Manrope" eastAsia="Manrope"/>
               </a:rPr>
-              <a:t>Заводы</a:t>
+              <a:t>На складе</a:t>
             </a:r>
           </a:p>
           <a:p>
@@ -5382,7 +5382,7 @@
                 <a:latin typeface="Golos Text"/>
                 <a:rFonts ascii="Golos Text" hAnsi="Golos Text" cs="Golos Text" eastAsia="Golos Text"/>
               </a:rPr>
-              <a:t>Минимум два FOB в сравнении до контракта</a:t>
+              <a:t>14 ₽ за флакон</a:t>
             </a:r>
           </a:p>
           <a:p>
@@ -5405,7 +5405,7 @@
                 <a:latin typeface="Manrope"/>
                 <a:rFonts ascii="Manrope" hAnsi="Manrope" cs="Manrope" eastAsia="Manrope"/>
               </a:rPr>
-              <a:t>Прайс</a:t>
+              <a:t>Рынок</a:t>
             </a:r>
           </a:p>
           <a:p>
@@ -5428,7 +5428,7 @@
                 <a:latin typeface="Golos Text"/>
                 <a:rFonts ascii="Golos Text" hAnsi="Golos Text" cs="Golos Text" eastAsia="Golos Text"/>
               </a:rPr>
-              <a:t>Только после landed cost, не «с потолка»</a:t>
+              <a:t>Hotel Line 12–15 ₽ · ЕТС ~18 ₽ · Natura Siberica 30–40 ₽</a:t>
             </a:r>
           </a:p>
           <a:p>
@@ -5451,7 +5451,7 @@
                 <a:latin typeface="Manrope"/>
                 <a:rFonts ascii="Manrope" hAnsi="Manrope" cs="Manrope" eastAsia="Manrope"/>
               </a:rPr>
-              <a:t>Маржа</a:t>
+              <a:t>Наценка</a:t>
             </a:r>
           </a:p>
           <a:p>
@@ -5474,7 +5474,7 @@
                 <a:latin typeface="Golos Text"/>
                 <a:rFonts ascii="Golos Text" hAnsi="Golos Text" cs="Golos Text" eastAsia="Golos Text"/>
               </a:rPr>
-              <a:t>Natural и Hotel Line — разная экономика</a:t>
+              <a:t>Смотрю маржу Travel+ и коридор «между Hotel Line и Natura Siberica»</a:t>
             </a:r>
           </a:p>
           <a:p>
@@ -5497,7 +5497,7 @@
                 <a:latin typeface="Manrope"/>
                 <a:rFonts ascii="Manrope" hAnsi="Manrope" cs="Manrope" eastAsia="Manrope"/>
               </a:rPr>
-              <a:t>Срок в КП</a:t>
+              <a:t>Цена закупщику</a:t>
             </a:r>
           </a:p>
           <a:p>
@@ -5520,7 +5520,7 @@
                 <a:latin typeface="Golos Text"/>
                 <a:rFonts ascii="Golos Text" hAnsi="Golos Text" cs="Golos Text" eastAsia="Golos Text"/>
               </a:rPr>
-              <a:t>Дата «на складе», не «завод отгрузил»</a:t>
+              <a:t>Ориентир ~22–26 ₽ — выше Hotel Line, рядом с ЕТС, ниже Natura Siberica</a:t>
             </a:r>
           </a:p>
           <a:p>
@@ -5543,7 +5543,7 @@
                 <a:latin typeface="Manrope"/>
                 <a:rFonts ascii="Manrope" hAnsi="Manrope" cs="Manrope" eastAsia="Manrope"/>
               </a:rPr>
-              <a:t>Коридор</a:t>
+              <a:t>Проверка</a:t>
             </a:r>
           </a:p>
           <a:p>
@@ -5566,7 +5566,7 @@
                 <a:latin typeface="Golos Text"/>
                 <a:rFonts ascii="Golos Text" hAnsi="Golos Text" cs="Golos Text" eastAsia="Golos Text"/>
               </a:rPr>
-              <a:t>Выше Hotel Line, рядом с ЕТС, ниже Natura Siberica</a:t>
+              <a:t>Если наценка не держится — меняю завод или не выхожу в прайс</a:t>
             </a:r>
           </a:p>
         </p:txBody>

--- a/АК/presentation-travelplus-interview.pptx
+++ b/АК/presentation-travelplus-interview.pptx
@@ -5039,7 +5039,7 @@
                 <a:latin typeface="Manrope"/>
                 <a:rFonts ascii="Manrope" hAnsi="Manrope" cs="Manrope" eastAsia="Manrope"/>
               </a:rPr>
-              <a:t>До склада</a:t>
+              <a:t>До склада (ориентировочно)</a:t>
             </a:r>
           </a:p>
           <a:p>
@@ -5085,7 +5085,7 @@
                 <a:latin typeface="Golos Text"/>
                 <a:rFonts ascii="Golos Text" hAnsi="Golos Text" cs="Golos Text" eastAsia="Golos Text"/>
               </a:rPr>
-              <a:t>Сколько стоит товар у производителя до отправки</a:t>
+              <a:t>8 ₽ — у производителя до отправки</a:t>
             </a:r>
           </a:p>
           <a:p>
@@ -5131,7 +5131,7 @@
                 <a:latin typeface="Golos Text"/>
                 <a:rFonts ascii="Golos Text" hAnsi="Golos Text" cs="Golos Text" eastAsia="Golos Text"/>
               </a:rPr>
-              <a:t>Море или самолёт, экспедитор, довоз до Кириши</a:t>
+              <a:t>3 ₽ — море / самолёт, экспедитор, довоз</a:t>
             </a:r>
           </a:p>
           <a:p>
@@ -5177,7 +5177,7 @@
                 <a:latin typeface="Golos Text"/>
                 <a:rFonts ascii="Golos Text" hAnsi="Golos Text" cs="Golos Text" eastAsia="Golos Text"/>
               </a:rPr>
-              <a:t>Пошлина, налог, услуги брокера</a:t>
+              <a:t>2 ₽ — пошлина, налог, брокер</a:t>
             </a:r>
           </a:p>
           <a:p>
@@ -5223,7 +5223,7 @@
                 <a:latin typeface="Golos Text"/>
                 <a:rFonts ascii="Golos Text" hAnsi="Golos Text" cs="Golos Text" eastAsia="Golos Text"/>
               </a:rPr>
-              <a:t>Резерв на брак, пересорт и скачок курса — не прибыль</a:t>
+              <a:t>1 ₽ — резерв на брак, пересорт и курс; это не прибыль</a:t>
             </a:r>
           </a:p>
           <a:p>
@@ -5269,7 +5269,7 @@
                 <a:latin typeface="Golos Text"/>
                 <a:rFonts ascii="Golos Text" hAnsi="Golos Text" cs="Golos Text" eastAsia="Golos Text"/>
               </a:rPr>
-              <a:t>Сложили строки = себестоимость единицы</a:t>
+              <a:t>14 ₽ — себестоимость единицы в Киришах</a:t>
             </a:r>
           </a:p>
           <a:p>

--- a/АК/presentation-travelplus-interview.pptx
+++ b/АК/presentation-travelplus-interview.pptx
@@ -5062,7 +5062,7 @@
                 <a:latin typeface="Manrope"/>
                 <a:rFonts ascii="Manrope" hAnsi="Manrope" cs="Manrope" eastAsia="Manrope"/>
               </a:rPr>
-              <a:t>Цена завода</a:t>
+              <a:t>1. Цена завода</a:t>
             </a:r>
           </a:p>
           <a:p>
@@ -5108,7 +5108,7 @@
                 <a:latin typeface="Manrope"/>
                 <a:rFonts ascii="Manrope" hAnsi="Manrope" cs="Manrope" eastAsia="Manrope"/>
               </a:rPr>
-              <a:t>Доставка</a:t>
+              <a:t>2. Доставка</a:t>
             </a:r>
           </a:p>
           <a:p>
@@ -5154,7 +5154,7 @@
                 <a:latin typeface="Manrope"/>
                 <a:rFonts ascii="Manrope" hAnsi="Manrope" cs="Manrope" eastAsia="Manrope"/>
               </a:rPr>
-              <a:t>Таможня</a:t>
+              <a:t>3. Таможня</a:t>
             </a:r>
           </a:p>
           <a:p>
@@ -5200,7 +5200,7 @@
                 <a:latin typeface="Manrope"/>
                 <a:rFonts ascii="Manrope" hAnsi="Manrope" cs="Manrope" eastAsia="Manrope"/>
               </a:rPr>
-              <a:t>Запас</a:t>
+              <a:t>4. Запас</a:t>
             </a:r>
           </a:p>
           <a:p>
@@ -5223,7 +5223,7 @@
                 <a:latin typeface="Golos Text"/>
                 <a:rFonts ascii="Golos Text" hAnsi="Golos Text" cs="Golos Text" eastAsia="Golos Text"/>
               </a:rPr>
-              <a:t>1 ₽ — резерв на брак, пересорт и курс; это не прибыль</a:t>
+              <a:t>1 ₽ — резерв на брак, пересорт и курс; не прибыль</a:t>
             </a:r>
           </a:p>
           <a:p>
@@ -5246,19 +5246,19 @@
                 <a:latin typeface="Manrope"/>
                 <a:rFonts ascii="Manrope" hAnsi="Manrope" cs="Manrope" eastAsia="Manrope"/>
               </a:rPr>
-              <a:t>На складе</a:t>
-            </a:r>
-          </a:p>
-          <a:p>
-            <a:pPr algn="l">
-              <a:lnSpc>
-                <a:spcPct val="118000"/>
-              </a:lnSpc>
-              <a:spcBef>
-                <a:spcPts val="0"/>
-              </a:spcBef>
-              <a:spcAft>
-                <a:spcPts val="800"/>
+              <a:t>5. На складе</a:t>
+            </a:r>
+          </a:p>
+          <a:p>
+            <a:pPr algn="l">
+              <a:lnSpc>
+                <a:spcPct val="118000"/>
+              </a:lnSpc>
+              <a:spcBef>
+                <a:spcPts val="0"/>
+              </a:spcBef>
+              <a:spcAft>
+                <a:spcPts val="0"/>
               </a:spcAft>
             </a:pPr>
             <a:r>
@@ -5269,74 +5269,143 @@
                 <a:latin typeface="Golos Text"/>
                 <a:rFonts ascii="Golos Text" hAnsi="Golos Text" cs="Golos Text" eastAsia="Golos Text"/>
               </a:rPr>
-              <a:t>14 ₽ — себестоимость единицы в Киришах</a:t>
-            </a:r>
-          </a:p>
-          <a:p>
-            <a:pPr algn="l">
-              <a:lnSpc>
-                <a:spcPct val="118000"/>
-              </a:lnSpc>
-              <a:spcBef>
-                <a:spcPts val="1800"/>
-              </a:spcBef>
-              <a:spcAft>
-                <a:spcPts val="0"/>
-              </a:spcAft>
-            </a:pPr>
-            <a:r>
-              <a:rPr sz="1200" b="0">
-                <a:solidFill>
-                  <a:srgbClr val="5C5C5C"/>
+              <a:t>8 + 3 + 2 + 1 = 14 ₽ за флакон</a:t>
+            </a:r>
+          </a:p>
+        </p:txBody>
+      </p:sp>
+      <p:sp>
+        <p:nvSpPr>
+          <p:cNvPr id="14" name="TextBox 13"/>
+          <p:cNvSpPr txBox="1"/>
+          <p:nvPr/>
+        </p:nvSpPr>
+        <p:spPr>
+          <a:xfrm>
+            <a:off x="6571335" y="1426464"/>
+            <a:ext cx="4815687" cy="4334256"/>
+          </a:xfrm>
+          <a:prstGeom prst="rect">
+            <a:avLst/>
+          </a:prstGeom>
+          <a:noFill/>
+        </p:spPr>
+        <p:txBody>
+          <a:bodyPr wrap="square" anchor="t" lIns="50800" rIns="50800" tIns="25400" bIns="25400"/>
+          <a:lstStyle/>
+          <a:p>
+            <a:pPr algn="l">
+              <a:lnSpc>
+                <a:spcPct val="118000"/>
+              </a:lnSpc>
+              <a:spcBef>
+                <a:spcPts val="0"/>
+              </a:spcBef>
+              <a:spcAft>
+                <a:spcPts val="1200"/>
+              </a:spcAft>
+            </a:pPr>
+            <a:r>
+              <a:rPr sz="1500" b="1">
+                <a:solidFill>
+                  <a:srgbClr val="2A554A"/>
+                </a:solidFill>
+                <a:latin typeface="Manrope"/>
+                <a:rFonts ascii="Manrope" hAnsi="Manrope" cs="Manrope" eastAsia="Manrope"/>
+              </a:rPr>
+              <a:t>До закупщика (ориентировочно)</a:t>
+            </a:r>
+          </a:p>
+          <a:p>
+            <a:pPr algn="l">
+              <a:lnSpc>
+                <a:spcPct val="118000"/>
+              </a:lnSpc>
+              <a:spcBef>
+                <a:spcPts val="0"/>
+              </a:spcBef>
+              <a:spcAft>
+                <a:spcPts val="200"/>
+              </a:spcAft>
+            </a:pPr>
+            <a:r>
+              <a:rPr sz="1500" b="1">
+                <a:solidFill>
+                  <a:srgbClr val="1A1A1A"/>
+                </a:solidFill>
+                <a:latin typeface="Manrope"/>
+                <a:rFonts ascii="Manrope" hAnsi="Manrope" cs="Manrope" eastAsia="Manrope"/>
+              </a:rPr>
+              <a:t>Себестоимость</a:t>
+            </a:r>
+          </a:p>
+          <a:p>
+            <a:pPr algn="l">
+              <a:lnSpc>
+                <a:spcPct val="118000"/>
+              </a:lnSpc>
+              <a:spcBef>
+                <a:spcPts val="0"/>
+              </a:spcBef>
+              <a:spcAft>
+                <a:spcPts val="800"/>
+              </a:spcAft>
+            </a:pPr>
+            <a:r>
+              <a:rPr sz="1500" b="0">
+                <a:solidFill>
+                  <a:srgbClr val="1A1A1A"/>
                 </a:solidFill>
                 <a:latin typeface="Golos Text"/>
                 <a:rFonts ascii="Golos Text" hAnsi="Golos Text" cs="Golos Text" eastAsia="Golos Text"/>
               </a:rPr>
-              <a:t>Прайс для отеля считаю только от этой цифры.</a:t>
-            </a:r>
-          </a:p>
-        </p:txBody>
-      </p:sp>
-      <p:sp>
-        <p:nvSpPr>
-          <p:cNvPr id="14" name="TextBox 13"/>
-          <p:cNvSpPr txBox="1"/>
-          <p:nvPr/>
-        </p:nvSpPr>
-        <p:spPr>
-          <a:xfrm>
-            <a:off x="6571335" y="1426464"/>
-            <a:ext cx="4815687" cy="4334256"/>
-          </a:xfrm>
-          <a:prstGeom prst="rect">
-            <a:avLst/>
-          </a:prstGeom>
-          <a:noFill/>
-        </p:spPr>
-        <p:txBody>
-          <a:bodyPr wrap="square" anchor="t" lIns="50800" rIns="50800" tIns="25400" bIns="25400"/>
-          <a:lstStyle/>
-          <a:p>
-            <a:pPr algn="l">
-              <a:lnSpc>
-                <a:spcPct val="118000"/>
-              </a:lnSpc>
-              <a:spcBef>
-                <a:spcPts val="0"/>
-              </a:spcBef>
-              <a:spcAft>
-                <a:spcPts val="1200"/>
+              <a:t>14 ₽ на складе в Киришах</a:t>
+            </a:r>
+          </a:p>
+          <a:p>
+            <a:pPr algn="l">
+              <a:lnSpc>
+                <a:spcPct val="118000"/>
+              </a:lnSpc>
+              <a:spcBef>
+                <a:spcPts val="0"/>
+              </a:spcBef>
+              <a:spcAft>
+                <a:spcPts val="200"/>
               </a:spcAft>
             </a:pPr>
             <a:r>
               <a:rPr sz="1500" b="1">
                 <a:solidFill>
-                  <a:srgbClr val="2A554A"/>
+                  <a:srgbClr val="1A1A1A"/>
                 </a:solidFill>
                 <a:latin typeface="Manrope"/>
                 <a:rFonts ascii="Manrope" hAnsi="Manrope" cs="Manrope" eastAsia="Manrope"/>
               </a:rPr>
-              <a:t>До цены закупщику (ориентировочно)</a:t>
+              <a:t>Рынок</a:t>
+            </a:r>
+          </a:p>
+          <a:p>
+            <a:pPr algn="l">
+              <a:lnSpc>
+                <a:spcPct val="118000"/>
+              </a:lnSpc>
+              <a:spcBef>
+                <a:spcPts val="0"/>
+              </a:spcBef>
+              <a:spcAft>
+                <a:spcPts val="800"/>
+              </a:spcAft>
+            </a:pPr>
+            <a:r>
+              <a:rPr sz="1500" b="0">
+                <a:solidFill>
+                  <a:srgbClr val="1A1A1A"/>
+                </a:solidFill>
+                <a:latin typeface="Golos Text"/>
+                <a:rFonts ascii="Golos Text" hAnsi="Golos Text" cs="Golos Text" eastAsia="Golos Text"/>
+              </a:rPr>
+              <a:t>Hotel Line 12–15 ₽ · ЕТС ~18 ₽ · Natura Siberica 30–40 ₽</a:t>
             </a:r>
           </a:p>
           <a:p>
@@ -5359,7 +5428,7 @@
                 <a:latin typeface="Manrope"/>
                 <a:rFonts ascii="Manrope" hAnsi="Manrope" cs="Manrope" eastAsia="Manrope"/>
               </a:rPr>
-              <a:t>На складе</a:t>
+              <a:t>Наценка</a:t>
             </a:r>
           </a:p>
           <a:p>
@@ -5382,7 +5451,7 @@
                 <a:latin typeface="Golos Text"/>
                 <a:rFonts ascii="Golos Text" hAnsi="Golos Text" cs="Golos Text" eastAsia="Golos Text"/>
               </a:rPr>
-              <a:t>14 ₽ за флакон</a:t>
+              <a:t>~70% к себестоимости — маржа Travel+ в коридоре рынка</a:t>
             </a:r>
           </a:p>
           <a:p>
@@ -5405,7 +5474,7 @@
                 <a:latin typeface="Manrope"/>
                 <a:rFonts ascii="Manrope" hAnsi="Manrope" cs="Manrope" eastAsia="Manrope"/>
               </a:rPr>
-              <a:t>Рынок</a:t>
+              <a:t>Цена закупщику</a:t>
             </a:r>
           </a:p>
           <a:p>
@@ -5428,7 +5497,7 @@
                 <a:latin typeface="Golos Text"/>
                 <a:rFonts ascii="Golos Text" hAnsi="Golos Text" cs="Golos Text" eastAsia="Golos Text"/>
               </a:rPr>
-              <a:t>Hotel Line 12–15 ₽ · ЕТС ~18 ₽ · Natura Siberica 30–40 ₽</a:t>
+              <a:t>14 ₽ × 1,7 ≈ 24 ₽ — выше Hotel Line, рядом с ЕТС, ниже Natura Siberica</a:t>
             </a:r>
           </a:p>
           <a:p>
@@ -5451,19 +5520,19 @@
                 <a:latin typeface="Manrope"/>
                 <a:rFonts ascii="Manrope" hAnsi="Manrope" cs="Manrope" eastAsia="Manrope"/>
               </a:rPr>
-              <a:t>Наценка</a:t>
-            </a:r>
-          </a:p>
-          <a:p>
-            <a:pPr algn="l">
-              <a:lnSpc>
-                <a:spcPct val="118000"/>
-              </a:lnSpc>
-              <a:spcBef>
-                <a:spcPts val="0"/>
-              </a:spcBef>
-              <a:spcAft>
-                <a:spcPts val="800"/>
+              <a:t>Проверка</a:t>
+            </a:r>
+          </a:p>
+          <a:p>
+            <a:pPr algn="l">
+              <a:lnSpc>
+                <a:spcPct val="118000"/>
+              </a:lnSpc>
+              <a:spcBef>
+                <a:spcPts val="0"/>
+              </a:spcBef>
+              <a:spcAft>
+                <a:spcPts val="0"/>
               </a:spcAft>
             </a:pPr>
             <a:r>
@@ -5474,99 +5543,7 @@
                 <a:latin typeface="Golos Text"/>
                 <a:rFonts ascii="Golos Text" hAnsi="Golos Text" cs="Golos Text" eastAsia="Golos Text"/>
               </a:rPr>
-              <a:t>Смотрю маржу Travel+ и коридор «между Hotel Line и Natura Siberica»</a:t>
-            </a:r>
-          </a:p>
-          <a:p>
-            <a:pPr algn="l">
-              <a:lnSpc>
-                <a:spcPct val="118000"/>
-              </a:lnSpc>
-              <a:spcBef>
-                <a:spcPts val="0"/>
-              </a:spcBef>
-              <a:spcAft>
-                <a:spcPts val="200"/>
-              </a:spcAft>
-            </a:pPr>
-            <a:r>
-              <a:rPr sz="1500" b="1">
-                <a:solidFill>
-                  <a:srgbClr val="1A1A1A"/>
-                </a:solidFill>
-                <a:latin typeface="Manrope"/>
-                <a:rFonts ascii="Manrope" hAnsi="Manrope" cs="Manrope" eastAsia="Manrope"/>
-              </a:rPr>
-              <a:t>Цена закупщику</a:t>
-            </a:r>
-          </a:p>
-          <a:p>
-            <a:pPr algn="l">
-              <a:lnSpc>
-                <a:spcPct val="118000"/>
-              </a:lnSpc>
-              <a:spcBef>
-                <a:spcPts val="0"/>
-              </a:spcBef>
-              <a:spcAft>
-                <a:spcPts val="800"/>
-              </a:spcAft>
-            </a:pPr>
-            <a:r>
-              <a:rPr sz="1500" b="0">
-                <a:solidFill>
-                  <a:srgbClr val="1A1A1A"/>
-                </a:solidFill>
-                <a:latin typeface="Golos Text"/>
-                <a:rFonts ascii="Golos Text" hAnsi="Golos Text" cs="Golos Text" eastAsia="Golos Text"/>
-              </a:rPr>
-              <a:t>Ориентир ~22–26 ₽ — выше Hotel Line, рядом с ЕТС, ниже Natura Siberica</a:t>
-            </a:r>
-          </a:p>
-          <a:p>
-            <a:pPr algn="l">
-              <a:lnSpc>
-                <a:spcPct val="118000"/>
-              </a:lnSpc>
-              <a:spcBef>
-                <a:spcPts val="0"/>
-              </a:spcBef>
-              <a:spcAft>
-                <a:spcPts val="200"/>
-              </a:spcAft>
-            </a:pPr>
-            <a:r>
-              <a:rPr sz="1500" b="1">
-                <a:solidFill>
-                  <a:srgbClr val="1A1A1A"/>
-                </a:solidFill>
-                <a:latin typeface="Manrope"/>
-                <a:rFonts ascii="Manrope" hAnsi="Manrope" cs="Manrope" eastAsia="Manrope"/>
-              </a:rPr>
-              <a:t>Проверка</a:t>
-            </a:r>
-          </a:p>
-          <a:p>
-            <a:pPr algn="l">
-              <a:lnSpc>
-                <a:spcPct val="118000"/>
-              </a:lnSpc>
-              <a:spcBef>
-                <a:spcPts val="0"/>
-              </a:spcBef>
-              <a:spcAft>
-                <a:spcPts val="0"/>
-              </a:spcAft>
-            </a:pPr>
-            <a:r>
-              <a:rPr sz="1500" b="0">
-                <a:solidFill>
-                  <a:srgbClr val="1A1A1A"/>
-                </a:solidFill>
-                <a:latin typeface="Golos Text"/>
-                <a:rFonts ascii="Golos Text" hAnsi="Golos Text" cs="Golos Text" eastAsia="Golos Text"/>
-              </a:rPr>
-              <a:t>Если наценка не держится — меняю завод или не выхожу в прайс</a:t>
+              <a:t>Наценка не держится — меняю завод или не выхожу в прайс</a:t>
             </a:r>
           </a:p>
         </p:txBody>

--- a/АК/presentation-travelplus-interview.pptx
+++ b/АК/presentation-travelplus-interview.pptx
@@ -5085,7 +5085,7 @@
                 <a:latin typeface="Golos Text"/>
                 <a:rFonts ascii="Golos Text" hAnsi="Golos Text" cs="Golos Text" eastAsia="Golos Text"/>
               </a:rPr>
-              <a:t>8 ₽ — у производителя до отправки</a:t>
+              <a:t>8 ₽ — у производителя до отправки (FOB)</a:t>
             </a:r>
           </a:p>
           <a:p>
@@ -5258,7 +5258,7 @@
                 <a:spcPts val="0"/>
               </a:spcBef>
               <a:spcAft>
-                <a:spcPts val="0"/>
+                <a:spcPts val="800"/>
               </a:spcAft>
             </a:pPr>
             <a:r>
@@ -5270,6 +5270,52 @@
                 <a:rFonts ascii="Golos Text" hAnsi="Golos Text" cs="Golos Text" eastAsia="Golos Text"/>
               </a:rPr>
               <a:t>8 + 3 + 2 + 1 = 14 ₽ за флакон</a:t>
+            </a:r>
+          </a:p>
+          <a:p>
+            <a:pPr algn="l">
+              <a:lnSpc>
+                <a:spcPct val="118000"/>
+              </a:lnSpc>
+              <a:spcBef>
+                <a:spcPts val="0"/>
+              </a:spcBef>
+              <a:spcAft>
+                <a:spcPts val="200"/>
+              </a:spcAft>
+            </a:pPr>
+            <a:r>
+              <a:rPr sz="1500" b="1">
+                <a:solidFill>
+                  <a:srgbClr val="1A1A1A"/>
+                </a:solidFill>
+                <a:latin typeface="Manrope"/>
+                <a:rFonts ascii="Manrope" hAnsi="Manrope" cs="Manrope" eastAsia="Manrope"/>
+              </a:rPr>
+              <a:t>FOB</a:t>
+            </a:r>
+          </a:p>
+          <a:p>
+            <a:pPr algn="l">
+              <a:lnSpc>
+                <a:spcPct val="118000"/>
+              </a:lnSpc>
+              <a:spcBef>
+                <a:spcPts val="0"/>
+              </a:spcBef>
+              <a:spcAft>
+                <a:spcPts val="0"/>
+              </a:spcAft>
+            </a:pPr>
+            <a:r>
+              <a:rPr sz="1500" b="0">
+                <a:solidFill>
+                  <a:srgbClr val="1A1A1A"/>
+                </a:solidFill>
+                <a:latin typeface="Golos Text"/>
+                <a:rFonts ascii="Golos Text" hAnsi="Golos Text" cs="Golos Text" eastAsia="Golos Text"/>
+              </a:rPr>
+              <a:t>Поставщиков сравниваю по цене FOB — одинаковая база, без доставки</a:t>
             </a:r>
           </a:p>
         </p:txBody>
